--- a/proposals/米倉まな_アポプラスステーション様ご提案_導入.pptx
+++ b/proposals/米倉まな_アポプラスステーション様ご提案_導入.pptx
@@ -862,7 +862,7 @@
           <a:p>
             <a:r>
               <a:rPr lang="en-US" dirty="0"/>
-              <a:t>ただ、鍼灸だけでは天井があります。国家資格者の時間が上限になるからです。そこで「ねここち」という頭をオフにする事業を始めます。1店舗あたり月次利益30万円を想定。ねここちが入口、鍼灸や医療が出口という導線をつくります。</a:t>
+              <a:t>いま「ねここち」という、頭をオフにする事業の立ち上げを準備しています。頭が考えごとで止まらない人に、強制的にオフにする時間を売る事業です。施術は鍼灸師の国家資格を持つ人が行います。医療の知識を持つ人が、治療の手前にいる層に関わる形です。治療と身構えずに入れる入口をつくって、必要な人だけを鍼灸や医療につなぐ。1店舗あたり月次利益30万円を想定しています。</a:t>
             </a:r>
             <a:endParaRPr lang="en-US" dirty="0"/>
           </a:p>
@@ -4990,13 +4990,13 @@
             <a:r>
               <a:rPr lang="en-US" sz="2800" b="1" spc="100" kern="0" dirty="0">
                 <a:solidFill>
-                  <a:srgbClr val="F3ECE0"/>
+                  <a:srgbClr val="2B2620"/>
                 </a:solidFill>
                 <a:latin typeface="游明朝" pitchFamily="34" charset="0"/>
                 <a:ea typeface="游明朝" pitchFamily="34" charset="-122"/>
                 <a:cs typeface="游明朝" pitchFamily="34" charset="-120"/>
               </a:rPr>
-              <a:t>鍼灸には天井がある。だから「頭をオフにする」事業を始めます</a:t>
+              <a:t>新規事業「ねここち」を立ち上げます</a:t>
             </a:r>
             <a:endParaRPr lang="en-US" sz="2800" dirty="0"/>
           </a:p>
@@ -5010,7 +5010,7 @@
         </p:nvSpPr>
         <p:spPr>
           <a:xfrm>
-            <a:off x="685800" y="1783080"/>
+            <a:off x="685800" y="1874520"/>
             <a:ext cx="6675120" cy="3840480"/>
           </a:xfrm>
           <a:prstGeom prst="rect">
@@ -5059,18 +5059,73 @@
                 <a:ea typeface="游ゴシック" pitchFamily="34" charset="-122"/>
                 <a:cs typeface="游ゴシック" pitchFamily="34" charset="-120"/>
               </a:rPr>
-              <a:t>／頭オフ事業。考えごとで止まらない頭を、強制的にオフにする時間を売ります。2026年 立ち上げ予定。</a:t>
+              <a:t>／頭オフ事業。考えごとで止まらない頭を、強制的にオフにする時間を売ります。いま立ち上げを準備しています。</a:t>
             </a:r>
             <a:endParaRPr lang="en-US" sz="1100" dirty="0"/>
           </a:p>
           <a:p>
             <a:pPr marL="342900" indent="-342900">
+              <a:lnSpc>
+                <a:spcPts val="1900"/>
+              </a:lnSpc>
+              <a:buSzPct val="100000"/>
+              <a:buChar char="•"/>
+            </a:pPr>
+            <a:r>
+              <a:rPr lang="en-US" sz="1100" dirty="0">
+                <a:solidFill>
+                  <a:srgbClr val="5A5249"/>
+                </a:solidFill>
+                <a:latin typeface="游ゴシック" pitchFamily="34" charset="0"/>
+                <a:ea typeface="游ゴシック" pitchFamily="34" charset="-122"/>
+                <a:cs typeface="游ゴシック" pitchFamily="34" charset="-120"/>
+              </a:rPr>
+              <a:t>施術は</a:t>
+            </a:r>
+            <a:pPr indent="0" marL="0">
+              <a:lnSpc>
+                <a:spcPts val="1900"/>
+              </a:lnSpc>
+              <a:buNone/>
+            </a:pPr>
+            <a:r>
+              <a:rPr lang="en-US" sz="1100" b="1" dirty="0">
+                <a:solidFill>
+                  <a:srgbClr val="2B2620"/>
+                </a:solidFill>
+                <a:latin typeface="游ゴシック" pitchFamily="34" charset="0"/>
+                <a:ea typeface="游ゴシック" pitchFamily="34" charset="-122"/>
+                <a:cs typeface="游ゴシック" pitchFamily="34" charset="-120"/>
+              </a:rPr>
+              <a:t>鍼灸師の国家資格を持つ人</a:t>
+            </a:r>
+            <a:pPr indent="0" marL="0">
               <a:lnSpc>
                 <a:spcPts val="1900"/>
               </a:lnSpc>
               <a:spcAft>
                 <a:spcPts val="1000"/>
               </a:spcAft>
+              <a:buNone/>
+            </a:pPr>
+            <a:r>
+              <a:rPr lang="en-US" sz="1100" dirty="0">
+                <a:solidFill>
+                  <a:srgbClr val="5A5249"/>
+                </a:solidFill>
+                <a:latin typeface="游ゴシック" pitchFamily="34" charset="0"/>
+                <a:ea typeface="游ゴシック" pitchFamily="34" charset="-122"/>
+                <a:cs typeface="游ゴシック" pitchFamily="34" charset="-120"/>
+              </a:rPr>
+              <a:t>が行います。医療の知識を持つ人が、治療の手前にいる層に関わる形です。</a:t>
+            </a:r>
+            <a:endParaRPr lang="en-US" sz="1100" dirty="0"/>
+          </a:p>
+          <a:p>
+            <a:pPr marL="342900" indent="-342900">
+              <a:lnSpc>
+                <a:spcPts val="1900"/>
+              </a:lnSpc>
               <a:buSzPct val="100000"/>
               <a:buChar char="•"/>
             </a:pPr>
@@ -5083,20 +5138,33 @@
                 <a:ea typeface="游ゴシック" pitchFamily="34" charset="-122"/>
                 <a:cs typeface="游ゴシック" pitchFamily="34" charset="-120"/>
               </a:rPr>
-              <a:t>鍼灸は国家資格者に依存し、施術者1人あたりの時間が上限になる。＝ 売上に天井がある。</a:t>
-            </a:r>
-            <a:endParaRPr lang="en-US" sz="1100" dirty="0"/>
-          </a:p>
-          <a:p>
-            <a:pPr marL="342900" indent="-342900">
+              <a:t>「治療」と身構えずに入れる入口をつくり、</a:t>
+            </a:r>
+            <a:pPr indent="0" marL="0">
+              <a:lnSpc>
+                <a:spcPts val="1900"/>
+              </a:lnSpc>
+              <a:buNone/>
+            </a:pPr>
+            <a:r>
+              <a:rPr lang="en-US" sz="1100" b="1" dirty="0">
+                <a:solidFill>
+                  <a:srgbClr val="2B2620"/>
+                </a:solidFill>
+                <a:latin typeface="游ゴシック" pitchFamily="34" charset="0"/>
+                <a:ea typeface="游ゴシック" pitchFamily="34" charset="-122"/>
+                <a:cs typeface="游ゴシック" pitchFamily="34" charset="-120"/>
+              </a:rPr>
+              <a:t>必要な人だけを鍼灸や医療につなぐ</a:t>
+            </a:r>
+            <a:pPr indent="0" marL="0">
               <a:lnSpc>
                 <a:spcPts val="1900"/>
               </a:lnSpc>
               <a:spcAft>
                 <a:spcPts val="1000"/>
               </a:spcAft>
-              <a:buSzPct val="100000"/>
-              <a:buChar char="•"/>
+              <a:buNone/>
             </a:pPr>
             <a:r>
               <a:rPr lang="en-US" sz="1100" dirty="0">
@@ -5107,48 +5175,7 @@
                 <a:ea typeface="游ゴシック" pitchFamily="34" charset="-122"/>
                 <a:cs typeface="游ゴシック" pitchFamily="34" charset="-120"/>
               </a:rPr>
-              <a:t>ねここちは資格に依存しない設計。未病層が「治療」と身構えずに入れる入口になる。</a:t>
-            </a:r>
-            <a:endParaRPr lang="en-US" sz="1100" dirty="0"/>
-          </a:p>
-          <a:p>
-            <a:pPr marL="342900" indent="-342900">
-              <a:lnSpc>
-                <a:spcPts val="1900"/>
-              </a:lnSpc>
-              <a:buSzPct val="100000"/>
-              <a:buChar char="•"/>
-            </a:pPr>
-            <a:r>
-              <a:rPr lang="en-US" sz="1100" b="1" dirty="0">
-                <a:solidFill>
-                  <a:srgbClr val="2B2620"/>
-                </a:solidFill>
-                <a:latin typeface="游ゴシック" pitchFamily="34" charset="0"/>
-                <a:ea typeface="游ゴシック" pitchFamily="34" charset="-122"/>
-                <a:cs typeface="游ゴシック" pitchFamily="34" charset="-120"/>
-              </a:rPr>
-              <a:t>入口＝ねここち／出口＝鍼灸・医療。</a:t>
-            </a:r>
-            <a:pPr indent="0" marL="0">
-              <a:lnSpc>
-                <a:spcPts val="1900"/>
-              </a:lnSpc>
-              <a:spcAft>
-                <a:spcPts val="1000"/>
-              </a:spcAft>
-              <a:buNone/>
-            </a:pPr>
-            <a:r>
-              <a:rPr lang="en-US" sz="1100" dirty="0">
-                <a:solidFill>
-                  <a:srgbClr val="5A5249"/>
-                </a:solidFill>
-                <a:latin typeface="游ゴシック" pitchFamily="34" charset="0"/>
-                <a:ea typeface="游ゴシック" pitchFamily="34" charset="-122"/>
-                <a:cs typeface="游ゴシック" pitchFamily="34" charset="-120"/>
-              </a:rPr>
-              <a:t>必要な人だけを、適切な先へ渡す導線を持てる。</a:t>
+              <a:t>。未病の層に、継続的に関わり続けるための事業です。</a:t>
             </a:r>
             <a:endParaRPr lang="en-US" sz="1100" dirty="0"/>
           </a:p>
@@ -5309,7 +5336,7 @@
                 <a:ea typeface="游ゴシック" pitchFamily="34" charset="-122"/>
                 <a:cs typeface="游ゴシック" pitchFamily="34" charset="-120"/>
               </a:rPr>
-              <a:t>想定値。多店舗展開を前提に設計しており、人と仕組みが揃えば積み上がる構造です。</a:t>
+              <a:t>想定値。多店舗展開を前提に設計しています。</a:t>
             </a:r>
             <a:endParaRPr lang="en-US" sz="950" dirty="0"/>
           </a:p>

--- a/proposals/米倉まな_アポプラスステーション様ご提案_導入.pptx
+++ b/proposals/米倉まな_アポプラスステーション様ご提案_導入.pptx
@@ -14,9 +14,10 @@
     <p:sldId id="262" r:id="rId8"/>
     <p:sldId id="263" r:id="rId9"/>
     <p:sldId id="264" r:id="rId10"/>
+    <p:sldId id="265" r:id="rId11"/>
   </p:sldIdLst>
   <p:notesMasterIdLst>
-    <p:notesMasterId r:id="rId11"/>
+    <p:notesMasterId r:id="rId12"/>
   </p:notesMasterIdLst>
   <p:sldSz cx="12192000" cy="6858000"/>
   <p:notesSz cx="6858000" cy="12192000"/>
@@ -552,6 +553,94 @@
 </p:notes>
 </file>
 
+<file path=ppt/notesSlides/notesSlide10.xml><?xml version="1.0" encoding="utf-8"?>
+<p:notes xmlns:a="http://schemas.openxmlformats.org/drawingml/2006/main" xmlns:r="http://schemas.openxmlformats.org/officeDocument/2006/relationships" xmlns:p="http://schemas.openxmlformats.org/presentationml/2006/main">
+  <p:cSld>
+    <p:spTree>
+      <p:nvGrpSpPr>
+        <p:cNvPr id="1" name=""/>
+        <p:cNvGrpSpPr/>
+        <p:nvPr/>
+      </p:nvGrpSpPr>
+      <p:grpSpPr>
+        <a:xfrm>
+          <a:off x="0" y="0"/>
+          <a:ext cx="0" cy="0"/>
+          <a:chOff x="0" y="0"/>
+          <a:chExt cx="0" cy="0"/>
+        </a:xfrm>
+      </p:grpSpPr>
+      <p:sp>
+        <p:nvSpPr>
+          <p:cNvPr id="2" name="Slide Image Placeholder 1"/>
+          <p:cNvSpPr>
+            <a:spLocks noGrp="1" noRot="1" noChangeAspect="1"/>
+          </p:cNvSpPr>
+          <p:nvPr>
+            <p:ph type="sldImg"/>
+          </p:nvPr>
+        </p:nvSpPr>
+        <p:spPr/>
+      </p:sp>
+      <p:sp>
+        <p:nvSpPr>
+          <p:cNvPr id="3" name="Notes Placeholder 2"/>
+          <p:cNvSpPr>
+            <a:spLocks noGrp="1"/>
+          </p:cNvSpPr>
+          <p:nvPr>
+            <p:ph type="body" idx="1"/>
+          </p:nvPr>
+        </p:nvSpPr>
+        <p:spPr/>
+        <p:txBody>
+          <a:bodyPr/>
+          <a:lstStyle/>
+          <a:p>
+            <a:r>
+              <a:rPr lang="en-US" dirty="0"/>
+              <a:t>本編には含めません。実績の裏取りを求められたときに、共同研究や企業連携の公開情報としてお見せする用です。</a:t>
+            </a:r>
+            <a:endParaRPr lang="en-US" dirty="0"/>
+          </a:p>
+        </p:txBody>
+      </p:sp>
+      <p:sp>
+        <p:nvSpPr>
+          <p:cNvPr id="4" name="Slide Number Placeholder 3"/>
+          <p:cNvSpPr>
+            <a:spLocks noGrp="1"/>
+          </p:cNvSpPr>
+          <p:nvPr>
+            <p:ph type="sldNum" sz="quarter" idx="10"/>
+          </p:nvPr>
+        </p:nvSpPr>
+        <p:spPr/>
+        <p:txBody>
+          <a:bodyPr/>
+          <a:lstStyle/>
+          <a:p>
+            <a:fld id="{F7021451-1387-4CA6-816F-3879F97B5CBC}" type="slidenum">
+              <a:rPr lang="en-US"/>
+              <a:t>10</a:t>
+            </a:fld>
+            <a:endParaRPr lang="en-US"/>
+          </a:p>
+        </p:txBody>
+      </p:sp>
+    </p:spTree>
+    <p:extLst>
+      <p:ext uri="{BB962C8B-B14F-4D97-AF65-F5344CB8AC3E}">
+        <p14:creationId xmlns:p14="http://schemas.microsoft.com/office/powerpoint/2010/main" val="1024086991"/>
+      </p:ext>
+    </p:extLst>
+  </p:cSld>
+  <p:clrMapOvr>
+    <a:masterClrMapping/>
+  </p:clrMapOvr>
+</p:notes>
+</file>
+
 <file path=ppt/notesSlides/notesSlide2.xml><?xml version="1.0" encoding="utf-8"?>
 <p:notes xmlns:a="http://schemas.openxmlformats.org/drawingml/2006/main" xmlns:r="http://schemas.openxmlformats.org/officeDocument/2006/relationships" xmlns:p="http://schemas.openxmlformats.org/presentationml/2006/main">
   <p:cSld>
@@ -598,7 +687,7 @@
           <a:p>
             <a:r>
               <a:rPr lang="en-US" dirty="0"/>
-              <a:t>三重で鍼灸院を11年。のべ2万人以上を診てきました。臨床だけでなく、鍼灸師の育成と、学会での研究発表も続けています。心の不調を扱う鍼灸師として、現場・人・データの3つを持っているのが私の立ち位置です。</a:t>
+              <a:t>まず、私自身の話をさせてください。私は2013年ごろまで、精神疾患の当事者でした。約8年間さまよって、病院にも通って、よくならない時期がとても長く続きました。最後に私を助けたのが鍼灸です。いまこの仕事をしているのは、そのためです。そして患者さんからいちばん多く言われるのが、「もっと早く鍼灸に出会いたかった」という言葉です。この「もっと早く」をなくすことが、私の仕事だと思っています。</a:t>
             </a:r>
             <a:endParaRPr lang="en-US" dirty="0"/>
           </a:p>
@@ -686,7 +775,7 @@
           <a:p>
             <a:r>
               <a:rPr lang="en-US" dirty="0"/>
-              <a:t>もうひとつの顔が、企業の新規事業への伴走です。パパゲーノでは認定第一号として、就労継続支援の事業に発注する側で関わりました。ファンコミュニケーションズさんのThirdTalkは、病院やカウンセリングに行く一歩手前の人のためのオンライン対話サービスで、企画段階からご相談をいただき、立ち上げを見守ってきました。stand upさんはアミューズメントの会社で、新規事業のご相談から、いまもお取引が続いています。</a:t>
+              <a:t>三重で鍼灸院を11年。のべ2万人以上を診てきました。臨床だけでなく、鍼灸師の育成と、学会での研究発表も続けています。全日本鍼灸学会と日本うつ病学会で発表し、日本精神神経学会にも登壇しました。心の不調を扱う鍼灸師として、現場・人・データの3つを持っているのが私の立ち位置です。</a:t>
             </a:r>
             <a:endParaRPr lang="en-US" dirty="0"/>
           </a:p>
@@ -774,7 +863,7 @@
           <a:p>
             <a:r>
               <a:rPr lang="en-US" dirty="0"/>
-              <a:t>ここからは、私が現場で感じていることをお話しします。左が社会の数字、右が私が院で見ていることです。精神疾患の患者は約600万人、国も2024年に初めて白書のテーマにこころの健康を据えました。私の院でも、心の不調を主訴に来られる方が明らかに増えています。2028年からは50人未満の会社にもストレスチェックが義務化されます。ただ、検査で気づいても次に行く場所がない。病院はもう新規を受けきれていません。そして損失の7.6兆円のうち7.3兆円は、出勤しているのに力が出ない人の分です。この層が、いま誰の担当にもなっていない。だから私は、未病の段階で止めたいと考えています。</a:t>
+              <a:t>もうひとつの顔が、企業の新規事業への伴走です。パパゲーノでは認定第一号として、就労継続支援の事業に発注する側で関わりました。ファンコミュニケーションズさんのThirdTalkは、病院やカウンセリングに行く一歩手前の人のためのオンライン対話サービスで、企画段階からご相談をいただき、立ち上げを見守ってきました。stand upさんはアミューズメントの会社で、新規事業のご相談から、いまもお取引が続いています。</a:t>
             </a:r>
             <a:endParaRPr lang="en-US" dirty="0"/>
           </a:p>
@@ -862,7 +951,7 @@
           <a:p>
             <a:r>
               <a:rPr lang="en-US" dirty="0"/>
-              <a:t>いま「ねここち」という、頭をオフにする事業の立ち上げを準備しています。頭が考えごとで止まらない人に、強制的にオフにする時間を売る事業です。施術は鍼灸師の国家資格を持つ人が行います。医療の知識を持つ人が、治療の手前にいる層に関わる形です。治療と身構えずに入れる入口をつくって、必要な人だけを鍼灸や医療につなぐ。1店舗あたり月次利益30万円を想定しています。</a:t>
+              <a:t>ここからは、私が現場で感じていることをお話しします。左が社会の数字、右が私が院で見ていることです。精神疾患の患者は約600万人、国も2024年に初めて白書のテーマにこころの健康を据えました。私の院でも、心の不調を主訴に来られる方が明らかに増えています。2028年からは50人未満の会社にもストレスチェックが義務化されます。ただ、検査で気づいても次に行く場所がない。病院はもう新規を受けきれていません。そして損失の7.6兆円のうち7.3兆円は、出勤しているのに力が出ない人の分です。この層が、いま誰の担当にもなっていない。だから私は、未病の段階で止めたいと考えています。</a:t>
             </a:r>
             <a:endParaRPr lang="en-US" dirty="0"/>
           </a:p>
@@ -950,7 +1039,7 @@
           <a:p>
             <a:r>
               <a:rPr lang="en-US" dirty="0"/>
-              <a:t>企業と鍼灸の組み合わせは、もう絵空事ではありません。枕で知られるブレインスリープさんは、睡眠専門の鍼灸院を自社ブランドで4店舗運営しています。有楽町マルイのように商業施設の中にも入っていて、丸井グループ側もプレスリリースを出しています。累計1万人以上が利用し、施術の効果も数字で公表し、定額プランで通い続けてもらう設計です。製品を売って終わりにせず、施術で人と関わり続けている。私がやろうとしている構造とほぼ同じで、違いは入口だけです。あの会社は睡眠から入った。私はこころから入ります。</a:t>
+              <a:t>いま「ねここち」という、頭をオフにする事業の立ち上げを準備しています。頭が考えごとで止まらない人に、強制的にオフにする時間を売る事業です。施術は鍼灸師の国家資格を持つ人が行います。医療の知識を持つ人が、治療の手前にいる層に関わる形です。治療と身構えずに入れる入口をつくって、必要な人だけを鍼灸や医療につなぐ。1店舗あたり月次利益30万円を想定しています。</a:t>
             </a:r>
             <a:endParaRPr lang="en-US" dirty="0"/>
           </a:p>
@@ -1038,7 +1127,7 @@
           <a:p>
             <a:r>
               <a:rPr lang="en-US" dirty="0"/>
-              <a:t>正直に申し上げると、いまはすべてが私に紐づいていて、1人で抱えられる量に天井があります。仕組みと人と座組みが足りない。ここは御社が最も強い領域だと考えています。</a:t>
+              <a:t>企業と鍼灸の組み合わせは、もう絵空事ではありません。枕で知られるブレインスリープさんは、睡眠専門の鍼灸院を自社ブランドで4店舗運営しています。有楽町マルイのように商業施設の中にも入っていて、丸井グループ側もプレスリリースを出しています。累計1万人以上が利用し、施術の効果も数字で公表し、定額プランで通い続けてもらう設計です。製品を売って終わりにせず、施術で人と関わり続けている。私がやろうとしている構造とほぼ同じで、違いは入口だけです。あの会社は睡眠から入った。私はこころから入ります。</a:t>
             </a:r>
             <a:endParaRPr lang="en-US" dirty="0"/>
           </a:p>
@@ -1126,7 +1215,7 @@
           <a:p>
             <a:r>
               <a:rPr lang="en-US" dirty="0"/>
-              <a:t>お願いしたいことは3つです。未病領域の新規事業の共同検討、人材・組織の知見、そして実証の場。治療が必要になる手前で、生きづらさを抱えた人を減らしたい。ぜひご一緒させてください。</a:t>
+              <a:t>正直に申し上げると、いまはすべてが私に紐づいていて、1人で抱えられる量に天井があります。仕組みと人と座組みが足りない。ここは御社が最も強い領域だと考えています。</a:t>
             </a:r>
             <a:endParaRPr lang="en-US" dirty="0"/>
           </a:p>
@@ -1214,7 +1303,7 @@
           <a:p>
             <a:r>
               <a:rPr lang="en-US" dirty="0"/>
-              <a:t>本編には含めません。実績の裏取りを求められたときに、共同研究や企業連携の公開情報としてお見せする用です。</a:t>
+              <a:t>お願いしたいことは3つです。未病領域の新規事業の共同検討、人材・組織の知見、そして実証の場。治療が必要になる手前で、生きづらさを抱えた人を減らしたい。ぜひご一緒させてください。</a:t>
             </a:r>
             <a:endParaRPr lang="en-US" dirty="0"/>
           </a:p>
@@ -2202,9 +2291,9 @@
 </p:sld>
 </file>
 
-<file path=ppt/slides/slide2.xml><?xml version="1.0" encoding="utf-8"?>
+<file path=ppt/slides/slide10.xml><?xml version="1.0" encoding="utf-8"?>
 <p:sld xmlns:a="http://schemas.openxmlformats.org/drawingml/2006/main" xmlns:r="http://schemas.openxmlformats.org/officeDocument/2006/relationships" xmlns:p="http://schemas.openxmlformats.org/presentationml/2006/main">
-  <p:cSld name="Slide 2">
+  <p:cSld name="Slide 10">
     <p:bg>
       <p:bgPr>
         <a:solidFill>
@@ -2271,21 +2360,183 @@
               <a:buNone/>
             </a:pPr>
             <a:r>
-              <a:rPr lang="en-US" sz="1000" b="1" spc="200" kern="0" dirty="0">
-                <a:solidFill>
-                  <a:srgbClr val="9C5446"/>
+              <a:rPr lang="en-US" sz="1000" spc="300" kern="0" dirty="0">
+                <a:solidFill>
+                  <a:srgbClr val="8B8175"/>
+                </a:solidFill>
+                <a:latin typeface="游ゴシック" pitchFamily="34" charset="0"/>
+                <a:ea typeface="游ゴシック" pitchFamily="34" charset="-122"/>
+                <a:cs typeface="游ゴシック" pitchFamily="34" charset="-120"/>
+              </a:rPr>
+              <a:t>APPENDIX ／ 参考</a:t>
+            </a:r>
+            <a:endParaRPr lang="en-US" sz="1000" dirty="0"/>
+          </a:p>
+        </p:txBody>
+      </p:sp>
+      <p:sp>
+        <p:nvSpPr>
+          <p:cNvPr id="4" name="Text 2"/>
+          <p:cNvSpPr txBox="1"/>
+          <p:nvPr/>
+        </p:nvSpPr>
+        <p:spPr>
+          <a:xfrm>
+            <a:off x="685800" y="841248"/>
+            <a:ext cx="10820095" cy="777240"/>
+          </a:xfrm>
+          <a:prstGeom prst="rect">
+            <a:avLst/>
+          </a:prstGeom>
+          <a:noFill/>
+          <a:ln/>
+        </p:spPr>
+        <p:txBody>
+          <a:bodyPr wrap="square" lIns="0" tIns="0" rIns="0" bIns="0" rtlCol="0" anchor="ctr"/>
+          <a:lstStyle/>
+          <a:p>
+            <a:pPr indent="0" marL="0">
+              <a:buNone/>
+            </a:pPr>
+            <a:r>
+              <a:rPr lang="en-US" sz="2800" b="1" spc="100" kern="0" dirty="0">
+                <a:solidFill>
+                  <a:srgbClr val="2B2620"/>
                 </a:solidFill>
                 <a:latin typeface="游明朝" pitchFamily="34" charset="0"/>
                 <a:ea typeface="游明朝" pitchFamily="34" charset="-122"/>
                 <a:cs typeface="游明朝" pitchFamily="34" charset="-120"/>
               </a:rPr>
-              <a:t>01   </a:t>
-            </a:r>
-            <a:pPr indent="0" marL="0">
-              <a:buNone/>
-            </a:pPr>
-            <a:r>
-              <a:rPr lang="en-US" sz="1000" spc="300" kern="0" dirty="0">
+              <a:t>公開されている実績・共同研究</a:t>
+            </a:r>
+            <a:endParaRPr lang="en-US" sz="2800" dirty="0"/>
+          </a:p>
+        </p:txBody>
+      </p:sp>
+      <p:sp>
+        <p:nvSpPr>
+          <p:cNvPr id="5" name="Shape 3"/>
+          <p:cNvSpPr/>
+          <p:nvPr/>
+        </p:nvSpPr>
+        <p:spPr>
+          <a:xfrm>
+            <a:off x="685800" y="1673352"/>
+            <a:ext cx="10820095" cy="7315"/>
+          </a:xfrm>
+          <a:prstGeom prst="rect">
+            <a:avLst/>
+          </a:prstGeom>
+          <a:solidFill>
+            <a:srgbClr val="D2C4AE"/>
+          </a:solidFill>
+          <a:ln/>
+        </p:spPr>
+      </p:sp>
+      <p:sp>
+        <p:nvSpPr>
+          <p:cNvPr id="6" name="Text 4"/>
+          <p:cNvSpPr txBox="1"/>
+          <p:nvPr/>
+        </p:nvSpPr>
+        <p:spPr>
+          <a:xfrm>
+            <a:off x="685800" y="1801368"/>
+            <a:ext cx="1005840" cy="256032"/>
+          </a:xfrm>
+          <a:prstGeom prst="rect">
+            <a:avLst/>
+          </a:prstGeom>
+          <a:noFill/>
+          <a:ln/>
+        </p:spPr>
+        <p:txBody>
+          <a:bodyPr wrap="square" lIns="0" tIns="0" rIns="0" bIns="0" rtlCol="0" anchor="ctr"/>
+          <a:lstStyle/>
+          <a:p>
+            <a:pPr indent="0" marL="0">
+              <a:buNone/>
+            </a:pPr>
+            <a:r>
+              <a:rPr lang="en-US" sz="900" b="1" spc="200" kern="0" dirty="0">
+                <a:solidFill>
+                  <a:srgbClr val="9C5446"/>
+                </a:solidFill>
+                <a:latin typeface="游ゴシック" pitchFamily="34" charset="0"/>
+                <a:ea typeface="游ゴシック" pitchFamily="34" charset="-122"/>
+                <a:cs typeface="游ゴシック" pitchFamily="34" charset="-120"/>
+              </a:rPr>
+              <a:t>共同研究</a:t>
+            </a:r>
+            <a:endParaRPr lang="en-US" sz="900" dirty="0"/>
+          </a:p>
+        </p:txBody>
+      </p:sp>
+      <p:sp>
+        <p:nvSpPr>
+          <p:cNvPr id="7" name="Text 5"/>
+          <p:cNvSpPr txBox="1"/>
+          <p:nvPr/>
+        </p:nvSpPr>
+        <p:spPr>
+          <a:xfrm>
+            <a:off x="1828800" y="1764792"/>
+            <a:ext cx="9674352" cy="274320"/>
+          </a:xfrm>
+          <a:prstGeom prst="rect">
+            <a:avLst/>
+          </a:prstGeom>
+          <a:noFill/>
+          <a:ln/>
+        </p:spPr>
+        <p:txBody>
+          <a:bodyPr wrap="square" lIns="0" tIns="0" rIns="0" bIns="0" rtlCol="0" anchor="ctr"/>
+          <a:lstStyle/>
+          <a:p>
+            <a:pPr indent="0" marL="0">
+              <a:buNone/>
+            </a:pPr>
+            <a:r>
+              <a:rPr lang="en-US" sz="1100" dirty="0">
+                <a:solidFill>
+                  <a:srgbClr val="2B2620"/>
+                </a:solidFill>
+                <a:latin typeface="游ゴシック" pitchFamily="34" charset="0"/>
+                <a:ea typeface="游ゴシック" pitchFamily="34" charset="-122"/>
+                <a:cs typeface="游ゴシック" pitchFamily="34" charset="-120"/>
+              </a:rPr>
+              <a:t>開業鍼灸院でのメンタルヘルスの可能性を検証する共同研究</a:t>
+            </a:r>
+            <a:endParaRPr lang="en-US" sz="1100" dirty="0"/>
+          </a:p>
+        </p:txBody>
+      </p:sp>
+      <p:sp>
+        <p:nvSpPr>
+          <p:cNvPr id="8" name="Text 6"/>
+          <p:cNvSpPr txBox="1"/>
+          <p:nvPr/>
+        </p:nvSpPr>
+        <p:spPr>
+          <a:xfrm>
+            <a:off x="1828800" y="2057400"/>
+            <a:ext cx="9674352" cy="274320"/>
+          </a:xfrm>
+          <a:prstGeom prst="rect">
+            <a:avLst/>
+          </a:prstGeom>
+          <a:noFill/>
+          <a:ln/>
+        </p:spPr>
+        <p:txBody>
+          <a:bodyPr wrap="square" lIns="0" tIns="0" rIns="0" bIns="0" rtlCol="0" anchor="ctr"/>
+          <a:lstStyle/>
+          <a:p>
+            <a:pPr indent="0" marL="0">
+              <a:buNone/>
+            </a:pPr>
+            <a:r>
+              <a:rPr lang="en-US" sz="900" dirty="0">
                 <a:solidFill>
                   <a:srgbClr val="8B8175"/>
                 </a:solidFill>
@@ -2293,836 +2544,1306 @@
                 <a:ea typeface="游ゴシック" pitchFamily="34" charset="-122"/>
                 <a:cs typeface="游ゴシック" pitchFamily="34" charset="-120"/>
               </a:rPr>
-              <a:t>PROFILE</a:t>
-            </a:r>
-            <a:endParaRPr lang="en-US" sz="1000" dirty="0"/>
-          </a:p>
-        </p:txBody>
-      </p:sp>
-      <p:sp>
-        <p:nvSpPr>
-          <p:cNvPr id="4" name="Text 2"/>
-          <p:cNvSpPr txBox="1"/>
-          <p:nvPr/>
-        </p:nvSpPr>
-        <p:spPr>
-          <a:xfrm>
-            <a:off x="685800" y="841248"/>
-            <a:ext cx="10820095" cy="777240"/>
-          </a:xfrm>
-          <a:prstGeom prst="rect">
-            <a:avLst/>
-          </a:prstGeom>
-          <a:noFill/>
-          <a:ln/>
-        </p:spPr>
-        <p:txBody>
-          <a:bodyPr wrap="square" lIns="0" tIns="0" rIns="0" bIns="0" rtlCol="0" anchor="ctr"/>
-          <a:lstStyle/>
-          <a:p>
-            <a:pPr indent="0" marL="0">
-              <a:buNone/>
-            </a:pPr>
-            <a:r>
-              <a:rPr lang="en-US" sz="2800" b="1" spc="100" kern="0" dirty="0">
+              <a:t>ここちめいど／東京有明医療大学／理化学研究所／ケアクル　― PR TIMES</a:t>
+            </a:r>
+            <a:endParaRPr lang="en-US" sz="900" dirty="0"/>
+          </a:p>
+        </p:txBody>
+      </p:sp>
+      <p:sp>
+        <p:nvSpPr>
+          <p:cNvPr id="9" name="Shape 7"/>
+          <p:cNvSpPr/>
+          <p:nvPr/>
+        </p:nvSpPr>
+        <p:spPr>
+          <a:xfrm>
+            <a:off x="685800" y="2404872"/>
+            <a:ext cx="10820095" cy="7315"/>
+          </a:xfrm>
+          <a:prstGeom prst="rect">
+            <a:avLst/>
+          </a:prstGeom>
+          <a:solidFill>
+            <a:srgbClr val="D2C4AE"/>
+          </a:solidFill>
+          <a:ln/>
+        </p:spPr>
+      </p:sp>
+      <p:sp>
+        <p:nvSpPr>
+          <p:cNvPr id="10" name="Text 8"/>
+          <p:cNvSpPr txBox="1"/>
+          <p:nvPr/>
+        </p:nvSpPr>
+        <p:spPr>
+          <a:xfrm>
+            <a:off x="685800" y="2532888"/>
+            <a:ext cx="1005840" cy="256032"/>
+          </a:xfrm>
+          <a:prstGeom prst="rect">
+            <a:avLst/>
+          </a:prstGeom>
+          <a:noFill/>
+          <a:ln/>
+        </p:spPr>
+        <p:txBody>
+          <a:bodyPr wrap="square" lIns="0" tIns="0" rIns="0" bIns="0" rtlCol="0" anchor="ctr"/>
+          <a:lstStyle/>
+          <a:p>
+            <a:pPr indent="0" marL="0">
+              <a:buNone/>
+            </a:pPr>
+            <a:r>
+              <a:rPr lang="en-US" sz="900" b="1" spc="200" kern="0" dirty="0">
+                <a:solidFill>
+                  <a:srgbClr val="9C5446"/>
+                </a:solidFill>
+                <a:latin typeface="游ゴシック" pitchFamily="34" charset="0"/>
+                <a:ea typeface="游ゴシック" pitchFamily="34" charset="-122"/>
+                <a:cs typeface="游ゴシック" pitchFamily="34" charset="-120"/>
+              </a:rPr>
+              <a:t>共同研究</a:t>
+            </a:r>
+            <a:endParaRPr lang="en-US" sz="900" dirty="0"/>
+          </a:p>
+        </p:txBody>
+      </p:sp>
+      <p:sp>
+        <p:nvSpPr>
+          <p:cNvPr id="11" name="Text 9"/>
+          <p:cNvSpPr txBox="1"/>
+          <p:nvPr/>
+        </p:nvSpPr>
+        <p:spPr>
+          <a:xfrm>
+            <a:off x="1828800" y="2496312"/>
+            <a:ext cx="9674352" cy="274320"/>
+          </a:xfrm>
+          <a:prstGeom prst="rect">
+            <a:avLst/>
+          </a:prstGeom>
+          <a:noFill/>
+          <a:ln/>
+        </p:spPr>
+        <p:txBody>
+          <a:bodyPr wrap="square" lIns="0" tIns="0" rIns="0" bIns="0" rtlCol="0" anchor="ctr"/>
+          <a:lstStyle/>
+          <a:p>
+            <a:pPr indent="0" marL="0">
+              <a:buNone/>
+            </a:pPr>
+            <a:r>
+              <a:rPr lang="en-US" sz="1100" dirty="0">
                 <a:solidFill>
                   <a:srgbClr val="2B2620"/>
+                </a:solidFill>
+                <a:latin typeface="游ゴシック" pitchFamily="34" charset="0"/>
+                <a:ea typeface="游ゴシック" pitchFamily="34" charset="-122"/>
+                <a:cs typeface="游ゴシック" pitchFamily="34" charset="-120"/>
+              </a:rPr>
+              <a:t>鍼灸症例データベース構築プロジェクト</a:t>
+            </a:r>
+            <a:endParaRPr lang="en-US" sz="1100" dirty="0"/>
+          </a:p>
+        </p:txBody>
+      </p:sp>
+      <p:sp>
+        <p:nvSpPr>
+          <p:cNvPr id="12" name="Text 10"/>
+          <p:cNvSpPr txBox="1"/>
+          <p:nvPr/>
+        </p:nvSpPr>
+        <p:spPr>
+          <a:xfrm>
+            <a:off x="1828800" y="2788920"/>
+            <a:ext cx="9674352" cy="274320"/>
+          </a:xfrm>
+          <a:prstGeom prst="rect">
+            <a:avLst/>
+          </a:prstGeom>
+          <a:noFill/>
+          <a:ln/>
+        </p:spPr>
+        <p:txBody>
+          <a:bodyPr wrap="square" lIns="0" tIns="0" rIns="0" bIns="0" rtlCol="0" anchor="ctr"/>
+          <a:lstStyle/>
+          <a:p>
+            <a:pPr indent="0" marL="0">
+              <a:buNone/>
+            </a:pPr>
+            <a:r>
+              <a:rPr lang="en-US" sz="900" dirty="0">
+                <a:solidFill>
+                  <a:srgbClr val="8B8175"/>
+                </a:solidFill>
+                <a:latin typeface="游ゴシック" pitchFamily="34" charset="0"/>
+                <a:ea typeface="游ゴシック" pitchFamily="34" charset="-122"/>
+                <a:cs typeface="游ゴシック" pitchFamily="34" charset="-120"/>
+              </a:rPr>
+              <a:t>ケアクル／東京有明医療大学 松浦悠人／玉川大学 柴田健一／ここちめいど 米倉まな　― PR TIMES（2025.4）</a:t>
+            </a:r>
+            <a:endParaRPr lang="en-US" sz="900" dirty="0"/>
+          </a:p>
+        </p:txBody>
+      </p:sp>
+      <p:sp>
+        <p:nvSpPr>
+          <p:cNvPr id="13" name="Shape 11"/>
+          <p:cNvSpPr/>
+          <p:nvPr/>
+        </p:nvSpPr>
+        <p:spPr>
+          <a:xfrm>
+            <a:off x="685800" y="3136392"/>
+            <a:ext cx="10820095" cy="7315"/>
+          </a:xfrm>
+          <a:prstGeom prst="rect">
+            <a:avLst/>
+          </a:prstGeom>
+          <a:solidFill>
+            <a:srgbClr val="D2C4AE"/>
+          </a:solidFill>
+          <a:ln/>
+        </p:spPr>
+      </p:sp>
+      <p:sp>
+        <p:nvSpPr>
+          <p:cNvPr id="14" name="Text 12"/>
+          <p:cNvSpPr txBox="1"/>
+          <p:nvPr/>
+        </p:nvSpPr>
+        <p:spPr>
+          <a:xfrm>
+            <a:off x="685800" y="3264408"/>
+            <a:ext cx="1005840" cy="256032"/>
+          </a:xfrm>
+          <a:prstGeom prst="rect">
+            <a:avLst/>
+          </a:prstGeom>
+          <a:noFill/>
+          <a:ln/>
+        </p:spPr>
+        <p:txBody>
+          <a:bodyPr wrap="square" lIns="0" tIns="0" rIns="0" bIns="0" rtlCol="0" anchor="ctr"/>
+          <a:lstStyle/>
+          <a:p>
+            <a:pPr indent="0" marL="0">
+              <a:buNone/>
+            </a:pPr>
+            <a:r>
+              <a:rPr lang="en-US" sz="900" b="1" spc="200" kern="0" dirty="0">
+                <a:solidFill>
+                  <a:srgbClr val="9C5446"/>
+                </a:solidFill>
+                <a:latin typeface="游ゴシック" pitchFamily="34" charset="0"/>
+                <a:ea typeface="游ゴシック" pitchFamily="34" charset="-122"/>
+                <a:cs typeface="游ゴシック" pitchFamily="34" charset="-120"/>
+              </a:rPr>
+              <a:t>企業連携</a:t>
+            </a:r>
+            <a:endParaRPr lang="en-US" sz="900" dirty="0"/>
+          </a:p>
+        </p:txBody>
+      </p:sp>
+      <p:sp>
+        <p:nvSpPr>
+          <p:cNvPr id="15" name="Text 13"/>
+          <p:cNvSpPr txBox="1"/>
+          <p:nvPr/>
+        </p:nvSpPr>
+        <p:spPr>
+          <a:xfrm>
+            <a:off x="1828800" y="3227832"/>
+            <a:ext cx="9674352" cy="274320"/>
+          </a:xfrm>
+          <a:prstGeom prst="rect">
+            <a:avLst/>
+          </a:prstGeom>
+          <a:noFill/>
+          <a:ln/>
+        </p:spPr>
+        <p:txBody>
+          <a:bodyPr wrap="square" lIns="0" tIns="0" rIns="0" bIns="0" rtlCol="0" anchor="ctr"/>
+          <a:lstStyle/>
+          <a:p>
+            <a:pPr indent="0" marL="0">
+              <a:buNone/>
+            </a:pPr>
+            <a:r>
+              <a:rPr lang="en-US" sz="1100" dirty="0">
+                <a:solidFill>
+                  <a:srgbClr val="2B2620"/>
+                </a:solidFill>
+                <a:latin typeface="游ゴシック" pitchFamily="34" charset="0"/>
+                <a:ea typeface="游ゴシック" pitchFamily="34" charset="-122"/>
+                <a:cs typeface="游ゴシック" pitchFamily="34" charset="-120"/>
+              </a:rPr>
+              <a:t>オンライン対話サービス「ThirdTalk」特別対談番組に出演</a:t>
+            </a:r>
+            <a:endParaRPr lang="en-US" sz="1100" dirty="0"/>
+          </a:p>
+        </p:txBody>
+      </p:sp>
+      <p:sp>
+        <p:nvSpPr>
+          <p:cNvPr id="16" name="Text 14"/>
+          <p:cNvSpPr txBox="1"/>
+          <p:nvPr/>
+        </p:nvSpPr>
+        <p:spPr>
+          <a:xfrm>
+            <a:off x="1828800" y="3520440"/>
+            <a:ext cx="9674352" cy="274320"/>
+          </a:xfrm>
+          <a:prstGeom prst="rect">
+            <a:avLst/>
+          </a:prstGeom>
+          <a:noFill/>
+          <a:ln/>
+        </p:spPr>
+        <p:txBody>
+          <a:bodyPr wrap="square" lIns="0" tIns="0" rIns="0" bIns="0" rtlCol="0" anchor="ctr"/>
+          <a:lstStyle/>
+          <a:p>
+            <a:pPr indent="0" marL="0">
+              <a:buNone/>
+            </a:pPr>
+            <a:r>
+              <a:rPr lang="en-US" sz="900" dirty="0">
+                <a:solidFill>
+                  <a:srgbClr val="8B8175"/>
+                </a:solidFill>
+                <a:latin typeface="游ゴシック" pitchFamily="34" charset="0"/>
+                <a:ea typeface="游ゴシック" pitchFamily="34" charset="-122"/>
+                <a:cs typeface="游ゴシック" pitchFamily="34" charset="-120"/>
+              </a:rPr>
+              <a:t>株式会社ファンコミュニケーションズ ニュースリリース（2022.8.26）</a:t>
+            </a:r>
+            <a:endParaRPr lang="en-US" sz="900" dirty="0"/>
+          </a:p>
+        </p:txBody>
+      </p:sp>
+      <p:sp>
+        <p:nvSpPr>
+          <p:cNvPr id="17" name="Shape 15"/>
+          <p:cNvSpPr/>
+          <p:nvPr/>
+        </p:nvSpPr>
+        <p:spPr>
+          <a:xfrm>
+            <a:off x="685800" y="3867912"/>
+            <a:ext cx="10820095" cy="7315"/>
+          </a:xfrm>
+          <a:prstGeom prst="rect">
+            <a:avLst/>
+          </a:prstGeom>
+          <a:solidFill>
+            <a:srgbClr val="D2C4AE"/>
+          </a:solidFill>
+          <a:ln/>
+        </p:spPr>
+      </p:sp>
+      <p:sp>
+        <p:nvSpPr>
+          <p:cNvPr id="18" name="Text 16"/>
+          <p:cNvSpPr txBox="1"/>
+          <p:nvPr/>
+        </p:nvSpPr>
+        <p:spPr>
+          <a:xfrm>
+            <a:off x="685800" y="3995928"/>
+            <a:ext cx="1005840" cy="256032"/>
+          </a:xfrm>
+          <a:prstGeom prst="rect">
+            <a:avLst/>
+          </a:prstGeom>
+          <a:noFill/>
+          <a:ln/>
+        </p:spPr>
+        <p:txBody>
+          <a:bodyPr wrap="square" lIns="0" tIns="0" rIns="0" bIns="0" rtlCol="0" anchor="ctr"/>
+          <a:lstStyle/>
+          <a:p>
+            <a:pPr indent="0" marL="0">
+              <a:buNone/>
+            </a:pPr>
+            <a:r>
+              <a:rPr lang="en-US" sz="900" b="1" spc="200" kern="0" dirty="0">
+                <a:solidFill>
+                  <a:srgbClr val="9C5446"/>
+                </a:solidFill>
+                <a:latin typeface="游ゴシック" pitchFamily="34" charset="0"/>
+                <a:ea typeface="游ゴシック" pitchFamily="34" charset="-122"/>
+                <a:cs typeface="游ゴシック" pitchFamily="34" charset="-120"/>
+              </a:rPr>
+              <a:t>社会貢献</a:t>
+            </a:r>
+            <a:endParaRPr lang="en-US" sz="900" dirty="0"/>
+          </a:p>
+        </p:txBody>
+      </p:sp>
+      <p:sp>
+        <p:nvSpPr>
+          <p:cNvPr id="19" name="Text 17"/>
+          <p:cNvSpPr txBox="1"/>
+          <p:nvPr/>
+        </p:nvSpPr>
+        <p:spPr>
+          <a:xfrm>
+            <a:off x="1828800" y="3959352"/>
+            <a:ext cx="9674352" cy="274320"/>
+          </a:xfrm>
+          <a:prstGeom prst="rect">
+            <a:avLst/>
+          </a:prstGeom>
+          <a:noFill/>
+          <a:ln/>
+        </p:spPr>
+        <p:txBody>
+          <a:bodyPr wrap="square" lIns="0" tIns="0" rIns="0" bIns="0" rtlCol="0" anchor="ctr"/>
+          <a:lstStyle/>
+          <a:p>
+            <a:pPr indent="0" marL="0">
+              <a:buNone/>
+            </a:pPr>
+            <a:r>
+              <a:rPr lang="en-US" sz="1100" dirty="0">
+                <a:solidFill>
+                  <a:srgbClr val="2B2620"/>
+                </a:solidFill>
+                <a:latin typeface="游ゴシック" pitchFamily="34" charset="0"/>
+                <a:ea typeface="游ゴシック" pitchFamily="34" charset="-122"/>
+                <a:cs typeface="游ゴシック" pitchFamily="34" charset="-120"/>
+              </a:rPr>
+              <a:t>パパゲーノ・アンバサダー認定 第一号（合同会社ここちめいど）</a:t>
+            </a:r>
+            <a:endParaRPr lang="en-US" sz="1100" dirty="0"/>
+          </a:p>
+        </p:txBody>
+      </p:sp>
+      <p:sp>
+        <p:nvSpPr>
+          <p:cNvPr id="20" name="Text 18"/>
+          <p:cNvSpPr txBox="1"/>
+          <p:nvPr/>
+        </p:nvSpPr>
+        <p:spPr>
+          <a:xfrm>
+            <a:off x="1828800" y="4251960"/>
+            <a:ext cx="9674352" cy="274320"/>
+          </a:xfrm>
+          <a:prstGeom prst="rect">
+            <a:avLst/>
+          </a:prstGeom>
+          <a:noFill/>
+          <a:ln/>
+        </p:spPr>
+        <p:txBody>
+          <a:bodyPr wrap="square" lIns="0" tIns="0" rIns="0" bIns="0" rtlCol="0" anchor="ctr"/>
+          <a:lstStyle/>
+          <a:p>
+            <a:pPr indent="0" marL="0">
+              <a:buNone/>
+            </a:pPr>
+            <a:r>
+              <a:rPr lang="en-US" sz="900" dirty="0">
+                <a:solidFill>
+                  <a:srgbClr val="8B8175"/>
+                </a:solidFill>
+                <a:latin typeface="游ゴシック" pitchFamily="34" charset="0"/>
+                <a:ea typeface="游ゴシック" pitchFamily="34" charset="-122"/>
+                <a:cs typeface="游ゴシック" pitchFamily="34" charset="-120"/>
+              </a:rPr>
+              <a:t>株式会社パパゲーノ プレスリリース</a:t>
+            </a:r>
+            <a:endParaRPr lang="en-US" sz="900" dirty="0"/>
+          </a:p>
+        </p:txBody>
+      </p:sp>
+      <p:sp>
+        <p:nvSpPr>
+          <p:cNvPr id="21" name="Shape 19"/>
+          <p:cNvSpPr/>
+          <p:nvPr/>
+        </p:nvSpPr>
+        <p:spPr>
+          <a:xfrm>
+            <a:off x="685800" y="4599432"/>
+            <a:ext cx="10820095" cy="7315"/>
+          </a:xfrm>
+          <a:prstGeom prst="rect">
+            <a:avLst/>
+          </a:prstGeom>
+          <a:solidFill>
+            <a:srgbClr val="D2C4AE"/>
+          </a:solidFill>
+          <a:ln/>
+        </p:spPr>
+      </p:sp>
+      <p:sp>
+        <p:nvSpPr>
+          <p:cNvPr id="22" name="Text 20"/>
+          <p:cNvSpPr txBox="1"/>
+          <p:nvPr/>
+        </p:nvSpPr>
+        <p:spPr>
+          <a:xfrm>
+            <a:off x="685800" y="4727448"/>
+            <a:ext cx="1005840" cy="256032"/>
+          </a:xfrm>
+          <a:prstGeom prst="rect">
+            <a:avLst/>
+          </a:prstGeom>
+          <a:noFill/>
+          <a:ln/>
+        </p:spPr>
+        <p:txBody>
+          <a:bodyPr wrap="square" lIns="0" tIns="0" rIns="0" bIns="0" rtlCol="0" anchor="ctr"/>
+          <a:lstStyle/>
+          <a:p>
+            <a:pPr indent="0" marL="0">
+              <a:buNone/>
+            </a:pPr>
+            <a:r>
+              <a:rPr lang="en-US" sz="900" b="1" spc="200" kern="0" dirty="0">
+                <a:solidFill>
+                  <a:srgbClr val="9C5446"/>
+                </a:solidFill>
+                <a:latin typeface="游ゴシック" pitchFamily="34" charset="0"/>
+                <a:ea typeface="游ゴシック" pitchFamily="34" charset="-122"/>
+                <a:cs typeface="游ゴシック" pitchFamily="34" charset="-120"/>
+              </a:rPr>
+              <a:t>寄稿</a:t>
+            </a:r>
+            <a:endParaRPr lang="en-US" sz="900" dirty="0"/>
+          </a:p>
+        </p:txBody>
+      </p:sp>
+      <p:sp>
+        <p:nvSpPr>
+          <p:cNvPr id="23" name="Text 21"/>
+          <p:cNvSpPr txBox="1"/>
+          <p:nvPr/>
+        </p:nvSpPr>
+        <p:spPr>
+          <a:xfrm>
+            <a:off x="1828800" y="4690872"/>
+            <a:ext cx="9674352" cy="274320"/>
+          </a:xfrm>
+          <a:prstGeom prst="rect">
+            <a:avLst/>
+          </a:prstGeom>
+          <a:noFill/>
+          <a:ln/>
+        </p:spPr>
+        <p:txBody>
+          <a:bodyPr wrap="square" lIns="0" tIns="0" rIns="0" bIns="0" rtlCol="0" anchor="ctr"/>
+          <a:lstStyle/>
+          <a:p>
+            <a:pPr indent="0" marL="0">
+              <a:buNone/>
+            </a:pPr>
+            <a:r>
+              <a:rPr lang="en-US" sz="1100" dirty="0">
+                <a:solidFill>
+                  <a:srgbClr val="2B2620"/>
+                </a:solidFill>
+                <a:latin typeface="游ゴシック" pitchFamily="34" charset="0"/>
+                <a:ea typeface="游ゴシック" pitchFamily="34" charset="-122"/>
+                <a:cs typeface="游ゴシック" pitchFamily="34" charset="-120"/>
+              </a:rPr>
+              <a:t>『精神看護』特集「鍼灸は、なぜ「うつ」に効くのだろうか」</a:t>
+            </a:r>
+            <a:endParaRPr lang="en-US" sz="1100" dirty="0"/>
+          </a:p>
+        </p:txBody>
+      </p:sp>
+      <p:sp>
+        <p:nvSpPr>
+          <p:cNvPr id="24" name="Text 22"/>
+          <p:cNvSpPr txBox="1"/>
+          <p:nvPr/>
+        </p:nvSpPr>
+        <p:spPr>
+          <a:xfrm>
+            <a:off x="1828800" y="4983480"/>
+            <a:ext cx="9674352" cy="274320"/>
+          </a:xfrm>
+          <a:prstGeom prst="rect">
+            <a:avLst/>
+          </a:prstGeom>
+          <a:noFill/>
+          <a:ln/>
+        </p:spPr>
+        <p:txBody>
+          <a:bodyPr wrap="square" lIns="0" tIns="0" rIns="0" bIns="0" rtlCol="0" anchor="ctr"/>
+          <a:lstStyle/>
+          <a:p>
+            <a:pPr indent="0" marL="0">
+              <a:buNone/>
+            </a:pPr>
+            <a:r>
+              <a:rPr lang="en-US" sz="900" dirty="0">
+                <a:solidFill>
+                  <a:srgbClr val="8B8175"/>
+                </a:solidFill>
+                <a:latin typeface="游ゴシック" pitchFamily="34" charset="0"/>
+                <a:ea typeface="游ゴシック" pitchFamily="34" charset="-122"/>
+                <a:cs typeface="游ゴシック" pitchFamily="34" charset="-120"/>
+              </a:rPr>
+              <a:t>医学書院　Vol.28 No.3（2025.5）／ レポート「障害と美の多様性」Vol.28 No.5（2025.9）</a:t>
+            </a:r>
+            <a:endParaRPr lang="en-US" sz="900" dirty="0"/>
+          </a:p>
+        </p:txBody>
+      </p:sp>
+      <p:sp>
+        <p:nvSpPr>
+          <p:cNvPr id="25" name="Shape 23"/>
+          <p:cNvSpPr/>
+          <p:nvPr/>
+        </p:nvSpPr>
+        <p:spPr>
+          <a:xfrm>
+            <a:off x="685800" y="5330952"/>
+            <a:ext cx="10820095" cy="7315"/>
+          </a:xfrm>
+          <a:prstGeom prst="rect">
+            <a:avLst/>
+          </a:prstGeom>
+          <a:solidFill>
+            <a:srgbClr val="D2C4AE"/>
+          </a:solidFill>
+          <a:ln/>
+        </p:spPr>
+      </p:sp>
+      <p:sp>
+        <p:nvSpPr>
+          <p:cNvPr id="26" name="Text 24"/>
+          <p:cNvSpPr txBox="1"/>
+          <p:nvPr/>
+        </p:nvSpPr>
+        <p:spPr>
+          <a:xfrm>
+            <a:off x="685800" y="5458968"/>
+            <a:ext cx="1005840" cy="256032"/>
+          </a:xfrm>
+          <a:prstGeom prst="rect">
+            <a:avLst/>
+          </a:prstGeom>
+          <a:noFill/>
+          <a:ln/>
+        </p:spPr>
+        <p:txBody>
+          <a:bodyPr wrap="square" lIns="0" tIns="0" rIns="0" bIns="0" rtlCol="0" anchor="ctr"/>
+          <a:lstStyle/>
+          <a:p>
+            <a:pPr indent="0" marL="0">
+              <a:buNone/>
+            </a:pPr>
+            <a:r>
+              <a:rPr lang="en-US" sz="900" b="1" spc="200" kern="0" dirty="0">
+                <a:solidFill>
+                  <a:srgbClr val="9C5446"/>
+                </a:solidFill>
+                <a:latin typeface="游ゴシック" pitchFamily="34" charset="0"/>
+                <a:ea typeface="游ゴシック" pitchFamily="34" charset="-122"/>
+                <a:cs typeface="游ゴシック" pitchFamily="34" charset="-120"/>
+              </a:rPr>
+              <a:t>学会</a:t>
+            </a:r>
+            <a:endParaRPr lang="en-US" sz="900" dirty="0"/>
+          </a:p>
+        </p:txBody>
+      </p:sp>
+      <p:sp>
+        <p:nvSpPr>
+          <p:cNvPr id="27" name="Text 25"/>
+          <p:cNvSpPr txBox="1"/>
+          <p:nvPr/>
+        </p:nvSpPr>
+        <p:spPr>
+          <a:xfrm>
+            <a:off x="1828800" y="5422392"/>
+            <a:ext cx="9674352" cy="274320"/>
+          </a:xfrm>
+          <a:prstGeom prst="rect">
+            <a:avLst/>
+          </a:prstGeom>
+          <a:noFill/>
+          <a:ln/>
+        </p:spPr>
+        <p:txBody>
+          <a:bodyPr wrap="square" lIns="0" tIns="0" rIns="0" bIns="0" rtlCol="0" anchor="ctr"/>
+          <a:lstStyle/>
+          <a:p>
+            <a:pPr indent="0" marL="0">
+              <a:buNone/>
+            </a:pPr>
+            <a:r>
+              <a:rPr lang="en-US" sz="1100" dirty="0">
+                <a:solidFill>
+                  <a:srgbClr val="2B2620"/>
+                </a:solidFill>
+                <a:latin typeface="游ゴシック" pitchFamily="34" charset="0"/>
+                <a:ea typeface="游ゴシック" pitchFamily="34" charset="-122"/>
+                <a:cs typeface="游ゴシック" pitchFamily="34" charset="-120"/>
+              </a:rPr>
+              <a:t>全日本鍼灸学会（2024・2025・2026）／ 日本うつ病学会（ポスター発表）／ 日本精神神経学会 鍼灸シンポジウム シンポジスト</a:t>
+            </a:r>
+            <a:endParaRPr lang="en-US" sz="1100" dirty="0"/>
+          </a:p>
+        </p:txBody>
+      </p:sp>
+      <p:sp>
+        <p:nvSpPr>
+          <p:cNvPr id="28" name="Text 26"/>
+          <p:cNvSpPr txBox="1"/>
+          <p:nvPr/>
+        </p:nvSpPr>
+        <p:spPr>
+          <a:xfrm>
+            <a:off x="1828800" y="5715000"/>
+            <a:ext cx="9674352" cy="274320"/>
+          </a:xfrm>
+          <a:prstGeom prst="rect">
+            <a:avLst/>
+          </a:prstGeom>
+          <a:noFill/>
+          <a:ln/>
+        </p:spPr>
+        <p:txBody>
+          <a:bodyPr wrap="square" lIns="0" tIns="0" rIns="0" bIns="0" rtlCol="0" anchor="ctr"/>
+          <a:lstStyle/>
+          <a:p>
+            <a:pPr indent="0" marL="0">
+              <a:buNone/>
+            </a:pPr>
+            <a:r>
+              <a:rPr lang="en-US" sz="900" dirty="0">
+                <a:solidFill>
+                  <a:srgbClr val="8B8175"/>
+                </a:solidFill>
+                <a:latin typeface="游ゴシック" pitchFamily="34" charset="0"/>
+                <a:ea typeface="游ゴシック" pitchFamily="34" charset="-122"/>
+                <a:cs typeface="游ゴシック" pitchFamily="34" charset="-120"/>
+              </a:rPr>
+              <a:t>うつと不安症状を有する患者の実態調査 第3報・第4報 ほか　― 日本精神神経学会は2026.6 登壇</a:t>
+            </a:r>
+            <a:endParaRPr lang="en-US" sz="900" dirty="0"/>
+          </a:p>
+        </p:txBody>
+      </p:sp>
+      <p:sp>
+        <p:nvSpPr>
+          <p:cNvPr id="29" name="Shape 27"/>
+          <p:cNvSpPr/>
+          <p:nvPr/>
+        </p:nvSpPr>
+        <p:spPr>
+          <a:xfrm>
+            <a:off x="685800" y="6062472"/>
+            <a:ext cx="10820095" cy="7315"/>
+          </a:xfrm>
+          <a:prstGeom prst="rect">
+            <a:avLst/>
+          </a:prstGeom>
+          <a:solidFill>
+            <a:srgbClr val="D2C4AE"/>
+          </a:solidFill>
+          <a:ln/>
+        </p:spPr>
+      </p:sp>
+      <p:sp>
+        <p:nvSpPr>
+          <p:cNvPr id="30" name="Text 28"/>
+          <p:cNvSpPr txBox="1"/>
+          <p:nvPr/>
+        </p:nvSpPr>
+        <p:spPr>
+          <a:xfrm>
+            <a:off x="7848295" y="6336792"/>
+            <a:ext cx="3657600" cy="274320"/>
+          </a:xfrm>
+          <a:prstGeom prst="rect">
+            <a:avLst/>
+          </a:prstGeom>
+          <a:noFill/>
+          <a:ln/>
+        </p:spPr>
+        <p:txBody>
+          <a:bodyPr wrap="square" lIns="0" tIns="0" rIns="0" bIns="0" rtlCol="0" anchor="ctr"/>
+          <a:lstStyle/>
+          <a:p>
+            <a:pPr algn="r" indent="0" marL="0">
+              <a:buNone/>
+            </a:pPr>
+            <a:r>
+              <a:rPr lang="en-US" sz="900" dirty="0">
+                <a:solidFill>
+                  <a:srgbClr val="8B8175"/>
+                </a:solidFill>
+                <a:latin typeface="游ゴシック" pitchFamily="34" charset="0"/>
+                <a:ea typeface="游ゴシック" pitchFamily="34" charset="-122"/>
+                <a:cs typeface="游ゴシック" pitchFamily="34" charset="-120"/>
+              </a:rPr>
+              <a:t>参考資料（本編5分には含みません）</a:t>
+            </a:r>
+            <a:endParaRPr lang="en-US" sz="900" dirty="0"/>
+          </a:p>
+        </p:txBody>
+      </p:sp>
+      <p:sp>
+        <p:nvSpPr>
+          <p:cNvPr id="31" name="Text 29"/>
+          <p:cNvSpPr txBox="1"/>
+          <p:nvPr/>
+        </p:nvSpPr>
+        <p:spPr>
+          <a:xfrm>
+            <a:off x="685800" y="6336792"/>
+            <a:ext cx="7315200" cy="274320"/>
+          </a:xfrm>
+          <a:prstGeom prst="rect">
+            <a:avLst/>
+          </a:prstGeom>
+          <a:noFill/>
+          <a:ln/>
+        </p:spPr>
+        <p:txBody>
+          <a:bodyPr wrap="square" lIns="0" tIns="0" rIns="0" bIns="0" rtlCol="0" anchor="ctr"/>
+          <a:lstStyle/>
+          <a:p>
+            <a:pPr indent="0" marL="0">
+              <a:buNone/>
+            </a:pPr>
+            <a:r>
+              <a:rPr lang="en-US" sz="900" spc="100" kern="0" dirty="0">
+                <a:solidFill>
+                  <a:srgbClr val="8B8175"/>
+                </a:solidFill>
+                <a:latin typeface="游ゴシック" pitchFamily="34" charset="0"/>
+                <a:ea typeface="游ゴシック" pitchFamily="34" charset="-122"/>
+                <a:cs typeface="游ゴシック" pitchFamily="34" charset="-120"/>
+              </a:rPr>
+              <a:t>米倉まな｜アポプラスステーション様 ご提案</a:t>
+            </a:r>
+            <a:endParaRPr lang="en-US" sz="900" dirty="0"/>
+          </a:p>
+        </p:txBody>
+      </p:sp>
+    </p:spTree>
+  </p:cSld>
+  <p:clrMapOvr>
+    <a:masterClrMapping/>
+  </p:clrMapOvr>
+</p:sld>
+</file>
+
+<file path=ppt/slides/slide2.xml><?xml version="1.0" encoding="utf-8"?>
+<p:sld xmlns:a="http://schemas.openxmlformats.org/drawingml/2006/main" xmlns:r="http://schemas.openxmlformats.org/officeDocument/2006/relationships" xmlns:p="http://schemas.openxmlformats.org/presentationml/2006/main">
+  <p:cSld name="Slide 2">
+    <p:bg>
+      <p:bgPr>
+        <a:solidFill>
+          <a:srgbClr val="2B2620"/>
+        </a:solidFill>
+      </p:bgPr>
+    </p:bg>
+    <p:spTree>
+      <p:nvGrpSpPr>
+        <p:cNvPr id="1" name=""/>
+        <p:cNvGrpSpPr/>
+        <p:nvPr/>
+      </p:nvGrpSpPr>
+      <p:grpSpPr>
+        <a:xfrm>
+          <a:off x="0" y="0"/>
+          <a:ext cx="0" cy="0"/>
+          <a:chOff x="0" y="0"/>
+          <a:chExt cx="0" cy="0"/>
+        </a:xfrm>
+      </p:grpSpPr>
+      <p:sp>
+        <p:nvSpPr>
+          <p:cNvPr id="2" name="Shape 0"/>
+          <p:cNvSpPr/>
+          <p:nvPr/>
+        </p:nvSpPr>
+        <p:spPr>
+          <a:xfrm>
+            <a:off x="685800" y="562356"/>
+            <a:ext cx="237744" cy="12802"/>
+          </a:xfrm>
+          <a:prstGeom prst="rect">
+            <a:avLst/>
+          </a:prstGeom>
+          <a:solidFill>
+            <a:srgbClr val="C97B68"/>
+          </a:solidFill>
+          <a:ln/>
+        </p:spPr>
+      </p:sp>
+      <p:sp>
+        <p:nvSpPr>
+          <p:cNvPr id="3" name="Text 1"/>
+          <p:cNvSpPr txBox="1"/>
+          <p:nvPr/>
+        </p:nvSpPr>
+        <p:spPr>
+          <a:xfrm>
+            <a:off x="996696" y="402336"/>
+            <a:ext cx="7315200" cy="310896"/>
+          </a:xfrm>
+          <a:prstGeom prst="rect">
+            <a:avLst/>
+          </a:prstGeom>
+          <a:noFill/>
+          <a:ln/>
+        </p:spPr>
+        <p:txBody>
+          <a:bodyPr wrap="square" lIns="0" tIns="0" rIns="0" bIns="0" rtlCol="0" anchor="ctr"/>
+          <a:lstStyle/>
+          <a:p>
+            <a:pPr indent="0" marL="0">
+              <a:buNone/>
+            </a:pPr>
+            <a:r>
+              <a:rPr lang="en-US" sz="1000" b="1" spc="200" kern="0" dirty="0">
+                <a:solidFill>
+                  <a:srgbClr val="C97B68"/>
                 </a:solidFill>
                 <a:latin typeface="游明朝" pitchFamily="34" charset="0"/>
                 <a:ea typeface="游明朝" pitchFamily="34" charset="-122"/>
                 <a:cs typeface="游明朝" pitchFamily="34" charset="-120"/>
               </a:rPr>
-              <a:t>臨床・育成・研究の3本を、11年まわしてきました</a:t>
-            </a:r>
-            <a:endParaRPr lang="en-US" sz="2800" dirty="0"/>
-          </a:p>
-        </p:txBody>
-      </p:sp>
-      <p:sp>
-        <p:nvSpPr>
-          <p:cNvPr id="5" name="Shape 3"/>
-          <p:cNvSpPr/>
-          <p:nvPr/>
-        </p:nvSpPr>
-        <p:spPr>
-          <a:xfrm>
-            <a:off x="685800" y="1737360"/>
-            <a:ext cx="3456432" cy="2286000"/>
-          </a:xfrm>
-          <a:prstGeom prst="roundRect">
-            <a:avLst>
-              <a:gd name="adj" fmla="val 2000"/>
-            </a:avLst>
-          </a:prstGeom>
-          <a:solidFill>
-            <a:srgbClr val="FBF6EC"/>
-          </a:solidFill>
-          <a:ln w="9525">
-            <a:solidFill>
-              <a:srgbClr val="D2C4AE"/>
-            </a:solidFill>
-            <a:prstDash val="solid"/>
-          </a:ln>
-        </p:spPr>
-      </p:sp>
-      <p:sp>
-        <p:nvSpPr>
-          <p:cNvPr id="6" name="Text 4"/>
-          <p:cNvSpPr txBox="1"/>
-          <p:nvPr/>
-        </p:nvSpPr>
-        <p:spPr>
-          <a:xfrm>
-            <a:off x="941832" y="1938528"/>
-            <a:ext cx="2944368" cy="237744"/>
-          </a:xfrm>
-          <a:prstGeom prst="rect">
-            <a:avLst/>
-          </a:prstGeom>
-          <a:noFill/>
-          <a:ln/>
-        </p:spPr>
-        <p:txBody>
-          <a:bodyPr wrap="square" lIns="0" tIns="0" rIns="0" bIns="0" rtlCol="0" anchor="ctr"/>
-          <a:lstStyle/>
-          <a:p>
-            <a:pPr indent="0" marL="0">
-              <a:buNone/>
-            </a:pPr>
-            <a:r>
-              <a:rPr lang="en-US" sz="900" b="1" spc="200" kern="0" dirty="0">
-                <a:solidFill>
-                  <a:srgbClr val="9C5446"/>
-                </a:solidFill>
-                <a:latin typeface="游ゴシック" pitchFamily="34" charset="0"/>
-                <a:ea typeface="游ゴシック" pitchFamily="34" charset="-122"/>
-                <a:cs typeface="游ゴシック" pitchFamily="34" charset="-120"/>
-              </a:rPr>
-              <a:t>臨床</a:t>
-            </a:r>
-            <a:endParaRPr lang="en-US" sz="900" dirty="0"/>
-          </a:p>
-        </p:txBody>
-      </p:sp>
-      <p:sp>
-        <p:nvSpPr>
-          <p:cNvPr id="7" name="Text 5"/>
-          <p:cNvSpPr txBox="1"/>
-          <p:nvPr/>
-        </p:nvSpPr>
-        <p:spPr>
-          <a:xfrm>
-            <a:off x="941832" y="2212848"/>
-            <a:ext cx="2944368" cy="457200"/>
-          </a:xfrm>
-          <a:prstGeom prst="rect">
-            <a:avLst/>
-          </a:prstGeom>
-          <a:noFill/>
-          <a:ln/>
-        </p:spPr>
-        <p:txBody>
-          <a:bodyPr wrap="square" lIns="0" tIns="0" rIns="0" bIns="0" rtlCol="0" anchor="t"/>
-          <a:lstStyle/>
-          <a:p>
-            <a:pPr indent="0" marL="0">
-              <a:lnSpc>
-                <a:spcPts val="2100"/>
-              </a:lnSpc>
-              <a:buNone/>
-            </a:pPr>
-            <a:r>
-              <a:rPr lang="en-US" sz="1500" b="1" dirty="0">
-                <a:solidFill>
-                  <a:srgbClr val="2B2620"/>
+              <a:t>01   </a:t>
+            </a:r>
+            <a:pPr indent="0" marL="0">
+              <a:buNone/>
+            </a:pPr>
+            <a:r>
+              <a:rPr lang="en-US" sz="1000" spc="300" kern="0" dirty="0">
+                <a:solidFill>
+                  <a:srgbClr val="BDB2A2"/>
+                </a:solidFill>
+                <a:latin typeface="游ゴシック" pitchFamily="34" charset="0"/>
+                <a:ea typeface="游ゴシック" pitchFamily="34" charset="-122"/>
+                <a:cs typeface="游ゴシック" pitchFamily="34" charset="-120"/>
+              </a:rPr>
+              <a:t>ORIGIN</a:t>
+            </a:r>
+            <a:endParaRPr lang="en-US" sz="1000" dirty="0"/>
+          </a:p>
+        </p:txBody>
+      </p:sp>
+      <p:sp>
+        <p:nvSpPr>
+          <p:cNvPr id="4" name="Text 2"/>
+          <p:cNvSpPr txBox="1"/>
+          <p:nvPr/>
+        </p:nvSpPr>
+        <p:spPr>
+          <a:xfrm>
+            <a:off x="685800" y="841248"/>
+            <a:ext cx="10820095" cy="777240"/>
+          </a:xfrm>
+          <a:prstGeom prst="rect">
+            <a:avLst/>
+          </a:prstGeom>
+          <a:noFill/>
+          <a:ln/>
+        </p:spPr>
+        <p:txBody>
+          <a:bodyPr wrap="square" lIns="0" tIns="0" rIns="0" bIns="0" rtlCol="0" anchor="ctr"/>
+          <a:lstStyle/>
+          <a:p>
+            <a:pPr indent="0" marL="0">
+              <a:buNone/>
+            </a:pPr>
+            <a:r>
+              <a:rPr lang="en-US" sz="2800" b="1" spc="100" kern="0" dirty="0">
+                <a:solidFill>
+                  <a:srgbClr val="F3ECE0"/>
                 </a:solidFill>
                 <a:latin typeface="游明朝" pitchFamily="34" charset="0"/>
                 <a:ea typeface="游明朝" pitchFamily="34" charset="-122"/>
                 <a:cs typeface="游明朝" pitchFamily="34" charset="-120"/>
               </a:rPr>
-              <a:t>はりきゅう処ここちめいど</a:t>
-            </a:r>
-            <a:endParaRPr lang="en-US" sz="1500" dirty="0"/>
-          </a:p>
-        </p:txBody>
-      </p:sp>
-      <p:sp>
-        <p:nvSpPr>
-          <p:cNvPr id="8" name="Text 6"/>
-          <p:cNvSpPr txBox="1"/>
-          <p:nvPr/>
-        </p:nvSpPr>
-        <p:spPr>
-          <a:xfrm>
-            <a:off x="941832" y="2724912"/>
-            <a:ext cx="2944368" cy="1097280"/>
-          </a:xfrm>
-          <a:prstGeom prst="rect">
-            <a:avLst/>
-          </a:prstGeom>
-          <a:noFill/>
-          <a:ln/>
-        </p:spPr>
-        <p:txBody>
-          <a:bodyPr wrap="square" lIns="0" tIns="0" rIns="0" bIns="0" rtlCol="0" anchor="t"/>
-          <a:lstStyle/>
-          <a:p>
-            <a:pPr indent="0" marL="0">
-              <a:lnSpc>
-                <a:spcPts val="1700"/>
-              </a:lnSpc>
-              <a:buNone/>
-            </a:pPr>
-            <a:r>
-              <a:rPr lang="en-US" sz="1050" dirty="0">
-                <a:solidFill>
-                  <a:srgbClr val="5A5249"/>
-                </a:solidFill>
-                <a:latin typeface="游ゴシック" pitchFamily="34" charset="0"/>
-                <a:ea typeface="游ゴシック" pitchFamily="34" charset="-122"/>
-                <a:cs typeface="游ゴシック" pitchFamily="34" charset="-120"/>
-              </a:rPr>
-              <a:t>三重県四日市市。2015年開院、夜22時まで。心の不調を主訴とする患者を中心に診ています。2026年9月に町田院を開院予定。</a:t>
-            </a:r>
-            <a:endParaRPr lang="en-US" sz="1050" dirty="0"/>
-          </a:p>
-        </p:txBody>
-      </p:sp>
-      <p:sp>
-        <p:nvSpPr>
-          <p:cNvPr id="9" name="Shape 7"/>
-          <p:cNvSpPr/>
-          <p:nvPr/>
-        </p:nvSpPr>
-        <p:spPr>
-          <a:xfrm>
-            <a:off x="4370832" y="1737360"/>
-            <a:ext cx="3456432" cy="2286000"/>
-          </a:xfrm>
-          <a:prstGeom prst="roundRect">
-            <a:avLst>
-              <a:gd name="adj" fmla="val 2000"/>
-            </a:avLst>
-          </a:prstGeom>
-          <a:solidFill>
-            <a:srgbClr val="FBF6EC"/>
-          </a:solidFill>
-          <a:ln w="9525">
-            <a:solidFill>
-              <a:srgbClr val="D2C4AE"/>
-            </a:solidFill>
-            <a:prstDash val="solid"/>
-          </a:ln>
-        </p:spPr>
-      </p:sp>
-      <p:sp>
-        <p:nvSpPr>
-          <p:cNvPr id="10" name="Text 8"/>
-          <p:cNvSpPr txBox="1"/>
-          <p:nvPr/>
-        </p:nvSpPr>
-        <p:spPr>
-          <a:xfrm>
-            <a:off x="4626864" y="1938528"/>
-            <a:ext cx="2944368" cy="237744"/>
-          </a:xfrm>
-          <a:prstGeom prst="rect">
-            <a:avLst/>
-          </a:prstGeom>
-          <a:noFill/>
-          <a:ln/>
-        </p:spPr>
-        <p:txBody>
-          <a:bodyPr wrap="square" lIns="0" tIns="0" rIns="0" bIns="0" rtlCol="0" anchor="ctr"/>
-          <a:lstStyle/>
-          <a:p>
-            <a:pPr indent="0" marL="0">
-              <a:buNone/>
-            </a:pPr>
-            <a:r>
-              <a:rPr lang="en-US" sz="900" b="1" spc="200" kern="0" dirty="0">
-                <a:solidFill>
-                  <a:srgbClr val="9C5446"/>
-                </a:solidFill>
-                <a:latin typeface="游ゴシック" pitchFamily="34" charset="0"/>
-                <a:ea typeface="游ゴシック" pitchFamily="34" charset="-122"/>
-                <a:cs typeface="游ゴシック" pitchFamily="34" charset="-120"/>
-              </a:rPr>
-              <a:t>育成・コミュニティ</a:t>
-            </a:r>
-            <a:endParaRPr lang="en-US" sz="900" dirty="0"/>
-          </a:p>
-        </p:txBody>
-      </p:sp>
-      <p:sp>
-        <p:nvSpPr>
-          <p:cNvPr id="11" name="Text 9"/>
-          <p:cNvSpPr txBox="1"/>
-          <p:nvPr/>
-        </p:nvSpPr>
-        <p:spPr>
-          <a:xfrm>
-            <a:off x="4626864" y="2212848"/>
-            <a:ext cx="2944368" cy="457200"/>
-          </a:xfrm>
-          <a:prstGeom prst="rect">
-            <a:avLst/>
-          </a:prstGeom>
-          <a:noFill/>
-          <a:ln/>
-        </p:spPr>
-        <p:txBody>
-          <a:bodyPr wrap="square" lIns="0" tIns="0" rIns="0" bIns="0" rtlCol="0" anchor="t"/>
-          <a:lstStyle/>
-          <a:p>
-            <a:pPr indent="0" marL="0">
-              <a:lnSpc>
-                <a:spcPts val="2100"/>
-              </a:lnSpc>
-              <a:buNone/>
-            </a:pPr>
-            <a:r>
-              <a:rPr lang="en-US" sz="1500" b="1" dirty="0">
-                <a:solidFill>
-                  <a:srgbClr val="2B2620"/>
+              <a:t>私は2013年ごろまで、患者の側にいました</a:t>
+            </a:r>
+            <a:endParaRPr lang="en-US" sz="2800" dirty="0"/>
+          </a:p>
+        </p:txBody>
+      </p:sp>
+      <p:sp>
+        <p:nvSpPr>
+          <p:cNvPr id="5" name="Text 3"/>
+          <p:cNvSpPr txBox="1"/>
+          <p:nvPr/>
+        </p:nvSpPr>
+        <p:spPr>
+          <a:xfrm>
+            <a:off x="685800" y="2011680"/>
+            <a:ext cx="457200" cy="365760"/>
+          </a:xfrm>
+          <a:prstGeom prst="rect">
+            <a:avLst/>
+          </a:prstGeom>
+          <a:noFill/>
+          <a:ln/>
+        </p:spPr>
+        <p:txBody>
+          <a:bodyPr wrap="square" lIns="0" tIns="0" rIns="0" bIns="0" rtlCol="0" anchor="ctr"/>
+          <a:lstStyle/>
+          <a:p>
+            <a:pPr indent="0" marL="0">
+              <a:buNone/>
+            </a:pPr>
+            <a:r>
+              <a:rPr lang="en-US" sz="1400" b="1" dirty="0">
+                <a:solidFill>
+                  <a:srgbClr val="C97B68"/>
                 </a:solidFill>
                 <a:latin typeface="游明朝" pitchFamily="34" charset="0"/>
                 <a:ea typeface="游明朝" pitchFamily="34" charset="-122"/>
                 <a:cs typeface="游明朝" pitchFamily="34" charset="-120"/>
               </a:rPr>
-              <a:t>ここちめいど／ここちはり</a:t>
-            </a:r>
-            <a:endParaRPr lang="en-US" sz="1500" dirty="0"/>
-          </a:p>
-        </p:txBody>
-      </p:sp>
-      <p:sp>
-        <p:nvSpPr>
-          <p:cNvPr id="12" name="Text 10"/>
-          <p:cNvSpPr txBox="1"/>
-          <p:nvPr/>
-        </p:nvSpPr>
-        <p:spPr>
-          <a:xfrm>
-            <a:off x="4626864" y="2724912"/>
-            <a:ext cx="2944368" cy="1097280"/>
-          </a:xfrm>
-          <a:prstGeom prst="rect">
-            <a:avLst/>
-          </a:prstGeom>
-          <a:noFill/>
-          <a:ln/>
-        </p:spPr>
-        <p:txBody>
-          <a:bodyPr wrap="square" lIns="0" tIns="0" rIns="0" bIns="0" rtlCol="0" anchor="t"/>
+              <a:t>01</a:t>
+            </a:r>
+            <a:endParaRPr lang="en-US" sz="1400" dirty="0"/>
+          </a:p>
+        </p:txBody>
+      </p:sp>
+      <p:sp>
+        <p:nvSpPr>
+          <p:cNvPr id="6" name="Text 4"/>
+          <p:cNvSpPr txBox="1"/>
+          <p:nvPr/>
+        </p:nvSpPr>
+        <p:spPr>
+          <a:xfrm>
+            <a:off x="1234440" y="2011680"/>
+            <a:ext cx="4937760" cy="685800"/>
+          </a:xfrm>
+          <a:prstGeom prst="rect">
+            <a:avLst/>
+          </a:prstGeom>
+          <a:noFill/>
+          <a:ln/>
+        </p:spPr>
+        <p:txBody>
+          <a:bodyPr wrap="square" lIns="0" tIns="0" rIns="0" bIns="0" rtlCol="0" anchor="ctr"/>
           <a:lstStyle/>
           <a:p>
             <a:pPr indent="0" marL="0">
               <a:lnSpc>
-                <a:spcPts val="1700"/>
+                <a:spcPts val="1900"/>
               </a:lnSpc>
               <a:buNone/>
             </a:pPr>
             <a:r>
-              <a:rPr lang="en-US" sz="1050" dirty="0">
-                <a:solidFill>
-                  <a:srgbClr val="5A5249"/>
-                </a:solidFill>
-                <a:latin typeface="游ゴシック" pitchFamily="34" charset="0"/>
-                <a:ea typeface="游ゴシック" pitchFamily="34" charset="-122"/>
-                <a:cs typeface="游ゴシック" pitchFamily="34" charset="-120"/>
-              </a:rPr>
-              <a:t>傾聴を学ぶ鍼灸師のオンラインサロンを2020年から主宰。2025年からは施術者育成事業を開始し、感情・心・身体・技術の4軸で指導。</a:t>
-            </a:r>
-            <a:endParaRPr lang="en-US" sz="1050" dirty="0"/>
-          </a:p>
-        </p:txBody>
-      </p:sp>
-      <p:sp>
-        <p:nvSpPr>
-          <p:cNvPr id="13" name="Shape 11"/>
-          <p:cNvSpPr/>
-          <p:nvPr/>
-        </p:nvSpPr>
-        <p:spPr>
-          <a:xfrm>
-            <a:off x="8055864" y="1737360"/>
-            <a:ext cx="3456432" cy="2286000"/>
-          </a:xfrm>
-          <a:prstGeom prst="roundRect">
-            <a:avLst>
-              <a:gd name="adj" fmla="val 2000"/>
-            </a:avLst>
-          </a:prstGeom>
-          <a:solidFill>
-            <a:srgbClr val="FBF6EC"/>
-          </a:solidFill>
-          <a:ln w="9525">
-            <a:solidFill>
-              <a:srgbClr val="D2C4AE"/>
-            </a:solidFill>
-            <a:prstDash val="solid"/>
-          </a:ln>
-        </p:spPr>
-      </p:sp>
-      <p:sp>
-        <p:nvSpPr>
-          <p:cNvPr id="14" name="Text 12"/>
-          <p:cNvSpPr txBox="1"/>
-          <p:nvPr/>
-        </p:nvSpPr>
-        <p:spPr>
-          <a:xfrm>
-            <a:off x="8311896" y="1938528"/>
-            <a:ext cx="2944368" cy="237744"/>
-          </a:xfrm>
-          <a:prstGeom prst="rect">
-            <a:avLst/>
-          </a:prstGeom>
-          <a:noFill/>
-          <a:ln/>
-        </p:spPr>
-        <p:txBody>
-          <a:bodyPr wrap="square" lIns="0" tIns="0" rIns="0" bIns="0" rtlCol="0" anchor="ctr"/>
-          <a:lstStyle/>
-          <a:p>
-            <a:pPr indent="0" marL="0">
-              <a:buNone/>
-            </a:pPr>
-            <a:r>
-              <a:rPr lang="en-US" sz="900" b="1" spc="200" kern="0" dirty="0">
-                <a:solidFill>
-                  <a:srgbClr val="9C5446"/>
-                </a:solidFill>
-                <a:latin typeface="游ゴシック" pitchFamily="34" charset="0"/>
-                <a:ea typeface="游ゴシック" pitchFamily="34" charset="-122"/>
-                <a:cs typeface="游ゴシック" pitchFamily="34" charset="-120"/>
-              </a:rPr>
-              <a:t>研究</a:t>
-            </a:r>
-            <a:endParaRPr lang="en-US" sz="900" dirty="0"/>
-          </a:p>
-        </p:txBody>
-      </p:sp>
-      <p:sp>
-        <p:nvSpPr>
-          <p:cNvPr id="15" name="Text 13"/>
-          <p:cNvSpPr txBox="1"/>
-          <p:nvPr/>
-        </p:nvSpPr>
-        <p:spPr>
-          <a:xfrm>
-            <a:off x="8311896" y="2212848"/>
-            <a:ext cx="2944368" cy="457200"/>
-          </a:xfrm>
-          <a:prstGeom prst="rect">
-            <a:avLst/>
-          </a:prstGeom>
-          <a:noFill/>
-          <a:ln/>
-        </p:spPr>
-        <p:txBody>
-          <a:bodyPr wrap="square" lIns="0" tIns="0" rIns="0" bIns="0" rtlCol="0" anchor="t"/>
-          <a:lstStyle/>
-          <a:p>
+              <a:rPr lang="en-US" sz="1150" dirty="0">
+                <a:solidFill>
+                  <a:srgbClr val="BDB2A2"/>
+                </a:solidFill>
+                <a:latin typeface="游ゴシック" pitchFamily="34" charset="0"/>
+                <a:ea typeface="游ゴシック" pitchFamily="34" charset="-122"/>
+                <a:cs typeface="游ゴシック" pitchFamily="34" charset="-120"/>
+              </a:rPr>
+              <a:t>精神疾患の当事者として、</a:t>
+            </a:r>
             <a:pPr indent="0" marL="0">
               <a:lnSpc>
-                <a:spcPts val="2100"/>
+                <a:spcPts val="1900"/>
               </a:lnSpc>
               <a:buNone/>
             </a:pPr>
             <a:r>
-              <a:rPr lang="en-US" sz="1500" b="1" dirty="0">
-                <a:solidFill>
-                  <a:srgbClr val="2B2620"/>
+              <a:rPr lang="en-US" sz="1150" b="1" dirty="0">
+                <a:solidFill>
+                  <a:srgbClr val="F3ECE0"/>
+                </a:solidFill>
+                <a:latin typeface="游ゴシック" pitchFamily="34" charset="0"/>
+                <a:ea typeface="游ゴシック" pitchFamily="34" charset="-122"/>
+                <a:cs typeface="游ゴシック" pitchFamily="34" charset="-120"/>
+              </a:rPr>
+              <a:t>約8年間さまよいました。</a:t>
+            </a:r>
+            <a:endParaRPr lang="en-US" sz="1150" dirty="0"/>
+          </a:p>
+        </p:txBody>
+      </p:sp>
+      <p:sp>
+        <p:nvSpPr>
+          <p:cNvPr id="7" name="Text 5"/>
+          <p:cNvSpPr txBox="1"/>
+          <p:nvPr/>
+        </p:nvSpPr>
+        <p:spPr>
+          <a:xfrm>
+            <a:off x="685800" y="2788920"/>
+            <a:ext cx="457200" cy="365760"/>
+          </a:xfrm>
+          <a:prstGeom prst="rect">
+            <a:avLst/>
+          </a:prstGeom>
+          <a:noFill/>
+          <a:ln/>
+        </p:spPr>
+        <p:txBody>
+          <a:bodyPr wrap="square" lIns="0" tIns="0" rIns="0" bIns="0" rtlCol="0" anchor="ctr"/>
+          <a:lstStyle/>
+          <a:p>
+            <a:pPr indent="0" marL="0">
+              <a:buNone/>
+            </a:pPr>
+            <a:r>
+              <a:rPr lang="en-US" sz="1400" b="1" dirty="0">
+                <a:solidFill>
+                  <a:srgbClr val="C97B68"/>
                 </a:solidFill>
                 <a:latin typeface="游明朝" pitchFamily="34" charset="0"/>
                 <a:ea typeface="游明朝" pitchFamily="34" charset="-122"/>
                 <a:cs typeface="游明朝" pitchFamily="34" charset="-120"/>
               </a:rPr>
-              <a:t>学会発表・産学連携</a:t>
-            </a:r>
-            <a:endParaRPr lang="en-US" sz="1500" dirty="0"/>
-          </a:p>
-        </p:txBody>
-      </p:sp>
-      <p:sp>
-        <p:nvSpPr>
-          <p:cNvPr id="16" name="Text 14"/>
-          <p:cNvSpPr txBox="1"/>
-          <p:nvPr/>
-        </p:nvSpPr>
-        <p:spPr>
-          <a:xfrm>
-            <a:off x="8311896" y="2724912"/>
-            <a:ext cx="2944368" cy="1097280"/>
-          </a:xfrm>
-          <a:prstGeom prst="rect">
-            <a:avLst/>
-          </a:prstGeom>
-          <a:noFill/>
-          <a:ln/>
-        </p:spPr>
-        <p:txBody>
-          <a:bodyPr wrap="square" lIns="0" tIns="0" rIns="0" bIns="0" rtlCol="0" anchor="t"/>
+              <a:t>02</a:t>
+            </a:r>
+            <a:endParaRPr lang="en-US" sz="1400" dirty="0"/>
+          </a:p>
+        </p:txBody>
+      </p:sp>
+      <p:sp>
+        <p:nvSpPr>
+          <p:cNvPr id="8" name="Text 6"/>
+          <p:cNvSpPr txBox="1"/>
+          <p:nvPr/>
+        </p:nvSpPr>
+        <p:spPr>
+          <a:xfrm>
+            <a:off x="1234440" y="2788920"/>
+            <a:ext cx="4937760" cy="685800"/>
+          </a:xfrm>
+          <a:prstGeom prst="rect">
+            <a:avLst/>
+          </a:prstGeom>
+          <a:noFill/>
+          <a:ln/>
+        </p:spPr>
+        <p:txBody>
+          <a:bodyPr wrap="square" lIns="0" tIns="0" rIns="0" bIns="0" rtlCol="0" anchor="ctr"/>
           <a:lstStyle/>
           <a:p>
             <a:pPr indent="0" marL="0">
               <a:lnSpc>
-                <a:spcPts val="1700"/>
+                <a:spcPts val="1900"/>
               </a:lnSpc>
               <a:buNone/>
             </a:pPr>
             <a:r>
-              <a:rPr lang="en-US" sz="1050" dirty="0">
-                <a:solidFill>
-                  <a:srgbClr val="5A5249"/>
-                </a:solidFill>
-                <a:latin typeface="游ゴシック" pitchFamily="34" charset="0"/>
-                <a:ea typeface="游ゴシック" pitchFamily="34" charset="-122"/>
-                <a:cs typeface="游ゴシック" pitchFamily="34" charset="-120"/>
-              </a:rPr>
-              <a:t>全日本鍼灸学会でうつ・不安症状の実態調査を継続報告。理化学研究所・東京有明医療大学・玉川大学・ケアクルとの共同研究に参画。</a:t>
-            </a:r>
-            <a:endParaRPr lang="en-US" sz="1050" dirty="0"/>
-          </a:p>
-        </p:txBody>
-      </p:sp>
-      <p:sp>
-        <p:nvSpPr>
-          <p:cNvPr id="17" name="Shape 15"/>
-          <p:cNvSpPr/>
-          <p:nvPr/>
-        </p:nvSpPr>
-        <p:spPr>
-          <a:xfrm>
-            <a:off x="685800" y="4434840"/>
-            <a:ext cx="10820095" cy="7315"/>
-          </a:xfrm>
-          <a:prstGeom prst="rect">
-            <a:avLst/>
-          </a:prstGeom>
-          <a:solidFill>
-            <a:srgbClr val="D2C4AE"/>
-          </a:solidFill>
-          <a:ln/>
-        </p:spPr>
-      </p:sp>
-      <p:sp>
-        <p:nvSpPr>
-          <p:cNvPr id="18" name="Text 16"/>
-          <p:cNvSpPr txBox="1"/>
-          <p:nvPr/>
-        </p:nvSpPr>
-        <p:spPr>
-          <a:xfrm>
-            <a:off x="685800" y="4617720"/>
-            <a:ext cx="2522144" cy="548640"/>
-          </a:xfrm>
-          <a:prstGeom prst="rect">
-            <a:avLst/>
-          </a:prstGeom>
-          <a:noFill/>
-          <a:ln/>
-        </p:spPr>
-        <p:txBody>
-          <a:bodyPr wrap="square" lIns="0" tIns="0" rIns="0" bIns="0" rtlCol="0" anchor="ctr"/>
-          <a:lstStyle/>
-          <a:p>
-            <a:pPr indent="0" marL="0">
-              <a:buNone/>
-            </a:pPr>
-            <a:r>
-              <a:rPr lang="en-US" sz="2600" b="1" dirty="0">
-                <a:solidFill>
-                  <a:srgbClr val="2B2620"/>
+              <a:rPr lang="en-US" sz="1150" dirty="0">
+                <a:solidFill>
+                  <a:srgbClr val="BDB2A2"/>
+                </a:solidFill>
+                <a:latin typeface="游ゴシック" pitchFamily="34" charset="0"/>
+                <a:ea typeface="游ゴシック" pitchFamily="34" charset="-122"/>
+                <a:cs typeface="游ゴシック" pitchFamily="34" charset="-120"/>
+              </a:rPr>
+              <a:t>病院にも通いました。よくならない時期が、とても長く続きました。</a:t>
+            </a:r>
+            <a:endParaRPr lang="en-US" sz="1150" dirty="0"/>
+          </a:p>
+        </p:txBody>
+      </p:sp>
+      <p:sp>
+        <p:nvSpPr>
+          <p:cNvPr id="9" name="Text 7"/>
+          <p:cNvSpPr txBox="1"/>
+          <p:nvPr/>
+        </p:nvSpPr>
+        <p:spPr>
+          <a:xfrm>
+            <a:off x="685800" y="3566160"/>
+            <a:ext cx="457200" cy="365760"/>
+          </a:xfrm>
+          <a:prstGeom prst="rect">
+            <a:avLst/>
+          </a:prstGeom>
+          <a:noFill/>
+          <a:ln/>
+        </p:spPr>
+        <p:txBody>
+          <a:bodyPr wrap="square" lIns="0" tIns="0" rIns="0" bIns="0" rtlCol="0" anchor="ctr"/>
+          <a:lstStyle/>
+          <a:p>
+            <a:pPr indent="0" marL="0">
+              <a:buNone/>
+            </a:pPr>
+            <a:r>
+              <a:rPr lang="en-US" sz="1400" b="1" dirty="0">
+                <a:solidFill>
+                  <a:srgbClr val="C97B68"/>
                 </a:solidFill>
                 <a:latin typeface="游明朝" pitchFamily="34" charset="0"/>
                 <a:ea typeface="游明朝" pitchFamily="34" charset="-122"/>
                 <a:cs typeface="游明朝" pitchFamily="34" charset="-120"/>
               </a:rPr>
-              <a:t>11年目</a:t>
-            </a:r>
-            <a:endParaRPr lang="en-US" sz="2600" dirty="0"/>
-          </a:p>
-        </p:txBody>
-      </p:sp>
-      <p:sp>
-        <p:nvSpPr>
-          <p:cNvPr id="19" name="Text 17"/>
-          <p:cNvSpPr txBox="1"/>
-          <p:nvPr/>
-        </p:nvSpPr>
-        <p:spPr>
-          <a:xfrm>
-            <a:off x="685800" y="5193792"/>
-            <a:ext cx="2522144" cy="274320"/>
-          </a:xfrm>
-          <a:prstGeom prst="rect">
-            <a:avLst/>
-          </a:prstGeom>
-          <a:noFill/>
-          <a:ln/>
-        </p:spPr>
-        <p:txBody>
-          <a:bodyPr wrap="square" lIns="0" tIns="0" rIns="0" bIns="0" rtlCol="0" anchor="ctr"/>
-          <a:lstStyle/>
-          <a:p>
-            <a:pPr indent="0" marL="0">
-              <a:buNone/>
-            </a:pPr>
-            <a:r>
-              <a:rPr lang="en-US" sz="950" spc="100" kern="0" dirty="0">
-                <a:solidFill>
-                  <a:srgbClr val="8B8175"/>
-                </a:solidFill>
-                <a:latin typeface="游ゴシック" pitchFamily="34" charset="0"/>
-                <a:ea typeface="游ゴシック" pitchFamily="34" charset="-122"/>
-                <a:cs typeface="游ゴシック" pitchFamily="34" charset="-120"/>
-              </a:rPr>
-              <a:t>鍼灸院 開業</a:t>
-            </a:r>
-            <a:endParaRPr lang="en-US" sz="950" dirty="0"/>
-          </a:p>
-        </p:txBody>
-      </p:sp>
-      <p:sp>
-        <p:nvSpPr>
-          <p:cNvPr id="20" name="Text 18"/>
-          <p:cNvSpPr txBox="1"/>
-          <p:nvPr/>
-        </p:nvSpPr>
-        <p:spPr>
-          <a:xfrm>
-            <a:off x="3390824" y="4617720"/>
-            <a:ext cx="2522144" cy="548640"/>
-          </a:xfrm>
-          <a:prstGeom prst="rect">
-            <a:avLst/>
-          </a:prstGeom>
-          <a:noFill/>
-          <a:ln/>
-        </p:spPr>
-        <p:txBody>
-          <a:bodyPr wrap="square" lIns="0" tIns="0" rIns="0" bIns="0" rtlCol="0" anchor="ctr"/>
-          <a:lstStyle/>
-          <a:p>
-            <a:pPr indent="0" marL="0">
-              <a:buNone/>
-            </a:pPr>
-            <a:r>
-              <a:rPr lang="en-US" sz="2600" b="1" dirty="0">
-                <a:solidFill>
-                  <a:srgbClr val="2B2620"/>
+              <a:t>03</a:t>
+            </a:r>
+            <a:endParaRPr lang="en-US" sz="1400" dirty="0"/>
+          </a:p>
+        </p:txBody>
+      </p:sp>
+      <p:sp>
+        <p:nvSpPr>
+          <p:cNvPr id="10" name="Text 8"/>
+          <p:cNvSpPr txBox="1"/>
+          <p:nvPr/>
+        </p:nvSpPr>
+        <p:spPr>
+          <a:xfrm>
+            <a:off x="1234440" y="3566160"/>
+            <a:ext cx="4937760" cy="685800"/>
+          </a:xfrm>
+          <a:prstGeom prst="rect">
+            <a:avLst/>
+          </a:prstGeom>
+          <a:noFill/>
+          <a:ln/>
+        </p:spPr>
+        <p:txBody>
+          <a:bodyPr wrap="square" lIns="0" tIns="0" rIns="0" bIns="0" rtlCol="0" anchor="ctr"/>
+          <a:lstStyle/>
+          <a:p>
+            <a:pPr indent="0" marL="0">
+              <a:lnSpc>
+                <a:spcPts val="1900"/>
+              </a:lnSpc>
+              <a:buNone/>
+            </a:pPr>
+            <a:r>
+              <a:rPr lang="en-US" sz="1150" dirty="0">
+                <a:solidFill>
+                  <a:srgbClr val="BDB2A2"/>
+                </a:solidFill>
+                <a:latin typeface="游ゴシック" pitchFamily="34" charset="0"/>
+                <a:ea typeface="游ゴシック" pitchFamily="34" charset="-122"/>
+                <a:cs typeface="游ゴシック" pitchFamily="34" charset="-120"/>
+              </a:rPr>
+              <a:t>最後に私を助けたのが、鍼灸でした。いまこの仕事をしているのは、そのためです。</a:t>
+            </a:r>
+            <a:endParaRPr lang="en-US" sz="1150" dirty="0"/>
+          </a:p>
+        </p:txBody>
+      </p:sp>
+      <p:sp>
+        <p:nvSpPr>
+          <p:cNvPr id="11" name="Text 9"/>
+          <p:cNvSpPr txBox="1"/>
+          <p:nvPr/>
+        </p:nvSpPr>
+        <p:spPr>
+          <a:xfrm>
+            <a:off x="6583680" y="1965960"/>
+            <a:ext cx="4919472" cy="1371600"/>
+          </a:xfrm>
+          <a:prstGeom prst="rect">
+            <a:avLst/>
+          </a:prstGeom>
+          <a:noFill/>
+          <a:ln/>
+        </p:spPr>
+        <p:txBody>
+          <a:bodyPr wrap="square" lIns="0" tIns="0" rIns="0" bIns="0" rtlCol="0" anchor="t"/>
+          <a:lstStyle/>
+          <a:p>
+            <a:pPr indent="0" marL="0">
+              <a:lnSpc>
+                <a:spcPts val="4000"/>
+              </a:lnSpc>
+              <a:buNone/>
+            </a:pPr>
+            <a:r>
+              <a:rPr lang="en-US" sz="2400" b="1" dirty="0">
+                <a:solidFill>
+                  <a:srgbClr val="F3ECE0"/>
                 </a:solidFill>
                 <a:latin typeface="游明朝" pitchFamily="34" charset="0"/>
                 <a:ea typeface="游明朝" pitchFamily="34" charset="-122"/>
                 <a:cs typeface="游明朝" pitchFamily="34" charset="-120"/>
               </a:rPr>
-              <a:t>20,000人+</a:t>
-            </a:r>
-            <a:endParaRPr lang="en-US" sz="2600" dirty="0"/>
-          </a:p>
-        </p:txBody>
-      </p:sp>
-      <p:sp>
-        <p:nvSpPr>
-          <p:cNvPr id="21" name="Text 19"/>
-          <p:cNvSpPr txBox="1"/>
-          <p:nvPr/>
-        </p:nvSpPr>
-        <p:spPr>
-          <a:xfrm>
-            <a:off x="3390824" y="5193792"/>
-            <a:ext cx="2522144" cy="274320"/>
-          </a:xfrm>
-          <a:prstGeom prst="rect">
-            <a:avLst/>
-          </a:prstGeom>
-          <a:noFill/>
-          <a:ln/>
-        </p:spPr>
-        <p:txBody>
-          <a:bodyPr wrap="square" lIns="0" tIns="0" rIns="0" bIns="0" rtlCol="0" anchor="ctr"/>
-          <a:lstStyle/>
-          <a:p>
-            <a:pPr indent="0" marL="0">
-              <a:buNone/>
-            </a:pPr>
-            <a:r>
-              <a:rPr lang="en-US" sz="950" spc="100" kern="0" dirty="0">
-                <a:solidFill>
-                  <a:srgbClr val="8B8175"/>
-                </a:solidFill>
-                <a:latin typeface="游ゴシック" pitchFamily="34" charset="0"/>
-                <a:ea typeface="游ゴシック" pitchFamily="34" charset="-122"/>
-                <a:cs typeface="游ゴシック" pitchFamily="34" charset="-120"/>
-              </a:rPr>
-              <a:t>のべ臨床患者数</a:t>
-            </a:r>
-            <a:endParaRPr lang="en-US" sz="950" dirty="0"/>
-          </a:p>
-        </p:txBody>
-      </p:sp>
-      <p:sp>
-        <p:nvSpPr>
-          <p:cNvPr id="22" name="Text 20"/>
-          <p:cNvSpPr txBox="1"/>
-          <p:nvPr/>
-        </p:nvSpPr>
-        <p:spPr>
-          <a:xfrm>
-            <a:off x="6095848" y="4617720"/>
-            <a:ext cx="2522144" cy="548640"/>
-          </a:xfrm>
-          <a:prstGeom prst="rect">
-            <a:avLst/>
-          </a:prstGeom>
-          <a:noFill/>
-          <a:ln/>
-        </p:spPr>
-        <p:txBody>
-          <a:bodyPr wrap="square" lIns="0" tIns="0" rIns="0" bIns="0" rtlCol="0" anchor="ctr"/>
-          <a:lstStyle/>
-          <a:p>
-            <a:pPr indent="0" marL="0">
-              <a:buNone/>
-            </a:pPr>
-            <a:r>
-              <a:rPr lang="en-US" sz="2600" b="1" dirty="0">
-                <a:solidFill>
-                  <a:srgbClr val="2B2620"/>
+              <a:t>「もっと早く、</a:t>
+            </a:r>
+            <a:endParaRPr lang="en-US" sz="2400" dirty="0"/>
+          </a:p>
+          <a:p>
+            <a:pPr indent="0" marL="0">
+              <a:lnSpc>
+                <a:spcPts val="4000"/>
+              </a:lnSpc>
+              <a:buNone/>
+            </a:pPr>
+            <a:r>
+              <a:rPr lang="en-US" sz="2400" b="1" dirty="0">
+                <a:solidFill>
+                  <a:srgbClr val="F3ECE0"/>
                 </a:solidFill>
                 <a:latin typeface="游明朝" pitchFamily="34" charset="0"/>
                 <a:ea typeface="游明朝" pitchFamily="34" charset="-122"/>
                 <a:cs typeface="游明朝" pitchFamily="34" charset="-120"/>
               </a:rPr>
-              <a:t>3年連続</a:t>
-            </a:r>
-            <a:endParaRPr lang="en-US" sz="2600" dirty="0"/>
-          </a:p>
-        </p:txBody>
-      </p:sp>
-      <p:sp>
-        <p:nvSpPr>
-          <p:cNvPr id="23" name="Text 21"/>
-          <p:cNvSpPr txBox="1"/>
-          <p:nvPr/>
-        </p:nvSpPr>
-        <p:spPr>
-          <a:xfrm>
-            <a:off x="6095848" y="5193792"/>
-            <a:ext cx="2522144" cy="274320"/>
-          </a:xfrm>
-          <a:prstGeom prst="rect">
-            <a:avLst/>
-          </a:prstGeom>
-          <a:noFill/>
-          <a:ln/>
-        </p:spPr>
-        <p:txBody>
-          <a:bodyPr wrap="square" lIns="0" tIns="0" rIns="0" bIns="0" rtlCol="0" anchor="ctr"/>
-          <a:lstStyle/>
-          <a:p>
-            <a:pPr indent="0" marL="0">
-              <a:buNone/>
-            </a:pPr>
-            <a:r>
-              <a:rPr lang="en-US" sz="950" spc="100" kern="0" dirty="0">
-                <a:solidFill>
-                  <a:srgbClr val="8B8175"/>
-                </a:solidFill>
-                <a:latin typeface="游ゴシック" pitchFamily="34" charset="0"/>
-                <a:ea typeface="游ゴシック" pitchFamily="34" charset="-122"/>
-                <a:cs typeface="游ゴシック" pitchFamily="34" charset="-120"/>
-              </a:rPr>
-              <a:t>全日本鍼灸学会 発表</a:t>
-            </a:r>
-            <a:endParaRPr lang="en-US" sz="950" dirty="0"/>
-          </a:p>
-        </p:txBody>
-      </p:sp>
-      <p:sp>
-        <p:nvSpPr>
-          <p:cNvPr id="24" name="Text 22"/>
-          <p:cNvSpPr txBox="1"/>
-          <p:nvPr/>
-        </p:nvSpPr>
-        <p:spPr>
-          <a:xfrm>
-            <a:off x="8800871" y="4617720"/>
-            <a:ext cx="2522144" cy="548640"/>
-          </a:xfrm>
-          <a:prstGeom prst="rect">
-            <a:avLst/>
-          </a:prstGeom>
-          <a:noFill/>
-          <a:ln/>
-        </p:spPr>
-        <p:txBody>
-          <a:bodyPr wrap="square" lIns="0" tIns="0" rIns="0" bIns="0" rtlCol="0" anchor="ctr"/>
-          <a:lstStyle/>
-          <a:p>
-            <a:pPr indent="0" marL="0">
-              <a:buNone/>
-            </a:pPr>
-            <a:r>
-              <a:rPr lang="en-US" sz="2600" b="1" dirty="0">
-                <a:solidFill>
-                  <a:srgbClr val="2B2620"/>
-                </a:solidFill>
-                <a:latin typeface="游明朝" pitchFamily="34" charset="0"/>
-                <a:ea typeface="游明朝" pitchFamily="34" charset="-122"/>
-                <a:cs typeface="游明朝" pitchFamily="34" charset="-120"/>
-              </a:rPr>
-              <a:t>修士</a:t>
-            </a:r>
-            <a:endParaRPr lang="en-US" sz="2600" dirty="0"/>
-          </a:p>
-        </p:txBody>
-      </p:sp>
-      <p:sp>
-        <p:nvSpPr>
-          <p:cNvPr id="25" name="Text 23"/>
-          <p:cNvSpPr txBox="1"/>
-          <p:nvPr/>
-        </p:nvSpPr>
-        <p:spPr>
-          <a:xfrm>
-            <a:off x="8800871" y="5193792"/>
-            <a:ext cx="2522144" cy="274320"/>
-          </a:xfrm>
-          <a:prstGeom prst="rect">
-            <a:avLst/>
-          </a:prstGeom>
-          <a:noFill/>
-          <a:ln/>
-        </p:spPr>
-        <p:txBody>
-          <a:bodyPr wrap="square" lIns="0" tIns="0" rIns="0" bIns="0" rtlCol="0" anchor="ctr"/>
-          <a:lstStyle/>
-          <a:p>
-            <a:pPr indent="0" marL="0">
-              <a:buNone/>
-            </a:pPr>
-            <a:r>
-              <a:rPr lang="en-US" sz="950" spc="100" kern="0" dirty="0">
-                <a:solidFill>
-                  <a:srgbClr val="8B8175"/>
-                </a:solidFill>
-                <a:latin typeface="游ゴシック" pitchFamily="34" charset="0"/>
-                <a:ea typeface="游ゴシック" pitchFamily="34" charset="-122"/>
-                <a:cs typeface="游ゴシック" pitchFamily="34" charset="-120"/>
-              </a:rPr>
-              <a:t>武蔵野大学大学院 人間学</a:t>
-            </a:r>
-            <a:endParaRPr lang="en-US" sz="950" dirty="0"/>
-          </a:p>
-        </p:txBody>
-      </p:sp>
-      <p:sp>
-        <p:nvSpPr>
-          <p:cNvPr id="26" name="Text 24"/>
+              <a:t>鍼灸に出会いたかった」</a:t>
+            </a:r>
+            <a:endParaRPr lang="en-US" sz="2400" dirty="0"/>
+          </a:p>
+        </p:txBody>
+      </p:sp>
+      <p:sp>
+        <p:nvSpPr>
+          <p:cNvPr id="12" name="Text 10"/>
+          <p:cNvSpPr txBox="1"/>
+          <p:nvPr/>
+        </p:nvSpPr>
+        <p:spPr>
+          <a:xfrm>
+            <a:off x="6583680" y="3520440"/>
+            <a:ext cx="4919472" cy="914400"/>
+          </a:xfrm>
+          <a:prstGeom prst="rect">
+            <a:avLst/>
+          </a:prstGeom>
+          <a:noFill/>
+          <a:ln/>
+        </p:spPr>
+        <p:txBody>
+          <a:bodyPr wrap="square" lIns="0" tIns="0" rIns="0" bIns="0" rtlCol="0" anchor="t"/>
+          <a:lstStyle/>
+          <a:p>
+            <a:pPr indent="0" marL="0">
+              <a:lnSpc>
+                <a:spcPts val="1900"/>
+              </a:lnSpc>
+              <a:buNone/>
+            </a:pPr>
+            <a:r>
+              <a:rPr lang="en-US" sz="1100" dirty="0">
+                <a:solidFill>
+                  <a:srgbClr val="BDB2A2"/>
+                </a:solidFill>
+                <a:latin typeface="游ゴシック" pitchFamily="34" charset="0"/>
+                <a:ea typeface="游ゴシック" pitchFamily="34" charset="-122"/>
+                <a:cs typeface="游ゴシック" pitchFamily="34" charset="-120"/>
+              </a:rPr>
+              <a:t>患者さんから、いちばん多く言われる言葉です。この「もっと早く」をなくすことが、私の仕事だと思っています。</a:t>
+            </a:r>
+            <a:endParaRPr lang="en-US" sz="1100" dirty="0"/>
+          </a:p>
+        </p:txBody>
+      </p:sp>
+      <p:sp>
+        <p:nvSpPr>
+          <p:cNvPr id="13" name="Text 11"/>
           <p:cNvSpPr txBox="1"/>
           <p:nvPr/>
         </p:nvSpPr>
@@ -3147,7 +3868,7 @@
             <a:r>
               <a:rPr lang="en-US" sz="900" spc="100" kern="0" dirty="0">
                 <a:solidFill>
-                  <a:srgbClr val="8B8175"/>
+                  <a:srgbClr val="BDB2A2"/>
                 </a:solidFill>
                 <a:latin typeface="游ゴシック" pitchFamily="34" charset="0"/>
                 <a:ea typeface="游ゴシック" pitchFamily="34" charset="-122"/>
@@ -3161,7 +3882,7 @@
       </p:sp>
       <p:sp>
         <p:nvSpPr>
-          <p:cNvPr id="27" name="Text 25"/>
+          <p:cNvPr id="14" name="Text 12"/>
           <p:cNvSpPr txBox="1"/>
           <p:nvPr/>
         </p:nvSpPr>
@@ -3186,13 +3907,13 @@
             <a:r>
               <a:rPr lang="en-US" sz="900" dirty="0">
                 <a:solidFill>
-                  <a:srgbClr val="8B8175"/>
-                </a:solidFill>
-                <a:latin typeface="游ゴシック" pitchFamily="34" charset="0"/>
-                <a:ea typeface="游ゴシック" pitchFamily="34" charset="-122"/>
-                <a:cs typeface="游ゴシック" pitchFamily="34" charset="-120"/>
-              </a:rPr>
-              <a:t>0:20 → 1:00</a:t>
+                  <a:srgbClr val="BDB2A2"/>
+                </a:solidFill>
+                <a:latin typeface="游ゴシック" pitchFamily="34" charset="0"/>
+                <a:ea typeface="游ゴシック" pitchFamily="34" charset="-122"/>
+                <a:cs typeface="游ゴシック" pitchFamily="34" charset="-120"/>
+              </a:rPr>
+              <a:t>0:20 → 0:55</a:t>
             </a:r>
             <a:endParaRPr lang="en-US" sz="900" dirty="0"/>
           </a:p>
@@ -3297,7 +4018,7 @@
                 <a:ea typeface="游ゴシック" pitchFamily="34" charset="-122"/>
                 <a:cs typeface="游ゴシック" pitchFamily="34" charset="-120"/>
               </a:rPr>
-              <a:t>STRENGTH</a:t>
+              <a:t>PROFILE</a:t>
             </a:r>
             <a:endParaRPr lang="en-US" sz="1000" dirty="0"/>
           </a:p>
@@ -3336,7 +4057,7 @@
                 <a:ea typeface="游明朝" pitchFamily="34" charset="-122"/>
                 <a:cs typeface="游明朝" pitchFamily="34" charset="-120"/>
               </a:rPr>
-              <a:t>企業の新規事業に、専門家として入ってきました</a:t>
+              <a:t>臨床・育成・研究の3本を、11年まわしてきました</a:t>
             </a:r>
             <a:endParaRPr lang="en-US" sz="2800" dirty="0"/>
           </a:p>
@@ -3351,11 +4072,11 @@
         <p:spPr>
           <a:xfrm>
             <a:off x="685800" y="1737360"/>
-            <a:ext cx="3456432" cy="2423160"/>
+            <a:ext cx="3456432" cy="2286000"/>
           </a:xfrm>
           <a:prstGeom prst="roundRect">
             <a:avLst>
-              <a:gd name="adj" fmla="val 1887"/>
+              <a:gd name="adj" fmla="val 2000"/>
             </a:avLst>
           </a:prstGeom>
           <a:solidFill>
@@ -3402,7 +4123,7 @@
                 <a:ea typeface="游ゴシック" pitchFamily="34" charset="-122"/>
                 <a:cs typeface="游ゴシック" pitchFamily="34" charset="-120"/>
               </a:rPr>
-              <a:t>パパゲーノ</a:t>
+              <a:t>臨床</a:t>
             </a:r>
             <a:endParaRPr lang="en-US" sz="900" dirty="0"/>
           </a:p>
@@ -3444,7 +4165,7 @@
                 <a:ea typeface="游明朝" pitchFamily="34" charset="-122"/>
                 <a:cs typeface="游明朝" pitchFamily="34" charset="-120"/>
               </a:rPr>
-              <a:t>アンバサダー認定 第一号</a:t>
+              <a:t>はりきゅう処ここちめいど</a:t>
             </a:r>
             <a:endParaRPr lang="en-US" sz="1500" dirty="0"/>
           </a:p>
@@ -3459,7 +4180,7 @@
         <p:spPr>
           <a:xfrm>
             <a:off x="941832" y="2724912"/>
-            <a:ext cx="2944368" cy="1234440"/>
+            <a:ext cx="2944368" cy="1097280"/>
           </a:xfrm>
           <a:prstGeom prst="rect">
             <a:avLst/>
@@ -3486,7 +4207,7 @@
                 <a:ea typeface="游ゴシック" pitchFamily="34" charset="-122"/>
                 <a:cs typeface="游ゴシック" pitchFamily="34" charset="-120"/>
               </a:rPr>
-              <a:t>就労継続支援B型「パパゲーノ Work &amp; Recovery」への発注を通じ、精神障害のある方が担う事業に伴走。認定制度の第一号企業です。</a:t>
+              <a:t>三重県四日市市。2015年開院、夜22時まで。心の不調を主訴とする患者を中心に診ています。2026年9月に町田院を開院予定。</a:t>
             </a:r>
             <a:endParaRPr lang="en-US" sz="1050" dirty="0"/>
           </a:p>
@@ -3501,11 +4222,11 @@
         <p:spPr>
           <a:xfrm>
             <a:off x="4370832" y="1737360"/>
-            <a:ext cx="3456432" cy="2423160"/>
+            <a:ext cx="3456432" cy="2286000"/>
           </a:xfrm>
           <a:prstGeom prst="roundRect">
             <a:avLst>
-              <a:gd name="adj" fmla="val 1887"/>
+              <a:gd name="adj" fmla="val 2000"/>
             </a:avLst>
           </a:prstGeom>
           <a:solidFill>
@@ -3552,7 +4273,7 @@
                 <a:ea typeface="游ゴシック" pitchFamily="34" charset="-122"/>
                 <a:cs typeface="游ゴシック" pitchFamily="34" charset="-120"/>
               </a:rPr>
-              <a:t>ファンコミュニケーションズ</a:t>
+              <a:t>育成・コミュニティ</a:t>
             </a:r>
             <a:endParaRPr lang="en-US" sz="900" dirty="0"/>
           </a:p>
@@ -3594,7 +4315,7 @@
                 <a:ea typeface="游明朝" pitchFamily="34" charset="-122"/>
                 <a:cs typeface="游明朝" pitchFamily="34" charset="-120"/>
               </a:rPr>
-              <a:t>ThirdTalk（サードトーク）</a:t>
+              <a:t>ここちめいど／ここちはり</a:t>
             </a:r>
             <a:endParaRPr lang="en-US" sz="1500" dirty="0"/>
           </a:p>
@@ -3609,7 +4330,7 @@
         <p:spPr>
           <a:xfrm>
             <a:off x="4626864" y="2724912"/>
-            <a:ext cx="2944368" cy="1234440"/>
+            <a:ext cx="2944368" cy="1097280"/>
           </a:xfrm>
           <a:prstGeom prst="rect">
             <a:avLst/>
@@ -3636,7 +4357,7 @@
                 <a:ea typeface="游ゴシック" pitchFamily="34" charset="-122"/>
                 <a:cs typeface="游ゴシック" pitchFamily="34" charset="-120"/>
               </a:rPr>
-              <a:t>「病院やカウンセリングに行く、その一歩手前」を想定したオンライン対話サービス。企画段階からご相談をいただき、立ち上げを見守ってきました。</a:t>
+              <a:t>傾聴を学ぶ鍼灸師のオンラインサロンを2020年から主宰。2025年からは施術者育成事業を開始し、感情・心・身体・技術の4軸で指導。</a:t>
             </a:r>
             <a:endParaRPr lang="en-US" sz="1050" dirty="0"/>
           </a:p>
@@ -3651,11 +4372,11 @@
         <p:spPr>
           <a:xfrm>
             <a:off x="8055864" y="1737360"/>
-            <a:ext cx="3456432" cy="2423160"/>
+            <a:ext cx="3456432" cy="2286000"/>
           </a:xfrm>
           <a:prstGeom prst="roundRect">
             <a:avLst>
-              <a:gd name="adj" fmla="val 1887"/>
+              <a:gd name="adj" fmla="val 2000"/>
             </a:avLst>
           </a:prstGeom>
           <a:solidFill>
@@ -3702,7 +4423,7 @@
                 <a:ea typeface="游ゴシック" pitchFamily="34" charset="-122"/>
                 <a:cs typeface="游ゴシック" pitchFamily="34" charset="-120"/>
               </a:rPr>
-              <a:t>stand up</a:t>
+              <a:t>研究</a:t>
             </a:r>
             <a:endParaRPr lang="en-US" sz="900" dirty="0"/>
           </a:p>
@@ -3744,7 +4465,7 @@
                 <a:ea typeface="游明朝" pitchFamily="34" charset="-122"/>
                 <a:cs typeface="游明朝" pitchFamily="34" charset="-120"/>
               </a:rPr>
-              <a:t>アミューズメント事業</a:t>
+              <a:t>学会発表・産学連携</a:t>
             </a:r>
             <a:endParaRPr lang="en-US" sz="1500" dirty="0"/>
           </a:p>
@@ -3759,7 +4480,7 @@
         <p:spPr>
           <a:xfrm>
             <a:off x="8311896" y="2724912"/>
-            <a:ext cx="2944368" cy="1234440"/>
+            <a:ext cx="2944368" cy="1097280"/>
           </a:xfrm>
           <a:prstGeom prst="rect">
             <a:avLst/>
@@ -3786,7 +4507,7 @@
                 <a:ea typeface="游ゴシック" pitchFamily="34" charset="-122"/>
                 <a:cs typeface="游ゴシック" pitchFamily="34" charset="-120"/>
               </a:rPr>
-              <a:t>新規事業の立ち上げについてご相談をいただき、現在もお取引が続いています。医療以外の業種でも、人の状態を扱う事業の設計に入ってきました。</a:t>
+              <a:t>全日本鍼灸学会・日本うつ病学会で継続的に発表し、日本精神神経学会にも登壇。理化学研究所・東京有明医療大学・玉川大学・ケアクルとの共同研究に参画。</a:t>
             </a:r>
             <a:endParaRPr lang="en-US" sz="1050" dirty="0"/>
           </a:p>
@@ -3800,23 +4521,16 @@
         </p:nvSpPr>
         <p:spPr>
           <a:xfrm>
-            <a:off x="685800" y="4370832"/>
-            <a:ext cx="10820095" cy="1371600"/>
-          </a:xfrm>
-          <a:prstGeom prst="roundRect">
-            <a:avLst>
-              <a:gd name="adj" fmla="val 3333"/>
-            </a:avLst>
+            <a:off x="685800" y="4434840"/>
+            <a:ext cx="10820095" cy="7315"/>
+          </a:xfrm>
+          <a:prstGeom prst="rect">
+            <a:avLst/>
           </a:prstGeom>
           <a:solidFill>
-            <a:srgbClr val="FBF6EC"/>
+            <a:srgbClr val="D2C4AE"/>
           </a:solidFill>
-          <a:ln w="9525">
-            <a:solidFill>
-              <a:srgbClr val="5E7060"/>
-            </a:solidFill>
-            <a:prstDash val="solid"/>
-          </a:ln>
+          <a:ln/>
         </p:spPr>
       </p:sp>
       <p:sp>
@@ -3827,34 +4541,34 @@
         </p:nvSpPr>
         <p:spPr>
           <a:xfrm>
-            <a:off x="960120" y="4572000"/>
-            <a:ext cx="10271455" cy="237744"/>
-          </a:xfrm>
-          <a:prstGeom prst="rect">
-            <a:avLst/>
-          </a:prstGeom>
-          <a:noFill/>
-          <a:ln/>
-        </p:spPr>
-        <p:txBody>
-          <a:bodyPr wrap="square" lIns="0" tIns="0" rIns="0" bIns="0" rtlCol="0" anchor="ctr"/>
-          <a:lstStyle/>
-          <a:p>
-            <a:pPr indent="0" marL="0">
-              <a:buNone/>
-            </a:pPr>
-            <a:r>
-              <a:rPr lang="en-US" sz="900" b="1" spc="200" kern="0" dirty="0">
-                <a:solidFill>
-                  <a:srgbClr val="5E7060"/>
-                </a:solidFill>
-                <a:latin typeface="游ゴシック" pitchFamily="34" charset="0"/>
-                <a:ea typeface="游ゴシック" pitchFamily="34" charset="-122"/>
-                <a:cs typeface="游ゴシック" pitchFamily="34" charset="-120"/>
-              </a:rPr>
-              <a:t>共通してやってきたこと</a:t>
-            </a:r>
-            <a:endParaRPr lang="en-US" sz="900" dirty="0"/>
+            <a:off x="685800" y="4617720"/>
+            <a:ext cx="2522144" cy="548640"/>
+          </a:xfrm>
+          <a:prstGeom prst="rect">
+            <a:avLst/>
+          </a:prstGeom>
+          <a:noFill/>
+          <a:ln/>
+        </p:spPr>
+        <p:txBody>
+          <a:bodyPr wrap="square" lIns="0" tIns="0" rIns="0" bIns="0" rtlCol="0" anchor="ctr"/>
+          <a:lstStyle/>
+          <a:p>
+            <a:pPr indent="0" marL="0">
+              <a:buNone/>
+            </a:pPr>
+            <a:r>
+              <a:rPr lang="en-US" sz="2600" b="1" dirty="0">
+                <a:solidFill>
+                  <a:srgbClr val="2B2620"/>
+                </a:solidFill>
+                <a:latin typeface="游明朝" pitchFamily="34" charset="0"/>
+                <a:ea typeface="游明朝" pitchFamily="34" charset="-122"/>
+                <a:cs typeface="游明朝" pitchFamily="34" charset="-120"/>
+              </a:rPr>
+              <a:t>11年目</a:t>
+            </a:r>
+            <a:endParaRPr lang="en-US" sz="2600" dirty="0"/>
           </a:p>
         </p:txBody>
       </p:sp>
@@ -3866,103 +4580,102 @@
         </p:nvSpPr>
         <p:spPr>
           <a:xfrm>
-            <a:off x="960120" y="4882896"/>
-            <a:ext cx="10271455" cy="640080"/>
-          </a:xfrm>
-          <a:prstGeom prst="rect">
-            <a:avLst/>
-          </a:prstGeom>
-          <a:noFill/>
-          <a:ln/>
-        </p:spPr>
-        <p:txBody>
-          <a:bodyPr wrap="square" lIns="0" tIns="0" rIns="0" bIns="0" rtlCol="0" anchor="t"/>
-          <a:lstStyle/>
-          <a:p>
-            <a:pPr indent="0" marL="0">
-              <a:lnSpc>
-                <a:spcPts val="1900"/>
-              </a:lnSpc>
-              <a:buNone/>
-            </a:pPr>
-            <a:r>
-              <a:rPr lang="en-US" sz="1100" dirty="0">
-                <a:solidFill>
-                  <a:srgbClr val="5A5249"/>
-                </a:solidFill>
-                <a:latin typeface="游ゴシック" pitchFamily="34" charset="0"/>
-                <a:ea typeface="游ゴシック" pitchFamily="34" charset="-122"/>
-                <a:cs typeface="游ゴシック" pitchFamily="34" charset="-120"/>
-              </a:rPr>
-              <a:t>心の不調を抱えた人が、実際にどこで止まり、どこで動くのか。その一次情報を事業の言葉に翻訳するのが私の役割です。なかでもThirdTalkは、このあとお話しする</a:t>
-            </a:r>
-            <a:pPr indent="0" marL="0">
-              <a:lnSpc>
-                <a:spcPts val="1900"/>
-              </a:lnSpc>
-              <a:buNone/>
-            </a:pPr>
-            <a:r>
-              <a:rPr lang="en-US" sz="1100" b="1" dirty="0">
+            <a:off x="685800" y="5193792"/>
+            <a:ext cx="2522144" cy="274320"/>
+          </a:xfrm>
+          <a:prstGeom prst="rect">
+            <a:avLst/>
+          </a:prstGeom>
+          <a:noFill/>
+          <a:ln/>
+        </p:spPr>
+        <p:txBody>
+          <a:bodyPr wrap="square" lIns="0" tIns="0" rIns="0" bIns="0" rtlCol="0" anchor="ctr"/>
+          <a:lstStyle/>
+          <a:p>
+            <a:pPr indent="0" marL="0">
+              <a:buNone/>
+            </a:pPr>
+            <a:r>
+              <a:rPr lang="en-US" sz="950" spc="100" kern="0" dirty="0">
+                <a:solidFill>
+                  <a:srgbClr val="8B8175"/>
+                </a:solidFill>
+                <a:latin typeface="游ゴシック" pitchFamily="34" charset="0"/>
+                <a:ea typeface="游ゴシック" pitchFamily="34" charset="-122"/>
+                <a:cs typeface="游ゴシック" pitchFamily="34" charset="-120"/>
+              </a:rPr>
+              <a:t>鍼灸院 開業</a:t>
+            </a:r>
+            <a:endParaRPr lang="en-US" sz="950" dirty="0"/>
+          </a:p>
+        </p:txBody>
+      </p:sp>
+      <p:sp>
+        <p:nvSpPr>
+          <p:cNvPr id="20" name="Text 18"/>
+          <p:cNvSpPr txBox="1"/>
+          <p:nvPr/>
+        </p:nvSpPr>
+        <p:spPr>
+          <a:xfrm>
+            <a:off x="3390824" y="4617720"/>
+            <a:ext cx="2522144" cy="548640"/>
+          </a:xfrm>
+          <a:prstGeom prst="rect">
+            <a:avLst/>
+          </a:prstGeom>
+          <a:noFill/>
+          <a:ln/>
+        </p:spPr>
+        <p:txBody>
+          <a:bodyPr wrap="square" lIns="0" tIns="0" rIns="0" bIns="0" rtlCol="0" anchor="ctr"/>
+          <a:lstStyle/>
+          <a:p>
+            <a:pPr indent="0" marL="0">
+              <a:buNone/>
+            </a:pPr>
+            <a:r>
+              <a:rPr lang="en-US" sz="2600" b="1" dirty="0">
                 <a:solidFill>
                   <a:srgbClr val="2B2620"/>
                 </a:solidFill>
-                <a:latin typeface="游ゴシック" pitchFamily="34" charset="0"/>
-                <a:ea typeface="游ゴシック" pitchFamily="34" charset="-122"/>
-                <a:cs typeface="游ゴシック" pitchFamily="34" charset="-120"/>
-              </a:rPr>
-              <a:t>「病院の一歩手前」という発想を、そのまま事業にしたもの</a:t>
-            </a:r>
-            <a:pPr indent="0" marL="0">
-              <a:lnSpc>
-                <a:spcPts val="1900"/>
-              </a:lnSpc>
-              <a:buNone/>
-            </a:pPr>
-            <a:r>
-              <a:rPr lang="en-US" sz="1100" dirty="0">
-                <a:solidFill>
-                  <a:srgbClr val="5A5249"/>
-                </a:solidFill>
-                <a:latin typeface="游ゴシック" pitchFamily="34" charset="0"/>
-                <a:ea typeface="游ゴシック" pitchFamily="34" charset="-122"/>
-                <a:cs typeface="游ゴシック" pitchFamily="34" charset="-120"/>
-              </a:rPr>
-              <a:t>でした。</a:t>
-            </a:r>
-            <a:endParaRPr lang="en-US" sz="1100" dirty="0"/>
-          </a:p>
-        </p:txBody>
-      </p:sp>
-      <p:sp>
-        <p:nvSpPr>
-          <p:cNvPr id="20" name="Text 18"/>
-          <p:cNvSpPr txBox="1"/>
-          <p:nvPr/>
-        </p:nvSpPr>
-        <p:spPr>
-          <a:xfrm>
-            <a:off x="685800" y="5870448"/>
-            <a:ext cx="10820095" cy="329184"/>
-          </a:xfrm>
-          <a:prstGeom prst="rect">
-            <a:avLst/>
-          </a:prstGeom>
-          <a:noFill/>
-          <a:ln/>
-        </p:spPr>
-        <p:txBody>
-          <a:bodyPr wrap="square" lIns="0" tIns="0" rIns="0" bIns="0" rtlCol="0" anchor="t"/>
-          <a:lstStyle/>
-          <a:p>
-            <a:pPr indent="0" marL="0">
-              <a:lnSpc>
-                <a:spcPts val="1100"/>
-              </a:lnSpc>
-              <a:buNone/>
-            </a:pPr>
-            <a:r>
-              <a:rPr lang="en-US" sz="750" dirty="0">
+                <a:latin typeface="游明朝" pitchFamily="34" charset="0"/>
+                <a:ea typeface="游明朝" pitchFamily="34" charset="-122"/>
+                <a:cs typeface="游明朝" pitchFamily="34" charset="-120"/>
+              </a:rPr>
+              <a:t>20,000人+</a:t>
+            </a:r>
+            <a:endParaRPr lang="en-US" sz="2600" dirty="0"/>
+          </a:p>
+        </p:txBody>
+      </p:sp>
+      <p:sp>
+        <p:nvSpPr>
+          <p:cNvPr id="21" name="Text 19"/>
+          <p:cNvSpPr txBox="1"/>
+          <p:nvPr/>
+        </p:nvSpPr>
+        <p:spPr>
+          <a:xfrm>
+            <a:off x="3390824" y="5193792"/>
+            <a:ext cx="2522144" cy="274320"/>
+          </a:xfrm>
+          <a:prstGeom prst="rect">
+            <a:avLst/>
+          </a:prstGeom>
+          <a:noFill/>
+          <a:ln/>
+        </p:spPr>
+        <p:txBody>
+          <a:bodyPr wrap="square" lIns="0" tIns="0" rIns="0" bIns="0" rtlCol="0" anchor="ctr"/>
+          <a:lstStyle/>
+          <a:p>
+            <a:pPr indent="0" marL="0">
+              <a:buNone/>
+            </a:pPr>
+            <a:r>
+              <a:rPr lang="en-US" sz="950" spc="100" kern="0" dirty="0">
                 <a:solidFill>
                   <a:srgbClr val="8B8175"/>
                 </a:solidFill>
@@ -3970,15 +4683,171 @@
                 <a:ea typeface="游ゴシック" pitchFamily="34" charset="-122"/>
                 <a:cs typeface="游ゴシック" pitchFamily="34" charset="-120"/>
               </a:rPr>
-              <a:t>出典：株式会社ファンコミュニケーションズ ニュースリリース（2022.8.26）／株式会社パパゲーノ プレスリリース</a:t>
-            </a:r>
-            <a:endParaRPr lang="en-US" sz="750" dirty="0"/>
-          </a:p>
-        </p:txBody>
-      </p:sp>
-      <p:sp>
-        <p:nvSpPr>
-          <p:cNvPr id="21" name="Text 19"/>
+              <a:t>のべ臨床患者数</a:t>
+            </a:r>
+            <a:endParaRPr lang="en-US" sz="950" dirty="0"/>
+          </a:p>
+        </p:txBody>
+      </p:sp>
+      <p:sp>
+        <p:nvSpPr>
+          <p:cNvPr id="22" name="Text 20"/>
+          <p:cNvSpPr txBox="1"/>
+          <p:nvPr/>
+        </p:nvSpPr>
+        <p:spPr>
+          <a:xfrm>
+            <a:off x="6095848" y="4617720"/>
+            <a:ext cx="2522144" cy="548640"/>
+          </a:xfrm>
+          <a:prstGeom prst="rect">
+            <a:avLst/>
+          </a:prstGeom>
+          <a:noFill/>
+          <a:ln/>
+        </p:spPr>
+        <p:txBody>
+          <a:bodyPr wrap="square" lIns="0" tIns="0" rIns="0" bIns="0" rtlCol="0" anchor="ctr"/>
+          <a:lstStyle/>
+          <a:p>
+            <a:pPr indent="0" marL="0">
+              <a:buNone/>
+            </a:pPr>
+            <a:r>
+              <a:rPr lang="en-US" sz="2600" b="1" dirty="0">
+                <a:solidFill>
+                  <a:srgbClr val="2B2620"/>
+                </a:solidFill>
+                <a:latin typeface="游明朝" pitchFamily="34" charset="0"/>
+                <a:ea typeface="游明朝" pitchFamily="34" charset="-122"/>
+                <a:cs typeface="游明朝" pitchFamily="34" charset="-120"/>
+              </a:rPr>
+              <a:t>3学会</a:t>
+            </a:r>
+            <a:endParaRPr lang="en-US" sz="2600" dirty="0"/>
+          </a:p>
+        </p:txBody>
+      </p:sp>
+      <p:sp>
+        <p:nvSpPr>
+          <p:cNvPr id="23" name="Text 21"/>
+          <p:cNvSpPr txBox="1"/>
+          <p:nvPr/>
+        </p:nvSpPr>
+        <p:spPr>
+          <a:xfrm>
+            <a:off x="6095848" y="5193792"/>
+            <a:ext cx="2522144" cy="274320"/>
+          </a:xfrm>
+          <a:prstGeom prst="rect">
+            <a:avLst/>
+          </a:prstGeom>
+          <a:noFill/>
+          <a:ln/>
+        </p:spPr>
+        <p:txBody>
+          <a:bodyPr wrap="square" lIns="0" tIns="0" rIns="0" bIns="0" rtlCol="0" anchor="ctr"/>
+          <a:lstStyle/>
+          <a:p>
+            <a:pPr indent="0" marL="0">
+              <a:buNone/>
+            </a:pPr>
+            <a:r>
+              <a:rPr lang="en-US" sz="950" spc="100" kern="0" dirty="0">
+                <a:solidFill>
+                  <a:srgbClr val="8B8175"/>
+                </a:solidFill>
+                <a:latin typeface="游ゴシック" pitchFamily="34" charset="0"/>
+                <a:ea typeface="游ゴシック" pitchFamily="34" charset="-122"/>
+                <a:cs typeface="游ゴシック" pitchFamily="34" charset="-120"/>
+              </a:rPr>
+              <a:t>発表・登壇</a:t>
+            </a:r>
+            <a:endParaRPr lang="en-US" sz="950" dirty="0"/>
+          </a:p>
+        </p:txBody>
+      </p:sp>
+      <p:sp>
+        <p:nvSpPr>
+          <p:cNvPr id="24" name="Text 22"/>
+          <p:cNvSpPr txBox="1"/>
+          <p:nvPr/>
+        </p:nvSpPr>
+        <p:spPr>
+          <a:xfrm>
+            <a:off x="8800871" y="4617720"/>
+            <a:ext cx="2522144" cy="548640"/>
+          </a:xfrm>
+          <a:prstGeom prst="rect">
+            <a:avLst/>
+          </a:prstGeom>
+          <a:noFill/>
+          <a:ln/>
+        </p:spPr>
+        <p:txBody>
+          <a:bodyPr wrap="square" lIns="0" tIns="0" rIns="0" bIns="0" rtlCol="0" anchor="ctr"/>
+          <a:lstStyle/>
+          <a:p>
+            <a:pPr indent="0" marL="0">
+              <a:buNone/>
+            </a:pPr>
+            <a:r>
+              <a:rPr lang="en-US" sz="2600" b="1" dirty="0">
+                <a:solidFill>
+                  <a:srgbClr val="2B2620"/>
+                </a:solidFill>
+                <a:latin typeface="游明朝" pitchFamily="34" charset="0"/>
+                <a:ea typeface="游明朝" pitchFamily="34" charset="-122"/>
+                <a:cs typeface="游明朝" pitchFamily="34" charset="-120"/>
+              </a:rPr>
+              <a:t>修士</a:t>
+            </a:r>
+            <a:endParaRPr lang="en-US" sz="2600" dirty="0"/>
+          </a:p>
+        </p:txBody>
+      </p:sp>
+      <p:sp>
+        <p:nvSpPr>
+          <p:cNvPr id="25" name="Text 23"/>
+          <p:cNvSpPr txBox="1"/>
+          <p:nvPr/>
+        </p:nvSpPr>
+        <p:spPr>
+          <a:xfrm>
+            <a:off x="8800871" y="5193792"/>
+            <a:ext cx="2522144" cy="274320"/>
+          </a:xfrm>
+          <a:prstGeom prst="rect">
+            <a:avLst/>
+          </a:prstGeom>
+          <a:noFill/>
+          <a:ln/>
+        </p:spPr>
+        <p:txBody>
+          <a:bodyPr wrap="square" lIns="0" tIns="0" rIns="0" bIns="0" rtlCol="0" anchor="ctr"/>
+          <a:lstStyle/>
+          <a:p>
+            <a:pPr indent="0" marL="0">
+              <a:buNone/>
+            </a:pPr>
+            <a:r>
+              <a:rPr lang="en-US" sz="950" spc="100" kern="0" dirty="0">
+                <a:solidFill>
+                  <a:srgbClr val="8B8175"/>
+                </a:solidFill>
+                <a:latin typeface="游ゴシック" pitchFamily="34" charset="0"/>
+                <a:ea typeface="游ゴシック" pitchFamily="34" charset="-122"/>
+                <a:cs typeface="游ゴシック" pitchFamily="34" charset="-120"/>
+              </a:rPr>
+              <a:t>武蔵野大学大学院 人間学</a:t>
+            </a:r>
+            <a:endParaRPr lang="en-US" sz="950" dirty="0"/>
+          </a:p>
+        </p:txBody>
+      </p:sp>
+      <p:sp>
+        <p:nvSpPr>
+          <p:cNvPr id="26" name="Text 24"/>
           <p:cNvSpPr txBox="1"/>
           <p:nvPr/>
         </p:nvSpPr>
@@ -4017,7 +4886,7 @@
       </p:sp>
       <p:sp>
         <p:nvSpPr>
-          <p:cNvPr id="22" name="Text 20"/>
+          <p:cNvPr id="27" name="Text 25"/>
           <p:cNvSpPr txBox="1"/>
           <p:nvPr/>
         </p:nvSpPr>
@@ -4048,7 +4917,7 @@
                 <a:ea typeface="游ゴシック" pitchFamily="34" charset="-122"/>
                 <a:cs typeface="游ゴシック" pitchFamily="34" charset="-120"/>
               </a:rPr>
-              <a:t>1:00 → 1:45</a:t>
+              <a:t>0:55 → 1:30</a:t>
             </a:r>
             <a:endParaRPr lang="en-US" sz="900" dirty="0"/>
           </a:p>
@@ -4065,6 +4934,862 @@
 <file path=ppt/slides/slide4.xml><?xml version="1.0" encoding="utf-8"?>
 <p:sld xmlns:a="http://schemas.openxmlformats.org/drawingml/2006/main" xmlns:r="http://schemas.openxmlformats.org/officeDocument/2006/relationships" xmlns:p="http://schemas.openxmlformats.org/presentationml/2006/main">
   <p:cSld name="Slide 4">
+    <p:bg>
+      <p:bgPr>
+        <a:solidFill>
+          <a:srgbClr val="F3EADB"/>
+        </a:solidFill>
+      </p:bgPr>
+    </p:bg>
+    <p:spTree>
+      <p:nvGrpSpPr>
+        <p:cNvPr id="1" name=""/>
+        <p:cNvGrpSpPr/>
+        <p:nvPr/>
+      </p:nvGrpSpPr>
+      <p:grpSpPr>
+        <a:xfrm>
+          <a:off x="0" y="0"/>
+          <a:ext cx="0" cy="0"/>
+          <a:chOff x="0" y="0"/>
+          <a:chExt cx="0" cy="0"/>
+        </a:xfrm>
+      </p:grpSpPr>
+      <p:sp>
+        <p:nvSpPr>
+          <p:cNvPr id="2" name="Shape 0"/>
+          <p:cNvSpPr/>
+          <p:nvPr/>
+        </p:nvSpPr>
+        <p:spPr>
+          <a:xfrm>
+            <a:off x="685800" y="562356"/>
+            <a:ext cx="237744" cy="12802"/>
+          </a:xfrm>
+          <a:prstGeom prst="rect">
+            <a:avLst/>
+          </a:prstGeom>
+          <a:solidFill>
+            <a:srgbClr val="9C5446"/>
+          </a:solidFill>
+          <a:ln/>
+        </p:spPr>
+      </p:sp>
+      <p:sp>
+        <p:nvSpPr>
+          <p:cNvPr id="3" name="Text 1"/>
+          <p:cNvSpPr txBox="1"/>
+          <p:nvPr/>
+        </p:nvSpPr>
+        <p:spPr>
+          <a:xfrm>
+            <a:off x="996696" y="402336"/>
+            <a:ext cx="7315200" cy="310896"/>
+          </a:xfrm>
+          <a:prstGeom prst="rect">
+            <a:avLst/>
+          </a:prstGeom>
+          <a:noFill/>
+          <a:ln/>
+        </p:spPr>
+        <p:txBody>
+          <a:bodyPr wrap="square" lIns="0" tIns="0" rIns="0" bIns="0" rtlCol="0" anchor="ctr"/>
+          <a:lstStyle/>
+          <a:p>
+            <a:pPr indent="0" marL="0">
+              <a:buNone/>
+            </a:pPr>
+            <a:r>
+              <a:rPr lang="en-US" sz="1000" b="1" spc="200" kern="0" dirty="0">
+                <a:solidFill>
+                  <a:srgbClr val="9C5446"/>
+                </a:solidFill>
+                <a:latin typeface="游明朝" pitchFamily="34" charset="0"/>
+                <a:ea typeface="游明朝" pitchFamily="34" charset="-122"/>
+                <a:cs typeface="游明朝" pitchFamily="34" charset="-120"/>
+              </a:rPr>
+              <a:t>03   </a:t>
+            </a:r>
+            <a:pPr indent="0" marL="0">
+              <a:buNone/>
+            </a:pPr>
+            <a:r>
+              <a:rPr lang="en-US" sz="1000" spc="300" kern="0" dirty="0">
+                <a:solidFill>
+                  <a:srgbClr val="8B8175"/>
+                </a:solidFill>
+                <a:latin typeface="游ゴシック" pitchFamily="34" charset="0"/>
+                <a:ea typeface="游ゴシック" pitchFamily="34" charset="-122"/>
+                <a:cs typeface="游ゴシック" pitchFamily="34" charset="-120"/>
+              </a:rPr>
+              <a:t>STRENGTH</a:t>
+            </a:r>
+            <a:endParaRPr lang="en-US" sz="1000" dirty="0"/>
+          </a:p>
+        </p:txBody>
+      </p:sp>
+      <p:sp>
+        <p:nvSpPr>
+          <p:cNvPr id="4" name="Text 2"/>
+          <p:cNvSpPr txBox="1"/>
+          <p:nvPr/>
+        </p:nvSpPr>
+        <p:spPr>
+          <a:xfrm>
+            <a:off x="685800" y="841248"/>
+            <a:ext cx="10820095" cy="777240"/>
+          </a:xfrm>
+          <a:prstGeom prst="rect">
+            <a:avLst/>
+          </a:prstGeom>
+          <a:noFill/>
+          <a:ln/>
+        </p:spPr>
+        <p:txBody>
+          <a:bodyPr wrap="square" lIns="0" tIns="0" rIns="0" bIns="0" rtlCol="0" anchor="ctr"/>
+          <a:lstStyle/>
+          <a:p>
+            <a:pPr indent="0" marL="0">
+              <a:buNone/>
+            </a:pPr>
+            <a:r>
+              <a:rPr lang="en-US" sz="2800" b="1" spc="100" kern="0" dirty="0">
+                <a:solidFill>
+                  <a:srgbClr val="2B2620"/>
+                </a:solidFill>
+                <a:latin typeface="游明朝" pitchFamily="34" charset="0"/>
+                <a:ea typeface="游明朝" pitchFamily="34" charset="-122"/>
+                <a:cs typeface="游明朝" pitchFamily="34" charset="-120"/>
+              </a:rPr>
+              <a:t>企業の新規事業に、専門家として入ってきました</a:t>
+            </a:r>
+            <a:endParaRPr lang="en-US" sz="2800" dirty="0"/>
+          </a:p>
+        </p:txBody>
+      </p:sp>
+      <p:sp>
+        <p:nvSpPr>
+          <p:cNvPr id="5" name="Shape 3"/>
+          <p:cNvSpPr/>
+          <p:nvPr/>
+        </p:nvSpPr>
+        <p:spPr>
+          <a:xfrm>
+            <a:off x="685800" y="1737360"/>
+            <a:ext cx="3456432" cy="2423160"/>
+          </a:xfrm>
+          <a:prstGeom prst="roundRect">
+            <a:avLst>
+              <a:gd name="adj" fmla="val 1887"/>
+            </a:avLst>
+          </a:prstGeom>
+          <a:solidFill>
+            <a:srgbClr val="FBF6EC"/>
+          </a:solidFill>
+          <a:ln w="9525">
+            <a:solidFill>
+              <a:srgbClr val="D2C4AE"/>
+            </a:solidFill>
+            <a:prstDash val="solid"/>
+          </a:ln>
+        </p:spPr>
+      </p:sp>
+      <p:sp>
+        <p:nvSpPr>
+          <p:cNvPr id="6" name="Text 4"/>
+          <p:cNvSpPr txBox="1"/>
+          <p:nvPr/>
+        </p:nvSpPr>
+        <p:spPr>
+          <a:xfrm>
+            <a:off x="941832" y="1938528"/>
+            <a:ext cx="2944368" cy="237744"/>
+          </a:xfrm>
+          <a:prstGeom prst="rect">
+            <a:avLst/>
+          </a:prstGeom>
+          <a:noFill/>
+          <a:ln/>
+        </p:spPr>
+        <p:txBody>
+          <a:bodyPr wrap="square" lIns="0" tIns="0" rIns="0" bIns="0" rtlCol="0" anchor="ctr"/>
+          <a:lstStyle/>
+          <a:p>
+            <a:pPr indent="0" marL="0">
+              <a:buNone/>
+            </a:pPr>
+            <a:r>
+              <a:rPr lang="en-US" sz="900" b="1" spc="200" kern="0" dirty="0">
+                <a:solidFill>
+                  <a:srgbClr val="9C5446"/>
+                </a:solidFill>
+                <a:latin typeface="游ゴシック" pitchFamily="34" charset="0"/>
+                <a:ea typeface="游ゴシック" pitchFamily="34" charset="-122"/>
+                <a:cs typeface="游ゴシック" pitchFamily="34" charset="-120"/>
+              </a:rPr>
+              <a:t>パパゲーノ</a:t>
+            </a:r>
+            <a:endParaRPr lang="en-US" sz="900" dirty="0"/>
+          </a:p>
+        </p:txBody>
+      </p:sp>
+      <p:sp>
+        <p:nvSpPr>
+          <p:cNvPr id="7" name="Text 5"/>
+          <p:cNvSpPr txBox="1"/>
+          <p:nvPr/>
+        </p:nvSpPr>
+        <p:spPr>
+          <a:xfrm>
+            <a:off x="941832" y="2212848"/>
+            <a:ext cx="2944368" cy="457200"/>
+          </a:xfrm>
+          <a:prstGeom prst="rect">
+            <a:avLst/>
+          </a:prstGeom>
+          <a:noFill/>
+          <a:ln/>
+        </p:spPr>
+        <p:txBody>
+          <a:bodyPr wrap="square" lIns="0" tIns="0" rIns="0" bIns="0" rtlCol="0" anchor="t"/>
+          <a:lstStyle/>
+          <a:p>
+            <a:pPr indent="0" marL="0">
+              <a:lnSpc>
+                <a:spcPts val="2100"/>
+              </a:lnSpc>
+              <a:buNone/>
+            </a:pPr>
+            <a:r>
+              <a:rPr lang="en-US" sz="1500" b="1" dirty="0">
+                <a:solidFill>
+                  <a:srgbClr val="2B2620"/>
+                </a:solidFill>
+                <a:latin typeface="游明朝" pitchFamily="34" charset="0"/>
+                <a:ea typeface="游明朝" pitchFamily="34" charset="-122"/>
+                <a:cs typeface="游明朝" pitchFamily="34" charset="-120"/>
+              </a:rPr>
+              <a:t>アンバサダー認定 第一号</a:t>
+            </a:r>
+            <a:endParaRPr lang="en-US" sz="1500" dirty="0"/>
+          </a:p>
+        </p:txBody>
+      </p:sp>
+      <p:sp>
+        <p:nvSpPr>
+          <p:cNvPr id="8" name="Text 6"/>
+          <p:cNvSpPr txBox="1"/>
+          <p:nvPr/>
+        </p:nvSpPr>
+        <p:spPr>
+          <a:xfrm>
+            <a:off x="941832" y="2724912"/>
+            <a:ext cx="2944368" cy="1234440"/>
+          </a:xfrm>
+          <a:prstGeom prst="rect">
+            <a:avLst/>
+          </a:prstGeom>
+          <a:noFill/>
+          <a:ln/>
+        </p:spPr>
+        <p:txBody>
+          <a:bodyPr wrap="square" lIns="0" tIns="0" rIns="0" bIns="0" rtlCol="0" anchor="t"/>
+          <a:lstStyle/>
+          <a:p>
+            <a:pPr indent="0" marL="0">
+              <a:lnSpc>
+                <a:spcPts val="1700"/>
+              </a:lnSpc>
+              <a:buNone/>
+            </a:pPr>
+            <a:r>
+              <a:rPr lang="en-US" sz="1050" dirty="0">
+                <a:solidFill>
+                  <a:srgbClr val="5A5249"/>
+                </a:solidFill>
+                <a:latin typeface="游ゴシック" pitchFamily="34" charset="0"/>
+                <a:ea typeface="游ゴシック" pitchFamily="34" charset="-122"/>
+                <a:cs typeface="游ゴシック" pitchFamily="34" charset="-120"/>
+              </a:rPr>
+              <a:t>就労継続支援B型「パパゲーノ Work &amp; Recovery」への発注を通じ、精神障害のある方が担う事業に伴走。認定制度の第一号企業です。</a:t>
+            </a:r>
+            <a:endParaRPr lang="en-US" sz="1050" dirty="0"/>
+          </a:p>
+        </p:txBody>
+      </p:sp>
+      <p:sp>
+        <p:nvSpPr>
+          <p:cNvPr id="9" name="Shape 7"/>
+          <p:cNvSpPr/>
+          <p:nvPr/>
+        </p:nvSpPr>
+        <p:spPr>
+          <a:xfrm>
+            <a:off x="4370832" y="1737360"/>
+            <a:ext cx="3456432" cy="2423160"/>
+          </a:xfrm>
+          <a:prstGeom prst="roundRect">
+            <a:avLst>
+              <a:gd name="adj" fmla="val 1887"/>
+            </a:avLst>
+          </a:prstGeom>
+          <a:solidFill>
+            <a:srgbClr val="FBF6EC"/>
+          </a:solidFill>
+          <a:ln w="9525">
+            <a:solidFill>
+              <a:srgbClr val="D2C4AE"/>
+            </a:solidFill>
+            <a:prstDash val="solid"/>
+          </a:ln>
+        </p:spPr>
+      </p:sp>
+      <p:sp>
+        <p:nvSpPr>
+          <p:cNvPr id="10" name="Text 8"/>
+          <p:cNvSpPr txBox="1"/>
+          <p:nvPr/>
+        </p:nvSpPr>
+        <p:spPr>
+          <a:xfrm>
+            <a:off x="4626864" y="1938528"/>
+            <a:ext cx="2944368" cy="237744"/>
+          </a:xfrm>
+          <a:prstGeom prst="rect">
+            <a:avLst/>
+          </a:prstGeom>
+          <a:noFill/>
+          <a:ln/>
+        </p:spPr>
+        <p:txBody>
+          <a:bodyPr wrap="square" lIns="0" tIns="0" rIns="0" bIns="0" rtlCol="0" anchor="ctr"/>
+          <a:lstStyle/>
+          <a:p>
+            <a:pPr indent="0" marL="0">
+              <a:buNone/>
+            </a:pPr>
+            <a:r>
+              <a:rPr lang="en-US" sz="900" b="1" spc="200" kern="0" dirty="0">
+                <a:solidFill>
+                  <a:srgbClr val="9C5446"/>
+                </a:solidFill>
+                <a:latin typeface="游ゴシック" pitchFamily="34" charset="0"/>
+                <a:ea typeface="游ゴシック" pitchFamily="34" charset="-122"/>
+                <a:cs typeface="游ゴシック" pitchFamily="34" charset="-120"/>
+              </a:rPr>
+              <a:t>ファンコミュニケーションズ</a:t>
+            </a:r>
+            <a:endParaRPr lang="en-US" sz="900" dirty="0"/>
+          </a:p>
+        </p:txBody>
+      </p:sp>
+      <p:sp>
+        <p:nvSpPr>
+          <p:cNvPr id="11" name="Text 9"/>
+          <p:cNvSpPr txBox="1"/>
+          <p:nvPr/>
+        </p:nvSpPr>
+        <p:spPr>
+          <a:xfrm>
+            <a:off x="4626864" y="2212848"/>
+            <a:ext cx="2944368" cy="457200"/>
+          </a:xfrm>
+          <a:prstGeom prst="rect">
+            <a:avLst/>
+          </a:prstGeom>
+          <a:noFill/>
+          <a:ln/>
+        </p:spPr>
+        <p:txBody>
+          <a:bodyPr wrap="square" lIns="0" tIns="0" rIns="0" bIns="0" rtlCol="0" anchor="t"/>
+          <a:lstStyle/>
+          <a:p>
+            <a:pPr indent="0" marL="0">
+              <a:lnSpc>
+                <a:spcPts val="2100"/>
+              </a:lnSpc>
+              <a:buNone/>
+            </a:pPr>
+            <a:r>
+              <a:rPr lang="en-US" sz="1500" b="1" dirty="0">
+                <a:solidFill>
+                  <a:srgbClr val="2B2620"/>
+                </a:solidFill>
+                <a:latin typeface="游明朝" pitchFamily="34" charset="0"/>
+                <a:ea typeface="游明朝" pitchFamily="34" charset="-122"/>
+                <a:cs typeface="游明朝" pitchFamily="34" charset="-120"/>
+              </a:rPr>
+              <a:t>ThirdTalk（サードトーク）</a:t>
+            </a:r>
+            <a:endParaRPr lang="en-US" sz="1500" dirty="0"/>
+          </a:p>
+        </p:txBody>
+      </p:sp>
+      <p:sp>
+        <p:nvSpPr>
+          <p:cNvPr id="12" name="Text 10"/>
+          <p:cNvSpPr txBox="1"/>
+          <p:nvPr/>
+        </p:nvSpPr>
+        <p:spPr>
+          <a:xfrm>
+            <a:off x="4626864" y="2724912"/>
+            <a:ext cx="2944368" cy="1234440"/>
+          </a:xfrm>
+          <a:prstGeom prst="rect">
+            <a:avLst/>
+          </a:prstGeom>
+          <a:noFill/>
+          <a:ln/>
+        </p:spPr>
+        <p:txBody>
+          <a:bodyPr wrap="square" lIns="0" tIns="0" rIns="0" bIns="0" rtlCol="0" anchor="t"/>
+          <a:lstStyle/>
+          <a:p>
+            <a:pPr indent="0" marL="0">
+              <a:lnSpc>
+                <a:spcPts val="1700"/>
+              </a:lnSpc>
+              <a:buNone/>
+            </a:pPr>
+            <a:r>
+              <a:rPr lang="en-US" sz="1050" dirty="0">
+                <a:solidFill>
+                  <a:srgbClr val="5A5249"/>
+                </a:solidFill>
+                <a:latin typeface="游ゴシック" pitchFamily="34" charset="0"/>
+                <a:ea typeface="游ゴシック" pitchFamily="34" charset="-122"/>
+                <a:cs typeface="游ゴシック" pitchFamily="34" charset="-120"/>
+              </a:rPr>
+              <a:t>「病院やカウンセリングに行く、その一歩手前」を想定したオンライン対話サービス。企画段階からご相談をいただき、立ち上げを見守ってきました。</a:t>
+            </a:r>
+            <a:endParaRPr lang="en-US" sz="1050" dirty="0"/>
+          </a:p>
+        </p:txBody>
+      </p:sp>
+      <p:sp>
+        <p:nvSpPr>
+          <p:cNvPr id="13" name="Shape 11"/>
+          <p:cNvSpPr/>
+          <p:nvPr/>
+        </p:nvSpPr>
+        <p:spPr>
+          <a:xfrm>
+            <a:off x="8055864" y="1737360"/>
+            <a:ext cx="3456432" cy="2423160"/>
+          </a:xfrm>
+          <a:prstGeom prst="roundRect">
+            <a:avLst>
+              <a:gd name="adj" fmla="val 1887"/>
+            </a:avLst>
+          </a:prstGeom>
+          <a:solidFill>
+            <a:srgbClr val="FBF6EC"/>
+          </a:solidFill>
+          <a:ln w="9525">
+            <a:solidFill>
+              <a:srgbClr val="D2C4AE"/>
+            </a:solidFill>
+            <a:prstDash val="solid"/>
+          </a:ln>
+        </p:spPr>
+      </p:sp>
+      <p:sp>
+        <p:nvSpPr>
+          <p:cNvPr id="14" name="Text 12"/>
+          <p:cNvSpPr txBox="1"/>
+          <p:nvPr/>
+        </p:nvSpPr>
+        <p:spPr>
+          <a:xfrm>
+            <a:off x="8311896" y="1938528"/>
+            <a:ext cx="2944368" cy="237744"/>
+          </a:xfrm>
+          <a:prstGeom prst="rect">
+            <a:avLst/>
+          </a:prstGeom>
+          <a:noFill/>
+          <a:ln/>
+        </p:spPr>
+        <p:txBody>
+          <a:bodyPr wrap="square" lIns="0" tIns="0" rIns="0" bIns="0" rtlCol="0" anchor="ctr"/>
+          <a:lstStyle/>
+          <a:p>
+            <a:pPr indent="0" marL="0">
+              <a:buNone/>
+            </a:pPr>
+            <a:r>
+              <a:rPr lang="en-US" sz="900" b="1" spc="200" kern="0" dirty="0">
+                <a:solidFill>
+                  <a:srgbClr val="9C5446"/>
+                </a:solidFill>
+                <a:latin typeface="游ゴシック" pitchFamily="34" charset="0"/>
+                <a:ea typeface="游ゴシック" pitchFamily="34" charset="-122"/>
+                <a:cs typeface="游ゴシック" pitchFamily="34" charset="-120"/>
+              </a:rPr>
+              <a:t>stand up</a:t>
+            </a:r>
+            <a:endParaRPr lang="en-US" sz="900" dirty="0"/>
+          </a:p>
+        </p:txBody>
+      </p:sp>
+      <p:sp>
+        <p:nvSpPr>
+          <p:cNvPr id="15" name="Text 13"/>
+          <p:cNvSpPr txBox="1"/>
+          <p:nvPr/>
+        </p:nvSpPr>
+        <p:spPr>
+          <a:xfrm>
+            <a:off x="8311896" y="2212848"/>
+            <a:ext cx="2944368" cy="457200"/>
+          </a:xfrm>
+          <a:prstGeom prst="rect">
+            <a:avLst/>
+          </a:prstGeom>
+          <a:noFill/>
+          <a:ln/>
+        </p:spPr>
+        <p:txBody>
+          <a:bodyPr wrap="square" lIns="0" tIns="0" rIns="0" bIns="0" rtlCol="0" anchor="t"/>
+          <a:lstStyle/>
+          <a:p>
+            <a:pPr indent="0" marL="0">
+              <a:lnSpc>
+                <a:spcPts val="2100"/>
+              </a:lnSpc>
+              <a:buNone/>
+            </a:pPr>
+            <a:r>
+              <a:rPr lang="en-US" sz="1500" b="1" dirty="0">
+                <a:solidFill>
+                  <a:srgbClr val="2B2620"/>
+                </a:solidFill>
+                <a:latin typeface="游明朝" pitchFamily="34" charset="0"/>
+                <a:ea typeface="游明朝" pitchFamily="34" charset="-122"/>
+                <a:cs typeface="游明朝" pitchFamily="34" charset="-120"/>
+              </a:rPr>
+              <a:t>アミューズメント事業</a:t>
+            </a:r>
+            <a:endParaRPr lang="en-US" sz="1500" dirty="0"/>
+          </a:p>
+        </p:txBody>
+      </p:sp>
+      <p:sp>
+        <p:nvSpPr>
+          <p:cNvPr id="16" name="Text 14"/>
+          <p:cNvSpPr txBox="1"/>
+          <p:nvPr/>
+        </p:nvSpPr>
+        <p:spPr>
+          <a:xfrm>
+            <a:off x="8311896" y="2724912"/>
+            <a:ext cx="2944368" cy="1234440"/>
+          </a:xfrm>
+          <a:prstGeom prst="rect">
+            <a:avLst/>
+          </a:prstGeom>
+          <a:noFill/>
+          <a:ln/>
+        </p:spPr>
+        <p:txBody>
+          <a:bodyPr wrap="square" lIns="0" tIns="0" rIns="0" bIns="0" rtlCol="0" anchor="t"/>
+          <a:lstStyle/>
+          <a:p>
+            <a:pPr indent="0" marL="0">
+              <a:lnSpc>
+                <a:spcPts val="1700"/>
+              </a:lnSpc>
+              <a:buNone/>
+            </a:pPr>
+            <a:r>
+              <a:rPr lang="en-US" sz="1050" dirty="0">
+                <a:solidFill>
+                  <a:srgbClr val="5A5249"/>
+                </a:solidFill>
+                <a:latin typeface="游ゴシック" pitchFamily="34" charset="0"/>
+                <a:ea typeface="游ゴシック" pitchFamily="34" charset="-122"/>
+                <a:cs typeface="游ゴシック" pitchFamily="34" charset="-120"/>
+              </a:rPr>
+              <a:t>新規事業の立ち上げについてご相談をいただき、現在もお取引が続いています。医療以外の業種でも、人の状態を扱う事業の設計に入ってきました。</a:t>
+            </a:r>
+            <a:endParaRPr lang="en-US" sz="1050" dirty="0"/>
+          </a:p>
+        </p:txBody>
+      </p:sp>
+      <p:sp>
+        <p:nvSpPr>
+          <p:cNvPr id="17" name="Shape 15"/>
+          <p:cNvSpPr/>
+          <p:nvPr/>
+        </p:nvSpPr>
+        <p:spPr>
+          <a:xfrm>
+            <a:off x="685800" y="4370832"/>
+            <a:ext cx="10820095" cy="1371600"/>
+          </a:xfrm>
+          <a:prstGeom prst="roundRect">
+            <a:avLst>
+              <a:gd name="adj" fmla="val 3333"/>
+            </a:avLst>
+          </a:prstGeom>
+          <a:solidFill>
+            <a:srgbClr val="FBF6EC"/>
+          </a:solidFill>
+          <a:ln w="9525">
+            <a:solidFill>
+              <a:srgbClr val="5E7060"/>
+            </a:solidFill>
+            <a:prstDash val="solid"/>
+          </a:ln>
+        </p:spPr>
+      </p:sp>
+      <p:sp>
+        <p:nvSpPr>
+          <p:cNvPr id="18" name="Text 16"/>
+          <p:cNvSpPr txBox="1"/>
+          <p:nvPr/>
+        </p:nvSpPr>
+        <p:spPr>
+          <a:xfrm>
+            <a:off x="960120" y="4572000"/>
+            <a:ext cx="10271455" cy="237744"/>
+          </a:xfrm>
+          <a:prstGeom prst="rect">
+            <a:avLst/>
+          </a:prstGeom>
+          <a:noFill/>
+          <a:ln/>
+        </p:spPr>
+        <p:txBody>
+          <a:bodyPr wrap="square" lIns="0" tIns="0" rIns="0" bIns="0" rtlCol="0" anchor="ctr"/>
+          <a:lstStyle/>
+          <a:p>
+            <a:pPr indent="0" marL="0">
+              <a:buNone/>
+            </a:pPr>
+            <a:r>
+              <a:rPr lang="en-US" sz="900" b="1" spc="200" kern="0" dirty="0">
+                <a:solidFill>
+                  <a:srgbClr val="5E7060"/>
+                </a:solidFill>
+                <a:latin typeface="游ゴシック" pitchFamily="34" charset="0"/>
+                <a:ea typeface="游ゴシック" pitchFamily="34" charset="-122"/>
+                <a:cs typeface="游ゴシック" pitchFamily="34" charset="-120"/>
+              </a:rPr>
+              <a:t>共通してやってきたこと</a:t>
+            </a:r>
+            <a:endParaRPr lang="en-US" sz="900" dirty="0"/>
+          </a:p>
+        </p:txBody>
+      </p:sp>
+      <p:sp>
+        <p:nvSpPr>
+          <p:cNvPr id="19" name="Text 17"/>
+          <p:cNvSpPr txBox="1"/>
+          <p:nvPr/>
+        </p:nvSpPr>
+        <p:spPr>
+          <a:xfrm>
+            <a:off x="960120" y="4882896"/>
+            <a:ext cx="10271455" cy="640080"/>
+          </a:xfrm>
+          <a:prstGeom prst="rect">
+            <a:avLst/>
+          </a:prstGeom>
+          <a:noFill/>
+          <a:ln/>
+        </p:spPr>
+        <p:txBody>
+          <a:bodyPr wrap="square" lIns="0" tIns="0" rIns="0" bIns="0" rtlCol="0" anchor="t"/>
+          <a:lstStyle/>
+          <a:p>
+            <a:pPr indent="0" marL="0">
+              <a:lnSpc>
+                <a:spcPts val="1900"/>
+              </a:lnSpc>
+              <a:buNone/>
+            </a:pPr>
+            <a:r>
+              <a:rPr lang="en-US" sz="1100" dirty="0">
+                <a:solidFill>
+                  <a:srgbClr val="5A5249"/>
+                </a:solidFill>
+                <a:latin typeface="游ゴシック" pitchFamily="34" charset="0"/>
+                <a:ea typeface="游ゴシック" pitchFamily="34" charset="-122"/>
+                <a:cs typeface="游ゴシック" pitchFamily="34" charset="-120"/>
+              </a:rPr>
+              <a:t>心の不調を抱えた人が、実際にどこで止まり、どこで動くのか。その一次情報を事業の言葉に翻訳するのが私の役割です。なかでもThirdTalkは、このあとお話しする</a:t>
+            </a:r>
+            <a:pPr indent="0" marL="0">
+              <a:lnSpc>
+                <a:spcPts val="1900"/>
+              </a:lnSpc>
+              <a:buNone/>
+            </a:pPr>
+            <a:r>
+              <a:rPr lang="en-US" sz="1100" b="1" dirty="0">
+                <a:solidFill>
+                  <a:srgbClr val="2B2620"/>
+                </a:solidFill>
+                <a:latin typeface="游ゴシック" pitchFamily="34" charset="0"/>
+                <a:ea typeface="游ゴシック" pitchFamily="34" charset="-122"/>
+                <a:cs typeface="游ゴシック" pitchFamily="34" charset="-120"/>
+              </a:rPr>
+              <a:t>「病院の一歩手前」という発想を、そのまま事業にしたもの</a:t>
+            </a:r>
+            <a:pPr indent="0" marL="0">
+              <a:lnSpc>
+                <a:spcPts val="1900"/>
+              </a:lnSpc>
+              <a:buNone/>
+            </a:pPr>
+            <a:r>
+              <a:rPr lang="en-US" sz="1100" dirty="0">
+                <a:solidFill>
+                  <a:srgbClr val="5A5249"/>
+                </a:solidFill>
+                <a:latin typeface="游ゴシック" pitchFamily="34" charset="0"/>
+                <a:ea typeface="游ゴシック" pitchFamily="34" charset="-122"/>
+                <a:cs typeface="游ゴシック" pitchFamily="34" charset="-120"/>
+              </a:rPr>
+              <a:t>でした。</a:t>
+            </a:r>
+            <a:endParaRPr lang="en-US" sz="1100" dirty="0"/>
+          </a:p>
+        </p:txBody>
+      </p:sp>
+      <p:sp>
+        <p:nvSpPr>
+          <p:cNvPr id="20" name="Text 18"/>
+          <p:cNvSpPr txBox="1"/>
+          <p:nvPr/>
+        </p:nvSpPr>
+        <p:spPr>
+          <a:xfrm>
+            <a:off x="685800" y="5870448"/>
+            <a:ext cx="10820095" cy="329184"/>
+          </a:xfrm>
+          <a:prstGeom prst="rect">
+            <a:avLst/>
+          </a:prstGeom>
+          <a:noFill/>
+          <a:ln/>
+        </p:spPr>
+        <p:txBody>
+          <a:bodyPr wrap="square" lIns="0" tIns="0" rIns="0" bIns="0" rtlCol="0" anchor="t"/>
+          <a:lstStyle/>
+          <a:p>
+            <a:pPr indent="0" marL="0">
+              <a:lnSpc>
+                <a:spcPts val="1100"/>
+              </a:lnSpc>
+              <a:buNone/>
+            </a:pPr>
+            <a:r>
+              <a:rPr lang="en-US" sz="750" dirty="0">
+                <a:solidFill>
+                  <a:srgbClr val="8B8175"/>
+                </a:solidFill>
+                <a:latin typeface="游ゴシック" pitchFamily="34" charset="0"/>
+                <a:ea typeface="游ゴシック" pitchFamily="34" charset="-122"/>
+                <a:cs typeface="游ゴシック" pitchFamily="34" charset="-120"/>
+              </a:rPr>
+              <a:t>出典：株式会社ファンコミュニケーションズ ニュースリリース（2022.8.26）／株式会社パパゲーノ プレスリリース</a:t>
+            </a:r>
+            <a:endParaRPr lang="en-US" sz="750" dirty="0"/>
+          </a:p>
+        </p:txBody>
+      </p:sp>
+      <p:sp>
+        <p:nvSpPr>
+          <p:cNvPr id="21" name="Text 19"/>
+          <p:cNvSpPr txBox="1"/>
+          <p:nvPr/>
+        </p:nvSpPr>
+        <p:spPr>
+          <a:xfrm>
+            <a:off x="685800" y="6336792"/>
+            <a:ext cx="7315200" cy="274320"/>
+          </a:xfrm>
+          <a:prstGeom prst="rect">
+            <a:avLst/>
+          </a:prstGeom>
+          <a:noFill/>
+          <a:ln/>
+        </p:spPr>
+        <p:txBody>
+          <a:bodyPr wrap="square" lIns="0" tIns="0" rIns="0" bIns="0" rtlCol="0" anchor="ctr"/>
+          <a:lstStyle/>
+          <a:p>
+            <a:pPr indent="0" marL="0">
+              <a:buNone/>
+            </a:pPr>
+            <a:r>
+              <a:rPr lang="en-US" sz="900" spc="100" kern="0" dirty="0">
+                <a:solidFill>
+                  <a:srgbClr val="8B8175"/>
+                </a:solidFill>
+                <a:latin typeface="游ゴシック" pitchFamily="34" charset="0"/>
+                <a:ea typeface="游ゴシック" pitchFamily="34" charset="-122"/>
+                <a:cs typeface="游ゴシック" pitchFamily="34" charset="-120"/>
+              </a:rPr>
+              <a:t>米倉まな｜アポプラスステーション様 ご提案</a:t>
+            </a:r>
+            <a:endParaRPr lang="en-US" sz="900" dirty="0"/>
+          </a:p>
+        </p:txBody>
+      </p:sp>
+      <p:sp>
+        <p:nvSpPr>
+          <p:cNvPr id="22" name="Text 20"/>
+          <p:cNvSpPr txBox="1"/>
+          <p:nvPr/>
+        </p:nvSpPr>
+        <p:spPr>
+          <a:xfrm>
+            <a:off x="8305495" y="6336792"/>
+            <a:ext cx="3200400" cy="274320"/>
+          </a:xfrm>
+          <a:prstGeom prst="rect">
+            <a:avLst/>
+          </a:prstGeom>
+          <a:noFill/>
+          <a:ln/>
+        </p:spPr>
+        <p:txBody>
+          <a:bodyPr wrap="square" lIns="0" tIns="0" rIns="0" bIns="0" rtlCol="0" anchor="ctr"/>
+          <a:lstStyle/>
+          <a:p>
+            <a:pPr algn="r" indent="0" marL="0">
+              <a:buNone/>
+            </a:pPr>
+            <a:r>
+              <a:rPr lang="en-US" sz="900" dirty="0">
+                <a:solidFill>
+                  <a:srgbClr val="8B8175"/>
+                </a:solidFill>
+                <a:latin typeface="游ゴシック" pitchFamily="34" charset="0"/>
+                <a:ea typeface="游ゴシック" pitchFamily="34" charset="-122"/>
+                <a:cs typeface="游ゴシック" pitchFamily="34" charset="-120"/>
+              </a:rPr>
+              <a:t>1:30 → 2:10</a:t>
+            </a:r>
+            <a:endParaRPr lang="en-US" sz="900" dirty="0"/>
+          </a:p>
+        </p:txBody>
+      </p:sp>
+    </p:spTree>
+  </p:cSld>
+  <p:clrMapOvr>
+    <a:masterClrMapping/>
+  </p:clrMapOvr>
+</p:sld>
+</file>
+
+<file path=ppt/slides/slide5.xml><?xml version="1.0" encoding="utf-8"?>
+<p:sld xmlns:a="http://schemas.openxmlformats.org/drawingml/2006/main" xmlns:r="http://schemas.openxmlformats.org/officeDocument/2006/relationships" xmlns:p="http://schemas.openxmlformats.org/presentationml/2006/main">
+  <p:cSld name="Slide 5">
     <p:bg>
       <p:bgPr>
         <a:solidFill>
@@ -4139,7 +5864,7 @@
                 <a:ea typeface="游明朝" pitchFamily="34" charset="-122"/>
                 <a:cs typeface="游明朝" pitchFamily="34" charset="-120"/>
               </a:rPr>
-              <a:t>03   </a:t>
+              <a:t>04   </a:t>
             </a:r>
             <a:pPr indent="0" marL="0">
               <a:buNone/>
@@ -4852,569 +6577,7 @@
                 <a:ea typeface="游ゴシック" pitchFamily="34" charset="-122"/>
                 <a:cs typeface="游ゴシック" pitchFamily="34" charset="-120"/>
               </a:rPr>
-              <a:t>1:45 → 2:40</a:t>
-            </a:r>
-            <a:endParaRPr lang="en-US" sz="900" dirty="0"/>
-          </a:p>
-        </p:txBody>
-      </p:sp>
-    </p:spTree>
-  </p:cSld>
-  <p:clrMapOvr>
-    <a:masterClrMapping/>
-  </p:clrMapOvr>
-</p:sld>
-</file>
-
-<file path=ppt/slides/slide5.xml><?xml version="1.0" encoding="utf-8"?>
-<p:sld xmlns:a="http://schemas.openxmlformats.org/drawingml/2006/main" xmlns:r="http://schemas.openxmlformats.org/officeDocument/2006/relationships" xmlns:p="http://schemas.openxmlformats.org/presentationml/2006/main">
-  <p:cSld name="Slide 5">
-    <p:bg>
-      <p:bgPr>
-        <a:solidFill>
-          <a:srgbClr val="F3EADB"/>
-        </a:solidFill>
-      </p:bgPr>
-    </p:bg>
-    <p:spTree>
-      <p:nvGrpSpPr>
-        <p:cNvPr id="1" name=""/>
-        <p:cNvGrpSpPr/>
-        <p:nvPr/>
-      </p:nvGrpSpPr>
-      <p:grpSpPr>
-        <a:xfrm>
-          <a:off x="0" y="0"/>
-          <a:ext cx="0" cy="0"/>
-          <a:chOff x="0" y="0"/>
-          <a:chExt cx="0" cy="0"/>
-        </a:xfrm>
-      </p:grpSpPr>
-      <p:sp>
-        <p:nvSpPr>
-          <p:cNvPr id="2" name="Shape 0"/>
-          <p:cNvSpPr/>
-          <p:nvPr/>
-        </p:nvSpPr>
-        <p:spPr>
-          <a:xfrm>
-            <a:off x="685800" y="562356"/>
-            <a:ext cx="237744" cy="12802"/>
-          </a:xfrm>
-          <a:prstGeom prst="rect">
-            <a:avLst/>
-          </a:prstGeom>
-          <a:solidFill>
-            <a:srgbClr val="9C5446"/>
-          </a:solidFill>
-          <a:ln/>
-        </p:spPr>
-      </p:sp>
-      <p:sp>
-        <p:nvSpPr>
-          <p:cNvPr id="3" name="Text 1"/>
-          <p:cNvSpPr txBox="1"/>
-          <p:nvPr/>
-        </p:nvSpPr>
-        <p:spPr>
-          <a:xfrm>
-            <a:off x="996696" y="402336"/>
-            <a:ext cx="7315200" cy="310896"/>
-          </a:xfrm>
-          <a:prstGeom prst="rect">
-            <a:avLst/>
-          </a:prstGeom>
-          <a:noFill/>
-          <a:ln/>
-        </p:spPr>
-        <p:txBody>
-          <a:bodyPr wrap="square" lIns="0" tIns="0" rIns="0" bIns="0" rtlCol="0" anchor="ctr"/>
-          <a:lstStyle/>
-          <a:p>
-            <a:pPr indent="0" marL="0">
-              <a:buNone/>
-            </a:pPr>
-            <a:r>
-              <a:rPr lang="en-US" sz="1000" b="1" spc="200" kern="0" dirty="0">
-                <a:solidFill>
-                  <a:srgbClr val="9C5446"/>
-                </a:solidFill>
-                <a:latin typeface="游明朝" pitchFamily="34" charset="0"/>
-                <a:ea typeface="游明朝" pitchFamily="34" charset="-122"/>
-                <a:cs typeface="游明朝" pitchFamily="34" charset="-120"/>
-              </a:rPr>
-              <a:t>04   </a:t>
-            </a:r>
-            <a:pPr indent="0" marL="0">
-              <a:buNone/>
-            </a:pPr>
-            <a:r>
-              <a:rPr lang="en-US" sz="1000" spc="300" kern="0" dirty="0">
-                <a:solidFill>
-                  <a:srgbClr val="8B8175"/>
-                </a:solidFill>
-                <a:latin typeface="游ゴシック" pitchFamily="34" charset="0"/>
-                <a:ea typeface="游ゴシック" pitchFamily="34" charset="-122"/>
-                <a:cs typeface="游ゴシック" pitchFamily="34" charset="-120"/>
-              </a:rPr>
-              <a:t>ACTION</a:t>
-            </a:r>
-            <a:endParaRPr lang="en-US" sz="1000" dirty="0"/>
-          </a:p>
-        </p:txBody>
-      </p:sp>
-      <p:sp>
-        <p:nvSpPr>
-          <p:cNvPr id="4" name="Text 2"/>
-          <p:cNvSpPr txBox="1"/>
-          <p:nvPr/>
-        </p:nvSpPr>
-        <p:spPr>
-          <a:xfrm>
-            <a:off x="685800" y="841248"/>
-            <a:ext cx="10820095" cy="777240"/>
-          </a:xfrm>
-          <a:prstGeom prst="rect">
-            <a:avLst/>
-          </a:prstGeom>
-          <a:noFill/>
-          <a:ln/>
-        </p:spPr>
-        <p:txBody>
-          <a:bodyPr wrap="square" lIns="0" tIns="0" rIns="0" bIns="0" rtlCol="0" anchor="ctr"/>
-          <a:lstStyle/>
-          <a:p>
-            <a:pPr indent="0" marL="0">
-              <a:buNone/>
-            </a:pPr>
-            <a:r>
-              <a:rPr lang="en-US" sz="2800" b="1" spc="100" kern="0" dirty="0">
-                <a:solidFill>
-                  <a:srgbClr val="2B2620"/>
-                </a:solidFill>
-                <a:latin typeface="游明朝" pitchFamily="34" charset="0"/>
-                <a:ea typeface="游明朝" pitchFamily="34" charset="-122"/>
-                <a:cs typeface="游明朝" pitchFamily="34" charset="-120"/>
-              </a:rPr>
-              <a:t>新規事業「ねここち」を立ち上げます</a:t>
-            </a:r>
-            <a:endParaRPr lang="en-US" sz="2800" dirty="0"/>
-          </a:p>
-        </p:txBody>
-      </p:sp>
-      <p:sp>
-        <p:nvSpPr>
-          <p:cNvPr id="5" name="Text 3"/>
-          <p:cNvSpPr txBox="1"/>
-          <p:nvPr/>
-        </p:nvSpPr>
-        <p:spPr>
-          <a:xfrm>
-            <a:off x="685800" y="1874520"/>
-            <a:ext cx="6675120" cy="3840480"/>
-          </a:xfrm>
-          <a:prstGeom prst="rect">
-            <a:avLst/>
-          </a:prstGeom>
-          <a:noFill/>
-          <a:ln/>
-        </p:spPr>
-        <p:txBody>
-          <a:bodyPr wrap="square" lIns="0" tIns="0" rIns="0" bIns="0" rtlCol="0" anchor="t"/>
-          <a:lstStyle/>
-          <a:p>
-            <a:pPr marL="342900" indent="-342900">
-              <a:lnSpc>
-                <a:spcPts val="1900"/>
-              </a:lnSpc>
-              <a:buSzPct val="100000"/>
-              <a:buChar char="•"/>
-            </a:pPr>
-            <a:r>
-              <a:rPr lang="en-US" sz="1100" b="1" dirty="0">
-                <a:solidFill>
-                  <a:srgbClr val="2B2620"/>
-                </a:solidFill>
-                <a:latin typeface="游ゴシック" pitchFamily="34" charset="0"/>
-                <a:ea typeface="游ゴシック" pitchFamily="34" charset="-122"/>
-                <a:cs typeface="游ゴシック" pitchFamily="34" charset="-120"/>
-              </a:rPr>
-              <a:t>ねここち</a:t>
-            </a:r>
-            <a:pPr indent="0" marL="0">
-              <a:lnSpc>
-                <a:spcPts val="1900"/>
-              </a:lnSpc>
-              <a:spcAft>
-                <a:spcPts val="1000"/>
-              </a:spcAft>
-              <a:buNone/>
-            </a:pPr>
-            <a:r>
-              <a:rPr lang="en-US" sz="1100" dirty="0">
-                <a:solidFill>
-                  <a:srgbClr val="5A5249"/>
-                </a:solidFill>
-                <a:latin typeface="游ゴシック" pitchFamily="34" charset="0"/>
-                <a:ea typeface="游ゴシック" pitchFamily="34" charset="-122"/>
-                <a:cs typeface="游ゴシック" pitchFamily="34" charset="-120"/>
-              </a:rPr>
-              <a:t>／頭オフ事業。考えごとで止まらない頭を、強制的にオフにする時間を売ります。いま立ち上げを準備しています。</a:t>
-            </a:r>
-            <a:endParaRPr lang="en-US" sz="1100" dirty="0"/>
-          </a:p>
-          <a:p>
-            <a:pPr marL="342900" indent="-342900">
-              <a:lnSpc>
-                <a:spcPts val="1900"/>
-              </a:lnSpc>
-              <a:buSzPct val="100000"/>
-              <a:buChar char="•"/>
-            </a:pPr>
-            <a:r>
-              <a:rPr lang="en-US" sz="1100" dirty="0">
-                <a:solidFill>
-                  <a:srgbClr val="5A5249"/>
-                </a:solidFill>
-                <a:latin typeface="游ゴシック" pitchFamily="34" charset="0"/>
-                <a:ea typeface="游ゴシック" pitchFamily="34" charset="-122"/>
-                <a:cs typeface="游ゴシック" pitchFamily="34" charset="-120"/>
-              </a:rPr>
-              <a:t>施術は</a:t>
-            </a:r>
-            <a:pPr indent="0" marL="0">
-              <a:lnSpc>
-                <a:spcPts val="1900"/>
-              </a:lnSpc>
-              <a:buNone/>
-            </a:pPr>
-            <a:r>
-              <a:rPr lang="en-US" sz="1100" b="1" dirty="0">
-                <a:solidFill>
-                  <a:srgbClr val="2B2620"/>
-                </a:solidFill>
-                <a:latin typeface="游ゴシック" pitchFamily="34" charset="0"/>
-                <a:ea typeface="游ゴシック" pitchFamily="34" charset="-122"/>
-                <a:cs typeface="游ゴシック" pitchFamily="34" charset="-120"/>
-              </a:rPr>
-              <a:t>鍼灸師の国家資格を持つ人</a:t>
-            </a:r>
-            <a:pPr indent="0" marL="0">
-              <a:lnSpc>
-                <a:spcPts val="1900"/>
-              </a:lnSpc>
-              <a:spcAft>
-                <a:spcPts val="1000"/>
-              </a:spcAft>
-              <a:buNone/>
-            </a:pPr>
-            <a:r>
-              <a:rPr lang="en-US" sz="1100" dirty="0">
-                <a:solidFill>
-                  <a:srgbClr val="5A5249"/>
-                </a:solidFill>
-                <a:latin typeface="游ゴシック" pitchFamily="34" charset="0"/>
-                <a:ea typeface="游ゴシック" pitchFamily="34" charset="-122"/>
-                <a:cs typeface="游ゴシック" pitchFamily="34" charset="-120"/>
-              </a:rPr>
-              <a:t>が行います。医療の知識を持つ人が、治療の手前にいる層に関わる形です。</a:t>
-            </a:r>
-            <a:endParaRPr lang="en-US" sz="1100" dirty="0"/>
-          </a:p>
-          <a:p>
-            <a:pPr marL="342900" indent="-342900">
-              <a:lnSpc>
-                <a:spcPts val="1900"/>
-              </a:lnSpc>
-              <a:buSzPct val="100000"/>
-              <a:buChar char="•"/>
-            </a:pPr>
-            <a:r>
-              <a:rPr lang="en-US" sz="1100" dirty="0">
-                <a:solidFill>
-                  <a:srgbClr val="5A5249"/>
-                </a:solidFill>
-                <a:latin typeface="游ゴシック" pitchFamily="34" charset="0"/>
-                <a:ea typeface="游ゴシック" pitchFamily="34" charset="-122"/>
-                <a:cs typeface="游ゴシック" pitchFamily="34" charset="-120"/>
-              </a:rPr>
-              <a:t>「治療」と身構えずに入れる入口をつくり、</a:t>
-            </a:r>
-            <a:pPr indent="0" marL="0">
-              <a:lnSpc>
-                <a:spcPts val="1900"/>
-              </a:lnSpc>
-              <a:buNone/>
-            </a:pPr>
-            <a:r>
-              <a:rPr lang="en-US" sz="1100" b="1" dirty="0">
-                <a:solidFill>
-                  <a:srgbClr val="2B2620"/>
-                </a:solidFill>
-                <a:latin typeface="游ゴシック" pitchFamily="34" charset="0"/>
-                <a:ea typeface="游ゴシック" pitchFamily="34" charset="-122"/>
-                <a:cs typeface="游ゴシック" pitchFamily="34" charset="-120"/>
-              </a:rPr>
-              <a:t>必要な人だけを鍼灸や医療につなぐ</a:t>
-            </a:r>
-            <a:pPr indent="0" marL="0">
-              <a:lnSpc>
-                <a:spcPts val="1900"/>
-              </a:lnSpc>
-              <a:spcAft>
-                <a:spcPts val="1000"/>
-              </a:spcAft>
-              <a:buNone/>
-            </a:pPr>
-            <a:r>
-              <a:rPr lang="en-US" sz="1100" dirty="0">
-                <a:solidFill>
-                  <a:srgbClr val="5A5249"/>
-                </a:solidFill>
-                <a:latin typeface="游ゴシック" pitchFamily="34" charset="0"/>
-                <a:ea typeface="游ゴシック" pitchFamily="34" charset="-122"/>
-                <a:cs typeface="游ゴシック" pitchFamily="34" charset="-120"/>
-              </a:rPr>
-              <a:t>。未病の層に、継続的に関わり続けるための事業です。</a:t>
-            </a:r>
-            <a:endParaRPr lang="en-US" sz="1100" dirty="0"/>
-          </a:p>
-        </p:txBody>
-      </p:sp>
-      <p:sp>
-        <p:nvSpPr>
-          <p:cNvPr id="6" name="Shape 4"/>
-          <p:cNvSpPr/>
-          <p:nvPr/>
-        </p:nvSpPr>
-        <p:spPr>
-          <a:xfrm>
-            <a:off x="7726680" y="1783080"/>
-            <a:ext cx="3776472" cy="2286000"/>
-          </a:xfrm>
-          <a:prstGeom prst="roundRect">
-            <a:avLst>
-              <a:gd name="adj" fmla="val 2000"/>
-            </a:avLst>
-          </a:prstGeom>
-          <a:solidFill>
-            <a:srgbClr val="F3E3DE"/>
-          </a:solidFill>
-          <a:ln w="9525">
-            <a:solidFill>
-              <a:srgbClr val="9C5446"/>
-            </a:solidFill>
-            <a:prstDash val="solid"/>
-          </a:ln>
-        </p:spPr>
-      </p:sp>
-      <p:sp>
-        <p:nvSpPr>
-          <p:cNvPr id="7" name="Text 5"/>
-          <p:cNvSpPr txBox="1"/>
-          <p:nvPr/>
-        </p:nvSpPr>
-        <p:spPr>
-          <a:xfrm>
-            <a:off x="7726680" y="2011680"/>
-            <a:ext cx="3776472" cy="274320"/>
-          </a:xfrm>
-          <a:prstGeom prst="rect">
-            <a:avLst/>
-          </a:prstGeom>
-          <a:noFill/>
-          <a:ln/>
-        </p:spPr>
-        <p:txBody>
-          <a:bodyPr wrap="square" lIns="0" tIns="0" rIns="0" bIns="0" rtlCol="0" anchor="ctr"/>
-          <a:lstStyle/>
-          <a:p>
-            <a:pPr algn="ctr" indent="0" marL="0">
-              <a:buNone/>
-            </a:pPr>
-            <a:r>
-              <a:rPr lang="en-US" sz="950" b="1" spc="300" kern="0" dirty="0">
-                <a:solidFill>
-                  <a:srgbClr val="9C5446"/>
-                </a:solidFill>
-                <a:latin typeface="游ゴシック" pitchFamily="34" charset="0"/>
-                <a:ea typeface="游ゴシック" pitchFamily="34" charset="-122"/>
-                <a:cs typeface="游ゴシック" pitchFamily="34" charset="-120"/>
-              </a:rPr>
-              <a:t>1店舗あたり</a:t>
-            </a:r>
-            <a:endParaRPr lang="en-US" sz="950" dirty="0"/>
-          </a:p>
-        </p:txBody>
-      </p:sp>
-      <p:sp>
-        <p:nvSpPr>
-          <p:cNvPr id="8" name="Text 6"/>
-          <p:cNvSpPr txBox="1"/>
-          <p:nvPr/>
-        </p:nvSpPr>
-        <p:spPr>
-          <a:xfrm>
-            <a:off x="7726680" y="2331720"/>
-            <a:ext cx="3776472" cy="731520"/>
-          </a:xfrm>
-          <a:prstGeom prst="rect">
-            <a:avLst/>
-          </a:prstGeom>
-          <a:noFill/>
-          <a:ln/>
-        </p:spPr>
-        <p:txBody>
-          <a:bodyPr wrap="square" lIns="0" tIns="0" rIns="0" bIns="0" rtlCol="0" anchor="ctr"/>
-          <a:lstStyle/>
-          <a:p>
-            <a:pPr algn="ctr" indent="0" marL="0">
-              <a:buNone/>
-            </a:pPr>
-            <a:r>
-              <a:rPr lang="en-US" sz="3400" b="1" dirty="0">
-                <a:solidFill>
-                  <a:srgbClr val="2B2620"/>
-                </a:solidFill>
-                <a:latin typeface="游明朝" pitchFamily="34" charset="0"/>
-                <a:ea typeface="游明朝" pitchFamily="34" charset="-122"/>
-                <a:cs typeface="游明朝" pitchFamily="34" charset="-120"/>
-              </a:rPr>
-              <a:t>月次利益 30</a:t>
-            </a:r>
-            <a:pPr algn="ctr" indent="0" marL="0">
-              <a:buNone/>
-            </a:pPr>
-            <a:r>
-              <a:rPr lang="en-US" sz="1700" b="1" dirty="0">
-                <a:solidFill>
-                  <a:srgbClr val="2B2620"/>
-                </a:solidFill>
-                <a:latin typeface="游明朝" pitchFamily="34" charset="0"/>
-                <a:ea typeface="游明朝" pitchFamily="34" charset="-122"/>
-                <a:cs typeface="游明朝" pitchFamily="34" charset="-120"/>
-              </a:rPr>
-              <a:t>万円</a:t>
-            </a:r>
-            <a:endParaRPr lang="en-US" sz="3400" dirty="0"/>
-          </a:p>
-        </p:txBody>
-      </p:sp>
-      <p:sp>
-        <p:nvSpPr>
-          <p:cNvPr id="9" name="Text 7"/>
-          <p:cNvSpPr txBox="1"/>
-          <p:nvPr/>
-        </p:nvSpPr>
-        <p:spPr>
-          <a:xfrm>
-            <a:off x="8001000" y="3154680"/>
-            <a:ext cx="3227832" cy="731520"/>
-          </a:xfrm>
-          <a:prstGeom prst="rect">
-            <a:avLst/>
-          </a:prstGeom>
-          <a:noFill/>
-          <a:ln/>
-        </p:spPr>
-        <p:txBody>
-          <a:bodyPr wrap="square" lIns="0" tIns="0" rIns="0" bIns="0" rtlCol="0" anchor="t"/>
-          <a:lstStyle/>
-          <a:p>
-            <a:pPr algn="ctr" indent="0" marL="0">
-              <a:lnSpc>
-                <a:spcPts val="1600"/>
-              </a:lnSpc>
-              <a:buNone/>
-            </a:pPr>
-            <a:r>
-              <a:rPr lang="en-US" sz="950" dirty="0">
-                <a:solidFill>
-                  <a:srgbClr val="5A5249"/>
-                </a:solidFill>
-                <a:latin typeface="游ゴシック" pitchFamily="34" charset="0"/>
-                <a:ea typeface="游ゴシック" pitchFamily="34" charset="-122"/>
-                <a:cs typeface="游ゴシック" pitchFamily="34" charset="-120"/>
-              </a:rPr>
-              <a:t>想定値。多店舗展開を前提に設計しています。</a:t>
-            </a:r>
-            <a:endParaRPr lang="en-US" sz="950" dirty="0"/>
-          </a:p>
-        </p:txBody>
-      </p:sp>
-      <p:sp>
-        <p:nvSpPr>
-          <p:cNvPr id="10" name="Text 8"/>
-          <p:cNvSpPr txBox="1"/>
-          <p:nvPr/>
-        </p:nvSpPr>
-        <p:spPr>
-          <a:xfrm>
-            <a:off x="685800" y="6336792"/>
-            <a:ext cx="7315200" cy="274320"/>
-          </a:xfrm>
-          <a:prstGeom prst="rect">
-            <a:avLst/>
-          </a:prstGeom>
-          <a:noFill/>
-          <a:ln/>
-        </p:spPr>
-        <p:txBody>
-          <a:bodyPr wrap="square" lIns="0" tIns="0" rIns="0" bIns="0" rtlCol="0" anchor="ctr"/>
-          <a:lstStyle/>
-          <a:p>
-            <a:pPr indent="0" marL="0">
-              <a:buNone/>
-            </a:pPr>
-            <a:r>
-              <a:rPr lang="en-US" sz="900" spc="100" kern="0" dirty="0">
-                <a:solidFill>
-                  <a:srgbClr val="8B8175"/>
-                </a:solidFill>
-                <a:latin typeface="游ゴシック" pitchFamily="34" charset="0"/>
-                <a:ea typeface="游ゴシック" pitchFamily="34" charset="-122"/>
-                <a:cs typeface="游ゴシック" pitchFamily="34" charset="-120"/>
-              </a:rPr>
-              <a:t>米倉まな｜アポプラスステーション様 ご提案</a:t>
-            </a:r>
-            <a:endParaRPr lang="en-US" sz="900" dirty="0"/>
-          </a:p>
-        </p:txBody>
-      </p:sp>
-      <p:sp>
-        <p:nvSpPr>
-          <p:cNvPr id="11" name="Text 9"/>
-          <p:cNvSpPr txBox="1"/>
-          <p:nvPr/>
-        </p:nvSpPr>
-        <p:spPr>
-          <a:xfrm>
-            <a:off x="8305495" y="6336792"/>
-            <a:ext cx="3200400" cy="274320"/>
-          </a:xfrm>
-          <a:prstGeom prst="rect">
-            <a:avLst/>
-          </a:prstGeom>
-          <a:noFill/>
-          <a:ln/>
-        </p:spPr>
-        <p:txBody>
-          <a:bodyPr wrap="square" lIns="0" tIns="0" rIns="0" bIns="0" rtlCol="0" anchor="ctr"/>
-          <a:lstStyle/>
-          <a:p>
-            <a:pPr algn="r" indent="0" marL="0">
-              <a:buNone/>
-            </a:pPr>
-            <a:r>
-              <a:rPr lang="en-US" sz="900" dirty="0">
-                <a:solidFill>
-                  <a:srgbClr val="8B8175"/>
-                </a:solidFill>
-                <a:latin typeface="游ゴシック" pitchFamily="34" charset="0"/>
-                <a:ea typeface="游ゴシック" pitchFamily="34" charset="-122"/>
-                <a:cs typeface="游ゴシック" pitchFamily="34" charset="-120"/>
-              </a:rPr>
-              <a:t>2:40 → 3:25</a:t>
+              <a:t>2:10 → 3:00</a:t>
             </a:r>
             <a:endParaRPr lang="en-US" sz="900" dirty="0"/>
           </a:p>
@@ -5519,7 +6682,7 @@
                 <a:ea typeface="游ゴシック" pitchFamily="34" charset="-122"/>
                 <a:cs typeface="游ゴシック" pitchFamily="34" charset="-120"/>
               </a:rPr>
-              <a:t>CASE</a:t>
+              <a:t>ACTION</a:t>
             </a:r>
             <a:endParaRPr lang="en-US" sz="1000" dirty="0"/>
           </a:p>
@@ -5558,7 +6721,7 @@
                 <a:ea typeface="游明朝" pitchFamily="34" charset="-122"/>
                 <a:cs typeface="游明朝" pitchFamily="34" charset="-120"/>
               </a:rPr>
-              <a:t>「企業 × 鍼灸」は、すでに成立しています</a:t>
+              <a:t>新規事業「ねここち」を立ち上げます</a:t>
             </a:r>
             <a:endParaRPr lang="en-US" sz="2800" dirty="0"/>
           </a:p>
@@ -5572,8 +6735,8 @@
         </p:nvSpPr>
         <p:spPr>
           <a:xfrm>
-            <a:off x="685800" y="1783080"/>
-            <a:ext cx="6035040" cy="3840480"/>
+            <a:off x="685800" y="1874520"/>
+            <a:ext cx="6675120" cy="3840480"/>
           </a:xfrm>
           <a:prstGeom prst="rect">
             <a:avLst/>
@@ -5593,24 +6756,7 @@
               <a:buChar char="•"/>
             </a:pPr>
             <a:r>
-              <a:rPr lang="en-US" sz="1050" dirty="0">
-                <a:solidFill>
-                  <a:srgbClr val="5A5249"/>
-                </a:solidFill>
-                <a:latin typeface="游ゴシック" pitchFamily="34" charset="0"/>
-                <a:ea typeface="游ゴシック" pitchFamily="34" charset="-122"/>
-                <a:cs typeface="游ゴシック" pitchFamily="34" charset="-120"/>
-              </a:rPr>
-              <a:t>睡眠製品のブレインスリープ社は、</a:t>
-            </a:r>
-            <a:pPr indent="0" marL="0">
-              <a:lnSpc>
-                <a:spcPts val="1900"/>
-              </a:lnSpc>
-              <a:buNone/>
-            </a:pPr>
-            <a:r>
-              <a:rPr lang="en-US" sz="1050" b="1" dirty="0">
+              <a:rPr lang="en-US" sz="1100" b="1" dirty="0">
                 <a:solidFill>
                   <a:srgbClr val="2B2620"/>
                 </a:solidFill>
@@ -5618,7 +6764,7 @@
                 <a:ea typeface="游ゴシック" pitchFamily="34" charset="-122"/>
                 <a:cs typeface="游ゴシック" pitchFamily="34" charset="-120"/>
               </a:rPr>
-              <a:t>睡眠専門の鍼灸マッサージ「コンディショニングスタジオ」</a:t>
+              <a:t>ねここち</a:t>
             </a:r>
             <a:pPr indent="0" marL="0">
               <a:lnSpc>
@@ -5630,7 +6776,7 @@
               <a:buNone/>
             </a:pPr>
             <a:r>
-              <a:rPr lang="en-US" sz="1050" dirty="0">
+              <a:rPr lang="en-US" sz="1100" dirty="0">
                 <a:solidFill>
                   <a:srgbClr val="5A5249"/>
                 </a:solidFill>
@@ -5638,9 +6784,9 @@
                 <a:ea typeface="游ゴシック" pitchFamily="34" charset="-122"/>
                 <a:cs typeface="游ゴシック" pitchFamily="34" charset="-120"/>
               </a:rPr>
-              <a:t>を自社ブランドで運営。枕の売り場ではなく、独立した鍼灸院です。</a:t>
-            </a:r>
-            <a:endParaRPr lang="en-US" sz="1050" dirty="0"/>
+              <a:t>／頭オフ事業。考えごとで止まらない頭を、強制的にオフにする時間を売ります。いま立ち上げを準備しています。</a:t>
+            </a:r>
+            <a:endParaRPr lang="en-US" sz="1100" dirty="0"/>
           </a:p>
           <a:p>
             <a:pPr marL="342900" indent="-342900">
@@ -5651,7 +6797,7 @@
               <a:buChar char="•"/>
             </a:pPr>
             <a:r>
-              <a:rPr lang="en-US" sz="1050" dirty="0">
+              <a:rPr lang="en-US" sz="1100" dirty="0">
                 <a:solidFill>
                   <a:srgbClr val="5A5249"/>
                 </a:solidFill>
@@ -5659,7 +6805,7 @@
                 <a:ea typeface="游ゴシック" pitchFamily="34" charset="-122"/>
                 <a:cs typeface="游ゴシック" pitchFamily="34" charset="-120"/>
               </a:rPr>
-              <a:t>二子玉川・南青山・</a:t>
+              <a:t>施術は</a:t>
             </a:r>
             <a:pPr indent="0" marL="0">
               <a:lnSpc>
@@ -5668,7 +6814,7 @@
               <a:buNone/>
             </a:pPr>
             <a:r>
-              <a:rPr lang="en-US" sz="1050" b="1" dirty="0">
+              <a:rPr lang="en-US" sz="1100" b="1" dirty="0">
                 <a:solidFill>
                   <a:srgbClr val="2B2620"/>
                 </a:solidFill>
@@ -5676,41 +6822,7 @@
                 <a:ea typeface="游ゴシック" pitchFamily="34" charset="-122"/>
                 <a:cs typeface="游ゴシック" pitchFamily="34" charset="-120"/>
               </a:rPr>
-              <a:t>有楽町マルイ</a:t>
-            </a:r>
-            <a:pPr indent="0" marL="0">
-              <a:lnSpc>
-                <a:spcPts val="1900"/>
-              </a:lnSpc>
-              <a:buNone/>
-            </a:pPr>
-            <a:r>
-              <a:rPr lang="en-US" sz="1050" dirty="0">
-                <a:solidFill>
-                  <a:srgbClr val="5A5249"/>
-                </a:solidFill>
-                <a:latin typeface="游ゴシック" pitchFamily="34" charset="0"/>
-                <a:ea typeface="游ゴシック" pitchFamily="34" charset="-122"/>
-                <a:cs typeface="游ゴシック" pitchFamily="34" charset="-120"/>
-              </a:rPr>
-              <a:t>・東京ミッドタウン八重洲の</a:t>
-            </a:r>
-            <a:pPr indent="0" marL="0">
-              <a:lnSpc>
-                <a:spcPts val="1900"/>
-              </a:lnSpc>
-              <a:buNone/>
-            </a:pPr>
-            <a:r>
-              <a:rPr lang="en-US" sz="1050" b="1" dirty="0">
-                <a:solidFill>
-                  <a:srgbClr val="2B2620"/>
-                </a:solidFill>
-                <a:latin typeface="游ゴシック" pitchFamily="34" charset="0"/>
-                <a:ea typeface="游ゴシック" pitchFamily="34" charset="-122"/>
-                <a:cs typeface="游ゴシック" pitchFamily="34" charset="-120"/>
-              </a:rPr>
-              <a:t>4店舗</a:t>
+              <a:t>鍼灸師の国家資格を持つ人</a:t>
             </a:r>
             <a:pPr indent="0" marL="0">
               <a:lnSpc>
@@ -5722,7 +6834,7 @@
               <a:buNone/>
             </a:pPr>
             <a:r>
-              <a:rPr lang="en-US" sz="1050" dirty="0">
+              <a:rPr lang="en-US" sz="1100" dirty="0">
                 <a:solidFill>
                   <a:srgbClr val="5A5249"/>
                 </a:solidFill>
@@ -5730,9 +6842,9 @@
                 <a:ea typeface="游ゴシック" pitchFamily="34" charset="-122"/>
                 <a:cs typeface="游ゴシック" pitchFamily="34" charset="-120"/>
               </a:rPr>
-              <a:t>。商業施設側である丸井グループも、自らプレスリリースを出しています。</a:t>
-            </a:r>
-            <a:endParaRPr lang="en-US" sz="1050" dirty="0"/>
+              <a:t>が行います。医療の知識を持つ人が、治療の手前にいる層に関わる形です。</a:t>
+            </a:r>
+            <a:endParaRPr lang="en-US" sz="1100" dirty="0"/>
           </a:p>
           <a:p>
             <a:pPr marL="342900" indent="-342900">
@@ -5743,7 +6855,7 @@
               <a:buChar char="•"/>
             </a:pPr>
             <a:r>
-              <a:rPr lang="en-US" sz="1050" dirty="0">
+              <a:rPr lang="en-US" sz="1100" dirty="0">
                 <a:solidFill>
                   <a:srgbClr val="5A5249"/>
                 </a:solidFill>
@@ -5751,7 +6863,7 @@
                 <a:ea typeface="游ゴシック" pitchFamily="34" charset="-122"/>
                 <a:cs typeface="游ゴシック" pitchFamily="34" charset="-120"/>
               </a:rPr>
-              <a:t>オープン以来</a:t>
+              <a:t>「治療」と身構えずに入れる入口をつくり、</a:t>
             </a:r>
             <a:pPr indent="0" marL="0">
               <a:lnSpc>
@@ -5760,7 +6872,7 @@
               <a:buNone/>
             </a:pPr>
             <a:r>
-              <a:rPr lang="en-US" sz="1050" b="1" dirty="0">
+              <a:rPr lang="en-US" sz="1100" b="1" dirty="0">
                 <a:solidFill>
                   <a:srgbClr val="2B2620"/>
                 </a:solidFill>
@@ -5768,75 +6880,7 @@
                 <a:ea typeface="游ゴシック" pitchFamily="34" charset="-122"/>
                 <a:cs typeface="游ゴシック" pitchFamily="34" charset="-120"/>
               </a:rPr>
-              <a:t>累計1万人以上</a:t>
-            </a:r>
-            <a:pPr indent="0" marL="0">
-              <a:lnSpc>
-                <a:spcPts val="1900"/>
-              </a:lnSpc>
-              <a:buNone/>
-            </a:pPr>
-            <a:r>
-              <a:rPr lang="en-US" sz="1050" dirty="0">
-                <a:solidFill>
-                  <a:srgbClr val="5A5249"/>
-                </a:solidFill>
-                <a:latin typeface="游ゴシック" pitchFamily="34" charset="0"/>
-                <a:ea typeface="游ゴシック" pitchFamily="34" charset="-122"/>
-                <a:cs typeface="游ゴシック" pitchFamily="34" charset="-120"/>
-              </a:rPr>
-              <a:t>が利用。自社研究では、1度の施術で眠りの深さが</a:t>
-            </a:r>
-            <a:pPr indent="0" marL="0">
-              <a:lnSpc>
-                <a:spcPts val="1900"/>
-              </a:lnSpc>
-              <a:buNone/>
-            </a:pPr>
-            <a:r>
-              <a:rPr lang="en-US" sz="1050" b="1" dirty="0">
-                <a:solidFill>
-                  <a:srgbClr val="2B2620"/>
-                </a:solidFill>
-                <a:latin typeface="游ゴシック" pitchFamily="34" charset="0"/>
-                <a:ea typeface="游ゴシック" pitchFamily="34" charset="-122"/>
-                <a:cs typeface="游ゴシック" pitchFamily="34" charset="-120"/>
-              </a:rPr>
-              <a:t>35%</a:t>
-            </a:r>
-            <a:pPr indent="0" marL="0">
-              <a:lnSpc>
-                <a:spcPts val="1900"/>
-              </a:lnSpc>
-              <a:buNone/>
-            </a:pPr>
-            <a:r>
-              <a:rPr lang="en-US" sz="1050" dirty="0">
-                <a:solidFill>
-                  <a:srgbClr val="5A5249"/>
-                </a:solidFill>
-                <a:latin typeface="游ゴシック" pitchFamily="34" charset="0"/>
-                <a:ea typeface="游ゴシック" pitchFamily="34" charset="-122"/>
-                <a:cs typeface="游ゴシック" pitchFamily="34" charset="-120"/>
-              </a:rPr>
-              <a:t>、疲労回復度が</a:t>
-            </a:r>
-            <a:pPr indent="0" marL="0">
-              <a:lnSpc>
-                <a:spcPts val="1900"/>
-              </a:lnSpc>
-              <a:buNone/>
-            </a:pPr>
-            <a:r>
-              <a:rPr lang="en-US" sz="1050" b="1" dirty="0">
-                <a:solidFill>
-                  <a:srgbClr val="2B2620"/>
-                </a:solidFill>
-                <a:latin typeface="游ゴシック" pitchFamily="34" charset="0"/>
-                <a:ea typeface="游ゴシック" pitchFamily="34" charset="-122"/>
-                <a:cs typeface="游ゴシック" pitchFamily="34" charset="-120"/>
-              </a:rPr>
-              <a:t>59%</a:t>
+              <a:t>必要な人だけを鍼灸や医療につなぐ</a:t>
             </a:r>
             <a:pPr indent="0" marL="0">
               <a:lnSpc>
@@ -5848,7 +6892,7 @@
               <a:buNone/>
             </a:pPr>
             <a:r>
-              <a:rPr lang="en-US" sz="1050" dirty="0">
+              <a:rPr lang="en-US" sz="1100" dirty="0">
                 <a:solidFill>
                   <a:srgbClr val="5A5249"/>
                 </a:solidFill>
@@ -5856,67 +6900,9 @@
                 <a:ea typeface="游ゴシック" pitchFamily="34" charset="-122"/>
                 <a:cs typeface="游ゴシック" pitchFamily="34" charset="-120"/>
               </a:rPr>
-              <a:t>向上したと公表。</a:t>
-            </a:r>
-            <a:endParaRPr lang="en-US" sz="1050" dirty="0"/>
-          </a:p>
-          <a:p>
-            <a:pPr marL="342900" indent="-342900">
-              <a:lnSpc>
-                <a:spcPts val="1900"/>
-              </a:lnSpc>
-              <a:buSzPct val="100000"/>
-              <a:buChar char="•"/>
-            </a:pPr>
-            <a:r>
-              <a:rPr lang="en-US" sz="1050" dirty="0">
-                <a:solidFill>
-                  <a:srgbClr val="5A5249"/>
-                </a:solidFill>
-                <a:latin typeface="游ゴシック" pitchFamily="34" charset="0"/>
-                <a:ea typeface="游ゴシック" pitchFamily="34" charset="-122"/>
-                <a:cs typeface="游ゴシック" pitchFamily="34" charset="-120"/>
-              </a:rPr>
-              <a:t>スタッフは全員が国家資格保有者で、自社資格「スリーププランナー」を取得。</a:t>
-            </a:r>
-            <a:pPr indent="0" marL="0">
-              <a:lnSpc>
-                <a:spcPts val="1900"/>
-              </a:lnSpc>
-              <a:buNone/>
-            </a:pPr>
-            <a:r>
-              <a:rPr lang="en-US" sz="1050" b="1" dirty="0">
-                <a:solidFill>
-                  <a:srgbClr val="2B2620"/>
-                </a:solidFill>
-                <a:latin typeface="游ゴシック" pitchFamily="34" charset="0"/>
-                <a:ea typeface="游ゴシック" pitchFamily="34" charset="-122"/>
-                <a:cs typeface="游ゴシック" pitchFamily="34" charset="-120"/>
-              </a:rPr>
-              <a:t>定額プラン</a:t>
-            </a:r>
-            <a:pPr indent="0" marL="0">
-              <a:lnSpc>
-                <a:spcPts val="1900"/>
-              </a:lnSpc>
-              <a:spcAft>
-                <a:spcPts val="1000"/>
-              </a:spcAft>
-              <a:buNone/>
-            </a:pPr>
-            <a:r>
-              <a:rPr lang="en-US" sz="1050" dirty="0">
-                <a:solidFill>
-                  <a:srgbClr val="5A5249"/>
-                </a:solidFill>
-                <a:latin typeface="游ゴシック" pitchFamily="34" charset="0"/>
-                <a:ea typeface="游ゴシック" pitchFamily="34" charset="-122"/>
-                <a:cs typeface="游ゴシック" pitchFamily="34" charset="-120"/>
-              </a:rPr>
-              <a:t>で、継続して通う前提が設計されています。</a:t>
-            </a:r>
-            <a:endParaRPr lang="en-US" sz="1050" dirty="0"/>
+              <a:t>。未病の層に、継続的に関わり続けるための事業です。</a:t>
+            </a:r>
+            <a:endParaRPr lang="en-US" sz="1100" dirty="0"/>
           </a:p>
         </p:txBody>
       </p:sp>
@@ -5928,20 +6914,20 @@
         </p:nvSpPr>
         <p:spPr>
           <a:xfrm>
-            <a:off x="7040880" y="1783080"/>
-            <a:ext cx="4462272" cy="3200400"/>
+            <a:off x="7726680" y="1783080"/>
+            <a:ext cx="3776472" cy="2286000"/>
           </a:xfrm>
           <a:prstGeom prst="roundRect">
             <a:avLst>
-              <a:gd name="adj" fmla="val 1429"/>
+              <a:gd name="adj" fmla="val 2000"/>
             </a:avLst>
           </a:prstGeom>
           <a:solidFill>
-            <a:srgbClr val="FBF6EC"/>
+            <a:srgbClr val="F3E3DE"/>
           </a:solidFill>
           <a:ln w="9525">
             <a:solidFill>
-              <a:srgbClr val="5E7060"/>
+              <a:srgbClr val="9C5446"/>
             </a:solidFill>
             <a:prstDash val="solid"/>
           </a:ln>
@@ -5955,34 +6941,34 @@
         </p:nvSpPr>
         <p:spPr>
           <a:xfrm>
-            <a:off x="7315200" y="1984248"/>
-            <a:ext cx="3913632" cy="237744"/>
-          </a:xfrm>
-          <a:prstGeom prst="rect">
-            <a:avLst/>
-          </a:prstGeom>
-          <a:noFill/>
-          <a:ln/>
-        </p:spPr>
-        <p:txBody>
-          <a:bodyPr wrap="square" lIns="0" tIns="0" rIns="0" bIns="0" rtlCol="0" anchor="ctr"/>
-          <a:lstStyle/>
-          <a:p>
-            <a:pPr indent="0" marL="0">
-              <a:buNone/>
-            </a:pPr>
-            <a:r>
-              <a:rPr lang="en-US" sz="900" b="1" spc="200" kern="0" dirty="0">
-                <a:solidFill>
-                  <a:srgbClr val="5E7060"/>
-                </a:solidFill>
-                <a:latin typeface="游ゴシック" pitchFamily="34" charset="0"/>
-                <a:ea typeface="游ゴシック" pitchFamily="34" charset="-122"/>
-                <a:cs typeface="游ゴシック" pitchFamily="34" charset="-120"/>
-              </a:rPr>
-              <a:t>ここから私が受け取ったこと</a:t>
-            </a:r>
-            <a:endParaRPr lang="en-US" sz="900" dirty="0"/>
+            <a:off x="7726680" y="2011680"/>
+            <a:ext cx="3776472" cy="274320"/>
+          </a:xfrm>
+          <a:prstGeom prst="rect">
+            <a:avLst/>
+          </a:prstGeom>
+          <a:noFill/>
+          <a:ln/>
+        </p:spPr>
+        <p:txBody>
+          <a:bodyPr wrap="square" lIns="0" tIns="0" rIns="0" bIns="0" rtlCol="0" anchor="ctr"/>
+          <a:lstStyle/>
+          <a:p>
+            <a:pPr algn="ctr" indent="0" marL="0">
+              <a:buNone/>
+            </a:pPr>
+            <a:r>
+              <a:rPr lang="en-US" sz="950" b="1" spc="300" kern="0" dirty="0">
+                <a:solidFill>
+                  <a:srgbClr val="9C5446"/>
+                </a:solidFill>
+                <a:latin typeface="游ゴシック" pitchFamily="34" charset="0"/>
+                <a:ea typeface="游ゴシック" pitchFamily="34" charset="-122"/>
+                <a:cs typeface="游ゴシック" pitchFamily="34" charset="-120"/>
+              </a:rPr>
+              <a:t>1店舗あたり</a:t>
+            </a:r>
+            <a:endParaRPr lang="en-US" sz="950" dirty="0"/>
           </a:p>
         </p:txBody>
       </p:sp>
@@ -5994,8 +6980,61 @@
         </p:nvSpPr>
         <p:spPr>
           <a:xfrm>
-            <a:off x="7315200" y="2295144"/>
-            <a:ext cx="3913632" cy="2468880"/>
+            <a:off x="7726680" y="2331720"/>
+            <a:ext cx="3776472" cy="731520"/>
+          </a:xfrm>
+          <a:prstGeom prst="rect">
+            <a:avLst/>
+          </a:prstGeom>
+          <a:noFill/>
+          <a:ln/>
+        </p:spPr>
+        <p:txBody>
+          <a:bodyPr wrap="square" lIns="0" tIns="0" rIns="0" bIns="0" rtlCol="0" anchor="ctr"/>
+          <a:lstStyle/>
+          <a:p>
+            <a:pPr algn="ctr" indent="0" marL="0">
+              <a:buNone/>
+            </a:pPr>
+            <a:r>
+              <a:rPr lang="en-US" sz="3400" b="1" dirty="0">
+                <a:solidFill>
+                  <a:srgbClr val="2B2620"/>
+                </a:solidFill>
+                <a:latin typeface="游明朝" pitchFamily="34" charset="0"/>
+                <a:ea typeface="游明朝" pitchFamily="34" charset="-122"/>
+                <a:cs typeface="游明朝" pitchFamily="34" charset="-120"/>
+              </a:rPr>
+              <a:t>月次利益 30</a:t>
+            </a:r>
+            <a:pPr algn="ctr" indent="0" marL="0">
+              <a:buNone/>
+            </a:pPr>
+            <a:r>
+              <a:rPr lang="en-US" sz="1700" b="1" dirty="0">
+                <a:solidFill>
+                  <a:srgbClr val="2B2620"/>
+                </a:solidFill>
+                <a:latin typeface="游明朝" pitchFamily="34" charset="0"/>
+                <a:ea typeface="游明朝" pitchFamily="34" charset="-122"/>
+                <a:cs typeface="游明朝" pitchFamily="34" charset="-120"/>
+              </a:rPr>
+              <a:t>万円</a:t>
+            </a:r>
+            <a:endParaRPr lang="en-US" sz="3400" dirty="0"/>
+          </a:p>
+        </p:txBody>
+      </p:sp>
+      <p:sp>
+        <p:nvSpPr>
+          <p:cNvPr id="9" name="Text 7"/>
+          <p:cNvSpPr txBox="1"/>
+          <p:nvPr/>
+        </p:nvSpPr>
+        <p:spPr>
+          <a:xfrm>
+            <a:off x="8001000" y="3154680"/>
+            <a:ext cx="3227832" cy="731520"/>
           </a:xfrm>
           <a:prstGeom prst="rect">
             <a:avLst/>
@@ -6007,14 +7046,14 @@
           <a:bodyPr wrap="square" lIns="0" tIns="0" rIns="0" bIns="0" rtlCol="0" anchor="t"/>
           <a:lstStyle/>
           <a:p>
-            <a:pPr indent="0" marL="0">
+            <a:pPr algn="ctr" indent="0" marL="0">
               <a:lnSpc>
-                <a:spcPts val="1900"/>
+                <a:spcPts val="1600"/>
               </a:lnSpc>
               <a:buNone/>
             </a:pPr>
             <a:r>
-              <a:rPr lang="en-US" sz="1100" dirty="0">
+              <a:rPr lang="en-US" sz="950" dirty="0">
                 <a:solidFill>
                   <a:srgbClr val="5A5249"/>
                 </a:solidFill>
@@ -6022,100 +7061,9 @@
                 <a:ea typeface="游ゴシック" pitchFamily="34" charset="-122"/>
                 <a:cs typeface="游ゴシック" pitchFamily="34" charset="-120"/>
               </a:rPr>
-              <a:t>製品を売って終わりにせず、施術という接点で人と関わり続ける。効果を数字で示し、資格者を自社で育て、定額で通ってもらう。——私がやろうとしている構造と、ほぼ同じです。</a:t>
-            </a:r>
-            <a:endParaRPr lang="en-US" sz="1100" dirty="0"/>
-          </a:p>
-          <a:p>
-            <a:pPr indent="0" marL="0">
-              <a:lnSpc>
-                <a:spcPts val="1900"/>
-              </a:lnSpc>
-              <a:buNone/>
-            </a:pPr>
-            <a:endParaRPr lang="en-US" sz="1100" dirty="0"/>
-          </a:p>
-          <a:p>
-            <a:pPr indent="0" marL="0">
-              <a:lnSpc>
-                <a:spcPts val="1900"/>
-              </a:lnSpc>
-              <a:buNone/>
-            </a:pPr>
-            <a:r>
-              <a:rPr lang="en-US" sz="1100" dirty="0">
-                <a:solidFill>
-                  <a:srgbClr val="5A5249"/>
-                </a:solidFill>
-                <a:latin typeface="游ゴシック" pitchFamily="34" charset="0"/>
-                <a:ea typeface="游ゴシック" pitchFamily="34" charset="-122"/>
-                <a:cs typeface="游ゴシック" pitchFamily="34" charset="-120"/>
-              </a:rPr>
-              <a:t>違いは入口です。</a:t>
-            </a:r>
-            <a:endParaRPr lang="en-US" sz="1100" dirty="0"/>
-          </a:p>
-          <a:p>
-            <a:pPr indent="0" marL="0">
-              <a:lnSpc>
-                <a:spcPts val="1900"/>
-              </a:lnSpc>
-              <a:buNone/>
-            </a:pPr>
-            <a:r>
-              <a:rPr lang="en-US" sz="1100" b="1" dirty="0">
-                <a:solidFill>
-                  <a:srgbClr val="2B2620"/>
-                </a:solidFill>
-                <a:latin typeface="游ゴシック" pitchFamily="34" charset="0"/>
-                <a:ea typeface="游ゴシック" pitchFamily="34" charset="-122"/>
-                <a:cs typeface="游ゴシック" pitchFamily="34" charset="-120"/>
-              </a:rPr>
-              <a:t>あの会社は「睡眠」から入った。私は「こころ」から入ります。</a:t>
-            </a:r>
-            <a:endParaRPr lang="en-US" sz="1100" dirty="0"/>
-          </a:p>
-        </p:txBody>
-      </p:sp>
-      <p:sp>
-        <p:nvSpPr>
-          <p:cNvPr id="9" name="Text 7"/>
-          <p:cNvSpPr txBox="1"/>
-          <p:nvPr/>
-        </p:nvSpPr>
-        <p:spPr>
-          <a:xfrm>
-            <a:off x="685800" y="5852160"/>
-            <a:ext cx="10820095" cy="329184"/>
-          </a:xfrm>
-          <a:prstGeom prst="rect">
-            <a:avLst/>
-          </a:prstGeom>
-          <a:noFill/>
-          <a:ln/>
-        </p:spPr>
-        <p:txBody>
-          <a:bodyPr wrap="square" lIns="0" tIns="0" rIns="0" bIns="0" rtlCol="0" anchor="t"/>
-          <a:lstStyle/>
-          <a:p>
-            <a:pPr indent="0" marL="0">
-              <a:lnSpc>
-                <a:spcPts val="1100"/>
-              </a:lnSpc>
-              <a:buNone/>
-            </a:pPr>
-            <a:r>
-              <a:rPr lang="en-US" sz="750" dirty="0">
-                <a:solidFill>
-                  <a:srgbClr val="8B8175"/>
-                </a:solidFill>
-                <a:latin typeface="游ゴシック" pitchFamily="34" charset="0"/>
-                <a:ea typeface="游ゴシック" pitchFamily="34" charset="-122"/>
-                <a:cs typeface="游ゴシック" pitchFamily="34" charset="-120"/>
-              </a:rPr>
-              <a:t>出典：株式会社丸井グループ プレスリリース（2024.11.15）／株式会社ブレインスリープ プレスリリース／ブレインスリープ コンディショニングスタジオ 公式サイト</a:t>
-            </a:r>
-            <a:endParaRPr lang="en-US" sz="750" dirty="0"/>
+              <a:t>想定値。多店舗展開を前提に設計しています。</a:t>
+            </a:r>
+            <a:endParaRPr lang="en-US" sz="950" dirty="0"/>
           </a:p>
         </p:txBody>
       </p:sp>
@@ -6191,7 +7139,7 @@
                 <a:ea typeface="游ゴシック" pitchFamily="34" charset="-122"/>
                 <a:cs typeface="游ゴシック" pitchFamily="34" charset="-120"/>
               </a:rPr>
-              <a:t>3:25 → 4:05</a:t>
+              <a:t>3:00 → 3:35</a:t>
             </a:r>
             <a:endParaRPr lang="en-US" sz="900" dirty="0"/>
           </a:p>
@@ -6208,6 +7156,783 @@
 <file path=ppt/slides/slide7.xml><?xml version="1.0" encoding="utf-8"?>
 <p:sld xmlns:a="http://schemas.openxmlformats.org/drawingml/2006/main" xmlns:r="http://schemas.openxmlformats.org/officeDocument/2006/relationships" xmlns:p="http://schemas.openxmlformats.org/presentationml/2006/main">
   <p:cSld name="Slide 7">
+    <p:bg>
+      <p:bgPr>
+        <a:solidFill>
+          <a:srgbClr val="F3EADB"/>
+        </a:solidFill>
+      </p:bgPr>
+    </p:bg>
+    <p:spTree>
+      <p:nvGrpSpPr>
+        <p:cNvPr id="1" name=""/>
+        <p:cNvGrpSpPr/>
+        <p:nvPr/>
+      </p:nvGrpSpPr>
+      <p:grpSpPr>
+        <a:xfrm>
+          <a:off x="0" y="0"/>
+          <a:ext cx="0" cy="0"/>
+          <a:chOff x="0" y="0"/>
+          <a:chExt cx="0" cy="0"/>
+        </a:xfrm>
+      </p:grpSpPr>
+      <p:sp>
+        <p:nvSpPr>
+          <p:cNvPr id="2" name="Shape 0"/>
+          <p:cNvSpPr/>
+          <p:nvPr/>
+        </p:nvSpPr>
+        <p:spPr>
+          <a:xfrm>
+            <a:off x="685800" y="562356"/>
+            <a:ext cx="237744" cy="12802"/>
+          </a:xfrm>
+          <a:prstGeom prst="rect">
+            <a:avLst/>
+          </a:prstGeom>
+          <a:solidFill>
+            <a:srgbClr val="9C5446"/>
+          </a:solidFill>
+          <a:ln/>
+        </p:spPr>
+      </p:sp>
+      <p:sp>
+        <p:nvSpPr>
+          <p:cNvPr id="3" name="Text 1"/>
+          <p:cNvSpPr txBox="1"/>
+          <p:nvPr/>
+        </p:nvSpPr>
+        <p:spPr>
+          <a:xfrm>
+            <a:off x="996696" y="402336"/>
+            <a:ext cx="7315200" cy="310896"/>
+          </a:xfrm>
+          <a:prstGeom prst="rect">
+            <a:avLst/>
+          </a:prstGeom>
+          <a:noFill/>
+          <a:ln/>
+        </p:spPr>
+        <p:txBody>
+          <a:bodyPr wrap="square" lIns="0" tIns="0" rIns="0" bIns="0" rtlCol="0" anchor="ctr"/>
+          <a:lstStyle/>
+          <a:p>
+            <a:pPr indent="0" marL="0">
+              <a:buNone/>
+            </a:pPr>
+            <a:r>
+              <a:rPr lang="en-US" sz="1000" b="1" spc="200" kern="0" dirty="0">
+                <a:solidFill>
+                  <a:srgbClr val="9C5446"/>
+                </a:solidFill>
+                <a:latin typeface="游明朝" pitchFamily="34" charset="0"/>
+                <a:ea typeface="游明朝" pitchFamily="34" charset="-122"/>
+                <a:cs typeface="游明朝" pitchFamily="34" charset="-120"/>
+              </a:rPr>
+              <a:t>06   </a:t>
+            </a:r>
+            <a:pPr indent="0" marL="0">
+              <a:buNone/>
+            </a:pPr>
+            <a:r>
+              <a:rPr lang="en-US" sz="1000" spc="300" kern="0" dirty="0">
+                <a:solidFill>
+                  <a:srgbClr val="8B8175"/>
+                </a:solidFill>
+                <a:latin typeface="游ゴシック" pitchFamily="34" charset="0"/>
+                <a:ea typeface="游ゴシック" pitchFamily="34" charset="-122"/>
+                <a:cs typeface="游ゴシック" pitchFamily="34" charset="-120"/>
+              </a:rPr>
+              <a:t>CASE</a:t>
+            </a:r>
+            <a:endParaRPr lang="en-US" sz="1000" dirty="0"/>
+          </a:p>
+        </p:txBody>
+      </p:sp>
+      <p:sp>
+        <p:nvSpPr>
+          <p:cNvPr id="4" name="Text 2"/>
+          <p:cNvSpPr txBox="1"/>
+          <p:nvPr/>
+        </p:nvSpPr>
+        <p:spPr>
+          <a:xfrm>
+            <a:off x="685800" y="841248"/>
+            <a:ext cx="10820095" cy="777240"/>
+          </a:xfrm>
+          <a:prstGeom prst="rect">
+            <a:avLst/>
+          </a:prstGeom>
+          <a:noFill/>
+          <a:ln/>
+        </p:spPr>
+        <p:txBody>
+          <a:bodyPr wrap="square" lIns="0" tIns="0" rIns="0" bIns="0" rtlCol="0" anchor="ctr"/>
+          <a:lstStyle/>
+          <a:p>
+            <a:pPr indent="0" marL="0">
+              <a:buNone/>
+            </a:pPr>
+            <a:r>
+              <a:rPr lang="en-US" sz="2800" b="1" spc="100" kern="0" dirty="0">
+                <a:solidFill>
+                  <a:srgbClr val="2B2620"/>
+                </a:solidFill>
+                <a:latin typeface="游明朝" pitchFamily="34" charset="0"/>
+                <a:ea typeface="游明朝" pitchFamily="34" charset="-122"/>
+                <a:cs typeface="游明朝" pitchFamily="34" charset="-120"/>
+              </a:rPr>
+              <a:t>「企業 × 鍼灸」は、すでに成立しています</a:t>
+            </a:r>
+            <a:endParaRPr lang="en-US" sz="2800" dirty="0"/>
+          </a:p>
+        </p:txBody>
+      </p:sp>
+      <p:sp>
+        <p:nvSpPr>
+          <p:cNvPr id="5" name="Text 3"/>
+          <p:cNvSpPr txBox="1"/>
+          <p:nvPr/>
+        </p:nvSpPr>
+        <p:spPr>
+          <a:xfrm>
+            <a:off x="685800" y="1783080"/>
+            <a:ext cx="6035040" cy="3840480"/>
+          </a:xfrm>
+          <a:prstGeom prst="rect">
+            <a:avLst/>
+          </a:prstGeom>
+          <a:noFill/>
+          <a:ln/>
+        </p:spPr>
+        <p:txBody>
+          <a:bodyPr wrap="square" lIns="0" tIns="0" rIns="0" bIns="0" rtlCol="0" anchor="t"/>
+          <a:lstStyle/>
+          <a:p>
+            <a:pPr marL="342900" indent="-342900">
+              <a:lnSpc>
+                <a:spcPts val="1900"/>
+              </a:lnSpc>
+              <a:buSzPct val="100000"/>
+              <a:buChar char="•"/>
+            </a:pPr>
+            <a:r>
+              <a:rPr lang="en-US" sz="1050" dirty="0">
+                <a:solidFill>
+                  <a:srgbClr val="5A5249"/>
+                </a:solidFill>
+                <a:latin typeface="游ゴシック" pitchFamily="34" charset="0"/>
+                <a:ea typeface="游ゴシック" pitchFamily="34" charset="-122"/>
+                <a:cs typeface="游ゴシック" pitchFamily="34" charset="-120"/>
+              </a:rPr>
+              <a:t>睡眠製品のブレインスリープ社は、</a:t>
+            </a:r>
+            <a:pPr indent="0" marL="0">
+              <a:lnSpc>
+                <a:spcPts val="1900"/>
+              </a:lnSpc>
+              <a:buNone/>
+            </a:pPr>
+            <a:r>
+              <a:rPr lang="en-US" sz="1050" b="1" dirty="0">
+                <a:solidFill>
+                  <a:srgbClr val="2B2620"/>
+                </a:solidFill>
+                <a:latin typeface="游ゴシック" pitchFamily="34" charset="0"/>
+                <a:ea typeface="游ゴシック" pitchFamily="34" charset="-122"/>
+                <a:cs typeface="游ゴシック" pitchFamily="34" charset="-120"/>
+              </a:rPr>
+              <a:t>睡眠専門の鍼灸マッサージ「コンディショニングスタジオ」</a:t>
+            </a:r>
+            <a:pPr indent="0" marL="0">
+              <a:lnSpc>
+                <a:spcPts val="1900"/>
+              </a:lnSpc>
+              <a:spcAft>
+                <a:spcPts val="1000"/>
+              </a:spcAft>
+              <a:buNone/>
+            </a:pPr>
+            <a:r>
+              <a:rPr lang="en-US" sz="1050" dirty="0">
+                <a:solidFill>
+                  <a:srgbClr val="5A5249"/>
+                </a:solidFill>
+                <a:latin typeface="游ゴシック" pitchFamily="34" charset="0"/>
+                <a:ea typeface="游ゴシック" pitchFamily="34" charset="-122"/>
+                <a:cs typeface="游ゴシック" pitchFamily="34" charset="-120"/>
+              </a:rPr>
+              <a:t>を自社ブランドで運営。枕の売り場ではなく、独立した鍼灸院です。</a:t>
+            </a:r>
+            <a:endParaRPr lang="en-US" sz="1050" dirty="0"/>
+          </a:p>
+          <a:p>
+            <a:pPr marL="342900" indent="-342900">
+              <a:lnSpc>
+                <a:spcPts val="1900"/>
+              </a:lnSpc>
+              <a:buSzPct val="100000"/>
+              <a:buChar char="•"/>
+            </a:pPr>
+            <a:r>
+              <a:rPr lang="en-US" sz="1050" dirty="0">
+                <a:solidFill>
+                  <a:srgbClr val="5A5249"/>
+                </a:solidFill>
+                <a:latin typeface="游ゴシック" pitchFamily="34" charset="0"/>
+                <a:ea typeface="游ゴシック" pitchFamily="34" charset="-122"/>
+                <a:cs typeface="游ゴシック" pitchFamily="34" charset="-120"/>
+              </a:rPr>
+              <a:t>二子玉川・南青山・</a:t>
+            </a:r>
+            <a:pPr indent="0" marL="0">
+              <a:lnSpc>
+                <a:spcPts val="1900"/>
+              </a:lnSpc>
+              <a:buNone/>
+            </a:pPr>
+            <a:r>
+              <a:rPr lang="en-US" sz="1050" b="1" dirty="0">
+                <a:solidFill>
+                  <a:srgbClr val="2B2620"/>
+                </a:solidFill>
+                <a:latin typeface="游ゴシック" pitchFamily="34" charset="0"/>
+                <a:ea typeface="游ゴシック" pitchFamily="34" charset="-122"/>
+                <a:cs typeface="游ゴシック" pitchFamily="34" charset="-120"/>
+              </a:rPr>
+              <a:t>有楽町マルイ</a:t>
+            </a:r>
+            <a:pPr indent="0" marL="0">
+              <a:lnSpc>
+                <a:spcPts val="1900"/>
+              </a:lnSpc>
+              <a:buNone/>
+            </a:pPr>
+            <a:r>
+              <a:rPr lang="en-US" sz="1050" dirty="0">
+                <a:solidFill>
+                  <a:srgbClr val="5A5249"/>
+                </a:solidFill>
+                <a:latin typeface="游ゴシック" pitchFamily="34" charset="0"/>
+                <a:ea typeface="游ゴシック" pitchFamily="34" charset="-122"/>
+                <a:cs typeface="游ゴシック" pitchFamily="34" charset="-120"/>
+              </a:rPr>
+              <a:t>・東京ミッドタウン八重洲の</a:t>
+            </a:r>
+            <a:pPr indent="0" marL="0">
+              <a:lnSpc>
+                <a:spcPts val="1900"/>
+              </a:lnSpc>
+              <a:buNone/>
+            </a:pPr>
+            <a:r>
+              <a:rPr lang="en-US" sz="1050" b="1" dirty="0">
+                <a:solidFill>
+                  <a:srgbClr val="2B2620"/>
+                </a:solidFill>
+                <a:latin typeface="游ゴシック" pitchFamily="34" charset="0"/>
+                <a:ea typeface="游ゴシック" pitchFamily="34" charset="-122"/>
+                <a:cs typeface="游ゴシック" pitchFamily="34" charset="-120"/>
+              </a:rPr>
+              <a:t>4店舗</a:t>
+            </a:r>
+            <a:pPr indent="0" marL="0">
+              <a:lnSpc>
+                <a:spcPts val="1900"/>
+              </a:lnSpc>
+              <a:spcAft>
+                <a:spcPts val="1000"/>
+              </a:spcAft>
+              <a:buNone/>
+            </a:pPr>
+            <a:r>
+              <a:rPr lang="en-US" sz="1050" dirty="0">
+                <a:solidFill>
+                  <a:srgbClr val="5A5249"/>
+                </a:solidFill>
+                <a:latin typeface="游ゴシック" pitchFamily="34" charset="0"/>
+                <a:ea typeface="游ゴシック" pitchFamily="34" charset="-122"/>
+                <a:cs typeface="游ゴシック" pitchFamily="34" charset="-120"/>
+              </a:rPr>
+              <a:t>。商業施設側である丸井グループも、自らプレスリリースを出しています。</a:t>
+            </a:r>
+            <a:endParaRPr lang="en-US" sz="1050" dirty="0"/>
+          </a:p>
+          <a:p>
+            <a:pPr marL="342900" indent="-342900">
+              <a:lnSpc>
+                <a:spcPts val="1900"/>
+              </a:lnSpc>
+              <a:buSzPct val="100000"/>
+              <a:buChar char="•"/>
+            </a:pPr>
+            <a:r>
+              <a:rPr lang="en-US" sz="1050" dirty="0">
+                <a:solidFill>
+                  <a:srgbClr val="5A5249"/>
+                </a:solidFill>
+                <a:latin typeface="游ゴシック" pitchFamily="34" charset="0"/>
+                <a:ea typeface="游ゴシック" pitchFamily="34" charset="-122"/>
+                <a:cs typeface="游ゴシック" pitchFamily="34" charset="-120"/>
+              </a:rPr>
+              <a:t>オープン以来</a:t>
+            </a:r>
+            <a:pPr indent="0" marL="0">
+              <a:lnSpc>
+                <a:spcPts val="1900"/>
+              </a:lnSpc>
+              <a:buNone/>
+            </a:pPr>
+            <a:r>
+              <a:rPr lang="en-US" sz="1050" b="1" dirty="0">
+                <a:solidFill>
+                  <a:srgbClr val="2B2620"/>
+                </a:solidFill>
+                <a:latin typeface="游ゴシック" pitchFamily="34" charset="0"/>
+                <a:ea typeface="游ゴシック" pitchFamily="34" charset="-122"/>
+                <a:cs typeface="游ゴシック" pitchFamily="34" charset="-120"/>
+              </a:rPr>
+              <a:t>累計1万人以上</a:t>
+            </a:r>
+            <a:pPr indent="0" marL="0">
+              <a:lnSpc>
+                <a:spcPts val="1900"/>
+              </a:lnSpc>
+              <a:buNone/>
+            </a:pPr>
+            <a:r>
+              <a:rPr lang="en-US" sz="1050" dirty="0">
+                <a:solidFill>
+                  <a:srgbClr val="5A5249"/>
+                </a:solidFill>
+                <a:latin typeface="游ゴシック" pitchFamily="34" charset="0"/>
+                <a:ea typeface="游ゴシック" pitchFamily="34" charset="-122"/>
+                <a:cs typeface="游ゴシック" pitchFamily="34" charset="-120"/>
+              </a:rPr>
+              <a:t>が利用。自社研究では、1度の施術で眠りの深さが</a:t>
+            </a:r>
+            <a:pPr indent="0" marL="0">
+              <a:lnSpc>
+                <a:spcPts val="1900"/>
+              </a:lnSpc>
+              <a:buNone/>
+            </a:pPr>
+            <a:r>
+              <a:rPr lang="en-US" sz="1050" b="1" dirty="0">
+                <a:solidFill>
+                  <a:srgbClr val="2B2620"/>
+                </a:solidFill>
+                <a:latin typeface="游ゴシック" pitchFamily="34" charset="0"/>
+                <a:ea typeface="游ゴシック" pitchFamily="34" charset="-122"/>
+                <a:cs typeface="游ゴシック" pitchFamily="34" charset="-120"/>
+              </a:rPr>
+              <a:t>35%</a:t>
+            </a:r>
+            <a:pPr indent="0" marL="0">
+              <a:lnSpc>
+                <a:spcPts val="1900"/>
+              </a:lnSpc>
+              <a:buNone/>
+            </a:pPr>
+            <a:r>
+              <a:rPr lang="en-US" sz="1050" dirty="0">
+                <a:solidFill>
+                  <a:srgbClr val="5A5249"/>
+                </a:solidFill>
+                <a:latin typeface="游ゴシック" pitchFamily="34" charset="0"/>
+                <a:ea typeface="游ゴシック" pitchFamily="34" charset="-122"/>
+                <a:cs typeface="游ゴシック" pitchFamily="34" charset="-120"/>
+              </a:rPr>
+              <a:t>、疲労回復度が</a:t>
+            </a:r>
+            <a:pPr indent="0" marL="0">
+              <a:lnSpc>
+                <a:spcPts val="1900"/>
+              </a:lnSpc>
+              <a:buNone/>
+            </a:pPr>
+            <a:r>
+              <a:rPr lang="en-US" sz="1050" b="1" dirty="0">
+                <a:solidFill>
+                  <a:srgbClr val="2B2620"/>
+                </a:solidFill>
+                <a:latin typeface="游ゴシック" pitchFamily="34" charset="0"/>
+                <a:ea typeface="游ゴシック" pitchFamily="34" charset="-122"/>
+                <a:cs typeface="游ゴシック" pitchFamily="34" charset="-120"/>
+              </a:rPr>
+              <a:t>59%</a:t>
+            </a:r>
+            <a:pPr indent="0" marL="0">
+              <a:lnSpc>
+                <a:spcPts val="1900"/>
+              </a:lnSpc>
+              <a:spcAft>
+                <a:spcPts val="1000"/>
+              </a:spcAft>
+              <a:buNone/>
+            </a:pPr>
+            <a:r>
+              <a:rPr lang="en-US" sz="1050" dirty="0">
+                <a:solidFill>
+                  <a:srgbClr val="5A5249"/>
+                </a:solidFill>
+                <a:latin typeface="游ゴシック" pitchFamily="34" charset="0"/>
+                <a:ea typeface="游ゴシック" pitchFamily="34" charset="-122"/>
+                <a:cs typeface="游ゴシック" pitchFamily="34" charset="-120"/>
+              </a:rPr>
+              <a:t>向上したと公表。</a:t>
+            </a:r>
+            <a:endParaRPr lang="en-US" sz="1050" dirty="0"/>
+          </a:p>
+          <a:p>
+            <a:pPr marL="342900" indent="-342900">
+              <a:lnSpc>
+                <a:spcPts val="1900"/>
+              </a:lnSpc>
+              <a:buSzPct val="100000"/>
+              <a:buChar char="•"/>
+            </a:pPr>
+            <a:r>
+              <a:rPr lang="en-US" sz="1050" dirty="0">
+                <a:solidFill>
+                  <a:srgbClr val="5A5249"/>
+                </a:solidFill>
+                <a:latin typeface="游ゴシック" pitchFamily="34" charset="0"/>
+                <a:ea typeface="游ゴシック" pitchFamily="34" charset="-122"/>
+                <a:cs typeface="游ゴシック" pitchFamily="34" charset="-120"/>
+              </a:rPr>
+              <a:t>スタッフは全員が国家資格保有者で、自社資格「スリーププランナー」を取得。</a:t>
+            </a:r>
+            <a:pPr indent="0" marL="0">
+              <a:lnSpc>
+                <a:spcPts val="1900"/>
+              </a:lnSpc>
+              <a:buNone/>
+            </a:pPr>
+            <a:r>
+              <a:rPr lang="en-US" sz="1050" b="1" dirty="0">
+                <a:solidFill>
+                  <a:srgbClr val="2B2620"/>
+                </a:solidFill>
+                <a:latin typeface="游ゴシック" pitchFamily="34" charset="0"/>
+                <a:ea typeface="游ゴシック" pitchFamily="34" charset="-122"/>
+                <a:cs typeface="游ゴシック" pitchFamily="34" charset="-120"/>
+              </a:rPr>
+              <a:t>定額プラン</a:t>
+            </a:r>
+            <a:pPr indent="0" marL="0">
+              <a:lnSpc>
+                <a:spcPts val="1900"/>
+              </a:lnSpc>
+              <a:spcAft>
+                <a:spcPts val="1000"/>
+              </a:spcAft>
+              <a:buNone/>
+            </a:pPr>
+            <a:r>
+              <a:rPr lang="en-US" sz="1050" dirty="0">
+                <a:solidFill>
+                  <a:srgbClr val="5A5249"/>
+                </a:solidFill>
+                <a:latin typeface="游ゴシック" pitchFamily="34" charset="0"/>
+                <a:ea typeface="游ゴシック" pitchFamily="34" charset="-122"/>
+                <a:cs typeface="游ゴシック" pitchFamily="34" charset="-120"/>
+              </a:rPr>
+              <a:t>で、継続して通う前提が設計されています。</a:t>
+            </a:r>
+            <a:endParaRPr lang="en-US" sz="1050" dirty="0"/>
+          </a:p>
+        </p:txBody>
+      </p:sp>
+      <p:sp>
+        <p:nvSpPr>
+          <p:cNvPr id="6" name="Shape 4"/>
+          <p:cNvSpPr/>
+          <p:nvPr/>
+        </p:nvSpPr>
+        <p:spPr>
+          <a:xfrm>
+            <a:off x="7040880" y="1783080"/>
+            <a:ext cx="4462272" cy="3200400"/>
+          </a:xfrm>
+          <a:prstGeom prst="roundRect">
+            <a:avLst>
+              <a:gd name="adj" fmla="val 1429"/>
+            </a:avLst>
+          </a:prstGeom>
+          <a:solidFill>
+            <a:srgbClr val="FBF6EC"/>
+          </a:solidFill>
+          <a:ln w="9525">
+            <a:solidFill>
+              <a:srgbClr val="5E7060"/>
+            </a:solidFill>
+            <a:prstDash val="solid"/>
+          </a:ln>
+        </p:spPr>
+      </p:sp>
+      <p:sp>
+        <p:nvSpPr>
+          <p:cNvPr id="7" name="Text 5"/>
+          <p:cNvSpPr txBox="1"/>
+          <p:nvPr/>
+        </p:nvSpPr>
+        <p:spPr>
+          <a:xfrm>
+            <a:off x="7315200" y="1984248"/>
+            <a:ext cx="3913632" cy="237744"/>
+          </a:xfrm>
+          <a:prstGeom prst="rect">
+            <a:avLst/>
+          </a:prstGeom>
+          <a:noFill/>
+          <a:ln/>
+        </p:spPr>
+        <p:txBody>
+          <a:bodyPr wrap="square" lIns="0" tIns="0" rIns="0" bIns="0" rtlCol="0" anchor="ctr"/>
+          <a:lstStyle/>
+          <a:p>
+            <a:pPr indent="0" marL="0">
+              <a:buNone/>
+            </a:pPr>
+            <a:r>
+              <a:rPr lang="en-US" sz="900" b="1" spc="200" kern="0" dirty="0">
+                <a:solidFill>
+                  <a:srgbClr val="5E7060"/>
+                </a:solidFill>
+                <a:latin typeface="游ゴシック" pitchFamily="34" charset="0"/>
+                <a:ea typeface="游ゴシック" pitchFamily="34" charset="-122"/>
+                <a:cs typeface="游ゴシック" pitchFamily="34" charset="-120"/>
+              </a:rPr>
+              <a:t>ここから私が受け取ったこと</a:t>
+            </a:r>
+            <a:endParaRPr lang="en-US" sz="900" dirty="0"/>
+          </a:p>
+        </p:txBody>
+      </p:sp>
+      <p:sp>
+        <p:nvSpPr>
+          <p:cNvPr id="8" name="Text 6"/>
+          <p:cNvSpPr txBox="1"/>
+          <p:nvPr/>
+        </p:nvSpPr>
+        <p:spPr>
+          <a:xfrm>
+            <a:off x="7315200" y="2295144"/>
+            <a:ext cx="3913632" cy="2468880"/>
+          </a:xfrm>
+          <a:prstGeom prst="rect">
+            <a:avLst/>
+          </a:prstGeom>
+          <a:noFill/>
+          <a:ln/>
+        </p:spPr>
+        <p:txBody>
+          <a:bodyPr wrap="square" lIns="0" tIns="0" rIns="0" bIns="0" rtlCol="0" anchor="t"/>
+          <a:lstStyle/>
+          <a:p>
+            <a:pPr indent="0" marL="0">
+              <a:lnSpc>
+                <a:spcPts val="1900"/>
+              </a:lnSpc>
+              <a:buNone/>
+            </a:pPr>
+            <a:r>
+              <a:rPr lang="en-US" sz="1100" dirty="0">
+                <a:solidFill>
+                  <a:srgbClr val="5A5249"/>
+                </a:solidFill>
+                <a:latin typeface="游ゴシック" pitchFamily="34" charset="0"/>
+                <a:ea typeface="游ゴシック" pitchFamily="34" charset="-122"/>
+                <a:cs typeface="游ゴシック" pitchFamily="34" charset="-120"/>
+              </a:rPr>
+              <a:t>製品を売って終わりにせず、施術という接点で人と関わり続ける。効果を数字で示し、資格者を自社で育て、定額で通ってもらう。——私がやろうとしている構造と、ほぼ同じです。</a:t>
+            </a:r>
+            <a:endParaRPr lang="en-US" sz="1100" dirty="0"/>
+          </a:p>
+          <a:p>
+            <a:pPr indent="0" marL="0">
+              <a:lnSpc>
+                <a:spcPts val="1900"/>
+              </a:lnSpc>
+              <a:buNone/>
+            </a:pPr>
+            <a:endParaRPr lang="en-US" sz="1100" dirty="0"/>
+          </a:p>
+          <a:p>
+            <a:pPr indent="0" marL="0">
+              <a:lnSpc>
+                <a:spcPts val="1900"/>
+              </a:lnSpc>
+              <a:buNone/>
+            </a:pPr>
+            <a:r>
+              <a:rPr lang="en-US" sz="1100" dirty="0">
+                <a:solidFill>
+                  <a:srgbClr val="5A5249"/>
+                </a:solidFill>
+                <a:latin typeface="游ゴシック" pitchFamily="34" charset="0"/>
+                <a:ea typeface="游ゴシック" pitchFamily="34" charset="-122"/>
+                <a:cs typeface="游ゴシック" pitchFamily="34" charset="-120"/>
+              </a:rPr>
+              <a:t>違いは入口です。</a:t>
+            </a:r>
+            <a:endParaRPr lang="en-US" sz="1100" dirty="0"/>
+          </a:p>
+          <a:p>
+            <a:pPr indent="0" marL="0">
+              <a:lnSpc>
+                <a:spcPts val="1900"/>
+              </a:lnSpc>
+              <a:buNone/>
+            </a:pPr>
+            <a:r>
+              <a:rPr lang="en-US" sz="1100" b="1" dirty="0">
+                <a:solidFill>
+                  <a:srgbClr val="2B2620"/>
+                </a:solidFill>
+                <a:latin typeface="游ゴシック" pitchFamily="34" charset="0"/>
+                <a:ea typeface="游ゴシック" pitchFamily="34" charset="-122"/>
+                <a:cs typeface="游ゴシック" pitchFamily="34" charset="-120"/>
+              </a:rPr>
+              <a:t>あの会社は「睡眠」から入った。私は「こころ」から入ります。</a:t>
+            </a:r>
+            <a:endParaRPr lang="en-US" sz="1100" dirty="0"/>
+          </a:p>
+        </p:txBody>
+      </p:sp>
+      <p:sp>
+        <p:nvSpPr>
+          <p:cNvPr id="9" name="Text 7"/>
+          <p:cNvSpPr txBox="1"/>
+          <p:nvPr/>
+        </p:nvSpPr>
+        <p:spPr>
+          <a:xfrm>
+            <a:off x="685800" y="5852160"/>
+            <a:ext cx="10820095" cy="329184"/>
+          </a:xfrm>
+          <a:prstGeom prst="rect">
+            <a:avLst/>
+          </a:prstGeom>
+          <a:noFill/>
+          <a:ln/>
+        </p:spPr>
+        <p:txBody>
+          <a:bodyPr wrap="square" lIns="0" tIns="0" rIns="0" bIns="0" rtlCol="0" anchor="t"/>
+          <a:lstStyle/>
+          <a:p>
+            <a:pPr indent="0" marL="0">
+              <a:lnSpc>
+                <a:spcPts val="1100"/>
+              </a:lnSpc>
+              <a:buNone/>
+            </a:pPr>
+            <a:r>
+              <a:rPr lang="en-US" sz="750" dirty="0">
+                <a:solidFill>
+                  <a:srgbClr val="8B8175"/>
+                </a:solidFill>
+                <a:latin typeface="游ゴシック" pitchFamily="34" charset="0"/>
+                <a:ea typeface="游ゴシック" pitchFamily="34" charset="-122"/>
+                <a:cs typeface="游ゴシック" pitchFamily="34" charset="-120"/>
+              </a:rPr>
+              <a:t>出典：株式会社丸井グループ プレスリリース（2024.11.15）／株式会社ブレインスリープ プレスリリース／ブレインスリープ コンディショニングスタジオ 公式サイト</a:t>
+            </a:r>
+            <a:endParaRPr lang="en-US" sz="750" dirty="0"/>
+          </a:p>
+        </p:txBody>
+      </p:sp>
+      <p:sp>
+        <p:nvSpPr>
+          <p:cNvPr id="10" name="Text 8"/>
+          <p:cNvSpPr txBox="1"/>
+          <p:nvPr/>
+        </p:nvSpPr>
+        <p:spPr>
+          <a:xfrm>
+            <a:off x="685800" y="6336792"/>
+            <a:ext cx="7315200" cy="274320"/>
+          </a:xfrm>
+          <a:prstGeom prst="rect">
+            <a:avLst/>
+          </a:prstGeom>
+          <a:noFill/>
+          <a:ln/>
+        </p:spPr>
+        <p:txBody>
+          <a:bodyPr wrap="square" lIns="0" tIns="0" rIns="0" bIns="0" rtlCol="0" anchor="ctr"/>
+          <a:lstStyle/>
+          <a:p>
+            <a:pPr indent="0" marL="0">
+              <a:buNone/>
+            </a:pPr>
+            <a:r>
+              <a:rPr lang="en-US" sz="900" spc="100" kern="0" dirty="0">
+                <a:solidFill>
+                  <a:srgbClr val="8B8175"/>
+                </a:solidFill>
+                <a:latin typeface="游ゴシック" pitchFamily="34" charset="0"/>
+                <a:ea typeface="游ゴシック" pitchFamily="34" charset="-122"/>
+                <a:cs typeface="游ゴシック" pitchFamily="34" charset="-120"/>
+              </a:rPr>
+              <a:t>米倉まな｜アポプラスステーション様 ご提案</a:t>
+            </a:r>
+            <a:endParaRPr lang="en-US" sz="900" dirty="0"/>
+          </a:p>
+        </p:txBody>
+      </p:sp>
+      <p:sp>
+        <p:nvSpPr>
+          <p:cNvPr id="11" name="Text 9"/>
+          <p:cNvSpPr txBox="1"/>
+          <p:nvPr/>
+        </p:nvSpPr>
+        <p:spPr>
+          <a:xfrm>
+            <a:off x="8305495" y="6336792"/>
+            <a:ext cx="3200400" cy="274320"/>
+          </a:xfrm>
+          <a:prstGeom prst="rect">
+            <a:avLst/>
+          </a:prstGeom>
+          <a:noFill/>
+          <a:ln/>
+        </p:spPr>
+        <p:txBody>
+          <a:bodyPr wrap="square" lIns="0" tIns="0" rIns="0" bIns="0" rtlCol="0" anchor="ctr"/>
+          <a:lstStyle/>
+          <a:p>
+            <a:pPr algn="r" indent="0" marL="0">
+              <a:buNone/>
+            </a:pPr>
+            <a:r>
+              <a:rPr lang="en-US" sz="900" dirty="0">
+                <a:solidFill>
+                  <a:srgbClr val="8B8175"/>
+                </a:solidFill>
+                <a:latin typeface="游ゴシック" pitchFamily="34" charset="0"/>
+                <a:ea typeface="游ゴシック" pitchFamily="34" charset="-122"/>
+                <a:cs typeface="游ゴシック" pitchFamily="34" charset="-120"/>
+              </a:rPr>
+              <a:t>3:35 → 4:15</a:t>
+            </a:r>
+            <a:endParaRPr lang="en-US" sz="900" dirty="0"/>
+          </a:p>
+        </p:txBody>
+      </p:sp>
+    </p:spTree>
+  </p:cSld>
+  <p:clrMapOvr>
+    <a:masterClrMapping/>
+  </p:clrMapOvr>
+</p:sld>
+</file>
+
+<file path=ppt/slides/slide8.xml><?xml version="1.0" encoding="utf-8"?>
+<p:sld xmlns:a="http://schemas.openxmlformats.org/drawingml/2006/main" xmlns:r="http://schemas.openxmlformats.org/officeDocument/2006/relationships" xmlns:p="http://schemas.openxmlformats.org/presentationml/2006/main">
+  <p:cSld name="Slide 8">
     <p:bg>
       <p:bgPr>
         <a:solidFill>
@@ -6282,7 +8007,7 @@
                 <a:ea typeface="游明朝" pitchFamily="34" charset="-122"/>
                 <a:cs typeface="游明朝" pitchFamily="34" charset="-120"/>
               </a:rPr>
-              <a:t>06   </a:t>
+              <a:t>07   </a:t>
             </a:r>
             <a:pPr indent="0" marL="0">
               <a:buNone/>
@@ -6760,728 +8485,7 @@
                 <a:ea typeface="游ゴシック" pitchFamily="34" charset="-122"/>
                 <a:cs typeface="游ゴシック" pitchFamily="34" charset="-120"/>
               </a:rPr>
-              <a:t>4:05 → 4:35</a:t>
-            </a:r>
-            <a:endParaRPr lang="en-US" sz="900" dirty="0"/>
-          </a:p>
-        </p:txBody>
-      </p:sp>
-    </p:spTree>
-  </p:cSld>
-  <p:clrMapOvr>
-    <a:masterClrMapping/>
-  </p:clrMapOvr>
-</p:sld>
-</file>
-
-<file path=ppt/slides/slide8.xml><?xml version="1.0" encoding="utf-8"?>
-<p:sld xmlns:a="http://schemas.openxmlformats.org/drawingml/2006/main" xmlns:r="http://schemas.openxmlformats.org/officeDocument/2006/relationships" xmlns:p="http://schemas.openxmlformats.org/presentationml/2006/main">
-  <p:cSld name="Slide 8">
-    <p:bg>
-      <p:bgPr>
-        <a:solidFill>
-          <a:srgbClr val="F3EADB"/>
-        </a:solidFill>
-      </p:bgPr>
-    </p:bg>
-    <p:spTree>
-      <p:nvGrpSpPr>
-        <p:cNvPr id="1" name=""/>
-        <p:cNvGrpSpPr/>
-        <p:nvPr/>
-      </p:nvGrpSpPr>
-      <p:grpSpPr>
-        <a:xfrm>
-          <a:off x="0" y="0"/>
-          <a:ext cx="0" cy="0"/>
-          <a:chOff x="0" y="0"/>
-          <a:chExt cx="0" cy="0"/>
-        </a:xfrm>
-      </p:grpSpPr>
-      <p:sp>
-        <p:nvSpPr>
-          <p:cNvPr id="2" name="Shape 0"/>
-          <p:cNvSpPr/>
-          <p:nvPr/>
-        </p:nvSpPr>
-        <p:spPr>
-          <a:xfrm>
-            <a:off x="685800" y="562356"/>
-            <a:ext cx="237744" cy="12802"/>
-          </a:xfrm>
-          <a:prstGeom prst="rect">
-            <a:avLst/>
-          </a:prstGeom>
-          <a:solidFill>
-            <a:srgbClr val="9C5446"/>
-          </a:solidFill>
-          <a:ln/>
-        </p:spPr>
-      </p:sp>
-      <p:sp>
-        <p:nvSpPr>
-          <p:cNvPr id="3" name="Text 1"/>
-          <p:cNvSpPr txBox="1"/>
-          <p:nvPr/>
-        </p:nvSpPr>
-        <p:spPr>
-          <a:xfrm>
-            <a:off x="996696" y="402336"/>
-            <a:ext cx="7315200" cy="310896"/>
-          </a:xfrm>
-          <a:prstGeom prst="rect">
-            <a:avLst/>
-          </a:prstGeom>
-          <a:noFill/>
-          <a:ln/>
-        </p:spPr>
-        <p:txBody>
-          <a:bodyPr wrap="square" lIns="0" tIns="0" rIns="0" bIns="0" rtlCol="0" anchor="ctr"/>
-          <a:lstStyle/>
-          <a:p>
-            <a:pPr indent="0" marL="0">
-              <a:buNone/>
-            </a:pPr>
-            <a:r>
-              <a:rPr lang="en-US" sz="1000" b="1" spc="200" kern="0" dirty="0">
-                <a:solidFill>
-                  <a:srgbClr val="9C5446"/>
-                </a:solidFill>
-                <a:latin typeface="游明朝" pitchFamily="34" charset="0"/>
-                <a:ea typeface="游明朝" pitchFamily="34" charset="-122"/>
-                <a:cs typeface="游明朝" pitchFamily="34" charset="-120"/>
-              </a:rPr>
-              <a:t>07   </a:t>
-            </a:r>
-            <a:pPr indent="0" marL="0">
-              <a:buNone/>
-            </a:pPr>
-            <a:r>
-              <a:rPr lang="en-US" sz="1000" spc="300" kern="0" dirty="0">
-                <a:solidFill>
-                  <a:srgbClr val="8B8175"/>
-                </a:solidFill>
-                <a:latin typeface="游ゴシック" pitchFamily="34" charset="0"/>
-                <a:ea typeface="游ゴシック" pitchFamily="34" charset="-122"/>
-                <a:cs typeface="游ゴシック" pitchFamily="34" charset="-120"/>
-              </a:rPr>
-              <a:t>ASK</a:t>
-            </a:r>
-            <a:endParaRPr lang="en-US" sz="1000" dirty="0"/>
-          </a:p>
-        </p:txBody>
-      </p:sp>
-      <p:sp>
-        <p:nvSpPr>
-          <p:cNvPr id="4" name="Text 2"/>
-          <p:cNvSpPr txBox="1"/>
-          <p:nvPr/>
-        </p:nvSpPr>
-        <p:spPr>
-          <a:xfrm>
-            <a:off x="685800" y="841248"/>
-            <a:ext cx="10820095" cy="777240"/>
-          </a:xfrm>
-          <a:prstGeom prst="rect">
-            <a:avLst/>
-          </a:prstGeom>
-          <a:noFill/>
-          <a:ln/>
-        </p:spPr>
-        <p:txBody>
-          <a:bodyPr wrap="square" lIns="0" tIns="0" rIns="0" bIns="0" rtlCol="0" anchor="ctr"/>
-          <a:lstStyle/>
-          <a:p>
-            <a:pPr indent="0" marL="0">
-              <a:buNone/>
-            </a:pPr>
-            <a:r>
-              <a:rPr lang="en-US" sz="2800" b="1" spc="100" kern="0" dirty="0">
-                <a:solidFill>
-                  <a:srgbClr val="2B2620"/>
-                </a:solidFill>
-                <a:latin typeface="游明朝" pitchFamily="34" charset="0"/>
-                <a:ea typeface="游明朝" pitchFamily="34" charset="-122"/>
-                <a:cs typeface="游明朝" pitchFamily="34" charset="-120"/>
-              </a:rPr>
-              <a:t>だから、アポプラスステーション様と話したい</a:t>
-            </a:r>
-            <a:endParaRPr lang="en-US" sz="2800" dirty="0"/>
-          </a:p>
-        </p:txBody>
-      </p:sp>
-      <p:sp>
-        <p:nvSpPr>
-          <p:cNvPr id="5" name="Text 3"/>
-          <p:cNvSpPr txBox="1"/>
-          <p:nvPr/>
-        </p:nvSpPr>
-        <p:spPr>
-          <a:xfrm>
-            <a:off x="685800" y="1783080"/>
-            <a:ext cx="548640" cy="365760"/>
-          </a:xfrm>
-          <a:prstGeom prst="rect">
-            <a:avLst/>
-          </a:prstGeom>
-          <a:noFill/>
-          <a:ln/>
-        </p:spPr>
-        <p:txBody>
-          <a:bodyPr wrap="square" lIns="0" tIns="0" rIns="0" bIns="0" rtlCol="0" anchor="ctr"/>
-          <a:lstStyle/>
-          <a:p>
-            <a:pPr indent="0" marL="0">
-              <a:buNone/>
-            </a:pPr>
-            <a:r>
-              <a:rPr lang="en-US" sz="1600" b="1" dirty="0">
-                <a:solidFill>
-                  <a:srgbClr val="9C5446"/>
-                </a:solidFill>
-                <a:latin typeface="游明朝" pitchFamily="34" charset="0"/>
-                <a:ea typeface="游明朝" pitchFamily="34" charset="-122"/>
-                <a:cs typeface="游明朝" pitchFamily="34" charset="-120"/>
-              </a:rPr>
-              <a:t>01</a:t>
-            </a:r>
-            <a:endParaRPr lang="en-US" sz="1600" dirty="0"/>
-          </a:p>
-        </p:txBody>
-      </p:sp>
-      <p:sp>
-        <p:nvSpPr>
-          <p:cNvPr id="6" name="Text 4"/>
-          <p:cNvSpPr txBox="1"/>
-          <p:nvPr/>
-        </p:nvSpPr>
-        <p:spPr>
-          <a:xfrm>
-            <a:off x="1371600" y="1764792"/>
-            <a:ext cx="10058400" cy="329184"/>
-          </a:xfrm>
-          <a:prstGeom prst="rect">
-            <a:avLst/>
-          </a:prstGeom>
-          <a:noFill/>
-          <a:ln/>
-        </p:spPr>
-        <p:txBody>
-          <a:bodyPr wrap="square" lIns="0" tIns="0" rIns="0" bIns="0" rtlCol="0" anchor="ctr"/>
-          <a:lstStyle/>
-          <a:p>
-            <a:pPr indent="0" marL="0">
-              <a:buNone/>
-            </a:pPr>
-            <a:r>
-              <a:rPr lang="en-US" sz="1400" b="1" dirty="0">
-                <a:solidFill>
-                  <a:srgbClr val="2B2620"/>
-                </a:solidFill>
-                <a:latin typeface="游明朝" pitchFamily="34" charset="0"/>
-                <a:ea typeface="游明朝" pitchFamily="34" charset="-122"/>
-                <a:cs typeface="游明朝" pitchFamily="34" charset="-120"/>
-              </a:rPr>
-              <a:t>未病領域の新規事業を、共同で検討させてください</a:t>
-            </a:r>
-            <a:endParaRPr lang="en-US" sz="1400" dirty="0"/>
-          </a:p>
-        </p:txBody>
-      </p:sp>
-      <p:sp>
-        <p:nvSpPr>
-          <p:cNvPr id="7" name="Text 5"/>
-          <p:cNvSpPr txBox="1"/>
-          <p:nvPr/>
-        </p:nvSpPr>
-        <p:spPr>
-          <a:xfrm>
-            <a:off x="1371600" y="2112264"/>
-            <a:ext cx="10058400" cy="329184"/>
-          </a:xfrm>
-          <a:prstGeom prst="rect">
-            <a:avLst/>
-          </a:prstGeom>
-          <a:noFill/>
-          <a:ln/>
-        </p:spPr>
-        <p:txBody>
-          <a:bodyPr wrap="square" lIns="0" tIns="0" rIns="0" bIns="0" rtlCol="0" anchor="ctr"/>
-          <a:lstStyle/>
-          <a:p>
-            <a:pPr indent="0" marL="0">
-              <a:buNone/>
-            </a:pPr>
-            <a:r>
-              <a:rPr lang="en-US" sz="1050" dirty="0">
-                <a:solidFill>
-                  <a:srgbClr val="5A5249"/>
-                </a:solidFill>
-                <a:latin typeface="游ゴシック" pitchFamily="34" charset="0"/>
-                <a:ea typeface="游ゴシック" pitchFamily="34" charset="-122"/>
-                <a:cs typeface="游ゴシック" pitchFamily="34" charset="-120"/>
-              </a:rPr>
-              <a:t>東洋医学 × 御社の事業アセット。入口となるサービス設計から、実証までを一緒に。</a:t>
-            </a:r>
-            <a:endParaRPr lang="en-US" sz="1050" dirty="0"/>
-          </a:p>
-        </p:txBody>
-      </p:sp>
-      <p:sp>
-        <p:nvSpPr>
-          <p:cNvPr id="8" name="Shape 6"/>
-          <p:cNvSpPr/>
-          <p:nvPr/>
-        </p:nvSpPr>
-        <p:spPr>
-          <a:xfrm>
-            <a:off x="685800" y="2551176"/>
-            <a:ext cx="10820095" cy="7315"/>
-          </a:xfrm>
-          <a:prstGeom prst="rect">
-            <a:avLst/>
-          </a:prstGeom>
-          <a:solidFill>
-            <a:srgbClr val="D2C4AE"/>
-          </a:solidFill>
-          <a:ln/>
-        </p:spPr>
-      </p:sp>
-      <p:sp>
-        <p:nvSpPr>
-          <p:cNvPr id="9" name="Text 7"/>
-          <p:cNvSpPr txBox="1"/>
-          <p:nvPr/>
-        </p:nvSpPr>
-        <p:spPr>
-          <a:xfrm>
-            <a:off x="685800" y="2697480"/>
-            <a:ext cx="548640" cy="365760"/>
-          </a:xfrm>
-          <a:prstGeom prst="rect">
-            <a:avLst/>
-          </a:prstGeom>
-          <a:noFill/>
-          <a:ln/>
-        </p:spPr>
-        <p:txBody>
-          <a:bodyPr wrap="square" lIns="0" tIns="0" rIns="0" bIns="0" rtlCol="0" anchor="ctr"/>
-          <a:lstStyle/>
-          <a:p>
-            <a:pPr indent="0" marL="0">
-              <a:buNone/>
-            </a:pPr>
-            <a:r>
-              <a:rPr lang="en-US" sz="1600" b="1" dirty="0">
-                <a:solidFill>
-                  <a:srgbClr val="9C5446"/>
-                </a:solidFill>
-                <a:latin typeface="游明朝" pitchFamily="34" charset="0"/>
-                <a:ea typeface="游明朝" pitchFamily="34" charset="-122"/>
-                <a:cs typeface="游明朝" pitchFamily="34" charset="-120"/>
-              </a:rPr>
-              <a:t>02</a:t>
-            </a:r>
-            <a:endParaRPr lang="en-US" sz="1600" dirty="0"/>
-          </a:p>
-        </p:txBody>
-      </p:sp>
-      <p:sp>
-        <p:nvSpPr>
-          <p:cNvPr id="10" name="Text 8"/>
-          <p:cNvSpPr txBox="1"/>
-          <p:nvPr/>
-        </p:nvSpPr>
-        <p:spPr>
-          <a:xfrm>
-            <a:off x="1371600" y="2679192"/>
-            <a:ext cx="10058400" cy="329184"/>
-          </a:xfrm>
-          <a:prstGeom prst="rect">
-            <a:avLst/>
-          </a:prstGeom>
-          <a:noFill/>
-          <a:ln/>
-        </p:spPr>
-        <p:txBody>
-          <a:bodyPr wrap="square" lIns="0" tIns="0" rIns="0" bIns="0" rtlCol="0" anchor="ctr"/>
-          <a:lstStyle/>
-          <a:p>
-            <a:pPr indent="0" marL="0">
-              <a:buNone/>
-            </a:pPr>
-            <a:r>
-              <a:rPr lang="en-US" sz="1400" b="1" dirty="0">
-                <a:solidFill>
-                  <a:srgbClr val="2B2620"/>
-                </a:solidFill>
-                <a:latin typeface="游明朝" pitchFamily="34" charset="0"/>
-                <a:ea typeface="游明朝" pitchFamily="34" charset="-122"/>
-                <a:cs typeface="游明朝" pitchFamily="34" charset="-120"/>
-              </a:rPr>
-              <a:t>人と組織の知見をお借りしたい</a:t>
-            </a:r>
-            <a:endParaRPr lang="en-US" sz="1400" dirty="0"/>
-          </a:p>
-        </p:txBody>
-      </p:sp>
-      <p:sp>
-        <p:nvSpPr>
-          <p:cNvPr id="11" name="Text 9"/>
-          <p:cNvSpPr txBox="1"/>
-          <p:nvPr/>
-        </p:nvSpPr>
-        <p:spPr>
-          <a:xfrm>
-            <a:off x="1371600" y="3026664"/>
-            <a:ext cx="10058400" cy="329184"/>
-          </a:xfrm>
-          <a:prstGeom prst="rect">
-            <a:avLst/>
-          </a:prstGeom>
-          <a:noFill/>
-          <a:ln/>
-        </p:spPr>
-        <p:txBody>
-          <a:bodyPr wrap="square" lIns="0" tIns="0" rIns="0" bIns="0" rtlCol="0" anchor="ctr"/>
-          <a:lstStyle/>
-          <a:p>
-            <a:pPr indent="0" marL="0">
-              <a:buNone/>
-            </a:pPr>
-            <a:r>
-              <a:rPr lang="en-US" sz="1050" dirty="0">
-                <a:solidFill>
-                  <a:srgbClr val="5A5249"/>
-                </a:solidFill>
-                <a:latin typeface="游ゴシック" pitchFamily="34" charset="0"/>
-                <a:ea typeface="游ゴシック" pitchFamily="34" charset="-122"/>
-                <a:cs typeface="游ゴシック" pitchFamily="34" charset="-120"/>
-              </a:rPr>
-              <a:t>施術者の採用・育成・配置。属人から仕組みへ移すために、御社の人材領域の知見が必要です。</a:t>
-            </a:r>
-            <a:endParaRPr lang="en-US" sz="1050" dirty="0"/>
-          </a:p>
-        </p:txBody>
-      </p:sp>
-      <p:sp>
-        <p:nvSpPr>
-          <p:cNvPr id="12" name="Shape 10"/>
-          <p:cNvSpPr/>
-          <p:nvPr/>
-        </p:nvSpPr>
-        <p:spPr>
-          <a:xfrm>
-            <a:off x="685800" y="3465576"/>
-            <a:ext cx="10820095" cy="7315"/>
-          </a:xfrm>
-          <a:prstGeom prst="rect">
-            <a:avLst/>
-          </a:prstGeom>
-          <a:solidFill>
-            <a:srgbClr val="D2C4AE"/>
-          </a:solidFill>
-          <a:ln/>
-        </p:spPr>
-      </p:sp>
-      <p:sp>
-        <p:nvSpPr>
-          <p:cNvPr id="13" name="Text 11"/>
-          <p:cNvSpPr txBox="1"/>
-          <p:nvPr/>
-        </p:nvSpPr>
-        <p:spPr>
-          <a:xfrm>
-            <a:off x="685800" y="3611880"/>
-            <a:ext cx="548640" cy="365760"/>
-          </a:xfrm>
-          <a:prstGeom prst="rect">
-            <a:avLst/>
-          </a:prstGeom>
-          <a:noFill/>
-          <a:ln/>
-        </p:spPr>
-        <p:txBody>
-          <a:bodyPr wrap="square" lIns="0" tIns="0" rIns="0" bIns="0" rtlCol="0" anchor="ctr"/>
-          <a:lstStyle/>
-          <a:p>
-            <a:pPr indent="0" marL="0">
-              <a:buNone/>
-            </a:pPr>
-            <a:r>
-              <a:rPr lang="en-US" sz="1600" b="1" dirty="0">
-                <a:solidFill>
-                  <a:srgbClr val="9C5446"/>
-                </a:solidFill>
-                <a:latin typeface="游明朝" pitchFamily="34" charset="0"/>
-                <a:ea typeface="游明朝" pitchFamily="34" charset="-122"/>
-                <a:cs typeface="游明朝" pitchFamily="34" charset="-120"/>
-              </a:rPr>
-              <a:t>03</a:t>
-            </a:r>
-            <a:endParaRPr lang="en-US" sz="1600" dirty="0"/>
-          </a:p>
-        </p:txBody>
-      </p:sp>
-      <p:sp>
-        <p:nvSpPr>
-          <p:cNvPr id="14" name="Text 12"/>
-          <p:cNvSpPr txBox="1"/>
-          <p:nvPr/>
-        </p:nvSpPr>
-        <p:spPr>
-          <a:xfrm>
-            <a:off x="1371600" y="3593592"/>
-            <a:ext cx="10058400" cy="329184"/>
-          </a:xfrm>
-          <a:prstGeom prst="rect">
-            <a:avLst/>
-          </a:prstGeom>
-          <a:noFill/>
-          <a:ln/>
-        </p:spPr>
-        <p:txBody>
-          <a:bodyPr wrap="square" lIns="0" tIns="0" rIns="0" bIns="0" rtlCol="0" anchor="ctr"/>
-          <a:lstStyle/>
-          <a:p>
-            <a:pPr indent="0" marL="0">
-              <a:buNone/>
-            </a:pPr>
-            <a:r>
-              <a:rPr lang="en-US" sz="1400" b="1" dirty="0">
-                <a:solidFill>
-                  <a:srgbClr val="2B2620"/>
-                </a:solidFill>
-                <a:latin typeface="游明朝" pitchFamily="34" charset="0"/>
-                <a:ea typeface="游明朝" pitchFamily="34" charset="-122"/>
-                <a:cs typeface="游明朝" pitchFamily="34" charset="-120"/>
-              </a:rPr>
-              <a:t>実証の場をご一緒したい</a:t>
-            </a:r>
-            <a:endParaRPr lang="en-US" sz="1400" dirty="0"/>
-          </a:p>
-        </p:txBody>
-      </p:sp>
-      <p:sp>
-        <p:nvSpPr>
-          <p:cNvPr id="15" name="Text 13"/>
-          <p:cNvSpPr txBox="1"/>
-          <p:nvPr/>
-        </p:nvSpPr>
-        <p:spPr>
-          <a:xfrm>
-            <a:off x="1371600" y="3941064"/>
-            <a:ext cx="10058400" cy="329184"/>
-          </a:xfrm>
-          <a:prstGeom prst="rect">
-            <a:avLst/>
-          </a:prstGeom>
-          <a:noFill/>
-          <a:ln/>
-        </p:spPr>
-        <p:txBody>
-          <a:bodyPr wrap="square" lIns="0" tIns="0" rIns="0" bIns="0" rtlCol="0" anchor="ctr"/>
-          <a:lstStyle/>
-          <a:p>
-            <a:pPr indent="0" marL="0">
-              <a:buNone/>
-            </a:pPr>
-            <a:r>
-              <a:rPr lang="en-US" sz="1050" dirty="0">
-                <a:solidFill>
-                  <a:srgbClr val="5A5249"/>
-                </a:solidFill>
-                <a:latin typeface="游ゴシック" pitchFamily="34" charset="0"/>
-                <a:ea typeface="游ゴシック" pitchFamily="34" charset="-122"/>
-                <a:cs typeface="游ゴシック" pitchFamily="34" charset="-120"/>
-              </a:rPr>
-              <a:t>法人向けの健康支援など、未病層に届く場での実証。効果は学会発表の形で残し、根拠として積み上げます。</a:t>
-            </a:r>
-            <a:endParaRPr lang="en-US" sz="1050" dirty="0"/>
-          </a:p>
-        </p:txBody>
-      </p:sp>
-      <p:sp>
-        <p:nvSpPr>
-          <p:cNvPr id="16" name="Shape 14"/>
-          <p:cNvSpPr/>
-          <p:nvPr/>
-        </p:nvSpPr>
-        <p:spPr>
-          <a:xfrm>
-            <a:off x="685800" y="4663440"/>
-            <a:ext cx="10820095" cy="1188720"/>
-          </a:xfrm>
-          <a:prstGeom prst="roundRect">
-            <a:avLst>
-              <a:gd name="adj" fmla="val 3846"/>
-            </a:avLst>
-          </a:prstGeom>
-          <a:solidFill>
-            <a:srgbClr val="FBF6EC"/>
-          </a:solidFill>
-          <a:ln w="9525">
-            <a:solidFill>
-              <a:srgbClr val="9C5446"/>
-            </a:solidFill>
-            <a:prstDash val="solid"/>
-          </a:ln>
-        </p:spPr>
-      </p:sp>
-      <p:sp>
-        <p:nvSpPr>
-          <p:cNvPr id="17" name="Text 15"/>
-          <p:cNvSpPr txBox="1"/>
-          <p:nvPr/>
-        </p:nvSpPr>
-        <p:spPr>
-          <a:xfrm>
-            <a:off x="960120" y="4864608"/>
-            <a:ext cx="10271455" cy="237744"/>
-          </a:xfrm>
-          <a:prstGeom prst="rect">
-            <a:avLst/>
-          </a:prstGeom>
-          <a:noFill/>
-          <a:ln/>
-        </p:spPr>
-        <p:txBody>
-          <a:bodyPr wrap="square" lIns="0" tIns="0" rIns="0" bIns="0" rtlCol="0" anchor="ctr"/>
-          <a:lstStyle/>
-          <a:p>
-            <a:pPr indent="0" marL="0">
-              <a:buNone/>
-            </a:pPr>
-            <a:r>
-              <a:rPr lang="en-US" sz="900" b="1" spc="200" kern="0" dirty="0">
-                <a:solidFill>
-                  <a:srgbClr val="9C5446"/>
-                </a:solidFill>
-                <a:latin typeface="游ゴシック" pitchFamily="34" charset="0"/>
-                <a:ea typeface="游ゴシック" pitchFamily="34" charset="-122"/>
-                <a:cs typeface="游ゴシック" pitchFamily="34" charset="-120"/>
-              </a:rPr>
-              <a:t>私の目的</a:t>
-            </a:r>
-            <a:endParaRPr lang="en-US" sz="900" dirty="0"/>
-          </a:p>
-        </p:txBody>
-      </p:sp>
-      <p:sp>
-        <p:nvSpPr>
-          <p:cNvPr id="18" name="Text 16"/>
-          <p:cNvSpPr txBox="1"/>
-          <p:nvPr/>
-        </p:nvSpPr>
-        <p:spPr>
-          <a:xfrm>
-            <a:off x="960120" y="5175504"/>
-            <a:ext cx="10271455" cy="457200"/>
-          </a:xfrm>
-          <a:prstGeom prst="rect">
-            <a:avLst/>
-          </a:prstGeom>
-          <a:noFill/>
-          <a:ln/>
-        </p:spPr>
-        <p:txBody>
-          <a:bodyPr wrap="square" lIns="0" tIns="0" rIns="0" bIns="0" rtlCol="0" anchor="t"/>
-          <a:lstStyle/>
-          <a:p>
-            <a:pPr indent="0" marL="0">
-              <a:lnSpc>
-                <a:spcPts val="1900"/>
-              </a:lnSpc>
-              <a:buNone/>
-            </a:pPr>
-            <a:r>
-              <a:rPr lang="en-US" sz="1100" dirty="0">
-                <a:solidFill>
-                  <a:srgbClr val="5A5249"/>
-                </a:solidFill>
-                <a:latin typeface="游ゴシック" pitchFamily="34" charset="0"/>
-                <a:ea typeface="游ゴシック" pitchFamily="34" charset="-122"/>
-                <a:cs typeface="游ゴシック" pitchFamily="34" charset="-120"/>
-              </a:rPr>
-              <a:t>生きづらさを抱えた人を、治療が必要になる手前で減らしたい。そのために、鍼灸の外側にある方法も含めて手を尽くします。</a:t>
-            </a:r>
-            <a:endParaRPr lang="en-US" sz="1100" dirty="0"/>
-          </a:p>
-        </p:txBody>
-      </p:sp>
-      <p:sp>
-        <p:nvSpPr>
-          <p:cNvPr id="19" name="Text 17"/>
-          <p:cNvSpPr txBox="1"/>
-          <p:nvPr/>
-        </p:nvSpPr>
-        <p:spPr>
-          <a:xfrm>
-            <a:off x="685800" y="6336792"/>
-            <a:ext cx="7315200" cy="274320"/>
-          </a:xfrm>
-          <a:prstGeom prst="rect">
-            <a:avLst/>
-          </a:prstGeom>
-          <a:noFill/>
-          <a:ln/>
-        </p:spPr>
-        <p:txBody>
-          <a:bodyPr wrap="square" lIns="0" tIns="0" rIns="0" bIns="0" rtlCol="0" anchor="ctr"/>
-          <a:lstStyle/>
-          <a:p>
-            <a:pPr indent="0" marL="0">
-              <a:buNone/>
-            </a:pPr>
-            <a:r>
-              <a:rPr lang="en-US" sz="900" spc="100" kern="0" dirty="0">
-                <a:solidFill>
-                  <a:srgbClr val="8B8175"/>
-                </a:solidFill>
-                <a:latin typeface="游ゴシック" pitchFamily="34" charset="0"/>
-                <a:ea typeface="游ゴシック" pitchFamily="34" charset="-122"/>
-                <a:cs typeface="游ゴシック" pitchFamily="34" charset="-120"/>
-              </a:rPr>
-              <a:t>米倉まな｜アポプラスステーション様 ご提案</a:t>
-            </a:r>
-            <a:endParaRPr lang="en-US" sz="900" dirty="0"/>
-          </a:p>
-        </p:txBody>
-      </p:sp>
-      <p:sp>
-        <p:nvSpPr>
-          <p:cNvPr id="20" name="Text 18"/>
-          <p:cNvSpPr txBox="1"/>
-          <p:nvPr/>
-        </p:nvSpPr>
-        <p:spPr>
-          <a:xfrm>
-            <a:off x="8305495" y="6336792"/>
-            <a:ext cx="3200400" cy="274320"/>
-          </a:xfrm>
-          <a:prstGeom prst="rect">
-            <a:avLst/>
-          </a:prstGeom>
-          <a:noFill/>
-          <a:ln/>
-        </p:spPr>
-        <p:txBody>
-          <a:bodyPr wrap="square" lIns="0" tIns="0" rIns="0" bIns="0" rtlCol="0" anchor="ctr"/>
-          <a:lstStyle/>
-          <a:p>
-            <a:pPr algn="r" indent="0" marL="0">
-              <a:buNone/>
-            </a:pPr>
-            <a:r>
-              <a:rPr lang="en-US" sz="900" dirty="0">
-                <a:solidFill>
-                  <a:srgbClr val="8B8175"/>
-                </a:solidFill>
-                <a:latin typeface="游ゴシック" pitchFamily="34" charset="0"/>
-                <a:ea typeface="游ゴシック" pitchFamily="34" charset="-122"/>
-                <a:cs typeface="游ゴシック" pitchFamily="34" charset="-120"/>
-              </a:rPr>
-              <a:t>4:35 → 5:00</a:t>
+              <a:t>4:15 → 4:35</a:t>
             </a:r>
             <a:endParaRPr lang="en-US" sz="900" dirty="0"/>
           </a:p>
@@ -7564,54 +8568,68 @@
               <a:buNone/>
             </a:pPr>
             <a:r>
-              <a:rPr lang="en-US" sz="1000" spc="300" kern="0" dirty="0">
-                <a:solidFill>
-                  <a:srgbClr val="8B8175"/>
-                </a:solidFill>
-                <a:latin typeface="游ゴシック" pitchFamily="34" charset="0"/>
-                <a:ea typeface="游ゴシック" pitchFamily="34" charset="-122"/>
-                <a:cs typeface="游ゴシック" pitchFamily="34" charset="-120"/>
-              </a:rPr>
-              <a:t>APPENDIX ／ 参考</a:t>
-            </a:r>
-            <a:endParaRPr lang="en-US" sz="1000" dirty="0"/>
-          </a:p>
-        </p:txBody>
-      </p:sp>
-      <p:sp>
-        <p:nvSpPr>
-          <p:cNvPr id="4" name="Text 2"/>
-          <p:cNvSpPr txBox="1"/>
-          <p:nvPr/>
-        </p:nvSpPr>
-        <p:spPr>
-          <a:xfrm>
-            <a:off x="685800" y="841248"/>
-            <a:ext cx="10820095" cy="777240"/>
-          </a:xfrm>
-          <a:prstGeom prst="rect">
-            <a:avLst/>
-          </a:prstGeom>
-          <a:noFill/>
-          <a:ln/>
-        </p:spPr>
-        <p:txBody>
-          <a:bodyPr wrap="square" lIns="0" tIns="0" rIns="0" bIns="0" rtlCol="0" anchor="ctr"/>
-          <a:lstStyle/>
-          <a:p>
-            <a:pPr indent="0" marL="0">
-              <a:buNone/>
-            </a:pPr>
-            <a:r>
-              <a:rPr lang="en-US" sz="2800" b="1" spc="100" kern="0" dirty="0">
-                <a:solidFill>
-                  <a:srgbClr val="2B2620"/>
+              <a:rPr lang="en-US" sz="1000" b="1" spc="200" kern="0" dirty="0">
+                <a:solidFill>
+                  <a:srgbClr val="9C5446"/>
                 </a:solidFill>
                 <a:latin typeface="游明朝" pitchFamily="34" charset="0"/>
                 <a:ea typeface="游明朝" pitchFamily="34" charset="-122"/>
                 <a:cs typeface="游明朝" pitchFamily="34" charset="-120"/>
               </a:rPr>
-              <a:t>公開されている実績・共同研究</a:t>
+              <a:t>08   </a:t>
+            </a:r>
+            <a:pPr indent="0" marL="0">
+              <a:buNone/>
+            </a:pPr>
+            <a:r>
+              <a:rPr lang="en-US" sz="1000" spc="300" kern="0" dirty="0">
+                <a:solidFill>
+                  <a:srgbClr val="8B8175"/>
+                </a:solidFill>
+                <a:latin typeface="游ゴシック" pitchFamily="34" charset="0"/>
+                <a:ea typeface="游ゴシック" pitchFamily="34" charset="-122"/>
+                <a:cs typeface="游ゴシック" pitchFamily="34" charset="-120"/>
+              </a:rPr>
+              <a:t>ASK</a:t>
+            </a:r>
+            <a:endParaRPr lang="en-US" sz="1000" dirty="0"/>
+          </a:p>
+        </p:txBody>
+      </p:sp>
+      <p:sp>
+        <p:nvSpPr>
+          <p:cNvPr id="4" name="Text 2"/>
+          <p:cNvSpPr txBox="1"/>
+          <p:nvPr/>
+        </p:nvSpPr>
+        <p:spPr>
+          <a:xfrm>
+            <a:off x="685800" y="841248"/>
+            <a:ext cx="10820095" cy="777240"/>
+          </a:xfrm>
+          <a:prstGeom prst="rect">
+            <a:avLst/>
+          </a:prstGeom>
+          <a:noFill/>
+          <a:ln/>
+        </p:spPr>
+        <p:txBody>
+          <a:bodyPr wrap="square" lIns="0" tIns="0" rIns="0" bIns="0" rtlCol="0" anchor="ctr"/>
+          <a:lstStyle/>
+          <a:p>
+            <a:pPr indent="0" marL="0">
+              <a:buNone/>
+            </a:pPr>
+            <a:r>
+              <a:rPr lang="en-US" sz="2800" b="1" spc="100" kern="0" dirty="0">
+                <a:solidFill>
+                  <a:srgbClr val="2B2620"/>
+                </a:solidFill>
+                <a:latin typeface="游明朝" pitchFamily="34" charset="0"/>
+                <a:ea typeface="游明朝" pitchFamily="34" charset="-122"/>
+                <a:cs typeface="游明朝" pitchFamily="34" charset="-120"/>
+              </a:rPr>
+              <a:t>だから、アポプラスステーション様と話したい</a:t>
             </a:r>
             <a:endParaRPr lang="en-US" sz="2800" dirty="0"/>
           </a:p>
@@ -7619,13 +8637,130 @@
       </p:sp>
       <p:sp>
         <p:nvSpPr>
-          <p:cNvPr id="5" name="Shape 3"/>
+          <p:cNvPr id="5" name="Text 3"/>
+          <p:cNvSpPr txBox="1"/>
+          <p:nvPr/>
+        </p:nvSpPr>
+        <p:spPr>
+          <a:xfrm>
+            <a:off x="685800" y="1783080"/>
+            <a:ext cx="548640" cy="365760"/>
+          </a:xfrm>
+          <a:prstGeom prst="rect">
+            <a:avLst/>
+          </a:prstGeom>
+          <a:noFill/>
+          <a:ln/>
+        </p:spPr>
+        <p:txBody>
+          <a:bodyPr wrap="square" lIns="0" tIns="0" rIns="0" bIns="0" rtlCol="0" anchor="ctr"/>
+          <a:lstStyle/>
+          <a:p>
+            <a:pPr indent="0" marL="0">
+              <a:buNone/>
+            </a:pPr>
+            <a:r>
+              <a:rPr lang="en-US" sz="1600" b="1" dirty="0">
+                <a:solidFill>
+                  <a:srgbClr val="9C5446"/>
+                </a:solidFill>
+                <a:latin typeface="游明朝" pitchFamily="34" charset="0"/>
+                <a:ea typeface="游明朝" pitchFamily="34" charset="-122"/>
+                <a:cs typeface="游明朝" pitchFamily="34" charset="-120"/>
+              </a:rPr>
+              <a:t>01</a:t>
+            </a:r>
+            <a:endParaRPr lang="en-US" sz="1600" dirty="0"/>
+          </a:p>
+        </p:txBody>
+      </p:sp>
+      <p:sp>
+        <p:nvSpPr>
+          <p:cNvPr id="6" name="Text 4"/>
+          <p:cNvSpPr txBox="1"/>
+          <p:nvPr/>
+        </p:nvSpPr>
+        <p:spPr>
+          <a:xfrm>
+            <a:off x="1371600" y="1764792"/>
+            <a:ext cx="10058400" cy="329184"/>
+          </a:xfrm>
+          <a:prstGeom prst="rect">
+            <a:avLst/>
+          </a:prstGeom>
+          <a:noFill/>
+          <a:ln/>
+        </p:spPr>
+        <p:txBody>
+          <a:bodyPr wrap="square" lIns="0" tIns="0" rIns="0" bIns="0" rtlCol="0" anchor="ctr"/>
+          <a:lstStyle/>
+          <a:p>
+            <a:pPr indent="0" marL="0">
+              <a:buNone/>
+            </a:pPr>
+            <a:r>
+              <a:rPr lang="en-US" sz="1400" b="1" dirty="0">
+                <a:solidFill>
+                  <a:srgbClr val="2B2620"/>
+                </a:solidFill>
+                <a:latin typeface="游明朝" pitchFamily="34" charset="0"/>
+                <a:ea typeface="游明朝" pitchFamily="34" charset="-122"/>
+                <a:cs typeface="游明朝" pitchFamily="34" charset="-120"/>
+              </a:rPr>
+              <a:t>未病領域の新規事業を、共同で検討させてください</a:t>
+            </a:r>
+            <a:endParaRPr lang="en-US" sz="1400" dirty="0"/>
+          </a:p>
+        </p:txBody>
+      </p:sp>
+      <p:sp>
+        <p:nvSpPr>
+          <p:cNvPr id="7" name="Text 5"/>
+          <p:cNvSpPr txBox="1"/>
+          <p:nvPr/>
+        </p:nvSpPr>
+        <p:spPr>
+          <a:xfrm>
+            <a:off x="1371600" y="2112264"/>
+            <a:ext cx="10058400" cy="329184"/>
+          </a:xfrm>
+          <a:prstGeom prst="rect">
+            <a:avLst/>
+          </a:prstGeom>
+          <a:noFill/>
+          <a:ln/>
+        </p:spPr>
+        <p:txBody>
+          <a:bodyPr wrap="square" lIns="0" tIns="0" rIns="0" bIns="0" rtlCol="0" anchor="ctr"/>
+          <a:lstStyle/>
+          <a:p>
+            <a:pPr indent="0" marL="0">
+              <a:buNone/>
+            </a:pPr>
+            <a:r>
+              <a:rPr lang="en-US" sz="1050" dirty="0">
+                <a:solidFill>
+                  <a:srgbClr val="5A5249"/>
+                </a:solidFill>
+                <a:latin typeface="游ゴシック" pitchFamily="34" charset="0"/>
+                <a:ea typeface="游ゴシック" pitchFamily="34" charset="-122"/>
+                <a:cs typeface="游ゴシック" pitchFamily="34" charset="-120"/>
+              </a:rPr>
+              <a:t>東洋医学 × 御社の事業アセット。入口となるサービス設計から、実証までを一緒に。</a:t>
+            </a:r>
+            <a:endParaRPr lang="en-US" sz="1050" dirty="0"/>
+          </a:p>
+        </p:txBody>
+      </p:sp>
+      <p:sp>
+        <p:nvSpPr>
+          <p:cNvPr id="8" name="Shape 6"/>
           <p:cNvSpPr/>
           <p:nvPr/>
         </p:nvSpPr>
         <p:spPr>
           <a:xfrm>
-            <a:off x="685800" y="1673352"/>
+            <a:off x="685800" y="2551176"/>
             <a:ext cx="10820095" cy="7315"/>
           </a:xfrm>
           <a:prstGeom prst="rect">
@@ -7639,130 +8774,130 @@
       </p:sp>
       <p:sp>
         <p:nvSpPr>
-          <p:cNvPr id="6" name="Text 4"/>
-          <p:cNvSpPr txBox="1"/>
-          <p:nvPr/>
-        </p:nvSpPr>
-        <p:spPr>
-          <a:xfrm>
-            <a:off x="685800" y="1801368"/>
-            <a:ext cx="1005840" cy="256032"/>
-          </a:xfrm>
-          <a:prstGeom prst="rect">
-            <a:avLst/>
-          </a:prstGeom>
-          <a:noFill/>
-          <a:ln/>
-        </p:spPr>
-        <p:txBody>
-          <a:bodyPr wrap="square" lIns="0" tIns="0" rIns="0" bIns="0" rtlCol="0" anchor="ctr"/>
-          <a:lstStyle/>
-          <a:p>
-            <a:pPr indent="0" marL="0">
-              <a:buNone/>
-            </a:pPr>
-            <a:r>
-              <a:rPr lang="en-US" sz="900" b="1" spc="200" kern="0" dirty="0">
+          <p:cNvPr id="9" name="Text 7"/>
+          <p:cNvSpPr txBox="1"/>
+          <p:nvPr/>
+        </p:nvSpPr>
+        <p:spPr>
+          <a:xfrm>
+            <a:off x="685800" y="2697480"/>
+            <a:ext cx="548640" cy="365760"/>
+          </a:xfrm>
+          <a:prstGeom prst="rect">
+            <a:avLst/>
+          </a:prstGeom>
+          <a:noFill/>
+          <a:ln/>
+        </p:spPr>
+        <p:txBody>
+          <a:bodyPr wrap="square" lIns="0" tIns="0" rIns="0" bIns="0" rtlCol="0" anchor="ctr"/>
+          <a:lstStyle/>
+          <a:p>
+            <a:pPr indent="0" marL="0">
+              <a:buNone/>
+            </a:pPr>
+            <a:r>
+              <a:rPr lang="en-US" sz="1600" b="1" dirty="0">
                 <a:solidFill>
                   <a:srgbClr val="9C5446"/>
                 </a:solidFill>
-                <a:latin typeface="游ゴシック" pitchFamily="34" charset="0"/>
-                <a:ea typeface="游ゴシック" pitchFamily="34" charset="-122"/>
-                <a:cs typeface="游ゴシック" pitchFamily="34" charset="-120"/>
-              </a:rPr>
-              <a:t>共同研究</a:t>
-            </a:r>
-            <a:endParaRPr lang="en-US" sz="900" dirty="0"/>
-          </a:p>
-        </p:txBody>
-      </p:sp>
-      <p:sp>
-        <p:nvSpPr>
-          <p:cNvPr id="7" name="Text 5"/>
-          <p:cNvSpPr txBox="1"/>
-          <p:nvPr/>
-        </p:nvSpPr>
-        <p:spPr>
-          <a:xfrm>
-            <a:off x="1828800" y="1764792"/>
-            <a:ext cx="9674352" cy="274320"/>
-          </a:xfrm>
-          <a:prstGeom prst="rect">
-            <a:avLst/>
-          </a:prstGeom>
-          <a:noFill/>
-          <a:ln/>
-        </p:spPr>
-        <p:txBody>
-          <a:bodyPr wrap="square" lIns="0" tIns="0" rIns="0" bIns="0" rtlCol="0" anchor="ctr"/>
-          <a:lstStyle/>
-          <a:p>
-            <a:pPr indent="0" marL="0">
-              <a:buNone/>
-            </a:pPr>
-            <a:r>
-              <a:rPr lang="en-US" sz="1100" dirty="0">
+                <a:latin typeface="游明朝" pitchFamily="34" charset="0"/>
+                <a:ea typeface="游明朝" pitchFamily="34" charset="-122"/>
+                <a:cs typeface="游明朝" pitchFamily="34" charset="-120"/>
+              </a:rPr>
+              <a:t>02</a:t>
+            </a:r>
+            <a:endParaRPr lang="en-US" sz="1600" dirty="0"/>
+          </a:p>
+        </p:txBody>
+      </p:sp>
+      <p:sp>
+        <p:nvSpPr>
+          <p:cNvPr id="10" name="Text 8"/>
+          <p:cNvSpPr txBox="1"/>
+          <p:nvPr/>
+        </p:nvSpPr>
+        <p:spPr>
+          <a:xfrm>
+            <a:off x="1371600" y="2679192"/>
+            <a:ext cx="10058400" cy="329184"/>
+          </a:xfrm>
+          <a:prstGeom prst="rect">
+            <a:avLst/>
+          </a:prstGeom>
+          <a:noFill/>
+          <a:ln/>
+        </p:spPr>
+        <p:txBody>
+          <a:bodyPr wrap="square" lIns="0" tIns="0" rIns="0" bIns="0" rtlCol="0" anchor="ctr"/>
+          <a:lstStyle/>
+          <a:p>
+            <a:pPr indent="0" marL="0">
+              <a:buNone/>
+            </a:pPr>
+            <a:r>
+              <a:rPr lang="en-US" sz="1400" b="1" dirty="0">
                 <a:solidFill>
                   <a:srgbClr val="2B2620"/>
                 </a:solidFill>
-                <a:latin typeface="游ゴシック" pitchFamily="34" charset="0"/>
-                <a:ea typeface="游ゴシック" pitchFamily="34" charset="-122"/>
-                <a:cs typeface="游ゴシック" pitchFamily="34" charset="-120"/>
-              </a:rPr>
-              <a:t>開業鍼灸院でのメンタルヘルスの可能性を検証する共同研究</a:t>
-            </a:r>
-            <a:endParaRPr lang="en-US" sz="1100" dirty="0"/>
-          </a:p>
-        </p:txBody>
-      </p:sp>
-      <p:sp>
-        <p:nvSpPr>
-          <p:cNvPr id="8" name="Text 6"/>
-          <p:cNvSpPr txBox="1"/>
-          <p:nvPr/>
-        </p:nvSpPr>
-        <p:spPr>
-          <a:xfrm>
-            <a:off x="1828800" y="2057400"/>
-            <a:ext cx="9674352" cy="274320"/>
-          </a:xfrm>
-          <a:prstGeom prst="rect">
-            <a:avLst/>
-          </a:prstGeom>
-          <a:noFill/>
-          <a:ln/>
-        </p:spPr>
-        <p:txBody>
-          <a:bodyPr wrap="square" lIns="0" tIns="0" rIns="0" bIns="0" rtlCol="0" anchor="ctr"/>
-          <a:lstStyle/>
-          <a:p>
-            <a:pPr indent="0" marL="0">
-              <a:buNone/>
-            </a:pPr>
-            <a:r>
-              <a:rPr lang="en-US" sz="900" dirty="0">
-                <a:solidFill>
-                  <a:srgbClr val="8B8175"/>
-                </a:solidFill>
-                <a:latin typeface="游ゴシック" pitchFamily="34" charset="0"/>
-                <a:ea typeface="游ゴシック" pitchFamily="34" charset="-122"/>
-                <a:cs typeface="游ゴシック" pitchFamily="34" charset="-120"/>
-              </a:rPr>
-              <a:t>ここちめいど／東京有明医療大学／理化学研究所／ケアクル　― PR TIMES</a:t>
-            </a:r>
-            <a:endParaRPr lang="en-US" sz="900" dirty="0"/>
-          </a:p>
-        </p:txBody>
-      </p:sp>
-      <p:sp>
-        <p:nvSpPr>
-          <p:cNvPr id="9" name="Shape 7"/>
+                <a:latin typeface="游明朝" pitchFamily="34" charset="0"/>
+                <a:ea typeface="游明朝" pitchFamily="34" charset="-122"/>
+                <a:cs typeface="游明朝" pitchFamily="34" charset="-120"/>
+              </a:rPr>
+              <a:t>人と組織の知見をお借りしたい</a:t>
+            </a:r>
+            <a:endParaRPr lang="en-US" sz="1400" dirty="0"/>
+          </a:p>
+        </p:txBody>
+      </p:sp>
+      <p:sp>
+        <p:nvSpPr>
+          <p:cNvPr id="11" name="Text 9"/>
+          <p:cNvSpPr txBox="1"/>
+          <p:nvPr/>
+        </p:nvSpPr>
+        <p:spPr>
+          <a:xfrm>
+            <a:off x="1371600" y="3026664"/>
+            <a:ext cx="10058400" cy="329184"/>
+          </a:xfrm>
+          <a:prstGeom prst="rect">
+            <a:avLst/>
+          </a:prstGeom>
+          <a:noFill/>
+          <a:ln/>
+        </p:spPr>
+        <p:txBody>
+          <a:bodyPr wrap="square" lIns="0" tIns="0" rIns="0" bIns="0" rtlCol="0" anchor="ctr"/>
+          <a:lstStyle/>
+          <a:p>
+            <a:pPr indent="0" marL="0">
+              <a:buNone/>
+            </a:pPr>
+            <a:r>
+              <a:rPr lang="en-US" sz="1050" dirty="0">
+                <a:solidFill>
+                  <a:srgbClr val="5A5249"/>
+                </a:solidFill>
+                <a:latin typeface="游ゴシック" pitchFamily="34" charset="0"/>
+                <a:ea typeface="游ゴシック" pitchFamily="34" charset="-122"/>
+                <a:cs typeface="游ゴシック" pitchFamily="34" charset="-120"/>
+              </a:rPr>
+              <a:t>施術者の採用・育成・配置。属人から仕組みへ移すために、御社の人材領域の知見が必要です。</a:t>
+            </a:r>
+            <a:endParaRPr lang="en-US" sz="1050" dirty="0"/>
+          </a:p>
+        </p:txBody>
+      </p:sp>
+      <p:sp>
+        <p:nvSpPr>
+          <p:cNvPr id="12" name="Shape 10"/>
           <p:cNvSpPr/>
           <p:nvPr/>
         </p:nvSpPr>
         <p:spPr>
           <a:xfrm>
-            <a:off x="685800" y="2404872"/>
+            <a:off x="685800" y="3465576"/>
             <a:ext cx="10820095" cy="7315"/>
           </a:xfrm>
           <a:prstGeom prst="rect">
@@ -7776,14 +8911,158 @@
       </p:sp>
       <p:sp>
         <p:nvSpPr>
-          <p:cNvPr id="10" name="Text 8"/>
-          <p:cNvSpPr txBox="1"/>
-          <p:nvPr/>
-        </p:nvSpPr>
-        <p:spPr>
-          <a:xfrm>
-            <a:off x="685800" y="2532888"/>
-            <a:ext cx="1005840" cy="256032"/>
+          <p:cNvPr id="13" name="Text 11"/>
+          <p:cNvSpPr txBox="1"/>
+          <p:nvPr/>
+        </p:nvSpPr>
+        <p:spPr>
+          <a:xfrm>
+            <a:off x="685800" y="3611880"/>
+            <a:ext cx="548640" cy="365760"/>
+          </a:xfrm>
+          <a:prstGeom prst="rect">
+            <a:avLst/>
+          </a:prstGeom>
+          <a:noFill/>
+          <a:ln/>
+        </p:spPr>
+        <p:txBody>
+          <a:bodyPr wrap="square" lIns="0" tIns="0" rIns="0" bIns="0" rtlCol="0" anchor="ctr"/>
+          <a:lstStyle/>
+          <a:p>
+            <a:pPr indent="0" marL="0">
+              <a:buNone/>
+            </a:pPr>
+            <a:r>
+              <a:rPr lang="en-US" sz="1600" b="1" dirty="0">
+                <a:solidFill>
+                  <a:srgbClr val="9C5446"/>
+                </a:solidFill>
+                <a:latin typeface="游明朝" pitchFamily="34" charset="0"/>
+                <a:ea typeface="游明朝" pitchFamily="34" charset="-122"/>
+                <a:cs typeface="游明朝" pitchFamily="34" charset="-120"/>
+              </a:rPr>
+              <a:t>03</a:t>
+            </a:r>
+            <a:endParaRPr lang="en-US" sz="1600" dirty="0"/>
+          </a:p>
+        </p:txBody>
+      </p:sp>
+      <p:sp>
+        <p:nvSpPr>
+          <p:cNvPr id="14" name="Text 12"/>
+          <p:cNvSpPr txBox="1"/>
+          <p:nvPr/>
+        </p:nvSpPr>
+        <p:spPr>
+          <a:xfrm>
+            <a:off x="1371600" y="3593592"/>
+            <a:ext cx="10058400" cy="329184"/>
+          </a:xfrm>
+          <a:prstGeom prst="rect">
+            <a:avLst/>
+          </a:prstGeom>
+          <a:noFill/>
+          <a:ln/>
+        </p:spPr>
+        <p:txBody>
+          <a:bodyPr wrap="square" lIns="0" tIns="0" rIns="0" bIns="0" rtlCol="0" anchor="ctr"/>
+          <a:lstStyle/>
+          <a:p>
+            <a:pPr indent="0" marL="0">
+              <a:buNone/>
+            </a:pPr>
+            <a:r>
+              <a:rPr lang="en-US" sz="1400" b="1" dirty="0">
+                <a:solidFill>
+                  <a:srgbClr val="2B2620"/>
+                </a:solidFill>
+                <a:latin typeface="游明朝" pitchFamily="34" charset="0"/>
+                <a:ea typeface="游明朝" pitchFamily="34" charset="-122"/>
+                <a:cs typeface="游明朝" pitchFamily="34" charset="-120"/>
+              </a:rPr>
+              <a:t>実証の場をご一緒したい</a:t>
+            </a:r>
+            <a:endParaRPr lang="en-US" sz="1400" dirty="0"/>
+          </a:p>
+        </p:txBody>
+      </p:sp>
+      <p:sp>
+        <p:nvSpPr>
+          <p:cNvPr id="15" name="Text 13"/>
+          <p:cNvSpPr txBox="1"/>
+          <p:nvPr/>
+        </p:nvSpPr>
+        <p:spPr>
+          <a:xfrm>
+            <a:off x="1371600" y="3941064"/>
+            <a:ext cx="10058400" cy="329184"/>
+          </a:xfrm>
+          <a:prstGeom prst="rect">
+            <a:avLst/>
+          </a:prstGeom>
+          <a:noFill/>
+          <a:ln/>
+        </p:spPr>
+        <p:txBody>
+          <a:bodyPr wrap="square" lIns="0" tIns="0" rIns="0" bIns="0" rtlCol="0" anchor="ctr"/>
+          <a:lstStyle/>
+          <a:p>
+            <a:pPr indent="0" marL="0">
+              <a:buNone/>
+            </a:pPr>
+            <a:r>
+              <a:rPr lang="en-US" sz="1050" dirty="0">
+                <a:solidFill>
+                  <a:srgbClr val="5A5249"/>
+                </a:solidFill>
+                <a:latin typeface="游ゴシック" pitchFamily="34" charset="0"/>
+                <a:ea typeface="游ゴシック" pitchFamily="34" charset="-122"/>
+                <a:cs typeface="游ゴシック" pitchFamily="34" charset="-120"/>
+              </a:rPr>
+              <a:t>法人向けの健康支援など、未病層に届く場での実証。効果は学会発表の形で残し、根拠として積み上げます。</a:t>
+            </a:r>
+            <a:endParaRPr lang="en-US" sz="1050" dirty="0"/>
+          </a:p>
+        </p:txBody>
+      </p:sp>
+      <p:sp>
+        <p:nvSpPr>
+          <p:cNvPr id="16" name="Shape 14"/>
+          <p:cNvSpPr/>
+          <p:nvPr/>
+        </p:nvSpPr>
+        <p:spPr>
+          <a:xfrm>
+            <a:off x="685800" y="4663440"/>
+            <a:ext cx="10820095" cy="1188720"/>
+          </a:xfrm>
+          <a:prstGeom prst="roundRect">
+            <a:avLst>
+              <a:gd name="adj" fmla="val 3846"/>
+            </a:avLst>
+          </a:prstGeom>
+          <a:solidFill>
+            <a:srgbClr val="FBF6EC"/>
+          </a:solidFill>
+          <a:ln w="9525">
+            <a:solidFill>
+              <a:srgbClr val="9C5446"/>
+            </a:solidFill>
+            <a:prstDash val="solid"/>
+          </a:ln>
+        </p:spPr>
+      </p:sp>
+      <p:sp>
+        <p:nvSpPr>
+          <p:cNvPr id="17" name="Text 15"/>
+          <p:cNvSpPr txBox="1"/>
+          <p:nvPr/>
+        </p:nvSpPr>
+        <p:spPr>
+          <a:xfrm>
+            <a:off x="960120" y="4864608"/>
+            <a:ext cx="10271455" cy="237744"/>
           </a:xfrm>
           <a:prstGeom prst="rect">
             <a:avLst/>
@@ -7807,7 +9086,7 @@
                 <a:ea typeface="游ゴシック" pitchFamily="34" charset="-122"/>
                 <a:cs typeface="游ゴシック" pitchFamily="34" charset="-120"/>
               </a:rPr>
-              <a:t>共同研究</a:t>
+              <a:t>私の目的</a:t>
             </a:r>
             <a:endParaRPr lang="en-US" sz="900" dirty="0"/>
           </a:p>
@@ -7815,38 +9094,41 @@
       </p:sp>
       <p:sp>
         <p:nvSpPr>
-          <p:cNvPr id="11" name="Text 9"/>
-          <p:cNvSpPr txBox="1"/>
-          <p:nvPr/>
-        </p:nvSpPr>
-        <p:spPr>
-          <a:xfrm>
-            <a:off x="1828800" y="2496312"/>
-            <a:ext cx="9674352" cy="274320"/>
-          </a:xfrm>
-          <a:prstGeom prst="rect">
-            <a:avLst/>
-          </a:prstGeom>
-          <a:noFill/>
-          <a:ln/>
-        </p:spPr>
-        <p:txBody>
-          <a:bodyPr wrap="square" lIns="0" tIns="0" rIns="0" bIns="0" rtlCol="0" anchor="ctr"/>
-          <a:lstStyle/>
-          <a:p>
-            <a:pPr indent="0" marL="0">
+          <p:cNvPr id="18" name="Text 16"/>
+          <p:cNvSpPr txBox="1"/>
+          <p:nvPr/>
+        </p:nvSpPr>
+        <p:spPr>
+          <a:xfrm>
+            <a:off x="960120" y="5175504"/>
+            <a:ext cx="10271455" cy="457200"/>
+          </a:xfrm>
+          <a:prstGeom prst="rect">
+            <a:avLst/>
+          </a:prstGeom>
+          <a:noFill/>
+          <a:ln/>
+        </p:spPr>
+        <p:txBody>
+          <a:bodyPr wrap="square" lIns="0" tIns="0" rIns="0" bIns="0" rtlCol="0" anchor="t"/>
+          <a:lstStyle/>
+          <a:p>
+            <a:pPr indent="0" marL="0">
+              <a:lnSpc>
+                <a:spcPts val="1900"/>
+              </a:lnSpc>
               <a:buNone/>
             </a:pPr>
             <a:r>
               <a:rPr lang="en-US" sz="1100" dirty="0">
                 <a:solidFill>
-                  <a:srgbClr val="2B2620"/>
-                </a:solidFill>
-                <a:latin typeface="游ゴシック" pitchFamily="34" charset="0"/>
-                <a:ea typeface="游ゴシック" pitchFamily="34" charset="-122"/>
-                <a:cs typeface="游ゴシック" pitchFamily="34" charset="-120"/>
-              </a:rPr>
-              <a:t>鍼灸症例データベース構築プロジェクト</a:t>
+                  <a:srgbClr val="5A5249"/>
+                </a:solidFill>
+                <a:latin typeface="游ゴシック" pitchFamily="34" charset="0"/>
+                <a:ea typeface="游ゴシック" pitchFamily="34" charset="-122"/>
+                <a:cs typeface="游ゴシック" pitchFamily="34" charset="-120"/>
+              </a:rPr>
+              <a:t>生きづらさを抱えた人を、治療が必要になる手前で減らしたい。そのために、鍼灸の外側にある方法も含めて手を尽くします。</a:t>
             </a:r>
             <a:endParaRPr lang="en-US" sz="1100" dirty="0"/>
           </a:p>
@@ -7854,653 +9136,7 @@
       </p:sp>
       <p:sp>
         <p:nvSpPr>
-          <p:cNvPr id="12" name="Text 10"/>
-          <p:cNvSpPr txBox="1"/>
-          <p:nvPr/>
-        </p:nvSpPr>
-        <p:spPr>
-          <a:xfrm>
-            <a:off x="1828800" y="2788920"/>
-            <a:ext cx="9674352" cy="274320"/>
-          </a:xfrm>
-          <a:prstGeom prst="rect">
-            <a:avLst/>
-          </a:prstGeom>
-          <a:noFill/>
-          <a:ln/>
-        </p:spPr>
-        <p:txBody>
-          <a:bodyPr wrap="square" lIns="0" tIns="0" rIns="0" bIns="0" rtlCol="0" anchor="ctr"/>
-          <a:lstStyle/>
-          <a:p>
-            <a:pPr indent="0" marL="0">
-              <a:buNone/>
-            </a:pPr>
-            <a:r>
-              <a:rPr lang="en-US" sz="900" dirty="0">
-                <a:solidFill>
-                  <a:srgbClr val="8B8175"/>
-                </a:solidFill>
-                <a:latin typeface="游ゴシック" pitchFamily="34" charset="0"/>
-                <a:ea typeface="游ゴシック" pitchFamily="34" charset="-122"/>
-                <a:cs typeface="游ゴシック" pitchFamily="34" charset="-120"/>
-              </a:rPr>
-              <a:t>ケアクル／東京有明医療大学 松浦悠人／玉川大学 柴田健一／ここちめいど 米倉まな　― PR TIMES（2025.4）</a:t>
-            </a:r>
-            <a:endParaRPr lang="en-US" sz="900" dirty="0"/>
-          </a:p>
-        </p:txBody>
-      </p:sp>
-      <p:sp>
-        <p:nvSpPr>
-          <p:cNvPr id="13" name="Shape 11"/>
-          <p:cNvSpPr/>
-          <p:nvPr/>
-        </p:nvSpPr>
-        <p:spPr>
-          <a:xfrm>
-            <a:off x="685800" y="3136392"/>
-            <a:ext cx="10820095" cy="7315"/>
-          </a:xfrm>
-          <a:prstGeom prst="rect">
-            <a:avLst/>
-          </a:prstGeom>
-          <a:solidFill>
-            <a:srgbClr val="D2C4AE"/>
-          </a:solidFill>
-          <a:ln/>
-        </p:spPr>
-      </p:sp>
-      <p:sp>
-        <p:nvSpPr>
-          <p:cNvPr id="14" name="Text 12"/>
-          <p:cNvSpPr txBox="1"/>
-          <p:nvPr/>
-        </p:nvSpPr>
-        <p:spPr>
-          <a:xfrm>
-            <a:off x="685800" y="3264408"/>
-            <a:ext cx="1005840" cy="256032"/>
-          </a:xfrm>
-          <a:prstGeom prst="rect">
-            <a:avLst/>
-          </a:prstGeom>
-          <a:noFill/>
-          <a:ln/>
-        </p:spPr>
-        <p:txBody>
-          <a:bodyPr wrap="square" lIns="0" tIns="0" rIns="0" bIns="0" rtlCol="0" anchor="ctr"/>
-          <a:lstStyle/>
-          <a:p>
-            <a:pPr indent="0" marL="0">
-              <a:buNone/>
-            </a:pPr>
-            <a:r>
-              <a:rPr lang="en-US" sz="900" b="1" spc="200" kern="0" dirty="0">
-                <a:solidFill>
-                  <a:srgbClr val="9C5446"/>
-                </a:solidFill>
-                <a:latin typeface="游ゴシック" pitchFamily="34" charset="0"/>
-                <a:ea typeface="游ゴシック" pitchFamily="34" charset="-122"/>
-                <a:cs typeface="游ゴシック" pitchFamily="34" charset="-120"/>
-              </a:rPr>
-              <a:t>企業連携</a:t>
-            </a:r>
-            <a:endParaRPr lang="en-US" sz="900" dirty="0"/>
-          </a:p>
-        </p:txBody>
-      </p:sp>
-      <p:sp>
-        <p:nvSpPr>
-          <p:cNvPr id="15" name="Text 13"/>
-          <p:cNvSpPr txBox="1"/>
-          <p:nvPr/>
-        </p:nvSpPr>
-        <p:spPr>
-          <a:xfrm>
-            <a:off x="1828800" y="3227832"/>
-            <a:ext cx="9674352" cy="274320"/>
-          </a:xfrm>
-          <a:prstGeom prst="rect">
-            <a:avLst/>
-          </a:prstGeom>
-          <a:noFill/>
-          <a:ln/>
-        </p:spPr>
-        <p:txBody>
-          <a:bodyPr wrap="square" lIns="0" tIns="0" rIns="0" bIns="0" rtlCol="0" anchor="ctr"/>
-          <a:lstStyle/>
-          <a:p>
-            <a:pPr indent="0" marL="0">
-              <a:buNone/>
-            </a:pPr>
-            <a:r>
-              <a:rPr lang="en-US" sz="1100" dirty="0">
-                <a:solidFill>
-                  <a:srgbClr val="2B2620"/>
-                </a:solidFill>
-                <a:latin typeface="游ゴシック" pitchFamily="34" charset="0"/>
-                <a:ea typeface="游ゴシック" pitchFamily="34" charset="-122"/>
-                <a:cs typeface="游ゴシック" pitchFamily="34" charset="-120"/>
-              </a:rPr>
-              <a:t>オンライン対話サービス「ThirdTalk」特別対談番組に出演</a:t>
-            </a:r>
-            <a:endParaRPr lang="en-US" sz="1100" dirty="0"/>
-          </a:p>
-        </p:txBody>
-      </p:sp>
-      <p:sp>
-        <p:nvSpPr>
-          <p:cNvPr id="16" name="Text 14"/>
-          <p:cNvSpPr txBox="1"/>
-          <p:nvPr/>
-        </p:nvSpPr>
-        <p:spPr>
-          <a:xfrm>
-            <a:off x="1828800" y="3520440"/>
-            <a:ext cx="9674352" cy="274320"/>
-          </a:xfrm>
-          <a:prstGeom prst="rect">
-            <a:avLst/>
-          </a:prstGeom>
-          <a:noFill/>
-          <a:ln/>
-        </p:spPr>
-        <p:txBody>
-          <a:bodyPr wrap="square" lIns="0" tIns="0" rIns="0" bIns="0" rtlCol="0" anchor="ctr"/>
-          <a:lstStyle/>
-          <a:p>
-            <a:pPr indent="0" marL="0">
-              <a:buNone/>
-            </a:pPr>
-            <a:r>
-              <a:rPr lang="en-US" sz="900" dirty="0">
-                <a:solidFill>
-                  <a:srgbClr val="8B8175"/>
-                </a:solidFill>
-                <a:latin typeface="游ゴシック" pitchFamily="34" charset="0"/>
-                <a:ea typeface="游ゴシック" pitchFamily="34" charset="-122"/>
-                <a:cs typeface="游ゴシック" pitchFamily="34" charset="-120"/>
-              </a:rPr>
-              <a:t>株式会社ファンコミュニケーションズ ニュースリリース（2022.8.26）</a:t>
-            </a:r>
-            <a:endParaRPr lang="en-US" sz="900" dirty="0"/>
-          </a:p>
-        </p:txBody>
-      </p:sp>
-      <p:sp>
-        <p:nvSpPr>
-          <p:cNvPr id="17" name="Shape 15"/>
-          <p:cNvSpPr/>
-          <p:nvPr/>
-        </p:nvSpPr>
-        <p:spPr>
-          <a:xfrm>
-            <a:off x="685800" y="3867912"/>
-            <a:ext cx="10820095" cy="7315"/>
-          </a:xfrm>
-          <a:prstGeom prst="rect">
-            <a:avLst/>
-          </a:prstGeom>
-          <a:solidFill>
-            <a:srgbClr val="D2C4AE"/>
-          </a:solidFill>
-          <a:ln/>
-        </p:spPr>
-      </p:sp>
-      <p:sp>
-        <p:nvSpPr>
-          <p:cNvPr id="18" name="Text 16"/>
-          <p:cNvSpPr txBox="1"/>
-          <p:nvPr/>
-        </p:nvSpPr>
-        <p:spPr>
-          <a:xfrm>
-            <a:off x="685800" y="3995928"/>
-            <a:ext cx="1005840" cy="256032"/>
-          </a:xfrm>
-          <a:prstGeom prst="rect">
-            <a:avLst/>
-          </a:prstGeom>
-          <a:noFill/>
-          <a:ln/>
-        </p:spPr>
-        <p:txBody>
-          <a:bodyPr wrap="square" lIns="0" tIns="0" rIns="0" bIns="0" rtlCol="0" anchor="ctr"/>
-          <a:lstStyle/>
-          <a:p>
-            <a:pPr indent="0" marL="0">
-              <a:buNone/>
-            </a:pPr>
-            <a:r>
-              <a:rPr lang="en-US" sz="900" b="1" spc="200" kern="0" dirty="0">
-                <a:solidFill>
-                  <a:srgbClr val="9C5446"/>
-                </a:solidFill>
-                <a:latin typeface="游ゴシック" pitchFamily="34" charset="0"/>
-                <a:ea typeface="游ゴシック" pitchFamily="34" charset="-122"/>
-                <a:cs typeface="游ゴシック" pitchFamily="34" charset="-120"/>
-              </a:rPr>
-              <a:t>社会貢献</a:t>
-            </a:r>
-            <a:endParaRPr lang="en-US" sz="900" dirty="0"/>
-          </a:p>
-        </p:txBody>
-      </p:sp>
-      <p:sp>
-        <p:nvSpPr>
           <p:cNvPr id="19" name="Text 17"/>
-          <p:cNvSpPr txBox="1"/>
-          <p:nvPr/>
-        </p:nvSpPr>
-        <p:spPr>
-          <a:xfrm>
-            <a:off x="1828800" y="3959352"/>
-            <a:ext cx="9674352" cy="274320"/>
-          </a:xfrm>
-          <a:prstGeom prst="rect">
-            <a:avLst/>
-          </a:prstGeom>
-          <a:noFill/>
-          <a:ln/>
-        </p:spPr>
-        <p:txBody>
-          <a:bodyPr wrap="square" lIns="0" tIns="0" rIns="0" bIns="0" rtlCol="0" anchor="ctr"/>
-          <a:lstStyle/>
-          <a:p>
-            <a:pPr indent="0" marL="0">
-              <a:buNone/>
-            </a:pPr>
-            <a:r>
-              <a:rPr lang="en-US" sz="1100" dirty="0">
-                <a:solidFill>
-                  <a:srgbClr val="2B2620"/>
-                </a:solidFill>
-                <a:latin typeface="游ゴシック" pitchFamily="34" charset="0"/>
-                <a:ea typeface="游ゴシック" pitchFamily="34" charset="-122"/>
-                <a:cs typeface="游ゴシック" pitchFamily="34" charset="-120"/>
-              </a:rPr>
-              <a:t>パパゲーノ・アンバサダー認定 第一号（合同会社ここちめいど）</a:t>
-            </a:r>
-            <a:endParaRPr lang="en-US" sz="1100" dirty="0"/>
-          </a:p>
-        </p:txBody>
-      </p:sp>
-      <p:sp>
-        <p:nvSpPr>
-          <p:cNvPr id="20" name="Text 18"/>
-          <p:cNvSpPr txBox="1"/>
-          <p:nvPr/>
-        </p:nvSpPr>
-        <p:spPr>
-          <a:xfrm>
-            <a:off x="1828800" y="4251960"/>
-            <a:ext cx="9674352" cy="274320"/>
-          </a:xfrm>
-          <a:prstGeom prst="rect">
-            <a:avLst/>
-          </a:prstGeom>
-          <a:noFill/>
-          <a:ln/>
-        </p:spPr>
-        <p:txBody>
-          <a:bodyPr wrap="square" lIns="0" tIns="0" rIns="0" bIns="0" rtlCol="0" anchor="ctr"/>
-          <a:lstStyle/>
-          <a:p>
-            <a:pPr indent="0" marL="0">
-              <a:buNone/>
-            </a:pPr>
-            <a:r>
-              <a:rPr lang="en-US" sz="900" dirty="0">
-                <a:solidFill>
-                  <a:srgbClr val="8B8175"/>
-                </a:solidFill>
-                <a:latin typeface="游ゴシック" pitchFamily="34" charset="0"/>
-                <a:ea typeface="游ゴシック" pitchFamily="34" charset="-122"/>
-                <a:cs typeface="游ゴシック" pitchFamily="34" charset="-120"/>
-              </a:rPr>
-              <a:t>株式会社パパゲーノ プレスリリース</a:t>
-            </a:r>
-            <a:endParaRPr lang="en-US" sz="900" dirty="0"/>
-          </a:p>
-        </p:txBody>
-      </p:sp>
-      <p:sp>
-        <p:nvSpPr>
-          <p:cNvPr id="21" name="Shape 19"/>
-          <p:cNvSpPr/>
-          <p:nvPr/>
-        </p:nvSpPr>
-        <p:spPr>
-          <a:xfrm>
-            <a:off x="685800" y="4599432"/>
-            <a:ext cx="10820095" cy="7315"/>
-          </a:xfrm>
-          <a:prstGeom prst="rect">
-            <a:avLst/>
-          </a:prstGeom>
-          <a:solidFill>
-            <a:srgbClr val="D2C4AE"/>
-          </a:solidFill>
-          <a:ln/>
-        </p:spPr>
-      </p:sp>
-      <p:sp>
-        <p:nvSpPr>
-          <p:cNvPr id="22" name="Text 20"/>
-          <p:cNvSpPr txBox="1"/>
-          <p:nvPr/>
-        </p:nvSpPr>
-        <p:spPr>
-          <a:xfrm>
-            <a:off x="685800" y="4727448"/>
-            <a:ext cx="1005840" cy="256032"/>
-          </a:xfrm>
-          <a:prstGeom prst="rect">
-            <a:avLst/>
-          </a:prstGeom>
-          <a:noFill/>
-          <a:ln/>
-        </p:spPr>
-        <p:txBody>
-          <a:bodyPr wrap="square" lIns="0" tIns="0" rIns="0" bIns="0" rtlCol="0" anchor="ctr"/>
-          <a:lstStyle/>
-          <a:p>
-            <a:pPr indent="0" marL="0">
-              <a:buNone/>
-            </a:pPr>
-            <a:r>
-              <a:rPr lang="en-US" sz="900" b="1" spc="200" kern="0" dirty="0">
-                <a:solidFill>
-                  <a:srgbClr val="9C5446"/>
-                </a:solidFill>
-                <a:latin typeface="游ゴシック" pitchFamily="34" charset="0"/>
-                <a:ea typeface="游ゴシック" pitchFamily="34" charset="-122"/>
-                <a:cs typeface="游ゴシック" pitchFamily="34" charset="-120"/>
-              </a:rPr>
-              <a:t>寄稿</a:t>
-            </a:r>
-            <a:endParaRPr lang="en-US" sz="900" dirty="0"/>
-          </a:p>
-        </p:txBody>
-      </p:sp>
-      <p:sp>
-        <p:nvSpPr>
-          <p:cNvPr id="23" name="Text 21"/>
-          <p:cNvSpPr txBox="1"/>
-          <p:nvPr/>
-        </p:nvSpPr>
-        <p:spPr>
-          <a:xfrm>
-            <a:off x="1828800" y="4690872"/>
-            <a:ext cx="9674352" cy="274320"/>
-          </a:xfrm>
-          <a:prstGeom prst="rect">
-            <a:avLst/>
-          </a:prstGeom>
-          <a:noFill/>
-          <a:ln/>
-        </p:spPr>
-        <p:txBody>
-          <a:bodyPr wrap="square" lIns="0" tIns="0" rIns="0" bIns="0" rtlCol="0" anchor="ctr"/>
-          <a:lstStyle/>
-          <a:p>
-            <a:pPr indent="0" marL="0">
-              <a:buNone/>
-            </a:pPr>
-            <a:r>
-              <a:rPr lang="en-US" sz="1100" dirty="0">
-                <a:solidFill>
-                  <a:srgbClr val="2B2620"/>
-                </a:solidFill>
-                <a:latin typeface="游ゴシック" pitchFamily="34" charset="0"/>
-                <a:ea typeface="游ゴシック" pitchFamily="34" charset="-122"/>
-                <a:cs typeface="游ゴシック" pitchFamily="34" charset="-120"/>
-              </a:rPr>
-              <a:t>『精神看護』特集「鍼灸は、なぜ「うつ」に効くのだろうか」</a:t>
-            </a:r>
-            <a:endParaRPr lang="en-US" sz="1100" dirty="0"/>
-          </a:p>
-        </p:txBody>
-      </p:sp>
-      <p:sp>
-        <p:nvSpPr>
-          <p:cNvPr id="24" name="Text 22"/>
-          <p:cNvSpPr txBox="1"/>
-          <p:nvPr/>
-        </p:nvSpPr>
-        <p:spPr>
-          <a:xfrm>
-            <a:off x="1828800" y="4983480"/>
-            <a:ext cx="9674352" cy="274320"/>
-          </a:xfrm>
-          <a:prstGeom prst="rect">
-            <a:avLst/>
-          </a:prstGeom>
-          <a:noFill/>
-          <a:ln/>
-        </p:spPr>
-        <p:txBody>
-          <a:bodyPr wrap="square" lIns="0" tIns="0" rIns="0" bIns="0" rtlCol="0" anchor="ctr"/>
-          <a:lstStyle/>
-          <a:p>
-            <a:pPr indent="0" marL="0">
-              <a:buNone/>
-            </a:pPr>
-            <a:r>
-              <a:rPr lang="en-US" sz="900" dirty="0">
-                <a:solidFill>
-                  <a:srgbClr val="8B8175"/>
-                </a:solidFill>
-                <a:latin typeface="游ゴシック" pitchFamily="34" charset="0"/>
-                <a:ea typeface="游ゴシック" pitchFamily="34" charset="-122"/>
-                <a:cs typeface="游ゴシック" pitchFamily="34" charset="-120"/>
-              </a:rPr>
-              <a:t>医学書院　Vol.28 No.3（2025.5）／ レポート「障害と美の多様性」Vol.28 No.5（2025.9）</a:t>
-            </a:r>
-            <a:endParaRPr lang="en-US" sz="900" dirty="0"/>
-          </a:p>
-        </p:txBody>
-      </p:sp>
-      <p:sp>
-        <p:nvSpPr>
-          <p:cNvPr id="25" name="Shape 23"/>
-          <p:cNvSpPr/>
-          <p:nvPr/>
-        </p:nvSpPr>
-        <p:spPr>
-          <a:xfrm>
-            <a:off x="685800" y="5330952"/>
-            <a:ext cx="10820095" cy="7315"/>
-          </a:xfrm>
-          <a:prstGeom prst="rect">
-            <a:avLst/>
-          </a:prstGeom>
-          <a:solidFill>
-            <a:srgbClr val="D2C4AE"/>
-          </a:solidFill>
-          <a:ln/>
-        </p:spPr>
-      </p:sp>
-      <p:sp>
-        <p:nvSpPr>
-          <p:cNvPr id="26" name="Text 24"/>
-          <p:cNvSpPr txBox="1"/>
-          <p:nvPr/>
-        </p:nvSpPr>
-        <p:spPr>
-          <a:xfrm>
-            <a:off x="685800" y="5458968"/>
-            <a:ext cx="1005840" cy="256032"/>
-          </a:xfrm>
-          <a:prstGeom prst="rect">
-            <a:avLst/>
-          </a:prstGeom>
-          <a:noFill/>
-          <a:ln/>
-        </p:spPr>
-        <p:txBody>
-          <a:bodyPr wrap="square" lIns="0" tIns="0" rIns="0" bIns="0" rtlCol="0" anchor="ctr"/>
-          <a:lstStyle/>
-          <a:p>
-            <a:pPr indent="0" marL="0">
-              <a:buNone/>
-            </a:pPr>
-            <a:r>
-              <a:rPr lang="en-US" sz="900" b="1" spc="200" kern="0" dirty="0">
-                <a:solidFill>
-                  <a:srgbClr val="9C5446"/>
-                </a:solidFill>
-                <a:latin typeface="游ゴシック" pitchFamily="34" charset="0"/>
-                <a:ea typeface="游ゴシック" pitchFamily="34" charset="-122"/>
-                <a:cs typeface="游ゴシック" pitchFamily="34" charset="-120"/>
-              </a:rPr>
-              <a:t>学会</a:t>
-            </a:r>
-            <a:endParaRPr lang="en-US" sz="900" dirty="0"/>
-          </a:p>
-        </p:txBody>
-      </p:sp>
-      <p:sp>
-        <p:nvSpPr>
-          <p:cNvPr id="27" name="Text 25"/>
-          <p:cNvSpPr txBox="1"/>
-          <p:nvPr/>
-        </p:nvSpPr>
-        <p:spPr>
-          <a:xfrm>
-            <a:off x="1828800" y="5422392"/>
-            <a:ext cx="9674352" cy="274320"/>
-          </a:xfrm>
-          <a:prstGeom prst="rect">
-            <a:avLst/>
-          </a:prstGeom>
-          <a:noFill/>
-          <a:ln/>
-        </p:spPr>
-        <p:txBody>
-          <a:bodyPr wrap="square" lIns="0" tIns="0" rIns="0" bIns="0" rtlCol="0" anchor="ctr"/>
-          <a:lstStyle/>
-          <a:p>
-            <a:pPr indent="0" marL="0">
-              <a:buNone/>
-            </a:pPr>
-            <a:r>
-              <a:rPr lang="en-US" sz="1100" dirty="0">
-                <a:solidFill>
-                  <a:srgbClr val="2B2620"/>
-                </a:solidFill>
-                <a:latin typeface="游ゴシック" pitchFamily="34" charset="0"/>
-                <a:ea typeface="游ゴシック" pitchFamily="34" charset="-122"/>
-                <a:cs typeface="游ゴシック" pitchFamily="34" charset="-120"/>
-              </a:rPr>
-              <a:t>全日本鍼灸学会（2024・2025・2026）／ 日本精神神経学会 鍼灸シンポジウム シンポジスト</a:t>
-            </a:r>
-            <a:endParaRPr lang="en-US" sz="1100" dirty="0"/>
-          </a:p>
-        </p:txBody>
-      </p:sp>
-      <p:sp>
-        <p:nvSpPr>
-          <p:cNvPr id="28" name="Text 26"/>
-          <p:cNvSpPr txBox="1"/>
-          <p:nvPr/>
-        </p:nvSpPr>
-        <p:spPr>
-          <a:xfrm>
-            <a:off x="1828800" y="5715000"/>
-            <a:ext cx="9674352" cy="274320"/>
-          </a:xfrm>
-          <a:prstGeom prst="rect">
-            <a:avLst/>
-          </a:prstGeom>
-          <a:noFill/>
-          <a:ln/>
-        </p:spPr>
-        <p:txBody>
-          <a:bodyPr wrap="square" lIns="0" tIns="0" rIns="0" bIns="0" rtlCol="0" anchor="ctr"/>
-          <a:lstStyle/>
-          <a:p>
-            <a:pPr indent="0" marL="0">
-              <a:buNone/>
-            </a:pPr>
-            <a:r>
-              <a:rPr lang="en-US" sz="900" dirty="0">
-                <a:solidFill>
-                  <a:srgbClr val="8B8175"/>
-                </a:solidFill>
-                <a:latin typeface="游ゴシック" pitchFamily="34" charset="0"/>
-                <a:ea typeface="游ゴシック" pitchFamily="34" charset="-122"/>
-                <a:cs typeface="游ゴシック" pitchFamily="34" charset="-120"/>
-              </a:rPr>
-              <a:t>うつと不安症状を有する患者の実態調査 第3報・第4報 ほか　― 2026.6 登壇予定</a:t>
-            </a:r>
-            <a:endParaRPr lang="en-US" sz="900" dirty="0"/>
-          </a:p>
-        </p:txBody>
-      </p:sp>
-      <p:sp>
-        <p:nvSpPr>
-          <p:cNvPr id="29" name="Shape 27"/>
-          <p:cNvSpPr/>
-          <p:nvPr/>
-        </p:nvSpPr>
-        <p:spPr>
-          <a:xfrm>
-            <a:off x="685800" y="6062472"/>
-            <a:ext cx="10820095" cy="7315"/>
-          </a:xfrm>
-          <a:prstGeom prst="rect">
-            <a:avLst/>
-          </a:prstGeom>
-          <a:solidFill>
-            <a:srgbClr val="D2C4AE"/>
-          </a:solidFill>
-          <a:ln/>
-        </p:spPr>
-      </p:sp>
-      <p:sp>
-        <p:nvSpPr>
-          <p:cNvPr id="30" name="Text 28"/>
-          <p:cNvSpPr txBox="1"/>
-          <p:nvPr/>
-        </p:nvSpPr>
-        <p:spPr>
-          <a:xfrm>
-            <a:off x="7848295" y="6336792"/>
-            <a:ext cx="3657600" cy="274320"/>
-          </a:xfrm>
-          <a:prstGeom prst="rect">
-            <a:avLst/>
-          </a:prstGeom>
-          <a:noFill/>
-          <a:ln/>
-        </p:spPr>
-        <p:txBody>
-          <a:bodyPr wrap="square" lIns="0" tIns="0" rIns="0" bIns="0" rtlCol="0" anchor="ctr"/>
-          <a:lstStyle/>
-          <a:p>
-            <a:pPr algn="r" indent="0" marL="0">
-              <a:buNone/>
-            </a:pPr>
-            <a:r>
-              <a:rPr lang="en-US" sz="900" dirty="0">
-                <a:solidFill>
-                  <a:srgbClr val="8B8175"/>
-                </a:solidFill>
-                <a:latin typeface="游ゴシック" pitchFamily="34" charset="0"/>
-                <a:ea typeface="游ゴシック" pitchFamily="34" charset="-122"/>
-                <a:cs typeface="游ゴシック" pitchFamily="34" charset="-120"/>
-              </a:rPr>
-              <a:t>参考資料（本編5分には含みません）</a:t>
-            </a:r>
-            <a:endParaRPr lang="en-US" sz="900" dirty="0"/>
-          </a:p>
-        </p:txBody>
-      </p:sp>
-      <p:sp>
-        <p:nvSpPr>
-          <p:cNvPr id="31" name="Text 29"/>
           <p:cNvSpPr txBox="1"/>
           <p:nvPr/>
         </p:nvSpPr>
@@ -8532,6 +9168,45 @@
                 <a:cs typeface="游ゴシック" pitchFamily="34" charset="-120"/>
               </a:rPr>
               <a:t>米倉まな｜アポプラスステーション様 ご提案</a:t>
+            </a:r>
+            <a:endParaRPr lang="en-US" sz="900" dirty="0"/>
+          </a:p>
+        </p:txBody>
+      </p:sp>
+      <p:sp>
+        <p:nvSpPr>
+          <p:cNvPr id="20" name="Text 18"/>
+          <p:cNvSpPr txBox="1"/>
+          <p:nvPr/>
+        </p:nvSpPr>
+        <p:spPr>
+          <a:xfrm>
+            <a:off x="8305495" y="6336792"/>
+            <a:ext cx="3200400" cy="274320"/>
+          </a:xfrm>
+          <a:prstGeom prst="rect">
+            <a:avLst/>
+          </a:prstGeom>
+          <a:noFill/>
+          <a:ln/>
+        </p:spPr>
+        <p:txBody>
+          <a:bodyPr wrap="square" lIns="0" tIns="0" rIns="0" bIns="0" rtlCol="0" anchor="ctr"/>
+          <a:lstStyle/>
+          <a:p>
+            <a:pPr algn="r" indent="0" marL="0">
+              <a:buNone/>
+            </a:pPr>
+            <a:r>
+              <a:rPr lang="en-US" sz="900" dirty="0">
+                <a:solidFill>
+                  <a:srgbClr val="8B8175"/>
+                </a:solidFill>
+                <a:latin typeface="游ゴシック" pitchFamily="34" charset="0"/>
+                <a:ea typeface="游ゴシック" pitchFamily="34" charset="-122"/>
+                <a:cs typeface="游ゴシック" pitchFamily="34" charset="-120"/>
+              </a:rPr>
+              <a:t>4:35 → 5:00</a:t>
             </a:r>
             <a:endParaRPr lang="en-US" sz="900" dirty="0"/>
           </a:p>

--- a/proposals/米倉まな_アポプラスステーション様ご提案_導入.pptx
+++ b/proposals/米倉まな_アポプラスステーション様ご提案_導入.pptx
@@ -863,7 +863,7 @@
           <a:p>
             <a:r>
               <a:rPr lang="en-US" dirty="0"/>
-              <a:t>もうひとつの顔が、企業の新規事業への伴走です。パパゲーノでは認定第一号として、就労継続支援の事業に発注する側で関わりました。ファンコミュニケーションズさんのThirdTalkは、病院やカウンセリングに行く一歩手前の人のためのオンライン対話サービスで、企画段階からご相談をいただき、立ち上げを見守ってきました。stand upさんはアミューズメントの会社で、新規事業のご相談から、いまもお取引が続いています。</a:t>
+              <a:t>ここからは、私が現場で感じていることをお話しします。左が社会の数字、右が私が院で見ていることです。精神疾患の患者は約600万人、国も2024年に初めて白書のテーマにこころの健康を据えました。私の院でも、心の不調を主訴に来られる方が明らかに増えています。2028年からは50人未満の会社にもストレスチェックが義務化されます。ただ、検査で気づいても次に行く場所がない。病院はもう新規を受けきれていません。そして損失の7.6兆円のうち7.3兆円は、出勤しているのに力が出ない人の分です。この層が、いま誰の担当にもなっていない。だから私は、未病の段階で止めたいと考えています。</a:t>
             </a:r>
             <a:endParaRPr lang="en-US" dirty="0"/>
           </a:p>
@@ -951,7 +951,7 @@
           <a:p>
             <a:r>
               <a:rPr lang="en-US" dirty="0"/>
-              <a:t>ここからは、私が現場で感じていることをお話しします。左が社会の数字、右が私が院で見ていることです。精神疾患の患者は約600万人、国も2024年に初めて白書のテーマにこころの健康を据えました。私の院でも、心の不調を主訴に来られる方が明らかに増えています。2028年からは50人未満の会社にもストレスチェックが義務化されます。ただ、検査で気づいても次に行く場所がない。病院はもう新規を受けきれていません。そして損失の7.6兆円のうち7.3兆円は、出勤しているのに力が出ない人の分です。この層が、いま誰の担当にもなっていない。だから私は、未病の段階で止めたいと考えています。</a:t>
+              <a:t>企業と鍼灸の組み合わせは、もう絵空事ではありません。枕で知られるブレインスリープさんは、睡眠専門の鍼灸院を自社ブランドで4店舗運営しています。有楽町マルイのように商業施設の中にも入っていて、丸井グループ側もプレスリリースを出しています。累計1万人以上が利用し、施術の効果も数字で公表し、定額プランで通い続けてもらう設計です。製品を売って終わりにせず、施術で人と関わり続けている。私がやろうとしている構造とほぼ同じで、違いは入口だけです。あの会社は睡眠から入った。私はこころから入ります。</a:t>
             </a:r>
             <a:endParaRPr lang="en-US" dirty="0"/>
           </a:p>
@@ -1127,7 +1127,7 @@
           <a:p>
             <a:r>
               <a:rPr lang="en-US" dirty="0"/>
-              <a:t>企業と鍼灸の組み合わせは、もう絵空事ではありません。枕で知られるブレインスリープさんは、睡眠専門の鍼灸院を自社ブランドで4店舗運営しています。有楽町マルイのように商業施設の中にも入っていて、丸井グループ側もプレスリリースを出しています。累計1万人以上が利用し、施術の効果も数字で公表し、定額プランで通い続けてもらう設計です。製品を売って終わりにせず、施術で人と関わり続けている。私がやろうとしている構造とほぼ同じで、違いは入口だけです。あの会社は睡眠から入った。私はこころから入ります。</a:t>
+              <a:t>もうひとつの顔が、企業の新規事業への伴走です。パパゲーノでは認定第一号として、就労継続支援の事業に発注する側で関わりました。ファンコミュニケーションズさんのThirdTalkは、病院やカウンセリングに行く一歩手前の人のためのオンライン対話サービスで、企画段階からご相談をいただき、立ち上げを見守ってきました。stand upさんはアミューズメントの会社で、新規事業のご相談から、いまもお取引が続いています。</a:t>
             </a:r>
             <a:endParaRPr lang="en-US" dirty="0"/>
           </a:p>
@@ -1303,7 +1303,7 @@
           <a:p>
             <a:r>
               <a:rPr lang="en-US" dirty="0"/>
-              <a:t>お願いしたいことは3つです。未病領域の新規事業の共同検討、人材・組織の知見、そして実証の場。治療が必要になる手前で、生きづらさを抱えた人を減らしたい。ぜひご一緒させてください。</a:t>
+              <a:t>お願いしたいことは3つです。未病領域の新規事業の共同検討、人材・組織の知見、そして実証の場。治療が必要になる手前で、生きづらさを抱えた人を減らしたい。まずは本日、この3つのうちどこに可能性がありそうか、率直なご意見をいただけたら嬉しいです。</a:t>
             </a:r>
             <a:endParaRPr lang="en-US" dirty="0"/>
           </a:p>
@@ -4937,6 +4937,810 @@
     <p:bg>
       <p:bgPr>
         <a:solidFill>
+          <a:srgbClr val="2B2620"/>
+        </a:solidFill>
+      </p:bgPr>
+    </p:bg>
+    <p:spTree>
+      <p:nvGrpSpPr>
+        <p:cNvPr id="1" name=""/>
+        <p:cNvGrpSpPr/>
+        <p:nvPr/>
+      </p:nvGrpSpPr>
+      <p:grpSpPr>
+        <a:xfrm>
+          <a:off x="0" y="0"/>
+          <a:ext cx="0" cy="0"/>
+          <a:chOff x="0" y="0"/>
+          <a:chExt cx="0" cy="0"/>
+        </a:xfrm>
+      </p:grpSpPr>
+      <p:sp>
+        <p:nvSpPr>
+          <p:cNvPr id="2" name="Shape 0"/>
+          <p:cNvSpPr/>
+          <p:nvPr/>
+        </p:nvSpPr>
+        <p:spPr>
+          <a:xfrm>
+            <a:off x="685800" y="562356"/>
+            <a:ext cx="237744" cy="12802"/>
+          </a:xfrm>
+          <a:prstGeom prst="rect">
+            <a:avLst/>
+          </a:prstGeom>
+          <a:solidFill>
+            <a:srgbClr val="C97B68"/>
+          </a:solidFill>
+          <a:ln/>
+        </p:spPr>
+      </p:sp>
+      <p:sp>
+        <p:nvSpPr>
+          <p:cNvPr id="3" name="Text 1"/>
+          <p:cNvSpPr txBox="1"/>
+          <p:nvPr/>
+        </p:nvSpPr>
+        <p:spPr>
+          <a:xfrm>
+            <a:off x="996696" y="402336"/>
+            <a:ext cx="7315200" cy="310896"/>
+          </a:xfrm>
+          <a:prstGeom prst="rect">
+            <a:avLst/>
+          </a:prstGeom>
+          <a:noFill/>
+          <a:ln/>
+        </p:spPr>
+        <p:txBody>
+          <a:bodyPr wrap="square" lIns="0" tIns="0" rIns="0" bIns="0" rtlCol="0" anchor="ctr"/>
+          <a:lstStyle/>
+          <a:p>
+            <a:pPr indent="0" marL="0">
+              <a:buNone/>
+            </a:pPr>
+            <a:r>
+              <a:rPr lang="en-US" sz="1000" b="1" spc="200" kern="0" dirty="0">
+                <a:solidFill>
+                  <a:srgbClr val="C97B68"/>
+                </a:solidFill>
+                <a:latin typeface="游明朝" pitchFamily="34" charset="0"/>
+                <a:ea typeface="游明朝" pitchFamily="34" charset="-122"/>
+                <a:cs typeface="游明朝" pitchFamily="34" charset="-120"/>
+              </a:rPr>
+              <a:t>03   </a:t>
+            </a:r>
+            <a:pPr indent="0" marL="0">
+              <a:buNone/>
+            </a:pPr>
+            <a:r>
+              <a:rPr lang="en-US" sz="1000" spc="300" kern="0" dirty="0">
+                <a:solidFill>
+                  <a:srgbClr val="BDB2A2"/>
+                </a:solidFill>
+                <a:latin typeface="游ゴシック" pitchFamily="34" charset="0"/>
+                <a:ea typeface="游ゴシック" pitchFamily="34" charset="-122"/>
+                <a:cs typeface="游ゴシック" pitchFamily="34" charset="-120"/>
+              </a:rPr>
+              <a:t>ISSUE</a:t>
+            </a:r>
+            <a:endParaRPr lang="en-US" sz="1000" dirty="0"/>
+          </a:p>
+        </p:txBody>
+      </p:sp>
+      <p:sp>
+        <p:nvSpPr>
+          <p:cNvPr id="4" name="Text 2"/>
+          <p:cNvSpPr txBox="1"/>
+          <p:nvPr/>
+        </p:nvSpPr>
+        <p:spPr>
+          <a:xfrm>
+            <a:off x="685800" y="841248"/>
+            <a:ext cx="10820095" cy="777240"/>
+          </a:xfrm>
+          <a:prstGeom prst="rect">
+            <a:avLst/>
+          </a:prstGeom>
+          <a:noFill/>
+          <a:ln/>
+        </p:spPr>
+        <p:txBody>
+          <a:bodyPr wrap="square" lIns="0" tIns="0" rIns="0" bIns="0" rtlCol="0" anchor="ctr"/>
+          <a:lstStyle/>
+          <a:p>
+            <a:pPr indent="0" marL="0">
+              <a:buNone/>
+            </a:pPr>
+            <a:r>
+              <a:rPr lang="en-US" sz="2800" b="1" spc="100" kern="0" dirty="0">
+                <a:solidFill>
+                  <a:srgbClr val="F3ECE0"/>
+                </a:solidFill>
+                <a:latin typeface="游明朝" pitchFamily="34" charset="0"/>
+                <a:ea typeface="游明朝" pitchFamily="34" charset="-122"/>
+                <a:cs typeface="游明朝" pitchFamily="34" charset="-120"/>
+              </a:rPr>
+              <a:t>これは私の実感であり、社会の数字でもあります</a:t>
+            </a:r>
+            <a:endParaRPr lang="en-US" sz="2800" dirty="0"/>
+          </a:p>
+        </p:txBody>
+      </p:sp>
+      <p:sp>
+        <p:nvSpPr>
+          <p:cNvPr id="5" name="Text 3"/>
+          <p:cNvSpPr txBox="1"/>
+          <p:nvPr/>
+        </p:nvSpPr>
+        <p:spPr>
+          <a:xfrm>
+            <a:off x="685800" y="1627632"/>
+            <a:ext cx="5029200" cy="256032"/>
+          </a:xfrm>
+          <a:prstGeom prst="rect">
+            <a:avLst/>
+          </a:prstGeom>
+          <a:noFill/>
+          <a:ln/>
+        </p:spPr>
+        <p:txBody>
+          <a:bodyPr wrap="square" lIns="0" tIns="0" rIns="0" bIns="0" rtlCol="0" anchor="ctr"/>
+          <a:lstStyle/>
+          <a:p>
+            <a:pPr indent="0" marL="0">
+              <a:buNone/>
+            </a:pPr>
+            <a:r>
+              <a:rPr lang="en-US" sz="950" b="1" spc="300" kern="0" dirty="0">
+                <a:solidFill>
+                  <a:srgbClr val="C97B68"/>
+                </a:solidFill>
+                <a:latin typeface="游ゴシック" pitchFamily="34" charset="0"/>
+                <a:ea typeface="游ゴシック" pitchFamily="34" charset="-122"/>
+                <a:cs typeface="游ゴシック" pitchFamily="34" charset="-120"/>
+              </a:rPr>
+              <a:t>社会で起きていること</a:t>
+            </a:r>
+            <a:endParaRPr lang="en-US" sz="950" dirty="0"/>
+          </a:p>
+        </p:txBody>
+      </p:sp>
+      <p:sp>
+        <p:nvSpPr>
+          <p:cNvPr id="6" name="Text 4"/>
+          <p:cNvSpPr txBox="1"/>
+          <p:nvPr/>
+        </p:nvSpPr>
+        <p:spPr>
+          <a:xfrm>
+            <a:off x="6309360" y="1627632"/>
+            <a:ext cx="5193792" cy="256032"/>
+          </a:xfrm>
+          <a:prstGeom prst="rect">
+            <a:avLst/>
+          </a:prstGeom>
+          <a:noFill/>
+          <a:ln/>
+        </p:spPr>
+        <p:txBody>
+          <a:bodyPr wrap="square" lIns="0" tIns="0" rIns="0" bIns="0" rtlCol="0" anchor="ctr"/>
+          <a:lstStyle/>
+          <a:p>
+            <a:pPr indent="0" marL="0">
+              <a:buNone/>
+            </a:pPr>
+            <a:r>
+              <a:rPr lang="en-US" sz="950" b="1" spc="300" kern="0" dirty="0">
+                <a:solidFill>
+                  <a:srgbClr val="93AC93"/>
+                </a:solidFill>
+                <a:latin typeface="游ゴシック" pitchFamily="34" charset="0"/>
+                <a:ea typeface="游ゴシック" pitchFamily="34" charset="-122"/>
+                <a:cs typeface="游ゴシック" pitchFamily="34" charset="-120"/>
+              </a:rPr>
+              <a:t>私が現場で見ていること</a:t>
+            </a:r>
+            <a:endParaRPr lang="en-US" sz="950" dirty="0"/>
+          </a:p>
+        </p:txBody>
+      </p:sp>
+      <p:sp>
+        <p:nvSpPr>
+          <p:cNvPr id="7" name="Shape 5"/>
+          <p:cNvSpPr/>
+          <p:nvPr/>
+        </p:nvSpPr>
+        <p:spPr>
+          <a:xfrm>
+            <a:off x="685800" y="1847088"/>
+            <a:ext cx="5029200" cy="7315"/>
+          </a:xfrm>
+          <a:prstGeom prst="rect">
+            <a:avLst/>
+          </a:prstGeom>
+          <a:solidFill>
+            <a:srgbClr val="4A423A"/>
+          </a:solidFill>
+          <a:ln/>
+        </p:spPr>
+      </p:sp>
+      <p:sp>
+        <p:nvSpPr>
+          <p:cNvPr id="8" name="Shape 6"/>
+          <p:cNvSpPr/>
+          <p:nvPr/>
+        </p:nvSpPr>
+        <p:spPr>
+          <a:xfrm>
+            <a:off x="6309360" y="1847088"/>
+            <a:ext cx="5193792" cy="7315"/>
+          </a:xfrm>
+          <a:prstGeom prst="rect">
+            <a:avLst/>
+          </a:prstGeom>
+          <a:solidFill>
+            <a:srgbClr val="4A423A"/>
+          </a:solidFill>
+          <a:ln/>
+        </p:spPr>
+      </p:sp>
+      <p:sp>
+        <p:nvSpPr>
+          <p:cNvPr id="9" name="Text 7"/>
+          <p:cNvSpPr txBox="1"/>
+          <p:nvPr/>
+        </p:nvSpPr>
+        <p:spPr>
+          <a:xfrm>
+            <a:off x="685800" y="1956816"/>
+            <a:ext cx="5029200" cy="822960"/>
+          </a:xfrm>
+          <a:prstGeom prst="rect">
+            <a:avLst/>
+          </a:prstGeom>
+          <a:noFill/>
+          <a:ln/>
+        </p:spPr>
+        <p:txBody>
+          <a:bodyPr wrap="square" lIns="0" tIns="0" rIns="0" bIns="0" rtlCol="0" anchor="t"/>
+          <a:lstStyle/>
+          <a:p>
+            <a:pPr indent="0" marL="0">
+              <a:lnSpc>
+                <a:spcPts val="1800"/>
+              </a:lnSpc>
+              <a:buNone/>
+            </a:pPr>
+            <a:r>
+              <a:rPr lang="en-US" sz="1500" b="1" dirty="0">
+                <a:solidFill>
+                  <a:srgbClr val="C97B68"/>
+                </a:solidFill>
+                <a:latin typeface="游明朝" pitchFamily="34" charset="0"/>
+                <a:ea typeface="游明朝" pitchFamily="34" charset="-122"/>
+                <a:cs typeface="游明朝" pitchFamily="34" charset="-120"/>
+              </a:rPr>
+              <a:t>約600万人　</a:t>
+            </a:r>
+            <a:pPr indent="0" marL="0">
+              <a:lnSpc>
+                <a:spcPts val="1800"/>
+              </a:lnSpc>
+              <a:buNone/>
+            </a:pPr>
+            <a:r>
+              <a:rPr lang="en-US" sz="1050" dirty="0">
+                <a:solidFill>
+                  <a:srgbClr val="F3ECE0"/>
+                </a:solidFill>
+                <a:latin typeface="游ゴシック" pitchFamily="34" charset="0"/>
+                <a:ea typeface="游ゴシック" pitchFamily="34" charset="-122"/>
+                <a:cs typeface="游ゴシック" pitchFamily="34" charset="-120"/>
+              </a:rPr>
+              <a:t>精神疾患を持つ患者数。国は2024年、厚生労働白書で初めて「こころの健康」をテーマに据えました。</a:t>
+            </a:r>
+            <a:endParaRPr lang="en-US" sz="1050" dirty="0"/>
+          </a:p>
+        </p:txBody>
+      </p:sp>
+      <p:sp>
+        <p:nvSpPr>
+          <p:cNvPr id="10" name="Text 8"/>
+          <p:cNvSpPr txBox="1"/>
+          <p:nvPr/>
+        </p:nvSpPr>
+        <p:spPr>
+          <a:xfrm>
+            <a:off x="6309360" y="1956816"/>
+            <a:ext cx="5193792" cy="822960"/>
+          </a:xfrm>
+          <a:prstGeom prst="rect">
+            <a:avLst/>
+          </a:prstGeom>
+          <a:noFill/>
+          <a:ln/>
+        </p:spPr>
+        <p:txBody>
+          <a:bodyPr wrap="square" lIns="0" tIns="0" rIns="0" bIns="0" rtlCol="0" anchor="t"/>
+          <a:lstStyle/>
+          <a:p>
+            <a:pPr indent="0" marL="0">
+              <a:lnSpc>
+                <a:spcPts val="1800"/>
+              </a:lnSpc>
+              <a:buNone/>
+            </a:pPr>
+            <a:r>
+              <a:rPr lang="en-US" sz="1050" dirty="0">
+                <a:solidFill>
+                  <a:srgbClr val="BDB2A2"/>
+                </a:solidFill>
+                <a:latin typeface="游ゴシック" pitchFamily="34" charset="0"/>
+                <a:ea typeface="游ゴシック" pitchFamily="34" charset="-122"/>
+                <a:cs typeface="游ゴシック" pitchFamily="34" charset="-120"/>
+              </a:rPr>
+              <a:t>のべ20,000人を診てきて、心の不調を主訴に来られる方が明らかに増えました。</a:t>
+            </a:r>
+            <a:endParaRPr lang="en-US" sz="1050" dirty="0"/>
+          </a:p>
+        </p:txBody>
+      </p:sp>
+      <p:sp>
+        <p:nvSpPr>
+          <p:cNvPr id="11" name="Shape 9"/>
+          <p:cNvSpPr/>
+          <p:nvPr/>
+        </p:nvSpPr>
+        <p:spPr>
+          <a:xfrm>
+            <a:off x="685800" y="2816352"/>
+            <a:ext cx="5029200" cy="7315"/>
+          </a:xfrm>
+          <a:prstGeom prst="rect">
+            <a:avLst/>
+          </a:prstGeom>
+          <a:solidFill>
+            <a:srgbClr val="4A423A"/>
+          </a:solidFill>
+          <a:ln/>
+        </p:spPr>
+      </p:sp>
+      <p:sp>
+        <p:nvSpPr>
+          <p:cNvPr id="12" name="Shape 10"/>
+          <p:cNvSpPr/>
+          <p:nvPr/>
+        </p:nvSpPr>
+        <p:spPr>
+          <a:xfrm>
+            <a:off x="6309360" y="2816352"/>
+            <a:ext cx="5193792" cy="7315"/>
+          </a:xfrm>
+          <a:prstGeom prst="rect">
+            <a:avLst/>
+          </a:prstGeom>
+          <a:solidFill>
+            <a:srgbClr val="4A423A"/>
+          </a:solidFill>
+          <a:ln/>
+        </p:spPr>
+      </p:sp>
+      <p:sp>
+        <p:nvSpPr>
+          <p:cNvPr id="13" name="Text 11"/>
+          <p:cNvSpPr txBox="1"/>
+          <p:nvPr/>
+        </p:nvSpPr>
+        <p:spPr>
+          <a:xfrm>
+            <a:off x="685800" y="2926080"/>
+            <a:ext cx="5029200" cy="822960"/>
+          </a:xfrm>
+          <a:prstGeom prst="rect">
+            <a:avLst/>
+          </a:prstGeom>
+          <a:noFill/>
+          <a:ln/>
+        </p:spPr>
+        <p:txBody>
+          <a:bodyPr wrap="square" lIns="0" tIns="0" rIns="0" bIns="0" rtlCol="0" anchor="t"/>
+          <a:lstStyle/>
+          <a:p>
+            <a:pPr indent="0" marL="0">
+              <a:lnSpc>
+                <a:spcPts val="1800"/>
+              </a:lnSpc>
+              <a:buNone/>
+            </a:pPr>
+            <a:r>
+              <a:rPr lang="en-US" sz="1500" b="1" dirty="0">
+                <a:solidFill>
+                  <a:srgbClr val="C97B68"/>
+                </a:solidFill>
+                <a:latin typeface="游明朝" pitchFamily="34" charset="0"/>
+                <a:ea typeface="游明朝" pitchFamily="34" charset="-122"/>
+                <a:cs typeface="游明朝" pitchFamily="34" charset="-120"/>
+              </a:rPr>
+              <a:t>2028年4月　</a:t>
+            </a:r>
+            <a:pPr indent="0" marL="0">
+              <a:lnSpc>
+                <a:spcPts val="1800"/>
+              </a:lnSpc>
+              <a:buNone/>
+            </a:pPr>
+            <a:r>
+              <a:rPr lang="en-US" sz="1050" dirty="0">
+                <a:solidFill>
+                  <a:srgbClr val="F3ECE0"/>
+                </a:solidFill>
+                <a:latin typeface="游ゴシック" pitchFamily="34" charset="0"/>
+                <a:ea typeface="游ゴシック" pitchFamily="34" charset="-122"/>
+                <a:cs typeface="游ゴシック" pitchFamily="34" charset="-120"/>
+              </a:rPr>
+              <a:t>50人未満の事業場にもストレスチェックが義務化。現在の実施率は6割弱です。</a:t>
+            </a:r>
+            <a:endParaRPr lang="en-US" sz="1050" dirty="0"/>
+          </a:p>
+        </p:txBody>
+      </p:sp>
+      <p:sp>
+        <p:nvSpPr>
+          <p:cNvPr id="14" name="Text 12"/>
+          <p:cNvSpPr txBox="1"/>
+          <p:nvPr/>
+        </p:nvSpPr>
+        <p:spPr>
+          <a:xfrm>
+            <a:off x="6309360" y="2926080"/>
+            <a:ext cx="5193792" cy="822960"/>
+          </a:xfrm>
+          <a:prstGeom prst="rect">
+            <a:avLst/>
+          </a:prstGeom>
+          <a:noFill/>
+          <a:ln/>
+        </p:spPr>
+        <p:txBody>
+          <a:bodyPr wrap="square" lIns="0" tIns="0" rIns="0" bIns="0" rtlCol="0" anchor="t"/>
+          <a:lstStyle/>
+          <a:p>
+            <a:pPr indent="0" marL="0">
+              <a:lnSpc>
+                <a:spcPts val="1800"/>
+              </a:lnSpc>
+              <a:buNone/>
+            </a:pPr>
+            <a:r>
+              <a:rPr lang="en-US" sz="1050" dirty="0">
+                <a:solidFill>
+                  <a:srgbClr val="BDB2A2"/>
+                </a:solidFill>
+                <a:latin typeface="游ゴシック" pitchFamily="34" charset="0"/>
+                <a:ea typeface="游ゴシック" pitchFamily="34" charset="-122"/>
+                <a:cs typeface="游ゴシック" pitchFamily="34" charset="-120"/>
+              </a:rPr>
+              <a:t>気づいても、次に行く場所がない。精神科は予約が埋まり、新規の受付を止める医療機関が出ています。</a:t>
+            </a:r>
+            <a:endParaRPr lang="en-US" sz="1050" dirty="0"/>
+          </a:p>
+        </p:txBody>
+      </p:sp>
+      <p:sp>
+        <p:nvSpPr>
+          <p:cNvPr id="15" name="Shape 13"/>
+          <p:cNvSpPr/>
+          <p:nvPr/>
+        </p:nvSpPr>
+        <p:spPr>
+          <a:xfrm>
+            <a:off x="685800" y="3785616"/>
+            <a:ext cx="5029200" cy="7315"/>
+          </a:xfrm>
+          <a:prstGeom prst="rect">
+            <a:avLst/>
+          </a:prstGeom>
+          <a:solidFill>
+            <a:srgbClr val="4A423A"/>
+          </a:solidFill>
+          <a:ln/>
+        </p:spPr>
+      </p:sp>
+      <p:sp>
+        <p:nvSpPr>
+          <p:cNvPr id="16" name="Shape 14"/>
+          <p:cNvSpPr/>
+          <p:nvPr/>
+        </p:nvSpPr>
+        <p:spPr>
+          <a:xfrm>
+            <a:off x="6309360" y="3785616"/>
+            <a:ext cx="5193792" cy="7315"/>
+          </a:xfrm>
+          <a:prstGeom prst="rect">
+            <a:avLst/>
+          </a:prstGeom>
+          <a:solidFill>
+            <a:srgbClr val="4A423A"/>
+          </a:solidFill>
+          <a:ln/>
+        </p:spPr>
+      </p:sp>
+      <p:sp>
+        <p:nvSpPr>
+          <p:cNvPr id="17" name="Text 15"/>
+          <p:cNvSpPr txBox="1"/>
+          <p:nvPr/>
+        </p:nvSpPr>
+        <p:spPr>
+          <a:xfrm>
+            <a:off x="685800" y="3895344"/>
+            <a:ext cx="5029200" cy="822960"/>
+          </a:xfrm>
+          <a:prstGeom prst="rect">
+            <a:avLst/>
+          </a:prstGeom>
+          <a:noFill/>
+          <a:ln/>
+        </p:spPr>
+        <p:txBody>
+          <a:bodyPr wrap="square" lIns="0" tIns="0" rIns="0" bIns="0" rtlCol="0" anchor="t"/>
+          <a:lstStyle/>
+          <a:p>
+            <a:pPr indent="0" marL="0">
+              <a:lnSpc>
+                <a:spcPts val="1800"/>
+              </a:lnSpc>
+              <a:buNone/>
+            </a:pPr>
+            <a:r>
+              <a:rPr lang="en-US" sz="1500" b="1" dirty="0">
+                <a:solidFill>
+                  <a:srgbClr val="C97B68"/>
+                </a:solidFill>
+                <a:latin typeface="游明朝" pitchFamily="34" charset="0"/>
+                <a:ea typeface="游明朝" pitchFamily="34" charset="-122"/>
+                <a:cs typeface="游明朝" pitchFamily="34" charset="-120"/>
+              </a:rPr>
+              <a:t>年7.6兆円　</a:t>
+            </a:r>
+            <a:pPr indent="0" marL="0">
+              <a:lnSpc>
+                <a:spcPts val="1800"/>
+              </a:lnSpc>
+              <a:buNone/>
+            </a:pPr>
+            <a:r>
+              <a:rPr lang="en-US" sz="1050" dirty="0">
+                <a:solidFill>
+                  <a:srgbClr val="F3ECE0"/>
+                </a:solidFill>
+                <a:latin typeface="游ゴシック" pitchFamily="34" charset="0"/>
+                <a:ea typeface="游ゴシック" pitchFamily="34" charset="-122"/>
+                <a:cs typeface="游ゴシック" pitchFamily="34" charset="-120"/>
+              </a:rPr>
+              <a:t>メンタル不調による経済損失。うち7.3兆円は「出勤しているのに力が出ない」分です。</a:t>
+            </a:r>
+            <a:endParaRPr lang="en-US" sz="1050" dirty="0"/>
+          </a:p>
+        </p:txBody>
+      </p:sp>
+      <p:sp>
+        <p:nvSpPr>
+          <p:cNvPr id="18" name="Text 16"/>
+          <p:cNvSpPr txBox="1"/>
+          <p:nvPr/>
+        </p:nvSpPr>
+        <p:spPr>
+          <a:xfrm>
+            <a:off x="6309360" y="3895344"/>
+            <a:ext cx="5193792" cy="822960"/>
+          </a:xfrm>
+          <a:prstGeom prst="rect">
+            <a:avLst/>
+          </a:prstGeom>
+          <a:noFill/>
+          <a:ln/>
+        </p:spPr>
+        <p:txBody>
+          <a:bodyPr wrap="square" lIns="0" tIns="0" rIns="0" bIns="0" rtlCol="0" anchor="t"/>
+          <a:lstStyle/>
+          <a:p>
+            <a:pPr indent="0" marL="0">
+              <a:lnSpc>
+                <a:spcPts val="1800"/>
+              </a:lnSpc>
+              <a:buNone/>
+            </a:pPr>
+            <a:r>
+              <a:rPr lang="en-US" sz="1050" dirty="0">
+                <a:solidFill>
+                  <a:srgbClr val="BDB2A2"/>
+                </a:solidFill>
+                <a:latin typeface="游ゴシック" pitchFamily="34" charset="0"/>
+                <a:ea typeface="游ゴシック" pitchFamily="34" charset="-122"/>
+                <a:cs typeface="游ゴシック" pitchFamily="34" charset="-120"/>
+              </a:rPr>
+              <a:t>休職や通院の手前で止まっている方が、いちばん多い。この層は、いま誰の担当でもありません。</a:t>
+            </a:r>
+            <a:endParaRPr lang="en-US" sz="1050" dirty="0"/>
+          </a:p>
+        </p:txBody>
+      </p:sp>
+      <p:sp>
+        <p:nvSpPr>
+          <p:cNvPr id="19" name="Text 17"/>
+          <p:cNvSpPr txBox="1"/>
+          <p:nvPr/>
+        </p:nvSpPr>
+        <p:spPr>
+          <a:xfrm>
+            <a:off x="685800" y="5120640"/>
+            <a:ext cx="10820095" cy="548640"/>
+          </a:xfrm>
+          <a:prstGeom prst="rect">
+            <a:avLst/>
+          </a:prstGeom>
+          <a:noFill/>
+          <a:ln/>
+        </p:spPr>
+        <p:txBody>
+          <a:bodyPr wrap="square" lIns="0" tIns="0" rIns="0" bIns="0" rtlCol="0" anchor="ctr"/>
+          <a:lstStyle/>
+          <a:p>
+            <a:pPr indent="0" marL="0">
+              <a:buNone/>
+            </a:pPr>
+            <a:r>
+              <a:rPr lang="en-US" sz="2300" b="1" dirty="0">
+                <a:solidFill>
+                  <a:srgbClr val="C97B68"/>
+                </a:solidFill>
+                <a:latin typeface="游明朝" pitchFamily="34" charset="0"/>
+                <a:ea typeface="游明朝" pitchFamily="34" charset="-122"/>
+                <a:cs typeface="游明朝" pitchFamily="34" charset="-120"/>
+              </a:rPr>
+              <a:t>だから、未病の段階で止めておきたい。</a:t>
+            </a:r>
+            <a:endParaRPr lang="en-US" sz="2300" dirty="0"/>
+          </a:p>
+        </p:txBody>
+      </p:sp>
+      <p:sp>
+        <p:nvSpPr>
+          <p:cNvPr id="20" name="Text 18"/>
+          <p:cNvSpPr txBox="1"/>
+          <p:nvPr/>
+        </p:nvSpPr>
+        <p:spPr>
+          <a:xfrm>
+            <a:off x="685800" y="5897880"/>
+            <a:ext cx="10820095" cy="329184"/>
+          </a:xfrm>
+          <a:prstGeom prst="rect">
+            <a:avLst/>
+          </a:prstGeom>
+          <a:noFill/>
+          <a:ln/>
+        </p:spPr>
+        <p:txBody>
+          <a:bodyPr wrap="square" lIns="0" tIns="0" rIns="0" bIns="0" rtlCol="0" anchor="t"/>
+          <a:lstStyle/>
+          <a:p>
+            <a:pPr indent="0" marL="0">
+              <a:lnSpc>
+                <a:spcPts val="1100"/>
+              </a:lnSpc>
+              <a:buNone/>
+            </a:pPr>
+            <a:r>
+              <a:rPr lang="en-US" sz="750" dirty="0">
+                <a:solidFill>
+                  <a:srgbClr val="BDB2A2"/>
+                </a:solidFill>
+                <a:latin typeface="游ゴシック" pitchFamily="34" charset="0"/>
+                <a:ea typeface="游ゴシック" pitchFamily="34" charset="-122"/>
+                <a:cs typeface="游ゴシック" pitchFamily="34" charset="-120"/>
+              </a:rPr>
+              <a:t>出典：厚生労働省 患者調査／令和6年版 厚生労働白書／改正労働安全衛生法（2025年5月公布・2028年4月施行）／メンタルヘルス不調による経済損失の試算（労働者27,507人調査）</a:t>
+            </a:r>
+            <a:endParaRPr lang="en-US" sz="750" dirty="0"/>
+          </a:p>
+        </p:txBody>
+      </p:sp>
+      <p:sp>
+        <p:nvSpPr>
+          <p:cNvPr id="21" name="Text 19"/>
+          <p:cNvSpPr txBox="1"/>
+          <p:nvPr/>
+        </p:nvSpPr>
+        <p:spPr>
+          <a:xfrm>
+            <a:off x="685800" y="6336792"/>
+            <a:ext cx="7315200" cy="274320"/>
+          </a:xfrm>
+          <a:prstGeom prst="rect">
+            <a:avLst/>
+          </a:prstGeom>
+          <a:noFill/>
+          <a:ln/>
+        </p:spPr>
+        <p:txBody>
+          <a:bodyPr wrap="square" lIns="0" tIns="0" rIns="0" bIns="0" rtlCol="0" anchor="ctr"/>
+          <a:lstStyle/>
+          <a:p>
+            <a:pPr indent="0" marL="0">
+              <a:buNone/>
+            </a:pPr>
+            <a:r>
+              <a:rPr lang="en-US" sz="900" spc="100" kern="0" dirty="0">
+                <a:solidFill>
+                  <a:srgbClr val="BDB2A2"/>
+                </a:solidFill>
+                <a:latin typeface="游ゴシック" pitchFamily="34" charset="0"/>
+                <a:ea typeface="游ゴシック" pitchFamily="34" charset="-122"/>
+                <a:cs typeface="游ゴシック" pitchFamily="34" charset="-120"/>
+              </a:rPr>
+              <a:t>米倉まな｜アポプラスステーション様 ご提案</a:t>
+            </a:r>
+            <a:endParaRPr lang="en-US" sz="900" dirty="0"/>
+          </a:p>
+        </p:txBody>
+      </p:sp>
+      <p:sp>
+        <p:nvSpPr>
+          <p:cNvPr id="22" name="Text 20"/>
+          <p:cNvSpPr txBox="1"/>
+          <p:nvPr/>
+        </p:nvSpPr>
+        <p:spPr>
+          <a:xfrm>
+            <a:off x="8305495" y="6336792"/>
+            <a:ext cx="3200400" cy="274320"/>
+          </a:xfrm>
+          <a:prstGeom prst="rect">
+            <a:avLst/>
+          </a:prstGeom>
+          <a:noFill/>
+          <a:ln/>
+        </p:spPr>
+        <p:txBody>
+          <a:bodyPr wrap="square" lIns="0" tIns="0" rIns="0" bIns="0" rtlCol="0" anchor="ctr"/>
+          <a:lstStyle/>
+          <a:p>
+            <a:pPr algn="r" indent="0" marL="0">
+              <a:buNone/>
+            </a:pPr>
+            <a:r>
+              <a:rPr lang="en-US" sz="900" dirty="0">
+                <a:solidFill>
+                  <a:srgbClr val="BDB2A2"/>
+                </a:solidFill>
+                <a:latin typeface="游ゴシック" pitchFamily="34" charset="0"/>
+                <a:ea typeface="游ゴシック" pitchFamily="34" charset="-122"/>
+                <a:cs typeface="游ゴシック" pitchFamily="34" charset="-120"/>
+              </a:rPr>
+              <a:t>1:30 → 2:20</a:t>
+            </a:r>
+            <a:endParaRPr lang="en-US" sz="900" dirty="0"/>
+          </a:p>
+        </p:txBody>
+      </p:sp>
+    </p:spTree>
+  </p:cSld>
+  <p:clrMapOvr>
+    <a:masterClrMapping/>
+  </p:clrMapOvr>
+</p:sld>
+</file>
+
+<file path=ppt/slides/slide5.xml><?xml version="1.0" encoding="utf-8"?>
+<p:sld xmlns:a="http://schemas.openxmlformats.org/drawingml/2006/main" xmlns:r="http://schemas.openxmlformats.org/officeDocument/2006/relationships" xmlns:p="http://schemas.openxmlformats.org/presentationml/2006/main">
+  <p:cSld name="Slide 5">
+    <p:bg>
+      <p:bgPr>
+        <a:solidFill>
           <a:srgbClr val="F3EADB"/>
         </a:solidFill>
       </p:bgPr>
@@ -5008,7 +5812,7 @@
                 <a:ea typeface="游明朝" pitchFamily="34" charset="-122"/>
                 <a:cs typeface="游明朝" pitchFamily="34" charset="-120"/>
               </a:rPr>
-              <a:t>03   </a:t>
+              <a:t>04   </a:t>
             </a:r>
             <a:pPr indent="0" marL="0">
               <a:buNone/>
@@ -5022,7 +5826,7 @@
                 <a:ea typeface="游ゴシック" pitchFamily="34" charset="-122"/>
                 <a:cs typeface="游ゴシック" pitchFamily="34" charset="-120"/>
               </a:rPr>
-              <a:t>STRENGTH</a:t>
+              <a:t>CASE</a:t>
             </a:r>
             <a:endParaRPr lang="en-US" sz="1000" dirty="0"/>
           </a:p>
@@ -5061,7 +5865,7 @@
                 <a:ea typeface="游明朝" pitchFamily="34" charset="-122"/>
                 <a:cs typeface="游明朝" pitchFamily="34" charset="-120"/>
               </a:rPr>
-              <a:t>企業の新規事業に、専門家として入ってきました</a:t>
+              <a:t>「企業 × 鍼灸」は、すでに成立しています</a:t>
             </a:r>
             <a:endParaRPr lang="en-US" sz="2800" dirty="0"/>
           </a:p>
@@ -5069,468 +5873,374 @@
       </p:sp>
       <p:sp>
         <p:nvSpPr>
-          <p:cNvPr id="5" name="Shape 3"/>
+          <p:cNvPr id="5" name="Text 3"/>
+          <p:cNvSpPr txBox="1"/>
+          <p:nvPr/>
+        </p:nvSpPr>
+        <p:spPr>
+          <a:xfrm>
+            <a:off x="685800" y="1783080"/>
+            <a:ext cx="6035040" cy="3840480"/>
+          </a:xfrm>
+          <a:prstGeom prst="rect">
+            <a:avLst/>
+          </a:prstGeom>
+          <a:noFill/>
+          <a:ln/>
+        </p:spPr>
+        <p:txBody>
+          <a:bodyPr wrap="square" lIns="0" tIns="0" rIns="0" bIns="0" rtlCol="0" anchor="t"/>
+          <a:lstStyle/>
+          <a:p>
+            <a:pPr marL="342900" indent="-342900">
+              <a:lnSpc>
+                <a:spcPts val="1900"/>
+              </a:lnSpc>
+              <a:buSzPct val="100000"/>
+              <a:buChar char="•"/>
+            </a:pPr>
+            <a:r>
+              <a:rPr lang="en-US" sz="1050" dirty="0">
+                <a:solidFill>
+                  <a:srgbClr val="5A5249"/>
+                </a:solidFill>
+                <a:latin typeface="游ゴシック" pitchFamily="34" charset="0"/>
+                <a:ea typeface="游ゴシック" pitchFamily="34" charset="-122"/>
+                <a:cs typeface="游ゴシック" pitchFamily="34" charset="-120"/>
+              </a:rPr>
+              <a:t>睡眠製品のブレインスリープ社は、</a:t>
+            </a:r>
+            <a:pPr indent="0" marL="0">
+              <a:lnSpc>
+                <a:spcPts val="1900"/>
+              </a:lnSpc>
+              <a:buNone/>
+            </a:pPr>
+            <a:r>
+              <a:rPr lang="en-US" sz="1050" b="1" dirty="0">
+                <a:solidFill>
+                  <a:srgbClr val="2B2620"/>
+                </a:solidFill>
+                <a:latin typeface="游ゴシック" pitchFamily="34" charset="0"/>
+                <a:ea typeface="游ゴシック" pitchFamily="34" charset="-122"/>
+                <a:cs typeface="游ゴシック" pitchFamily="34" charset="-120"/>
+              </a:rPr>
+              <a:t>睡眠専門の鍼灸マッサージ「コンディショニングスタジオ」</a:t>
+            </a:r>
+            <a:pPr indent="0" marL="0">
+              <a:lnSpc>
+                <a:spcPts val="1900"/>
+              </a:lnSpc>
+              <a:spcAft>
+                <a:spcPts val="1000"/>
+              </a:spcAft>
+              <a:buNone/>
+            </a:pPr>
+            <a:r>
+              <a:rPr lang="en-US" sz="1050" dirty="0">
+                <a:solidFill>
+                  <a:srgbClr val="5A5249"/>
+                </a:solidFill>
+                <a:latin typeface="游ゴシック" pitchFamily="34" charset="0"/>
+                <a:ea typeface="游ゴシック" pitchFamily="34" charset="-122"/>
+                <a:cs typeface="游ゴシック" pitchFamily="34" charset="-120"/>
+              </a:rPr>
+              <a:t>を自社ブランドで運営。枕の売り場ではなく、独立した鍼灸院です。</a:t>
+            </a:r>
+            <a:endParaRPr lang="en-US" sz="1050" dirty="0"/>
+          </a:p>
+          <a:p>
+            <a:pPr marL="342900" indent="-342900">
+              <a:lnSpc>
+                <a:spcPts val="1900"/>
+              </a:lnSpc>
+              <a:buSzPct val="100000"/>
+              <a:buChar char="•"/>
+            </a:pPr>
+            <a:r>
+              <a:rPr lang="en-US" sz="1050" dirty="0">
+                <a:solidFill>
+                  <a:srgbClr val="5A5249"/>
+                </a:solidFill>
+                <a:latin typeface="游ゴシック" pitchFamily="34" charset="0"/>
+                <a:ea typeface="游ゴシック" pitchFamily="34" charset="-122"/>
+                <a:cs typeface="游ゴシック" pitchFamily="34" charset="-120"/>
+              </a:rPr>
+              <a:t>二子玉川・南青山・</a:t>
+            </a:r>
+            <a:pPr indent="0" marL="0">
+              <a:lnSpc>
+                <a:spcPts val="1900"/>
+              </a:lnSpc>
+              <a:buNone/>
+            </a:pPr>
+            <a:r>
+              <a:rPr lang="en-US" sz="1050" b="1" dirty="0">
+                <a:solidFill>
+                  <a:srgbClr val="2B2620"/>
+                </a:solidFill>
+                <a:latin typeface="游ゴシック" pitchFamily="34" charset="0"/>
+                <a:ea typeface="游ゴシック" pitchFamily="34" charset="-122"/>
+                <a:cs typeface="游ゴシック" pitchFamily="34" charset="-120"/>
+              </a:rPr>
+              <a:t>有楽町マルイ</a:t>
+            </a:r>
+            <a:pPr indent="0" marL="0">
+              <a:lnSpc>
+                <a:spcPts val="1900"/>
+              </a:lnSpc>
+              <a:buNone/>
+            </a:pPr>
+            <a:r>
+              <a:rPr lang="en-US" sz="1050" dirty="0">
+                <a:solidFill>
+                  <a:srgbClr val="5A5249"/>
+                </a:solidFill>
+                <a:latin typeface="游ゴシック" pitchFamily="34" charset="0"/>
+                <a:ea typeface="游ゴシック" pitchFamily="34" charset="-122"/>
+                <a:cs typeface="游ゴシック" pitchFamily="34" charset="-120"/>
+              </a:rPr>
+              <a:t>・東京ミッドタウン八重洲の</a:t>
+            </a:r>
+            <a:pPr indent="0" marL="0">
+              <a:lnSpc>
+                <a:spcPts val="1900"/>
+              </a:lnSpc>
+              <a:buNone/>
+            </a:pPr>
+            <a:r>
+              <a:rPr lang="en-US" sz="1050" b="1" dirty="0">
+                <a:solidFill>
+                  <a:srgbClr val="2B2620"/>
+                </a:solidFill>
+                <a:latin typeface="游ゴシック" pitchFamily="34" charset="0"/>
+                <a:ea typeface="游ゴシック" pitchFamily="34" charset="-122"/>
+                <a:cs typeface="游ゴシック" pitchFamily="34" charset="-120"/>
+              </a:rPr>
+              <a:t>4店舗</a:t>
+            </a:r>
+            <a:pPr indent="0" marL="0">
+              <a:lnSpc>
+                <a:spcPts val="1900"/>
+              </a:lnSpc>
+              <a:spcAft>
+                <a:spcPts val="1000"/>
+              </a:spcAft>
+              <a:buNone/>
+            </a:pPr>
+            <a:r>
+              <a:rPr lang="en-US" sz="1050" dirty="0">
+                <a:solidFill>
+                  <a:srgbClr val="5A5249"/>
+                </a:solidFill>
+                <a:latin typeface="游ゴシック" pitchFamily="34" charset="0"/>
+                <a:ea typeface="游ゴシック" pitchFamily="34" charset="-122"/>
+                <a:cs typeface="游ゴシック" pitchFamily="34" charset="-120"/>
+              </a:rPr>
+              <a:t>。商業施設側である丸井グループも、自らプレスリリースを出しています。</a:t>
+            </a:r>
+            <a:endParaRPr lang="en-US" sz="1050" dirty="0"/>
+          </a:p>
+          <a:p>
+            <a:pPr marL="342900" indent="-342900">
+              <a:lnSpc>
+                <a:spcPts val="1900"/>
+              </a:lnSpc>
+              <a:buSzPct val="100000"/>
+              <a:buChar char="•"/>
+            </a:pPr>
+            <a:r>
+              <a:rPr lang="en-US" sz="1050" dirty="0">
+                <a:solidFill>
+                  <a:srgbClr val="5A5249"/>
+                </a:solidFill>
+                <a:latin typeface="游ゴシック" pitchFamily="34" charset="0"/>
+                <a:ea typeface="游ゴシック" pitchFamily="34" charset="-122"/>
+                <a:cs typeface="游ゴシック" pitchFamily="34" charset="-120"/>
+              </a:rPr>
+              <a:t>オープン以来</a:t>
+            </a:r>
+            <a:pPr indent="0" marL="0">
+              <a:lnSpc>
+                <a:spcPts val="1900"/>
+              </a:lnSpc>
+              <a:buNone/>
+            </a:pPr>
+            <a:r>
+              <a:rPr lang="en-US" sz="1050" b="1" dirty="0">
+                <a:solidFill>
+                  <a:srgbClr val="2B2620"/>
+                </a:solidFill>
+                <a:latin typeface="游ゴシック" pitchFamily="34" charset="0"/>
+                <a:ea typeface="游ゴシック" pitchFamily="34" charset="-122"/>
+                <a:cs typeface="游ゴシック" pitchFamily="34" charset="-120"/>
+              </a:rPr>
+              <a:t>累計1万人以上</a:t>
+            </a:r>
+            <a:pPr indent="0" marL="0">
+              <a:lnSpc>
+                <a:spcPts val="1900"/>
+              </a:lnSpc>
+              <a:buNone/>
+            </a:pPr>
+            <a:r>
+              <a:rPr lang="en-US" sz="1050" dirty="0">
+                <a:solidFill>
+                  <a:srgbClr val="5A5249"/>
+                </a:solidFill>
+                <a:latin typeface="游ゴシック" pitchFamily="34" charset="0"/>
+                <a:ea typeface="游ゴシック" pitchFamily="34" charset="-122"/>
+                <a:cs typeface="游ゴシック" pitchFamily="34" charset="-120"/>
+              </a:rPr>
+              <a:t>が利用。自社研究では、1度の施術で眠りの深さが</a:t>
+            </a:r>
+            <a:pPr indent="0" marL="0">
+              <a:lnSpc>
+                <a:spcPts val="1900"/>
+              </a:lnSpc>
+              <a:buNone/>
+            </a:pPr>
+            <a:r>
+              <a:rPr lang="en-US" sz="1050" b="1" dirty="0">
+                <a:solidFill>
+                  <a:srgbClr val="2B2620"/>
+                </a:solidFill>
+                <a:latin typeface="游ゴシック" pitchFamily="34" charset="0"/>
+                <a:ea typeface="游ゴシック" pitchFamily="34" charset="-122"/>
+                <a:cs typeface="游ゴシック" pitchFamily="34" charset="-120"/>
+              </a:rPr>
+              <a:t>35%</a:t>
+            </a:r>
+            <a:pPr indent="0" marL="0">
+              <a:lnSpc>
+                <a:spcPts val="1900"/>
+              </a:lnSpc>
+              <a:buNone/>
+            </a:pPr>
+            <a:r>
+              <a:rPr lang="en-US" sz="1050" dirty="0">
+                <a:solidFill>
+                  <a:srgbClr val="5A5249"/>
+                </a:solidFill>
+                <a:latin typeface="游ゴシック" pitchFamily="34" charset="0"/>
+                <a:ea typeface="游ゴシック" pitchFamily="34" charset="-122"/>
+                <a:cs typeface="游ゴシック" pitchFamily="34" charset="-120"/>
+              </a:rPr>
+              <a:t>、疲労回復度が</a:t>
+            </a:r>
+            <a:pPr indent="0" marL="0">
+              <a:lnSpc>
+                <a:spcPts val="1900"/>
+              </a:lnSpc>
+              <a:buNone/>
+            </a:pPr>
+            <a:r>
+              <a:rPr lang="en-US" sz="1050" b="1" dirty="0">
+                <a:solidFill>
+                  <a:srgbClr val="2B2620"/>
+                </a:solidFill>
+                <a:latin typeface="游ゴシック" pitchFamily="34" charset="0"/>
+                <a:ea typeface="游ゴシック" pitchFamily="34" charset="-122"/>
+                <a:cs typeface="游ゴシック" pitchFamily="34" charset="-120"/>
+              </a:rPr>
+              <a:t>59%</a:t>
+            </a:r>
+            <a:pPr indent="0" marL="0">
+              <a:lnSpc>
+                <a:spcPts val="1900"/>
+              </a:lnSpc>
+              <a:spcAft>
+                <a:spcPts val="1000"/>
+              </a:spcAft>
+              <a:buNone/>
+            </a:pPr>
+            <a:r>
+              <a:rPr lang="en-US" sz="1050" dirty="0">
+                <a:solidFill>
+                  <a:srgbClr val="5A5249"/>
+                </a:solidFill>
+                <a:latin typeface="游ゴシック" pitchFamily="34" charset="0"/>
+                <a:ea typeface="游ゴシック" pitchFamily="34" charset="-122"/>
+                <a:cs typeface="游ゴシック" pitchFamily="34" charset="-120"/>
+              </a:rPr>
+              <a:t>向上したと公表。</a:t>
+            </a:r>
+            <a:endParaRPr lang="en-US" sz="1050" dirty="0"/>
+          </a:p>
+          <a:p>
+            <a:pPr marL="342900" indent="-342900">
+              <a:lnSpc>
+                <a:spcPts val="1900"/>
+              </a:lnSpc>
+              <a:buSzPct val="100000"/>
+              <a:buChar char="•"/>
+            </a:pPr>
+            <a:r>
+              <a:rPr lang="en-US" sz="1050" dirty="0">
+                <a:solidFill>
+                  <a:srgbClr val="5A5249"/>
+                </a:solidFill>
+                <a:latin typeface="游ゴシック" pitchFamily="34" charset="0"/>
+                <a:ea typeface="游ゴシック" pitchFamily="34" charset="-122"/>
+                <a:cs typeface="游ゴシック" pitchFamily="34" charset="-120"/>
+              </a:rPr>
+              <a:t>スタッフは全員が国家資格保有者で、自社資格「スリーププランナー」を取得。</a:t>
+            </a:r>
+            <a:pPr indent="0" marL="0">
+              <a:lnSpc>
+                <a:spcPts val="1900"/>
+              </a:lnSpc>
+              <a:buNone/>
+            </a:pPr>
+            <a:r>
+              <a:rPr lang="en-US" sz="1050" b="1" dirty="0">
+                <a:solidFill>
+                  <a:srgbClr val="2B2620"/>
+                </a:solidFill>
+                <a:latin typeface="游ゴシック" pitchFamily="34" charset="0"/>
+                <a:ea typeface="游ゴシック" pitchFamily="34" charset="-122"/>
+                <a:cs typeface="游ゴシック" pitchFamily="34" charset="-120"/>
+              </a:rPr>
+              <a:t>定額プラン</a:t>
+            </a:r>
+            <a:pPr indent="0" marL="0">
+              <a:lnSpc>
+                <a:spcPts val="1900"/>
+              </a:lnSpc>
+              <a:spcAft>
+                <a:spcPts val="1000"/>
+              </a:spcAft>
+              <a:buNone/>
+            </a:pPr>
+            <a:r>
+              <a:rPr lang="en-US" sz="1050" dirty="0">
+                <a:solidFill>
+                  <a:srgbClr val="5A5249"/>
+                </a:solidFill>
+                <a:latin typeface="游ゴシック" pitchFamily="34" charset="0"/>
+                <a:ea typeface="游ゴシック" pitchFamily="34" charset="-122"/>
+                <a:cs typeface="游ゴシック" pitchFamily="34" charset="-120"/>
+              </a:rPr>
+              <a:t>で、継続して通う前提が設計されています。</a:t>
+            </a:r>
+            <a:endParaRPr lang="en-US" sz="1050" dirty="0"/>
+          </a:p>
+        </p:txBody>
+      </p:sp>
+      <p:sp>
+        <p:nvSpPr>
+          <p:cNvPr id="6" name="Shape 4"/>
           <p:cNvSpPr/>
           <p:nvPr/>
         </p:nvSpPr>
         <p:spPr>
           <a:xfrm>
-            <a:off x="685800" y="1737360"/>
-            <a:ext cx="3456432" cy="2423160"/>
+            <a:off x="7040880" y="1783080"/>
+            <a:ext cx="4462272" cy="3200400"/>
           </a:xfrm>
           <a:prstGeom prst="roundRect">
             <a:avLst>
-              <a:gd name="adj" fmla="val 1887"/>
-            </a:avLst>
-          </a:prstGeom>
-          <a:solidFill>
-            <a:srgbClr val="FBF6EC"/>
-          </a:solidFill>
-          <a:ln w="9525">
-            <a:solidFill>
-              <a:srgbClr val="D2C4AE"/>
-            </a:solidFill>
-            <a:prstDash val="solid"/>
-          </a:ln>
-        </p:spPr>
-      </p:sp>
-      <p:sp>
-        <p:nvSpPr>
-          <p:cNvPr id="6" name="Text 4"/>
-          <p:cNvSpPr txBox="1"/>
-          <p:nvPr/>
-        </p:nvSpPr>
-        <p:spPr>
-          <a:xfrm>
-            <a:off x="941832" y="1938528"/>
-            <a:ext cx="2944368" cy="237744"/>
-          </a:xfrm>
-          <a:prstGeom prst="rect">
-            <a:avLst/>
-          </a:prstGeom>
-          <a:noFill/>
-          <a:ln/>
-        </p:spPr>
-        <p:txBody>
-          <a:bodyPr wrap="square" lIns="0" tIns="0" rIns="0" bIns="0" rtlCol="0" anchor="ctr"/>
-          <a:lstStyle/>
-          <a:p>
-            <a:pPr indent="0" marL="0">
-              <a:buNone/>
-            </a:pPr>
-            <a:r>
-              <a:rPr lang="en-US" sz="900" b="1" spc="200" kern="0" dirty="0">
-                <a:solidFill>
-                  <a:srgbClr val="9C5446"/>
-                </a:solidFill>
-                <a:latin typeface="游ゴシック" pitchFamily="34" charset="0"/>
-                <a:ea typeface="游ゴシック" pitchFamily="34" charset="-122"/>
-                <a:cs typeface="游ゴシック" pitchFamily="34" charset="-120"/>
-              </a:rPr>
-              <a:t>パパゲーノ</a:t>
-            </a:r>
-            <a:endParaRPr lang="en-US" sz="900" dirty="0"/>
-          </a:p>
-        </p:txBody>
-      </p:sp>
-      <p:sp>
-        <p:nvSpPr>
-          <p:cNvPr id="7" name="Text 5"/>
-          <p:cNvSpPr txBox="1"/>
-          <p:nvPr/>
-        </p:nvSpPr>
-        <p:spPr>
-          <a:xfrm>
-            <a:off x="941832" y="2212848"/>
-            <a:ext cx="2944368" cy="457200"/>
-          </a:xfrm>
-          <a:prstGeom prst="rect">
-            <a:avLst/>
-          </a:prstGeom>
-          <a:noFill/>
-          <a:ln/>
-        </p:spPr>
-        <p:txBody>
-          <a:bodyPr wrap="square" lIns="0" tIns="0" rIns="0" bIns="0" rtlCol="0" anchor="t"/>
-          <a:lstStyle/>
-          <a:p>
-            <a:pPr indent="0" marL="0">
-              <a:lnSpc>
-                <a:spcPts val="2100"/>
-              </a:lnSpc>
-              <a:buNone/>
-            </a:pPr>
-            <a:r>
-              <a:rPr lang="en-US" sz="1500" b="1" dirty="0">
-                <a:solidFill>
-                  <a:srgbClr val="2B2620"/>
-                </a:solidFill>
-                <a:latin typeface="游明朝" pitchFamily="34" charset="0"/>
-                <a:ea typeface="游明朝" pitchFamily="34" charset="-122"/>
-                <a:cs typeface="游明朝" pitchFamily="34" charset="-120"/>
-              </a:rPr>
-              <a:t>アンバサダー認定 第一号</a:t>
-            </a:r>
-            <a:endParaRPr lang="en-US" sz="1500" dirty="0"/>
-          </a:p>
-        </p:txBody>
-      </p:sp>
-      <p:sp>
-        <p:nvSpPr>
-          <p:cNvPr id="8" name="Text 6"/>
-          <p:cNvSpPr txBox="1"/>
-          <p:nvPr/>
-        </p:nvSpPr>
-        <p:spPr>
-          <a:xfrm>
-            <a:off x="941832" y="2724912"/>
-            <a:ext cx="2944368" cy="1234440"/>
-          </a:xfrm>
-          <a:prstGeom prst="rect">
-            <a:avLst/>
-          </a:prstGeom>
-          <a:noFill/>
-          <a:ln/>
-        </p:spPr>
-        <p:txBody>
-          <a:bodyPr wrap="square" lIns="0" tIns="0" rIns="0" bIns="0" rtlCol="0" anchor="t"/>
-          <a:lstStyle/>
-          <a:p>
-            <a:pPr indent="0" marL="0">
-              <a:lnSpc>
-                <a:spcPts val="1700"/>
-              </a:lnSpc>
-              <a:buNone/>
-            </a:pPr>
-            <a:r>
-              <a:rPr lang="en-US" sz="1050" dirty="0">
-                <a:solidFill>
-                  <a:srgbClr val="5A5249"/>
-                </a:solidFill>
-                <a:latin typeface="游ゴシック" pitchFamily="34" charset="0"/>
-                <a:ea typeface="游ゴシック" pitchFamily="34" charset="-122"/>
-                <a:cs typeface="游ゴシック" pitchFamily="34" charset="-120"/>
-              </a:rPr>
-              <a:t>就労継続支援B型「パパゲーノ Work &amp; Recovery」への発注を通じ、精神障害のある方が担う事業に伴走。認定制度の第一号企業です。</a:t>
-            </a:r>
-            <a:endParaRPr lang="en-US" sz="1050" dirty="0"/>
-          </a:p>
-        </p:txBody>
-      </p:sp>
-      <p:sp>
-        <p:nvSpPr>
-          <p:cNvPr id="9" name="Shape 7"/>
-          <p:cNvSpPr/>
-          <p:nvPr/>
-        </p:nvSpPr>
-        <p:spPr>
-          <a:xfrm>
-            <a:off x="4370832" y="1737360"/>
-            <a:ext cx="3456432" cy="2423160"/>
-          </a:xfrm>
-          <a:prstGeom prst="roundRect">
-            <a:avLst>
-              <a:gd name="adj" fmla="val 1887"/>
-            </a:avLst>
-          </a:prstGeom>
-          <a:solidFill>
-            <a:srgbClr val="FBF6EC"/>
-          </a:solidFill>
-          <a:ln w="9525">
-            <a:solidFill>
-              <a:srgbClr val="D2C4AE"/>
-            </a:solidFill>
-            <a:prstDash val="solid"/>
-          </a:ln>
-        </p:spPr>
-      </p:sp>
-      <p:sp>
-        <p:nvSpPr>
-          <p:cNvPr id="10" name="Text 8"/>
-          <p:cNvSpPr txBox="1"/>
-          <p:nvPr/>
-        </p:nvSpPr>
-        <p:spPr>
-          <a:xfrm>
-            <a:off x="4626864" y="1938528"/>
-            <a:ext cx="2944368" cy="237744"/>
-          </a:xfrm>
-          <a:prstGeom prst="rect">
-            <a:avLst/>
-          </a:prstGeom>
-          <a:noFill/>
-          <a:ln/>
-        </p:spPr>
-        <p:txBody>
-          <a:bodyPr wrap="square" lIns="0" tIns="0" rIns="0" bIns="0" rtlCol="0" anchor="ctr"/>
-          <a:lstStyle/>
-          <a:p>
-            <a:pPr indent="0" marL="0">
-              <a:buNone/>
-            </a:pPr>
-            <a:r>
-              <a:rPr lang="en-US" sz="900" b="1" spc="200" kern="0" dirty="0">
-                <a:solidFill>
-                  <a:srgbClr val="9C5446"/>
-                </a:solidFill>
-                <a:latin typeface="游ゴシック" pitchFamily="34" charset="0"/>
-                <a:ea typeface="游ゴシック" pitchFamily="34" charset="-122"/>
-                <a:cs typeface="游ゴシック" pitchFamily="34" charset="-120"/>
-              </a:rPr>
-              <a:t>ファンコミュニケーションズ</a:t>
-            </a:r>
-            <a:endParaRPr lang="en-US" sz="900" dirty="0"/>
-          </a:p>
-        </p:txBody>
-      </p:sp>
-      <p:sp>
-        <p:nvSpPr>
-          <p:cNvPr id="11" name="Text 9"/>
-          <p:cNvSpPr txBox="1"/>
-          <p:nvPr/>
-        </p:nvSpPr>
-        <p:spPr>
-          <a:xfrm>
-            <a:off x="4626864" y="2212848"/>
-            <a:ext cx="2944368" cy="457200"/>
-          </a:xfrm>
-          <a:prstGeom prst="rect">
-            <a:avLst/>
-          </a:prstGeom>
-          <a:noFill/>
-          <a:ln/>
-        </p:spPr>
-        <p:txBody>
-          <a:bodyPr wrap="square" lIns="0" tIns="0" rIns="0" bIns="0" rtlCol="0" anchor="t"/>
-          <a:lstStyle/>
-          <a:p>
-            <a:pPr indent="0" marL="0">
-              <a:lnSpc>
-                <a:spcPts val="2100"/>
-              </a:lnSpc>
-              <a:buNone/>
-            </a:pPr>
-            <a:r>
-              <a:rPr lang="en-US" sz="1500" b="1" dirty="0">
-                <a:solidFill>
-                  <a:srgbClr val="2B2620"/>
-                </a:solidFill>
-                <a:latin typeface="游明朝" pitchFamily="34" charset="0"/>
-                <a:ea typeface="游明朝" pitchFamily="34" charset="-122"/>
-                <a:cs typeface="游明朝" pitchFamily="34" charset="-120"/>
-              </a:rPr>
-              <a:t>ThirdTalk（サードトーク）</a:t>
-            </a:r>
-            <a:endParaRPr lang="en-US" sz="1500" dirty="0"/>
-          </a:p>
-        </p:txBody>
-      </p:sp>
-      <p:sp>
-        <p:nvSpPr>
-          <p:cNvPr id="12" name="Text 10"/>
-          <p:cNvSpPr txBox="1"/>
-          <p:nvPr/>
-        </p:nvSpPr>
-        <p:spPr>
-          <a:xfrm>
-            <a:off x="4626864" y="2724912"/>
-            <a:ext cx="2944368" cy="1234440"/>
-          </a:xfrm>
-          <a:prstGeom prst="rect">
-            <a:avLst/>
-          </a:prstGeom>
-          <a:noFill/>
-          <a:ln/>
-        </p:spPr>
-        <p:txBody>
-          <a:bodyPr wrap="square" lIns="0" tIns="0" rIns="0" bIns="0" rtlCol="0" anchor="t"/>
-          <a:lstStyle/>
-          <a:p>
-            <a:pPr indent="0" marL="0">
-              <a:lnSpc>
-                <a:spcPts val="1700"/>
-              </a:lnSpc>
-              <a:buNone/>
-            </a:pPr>
-            <a:r>
-              <a:rPr lang="en-US" sz="1050" dirty="0">
-                <a:solidFill>
-                  <a:srgbClr val="5A5249"/>
-                </a:solidFill>
-                <a:latin typeface="游ゴシック" pitchFamily="34" charset="0"/>
-                <a:ea typeface="游ゴシック" pitchFamily="34" charset="-122"/>
-                <a:cs typeface="游ゴシック" pitchFamily="34" charset="-120"/>
-              </a:rPr>
-              <a:t>「病院やカウンセリングに行く、その一歩手前」を想定したオンライン対話サービス。企画段階からご相談をいただき、立ち上げを見守ってきました。</a:t>
-            </a:r>
-            <a:endParaRPr lang="en-US" sz="1050" dirty="0"/>
-          </a:p>
-        </p:txBody>
-      </p:sp>
-      <p:sp>
-        <p:nvSpPr>
-          <p:cNvPr id="13" name="Shape 11"/>
-          <p:cNvSpPr/>
-          <p:nvPr/>
-        </p:nvSpPr>
-        <p:spPr>
-          <a:xfrm>
-            <a:off x="8055864" y="1737360"/>
-            <a:ext cx="3456432" cy="2423160"/>
-          </a:xfrm>
-          <a:prstGeom prst="roundRect">
-            <a:avLst>
-              <a:gd name="adj" fmla="val 1887"/>
-            </a:avLst>
-          </a:prstGeom>
-          <a:solidFill>
-            <a:srgbClr val="FBF6EC"/>
-          </a:solidFill>
-          <a:ln w="9525">
-            <a:solidFill>
-              <a:srgbClr val="D2C4AE"/>
-            </a:solidFill>
-            <a:prstDash val="solid"/>
-          </a:ln>
-        </p:spPr>
-      </p:sp>
-      <p:sp>
-        <p:nvSpPr>
-          <p:cNvPr id="14" name="Text 12"/>
-          <p:cNvSpPr txBox="1"/>
-          <p:nvPr/>
-        </p:nvSpPr>
-        <p:spPr>
-          <a:xfrm>
-            <a:off x="8311896" y="1938528"/>
-            <a:ext cx="2944368" cy="237744"/>
-          </a:xfrm>
-          <a:prstGeom prst="rect">
-            <a:avLst/>
-          </a:prstGeom>
-          <a:noFill/>
-          <a:ln/>
-        </p:spPr>
-        <p:txBody>
-          <a:bodyPr wrap="square" lIns="0" tIns="0" rIns="0" bIns="0" rtlCol="0" anchor="ctr"/>
-          <a:lstStyle/>
-          <a:p>
-            <a:pPr indent="0" marL="0">
-              <a:buNone/>
-            </a:pPr>
-            <a:r>
-              <a:rPr lang="en-US" sz="900" b="1" spc="200" kern="0" dirty="0">
-                <a:solidFill>
-                  <a:srgbClr val="9C5446"/>
-                </a:solidFill>
-                <a:latin typeface="游ゴシック" pitchFamily="34" charset="0"/>
-                <a:ea typeface="游ゴシック" pitchFamily="34" charset="-122"/>
-                <a:cs typeface="游ゴシック" pitchFamily="34" charset="-120"/>
-              </a:rPr>
-              <a:t>stand up</a:t>
-            </a:r>
-            <a:endParaRPr lang="en-US" sz="900" dirty="0"/>
-          </a:p>
-        </p:txBody>
-      </p:sp>
-      <p:sp>
-        <p:nvSpPr>
-          <p:cNvPr id="15" name="Text 13"/>
-          <p:cNvSpPr txBox="1"/>
-          <p:nvPr/>
-        </p:nvSpPr>
-        <p:spPr>
-          <a:xfrm>
-            <a:off x="8311896" y="2212848"/>
-            <a:ext cx="2944368" cy="457200"/>
-          </a:xfrm>
-          <a:prstGeom prst="rect">
-            <a:avLst/>
-          </a:prstGeom>
-          <a:noFill/>
-          <a:ln/>
-        </p:spPr>
-        <p:txBody>
-          <a:bodyPr wrap="square" lIns="0" tIns="0" rIns="0" bIns="0" rtlCol="0" anchor="t"/>
-          <a:lstStyle/>
-          <a:p>
-            <a:pPr indent="0" marL="0">
-              <a:lnSpc>
-                <a:spcPts val="2100"/>
-              </a:lnSpc>
-              <a:buNone/>
-            </a:pPr>
-            <a:r>
-              <a:rPr lang="en-US" sz="1500" b="1" dirty="0">
-                <a:solidFill>
-                  <a:srgbClr val="2B2620"/>
-                </a:solidFill>
-                <a:latin typeface="游明朝" pitchFamily="34" charset="0"/>
-                <a:ea typeface="游明朝" pitchFamily="34" charset="-122"/>
-                <a:cs typeface="游明朝" pitchFamily="34" charset="-120"/>
-              </a:rPr>
-              <a:t>アミューズメント事業</a:t>
-            </a:r>
-            <a:endParaRPr lang="en-US" sz="1500" dirty="0"/>
-          </a:p>
-        </p:txBody>
-      </p:sp>
-      <p:sp>
-        <p:nvSpPr>
-          <p:cNvPr id="16" name="Text 14"/>
-          <p:cNvSpPr txBox="1"/>
-          <p:nvPr/>
-        </p:nvSpPr>
-        <p:spPr>
-          <a:xfrm>
-            <a:off x="8311896" y="2724912"/>
-            <a:ext cx="2944368" cy="1234440"/>
-          </a:xfrm>
-          <a:prstGeom prst="rect">
-            <a:avLst/>
-          </a:prstGeom>
-          <a:noFill/>
-          <a:ln/>
-        </p:spPr>
-        <p:txBody>
-          <a:bodyPr wrap="square" lIns="0" tIns="0" rIns="0" bIns="0" rtlCol="0" anchor="t"/>
-          <a:lstStyle/>
-          <a:p>
-            <a:pPr indent="0" marL="0">
-              <a:lnSpc>
-                <a:spcPts val="1700"/>
-              </a:lnSpc>
-              <a:buNone/>
-            </a:pPr>
-            <a:r>
-              <a:rPr lang="en-US" sz="1050" dirty="0">
-                <a:solidFill>
-                  <a:srgbClr val="5A5249"/>
-                </a:solidFill>
-                <a:latin typeface="游ゴシック" pitchFamily="34" charset="0"/>
-                <a:ea typeface="游ゴシック" pitchFamily="34" charset="-122"/>
-                <a:cs typeface="游ゴシック" pitchFamily="34" charset="-120"/>
-              </a:rPr>
-              <a:t>新規事業の立ち上げについてご相談をいただき、現在もお取引が続いています。医療以外の業種でも、人の状態を扱う事業の設計に入ってきました。</a:t>
-            </a:r>
-            <a:endParaRPr lang="en-US" sz="1050" dirty="0"/>
-          </a:p>
-        </p:txBody>
-      </p:sp>
-      <p:sp>
-        <p:nvSpPr>
-          <p:cNvPr id="17" name="Shape 15"/>
-          <p:cNvSpPr/>
-          <p:nvPr/>
-        </p:nvSpPr>
-        <p:spPr>
-          <a:xfrm>
-            <a:off x="685800" y="4370832"/>
-            <a:ext cx="10820095" cy="1371600"/>
-          </a:xfrm>
-          <a:prstGeom prst="roundRect">
-            <a:avLst>
-              <a:gd name="adj" fmla="val 3333"/>
+              <a:gd name="adj" fmla="val 1429"/>
             </a:avLst>
           </a:prstGeom>
           <a:solidFill>
@@ -5546,14 +6256,14 @@
       </p:sp>
       <p:sp>
         <p:nvSpPr>
-          <p:cNvPr id="18" name="Text 16"/>
-          <p:cNvSpPr txBox="1"/>
-          <p:nvPr/>
-        </p:nvSpPr>
-        <p:spPr>
-          <a:xfrm>
-            <a:off x="960120" y="4572000"/>
-            <a:ext cx="10271455" cy="237744"/>
+          <p:cNvPr id="7" name="Text 5"/>
+          <p:cNvSpPr txBox="1"/>
+          <p:nvPr/>
+        </p:nvSpPr>
+        <p:spPr>
+          <a:xfrm>
+            <a:off x="7315200" y="1984248"/>
+            <a:ext cx="3913632" cy="237744"/>
           </a:xfrm>
           <a:prstGeom prst="rect">
             <a:avLst/>
@@ -5577,7 +6287,7 @@
                 <a:ea typeface="游ゴシック" pitchFamily="34" charset="-122"/>
                 <a:cs typeface="游ゴシック" pitchFamily="34" charset="-120"/>
               </a:rPr>
-              <a:t>共通してやってきたこと</a:t>
+              <a:t>ここから私が受け取ったこと</a:t>
             </a:r>
             <a:endParaRPr lang="en-US" sz="900" dirty="0"/>
           </a:p>
@@ -5585,14 +6295,14 @@
       </p:sp>
       <p:sp>
         <p:nvSpPr>
-          <p:cNvPr id="19" name="Text 17"/>
-          <p:cNvSpPr txBox="1"/>
-          <p:nvPr/>
-        </p:nvSpPr>
-        <p:spPr>
-          <a:xfrm>
-            <a:off x="960120" y="4882896"/>
-            <a:ext cx="10271455" cy="640080"/>
+          <p:cNvPr id="8" name="Text 6"/>
+          <p:cNvSpPr txBox="1"/>
+          <p:nvPr/>
+        </p:nvSpPr>
+        <p:spPr>
+          <a:xfrm>
+            <a:off x="7315200" y="2295144"/>
+            <a:ext cx="3913632" cy="2468880"/>
           </a:xfrm>
           <a:prstGeom prst="rect">
             <a:avLst/>
@@ -5619,25 +6329,20 @@
                 <a:ea typeface="游ゴシック" pitchFamily="34" charset="-122"/>
                 <a:cs typeface="游ゴシック" pitchFamily="34" charset="-120"/>
               </a:rPr>
-              <a:t>心の不調を抱えた人が、実際にどこで止まり、どこで動くのか。その一次情報を事業の言葉に翻訳するのが私の役割です。なかでもThirdTalkは、このあとお話しする</a:t>
-            </a:r>
+              <a:t>製品を売って終わりにせず、施術という接点で人と関わり続ける。効果を数字で示し、資格者を自社で育て、定額で通ってもらう。このあとお話しする私の事業も、同じ構造です。</a:t>
+            </a:r>
+            <a:endParaRPr lang="en-US" sz="1100" dirty="0"/>
+          </a:p>
+          <a:p>
             <a:pPr indent="0" marL="0">
               <a:lnSpc>
                 <a:spcPts val="1900"/>
               </a:lnSpc>
               <a:buNone/>
             </a:pPr>
-            <a:r>
-              <a:rPr lang="en-US" sz="1100" b="1" dirty="0">
-                <a:solidFill>
-                  <a:srgbClr val="2B2620"/>
-                </a:solidFill>
-                <a:latin typeface="游ゴシック" pitchFamily="34" charset="0"/>
-                <a:ea typeface="游ゴシック" pitchFamily="34" charset="-122"/>
-                <a:cs typeface="游ゴシック" pitchFamily="34" charset="-120"/>
-              </a:rPr>
-              <a:t>「病院の一歩手前」という発想を、そのまま事業にしたもの</a:t>
-            </a:r>
+            <a:endParaRPr lang="en-US" sz="1100" dirty="0"/>
+          </a:p>
+          <a:p>
             <a:pPr indent="0" marL="0">
               <a:lnSpc>
                 <a:spcPts val="1900"/>
@@ -5653,21 +6358,41 @@
                 <a:ea typeface="游ゴシック" pitchFamily="34" charset="-122"/>
                 <a:cs typeface="游ゴシック" pitchFamily="34" charset="-120"/>
               </a:rPr>
-              <a:t>でした。</a:t>
+              <a:t>違いは入口です。</a:t>
             </a:r>
             <a:endParaRPr lang="en-US" sz="1100" dirty="0"/>
           </a:p>
-        </p:txBody>
-      </p:sp>
-      <p:sp>
-        <p:nvSpPr>
-          <p:cNvPr id="20" name="Text 18"/>
-          <p:cNvSpPr txBox="1"/>
-          <p:nvPr/>
-        </p:nvSpPr>
-        <p:spPr>
-          <a:xfrm>
-            <a:off x="685800" y="5870448"/>
+          <a:p>
+            <a:pPr indent="0" marL="0">
+              <a:lnSpc>
+                <a:spcPts val="1900"/>
+              </a:lnSpc>
+              <a:buNone/>
+            </a:pPr>
+            <a:r>
+              <a:rPr lang="en-US" sz="1100" b="1" dirty="0">
+                <a:solidFill>
+                  <a:srgbClr val="2B2620"/>
+                </a:solidFill>
+                <a:latin typeface="游ゴシック" pitchFamily="34" charset="0"/>
+                <a:ea typeface="游ゴシック" pitchFamily="34" charset="-122"/>
+                <a:cs typeface="游ゴシック" pitchFamily="34" charset="-120"/>
+              </a:rPr>
+              <a:t>あの会社は「睡眠」から入った。私は「こころ」から入ります。</a:t>
+            </a:r>
+            <a:endParaRPr lang="en-US" sz="1100" dirty="0"/>
+          </a:p>
+        </p:txBody>
+      </p:sp>
+      <p:sp>
+        <p:nvSpPr>
+          <p:cNvPr id="9" name="Text 7"/>
+          <p:cNvSpPr txBox="1"/>
+          <p:nvPr/>
+        </p:nvSpPr>
+        <p:spPr>
+          <a:xfrm>
+            <a:off x="685800" y="5852160"/>
             <a:ext cx="10820095" cy="329184"/>
           </a:xfrm>
           <a:prstGeom prst="rect">
@@ -5695,7 +6420,7 @@
                 <a:ea typeface="游ゴシック" pitchFamily="34" charset="-122"/>
                 <a:cs typeface="游ゴシック" pitchFamily="34" charset="-120"/>
               </a:rPr>
-              <a:t>出典：株式会社ファンコミュニケーションズ ニュースリリース（2022.8.26）／株式会社パパゲーノ プレスリリース</a:t>
+              <a:t>出典：株式会社丸井グループ プレスリリース（2024.11.15）／株式会社ブレインスリープ プレスリリース／ブレインスリープ コンディショニングスタジオ 公式サイト</a:t>
             </a:r>
             <a:endParaRPr lang="en-US" sz="750" dirty="0"/>
           </a:p>
@@ -5703,7 +6428,7 @@
       </p:sp>
       <p:sp>
         <p:nvSpPr>
-          <p:cNvPr id="21" name="Text 19"/>
+          <p:cNvPr id="10" name="Text 8"/>
           <p:cNvSpPr txBox="1"/>
           <p:nvPr/>
         </p:nvSpPr>
@@ -5742,7 +6467,7 @@
       </p:sp>
       <p:sp>
         <p:nvSpPr>
-          <p:cNvPr id="22" name="Text 20"/>
+          <p:cNvPr id="11" name="Text 9"/>
           <p:cNvSpPr txBox="1"/>
           <p:nvPr/>
         </p:nvSpPr>
@@ -5773,811 +6498,7 @@
                 <a:ea typeface="游ゴシック" pitchFamily="34" charset="-122"/>
                 <a:cs typeface="游ゴシック" pitchFamily="34" charset="-120"/>
               </a:rPr>
-              <a:t>1:30 → 2:10</a:t>
-            </a:r>
-            <a:endParaRPr lang="en-US" sz="900" dirty="0"/>
-          </a:p>
-        </p:txBody>
-      </p:sp>
-    </p:spTree>
-  </p:cSld>
-  <p:clrMapOvr>
-    <a:masterClrMapping/>
-  </p:clrMapOvr>
-</p:sld>
-</file>
-
-<file path=ppt/slides/slide5.xml><?xml version="1.0" encoding="utf-8"?>
-<p:sld xmlns:a="http://schemas.openxmlformats.org/drawingml/2006/main" xmlns:r="http://schemas.openxmlformats.org/officeDocument/2006/relationships" xmlns:p="http://schemas.openxmlformats.org/presentationml/2006/main">
-  <p:cSld name="Slide 5">
-    <p:bg>
-      <p:bgPr>
-        <a:solidFill>
-          <a:srgbClr val="2B2620"/>
-        </a:solidFill>
-      </p:bgPr>
-    </p:bg>
-    <p:spTree>
-      <p:nvGrpSpPr>
-        <p:cNvPr id="1" name=""/>
-        <p:cNvGrpSpPr/>
-        <p:nvPr/>
-      </p:nvGrpSpPr>
-      <p:grpSpPr>
-        <a:xfrm>
-          <a:off x="0" y="0"/>
-          <a:ext cx="0" cy="0"/>
-          <a:chOff x="0" y="0"/>
-          <a:chExt cx="0" cy="0"/>
-        </a:xfrm>
-      </p:grpSpPr>
-      <p:sp>
-        <p:nvSpPr>
-          <p:cNvPr id="2" name="Shape 0"/>
-          <p:cNvSpPr/>
-          <p:nvPr/>
-        </p:nvSpPr>
-        <p:spPr>
-          <a:xfrm>
-            <a:off x="685800" y="562356"/>
-            <a:ext cx="237744" cy="12802"/>
-          </a:xfrm>
-          <a:prstGeom prst="rect">
-            <a:avLst/>
-          </a:prstGeom>
-          <a:solidFill>
-            <a:srgbClr val="C97B68"/>
-          </a:solidFill>
-          <a:ln/>
-        </p:spPr>
-      </p:sp>
-      <p:sp>
-        <p:nvSpPr>
-          <p:cNvPr id="3" name="Text 1"/>
-          <p:cNvSpPr txBox="1"/>
-          <p:nvPr/>
-        </p:nvSpPr>
-        <p:spPr>
-          <a:xfrm>
-            <a:off x="996696" y="402336"/>
-            <a:ext cx="7315200" cy="310896"/>
-          </a:xfrm>
-          <a:prstGeom prst="rect">
-            <a:avLst/>
-          </a:prstGeom>
-          <a:noFill/>
-          <a:ln/>
-        </p:spPr>
-        <p:txBody>
-          <a:bodyPr wrap="square" lIns="0" tIns="0" rIns="0" bIns="0" rtlCol="0" anchor="ctr"/>
-          <a:lstStyle/>
-          <a:p>
-            <a:pPr indent="0" marL="0">
-              <a:buNone/>
-            </a:pPr>
-            <a:r>
-              <a:rPr lang="en-US" sz="1000" b="1" spc="200" kern="0" dirty="0">
-                <a:solidFill>
-                  <a:srgbClr val="C97B68"/>
-                </a:solidFill>
-                <a:latin typeface="游明朝" pitchFamily="34" charset="0"/>
-                <a:ea typeface="游明朝" pitchFamily="34" charset="-122"/>
-                <a:cs typeface="游明朝" pitchFamily="34" charset="-120"/>
-              </a:rPr>
-              <a:t>04   </a:t>
-            </a:r>
-            <a:pPr indent="0" marL="0">
-              <a:buNone/>
-            </a:pPr>
-            <a:r>
-              <a:rPr lang="en-US" sz="1000" spc="300" kern="0" dirty="0">
-                <a:solidFill>
-                  <a:srgbClr val="BDB2A2"/>
-                </a:solidFill>
-                <a:latin typeface="游ゴシック" pitchFamily="34" charset="0"/>
-                <a:ea typeface="游ゴシック" pitchFamily="34" charset="-122"/>
-                <a:cs typeface="游ゴシック" pitchFamily="34" charset="-120"/>
-              </a:rPr>
-              <a:t>ISSUE</a:t>
-            </a:r>
-            <a:endParaRPr lang="en-US" sz="1000" dirty="0"/>
-          </a:p>
-        </p:txBody>
-      </p:sp>
-      <p:sp>
-        <p:nvSpPr>
-          <p:cNvPr id="4" name="Text 2"/>
-          <p:cNvSpPr txBox="1"/>
-          <p:nvPr/>
-        </p:nvSpPr>
-        <p:spPr>
-          <a:xfrm>
-            <a:off x="685800" y="841248"/>
-            <a:ext cx="10820095" cy="777240"/>
-          </a:xfrm>
-          <a:prstGeom prst="rect">
-            <a:avLst/>
-          </a:prstGeom>
-          <a:noFill/>
-          <a:ln/>
-        </p:spPr>
-        <p:txBody>
-          <a:bodyPr wrap="square" lIns="0" tIns="0" rIns="0" bIns="0" rtlCol="0" anchor="ctr"/>
-          <a:lstStyle/>
-          <a:p>
-            <a:pPr indent="0" marL="0">
-              <a:buNone/>
-            </a:pPr>
-            <a:r>
-              <a:rPr lang="en-US" sz="2800" b="1" spc="100" kern="0" dirty="0">
-                <a:solidFill>
-                  <a:srgbClr val="F3ECE0"/>
-                </a:solidFill>
-                <a:latin typeface="游明朝" pitchFamily="34" charset="0"/>
-                <a:ea typeface="游明朝" pitchFamily="34" charset="-122"/>
-                <a:cs typeface="游明朝" pitchFamily="34" charset="-120"/>
-              </a:rPr>
-              <a:t>これは私の実感であり、社会の数字でもあります</a:t>
-            </a:r>
-            <a:endParaRPr lang="en-US" sz="2800" dirty="0"/>
-          </a:p>
-        </p:txBody>
-      </p:sp>
-      <p:sp>
-        <p:nvSpPr>
-          <p:cNvPr id="5" name="Text 3"/>
-          <p:cNvSpPr txBox="1"/>
-          <p:nvPr/>
-        </p:nvSpPr>
-        <p:spPr>
-          <a:xfrm>
-            <a:off x="685800" y="1627632"/>
-            <a:ext cx="5029200" cy="256032"/>
-          </a:xfrm>
-          <a:prstGeom prst="rect">
-            <a:avLst/>
-          </a:prstGeom>
-          <a:noFill/>
-          <a:ln/>
-        </p:spPr>
-        <p:txBody>
-          <a:bodyPr wrap="square" lIns="0" tIns="0" rIns="0" bIns="0" rtlCol="0" anchor="ctr"/>
-          <a:lstStyle/>
-          <a:p>
-            <a:pPr indent="0" marL="0">
-              <a:buNone/>
-            </a:pPr>
-            <a:r>
-              <a:rPr lang="en-US" sz="950" b="1" spc="300" kern="0" dirty="0">
-                <a:solidFill>
-                  <a:srgbClr val="C97B68"/>
-                </a:solidFill>
-                <a:latin typeface="游ゴシック" pitchFamily="34" charset="0"/>
-                <a:ea typeface="游ゴシック" pitchFamily="34" charset="-122"/>
-                <a:cs typeface="游ゴシック" pitchFamily="34" charset="-120"/>
-              </a:rPr>
-              <a:t>社会で起きていること</a:t>
-            </a:r>
-            <a:endParaRPr lang="en-US" sz="950" dirty="0"/>
-          </a:p>
-        </p:txBody>
-      </p:sp>
-      <p:sp>
-        <p:nvSpPr>
-          <p:cNvPr id="6" name="Text 4"/>
-          <p:cNvSpPr txBox="1"/>
-          <p:nvPr/>
-        </p:nvSpPr>
-        <p:spPr>
-          <a:xfrm>
-            <a:off x="6309360" y="1627632"/>
-            <a:ext cx="5193792" cy="256032"/>
-          </a:xfrm>
-          <a:prstGeom prst="rect">
-            <a:avLst/>
-          </a:prstGeom>
-          <a:noFill/>
-          <a:ln/>
-        </p:spPr>
-        <p:txBody>
-          <a:bodyPr wrap="square" lIns="0" tIns="0" rIns="0" bIns="0" rtlCol="0" anchor="ctr"/>
-          <a:lstStyle/>
-          <a:p>
-            <a:pPr indent="0" marL="0">
-              <a:buNone/>
-            </a:pPr>
-            <a:r>
-              <a:rPr lang="en-US" sz="950" b="1" spc="300" kern="0" dirty="0">
-                <a:solidFill>
-                  <a:srgbClr val="93AC93"/>
-                </a:solidFill>
-                <a:latin typeface="游ゴシック" pitchFamily="34" charset="0"/>
-                <a:ea typeface="游ゴシック" pitchFamily="34" charset="-122"/>
-                <a:cs typeface="游ゴシック" pitchFamily="34" charset="-120"/>
-              </a:rPr>
-              <a:t>私が現場で見ていること</a:t>
-            </a:r>
-            <a:endParaRPr lang="en-US" sz="950" dirty="0"/>
-          </a:p>
-        </p:txBody>
-      </p:sp>
-      <p:sp>
-        <p:nvSpPr>
-          <p:cNvPr id="7" name="Shape 5"/>
-          <p:cNvSpPr/>
-          <p:nvPr/>
-        </p:nvSpPr>
-        <p:spPr>
-          <a:xfrm>
-            <a:off x="685800" y="1847088"/>
-            <a:ext cx="5029200" cy="7315"/>
-          </a:xfrm>
-          <a:prstGeom prst="rect">
-            <a:avLst/>
-          </a:prstGeom>
-          <a:solidFill>
-            <a:srgbClr val="4A423A"/>
-          </a:solidFill>
-          <a:ln/>
-        </p:spPr>
-      </p:sp>
-      <p:sp>
-        <p:nvSpPr>
-          <p:cNvPr id="8" name="Shape 6"/>
-          <p:cNvSpPr/>
-          <p:nvPr/>
-        </p:nvSpPr>
-        <p:spPr>
-          <a:xfrm>
-            <a:off x="6309360" y="1847088"/>
-            <a:ext cx="5193792" cy="7315"/>
-          </a:xfrm>
-          <a:prstGeom prst="rect">
-            <a:avLst/>
-          </a:prstGeom>
-          <a:solidFill>
-            <a:srgbClr val="4A423A"/>
-          </a:solidFill>
-          <a:ln/>
-        </p:spPr>
-      </p:sp>
-      <p:sp>
-        <p:nvSpPr>
-          <p:cNvPr id="9" name="Text 7"/>
-          <p:cNvSpPr txBox="1"/>
-          <p:nvPr/>
-        </p:nvSpPr>
-        <p:spPr>
-          <a:xfrm>
-            <a:off x="685800" y="1956816"/>
-            <a:ext cx="5029200" cy="822960"/>
-          </a:xfrm>
-          <a:prstGeom prst="rect">
-            <a:avLst/>
-          </a:prstGeom>
-          <a:noFill/>
-          <a:ln/>
-        </p:spPr>
-        <p:txBody>
-          <a:bodyPr wrap="square" lIns="0" tIns="0" rIns="0" bIns="0" rtlCol="0" anchor="t"/>
-          <a:lstStyle/>
-          <a:p>
-            <a:pPr indent="0" marL="0">
-              <a:lnSpc>
-                <a:spcPts val="1800"/>
-              </a:lnSpc>
-              <a:buNone/>
-            </a:pPr>
-            <a:r>
-              <a:rPr lang="en-US" sz="1500" b="1" dirty="0">
-                <a:solidFill>
-                  <a:srgbClr val="C97B68"/>
-                </a:solidFill>
-                <a:latin typeface="游明朝" pitchFamily="34" charset="0"/>
-                <a:ea typeface="游明朝" pitchFamily="34" charset="-122"/>
-                <a:cs typeface="游明朝" pitchFamily="34" charset="-120"/>
-              </a:rPr>
-              <a:t>約600万人　</a:t>
-            </a:r>
-            <a:pPr indent="0" marL="0">
-              <a:lnSpc>
-                <a:spcPts val="1800"/>
-              </a:lnSpc>
-              <a:buNone/>
-            </a:pPr>
-            <a:r>
-              <a:rPr lang="en-US" sz="1050" dirty="0">
-                <a:solidFill>
-                  <a:srgbClr val="F3ECE0"/>
-                </a:solidFill>
-                <a:latin typeface="游ゴシック" pitchFamily="34" charset="0"/>
-                <a:ea typeface="游ゴシック" pitchFamily="34" charset="-122"/>
-                <a:cs typeface="游ゴシック" pitchFamily="34" charset="-120"/>
-              </a:rPr>
-              <a:t>精神疾患を持つ患者数。国は2024年、厚生労働白書で初めて「こころの健康」をテーマに据えました。</a:t>
-            </a:r>
-            <a:endParaRPr lang="en-US" sz="1050" dirty="0"/>
-          </a:p>
-        </p:txBody>
-      </p:sp>
-      <p:sp>
-        <p:nvSpPr>
-          <p:cNvPr id="10" name="Text 8"/>
-          <p:cNvSpPr txBox="1"/>
-          <p:nvPr/>
-        </p:nvSpPr>
-        <p:spPr>
-          <a:xfrm>
-            <a:off x="6309360" y="1956816"/>
-            <a:ext cx="5193792" cy="822960"/>
-          </a:xfrm>
-          <a:prstGeom prst="rect">
-            <a:avLst/>
-          </a:prstGeom>
-          <a:noFill/>
-          <a:ln/>
-        </p:spPr>
-        <p:txBody>
-          <a:bodyPr wrap="square" lIns="0" tIns="0" rIns="0" bIns="0" rtlCol="0" anchor="t"/>
-          <a:lstStyle/>
-          <a:p>
-            <a:pPr indent="0" marL="0">
-              <a:lnSpc>
-                <a:spcPts val="1800"/>
-              </a:lnSpc>
-              <a:buNone/>
-            </a:pPr>
-            <a:r>
-              <a:rPr lang="en-US" sz="1050" dirty="0">
-                <a:solidFill>
-                  <a:srgbClr val="BDB2A2"/>
-                </a:solidFill>
-                <a:latin typeface="游ゴシック" pitchFamily="34" charset="0"/>
-                <a:ea typeface="游ゴシック" pitchFamily="34" charset="-122"/>
-                <a:cs typeface="游ゴシック" pitchFamily="34" charset="-120"/>
-              </a:rPr>
-              <a:t>のべ20,000人を診てきて、心の不調を主訴に来られる方が明らかに増えました。</a:t>
-            </a:r>
-            <a:endParaRPr lang="en-US" sz="1050" dirty="0"/>
-          </a:p>
-        </p:txBody>
-      </p:sp>
-      <p:sp>
-        <p:nvSpPr>
-          <p:cNvPr id="11" name="Shape 9"/>
-          <p:cNvSpPr/>
-          <p:nvPr/>
-        </p:nvSpPr>
-        <p:spPr>
-          <a:xfrm>
-            <a:off x="685800" y="2816352"/>
-            <a:ext cx="5029200" cy="7315"/>
-          </a:xfrm>
-          <a:prstGeom prst="rect">
-            <a:avLst/>
-          </a:prstGeom>
-          <a:solidFill>
-            <a:srgbClr val="4A423A"/>
-          </a:solidFill>
-          <a:ln/>
-        </p:spPr>
-      </p:sp>
-      <p:sp>
-        <p:nvSpPr>
-          <p:cNvPr id="12" name="Shape 10"/>
-          <p:cNvSpPr/>
-          <p:nvPr/>
-        </p:nvSpPr>
-        <p:spPr>
-          <a:xfrm>
-            <a:off x="6309360" y="2816352"/>
-            <a:ext cx="5193792" cy="7315"/>
-          </a:xfrm>
-          <a:prstGeom prst="rect">
-            <a:avLst/>
-          </a:prstGeom>
-          <a:solidFill>
-            <a:srgbClr val="4A423A"/>
-          </a:solidFill>
-          <a:ln/>
-        </p:spPr>
-      </p:sp>
-      <p:sp>
-        <p:nvSpPr>
-          <p:cNvPr id="13" name="Text 11"/>
-          <p:cNvSpPr txBox="1"/>
-          <p:nvPr/>
-        </p:nvSpPr>
-        <p:spPr>
-          <a:xfrm>
-            <a:off x="685800" y="2926080"/>
-            <a:ext cx="5029200" cy="822960"/>
-          </a:xfrm>
-          <a:prstGeom prst="rect">
-            <a:avLst/>
-          </a:prstGeom>
-          <a:noFill/>
-          <a:ln/>
-        </p:spPr>
-        <p:txBody>
-          <a:bodyPr wrap="square" lIns="0" tIns="0" rIns="0" bIns="0" rtlCol="0" anchor="t"/>
-          <a:lstStyle/>
-          <a:p>
-            <a:pPr indent="0" marL="0">
-              <a:lnSpc>
-                <a:spcPts val="1800"/>
-              </a:lnSpc>
-              <a:buNone/>
-            </a:pPr>
-            <a:r>
-              <a:rPr lang="en-US" sz="1500" b="1" dirty="0">
-                <a:solidFill>
-                  <a:srgbClr val="C97B68"/>
-                </a:solidFill>
-                <a:latin typeface="游明朝" pitchFamily="34" charset="0"/>
-                <a:ea typeface="游明朝" pitchFamily="34" charset="-122"/>
-                <a:cs typeface="游明朝" pitchFamily="34" charset="-120"/>
-              </a:rPr>
-              <a:t>2028年4月　</a:t>
-            </a:r>
-            <a:pPr indent="0" marL="0">
-              <a:lnSpc>
-                <a:spcPts val="1800"/>
-              </a:lnSpc>
-              <a:buNone/>
-            </a:pPr>
-            <a:r>
-              <a:rPr lang="en-US" sz="1050" dirty="0">
-                <a:solidFill>
-                  <a:srgbClr val="F3ECE0"/>
-                </a:solidFill>
-                <a:latin typeface="游ゴシック" pitchFamily="34" charset="0"/>
-                <a:ea typeface="游ゴシック" pitchFamily="34" charset="-122"/>
-                <a:cs typeface="游ゴシック" pitchFamily="34" charset="-120"/>
-              </a:rPr>
-              <a:t>50人未満の事業場にもストレスチェックが義務化。現在の実施率は6割弱です。</a:t>
-            </a:r>
-            <a:endParaRPr lang="en-US" sz="1050" dirty="0"/>
-          </a:p>
-        </p:txBody>
-      </p:sp>
-      <p:sp>
-        <p:nvSpPr>
-          <p:cNvPr id="14" name="Text 12"/>
-          <p:cNvSpPr txBox="1"/>
-          <p:nvPr/>
-        </p:nvSpPr>
-        <p:spPr>
-          <a:xfrm>
-            <a:off x="6309360" y="2926080"/>
-            <a:ext cx="5193792" cy="822960"/>
-          </a:xfrm>
-          <a:prstGeom prst="rect">
-            <a:avLst/>
-          </a:prstGeom>
-          <a:noFill/>
-          <a:ln/>
-        </p:spPr>
-        <p:txBody>
-          <a:bodyPr wrap="square" lIns="0" tIns="0" rIns="0" bIns="0" rtlCol="0" anchor="t"/>
-          <a:lstStyle/>
-          <a:p>
-            <a:pPr indent="0" marL="0">
-              <a:lnSpc>
-                <a:spcPts val="1800"/>
-              </a:lnSpc>
-              <a:buNone/>
-            </a:pPr>
-            <a:r>
-              <a:rPr lang="en-US" sz="1050" dirty="0">
-                <a:solidFill>
-                  <a:srgbClr val="BDB2A2"/>
-                </a:solidFill>
-                <a:latin typeface="游ゴシック" pitchFamily="34" charset="0"/>
-                <a:ea typeface="游ゴシック" pitchFamily="34" charset="-122"/>
-                <a:cs typeface="游ゴシック" pitchFamily="34" charset="-120"/>
-              </a:rPr>
-              <a:t>気づいても、次に行く場所がない。精神科は予約が埋まり、新規の受付を止める医療機関が出ています。</a:t>
-            </a:r>
-            <a:endParaRPr lang="en-US" sz="1050" dirty="0"/>
-          </a:p>
-        </p:txBody>
-      </p:sp>
-      <p:sp>
-        <p:nvSpPr>
-          <p:cNvPr id="15" name="Shape 13"/>
-          <p:cNvSpPr/>
-          <p:nvPr/>
-        </p:nvSpPr>
-        <p:spPr>
-          <a:xfrm>
-            <a:off x="685800" y="3785616"/>
-            <a:ext cx="5029200" cy="7315"/>
-          </a:xfrm>
-          <a:prstGeom prst="rect">
-            <a:avLst/>
-          </a:prstGeom>
-          <a:solidFill>
-            <a:srgbClr val="4A423A"/>
-          </a:solidFill>
-          <a:ln/>
-        </p:spPr>
-      </p:sp>
-      <p:sp>
-        <p:nvSpPr>
-          <p:cNvPr id="16" name="Shape 14"/>
-          <p:cNvSpPr/>
-          <p:nvPr/>
-        </p:nvSpPr>
-        <p:spPr>
-          <a:xfrm>
-            <a:off x="6309360" y="3785616"/>
-            <a:ext cx="5193792" cy="7315"/>
-          </a:xfrm>
-          <a:prstGeom prst="rect">
-            <a:avLst/>
-          </a:prstGeom>
-          <a:solidFill>
-            <a:srgbClr val="4A423A"/>
-          </a:solidFill>
-          <a:ln/>
-        </p:spPr>
-      </p:sp>
-      <p:sp>
-        <p:nvSpPr>
-          <p:cNvPr id="17" name="Text 15"/>
-          <p:cNvSpPr txBox="1"/>
-          <p:nvPr/>
-        </p:nvSpPr>
-        <p:spPr>
-          <a:xfrm>
-            <a:off x="685800" y="3895344"/>
-            <a:ext cx="5029200" cy="822960"/>
-          </a:xfrm>
-          <a:prstGeom prst="rect">
-            <a:avLst/>
-          </a:prstGeom>
-          <a:noFill/>
-          <a:ln/>
-        </p:spPr>
-        <p:txBody>
-          <a:bodyPr wrap="square" lIns="0" tIns="0" rIns="0" bIns="0" rtlCol="0" anchor="t"/>
-          <a:lstStyle/>
-          <a:p>
-            <a:pPr indent="0" marL="0">
-              <a:lnSpc>
-                <a:spcPts val="1800"/>
-              </a:lnSpc>
-              <a:buNone/>
-            </a:pPr>
-            <a:r>
-              <a:rPr lang="en-US" sz="1500" b="1" dirty="0">
-                <a:solidFill>
-                  <a:srgbClr val="C97B68"/>
-                </a:solidFill>
-                <a:latin typeface="游明朝" pitchFamily="34" charset="0"/>
-                <a:ea typeface="游明朝" pitchFamily="34" charset="-122"/>
-                <a:cs typeface="游明朝" pitchFamily="34" charset="-120"/>
-              </a:rPr>
-              <a:t>年7.6兆円　</a:t>
-            </a:r>
-            <a:pPr indent="0" marL="0">
-              <a:lnSpc>
-                <a:spcPts val="1800"/>
-              </a:lnSpc>
-              <a:buNone/>
-            </a:pPr>
-            <a:r>
-              <a:rPr lang="en-US" sz="1050" dirty="0">
-                <a:solidFill>
-                  <a:srgbClr val="F3ECE0"/>
-                </a:solidFill>
-                <a:latin typeface="游ゴシック" pitchFamily="34" charset="0"/>
-                <a:ea typeface="游ゴシック" pitchFamily="34" charset="-122"/>
-                <a:cs typeface="游ゴシック" pitchFamily="34" charset="-120"/>
-              </a:rPr>
-              <a:t>メンタル不調による経済損失。うち7.3兆円は「出勤しているのに力が出ない」分です。</a:t>
-            </a:r>
-            <a:endParaRPr lang="en-US" sz="1050" dirty="0"/>
-          </a:p>
-        </p:txBody>
-      </p:sp>
-      <p:sp>
-        <p:nvSpPr>
-          <p:cNvPr id="18" name="Text 16"/>
-          <p:cNvSpPr txBox="1"/>
-          <p:nvPr/>
-        </p:nvSpPr>
-        <p:spPr>
-          <a:xfrm>
-            <a:off x="6309360" y="3895344"/>
-            <a:ext cx="5193792" cy="822960"/>
-          </a:xfrm>
-          <a:prstGeom prst="rect">
-            <a:avLst/>
-          </a:prstGeom>
-          <a:noFill/>
-          <a:ln/>
-        </p:spPr>
-        <p:txBody>
-          <a:bodyPr wrap="square" lIns="0" tIns="0" rIns="0" bIns="0" rtlCol="0" anchor="t"/>
-          <a:lstStyle/>
-          <a:p>
-            <a:pPr indent="0" marL="0">
-              <a:lnSpc>
-                <a:spcPts val="1800"/>
-              </a:lnSpc>
-              <a:buNone/>
-            </a:pPr>
-            <a:r>
-              <a:rPr lang="en-US" sz="1050" dirty="0">
-                <a:solidFill>
-                  <a:srgbClr val="BDB2A2"/>
-                </a:solidFill>
-                <a:latin typeface="游ゴシック" pitchFamily="34" charset="0"/>
-                <a:ea typeface="游ゴシック" pitchFamily="34" charset="-122"/>
-                <a:cs typeface="游ゴシック" pitchFamily="34" charset="-120"/>
-              </a:rPr>
-              <a:t>休職や通院の手前で止まっている方が、いちばん多い。この層は、いま誰の担当でもありません。</a:t>
-            </a:r>
-            <a:endParaRPr lang="en-US" sz="1050" dirty="0"/>
-          </a:p>
-        </p:txBody>
-      </p:sp>
-      <p:sp>
-        <p:nvSpPr>
-          <p:cNvPr id="19" name="Text 17"/>
-          <p:cNvSpPr txBox="1"/>
-          <p:nvPr/>
-        </p:nvSpPr>
-        <p:spPr>
-          <a:xfrm>
-            <a:off x="685800" y="5120640"/>
-            <a:ext cx="10820095" cy="548640"/>
-          </a:xfrm>
-          <a:prstGeom prst="rect">
-            <a:avLst/>
-          </a:prstGeom>
-          <a:noFill/>
-          <a:ln/>
-        </p:spPr>
-        <p:txBody>
-          <a:bodyPr wrap="square" lIns="0" tIns="0" rIns="0" bIns="0" rtlCol="0" anchor="ctr"/>
-          <a:lstStyle/>
-          <a:p>
-            <a:pPr indent="0" marL="0">
-              <a:buNone/>
-            </a:pPr>
-            <a:r>
-              <a:rPr lang="en-US" sz="2300" b="1" dirty="0">
-                <a:solidFill>
-                  <a:srgbClr val="C97B68"/>
-                </a:solidFill>
-                <a:latin typeface="游明朝" pitchFamily="34" charset="0"/>
-                <a:ea typeface="游明朝" pitchFamily="34" charset="-122"/>
-                <a:cs typeface="游明朝" pitchFamily="34" charset="-120"/>
-              </a:rPr>
-              <a:t>だから、未病の段階で止めておきたい。</a:t>
-            </a:r>
-            <a:endParaRPr lang="en-US" sz="2300" dirty="0"/>
-          </a:p>
-        </p:txBody>
-      </p:sp>
-      <p:sp>
-        <p:nvSpPr>
-          <p:cNvPr id="20" name="Text 18"/>
-          <p:cNvSpPr txBox="1"/>
-          <p:nvPr/>
-        </p:nvSpPr>
-        <p:spPr>
-          <a:xfrm>
-            <a:off x="685800" y="5897880"/>
-            <a:ext cx="10820095" cy="329184"/>
-          </a:xfrm>
-          <a:prstGeom prst="rect">
-            <a:avLst/>
-          </a:prstGeom>
-          <a:noFill/>
-          <a:ln/>
-        </p:spPr>
-        <p:txBody>
-          <a:bodyPr wrap="square" lIns="0" tIns="0" rIns="0" bIns="0" rtlCol="0" anchor="t"/>
-          <a:lstStyle/>
-          <a:p>
-            <a:pPr indent="0" marL="0">
-              <a:lnSpc>
-                <a:spcPts val="1100"/>
-              </a:lnSpc>
-              <a:buNone/>
-            </a:pPr>
-            <a:r>
-              <a:rPr lang="en-US" sz="750" dirty="0">
-                <a:solidFill>
-                  <a:srgbClr val="BDB2A2"/>
-                </a:solidFill>
-                <a:latin typeface="游ゴシック" pitchFamily="34" charset="0"/>
-                <a:ea typeface="游ゴシック" pitchFamily="34" charset="-122"/>
-                <a:cs typeface="游ゴシック" pitchFamily="34" charset="-120"/>
-              </a:rPr>
-              <a:t>出典：厚生労働省 患者調査／令和6年版 厚生労働白書／改正労働安全衛生法（2025年5月公布・2028年4月施行）／メンタルヘルス不調による経済損失の試算（労働者27,507人調査）</a:t>
-            </a:r>
-            <a:endParaRPr lang="en-US" sz="750" dirty="0"/>
-          </a:p>
-        </p:txBody>
-      </p:sp>
-      <p:sp>
-        <p:nvSpPr>
-          <p:cNvPr id="21" name="Text 19"/>
-          <p:cNvSpPr txBox="1"/>
-          <p:nvPr/>
-        </p:nvSpPr>
-        <p:spPr>
-          <a:xfrm>
-            <a:off x="685800" y="6336792"/>
-            <a:ext cx="7315200" cy="274320"/>
-          </a:xfrm>
-          <a:prstGeom prst="rect">
-            <a:avLst/>
-          </a:prstGeom>
-          <a:noFill/>
-          <a:ln/>
-        </p:spPr>
-        <p:txBody>
-          <a:bodyPr wrap="square" lIns="0" tIns="0" rIns="0" bIns="0" rtlCol="0" anchor="ctr"/>
-          <a:lstStyle/>
-          <a:p>
-            <a:pPr indent="0" marL="0">
-              <a:buNone/>
-            </a:pPr>
-            <a:r>
-              <a:rPr lang="en-US" sz="900" spc="100" kern="0" dirty="0">
-                <a:solidFill>
-                  <a:srgbClr val="BDB2A2"/>
-                </a:solidFill>
-                <a:latin typeface="游ゴシック" pitchFamily="34" charset="0"/>
-                <a:ea typeface="游ゴシック" pitchFamily="34" charset="-122"/>
-                <a:cs typeface="游ゴシック" pitchFamily="34" charset="-120"/>
-              </a:rPr>
-              <a:t>米倉まな｜アポプラスステーション様 ご提案</a:t>
-            </a:r>
-            <a:endParaRPr lang="en-US" sz="900" dirty="0"/>
-          </a:p>
-        </p:txBody>
-      </p:sp>
-      <p:sp>
-        <p:nvSpPr>
-          <p:cNvPr id="22" name="Text 20"/>
-          <p:cNvSpPr txBox="1"/>
-          <p:nvPr/>
-        </p:nvSpPr>
-        <p:spPr>
-          <a:xfrm>
-            <a:off x="8305495" y="6336792"/>
-            <a:ext cx="3200400" cy="274320"/>
-          </a:xfrm>
-          <a:prstGeom prst="rect">
-            <a:avLst/>
-          </a:prstGeom>
-          <a:noFill/>
-          <a:ln/>
-        </p:spPr>
-        <p:txBody>
-          <a:bodyPr wrap="square" lIns="0" tIns="0" rIns="0" bIns="0" rtlCol="0" anchor="ctr"/>
-          <a:lstStyle/>
-          <a:p>
-            <a:pPr algn="r" indent="0" marL="0">
-              <a:buNone/>
-            </a:pPr>
-            <a:r>
-              <a:rPr lang="en-US" sz="900" dirty="0">
-                <a:solidFill>
-                  <a:srgbClr val="BDB2A2"/>
-                </a:solidFill>
-                <a:latin typeface="游ゴシック" pitchFamily="34" charset="0"/>
-                <a:ea typeface="游ゴシック" pitchFamily="34" charset="-122"/>
-                <a:cs typeface="游ゴシック" pitchFamily="34" charset="-120"/>
-              </a:rPr>
-              <a:t>2:10 → 3:00</a:t>
+              <a:t>2:20 → 2:55</a:t>
             </a:r>
             <a:endParaRPr lang="en-US" sz="900" dirty="0"/>
           </a:p>
@@ -6805,6 +6726,64 @@
                 <a:ea typeface="游ゴシック" pitchFamily="34" charset="-122"/>
                 <a:cs typeface="游ゴシック" pitchFamily="34" charset="-120"/>
               </a:rPr>
+              <a:t>扱うのは睡眠そのものではなく、</a:t>
+            </a:r>
+            <a:pPr indent="0" marL="0">
+              <a:lnSpc>
+                <a:spcPts val="1900"/>
+              </a:lnSpc>
+              <a:buNone/>
+            </a:pPr>
+            <a:r>
+              <a:rPr lang="en-US" sz="1100" b="1" dirty="0">
+                <a:solidFill>
+                  <a:srgbClr val="2B2620"/>
+                </a:solidFill>
+                <a:latin typeface="游ゴシック" pitchFamily="34" charset="0"/>
+                <a:ea typeface="游ゴシック" pitchFamily="34" charset="-122"/>
+                <a:cs typeface="游ゴシック" pitchFamily="34" charset="-120"/>
+              </a:rPr>
+              <a:t>思考が止まらない状態</a:t>
+            </a:r>
+            <a:pPr indent="0" marL="0">
+              <a:lnSpc>
+                <a:spcPts val="1900"/>
+              </a:lnSpc>
+              <a:spcAft>
+                <a:spcPts val="1000"/>
+              </a:spcAft>
+              <a:buNone/>
+            </a:pPr>
+            <a:r>
+              <a:rPr lang="en-US" sz="1100" dirty="0">
+                <a:solidFill>
+                  <a:srgbClr val="5A5249"/>
+                </a:solidFill>
+                <a:latin typeface="游ゴシック" pitchFamily="34" charset="0"/>
+                <a:ea typeface="游ゴシック" pitchFamily="34" charset="-122"/>
+                <a:cs typeface="游ゴシック" pitchFamily="34" charset="-120"/>
+              </a:rPr>
+              <a:t>です。眠れないの手前にある、頭が休まらない時間に手を入れます。</a:t>
+            </a:r>
+            <a:endParaRPr lang="en-US" sz="1100" dirty="0"/>
+          </a:p>
+          <a:p>
+            <a:pPr marL="342900" indent="-342900">
+              <a:lnSpc>
+                <a:spcPts val="1900"/>
+              </a:lnSpc>
+              <a:buSzPct val="100000"/>
+              <a:buChar char="•"/>
+            </a:pPr>
+            <a:r>
+              <a:rPr lang="en-US" sz="1100" dirty="0">
+                <a:solidFill>
+                  <a:srgbClr val="5A5249"/>
+                </a:solidFill>
+                <a:latin typeface="游ゴシック" pitchFamily="34" charset="0"/>
+                <a:ea typeface="游ゴシック" pitchFamily="34" charset="-122"/>
+                <a:cs typeface="游ゴシック" pitchFamily="34" charset="-120"/>
+              </a:rPr>
               <a:t>施術は</a:t>
             </a:r>
             <a:pPr indent="0" marL="0">
@@ -7139,7 +7118,7 @@
                 <a:ea typeface="游ゴシック" pitchFamily="34" charset="-122"/>
                 <a:cs typeface="游ゴシック" pitchFamily="34" charset="-120"/>
               </a:rPr>
-              <a:t>3:00 → 3:35</a:t>
+              <a:t>2:55 → 3:30</a:t>
             </a:r>
             <a:endParaRPr lang="en-US" sz="900" dirty="0"/>
           </a:p>
@@ -7244,7 +7223,7 @@
                 <a:ea typeface="游ゴシック" pitchFamily="34" charset="-122"/>
                 <a:cs typeface="游ゴシック" pitchFamily="34" charset="-120"/>
               </a:rPr>
-              <a:t>CASE</a:t>
+              <a:t>STRENGTH</a:t>
             </a:r>
             <a:endParaRPr lang="en-US" sz="1000" dirty="0"/>
           </a:p>
@@ -7283,7 +7262,7 @@
                 <a:ea typeface="游明朝" pitchFamily="34" charset="-122"/>
                 <a:cs typeface="游明朝" pitchFamily="34" charset="-120"/>
               </a:rPr>
-              <a:t>「企業 × 鍼灸」は、すでに成立しています</a:t>
+              <a:t>企業の新規事業に、専門家として入ってきました</a:t>
             </a:r>
             <a:endParaRPr lang="en-US" sz="2800" dirty="0"/>
           </a:p>
@@ -7291,374 +7270,468 @@
       </p:sp>
       <p:sp>
         <p:nvSpPr>
-          <p:cNvPr id="5" name="Text 3"/>
-          <p:cNvSpPr txBox="1"/>
-          <p:nvPr/>
-        </p:nvSpPr>
-        <p:spPr>
-          <a:xfrm>
-            <a:off x="685800" y="1783080"/>
-            <a:ext cx="6035040" cy="3840480"/>
-          </a:xfrm>
-          <a:prstGeom prst="rect">
-            <a:avLst/>
-          </a:prstGeom>
-          <a:noFill/>
-          <a:ln/>
-        </p:spPr>
-        <p:txBody>
-          <a:bodyPr wrap="square" lIns="0" tIns="0" rIns="0" bIns="0" rtlCol="0" anchor="t"/>
-          <a:lstStyle/>
-          <a:p>
-            <a:pPr marL="342900" indent="-342900">
-              <a:lnSpc>
-                <a:spcPts val="1900"/>
-              </a:lnSpc>
-              <a:buSzPct val="100000"/>
-              <a:buChar char="•"/>
-            </a:pPr>
-            <a:r>
-              <a:rPr lang="en-US" sz="1050" dirty="0">
-                <a:solidFill>
-                  <a:srgbClr val="5A5249"/>
-                </a:solidFill>
-                <a:latin typeface="游ゴシック" pitchFamily="34" charset="0"/>
-                <a:ea typeface="游ゴシック" pitchFamily="34" charset="-122"/>
-                <a:cs typeface="游ゴシック" pitchFamily="34" charset="-120"/>
-              </a:rPr>
-              <a:t>睡眠製品のブレインスリープ社は、</a:t>
-            </a:r>
-            <a:pPr indent="0" marL="0">
-              <a:lnSpc>
-                <a:spcPts val="1900"/>
-              </a:lnSpc>
-              <a:buNone/>
-            </a:pPr>
-            <a:r>
-              <a:rPr lang="en-US" sz="1050" b="1" dirty="0">
-                <a:solidFill>
-                  <a:srgbClr val="2B2620"/>
-                </a:solidFill>
-                <a:latin typeface="游ゴシック" pitchFamily="34" charset="0"/>
-                <a:ea typeface="游ゴシック" pitchFamily="34" charset="-122"/>
-                <a:cs typeface="游ゴシック" pitchFamily="34" charset="-120"/>
-              </a:rPr>
-              <a:t>睡眠専門の鍼灸マッサージ「コンディショニングスタジオ」</a:t>
-            </a:r>
-            <a:pPr indent="0" marL="0">
-              <a:lnSpc>
-                <a:spcPts val="1900"/>
-              </a:lnSpc>
-              <a:spcAft>
-                <a:spcPts val="1000"/>
-              </a:spcAft>
-              <a:buNone/>
-            </a:pPr>
-            <a:r>
-              <a:rPr lang="en-US" sz="1050" dirty="0">
-                <a:solidFill>
-                  <a:srgbClr val="5A5249"/>
-                </a:solidFill>
-                <a:latin typeface="游ゴシック" pitchFamily="34" charset="0"/>
-                <a:ea typeface="游ゴシック" pitchFamily="34" charset="-122"/>
-                <a:cs typeface="游ゴシック" pitchFamily="34" charset="-120"/>
-              </a:rPr>
-              <a:t>を自社ブランドで運営。枕の売り場ではなく、独立した鍼灸院です。</a:t>
-            </a:r>
-            <a:endParaRPr lang="en-US" sz="1050" dirty="0"/>
-          </a:p>
-          <a:p>
-            <a:pPr marL="342900" indent="-342900">
-              <a:lnSpc>
-                <a:spcPts val="1900"/>
-              </a:lnSpc>
-              <a:buSzPct val="100000"/>
-              <a:buChar char="•"/>
-            </a:pPr>
-            <a:r>
-              <a:rPr lang="en-US" sz="1050" dirty="0">
-                <a:solidFill>
-                  <a:srgbClr val="5A5249"/>
-                </a:solidFill>
-                <a:latin typeface="游ゴシック" pitchFamily="34" charset="0"/>
-                <a:ea typeface="游ゴシック" pitchFamily="34" charset="-122"/>
-                <a:cs typeface="游ゴシック" pitchFamily="34" charset="-120"/>
-              </a:rPr>
-              <a:t>二子玉川・南青山・</a:t>
-            </a:r>
-            <a:pPr indent="0" marL="0">
-              <a:lnSpc>
-                <a:spcPts val="1900"/>
-              </a:lnSpc>
-              <a:buNone/>
-            </a:pPr>
-            <a:r>
-              <a:rPr lang="en-US" sz="1050" b="1" dirty="0">
-                <a:solidFill>
-                  <a:srgbClr val="2B2620"/>
-                </a:solidFill>
-                <a:latin typeface="游ゴシック" pitchFamily="34" charset="0"/>
-                <a:ea typeface="游ゴシック" pitchFamily="34" charset="-122"/>
-                <a:cs typeface="游ゴシック" pitchFamily="34" charset="-120"/>
-              </a:rPr>
-              <a:t>有楽町マルイ</a:t>
-            </a:r>
-            <a:pPr indent="0" marL="0">
-              <a:lnSpc>
-                <a:spcPts val="1900"/>
-              </a:lnSpc>
-              <a:buNone/>
-            </a:pPr>
-            <a:r>
-              <a:rPr lang="en-US" sz="1050" dirty="0">
-                <a:solidFill>
-                  <a:srgbClr val="5A5249"/>
-                </a:solidFill>
-                <a:latin typeface="游ゴシック" pitchFamily="34" charset="0"/>
-                <a:ea typeface="游ゴシック" pitchFamily="34" charset="-122"/>
-                <a:cs typeface="游ゴシック" pitchFamily="34" charset="-120"/>
-              </a:rPr>
-              <a:t>・東京ミッドタウン八重洲の</a:t>
-            </a:r>
-            <a:pPr indent="0" marL="0">
-              <a:lnSpc>
-                <a:spcPts val="1900"/>
-              </a:lnSpc>
-              <a:buNone/>
-            </a:pPr>
-            <a:r>
-              <a:rPr lang="en-US" sz="1050" b="1" dirty="0">
-                <a:solidFill>
-                  <a:srgbClr val="2B2620"/>
-                </a:solidFill>
-                <a:latin typeface="游ゴシック" pitchFamily="34" charset="0"/>
-                <a:ea typeface="游ゴシック" pitchFamily="34" charset="-122"/>
-                <a:cs typeface="游ゴシック" pitchFamily="34" charset="-120"/>
-              </a:rPr>
-              <a:t>4店舗</a:t>
-            </a:r>
-            <a:pPr indent="0" marL="0">
-              <a:lnSpc>
-                <a:spcPts val="1900"/>
-              </a:lnSpc>
-              <a:spcAft>
-                <a:spcPts val="1000"/>
-              </a:spcAft>
-              <a:buNone/>
-            </a:pPr>
-            <a:r>
-              <a:rPr lang="en-US" sz="1050" dirty="0">
-                <a:solidFill>
-                  <a:srgbClr val="5A5249"/>
-                </a:solidFill>
-                <a:latin typeface="游ゴシック" pitchFamily="34" charset="0"/>
-                <a:ea typeface="游ゴシック" pitchFamily="34" charset="-122"/>
-                <a:cs typeface="游ゴシック" pitchFamily="34" charset="-120"/>
-              </a:rPr>
-              <a:t>。商業施設側である丸井グループも、自らプレスリリースを出しています。</a:t>
-            </a:r>
-            <a:endParaRPr lang="en-US" sz="1050" dirty="0"/>
-          </a:p>
-          <a:p>
-            <a:pPr marL="342900" indent="-342900">
-              <a:lnSpc>
-                <a:spcPts val="1900"/>
-              </a:lnSpc>
-              <a:buSzPct val="100000"/>
-              <a:buChar char="•"/>
-            </a:pPr>
-            <a:r>
-              <a:rPr lang="en-US" sz="1050" dirty="0">
-                <a:solidFill>
-                  <a:srgbClr val="5A5249"/>
-                </a:solidFill>
-                <a:latin typeface="游ゴシック" pitchFamily="34" charset="0"/>
-                <a:ea typeface="游ゴシック" pitchFamily="34" charset="-122"/>
-                <a:cs typeface="游ゴシック" pitchFamily="34" charset="-120"/>
-              </a:rPr>
-              <a:t>オープン以来</a:t>
-            </a:r>
-            <a:pPr indent="0" marL="0">
-              <a:lnSpc>
-                <a:spcPts val="1900"/>
-              </a:lnSpc>
-              <a:buNone/>
-            </a:pPr>
-            <a:r>
-              <a:rPr lang="en-US" sz="1050" b="1" dirty="0">
-                <a:solidFill>
-                  <a:srgbClr val="2B2620"/>
-                </a:solidFill>
-                <a:latin typeface="游ゴシック" pitchFamily="34" charset="0"/>
-                <a:ea typeface="游ゴシック" pitchFamily="34" charset="-122"/>
-                <a:cs typeface="游ゴシック" pitchFamily="34" charset="-120"/>
-              </a:rPr>
-              <a:t>累計1万人以上</a:t>
-            </a:r>
-            <a:pPr indent="0" marL="0">
-              <a:lnSpc>
-                <a:spcPts val="1900"/>
-              </a:lnSpc>
-              <a:buNone/>
-            </a:pPr>
-            <a:r>
-              <a:rPr lang="en-US" sz="1050" dirty="0">
-                <a:solidFill>
-                  <a:srgbClr val="5A5249"/>
-                </a:solidFill>
-                <a:latin typeface="游ゴシック" pitchFamily="34" charset="0"/>
-                <a:ea typeface="游ゴシック" pitchFamily="34" charset="-122"/>
-                <a:cs typeface="游ゴシック" pitchFamily="34" charset="-120"/>
-              </a:rPr>
-              <a:t>が利用。自社研究では、1度の施術で眠りの深さが</a:t>
-            </a:r>
-            <a:pPr indent="0" marL="0">
-              <a:lnSpc>
-                <a:spcPts val="1900"/>
-              </a:lnSpc>
-              <a:buNone/>
-            </a:pPr>
-            <a:r>
-              <a:rPr lang="en-US" sz="1050" b="1" dirty="0">
-                <a:solidFill>
-                  <a:srgbClr val="2B2620"/>
-                </a:solidFill>
-                <a:latin typeface="游ゴシック" pitchFamily="34" charset="0"/>
-                <a:ea typeface="游ゴシック" pitchFamily="34" charset="-122"/>
-                <a:cs typeface="游ゴシック" pitchFamily="34" charset="-120"/>
-              </a:rPr>
-              <a:t>35%</a:t>
-            </a:r>
-            <a:pPr indent="0" marL="0">
-              <a:lnSpc>
-                <a:spcPts val="1900"/>
-              </a:lnSpc>
-              <a:buNone/>
-            </a:pPr>
-            <a:r>
-              <a:rPr lang="en-US" sz="1050" dirty="0">
-                <a:solidFill>
-                  <a:srgbClr val="5A5249"/>
-                </a:solidFill>
-                <a:latin typeface="游ゴシック" pitchFamily="34" charset="0"/>
-                <a:ea typeface="游ゴシック" pitchFamily="34" charset="-122"/>
-                <a:cs typeface="游ゴシック" pitchFamily="34" charset="-120"/>
-              </a:rPr>
-              <a:t>、疲労回復度が</a:t>
-            </a:r>
-            <a:pPr indent="0" marL="0">
-              <a:lnSpc>
-                <a:spcPts val="1900"/>
-              </a:lnSpc>
-              <a:buNone/>
-            </a:pPr>
-            <a:r>
-              <a:rPr lang="en-US" sz="1050" b="1" dirty="0">
-                <a:solidFill>
-                  <a:srgbClr val="2B2620"/>
-                </a:solidFill>
-                <a:latin typeface="游ゴシック" pitchFamily="34" charset="0"/>
-                <a:ea typeface="游ゴシック" pitchFamily="34" charset="-122"/>
-                <a:cs typeface="游ゴシック" pitchFamily="34" charset="-120"/>
-              </a:rPr>
-              <a:t>59%</a:t>
-            </a:r>
-            <a:pPr indent="0" marL="0">
-              <a:lnSpc>
-                <a:spcPts val="1900"/>
-              </a:lnSpc>
-              <a:spcAft>
-                <a:spcPts val="1000"/>
-              </a:spcAft>
-              <a:buNone/>
-            </a:pPr>
-            <a:r>
-              <a:rPr lang="en-US" sz="1050" dirty="0">
-                <a:solidFill>
-                  <a:srgbClr val="5A5249"/>
-                </a:solidFill>
-                <a:latin typeface="游ゴシック" pitchFamily="34" charset="0"/>
-                <a:ea typeface="游ゴシック" pitchFamily="34" charset="-122"/>
-                <a:cs typeface="游ゴシック" pitchFamily="34" charset="-120"/>
-              </a:rPr>
-              <a:t>向上したと公表。</a:t>
-            </a:r>
-            <a:endParaRPr lang="en-US" sz="1050" dirty="0"/>
-          </a:p>
-          <a:p>
-            <a:pPr marL="342900" indent="-342900">
-              <a:lnSpc>
-                <a:spcPts val="1900"/>
-              </a:lnSpc>
-              <a:buSzPct val="100000"/>
-              <a:buChar char="•"/>
-            </a:pPr>
-            <a:r>
-              <a:rPr lang="en-US" sz="1050" dirty="0">
-                <a:solidFill>
-                  <a:srgbClr val="5A5249"/>
-                </a:solidFill>
-                <a:latin typeface="游ゴシック" pitchFamily="34" charset="0"/>
-                <a:ea typeface="游ゴシック" pitchFamily="34" charset="-122"/>
-                <a:cs typeface="游ゴシック" pitchFamily="34" charset="-120"/>
-              </a:rPr>
-              <a:t>スタッフは全員が国家資格保有者で、自社資格「スリーププランナー」を取得。</a:t>
-            </a:r>
-            <a:pPr indent="0" marL="0">
-              <a:lnSpc>
-                <a:spcPts val="1900"/>
-              </a:lnSpc>
-              <a:buNone/>
-            </a:pPr>
-            <a:r>
-              <a:rPr lang="en-US" sz="1050" b="1" dirty="0">
-                <a:solidFill>
-                  <a:srgbClr val="2B2620"/>
-                </a:solidFill>
-                <a:latin typeface="游ゴシック" pitchFamily="34" charset="0"/>
-                <a:ea typeface="游ゴシック" pitchFamily="34" charset="-122"/>
-                <a:cs typeface="游ゴシック" pitchFamily="34" charset="-120"/>
-              </a:rPr>
-              <a:t>定額プラン</a:t>
-            </a:r>
-            <a:pPr indent="0" marL="0">
-              <a:lnSpc>
-                <a:spcPts val="1900"/>
-              </a:lnSpc>
-              <a:spcAft>
-                <a:spcPts val="1000"/>
-              </a:spcAft>
-              <a:buNone/>
-            </a:pPr>
-            <a:r>
-              <a:rPr lang="en-US" sz="1050" dirty="0">
-                <a:solidFill>
-                  <a:srgbClr val="5A5249"/>
-                </a:solidFill>
-                <a:latin typeface="游ゴシック" pitchFamily="34" charset="0"/>
-                <a:ea typeface="游ゴシック" pitchFamily="34" charset="-122"/>
-                <a:cs typeface="游ゴシック" pitchFamily="34" charset="-120"/>
-              </a:rPr>
-              <a:t>で、継続して通う前提が設計されています。</a:t>
-            </a:r>
-            <a:endParaRPr lang="en-US" sz="1050" dirty="0"/>
-          </a:p>
-        </p:txBody>
-      </p:sp>
-      <p:sp>
-        <p:nvSpPr>
-          <p:cNvPr id="6" name="Shape 4"/>
+          <p:cNvPr id="5" name="Shape 3"/>
           <p:cNvSpPr/>
           <p:nvPr/>
         </p:nvSpPr>
         <p:spPr>
           <a:xfrm>
-            <a:off x="7040880" y="1783080"/>
-            <a:ext cx="4462272" cy="3200400"/>
+            <a:off x="685800" y="1737360"/>
+            <a:ext cx="3456432" cy="2423160"/>
           </a:xfrm>
           <a:prstGeom prst="roundRect">
             <a:avLst>
-              <a:gd name="adj" fmla="val 1429"/>
+              <a:gd name="adj" fmla="val 1887"/>
+            </a:avLst>
+          </a:prstGeom>
+          <a:solidFill>
+            <a:srgbClr val="FBF6EC"/>
+          </a:solidFill>
+          <a:ln w="9525">
+            <a:solidFill>
+              <a:srgbClr val="D2C4AE"/>
+            </a:solidFill>
+            <a:prstDash val="solid"/>
+          </a:ln>
+        </p:spPr>
+      </p:sp>
+      <p:sp>
+        <p:nvSpPr>
+          <p:cNvPr id="6" name="Text 4"/>
+          <p:cNvSpPr txBox="1"/>
+          <p:nvPr/>
+        </p:nvSpPr>
+        <p:spPr>
+          <a:xfrm>
+            <a:off x="941832" y="1938528"/>
+            <a:ext cx="2944368" cy="237744"/>
+          </a:xfrm>
+          <a:prstGeom prst="rect">
+            <a:avLst/>
+          </a:prstGeom>
+          <a:noFill/>
+          <a:ln/>
+        </p:spPr>
+        <p:txBody>
+          <a:bodyPr wrap="square" lIns="0" tIns="0" rIns="0" bIns="0" rtlCol="0" anchor="ctr"/>
+          <a:lstStyle/>
+          <a:p>
+            <a:pPr indent="0" marL="0">
+              <a:buNone/>
+            </a:pPr>
+            <a:r>
+              <a:rPr lang="en-US" sz="900" b="1" spc="200" kern="0" dirty="0">
+                <a:solidFill>
+                  <a:srgbClr val="9C5446"/>
+                </a:solidFill>
+                <a:latin typeface="游ゴシック" pitchFamily="34" charset="0"/>
+                <a:ea typeface="游ゴシック" pitchFamily="34" charset="-122"/>
+                <a:cs typeface="游ゴシック" pitchFamily="34" charset="-120"/>
+              </a:rPr>
+              <a:t>パパゲーノ</a:t>
+            </a:r>
+            <a:endParaRPr lang="en-US" sz="900" dirty="0"/>
+          </a:p>
+        </p:txBody>
+      </p:sp>
+      <p:sp>
+        <p:nvSpPr>
+          <p:cNvPr id="7" name="Text 5"/>
+          <p:cNvSpPr txBox="1"/>
+          <p:nvPr/>
+        </p:nvSpPr>
+        <p:spPr>
+          <a:xfrm>
+            <a:off x="941832" y="2212848"/>
+            <a:ext cx="2944368" cy="457200"/>
+          </a:xfrm>
+          <a:prstGeom prst="rect">
+            <a:avLst/>
+          </a:prstGeom>
+          <a:noFill/>
+          <a:ln/>
+        </p:spPr>
+        <p:txBody>
+          <a:bodyPr wrap="square" lIns="0" tIns="0" rIns="0" bIns="0" rtlCol="0" anchor="t"/>
+          <a:lstStyle/>
+          <a:p>
+            <a:pPr indent="0" marL="0">
+              <a:lnSpc>
+                <a:spcPts val="2100"/>
+              </a:lnSpc>
+              <a:buNone/>
+            </a:pPr>
+            <a:r>
+              <a:rPr lang="en-US" sz="1500" b="1" dirty="0">
+                <a:solidFill>
+                  <a:srgbClr val="2B2620"/>
+                </a:solidFill>
+                <a:latin typeface="游明朝" pitchFamily="34" charset="0"/>
+                <a:ea typeface="游明朝" pitchFamily="34" charset="-122"/>
+                <a:cs typeface="游明朝" pitchFamily="34" charset="-120"/>
+              </a:rPr>
+              <a:t>アンバサダー認定 第一号</a:t>
+            </a:r>
+            <a:endParaRPr lang="en-US" sz="1500" dirty="0"/>
+          </a:p>
+        </p:txBody>
+      </p:sp>
+      <p:sp>
+        <p:nvSpPr>
+          <p:cNvPr id="8" name="Text 6"/>
+          <p:cNvSpPr txBox="1"/>
+          <p:nvPr/>
+        </p:nvSpPr>
+        <p:spPr>
+          <a:xfrm>
+            <a:off x="941832" y="2724912"/>
+            <a:ext cx="2944368" cy="1234440"/>
+          </a:xfrm>
+          <a:prstGeom prst="rect">
+            <a:avLst/>
+          </a:prstGeom>
+          <a:noFill/>
+          <a:ln/>
+        </p:spPr>
+        <p:txBody>
+          <a:bodyPr wrap="square" lIns="0" tIns="0" rIns="0" bIns="0" rtlCol="0" anchor="t"/>
+          <a:lstStyle/>
+          <a:p>
+            <a:pPr indent="0" marL="0">
+              <a:lnSpc>
+                <a:spcPts val="1700"/>
+              </a:lnSpc>
+              <a:buNone/>
+            </a:pPr>
+            <a:r>
+              <a:rPr lang="en-US" sz="1050" dirty="0">
+                <a:solidFill>
+                  <a:srgbClr val="5A5249"/>
+                </a:solidFill>
+                <a:latin typeface="游ゴシック" pitchFamily="34" charset="0"/>
+                <a:ea typeface="游ゴシック" pitchFamily="34" charset="-122"/>
+                <a:cs typeface="游ゴシック" pitchFamily="34" charset="-120"/>
+              </a:rPr>
+              <a:t>就労継続支援B型「パパゲーノ Work &amp; Recovery」への発注を通じ、精神障害のある方が担う事業に伴走。認定制度の第一号企業です。</a:t>
+            </a:r>
+            <a:endParaRPr lang="en-US" sz="1050" dirty="0"/>
+          </a:p>
+        </p:txBody>
+      </p:sp>
+      <p:sp>
+        <p:nvSpPr>
+          <p:cNvPr id="9" name="Shape 7"/>
+          <p:cNvSpPr/>
+          <p:nvPr/>
+        </p:nvSpPr>
+        <p:spPr>
+          <a:xfrm>
+            <a:off x="4370832" y="1737360"/>
+            <a:ext cx="3456432" cy="2423160"/>
+          </a:xfrm>
+          <a:prstGeom prst="roundRect">
+            <a:avLst>
+              <a:gd name="adj" fmla="val 1887"/>
+            </a:avLst>
+          </a:prstGeom>
+          <a:solidFill>
+            <a:srgbClr val="FBF6EC"/>
+          </a:solidFill>
+          <a:ln w="9525">
+            <a:solidFill>
+              <a:srgbClr val="D2C4AE"/>
+            </a:solidFill>
+            <a:prstDash val="solid"/>
+          </a:ln>
+        </p:spPr>
+      </p:sp>
+      <p:sp>
+        <p:nvSpPr>
+          <p:cNvPr id="10" name="Text 8"/>
+          <p:cNvSpPr txBox="1"/>
+          <p:nvPr/>
+        </p:nvSpPr>
+        <p:spPr>
+          <a:xfrm>
+            <a:off x="4626864" y="1938528"/>
+            <a:ext cx="2944368" cy="237744"/>
+          </a:xfrm>
+          <a:prstGeom prst="rect">
+            <a:avLst/>
+          </a:prstGeom>
+          <a:noFill/>
+          <a:ln/>
+        </p:spPr>
+        <p:txBody>
+          <a:bodyPr wrap="square" lIns="0" tIns="0" rIns="0" bIns="0" rtlCol="0" anchor="ctr"/>
+          <a:lstStyle/>
+          <a:p>
+            <a:pPr indent="0" marL="0">
+              <a:buNone/>
+            </a:pPr>
+            <a:r>
+              <a:rPr lang="en-US" sz="900" b="1" spc="200" kern="0" dirty="0">
+                <a:solidFill>
+                  <a:srgbClr val="9C5446"/>
+                </a:solidFill>
+                <a:latin typeface="游ゴシック" pitchFamily="34" charset="0"/>
+                <a:ea typeface="游ゴシック" pitchFamily="34" charset="-122"/>
+                <a:cs typeface="游ゴシック" pitchFamily="34" charset="-120"/>
+              </a:rPr>
+              <a:t>ファンコミュニケーションズ</a:t>
+            </a:r>
+            <a:endParaRPr lang="en-US" sz="900" dirty="0"/>
+          </a:p>
+        </p:txBody>
+      </p:sp>
+      <p:sp>
+        <p:nvSpPr>
+          <p:cNvPr id="11" name="Text 9"/>
+          <p:cNvSpPr txBox="1"/>
+          <p:nvPr/>
+        </p:nvSpPr>
+        <p:spPr>
+          <a:xfrm>
+            <a:off x="4626864" y="2212848"/>
+            <a:ext cx="2944368" cy="457200"/>
+          </a:xfrm>
+          <a:prstGeom prst="rect">
+            <a:avLst/>
+          </a:prstGeom>
+          <a:noFill/>
+          <a:ln/>
+        </p:spPr>
+        <p:txBody>
+          <a:bodyPr wrap="square" lIns="0" tIns="0" rIns="0" bIns="0" rtlCol="0" anchor="t"/>
+          <a:lstStyle/>
+          <a:p>
+            <a:pPr indent="0" marL="0">
+              <a:lnSpc>
+                <a:spcPts val="2100"/>
+              </a:lnSpc>
+              <a:buNone/>
+            </a:pPr>
+            <a:r>
+              <a:rPr lang="en-US" sz="1500" b="1" dirty="0">
+                <a:solidFill>
+                  <a:srgbClr val="2B2620"/>
+                </a:solidFill>
+                <a:latin typeface="游明朝" pitchFamily="34" charset="0"/>
+                <a:ea typeface="游明朝" pitchFamily="34" charset="-122"/>
+                <a:cs typeface="游明朝" pitchFamily="34" charset="-120"/>
+              </a:rPr>
+              <a:t>ThirdTalk（サードトーク）</a:t>
+            </a:r>
+            <a:endParaRPr lang="en-US" sz="1500" dirty="0"/>
+          </a:p>
+        </p:txBody>
+      </p:sp>
+      <p:sp>
+        <p:nvSpPr>
+          <p:cNvPr id="12" name="Text 10"/>
+          <p:cNvSpPr txBox="1"/>
+          <p:nvPr/>
+        </p:nvSpPr>
+        <p:spPr>
+          <a:xfrm>
+            <a:off x="4626864" y="2724912"/>
+            <a:ext cx="2944368" cy="1234440"/>
+          </a:xfrm>
+          <a:prstGeom prst="rect">
+            <a:avLst/>
+          </a:prstGeom>
+          <a:noFill/>
+          <a:ln/>
+        </p:spPr>
+        <p:txBody>
+          <a:bodyPr wrap="square" lIns="0" tIns="0" rIns="0" bIns="0" rtlCol="0" anchor="t"/>
+          <a:lstStyle/>
+          <a:p>
+            <a:pPr indent="0" marL="0">
+              <a:lnSpc>
+                <a:spcPts val="1700"/>
+              </a:lnSpc>
+              <a:buNone/>
+            </a:pPr>
+            <a:r>
+              <a:rPr lang="en-US" sz="1050" dirty="0">
+                <a:solidFill>
+                  <a:srgbClr val="5A5249"/>
+                </a:solidFill>
+                <a:latin typeface="游ゴシック" pitchFamily="34" charset="0"/>
+                <a:ea typeface="游ゴシック" pitchFamily="34" charset="-122"/>
+                <a:cs typeface="游ゴシック" pitchFamily="34" charset="-120"/>
+              </a:rPr>
+              <a:t>「病院やカウンセリングに行く、その一歩手前」を想定したオンライン対話サービス。企画段階からご相談をいただき、立ち上げを見守ってきました。</a:t>
+            </a:r>
+            <a:endParaRPr lang="en-US" sz="1050" dirty="0"/>
+          </a:p>
+        </p:txBody>
+      </p:sp>
+      <p:sp>
+        <p:nvSpPr>
+          <p:cNvPr id="13" name="Shape 11"/>
+          <p:cNvSpPr/>
+          <p:nvPr/>
+        </p:nvSpPr>
+        <p:spPr>
+          <a:xfrm>
+            <a:off x="8055864" y="1737360"/>
+            <a:ext cx="3456432" cy="2423160"/>
+          </a:xfrm>
+          <a:prstGeom prst="roundRect">
+            <a:avLst>
+              <a:gd name="adj" fmla="val 1887"/>
+            </a:avLst>
+          </a:prstGeom>
+          <a:solidFill>
+            <a:srgbClr val="FBF6EC"/>
+          </a:solidFill>
+          <a:ln w="9525">
+            <a:solidFill>
+              <a:srgbClr val="D2C4AE"/>
+            </a:solidFill>
+            <a:prstDash val="solid"/>
+          </a:ln>
+        </p:spPr>
+      </p:sp>
+      <p:sp>
+        <p:nvSpPr>
+          <p:cNvPr id="14" name="Text 12"/>
+          <p:cNvSpPr txBox="1"/>
+          <p:nvPr/>
+        </p:nvSpPr>
+        <p:spPr>
+          <a:xfrm>
+            <a:off x="8311896" y="1938528"/>
+            <a:ext cx="2944368" cy="237744"/>
+          </a:xfrm>
+          <a:prstGeom prst="rect">
+            <a:avLst/>
+          </a:prstGeom>
+          <a:noFill/>
+          <a:ln/>
+        </p:spPr>
+        <p:txBody>
+          <a:bodyPr wrap="square" lIns="0" tIns="0" rIns="0" bIns="0" rtlCol="0" anchor="ctr"/>
+          <a:lstStyle/>
+          <a:p>
+            <a:pPr indent="0" marL="0">
+              <a:buNone/>
+            </a:pPr>
+            <a:r>
+              <a:rPr lang="en-US" sz="900" b="1" spc="200" kern="0" dirty="0">
+                <a:solidFill>
+                  <a:srgbClr val="9C5446"/>
+                </a:solidFill>
+                <a:latin typeface="游ゴシック" pitchFamily="34" charset="0"/>
+                <a:ea typeface="游ゴシック" pitchFamily="34" charset="-122"/>
+                <a:cs typeface="游ゴシック" pitchFamily="34" charset="-120"/>
+              </a:rPr>
+              <a:t>stand up</a:t>
+            </a:r>
+            <a:endParaRPr lang="en-US" sz="900" dirty="0"/>
+          </a:p>
+        </p:txBody>
+      </p:sp>
+      <p:sp>
+        <p:nvSpPr>
+          <p:cNvPr id="15" name="Text 13"/>
+          <p:cNvSpPr txBox="1"/>
+          <p:nvPr/>
+        </p:nvSpPr>
+        <p:spPr>
+          <a:xfrm>
+            <a:off x="8311896" y="2212848"/>
+            <a:ext cx="2944368" cy="457200"/>
+          </a:xfrm>
+          <a:prstGeom prst="rect">
+            <a:avLst/>
+          </a:prstGeom>
+          <a:noFill/>
+          <a:ln/>
+        </p:spPr>
+        <p:txBody>
+          <a:bodyPr wrap="square" lIns="0" tIns="0" rIns="0" bIns="0" rtlCol="0" anchor="t"/>
+          <a:lstStyle/>
+          <a:p>
+            <a:pPr indent="0" marL="0">
+              <a:lnSpc>
+                <a:spcPts val="2100"/>
+              </a:lnSpc>
+              <a:buNone/>
+            </a:pPr>
+            <a:r>
+              <a:rPr lang="en-US" sz="1500" b="1" dirty="0">
+                <a:solidFill>
+                  <a:srgbClr val="2B2620"/>
+                </a:solidFill>
+                <a:latin typeface="游明朝" pitchFamily="34" charset="0"/>
+                <a:ea typeface="游明朝" pitchFamily="34" charset="-122"/>
+                <a:cs typeface="游明朝" pitchFamily="34" charset="-120"/>
+              </a:rPr>
+              <a:t>アミューズメント事業</a:t>
+            </a:r>
+            <a:endParaRPr lang="en-US" sz="1500" dirty="0"/>
+          </a:p>
+        </p:txBody>
+      </p:sp>
+      <p:sp>
+        <p:nvSpPr>
+          <p:cNvPr id="16" name="Text 14"/>
+          <p:cNvSpPr txBox="1"/>
+          <p:nvPr/>
+        </p:nvSpPr>
+        <p:spPr>
+          <a:xfrm>
+            <a:off x="8311896" y="2724912"/>
+            <a:ext cx="2944368" cy="1234440"/>
+          </a:xfrm>
+          <a:prstGeom prst="rect">
+            <a:avLst/>
+          </a:prstGeom>
+          <a:noFill/>
+          <a:ln/>
+        </p:spPr>
+        <p:txBody>
+          <a:bodyPr wrap="square" lIns="0" tIns="0" rIns="0" bIns="0" rtlCol="0" anchor="t"/>
+          <a:lstStyle/>
+          <a:p>
+            <a:pPr indent="0" marL="0">
+              <a:lnSpc>
+                <a:spcPts val="1700"/>
+              </a:lnSpc>
+              <a:buNone/>
+            </a:pPr>
+            <a:r>
+              <a:rPr lang="en-US" sz="1050" dirty="0">
+                <a:solidFill>
+                  <a:srgbClr val="5A5249"/>
+                </a:solidFill>
+                <a:latin typeface="游ゴシック" pitchFamily="34" charset="0"/>
+                <a:ea typeface="游ゴシック" pitchFamily="34" charset="-122"/>
+                <a:cs typeface="游ゴシック" pitchFamily="34" charset="-120"/>
+              </a:rPr>
+              <a:t>新規事業の立ち上げについてご相談をいただき、現在もお取引が続いています。医療以外の業種でも、人の状態を扱う事業の設計に入ってきました。</a:t>
+            </a:r>
+            <a:endParaRPr lang="en-US" sz="1050" dirty="0"/>
+          </a:p>
+        </p:txBody>
+      </p:sp>
+      <p:sp>
+        <p:nvSpPr>
+          <p:cNvPr id="17" name="Shape 15"/>
+          <p:cNvSpPr/>
+          <p:nvPr/>
+        </p:nvSpPr>
+        <p:spPr>
+          <a:xfrm>
+            <a:off x="685800" y="4370832"/>
+            <a:ext cx="10820095" cy="1371600"/>
+          </a:xfrm>
+          <a:prstGeom prst="roundRect">
+            <a:avLst>
+              <a:gd name="adj" fmla="val 3333"/>
             </a:avLst>
           </a:prstGeom>
           <a:solidFill>
@@ -7674,14 +7747,14 @@
       </p:sp>
       <p:sp>
         <p:nvSpPr>
-          <p:cNvPr id="7" name="Text 5"/>
-          <p:cNvSpPr txBox="1"/>
-          <p:nvPr/>
-        </p:nvSpPr>
-        <p:spPr>
-          <a:xfrm>
-            <a:off x="7315200" y="1984248"/>
-            <a:ext cx="3913632" cy="237744"/>
+          <p:cNvPr id="18" name="Text 16"/>
+          <p:cNvSpPr txBox="1"/>
+          <p:nvPr/>
+        </p:nvSpPr>
+        <p:spPr>
+          <a:xfrm>
+            <a:off x="960120" y="4572000"/>
+            <a:ext cx="10271455" cy="237744"/>
           </a:xfrm>
           <a:prstGeom prst="rect">
             <a:avLst/>
@@ -7705,7 +7778,7 @@
                 <a:ea typeface="游ゴシック" pitchFamily="34" charset="-122"/>
                 <a:cs typeface="游ゴシック" pitchFamily="34" charset="-120"/>
               </a:rPr>
-              <a:t>ここから私が受け取ったこと</a:t>
+              <a:t>共通してやってきたこと</a:t>
             </a:r>
             <a:endParaRPr lang="en-US" sz="900" dirty="0"/>
           </a:p>
@@ -7713,14 +7786,14 @@
       </p:sp>
       <p:sp>
         <p:nvSpPr>
-          <p:cNvPr id="8" name="Text 6"/>
-          <p:cNvSpPr txBox="1"/>
-          <p:nvPr/>
-        </p:nvSpPr>
-        <p:spPr>
-          <a:xfrm>
-            <a:off x="7315200" y="2295144"/>
-            <a:ext cx="3913632" cy="2468880"/>
+          <p:cNvPr id="19" name="Text 17"/>
+          <p:cNvSpPr txBox="1"/>
+          <p:nvPr/>
+        </p:nvSpPr>
+        <p:spPr>
+          <a:xfrm>
+            <a:off x="960120" y="4882896"/>
+            <a:ext cx="10271455" cy="640080"/>
           </a:xfrm>
           <a:prstGeom prst="rect">
             <a:avLst/>
@@ -7747,20 +7820,25 @@
                 <a:ea typeface="游ゴシック" pitchFamily="34" charset="-122"/>
                 <a:cs typeface="游ゴシック" pitchFamily="34" charset="-120"/>
               </a:rPr>
-              <a:t>製品を売って終わりにせず、施術という接点で人と関わり続ける。効果を数字で示し、資格者を自社で育て、定額で通ってもらう。——私がやろうとしている構造と、ほぼ同じです。</a:t>
-            </a:r>
-            <a:endParaRPr lang="en-US" sz="1100" dirty="0"/>
-          </a:p>
-          <a:p>
+              <a:t>心の不調を抱えた人が、実際にどこで止まり、どこで動くのか。その一次情報を事業の言葉に翻訳するのが私の役割です。なかでもThirdTalkは、このあとお話しする</a:t>
+            </a:r>
             <a:pPr indent="0" marL="0">
               <a:lnSpc>
                 <a:spcPts val="1900"/>
               </a:lnSpc>
               <a:buNone/>
             </a:pPr>
-            <a:endParaRPr lang="en-US" sz="1100" dirty="0"/>
-          </a:p>
-          <a:p>
+            <a:r>
+              <a:rPr lang="en-US" sz="1100" b="1" dirty="0">
+                <a:solidFill>
+                  <a:srgbClr val="2B2620"/>
+                </a:solidFill>
+                <a:latin typeface="游ゴシック" pitchFamily="34" charset="0"/>
+                <a:ea typeface="游ゴシック" pitchFamily="34" charset="-122"/>
+                <a:cs typeface="游ゴシック" pitchFamily="34" charset="-120"/>
+              </a:rPr>
+              <a:t>「病院の一歩手前」という発想を、そのまま事業にしたもの</a:t>
+            </a:r>
             <a:pPr indent="0" marL="0">
               <a:lnSpc>
                 <a:spcPts val="1900"/>
@@ -7776,41 +7854,21 @@
                 <a:ea typeface="游ゴシック" pitchFamily="34" charset="-122"/>
                 <a:cs typeface="游ゴシック" pitchFamily="34" charset="-120"/>
               </a:rPr>
-              <a:t>違いは入口です。</a:t>
+              <a:t>でした。</a:t>
             </a:r>
             <a:endParaRPr lang="en-US" sz="1100" dirty="0"/>
           </a:p>
-          <a:p>
-            <a:pPr indent="0" marL="0">
-              <a:lnSpc>
-                <a:spcPts val="1900"/>
-              </a:lnSpc>
-              <a:buNone/>
-            </a:pPr>
-            <a:r>
-              <a:rPr lang="en-US" sz="1100" b="1" dirty="0">
-                <a:solidFill>
-                  <a:srgbClr val="2B2620"/>
-                </a:solidFill>
-                <a:latin typeface="游ゴシック" pitchFamily="34" charset="0"/>
-                <a:ea typeface="游ゴシック" pitchFamily="34" charset="-122"/>
-                <a:cs typeface="游ゴシック" pitchFamily="34" charset="-120"/>
-              </a:rPr>
-              <a:t>あの会社は「睡眠」から入った。私は「こころ」から入ります。</a:t>
-            </a:r>
-            <a:endParaRPr lang="en-US" sz="1100" dirty="0"/>
-          </a:p>
-        </p:txBody>
-      </p:sp>
-      <p:sp>
-        <p:nvSpPr>
-          <p:cNvPr id="9" name="Text 7"/>
-          <p:cNvSpPr txBox="1"/>
-          <p:nvPr/>
-        </p:nvSpPr>
-        <p:spPr>
-          <a:xfrm>
-            <a:off x="685800" y="5852160"/>
+        </p:txBody>
+      </p:sp>
+      <p:sp>
+        <p:nvSpPr>
+          <p:cNvPr id="20" name="Text 18"/>
+          <p:cNvSpPr txBox="1"/>
+          <p:nvPr/>
+        </p:nvSpPr>
+        <p:spPr>
+          <a:xfrm>
+            <a:off x="685800" y="5870448"/>
             <a:ext cx="10820095" cy="329184"/>
           </a:xfrm>
           <a:prstGeom prst="rect">
@@ -7838,7 +7896,7 @@
                 <a:ea typeface="游ゴシック" pitchFamily="34" charset="-122"/>
                 <a:cs typeface="游ゴシック" pitchFamily="34" charset="-120"/>
               </a:rPr>
-              <a:t>出典：株式会社丸井グループ プレスリリース（2024.11.15）／株式会社ブレインスリープ プレスリリース／ブレインスリープ コンディショニングスタジオ 公式サイト</a:t>
+              <a:t>出典：株式会社ファンコミュニケーションズ ニュースリリース（2022.8.26）／株式会社パパゲーノ プレスリリース</a:t>
             </a:r>
             <a:endParaRPr lang="en-US" sz="750" dirty="0"/>
           </a:p>
@@ -7846,7 +7904,7 @@
       </p:sp>
       <p:sp>
         <p:nvSpPr>
-          <p:cNvPr id="10" name="Text 8"/>
+          <p:cNvPr id="21" name="Text 19"/>
           <p:cNvSpPr txBox="1"/>
           <p:nvPr/>
         </p:nvSpPr>
@@ -7885,7 +7943,7 @@
       </p:sp>
       <p:sp>
         <p:nvSpPr>
-          <p:cNvPr id="11" name="Text 9"/>
+          <p:cNvPr id="22" name="Text 20"/>
           <p:cNvSpPr txBox="1"/>
           <p:nvPr/>
         </p:nvSpPr>
@@ -7916,7 +7974,7 @@
                 <a:ea typeface="游ゴシック" pitchFamily="34" charset="-122"/>
                 <a:cs typeface="游ゴシック" pitchFamily="34" charset="-120"/>
               </a:rPr>
-              <a:t>3:35 → 4:15</a:t>
+              <a:t>3:30 → 4:10</a:t>
             </a:r>
             <a:endParaRPr lang="en-US" sz="900" dirty="0"/>
           </a:p>
@@ -8021,7 +8079,7 @@
                 <a:ea typeface="游ゴシック" pitchFamily="34" charset="-122"/>
                 <a:cs typeface="游ゴシック" pitchFamily="34" charset="-120"/>
               </a:rPr>
-              <a:t>OUR LIMIT</a:t>
+              <a:t>MY LIMIT</a:t>
             </a:r>
             <a:endParaRPr lang="en-US" sz="1000" dirty="0"/>
           </a:p>
@@ -8485,7 +8543,7 @@
                 <a:ea typeface="游ゴシック" pitchFamily="34" charset="-122"/>
                 <a:cs typeface="游ゴシック" pitchFamily="34" charset="-120"/>
               </a:rPr>
-              <a:t>4:15 → 4:35</a:t>
+              <a:t>4:10 → 4:30</a:t>
             </a:r>
             <a:endParaRPr lang="en-US" sz="900" dirty="0"/>
           </a:p>
@@ -9034,12 +9092,12 @@
         </p:nvSpPr>
         <p:spPr>
           <a:xfrm>
-            <a:off x="685800" y="4663440"/>
-            <a:ext cx="10820095" cy="1188720"/>
+            <a:off x="685800" y="4572000"/>
+            <a:ext cx="10820095" cy="1325880"/>
           </a:xfrm>
           <a:prstGeom prst="roundRect">
             <a:avLst>
-              <a:gd name="adj" fmla="val 3846"/>
+              <a:gd name="adj" fmla="val 3448"/>
             </a:avLst>
           </a:prstGeom>
           <a:solidFill>
@@ -9061,7 +9119,7 @@
         </p:nvSpPr>
         <p:spPr>
           <a:xfrm>
-            <a:off x="960120" y="4864608"/>
+            <a:off x="960120" y="4773168"/>
             <a:ext cx="10271455" cy="237744"/>
           </a:xfrm>
           <a:prstGeom prst="rect">
@@ -9086,7 +9144,7 @@
                 <a:ea typeface="游ゴシック" pitchFamily="34" charset="-122"/>
                 <a:cs typeface="游ゴシック" pitchFamily="34" charset="-120"/>
               </a:rPr>
-              <a:t>私の目的</a:t>
+              <a:t>本日お願いしたいこと</a:t>
             </a:r>
             <a:endParaRPr lang="en-US" sz="900" dirty="0"/>
           </a:p>
@@ -9100,8 +9158,8 @@
         </p:nvSpPr>
         <p:spPr>
           <a:xfrm>
-            <a:off x="960120" y="5175504"/>
-            <a:ext cx="10271455" cy="457200"/>
+            <a:off x="960120" y="5084064"/>
+            <a:ext cx="10271455" cy="594360"/>
           </a:xfrm>
           <a:prstGeom prst="rect">
             <a:avLst/>
@@ -9129,6 +9187,23 @@
                 <a:cs typeface="游ゴシック" pitchFamily="34" charset="-120"/>
               </a:rPr>
               <a:t>生きづらさを抱えた人を、治療が必要になる手前で減らしたい。そのために、鍼灸の外側にある方法も含めて手を尽くします。</a:t>
+            </a:r>
+            <a:pPr indent="0" marL="0">
+              <a:lnSpc>
+                <a:spcPts val="1900"/>
+              </a:lnSpc>
+              <a:buNone/>
+            </a:pPr>
+            <a:r>
+              <a:rPr lang="en-US" sz="1100" b="1" dirty="0">
+                <a:solidFill>
+                  <a:srgbClr val="2B2620"/>
+                </a:solidFill>
+                <a:latin typeface="游ゴシック" pitchFamily="34" charset="0"/>
+                <a:ea typeface="游ゴシック" pitchFamily="34" charset="-122"/>
+                <a:cs typeface="游ゴシック" pitchFamily="34" charset="-120"/>
+              </a:rPr>
+              <a:t>まずは本日、この3つのうちどこに可能性がありそうか、率直なご意見をいただけたら嬉しいです。</a:t>
             </a:r>
             <a:endParaRPr lang="en-US" sz="1100" dirty="0"/>
           </a:p>

--- a/proposals/米倉まな_アポプラスステーション様ご提案_導入.pptx
+++ b/proposals/米倉まな_アポプラスステーション様ご提案_導入.pptx
@@ -1039,7 +1039,7 @@
           <a:p>
             <a:r>
               <a:rPr lang="en-US" dirty="0"/>
-              <a:t>いま「ねここち」という、頭をオフにする事業の立ち上げを準備しています。頭が考えごとで止まらない人に、強制的にオフにする時間を売る事業です。施術は鍼灸師の国家資格を持つ人が行います。医療の知識を持つ人が、治療の手前にいる層に関わる形です。治療と身構えずに入れる入口をつくって、必要な人だけを鍼灸や医療につなぐ。1店舗あたり月次利益30万円を想定しています。</a:t>
+              <a:t>いま「ねここち」という、頭をオフにする事業の立ち上げを準備しています。頭が考えごとで止まらない人に、強制的にオフにする時間を売る事業です。施術は鍼灸師の国家資格を持つ人が行います。医療の知識を持つ人が、治療の手前の層に関わる形です。治療と身構えずに入れる入口をつくって、必要な人だけを鍼灸や医療につなぐ。1店舗あたり月次利益30万円を想定しています。</a:t>
             </a:r>
             <a:endParaRPr lang="en-US" dirty="0"/>
           </a:p>
@@ -1704,7 +1704,7 @@
         </p:nvSpPr>
         <p:spPr>
           <a:xfrm>
-            <a:off x="996696" y="402336"/>
+            <a:off x="996696" y="365760"/>
             <a:ext cx="7315200" cy="310896"/>
           </a:xfrm>
           <a:prstGeom prst="rect">
@@ -1721,17 +1721,17 @@
               <a:buNone/>
             </a:pPr>
             <a:r>
-              <a:rPr lang="en-US" sz="1100" spc="200" kern="0" dirty="0">
+              <a:rPr lang="en-US" sz="1400" spc="100" kern="0" dirty="0">
                 <a:solidFill>
                   <a:srgbClr val="9C5446"/>
                 </a:solidFill>
-                <a:latin typeface="游ゴシック" pitchFamily="34" charset="0"/>
-                <a:ea typeface="游ゴシック" pitchFamily="34" charset="-122"/>
-                <a:cs typeface="游ゴシック" pitchFamily="34" charset="-120"/>
+                <a:latin typeface="メイリオ" pitchFamily="34" charset="0"/>
+                <a:ea typeface="メイリオ" pitchFamily="34" charset="-122"/>
+                <a:cs typeface="メイリオ" pitchFamily="34" charset="-120"/>
               </a:rPr>
               <a:t>アポプラスステーション株式会社 御中</a:t>
             </a:r>
-            <a:endParaRPr lang="en-US" sz="1100" dirty="0"/>
+            <a:endParaRPr lang="en-US" sz="1400" dirty="0"/>
           </a:p>
         </p:txBody>
       </p:sp>
@@ -1760,17 +1760,17 @@
               <a:buNone/>
             </a:pPr>
             <a:r>
-              <a:rPr lang="en-US" sz="1100" spc="500" kern="0" dirty="0">
+              <a:rPr lang="en-US" sz="1400" spc="500" kern="0" dirty="0">
                 <a:solidFill>
                   <a:srgbClr val="8B8175"/>
                 </a:solidFill>
-                <a:latin typeface="游ゴシック" pitchFamily="34" charset="0"/>
-                <a:ea typeface="游ゴシック" pitchFamily="34" charset="-122"/>
-                <a:cs typeface="游ゴシック" pitchFamily="34" charset="-120"/>
+                <a:latin typeface="メイリオ" pitchFamily="34" charset="0"/>
+                <a:ea typeface="メイリオ" pitchFamily="34" charset="-122"/>
+                <a:cs typeface="メイリオ" pitchFamily="34" charset="-120"/>
               </a:rPr>
               <a:t>よねくら　まな</a:t>
             </a:r>
-            <a:endParaRPr lang="en-US" sz="1100" dirty="0"/>
+            <a:endParaRPr lang="en-US" sz="1400" dirty="0"/>
           </a:p>
         </p:txBody>
       </p:sp>
@@ -1799,13 +1799,13 @@
               <a:buNone/>
             </a:pPr>
             <a:r>
-              <a:rPr lang="en-US" sz="3800" b="1" spc="300" kern="0" dirty="0">
+              <a:rPr lang="en-US" sz="3800" b="1" spc="200" kern="0" dirty="0">
                 <a:solidFill>
                   <a:srgbClr val="2B2620"/>
                 </a:solidFill>
-                <a:latin typeface="游明朝" pitchFamily="34" charset="0"/>
-                <a:ea typeface="游明朝" pitchFamily="34" charset="-122"/>
-                <a:cs typeface="游明朝" pitchFamily="34" charset="-120"/>
+                <a:latin typeface="メイリオ" pitchFamily="34" charset="0"/>
+                <a:ea typeface="メイリオ" pitchFamily="34" charset="-122"/>
+                <a:cs typeface="メイリオ" pitchFamily="34" charset="-120"/>
               </a:rPr>
               <a:t>米倉まな</a:t>
             </a:r>
@@ -1845,9 +1845,9 @@
                 <a:solidFill>
                   <a:srgbClr val="5A5249"/>
                 </a:solidFill>
-                <a:latin typeface="游明朝" pitchFamily="34" charset="0"/>
-                <a:ea typeface="游明朝" pitchFamily="34" charset="-122"/>
-                <a:cs typeface="游明朝" pitchFamily="34" charset="-120"/>
+                <a:latin typeface="メイリオ" pitchFamily="34" charset="0"/>
+                <a:ea typeface="メイリオ" pitchFamily="34" charset="-122"/>
+                <a:cs typeface="メイリオ" pitchFamily="34" charset="-120"/>
               </a:rPr>
               <a:t>ご提案の前に、</a:t>
             </a:r>
@@ -1865,9 +1865,9 @@
                 <a:solidFill>
                   <a:srgbClr val="5A5249"/>
                 </a:solidFill>
-                <a:latin typeface="游明朝" pitchFamily="34" charset="0"/>
-                <a:ea typeface="游明朝" pitchFamily="34" charset="-122"/>
-                <a:cs typeface="游明朝" pitchFamily="34" charset="-120"/>
+                <a:latin typeface="メイリオ" pitchFamily="34" charset="0"/>
+                <a:ea typeface="メイリオ" pitchFamily="34" charset="-122"/>
+                <a:cs typeface="メイリオ" pitchFamily="34" charset="-120"/>
               </a:rPr>
               <a:t>私が何者で、何を変えたいのかを。</a:t>
             </a:r>
@@ -1883,8 +1883,8 @@
         </p:nvSpPr>
         <p:spPr>
           <a:xfrm>
-            <a:off x="685800" y="4892040"/>
-            <a:ext cx="1869948" cy="384048"/>
+            <a:off x="685800" y="4645152"/>
+            <a:ext cx="2750515" cy="438912"/>
           </a:xfrm>
           <a:prstGeom prst="roundRect">
             <a:avLst>
@@ -1910,8 +1910,8 @@
         </p:nvSpPr>
         <p:spPr>
           <a:xfrm>
-            <a:off x="685800" y="4892040"/>
-            <a:ext cx="1869948" cy="384048"/>
+            <a:off x="685800" y="4645152"/>
+            <a:ext cx="2750515" cy="438912"/>
           </a:xfrm>
           <a:prstGeom prst="rect">
             <a:avLst/>
@@ -1927,17 +1927,17 @@
               <a:buNone/>
             </a:pPr>
             <a:r>
-              <a:rPr lang="en-US" sz="950" dirty="0">
+              <a:rPr lang="en-US" sz="1400" dirty="0">
                 <a:solidFill>
                   <a:srgbClr val="5A5249"/>
                 </a:solidFill>
-                <a:latin typeface="游ゴシック" pitchFamily="34" charset="0"/>
-                <a:ea typeface="游ゴシック" pitchFamily="34" charset="-122"/>
-                <a:cs typeface="游ゴシック" pitchFamily="34" charset="-120"/>
+                <a:latin typeface="メイリオ" pitchFamily="34" charset="0"/>
+                <a:ea typeface="メイリオ" pitchFamily="34" charset="-122"/>
+                <a:cs typeface="メイリオ" pitchFamily="34" charset="-120"/>
               </a:rPr>
               <a:t>認定鍼灸師（開業11年目）</a:t>
             </a:r>
-            <a:endParaRPr lang="en-US" sz="950" dirty="0"/>
+            <a:endParaRPr lang="en-US" sz="1400" dirty="0"/>
           </a:p>
         </p:txBody>
       </p:sp>
@@ -1949,8 +1949,8 @@
         </p:nvSpPr>
         <p:spPr>
           <a:xfrm>
-            <a:off x="2702052" y="4892040"/>
-            <a:ext cx="2098548" cy="384048"/>
+            <a:off x="3582619" y="4645152"/>
+            <a:ext cx="3108960" cy="438912"/>
           </a:xfrm>
           <a:prstGeom prst="roundRect">
             <a:avLst>
@@ -1976,8 +1976,8 @@
         </p:nvSpPr>
         <p:spPr>
           <a:xfrm>
-            <a:off x="2702052" y="4892040"/>
-            <a:ext cx="2098548" cy="384048"/>
+            <a:off x="3582619" y="4645152"/>
+            <a:ext cx="3108960" cy="438912"/>
           </a:xfrm>
           <a:prstGeom prst="rect">
             <a:avLst/>
@@ -1993,17 +1993,17 @@
               <a:buNone/>
             </a:pPr>
             <a:r>
-              <a:rPr lang="en-US" sz="950" dirty="0">
+              <a:rPr lang="en-US" sz="1400" dirty="0">
                 <a:solidFill>
                   <a:srgbClr val="5A5249"/>
                 </a:solidFill>
-                <a:latin typeface="游ゴシック" pitchFamily="34" charset="0"/>
-                <a:ea typeface="游ゴシック" pitchFamily="34" charset="-122"/>
-                <a:cs typeface="游ゴシック" pitchFamily="34" charset="-120"/>
+                <a:latin typeface="メイリオ" pitchFamily="34" charset="0"/>
+                <a:ea typeface="メイリオ" pitchFamily="34" charset="-122"/>
+                <a:cs typeface="メイリオ" pitchFamily="34" charset="-120"/>
               </a:rPr>
               <a:t>はりきゅう処ここちめいど 院長</a:t>
             </a:r>
-            <a:endParaRPr lang="en-US" sz="950" dirty="0"/>
+            <a:endParaRPr lang="en-US" sz="1400" dirty="0"/>
           </a:p>
         </p:txBody>
       </p:sp>
@@ -2015,8 +2015,8 @@
         </p:nvSpPr>
         <p:spPr>
           <a:xfrm>
-            <a:off x="4946904" y="4892040"/>
-            <a:ext cx="2441448" cy="384048"/>
+            <a:off x="6837883" y="4645152"/>
+            <a:ext cx="3646627" cy="438912"/>
           </a:xfrm>
           <a:prstGeom prst="roundRect">
             <a:avLst>
@@ -2042,8 +2042,8 @@
         </p:nvSpPr>
         <p:spPr>
           <a:xfrm>
-            <a:off x="4946904" y="4892040"/>
-            <a:ext cx="2441448" cy="384048"/>
+            <a:off x="6837883" y="4645152"/>
+            <a:ext cx="3646627" cy="438912"/>
           </a:xfrm>
           <a:prstGeom prst="rect">
             <a:avLst/>
@@ -2059,17 +2059,17 @@
               <a:buNone/>
             </a:pPr>
             <a:r>
-              <a:rPr lang="en-US" sz="950" dirty="0">
+              <a:rPr lang="en-US" sz="1400" dirty="0">
                 <a:solidFill>
                   <a:srgbClr val="5A5249"/>
                 </a:solidFill>
-                <a:latin typeface="游ゴシック" pitchFamily="34" charset="0"/>
-                <a:ea typeface="游ゴシック" pitchFamily="34" charset="-122"/>
-                <a:cs typeface="游ゴシック" pitchFamily="34" charset="-120"/>
+                <a:latin typeface="メイリオ" pitchFamily="34" charset="0"/>
+                <a:ea typeface="メイリオ" pitchFamily="34" charset="-122"/>
+                <a:cs typeface="メイリオ" pitchFamily="34" charset="-120"/>
               </a:rPr>
               <a:t>オンラインサロン ここちめいど 主宰</a:t>
             </a:r>
-            <a:endParaRPr lang="en-US" sz="950" dirty="0"/>
+            <a:endParaRPr lang="en-US" sz="1400" dirty="0"/>
           </a:p>
         </p:txBody>
       </p:sp>
@@ -2081,8 +2081,8 @@
         </p:nvSpPr>
         <p:spPr>
           <a:xfrm>
-            <a:off x="7534656" y="4892040"/>
-            <a:ext cx="1298448" cy="384048"/>
+            <a:off x="685800" y="5175504"/>
+            <a:ext cx="1854403" cy="438912"/>
           </a:xfrm>
           <a:prstGeom prst="roundRect">
             <a:avLst>
@@ -2108,8 +2108,8 @@
         </p:nvSpPr>
         <p:spPr>
           <a:xfrm>
-            <a:off x="7534656" y="4892040"/>
-            <a:ext cx="1298448" cy="384048"/>
+            <a:off x="685800" y="5175504"/>
+            <a:ext cx="1854403" cy="438912"/>
           </a:xfrm>
           <a:prstGeom prst="rect">
             <a:avLst/>
@@ -2125,17 +2125,17 @@
               <a:buNone/>
             </a:pPr>
             <a:r>
-              <a:rPr lang="en-US" sz="950" dirty="0">
+              <a:rPr lang="en-US" sz="1400" dirty="0">
                 <a:solidFill>
                   <a:srgbClr val="5A5249"/>
                 </a:solidFill>
-                <a:latin typeface="游ゴシック" pitchFamily="34" charset="0"/>
-                <a:ea typeface="游ゴシック" pitchFamily="34" charset="-122"/>
-                <a:cs typeface="游ゴシック" pitchFamily="34" charset="-120"/>
+                <a:latin typeface="メイリオ" pitchFamily="34" charset="0"/>
+                <a:ea typeface="メイリオ" pitchFamily="34" charset="-122"/>
+                <a:cs typeface="メイリオ" pitchFamily="34" charset="-120"/>
               </a:rPr>
               <a:t>ここちはり 代表</a:t>
             </a:r>
-            <a:endParaRPr lang="en-US" sz="950" dirty="0"/>
+            <a:endParaRPr lang="en-US" sz="1400" dirty="0"/>
           </a:p>
         </p:txBody>
       </p:sp>
@@ -2147,8 +2147,8 @@
         </p:nvSpPr>
         <p:spPr>
           <a:xfrm>
-            <a:off x="8979408" y="4892040"/>
-            <a:ext cx="2098548" cy="384048"/>
+            <a:off x="2686507" y="5175504"/>
+            <a:ext cx="3108960" cy="438912"/>
           </a:xfrm>
           <a:prstGeom prst="roundRect">
             <a:avLst>
@@ -2174,8 +2174,8 @@
         </p:nvSpPr>
         <p:spPr>
           <a:xfrm>
-            <a:off x="8979408" y="4892040"/>
-            <a:ext cx="2098548" cy="384048"/>
+            <a:off x="2686507" y="5175504"/>
+            <a:ext cx="3108960" cy="438912"/>
           </a:xfrm>
           <a:prstGeom prst="rect">
             <a:avLst/>
@@ -2191,17 +2191,17 @@
               <a:buNone/>
             </a:pPr>
             <a:r>
-              <a:rPr lang="en-US" sz="950" dirty="0">
+              <a:rPr lang="en-US" sz="1400" dirty="0">
                 <a:solidFill>
                   <a:srgbClr val="5A5249"/>
                 </a:solidFill>
-                <a:latin typeface="游ゴシック" pitchFamily="34" charset="0"/>
-                <a:ea typeface="游ゴシック" pitchFamily="34" charset="-122"/>
-                <a:cs typeface="游ゴシック" pitchFamily="34" charset="-120"/>
+                <a:latin typeface="メイリオ" pitchFamily="34" charset="0"/>
+                <a:ea typeface="メイリオ" pitchFamily="34" charset="-122"/>
+                <a:cs typeface="メイリオ" pitchFamily="34" charset="-120"/>
               </a:rPr>
               <a:t>武蔵野大学大学院 人間学 修士</a:t>
             </a:r>
-            <a:endParaRPr lang="en-US" sz="950" dirty="0"/>
+            <a:endParaRPr lang="en-US" sz="1400" dirty="0"/>
           </a:p>
         </p:txBody>
       </p:sp>
@@ -2230,17 +2230,17 @@
               <a:buNone/>
             </a:pPr>
             <a:r>
-              <a:rPr lang="en-US" sz="900" spc="100" kern="0" dirty="0">
+              <a:rPr lang="en-US" sz="1200" spc="100" kern="0" dirty="0">
                 <a:solidFill>
                   <a:srgbClr val="8B8175"/>
                 </a:solidFill>
-                <a:latin typeface="游ゴシック" pitchFamily="34" charset="0"/>
-                <a:ea typeface="游ゴシック" pitchFamily="34" charset="-122"/>
-                <a:cs typeface="游ゴシック" pitchFamily="34" charset="-120"/>
+                <a:latin typeface="メイリオ" pitchFamily="34" charset="0"/>
+                <a:ea typeface="メイリオ" pitchFamily="34" charset="-122"/>
+                <a:cs typeface="メイリオ" pitchFamily="34" charset="-120"/>
               </a:rPr>
               <a:t>米倉まな｜アポプラスステーション様 ご提案</a:t>
             </a:r>
-            <a:endParaRPr lang="en-US" sz="900" dirty="0"/>
+            <a:endParaRPr lang="en-US" sz="1200" dirty="0"/>
           </a:p>
         </p:txBody>
       </p:sp>
@@ -2269,17 +2269,17 @@
               <a:buNone/>
             </a:pPr>
             <a:r>
-              <a:rPr lang="en-US" sz="900" dirty="0">
+              <a:rPr lang="en-US" sz="1200" dirty="0">
                 <a:solidFill>
                   <a:srgbClr val="8B8175"/>
                 </a:solidFill>
-                <a:latin typeface="游ゴシック" pitchFamily="34" charset="0"/>
-                <a:ea typeface="游ゴシック" pitchFamily="34" charset="-122"/>
-                <a:cs typeface="游ゴシック" pitchFamily="34" charset="-120"/>
+                <a:latin typeface="メイリオ" pitchFamily="34" charset="0"/>
+                <a:ea typeface="メイリオ" pitchFamily="34" charset="-122"/>
+                <a:cs typeface="メイリオ" pitchFamily="34" charset="-120"/>
               </a:rPr>
               <a:t>所要 約5分</a:t>
             </a:r>
-            <a:endParaRPr lang="en-US" sz="900" dirty="0"/>
+            <a:endParaRPr lang="en-US" sz="1200" dirty="0"/>
           </a:p>
         </p:txBody>
       </p:sp>
@@ -2343,7 +2343,7 @@
         </p:nvSpPr>
         <p:spPr>
           <a:xfrm>
-            <a:off x="996696" y="402336"/>
+            <a:off x="996696" y="365760"/>
             <a:ext cx="7315200" cy="310896"/>
           </a:xfrm>
           <a:prstGeom prst="rect">
@@ -2360,17 +2360,17 @@
               <a:buNone/>
             </a:pPr>
             <a:r>
-              <a:rPr lang="en-US" sz="1000" spc="300" kern="0" dirty="0">
+              <a:rPr lang="en-US" sz="1400" spc="300" kern="0" dirty="0">
                 <a:solidFill>
                   <a:srgbClr val="8B8175"/>
                 </a:solidFill>
-                <a:latin typeface="游ゴシック" pitchFamily="34" charset="0"/>
-                <a:ea typeface="游ゴシック" pitchFamily="34" charset="-122"/>
-                <a:cs typeface="游ゴシック" pitchFamily="34" charset="-120"/>
+                <a:latin typeface="メイリオ" pitchFamily="34" charset="0"/>
+                <a:ea typeface="メイリオ" pitchFamily="34" charset="-122"/>
+                <a:cs typeface="メイリオ" pitchFamily="34" charset="-120"/>
               </a:rPr>
               <a:t>APPENDIX ／ 参考</a:t>
             </a:r>
-            <a:endParaRPr lang="en-US" sz="1000" dirty="0"/>
+            <a:endParaRPr lang="en-US" sz="1400" dirty="0"/>
           </a:p>
         </p:txBody>
       </p:sp>
@@ -2382,7 +2382,7 @@
         </p:nvSpPr>
         <p:spPr>
           <a:xfrm>
-            <a:off x="685800" y="841248"/>
+            <a:off x="685800" y="777240"/>
             <a:ext cx="10820095" cy="777240"/>
           </a:xfrm>
           <a:prstGeom prst="rect">
@@ -2403,9 +2403,9 @@
                 <a:solidFill>
                   <a:srgbClr val="2B2620"/>
                 </a:solidFill>
-                <a:latin typeface="游明朝" pitchFamily="34" charset="0"/>
-                <a:ea typeface="游明朝" pitchFamily="34" charset="-122"/>
-                <a:cs typeface="游明朝" pitchFamily="34" charset="-120"/>
+                <a:latin typeface="メイリオ" pitchFamily="34" charset="0"/>
+                <a:ea typeface="メイリオ" pitchFamily="34" charset="-122"/>
+                <a:cs typeface="メイリオ" pitchFamily="34" charset="-120"/>
               </a:rPr>
               <a:t>公開されている実績・共同研究</a:t>
             </a:r>
@@ -2421,7 +2421,7 @@
         </p:nvSpPr>
         <p:spPr>
           <a:xfrm>
-            <a:off x="685800" y="1673352"/>
+            <a:off x="685800" y="1627632"/>
             <a:ext cx="10820095" cy="7315"/>
           </a:xfrm>
           <a:prstGeom prst="rect">
@@ -2441,34 +2441,34 @@
         </p:nvSpPr>
         <p:spPr>
           <a:xfrm>
-            <a:off x="685800" y="1801368"/>
-            <a:ext cx="1005840" cy="256032"/>
-          </a:xfrm>
-          <a:prstGeom prst="rect">
-            <a:avLst/>
-          </a:prstGeom>
-          <a:noFill/>
-          <a:ln/>
-        </p:spPr>
-        <p:txBody>
-          <a:bodyPr wrap="square" lIns="0" tIns="0" rIns="0" bIns="0" rtlCol="0" anchor="ctr"/>
-          <a:lstStyle/>
-          <a:p>
-            <a:pPr indent="0" marL="0">
-              <a:buNone/>
-            </a:pPr>
-            <a:r>
-              <a:rPr lang="en-US" sz="900" b="1" spc="200" kern="0" dirty="0">
+            <a:off x="685800" y="1755648"/>
+            <a:ext cx="1143000" cy="274320"/>
+          </a:xfrm>
+          <a:prstGeom prst="rect">
+            <a:avLst/>
+          </a:prstGeom>
+          <a:noFill/>
+          <a:ln/>
+        </p:spPr>
+        <p:txBody>
+          <a:bodyPr wrap="square" lIns="0" tIns="0" rIns="0" bIns="0" rtlCol="0" anchor="ctr"/>
+          <a:lstStyle/>
+          <a:p>
+            <a:pPr indent="0" marL="0">
+              <a:buNone/>
+            </a:pPr>
+            <a:r>
+              <a:rPr lang="en-US" sz="1400" b="1" spc="100" kern="0" dirty="0">
                 <a:solidFill>
                   <a:srgbClr val="9C5446"/>
                 </a:solidFill>
-                <a:latin typeface="游ゴシック" pitchFamily="34" charset="0"/>
-                <a:ea typeface="游ゴシック" pitchFamily="34" charset="-122"/>
-                <a:cs typeface="游ゴシック" pitchFamily="34" charset="-120"/>
+                <a:latin typeface="メイリオ" pitchFamily="34" charset="0"/>
+                <a:ea typeface="メイリオ" pitchFamily="34" charset="-122"/>
+                <a:cs typeface="メイリオ" pitchFamily="34" charset="-120"/>
               </a:rPr>
               <a:t>共同研究</a:t>
             </a:r>
-            <a:endParaRPr lang="en-US" sz="900" dirty="0"/>
+            <a:endParaRPr lang="en-US" sz="1400" dirty="0"/>
           </a:p>
         </p:txBody>
       </p:sp>
@@ -2480,7 +2480,46 @@
         </p:nvSpPr>
         <p:spPr>
           <a:xfrm>
-            <a:off x="1828800" y="1764792"/>
+            <a:off x="1828800" y="1719072"/>
+            <a:ext cx="9674352" cy="329184"/>
+          </a:xfrm>
+          <a:prstGeom prst="rect">
+            <a:avLst/>
+          </a:prstGeom>
+          <a:noFill/>
+          <a:ln/>
+        </p:spPr>
+        <p:txBody>
+          <a:bodyPr wrap="square" lIns="0" tIns="0" rIns="0" bIns="0" rtlCol="0" anchor="ctr"/>
+          <a:lstStyle/>
+          <a:p>
+            <a:pPr indent="0" marL="0">
+              <a:buNone/>
+            </a:pPr>
+            <a:r>
+              <a:rPr lang="en-US" sz="1400" dirty="0">
+                <a:solidFill>
+                  <a:srgbClr val="2B2620"/>
+                </a:solidFill>
+                <a:latin typeface="メイリオ" pitchFamily="34" charset="0"/>
+                <a:ea typeface="メイリオ" pitchFamily="34" charset="-122"/>
+                <a:cs typeface="メイリオ" pitchFamily="34" charset="-120"/>
+              </a:rPr>
+              <a:t>開業鍼灸院でのメンタルヘルスの可能性を検証する共同研究</a:t>
+            </a:r>
+            <a:endParaRPr lang="en-US" sz="1400" dirty="0"/>
+          </a:p>
+        </p:txBody>
+      </p:sp>
+      <p:sp>
+        <p:nvSpPr>
+          <p:cNvPr id="8" name="Text 6"/>
+          <p:cNvSpPr txBox="1"/>
+          <p:nvPr/>
+        </p:nvSpPr>
+        <p:spPr>
+          <a:xfrm>
+            <a:off x="1828800" y="2048256"/>
             <a:ext cx="9674352" cy="274320"/>
           </a:xfrm>
           <a:prstGeom prst="rect">
@@ -2497,56 +2536,17 @@
               <a:buNone/>
             </a:pPr>
             <a:r>
-              <a:rPr lang="en-US" sz="1100" dirty="0">
-                <a:solidFill>
-                  <a:srgbClr val="2B2620"/>
-                </a:solidFill>
-                <a:latin typeface="游ゴシック" pitchFamily="34" charset="0"/>
-                <a:ea typeface="游ゴシック" pitchFamily="34" charset="-122"/>
-                <a:cs typeface="游ゴシック" pitchFamily="34" charset="-120"/>
-              </a:rPr>
-              <a:t>開業鍼灸院でのメンタルヘルスの可能性を検証する共同研究</a:t>
-            </a:r>
-            <a:endParaRPr lang="en-US" sz="1100" dirty="0"/>
-          </a:p>
-        </p:txBody>
-      </p:sp>
-      <p:sp>
-        <p:nvSpPr>
-          <p:cNvPr id="8" name="Text 6"/>
-          <p:cNvSpPr txBox="1"/>
-          <p:nvPr/>
-        </p:nvSpPr>
-        <p:spPr>
-          <a:xfrm>
-            <a:off x="1828800" y="2057400"/>
-            <a:ext cx="9674352" cy="274320"/>
-          </a:xfrm>
-          <a:prstGeom prst="rect">
-            <a:avLst/>
-          </a:prstGeom>
-          <a:noFill/>
-          <a:ln/>
-        </p:spPr>
-        <p:txBody>
-          <a:bodyPr wrap="square" lIns="0" tIns="0" rIns="0" bIns="0" rtlCol="0" anchor="ctr"/>
-          <a:lstStyle/>
-          <a:p>
-            <a:pPr indent="0" marL="0">
-              <a:buNone/>
-            </a:pPr>
-            <a:r>
-              <a:rPr lang="en-US" sz="900" dirty="0">
+              <a:rPr lang="en-US" sz="1200" dirty="0">
                 <a:solidFill>
                   <a:srgbClr val="8B8175"/>
                 </a:solidFill>
-                <a:latin typeface="游ゴシック" pitchFamily="34" charset="0"/>
-                <a:ea typeface="游ゴシック" pitchFamily="34" charset="-122"/>
-                <a:cs typeface="游ゴシック" pitchFamily="34" charset="-120"/>
+                <a:latin typeface="メイリオ" pitchFamily="34" charset="0"/>
+                <a:ea typeface="メイリオ" pitchFamily="34" charset="-122"/>
+                <a:cs typeface="メイリオ" pitchFamily="34" charset="-120"/>
               </a:rPr>
               <a:t>ここちめいど／東京有明医療大学／理化学研究所／ケアクル　― PR TIMES</a:t>
             </a:r>
-            <a:endParaRPr lang="en-US" sz="900" dirty="0"/>
+            <a:endParaRPr lang="en-US" sz="1200" dirty="0"/>
           </a:p>
         </p:txBody>
       </p:sp>
@@ -2558,7 +2558,7 @@
         </p:nvSpPr>
         <p:spPr>
           <a:xfrm>
-            <a:off x="685800" y="2404872"/>
+            <a:off x="685800" y="2359152"/>
             <a:ext cx="10820095" cy="7315"/>
           </a:xfrm>
           <a:prstGeom prst="rect">
@@ -2578,34 +2578,34 @@
         </p:nvSpPr>
         <p:spPr>
           <a:xfrm>
-            <a:off x="685800" y="2532888"/>
-            <a:ext cx="1005840" cy="256032"/>
-          </a:xfrm>
-          <a:prstGeom prst="rect">
-            <a:avLst/>
-          </a:prstGeom>
-          <a:noFill/>
-          <a:ln/>
-        </p:spPr>
-        <p:txBody>
-          <a:bodyPr wrap="square" lIns="0" tIns="0" rIns="0" bIns="0" rtlCol="0" anchor="ctr"/>
-          <a:lstStyle/>
-          <a:p>
-            <a:pPr indent="0" marL="0">
-              <a:buNone/>
-            </a:pPr>
-            <a:r>
-              <a:rPr lang="en-US" sz="900" b="1" spc="200" kern="0" dirty="0">
+            <a:off x="685800" y="2487168"/>
+            <a:ext cx="1143000" cy="274320"/>
+          </a:xfrm>
+          <a:prstGeom prst="rect">
+            <a:avLst/>
+          </a:prstGeom>
+          <a:noFill/>
+          <a:ln/>
+        </p:spPr>
+        <p:txBody>
+          <a:bodyPr wrap="square" lIns="0" tIns="0" rIns="0" bIns="0" rtlCol="0" anchor="ctr"/>
+          <a:lstStyle/>
+          <a:p>
+            <a:pPr indent="0" marL="0">
+              <a:buNone/>
+            </a:pPr>
+            <a:r>
+              <a:rPr lang="en-US" sz="1400" b="1" spc="100" kern="0" dirty="0">
                 <a:solidFill>
                   <a:srgbClr val="9C5446"/>
                 </a:solidFill>
-                <a:latin typeface="游ゴシック" pitchFamily="34" charset="0"/>
-                <a:ea typeface="游ゴシック" pitchFamily="34" charset="-122"/>
-                <a:cs typeface="游ゴシック" pitchFamily="34" charset="-120"/>
+                <a:latin typeface="メイリオ" pitchFamily="34" charset="0"/>
+                <a:ea typeface="メイリオ" pitchFamily="34" charset="-122"/>
+                <a:cs typeface="メイリオ" pitchFamily="34" charset="-120"/>
               </a:rPr>
               <a:t>共同研究</a:t>
             </a:r>
-            <a:endParaRPr lang="en-US" sz="900" dirty="0"/>
+            <a:endParaRPr lang="en-US" sz="1400" dirty="0"/>
           </a:p>
         </p:txBody>
       </p:sp>
@@ -2617,7 +2617,46 @@
         </p:nvSpPr>
         <p:spPr>
           <a:xfrm>
-            <a:off x="1828800" y="2496312"/>
+            <a:off x="1828800" y="2450592"/>
+            <a:ext cx="9674352" cy="329184"/>
+          </a:xfrm>
+          <a:prstGeom prst="rect">
+            <a:avLst/>
+          </a:prstGeom>
+          <a:noFill/>
+          <a:ln/>
+        </p:spPr>
+        <p:txBody>
+          <a:bodyPr wrap="square" lIns="0" tIns="0" rIns="0" bIns="0" rtlCol="0" anchor="ctr"/>
+          <a:lstStyle/>
+          <a:p>
+            <a:pPr indent="0" marL="0">
+              <a:buNone/>
+            </a:pPr>
+            <a:r>
+              <a:rPr lang="en-US" sz="1400" dirty="0">
+                <a:solidFill>
+                  <a:srgbClr val="2B2620"/>
+                </a:solidFill>
+                <a:latin typeface="メイリオ" pitchFamily="34" charset="0"/>
+                <a:ea typeface="メイリオ" pitchFamily="34" charset="-122"/>
+                <a:cs typeface="メイリオ" pitchFamily="34" charset="-120"/>
+              </a:rPr>
+              <a:t>鍼灸症例データベース構築プロジェクト</a:t>
+            </a:r>
+            <a:endParaRPr lang="en-US" sz="1400" dirty="0"/>
+          </a:p>
+        </p:txBody>
+      </p:sp>
+      <p:sp>
+        <p:nvSpPr>
+          <p:cNvPr id="12" name="Text 10"/>
+          <p:cNvSpPr txBox="1"/>
+          <p:nvPr/>
+        </p:nvSpPr>
+        <p:spPr>
+          <a:xfrm>
+            <a:off x="1828800" y="2779776"/>
             <a:ext cx="9674352" cy="274320"/>
           </a:xfrm>
           <a:prstGeom prst="rect">
@@ -2634,56 +2673,17 @@
               <a:buNone/>
             </a:pPr>
             <a:r>
-              <a:rPr lang="en-US" sz="1100" dirty="0">
-                <a:solidFill>
-                  <a:srgbClr val="2B2620"/>
-                </a:solidFill>
-                <a:latin typeface="游ゴシック" pitchFamily="34" charset="0"/>
-                <a:ea typeface="游ゴシック" pitchFamily="34" charset="-122"/>
-                <a:cs typeface="游ゴシック" pitchFamily="34" charset="-120"/>
-              </a:rPr>
-              <a:t>鍼灸症例データベース構築プロジェクト</a:t>
-            </a:r>
-            <a:endParaRPr lang="en-US" sz="1100" dirty="0"/>
-          </a:p>
-        </p:txBody>
-      </p:sp>
-      <p:sp>
-        <p:nvSpPr>
-          <p:cNvPr id="12" name="Text 10"/>
-          <p:cNvSpPr txBox="1"/>
-          <p:nvPr/>
-        </p:nvSpPr>
-        <p:spPr>
-          <a:xfrm>
-            <a:off x="1828800" y="2788920"/>
-            <a:ext cx="9674352" cy="274320"/>
-          </a:xfrm>
-          <a:prstGeom prst="rect">
-            <a:avLst/>
-          </a:prstGeom>
-          <a:noFill/>
-          <a:ln/>
-        </p:spPr>
-        <p:txBody>
-          <a:bodyPr wrap="square" lIns="0" tIns="0" rIns="0" bIns="0" rtlCol="0" anchor="ctr"/>
-          <a:lstStyle/>
-          <a:p>
-            <a:pPr indent="0" marL="0">
-              <a:buNone/>
-            </a:pPr>
-            <a:r>
-              <a:rPr lang="en-US" sz="900" dirty="0">
+              <a:rPr lang="en-US" sz="1200" dirty="0">
                 <a:solidFill>
                   <a:srgbClr val="8B8175"/>
                 </a:solidFill>
-                <a:latin typeface="游ゴシック" pitchFamily="34" charset="0"/>
-                <a:ea typeface="游ゴシック" pitchFamily="34" charset="-122"/>
-                <a:cs typeface="游ゴシック" pitchFamily="34" charset="-120"/>
+                <a:latin typeface="メイリオ" pitchFamily="34" charset="0"/>
+                <a:ea typeface="メイリオ" pitchFamily="34" charset="-122"/>
+                <a:cs typeface="メイリオ" pitchFamily="34" charset="-120"/>
               </a:rPr>
               <a:t>ケアクル／東京有明医療大学 松浦悠人／玉川大学 柴田健一／ここちめいど 米倉まな　― PR TIMES（2025.4）</a:t>
             </a:r>
-            <a:endParaRPr lang="en-US" sz="900" dirty="0"/>
+            <a:endParaRPr lang="en-US" sz="1200" dirty="0"/>
           </a:p>
         </p:txBody>
       </p:sp>
@@ -2695,7 +2695,7 @@
         </p:nvSpPr>
         <p:spPr>
           <a:xfrm>
-            <a:off x="685800" y="3136392"/>
+            <a:off x="685800" y="3090672"/>
             <a:ext cx="10820095" cy="7315"/>
           </a:xfrm>
           <a:prstGeom prst="rect">
@@ -2715,34 +2715,34 @@
         </p:nvSpPr>
         <p:spPr>
           <a:xfrm>
-            <a:off x="685800" y="3264408"/>
-            <a:ext cx="1005840" cy="256032"/>
-          </a:xfrm>
-          <a:prstGeom prst="rect">
-            <a:avLst/>
-          </a:prstGeom>
-          <a:noFill/>
-          <a:ln/>
-        </p:spPr>
-        <p:txBody>
-          <a:bodyPr wrap="square" lIns="0" tIns="0" rIns="0" bIns="0" rtlCol="0" anchor="ctr"/>
-          <a:lstStyle/>
-          <a:p>
-            <a:pPr indent="0" marL="0">
-              <a:buNone/>
-            </a:pPr>
-            <a:r>
-              <a:rPr lang="en-US" sz="900" b="1" spc="200" kern="0" dirty="0">
+            <a:off x="685800" y="3218688"/>
+            <a:ext cx="1143000" cy="274320"/>
+          </a:xfrm>
+          <a:prstGeom prst="rect">
+            <a:avLst/>
+          </a:prstGeom>
+          <a:noFill/>
+          <a:ln/>
+        </p:spPr>
+        <p:txBody>
+          <a:bodyPr wrap="square" lIns="0" tIns="0" rIns="0" bIns="0" rtlCol="0" anchor="ctr"/>
+          <a:lstStyle/>
+          <a:p>
+            <a:pPr indent="0" marL="0">
+              <a:buNone/>
+            </a:pPr>
+            <a:r>
+              <a:rPr lang="en-US" sz="1400" b="1" spc="100" kern="0" dirty="0">
                 <a:solidFill>
                   <a:srgbClr val="9C5446"/>
                 </a:solidFill>
-                <a:latin typeface="游ゴシック" pitchFamily="34" charset="0"/>
-                <a:ea typeface="游ゴシック" pitchFamily="34" charset="-122"/>
-                <a:cs typeface="游ゴシック" pitchFamily="34" charset="-120"/>
+                <a:latin typeface="メイリオ" pitchFamily="34" charset="0"/>
+                <a:ea typeface="メイリオ" pitchFamily="34" charset="-122"/>
+                <a:cs typeface="メイリオ" pitchFamily="34" charset="-120"/>
               </a:rPr>
               <a:t>企業連携</a:t>
             </a:r>
-            <a:endParaRPr lang="en-US" sz="900" dirty="0"/>
+            <a:endParaRPr lang="en-US" sz="1400" dirty="0"/>
           </a:p>
         </p:txBody>
       </p:sp>
@@ -2754,7 +2754,46 @@
         </p:nvSpPr>
         <p:spPr>
           <a:xfrm>
-            <a:off x="1828800" y="3227832"/>
+            <a:off x="1828800" y="3182112"/>
+            <a:ext cx="9674352" cy="329184"/>
+          </a:xfrm>
+          <a:prstGeom prst="rect">
+            <a:avLst/>
+          </a:prstGeom>
+          <a:noFill/>
+          <a:ln/>
+        </p:spPr>
+        <p:txBody>
+          <a:bodyPr wrap="square" lIns="0" tIns="0" rIns="0" bIns="0" rtlCol="0" anchor="ctr"/>
+          <a:lstStyle/>
+          <a:p>
+            <a:pPr indent="0" marL="0">
+              <a:buNone/>
+            </a:pPr>
+            <a:r>
+              <a:rPr lang="en-US" sz="1400" dirty="0">
+                <a:solidFill>
+                  <a:srgbClr val="2B2620"/>
+                </a:solidFill>
+                <a:latin typeface="メイリオ" pitchFamily="34" charset="0"/>
+                <a:ea typeface="メイリオ" pitchFamily="34" charset="-122"/>
+                <a:cs typeface="メイリオ" pitchFamily="34" charset="-120"/>
+              </a:rPr>
+              <a:t>オンライン対話サービス「ThirdTalk」特別対談番組に出演</a:t>
+            </a:r>
+            <a:endParaRPr lang="en-US" sz="1400" dirty="0"/>
+          </a:p>
+        </p:txBody>
+      </p:sp>
+      <p:sp>
+        <p:nvSpPr>
+          <p:cNvPr id="16" name="Text 14"/>
+          <p:cNvSpPr txBox="1"/>
+          <p:nvPr/>
+        </p:nvSpPr>
+        <p:spPr>
+          <a:xfrm>
+            <a:off x="1828800" y="3511296"/>
             <a:ext cx="9674352" cy="274320"/>
           </a:xfrm>
           <a:prstGeom prst="rect">
@@ -2771,56 +2810,17 @@
               <a:buNone/>
             </a:pPr>
             <a:r>
-              <a:rPr lang="en-US" sz="1100" dirty="0">
-                <a:solidFill>
-                  <a:srgbClr val="2B2620"/>
-                </a:solidFill>
-                <a:latin typeface="游ゴシック" pitchFamily="34" charset="0"/>
-                <a:ea typeface="游ゴシック" pitchFamily="34" charset="-122"/>
-                <a:cs typeface="游ゴシック" pitchFamily="34" charset="-120"/>
-              </a:rPr>
-              <a:t>オンライン対話サービス「ThirdTalk」特別対談番組に出演</a:t>
-            </a:r>
-            <a:endParaRPr lang="en-US" sz="1100" dirty="0"/>
-          </a:p>
-        </p:txBody>
-      </p:sp>
-      <p:sp>
-        <p:nvSpPr>
-          <p:cNvPr id="16" name="Text 14"/>
-          <p:cNvSpPr txBox="1"/>
-          <p:nvPr/>
-        </p:nvSpPr>
-        <p:spPr>
-          <a:xfrm>
-            <a:off x="1828800" y="3520440"/>
-            <a:ext cx="9674352" cy="274320"/>
-          </a:xfrm>
-          <a:prstGeom prst="rect">
-            <a:avLst/>
-          </a:prstGeom>
-          <a:noFill/>
-          <a:ln/>
-        </p:spPr>
-        <p:txBody>
-          <a:bodyPr wrap="square" lIns="0" tIns="0" rIns="0" bIns="0" rtlCol="0" anchor="ctr"/>
-          <a:lstStyle/>
-          <a:p>
-            <a:pPr indent="0" marL="0">
-              <a:buNone/>
-            </a:pPr>
-            <a:r>
-              <a:rPr lang="en-US" sz="900" dirty="0">
+              <a:rPr lang="en-US" sz="1200" dirty="0">
                 <a:solidFill>
                   <a:srgbClr val="8B8175"/>
                 </a:solidFill>
-                <a:latin typeface="游ゴシック" pitchFamily="34" charset="0"/>
-                <a:ea typeface="游ゴシック" pitchFamily="34" charset="-122"/>
-                <a:cs typeface="游ゴシック" pitchFamily="34" charset="-120"/>
+                <a:latin typeface="メイリオ" pitchFamily="34" charset="0"/>
+                <a:ea typeface="メイリオ" pitchFamily="34" charset="-122"/>
+                <a:cs typeface="メイリオ" pitchFamily="34" charset="-120"/>
               </a:rPr>
               <a:t>株式会社ファンコミュニケーションズ ニュースリリース（2022.8.26）</a:t>
             </a:r>
-            <a:endParaRPr lang="en-US" sz="900" dirty="0"/>
+            <a:endParaRPr lang="en-US" sz="1200" dirty="0"/>
           </a:p>
         </p:txBody>
       </p:sp>
@@ -2832,7 +2832,7 @@
         </p:nvSpPr>
         <p:spPr>
           <a:xfrm>
-            <a:off x="685800" y="3867912"/>
+            <a:off x="685800" y="3822192"/>
             <a:ext cx="10820095" cy="7315"/>
           </a:xfrm>
           <a:prstGeom prst="rect">
@@ -2852,34 +2852,34 @@
         </p:nvSpPr>
         <p:spPr>
           <a:xfrm>
-            <a:off x="685800" y="3995928"/>
-            <a:ext cx="1005840" cy="256032"/>
-          </a:xfrm>
-          <a:prstGeom prst="rect">
-            <a:avLst/>
-          </a:prstGeom>
-          <a:noFill/>
-          <a:ln/>
-        </p:spPr>
-        <p:txBody>
-          <a:bodyPr wrap="square" lIns="0" tIns="0" rIns="0" bIns="0" rtlCol="0" anchor="ctr"/>
-          <a:lstStyle/>
-          <a:p>
-            <a:pPr indent="0" marL="0">
-              <a:buNone/>
-            </a:pPr>
-            <a:r>
-              <a:rPr lang="en-US" sz="900" b="1" spc="200" kern="0" dirty="0">
+            <a:off x="685800" y="3950208"/>
+            <a:ext cx="1143000" cy="274320"/>
+          </a:xfrm>
+          <a:prstGeom prst="rect">
+            <a:avLst/>
+          </a:prstGeom>
+          <a:noFill/>
+          <a:ln/>
+        </p:spPr>
+        <p:txBody>
+          <a:bodyPr wrap="square" lIns="0" tIns="0" rIns="0" bIns="0" rtlCol="0" anchor="ctr"/>
+          <a:lstStyle/>
+          <a:p>
+            <a:pPr indent="0" marL="0">
+              <a:buNone/>
+            </a:pPr>
+            <a:r>
+              <a:rPr lang="en-US" sz="1400" b="1" spc="100" kern="0" dirty="0">
                 <a:solidFill>
                   <a:srgbClr val="9C5446"/>
                 </a:solidFill>
-                <a:latin typeface="游ゴシック" pitchFamily="34" charset="0"/>
-                <a:ea typeface="游ゴシック" pitchFamily="34" charset="-122"/>
-                <a:cs typeface="游ゴシック" pitchFamily="34" charset="-120"/>
+                <a:latin typeface="メイリオ" pitchFamily="34" charset="0"/>
+                <a:ea typeface="メイリオ" pitchFamily="34" charset="-122"/>
+                <a:cs typeface="メイリオ" pitchFamily="34" charset="-120"/>
               </a:rPr>
               <a:t>社会貢献</a:t>
             </a:r>
-            <a:endParaRPr lang="en-US" sz="900" dirty="0"/>
+            <a:endParaRPr lang="en-US" sz="1400" dirty="0"/>
           </a:p>
         </p:txBody>
       </p:sp>
@@ -2891,7 +2891,46 @@
         </p:nvSpPr>
         <p:spPr>
           <a:xfrm>
-            <a:off x="1828800" y="3959352"/>
+            <a:off x="1828800" y="3913632"/>
+            <a:ext cx="9674352" cy="329184"/>
+          </a:xfrm>
+          <a:prstGeom prst="rect">
+            <a:avLst/>
+          </a:prstGeom>
+          <a:noFill/>
+          <a:ln/>
+        </p:spPr>
+        <p:txBody>
+          <a:bodyPr wrap="square" lIns="0" tIns="0" rIns="0" bIns="0" rtlCol="0" anchor="ctr"/>
+          <a:lstStyle/>
+          <a:p>
+            <a:pPr indent="0" marL="0">
+              <a:buNone/>
+            </a:pPr>
+            <a:r>
+              <a:rPr lang="en-US" sz="1400" dirty="0">
+                <a:solidFill>
+                  <a:srgbClr val="2B2620"/>
+                </a:solidFill>
+                <a:latin typeface="メイリオ" pitchFamily="34" charset="0"/>
+                <a:ea typeface="メイリオ" pitchFamily="34" charset="-122"/>
+                <a:cs typeface="メイリオ" pitchFamily="34" charset="-120"/>
+              </a:rPr>
+              <a:t>パパゲーノ・アンバサダー認定 第一号（合同会社ここちめいど）</a:t>
+            </a:r>
+            <a:endParaRPr lang="en-US" sz="1400" dirty="0"/>
+          </a:p>
+        </p:txBody>
+      </p:sp>
+      <p:sp>
+        <p:nvSpPr>
+          <p:cNvPr id="20" name="Text 18"/>
+          <p:cNvSpPr txBox="1"/>
+          <p:nvPr/>
+        </p:nvSpPr>
+        <p:spPr>
+          <a:xfrm>
+            <a:off x="1828800" y="4242816"/>
             <a:ext cx="9674352" cy="274320"/>
           </a:xfrm>
           <a:prstGeom prst="rect">
@@ -2908,56 +2947,17 @@
               <a:buNone/>
             </a:pPr>
             <a:r>
-              <a:rPr lang="en-US" sz="1100" dirty="0">
-                <a:solidFill>
-                  <a:srgbClr val="2B2620"/>
-                </a:solidFill>
-                <a:latin typeface="游ゴシック" pitchFamily="34" charset="0"/>
-                <a:ea typeface="游ゴシック" pitchFamily="34" charset="-122"/>
-                <a:cs typeface="游ゴシック" pitchFamily="34" charset="-120"/>
-              </a:rPr>
-              <a:t>パパゲーノ・アンバサダー認定 第一号（合同会社ここちめいど）</a:t>
-            </a:r>
-            <a:endParaRPr lang="en-US" sz="1100" dirty="0"/>
-          </a:p>
-        </p:txBody>
-      </p:sp>
-      <p:sp>
-        <p:nvSpPr>
-          <p:cNvPr id="20" name="Text 18"/>
-          <p:cNvSpPr txBox="1"/>
-          <p:nvPr/>
-        </p:nvSpPr>
-        <p:spPr>
-          <a:xfrm>
-            <a:off x="1828800" y="4251960"/>
-            <a:ext cx="9674352" cy="274320"/>
-          </a:xfrm>
-          <a:prstGeom prst="rect">
-            <a:avLst/>
-          </a:prstGeom>
-          <a:noFill/>
-          <a:ln/>
-        </p:spPr>
-        <p:txBody>
-          <a:bodyPr wrap="square" lIns="0" tIns="0" rIns="0" bIns="0" rtlCol="0" anchor="ctr"/>
-          <a:lstStyle/>
-          <a:p>
-            <a:pPr indent="0" marL="0">
-              <a:buNone/>
-            </a:pPr>
-            <a:r>
-              <a:rPr lang="en-US" sz="900" dirty="0">
+              <a:rPr lang="en-US" sz="1200" dirty="0">
                 <a:solidFill>
                   <a:srgbClr val="8B8175"/>
                 </a:solidFill>
-                <a:latin typeface="游ゴシック" pitchFamily="34" charset="0"/>
-                <a:ea typeface="游ゴシック" pitchFamily="34" charset="-122"/>
-                <a:cs typeface="游ゴシック" pitchFamily="34" charset="-120"/>
+                <a:latin typeface="メイリオ" pitchFamily="34" charset="0"/>
+                <a:ea typeface="メイリオ" pitchFamily="34" charset="-122"/>
+                <a:cs typeface="メイリオ" pitchFamily="34" charset="-120"/>
               </a:rPr>
               <a:t>株式会社パパゲーノ プレスリリース</a:t>
             </a:r>
-            <a:endParaRPr lang="en-US" sz="900" dirty="0"/>
+            <a:endParaRPr lang="en-US" sz="1200" dirty="0"/>
           </a:p>
         </p:txBody>
       </p:sp>
@@ -2969,7 +2969,7 @@
         </p:nvSpPr>
         <p:spPr>
           <a:xfrm>
-            <a:off x="685800" y="4599432"/>
+            <a:off x="685800" y="4553712"/>
             <a:ext cx="10820095" cy="7315"/>
           </a:xfrm>
           <a:prstGeom prst="rect">
@@ -2989,34 +2989,34 @@
         </p:nvSpPr>
         <p:spPr>
           <a:xfrm>
-            <a:off x="685800" y="4727448"/>
-            <a:ext cx="1005840" cy="256032"/>
-          </a:xfrm>
-          <a:prstGeom prst="rect">
-            <a:avLst/>
-          </a:prstGeom>
-          <a:noFill/>
-          <a:ln/>
-        </p:spPr>
-        <p:txBody>
-          <a:bodyPr wrap="square" lIns="0" tIns="0" rIns="0" bIns="0" rtlCol="0" anchor="ctr"/>
-          <a:lstStyle/>
-          <a:p>
-            <a:pPr indent="0" marL="0">
-              <a:buNone/>
-            </a:pPr>
-            <a:r>
-              <a:rPr lang="en-US" sz="900" b="1" spc="200" kern="0" dirty="0">
+            <a:off x="685800" y="4681728"/>
+            <a:ext cx="1143000" cy="274320"/>
+          </a:xfrm>
+          <a:prstGeom prst="rect">
+            <a:avLst/>
+          </a:prstGeom>
+          <a:noFill/>
+          <a:ln/>
+        </p:spPr>
+        <p:txBody>
+          <a:bodyPr wrap="square" lIns="0" tIns="0" rIns="0" bIns="0" rtlCol="0" anchor="ctr"/>
+          <a:lstStyle/>
+          <a:p>
+            <a:pPr indent="0" marL="0">
+              <a:buNone/>
+            </a:pPr>
+            <a:r>
+              <a:rPr lang="en-US" sz="1400" b="1" spc="100" kern="0" dirty="0">
                 <a:solidFill>
                   <a:srgbClr val="9C5446"/>
                 </a:solidFill>
-                <a:latin typeface="游ゴシック" pitchFamily="34" charset="0"/>
-                <a:ea typeface="游ゴシック" pitchFamily="34" charset="-122"/>
-                <a:cs typeface="游ゴシック" pitchFamily="34" charset="-120"/>
+                <a:latin typeface="メイリオ" pitchFamily="34" charset="0"/>
+                <a:ea typeface="メイリオ" pitchFamily="34" charset="-122"/>
+                <a:cs typeface="メイリオ" pitchFamily="34" charset="-120"/>
               </a:rPr>
               <a:t>寄稿</a:t>
             </a:r>
-            <a:endParaRPr lang="en-US" sz="900" dirty="0"/>
+            <a:endParaRPr lang="en-US" sz="1400" dirty="0"/>
           </a:p>
         </p:txBody>
       </p:sp>
@@ -3028,7 +3028,46 @@
         </p:nvSpPr>
         <p:spPr>
           <a:xfrm>
-            <a:off x="1828800" y="4690872"/>
+            <a:off x="1828800" y="4645152"/>
+            <a:ext cx="9674352" cy="329184"/>
+          </a:xfrm>
+          <a:prstGeom prst="rect">
+            <a:avLst/>
+          </a:prstGeom>
+          <a:noFill/>
+          <a:ln/>
+        </p:spPr>
+        <p:txBody>
+          <a:bodyPr wrap="square" lIns="0" tIns="0" rIns="0" bIns="0" rtlCol="0" anchor="ctr"/>
+          <a:lstStyle/>
+          <a:p>
+            <a:pPr indent="0" marL="0">
+              <a:buNone/>
+            </a:pPr>
+            <a:r>
+              <a:rPr lang="en-US" sz="1400" dirty="0">
+                <a:solidFill>
+                  <a:srgbClr val="2B2620"/>
+                </a:solidFill>
+                <a:latin typeface="メイリオ" pitchFamily="34" charset="0"/>
+                <a:ea typeface="メイリオ" pitchFamily="34" charset="-122"/>
+                <a:cs typeface="メイリオ" pitchFamily="34" charset="-120"/>
+              </a:rPr>
+              <a:t>『精神看護』特集「鍼灸は、なぜ「うつ」に効くのだろうか」</a:t>
+            </a:r>
+            <a:endParaRPr lang="en-US" sz="1400" dirty="0"/>
+          </a:p>
+        </p:txBody>
+      </p:sp>
+      <p:sp>
+        <p:nvSpPr>
+          <p:cNvPr id="24" name="Text 22"/>
+          <p:cNvSpPr txBox="1"/>
+          <p:nvPr/>
+        </p:nvSpPr>
+        <p:spPr>
+          <a:xfrm>
+            <a:off x="1828800" y="4974336"/>
             <a:ext cx="9674352" cy="274320"/>
           </a:xfrm>
           <a:prstGeom prst="rect">
@@ -3045,56 +3084,17 @@
               <a:buNone/>
             </a:pPr>
             <a:r>
-              <a:rPr lang="en-US" sz="1100" dirty="0">
-                <a:solidFill>
-                  <a:srgbClr val="2B2620"/>
-                </a:solidFill>
-                <a:latin typeface="游ゴシック" pitchFamily="34" charset="0"/>
-                <a:ea typeface="游ゴシック" pitchFamily="34" charset="-122"/>
-                <a:cs typeface="游ゴシック" pitchFamily="34" charset="-120"/>
-              </a:rPr>
-              <a:t>『精神看護』特集「鍼灸は、なぜ「うつ」に効くのだろうか」</a:t>
-            </a:r>
-            <a:endParaRPr lang="en-US" sz="1100" dirty="0"/>
-          </a:p>
-        </p:txBody>
-      </p:sp>
-      <p:sp>
-        <p:nvSpPr>
-          <p:cNvPr id="24" name="Text 22"/>
-          <p:cNvSpPr txBox="1"/>
-          <p:nvPr/>
-        </p:nvSpPr>
-        <p:spPr>
-          <a:xfrm>
-            <a:off x="1828800" y="4983480"/>
-            <a:ext cx="9674352" cy="274320"/>
-          </a:xfrm>
-          <a:prstGeom prst="rect">
-            <a:avLst/>
-          </a:prstGeom>
-          <a:noFill/>
-          <a:ln/>
-        </p:spPr>
-        <p:txBody>
-          <a:bodyPr wrap="square" lIns="0" tIns="0" rIns="0" bIns="0" rtlCol="0" anchor="ctr"/>
-          <a:lstStyle/>
-          <a:p>
-            <a:pPr indent="0" marL="0">
-              <a:buNone/>
-            </a:pPr>
-            <a:r>
-              <a:rPr lang="en-US" sz="900" dirty="0">
+              <a:rPr lang="en-US" sz="1200" dirty="0">
                 <a:solidFill>
                   <a:srgbClr val="8B8175"/>
                 </a:solidFill>
-                <a:latin typeface="游ゴシック" pitchFamily="34" charset="0"/>
-                <a:ea typeface="游ゴシック" pitchFamily="34" charset="-122"/>
-                <a:cs typeface="游ゴシック" pitchFamily="34" charset="-120"/>
+                <a:latin typeface="メイリオ" pitchFamily="34" charset="0"/>
+                <a:ea typeface="メイリオ" pitchFamily="34" charset="-122"/>
+                <a:cs typeface="メイリオ" pitchFamily="34" charset="-120"/>
               </a:rPr>
               <a:t>医学書院　Vol.28 No.3（2025.5）／ レポート「障害と美の多様性」Vol.28 No.5（2025.9）</a:t>
             </a:r>
-            <a:endParaRPr lang="en-US" sz="900" dirty="0"/>
+            <a:endParaRPr lang="en-US" sz="1200" dirty="0"/>
           </a:p>
         </p:txBody>
       </p:sp>
@@ -3106,7 +3106,7 @@
         </p:nvSpPr>
         <p:spPr>
           <a:xfrm>
-            <a:off x="685800" y="5330952"/>
+            <a:off x="685800" y="5285232"/>
             <a:ext cx="10820095" cy="7315"/>
           </a:xfrm>
           <a:prstGeom prst="rect">
@@ -3126,34 +3126,34 @@
         </p:nvSpPr>
         <p:spPr>
           <a:xfrm>
-            <a:off x="685800" y="5458968"/>
-            <a:ext cx="1005840" cy="256032"/>
-          </a:xfrm>
-          <a:prstGeom prst="rect">
-            <a:avLst/>
-          </a:prstGeom>
-          <a:noFill/>
-          <a:ln/>
-        </p:spPr>
-        <p:txBody>
-          <a:bodyPr wrap="square" lIns="0" tIns="0" rIns="0" bIns="0" rtlCol="0" anchor="ctr"/>
-          <a:lstStyle/>
-          <a:p>
-            <a:pPr indent="0" marL="0">
-              <a:buNone/>
-            </a:pPr>
-            <a:r>
-              <a:rPr lang="en-US" sz="900" b="1" spc="200" kern="0" dirty="0">
+            <a:off x="685800" y="5413248"/>
+            <a:ext cx="1143000" cy="274320"/>
+          </a:xfrm>
+          <a:prstGeom prst="rect">
+            <a:avLst/>
+          </a:prstGeom>
+          <a:noFill/>
+          <a:ln/>
+        </p:spPr>
+        <p:txBody>
+          <a:bodyPr wrap="square" lIns="0" tIns="0" rIns="0" bIns="0" rtlCol="0" anchor="ctr"/>
+          <a:lstStyle/>
+          <a:p>
+            <a:pPr indent="0" marL="0">
+              <a:buNone/>
+            </a:pPr>
+            <a:r>
+              <a:rPr lang="en-US" sz="1400" b="1" spc="100" kern="0" dirty="0">
                 <a:solidFill>
                   <a:srgbClr val="9C5446"/>
                 </a:solidFill>
-                <a:latin typeface="游ゴシック" pitchFamily="34" charset="0"/>
-                <a:ea typeface="游ゴシック" pitchFamily="34" charset="-122"/>
-                <a:cs typeface="游ゴシック" pitchFamily="34" charset="-120"/>
+                <a:latin typeface="メイリオ" pitchFamily="34" charset="0"/>
+                <a:ea typeface="メイリオ" pitchFamily="34" charset="-122"/>
+                <a:cs typeface="メイリオ" pitchFamily="34" charset="-120"/>
               </a:rPr>
               <a:t>学会</a:t>
             </a:r>
-            <a:endParaRPr lang="en-US" sz="900" dirty="0"/>
+            <a:endParaRPr lang="en-US" sz="1400" dirty="0"/>
           </a:p>
         </p:txBody>
       </p:sp>
@@ -3165,7 +3165,46 @@
         </p:nvSpPr>
         <p:spPr>
           <a:xfrm>
-            <a:off x="1828800" y="5422392"/>
+            <a:off x="1828800" y="5376672"/>
+            <a:ext cx="9674352" cy="329184"/>
+          </a:xfrm>
+          <a:prstGeom prst="rect">
+            <a:avLst/>
+          </a:prstGeom>
+          <a:noFill/>
+          <a:ln/>
+        </p:spPr>
+        <p:txBody>
+          <a:bodyPr wrap="square" lIns="0" tIns="0" rIns="0" bIns="0" rtlCol="0" anchor="ctr"/>
+          <a:lstStyle/>
+          <a:p>
+            <a:pPr indent="0" marL="0">
+              <a:buNone/>
+            </a:pPr>
+            <a:r>
+              <a:rPr lang="en-US" sz="1400" dirty="0">
+                <a:solidFill>
+                  <a:srgbClr val="2B2620"/>
+                </a:solidFill>
+                <a:latin typeface="メイリオ" pitchFamily="34" charset="0"/>
+                <a:ea typeface="メイリオ" pitchFamily="34" charset="-122"/>
+                <a:cs typeface="メイリオ" pitchFamily="34" charset="-120"/>
+              </a:rPr>
+              <a:t>全日本鍼灸学会／日本うつ病学会（ポスター発表）／日本精神神経学会 シンポジスト</a:t>
+            </a:r>
+            <a:endParaRPr lang="en-US" sz="1400" dirty="0"/>
+          </a:p>
+        </p:txBody>
+      </p:sp>
+      <p:sp>
+        <p:nvSpPr>
+          <p:cNvPr id="28" name="Text 26"/>
+          <p:cNvSpPr txBox="1"/>
+          <p:nvPr/>
+        </p:nvSpPr>
+        <p:spPr>
+          <a:xfrm>
+            <a:off x="1828800" y="5705856"/>
             <a:ext cx="9674352" cy="274320"/>
           </a:xfrm>
           <a:prstGeom prst="rect">
@@ -3182,56 +3221,17 @@
               <a:buNone/>
             </a:pPr>
             <a:r>
-              <a:rPr lang="en-US" sz="1100" dirty="0">
-                <a:solidFill>
-                  <a:srgbClr val="2B2620"/>
-                </a:solidFill>
-                <a:latin typeface="游ゴシック" pitchFamily="34" charset="0"/>
-                <a:ea typeface="游ゴシック" pitchFamily="34" charset="-122"/>
-                <a:cs typeface="游ゴシック" pitchFamily="34" charset="-120"/>
-              </a:rPr>
-              <a:t>全日本鍼灸学会（2024・2025・2026）／ 日本うつ病学会（ポスター発表）／ 日本精神神経学会 鍼灸シンポジウム シンポジスト</a:t>
-            </a:r>
-            <a:endParaRPr lang="en-US" sz="1100" dirty="0"/>
-          </a:p>
-        </p:txBody>
-      </p:sp>
-      <p:sp>
-        <p:nvSpPr>
-          <p:cNvPr id="28" name="Text 26"/>
-          <p:cNvSpPr txBox="1"/>
-          <p:nvPr/>
-        </p:nvSpPr>
-        <p:spPr>
-          <a:xfrm>
-            <a:off x="1828800" y="5715000"/>
-            <a:ext cx="9674352" cy="274320"/>
-          </a:xfrm>
-          <a:prstGeom prst="rect">
-            <a:avLst/>
-          </a:prstGeom>
-          <a:noFill/>
-          <a:ln/>
-        </p:spPr>
-        <p:txBody>
-          <a:bodyPr wrap="square" lIns="0" tIns="0" rIns="0" bIns="0" rtlCol="0" anchor="ctr"/>
-          <a:lstStyle/>
-          <a:p>
-            <a:pPr indent="0" marL="0">
-              <a:buNone/>
-            </a:pPr>
-            <a:r>
-              <a:rPr lang="en-US" sz="900" dirty="0">
+              <a:rPr lang="en-US" sz="1200" dirty="0">
                 <a:solidFill>
                   <a:srgbClr val="8B8175"/>
                 </a:solidFill>
-                <a:latin typeface="游ゴシック" pitchFamily="34" charset="0"/>
-                <a:ea typeface="游ゴシック" pitchFamily="34" charset="-122"/>
-                <a:cs typeface="游ゴシック" pitchFamily="34" charset="-120"/>
-              </a:rPr>
-              <a:t>うつと不安症状を有する患者の実態調査 第3報・第4報 ほか　― 日本精神神経学会は2026.6 登壇</a:t>
-            </a:r>
-            <a:endParaRPr lang="en-US" sz="900" dirty="0"/>
+                <a:latin typeface="メイリオ" pitchFamily="34" charset="0"/>
+                <a:ea typeface="メイリオ" pitchFamily="34" charset="-122"/>
+                <a:cs typeface="メイリオ" pitchFamily="34" charset="-120"/>
+              </a:rPr>
+              <a:t>うつと不安症状を有する患者の実態調査 第3報・第4報（2024・2025・2026）　― 日本精神神経学会は2026.6 登壇</a:t>
+            </a:r>
+            <a:endParaRPr lang="en-US" sz="1200" dirty="0"/>
           </a:p>
         </p:txBody>
       </p:sp>
@@ -3243,7 +3243,7 @@
         </p:nvSpPr>
         <p:spPr>
           <a:xfrm>
-            <a:off x="685800" y="6062472"/>
+            <a:off x="685800" y="6016752"/>
             <a:ext cx="10820095" cy="7315"/>
           </a:xfrm>
           <a:prstGeom prst="rect">
@@ -3280,17 +3280,17 @@
               <a:buNone/>
             </a:pPr>
             <a:r>
-              <a:rPr lang="en-US" sz="900" dirty="0">
+              <a:rPr lang="en-US" sz="1200" dirty="0">
                 <a:solidFill>
                   <a:srgbClr val="8B8175"/>
                 </a:solidFill>
-                <a:latin typeface="游ゴシック" pitchFamily="34" charset="0"/>
-                <a:ea typeface="游ゴシック" pitchFamily="34" charset="-122"/>
-                <a:cs typeface="游ゴシック" pitchFamily="34" charset="-120"/>
+                <a:latin typeface="メイリオ" pitchFamily="34" charset="0"/>
+                <a:ea typeface="メイリオ" pitchFamily="34" charset="-122"/>
+                <a:cs typeface="メイリオ" pitchFamily="34" charset="-120"/>
               </a:rPr>
               <a:t>参考資料（本編5分には含みません）</a:t>
             </a:r>
-            <a:endParaRPr lang="en-US" sz="900" dirty="0"/>
+            <a:endParaRPr lang="en-US" sz="1200" dirty="0"/>
           </a:p>
         </p:txBody>
       </p:sp>
@@ -3319,17 +3319,17 @@
               <a:buNone/>
             </a:pPr>
             <a:r>
-              <a:rPr lang="en-US" sz="900" spc="100" kern="0" dirty="0">
+              <a:rPr lang="en-US" sz="1200" spc="100" kern="0" dirty="0">
                 <a:solidFill>
                   <a:srgbClr val="8B8175"/>
                 </a:solidFill>
-                <a:latin typeface="游ゴシック" pitchFamily="34" charset="0"/>
-                <a:ea typeface="游ゴシック" pitchFamily="34" charset="-122"/>
-                <a:cs typeface="游ゴシック" pitchFamily="34" charset="-120"/>
+                <a:latin typeface="メイリオ" pitchFamily="34" charset="0"/>
+                <a:ea typeface="メイリオ" pitchFamily="34" charset="-122"/>
+                <a:cs typeface="メイリオ" pitchFamily="34" charset="-120"/>
               </a:rPr>
               <a:t>米倉まな｜アポプラスステーション様 ご提案</a:t>
             </a:r>
-            <a:endParaRPr lang="en-US" sz="900" dirty="0"/>
+            <a:endParaRPr lang="en-US" sz="1200" dirty="0"/>
           </a:p>
         </p:txBody>
       </p:sp>
@@ -3393,7 +3393,7 @@
         </p:nvSpPr>
         <p:spPr>
           <a:xfrm>
-            <a:off x="996696" y="402336"/>
+            <a:off x="996696" y="365760"/>
             <a:ext cx="7315200" cy="310896"/>
           </a:xfrm>
           <a:prstGeom prst="rect">
@@ -3410,13 +3410,13 @@
               <a:buNone/>
             </a:pPr>
             <a:r>
-              <a:rPr lang="en-US" sz="1000" b="1" spc="200" kern="0" dirty="0">
+              <a:rPr lang="en-US" sz="1400" b="1" spc="200" kern="0" dirty="0">
                 <a:solidFill>
                   <a:srgbClr val="C97B68"/>
                 </a:solidFill>
-                <a:latin typeface="游明朝" pitchFamily="34" charset="0"/>
-                <a:ea typeface="游明朝" pitchFamily="34" charset="-122"/>
-                <a:cs typeface="游明朝" pitchFamily="34" charset="-120"/>
+                <a:latin typeface="メイリオ" pitchFamily="34" charset="0"/>
+                <a:ea typeface="メイリオ" pitchFamily="34" charset="-122"/>
+                <a:cs typeface="メイリオ" pitchFamily="34" charset="-120"/>
               </a:rPr>
               <a:t>01   </a:t>
             </a:r>
@@ -3424,17 +3424,17 @@
               <a:buNone/>
             </a:pPr>
             <a:r>
-              <a:rPr lang="en-US" sz="1000" spc="300" kern="0" dirty="0">
+              <a:rPr lang="en-US" sz="1400" spc="300" kern="0" dirty="0">
                 <a:solidFill>
                   <a:srgbClr val="BDB2A2"/>
                 </a:solidFill>
-                <a:latin typeface="游ゴシック" pitchFamily="34" charset="0"/>
-                <a:ea typeface="游ゴシック" pitchFamily="34" charset="-122"/>
-                <a:cs typeface="游ゴシック" pitchFamily="34" charset="-120"/>
+                <a:latin typeface="メイリオ" pitchFamily="34" charset="0"/>
+                <a:ea typeface="メイリオ" pitchFamily="34" charset="-122"/>
+                <a:cs typeface="メイリオ" pitchFamily="34" charset="-120"/>
               </a:rPr>
               <a:t>ORIGIN</a:t>
             </a:r>
-            <a:endParaRPr lang="en-US" sz="1000" dirty="0"/>
+            <a:endParaRPr lang="en-US" sz="1400" dirty="0"/>
           </a:p>
         </p:txBody>
       </p:sp>
@@ -3446,7 +3446,7 @@
         </p:nvSpPr>
         <p:spPr>
           <a:xfrm>
-            <a:off x="685800" y="841248"/>
+            <a:off x="685800" y="777240"/>
             <a:ext cx="10820095" cy="777240"/>
           </a:xfrm>
           <a:prstGeom prst="rect">
@@ -3467,9 +3467,9 @@
                 <a:solidFill>
                   <a:srgbClr val="F3ECE0"/>
                 </a:solidFill>
-                <a:latin typeface="游明朝" pitchFamily="34" charset="0"/>
-                <a:ea typeface="游明朝" pitchFamily="34" charset="-122"/>
-                <a:cs typeface="游明朝" pitchFamily="34" charset="-120"/>
+                <a:latin typeface="メイリオ" pitchFamily="34" charset="0"/>
+                <a:ea typeface="メイリオ" pitchFamily="34" charset="-122"/>
+                <a:cs typeface="メイリオ" pitchFamily="34" charset="-120"/>
               </a:rPr>
               <a:t>私は2013年ごろまで、患者の側にいました</a:t>
             </a:r>
@@ -3502,17 +3502,17 @@
               <a:buNone/>
             </a:pPr>
             <a:r>
-              <a:rPr lang="en-US" sz="1400" b="1" dirty="0">
+              <a:rPr lang="en-US" sz="1600" b="1" dirty="0">
                 <a:solidFill>
                   <a:srgbClr val="C97B68"/>
                 </a:solidFill>
-                <a:latin typeface="游明朝" pitchFamily="34" charset="0"/>
-                <a:ea typeface="游明朝" pitchFamily="34" charset="-122"/>
-                <a:cs typeface="游明朝" pitchFamily="34" charset="-120"/>
+                <a:latin typeface="メイリオ" pitchFamily="34" charset="0"/>
+                <a:ea typeface="メイリオ" pitchFamily="34" charset="-122"/>
+                <a:cs typeface="メイリオ" pitchFamily="34" charset="-120"/>
               </a:rPr>
               <a:t>01</a:t>
             </a:r>
-            <a:endParaRPr lang="en-US" sz="1400" dirty="0"/>
+            <a:endParaRPr lang="en-US" sz="1600" dirty="0"/>
           </a:p>
         </p:txBody>
       </p:sp>
@@ -3544,13 +3544,13 @@
               <a:buNone/>
             </a:pPr>
             <a:r>
-              <a:rPr lang="en-US" sz="1150" dirty="0">
+              <a:rPr lang="en-US" sz="1400" dirty="0">
                 <a:solidFill>
                   <a:srgbClr val="BDB2A2"/>
                 </a:solidFill>
-                <a:latin typeface="游ゴシック" pitchFamily="34" charset="0"/>
-                <a:ea typeface="游ゴシック" pitchFamily="34" charset="-122"/>
-                <a:cs typeface="游ゴシック" pitchFamily="34" charset="-120"/>
+                <a:latin typeface="メイリオ" pitchFamily="34" charset="0"/>
+                <a:ea typeface="メイリオ" pitchFamily="34" charset="-122"/>
+                <a:cs typeface="メイリオ" pitchFamily="34" charset="-120"/>
               </a:rPr>
               <a:t>精神疾患の当事者として、</a:t>
             </a:r>
@@ -3561,17 +3561,17 @@
               <a:buNone/>
             </a:pPr>
             <a:r>
-              <a:rPr lang="en-US" sz="1150" b="1" dirty="0">
+              <a:rPr lang="en-US" sz="1400" b="1" dirty="0">
                 <a:solidFill>
                   <a:srgbClr val="F3ECE0"/>
                 </a:solidFill>
-                <a:latin typeface="游ゴシック" pitchFamily="34" charset="0"/>
-                <a:ea typeface="游ゴシック" pitchFamily="34" charset="-122"/>
-                <a:cs typeface="游ゴシック" pitchFamily="34" charset="-120"/>
+                <a:latin typeface="メイリオ" pitchFamily="34" charset="0"/>
+                <a:ea typeface="メイリオ" pitchFamily="34" charset="-122"/>
+                <a:cs typeface="メイリオ" pitchFamily="34" charset="-120"/>
               </a:rPr>
               <a:t>約8年間さまよいました。</a:t>
             </a:r>
-            <a:endParaRPr lang="en-US" sz="1150" dirty="0"/>
+            <a:endParaRPr lang="en-US" sz="1400" dirty="0"/>
           </a:p>
         </p:txBody>
       </p:sp>
@@ -3600,17 +3600,17 @@
               <a:buNone/>
             </a:pPr>
             <a:r>
-              <a:rPr lang="en-US" sz="1400" b="1" dirty="0">
+              <a:rPr lang="en-US" sz="1600" b="1" dirty="0">
                 <a:solidFill>
                   <a:srgbClr val="C97B68"/>
                 </a:solidFill>
-                <a:latin typeface="游明朝" pitchFamily="34" charset="0"/>
-                <a:ea typeface="游明朝" pitchFamily="34" charset="-122"/>
-                <a:cs typeface="游明朝" pitchFamily="34" charset="-120"/>
+                <a:latin typeface="メイリオ" pitchFamily="34" charset="0"/>
+                <a:ea typeface="メイリオ" pitchFamily="34" charset="-122"/>
+                <a:cs typeface="メイリオ" pitchFamily="34" charset="-120"/>
               </a:rPr>
               <a:t>02</a:t>
             </a:r>
-            <a:endParaRPr lang="en-US" sz="1400" dirty="0"/>
+            <a:endParaRPr lang="en-US" sz="1600" dirty="0"/>
           </a:p>
         </p:txBody>
       </p:sp>
@@ -3642,17 +3642,17 @@
               <a:buNone/>
             </a:pPr>
             <a:r>
-              <a:rPr lang="en-US" sz="1150" dirty="0">
+              <a:rPr lang="en-US" sz="1400" dirty="0">
                 <a:solidFill>
                   <a:srgbClr val="BDB2A2"/>
                 </a:solidFill>
-                <a:latin typeface="游ゴシック" pitchFamily="34" charset="0"/>
-                <a:ea typeface="游ゴシック" pitchFamily="34" charset="-122"/>
-                <a:cs typeface="游ゴシック" pitchFamily="34" charset="-120"/>
-              </a:rPr>
-              <a:t>病院にも通いました。よくならない時期が、とても長く続きました。</a:t>
-            </a:r>
-            <a:endParaRPr lang="en-US" sz="1150" dirty="0"/>
+                <a:latin typeface="メイリオ" pitchFamily="34" charset="0"/>
+                <a:ea typeface="メイリオ" pitchFamily="34" charset="-122"/>
+                <a:cs typeface="メイリオ" pitchFamily="34" charset="-120"/>
+              </a:rPr>
+              <a:t>病院に通っても、よくならない時期が長く続きました。</a:t>
+            </a:r>
+            <a:endParaRPr lang="en-US" sz="1400" dirty="0"/>
           </a:p>
         </p:txBody>
       </p:sp>
@@ -3681,17 +3681,17 @@
               <a:buNone/>
             </a:pPr>
             <a:r>
-              <a:rPr lang="en-US" sz="1400" b="1" dirty="0">
+              <a:rPr lang="en-US" sz="1600" b="1" dirty="0">
                 <a:solidFill>
                   <a:srgbClr val="C97B68"/>
                 </a:solidFill>
-                <a:latin typeface="游明朝" pitchFamily="34" charset="0"/>
-                <a:ea typeface="游明朝" pitchFamily="34" charset="-122"/>
-                <a:cs typeface="游明朝" pitchFamily="34" charset="-120"/>
+                <a:latin typeface="メイリオ" pitchFamily="34" charset="0"/>
+                <a:ea typeface="メイリオ" pitchFamily="34" charset="-122"/>
+                <a:cs typeface="メイリオ" pitchFamily="34" charset="-120"/>
               </a:rPr>
               <a:t>03</a:t>
             </a:r>
-            <a:endParaRPr lang="en-US" sz="1400" dirty="0"/>
+            <a:endParaRPr lang="en-US" sz="1600" dirty="0"/>
           </a:p>
         </p:txBody>
       </p:sp>
@@ -3723,17 +3723,17 @@
               <a:buNone/>
             </a:pPr>
             <a:r>
-              <a:rPr lang="en-US" sz="1150" dirty="0">
+              <a:rPr lang="en-US" sz="1400" dirty="0">
                 <a:solidFill>
                   <a:srgbClr val="BDB2A2"/>
                 </a:solidFill>
-                <a:latin typeface="游ゴシック" pitchFamily="34" charset="0"/>
-                <a:ea typeface="游ゴシック" pitchFamily="34" charset="-122"/>
-                <a:cs typeface="游ゴシック" pitchFamily="34" charset="-120"/>
-              </a:rPr>
-              <a:t>最後に私を助けたのが、鍼灸でした。いまこの仕事をしているのは、そのためです。</a:t>
-            </a:r>
-            <a:endParaRPr lang="en-US" sz="1150" dirty="0"/>
+                <a:latin typeface="メイリオ" pitchFamily="34" charset="0"/>
+                <a:ea typeface="メイリオ" pitchFamily="34" charset="-122"/>
+                <a:cs typeface="メイリオ" pitchFamily="34" charset="-120"/>
+              </a:rPr>
+              <a:t>最後に私を助けたのが、鍼灸でした。</a:t>
+            </a:r>
+            <a:endParaRPr lang="en-US" sz="1400" dirty="0"/>
           </a:p>
         </p:txBody>
       </p:sp>
@@ -3769,9 +3769,9 @@
                 <a:solidFill>
                   <a:srgbClr val="F3ECE0"/>
                 </a:solidFill>
-                <a:latin typeface="游明朝" pitchFamily="34" charset="0"/>
-                <a:ea typeface="游明朝" pitchFamily="34" charset="-122"/>
-                <a:cs typeface="游明朝" pitchFamily="34" charset="-120"/>
+                <a:latin typeface="メイリオ" pitchFamily="34" charset="0"/>
+                <a:ea typeface="メイリオ" pitchFamily="34" charset="-122"/>
+                <a:cs typeface="メイリオ" pitchFamily="34" charset="-120"/>
               </a:rPr>
               <a:t>「もっと早く、</a:t>
             </a:r>
@@ -3789,9 +3789,9 @@
                 <a:solidFill>
                   <a:srgbClr val="F3ECE0"/>
                 </a:solidFill>
-                <a:latin typeface="游明朝" pitchFamily="34" charset="0"/>
-                <a:ea typeface="游明朝" pitchFamily="34" charset="-122"/>
-                <a:cs typeface="游明朝" pitchFamily="34" charset="-120"/>
+                <a:latin typeface="メイリオ" pitchFamily="34" charset="0"/>
+                <a:ea typeface="メイリオ" pitchFamily="34" charset="-122"/>
+                <a:cs typeface="メイリオ" pitchFamily="34" charset="-120"/>
               </a:rPr>
               <a:t>鍼灸に出会いたかった」</a:t>
             </a:r>
@@ -3827,17 +3827,17 @@
               <a:buNone/>
             </a:pPr>
             <a:r>
-              <a:rPr lang="en-US" sz="1100" dirty="0">
+              <a:rPr lang="en-US" sz="1400" dirty="0">
                 <a:solidFill>
                   <a:srgbClr val="BDB2A2"/>
                 </a:solidFill>
-                <a:latin typeface="游ゴシック" pitchFamily="34" charset="0"/>
-                <a:ea typeface="游ゴシック" pitchFamily="34" charset="-122"/>
-                <a:cs typeface="游ゴシック" pitchFamily="34" charset="-120"/>
-              </a:rPr>
-              <a:t>患者さんから、いちばん多く言われる言葉です。この「もっと早く」をなくすことが、私の仕事だと思っています。</a:t>
-            </a:r>
-            <a:endParaRPr lang="en-US" sz="1100" dirty="0"/>
+                <a:latin typeface="メイリオ" pitchFamily="34" charset="0"/>
+                <a:ea typeface="メイリオ" pitchFamily="34" charset="-122"/>
+                <a:cs typeface="メイリオ" pitchFamily="34" charset="-120"/>
+              </a:rPr>
+              <a:t>患者さんから、いちばん多く言われる言葉です。この「もっと早く」をなくすのが私の仕事です。</a:t>
+            </a:r>
+            <a:endParaRPr lang="en-US" sz="1400" dirty="0"/>
           </a:p>
         </p:txBody>
       </p:sp>
@@ -3866,17 +3866,17 @@
               <a:buNone/>
             </a:pPr>
             <a:r>
-              <a:rPr lang="en-US" sz="900" spc="100" kern="0" dirty="0">
+              <a:rPr lang="en-US" sz="1200" spc="100" kern="0" dirty="0">
                 <a:solidFill>
                   <a:srgbClr val="BDB2A2"/>
                 </a:solidFill>
-                <a:latin typeface="游ゴシック" pitchFamily="34" charset="0"/>
-                <a:ea typeface="游ゴシック" pitchFamily="34" charset="-122"/>
-                <a:cs typeface="游ゴシック" pitchFamily="34" charset="-120"/>
+                <a:latin typeface="メイリオ" pitchFamily="34" charset="0"/>
+                <a:ea typeface="メイリオ" pitchFamily="34" charset="-122"/>
+                <a:cs typeface="メイリオ" pitchFamily="34" charset="-120"/>
               </a:rPr>
               <a:t>米倉まな｜アポプラスステーション様 ご提案</a:t>
             </a:r>
-            <a:endParaRPr lang="en-US" sz="900" dirty="0"/>
+            <a:endParaRPr lang="en-US" sz="1200" dirty="0"/>
           </a:p>
         </p:txBody>
       </p:sp>
@@ -3905,17 +3905,17 @@
               <a:buNone/>
             </a:pPr>
             <a:r>
-              <a:rPr lang="en-US" sz="900" dirty="0">
+              <a:rPr lang="en-US" sz="1200" dirty="0">
                 <a:solidFill>
                   <a:srgbClr val="BDB2A2"/>
                 </a:solidFill>
-                <a:latin typeface="游ゴシック" pitchFamily="34" charset="0"/>
-                <a:ea typeface="游ゴシック" pitchFamily="34" charset="-122"/>
-                <a:cs typeface="游ゴシック" pitchFamily="34" charset="-120"/>
+                <a:latin typeface="メイリオ" pitchFamily="34" charset="0"/>
+                <a:ea typeface="メイリオ" pitchFamily="34" charset="-122"/>
+                <a:cs typeface="メイリオ" pitchFamily="34" charset="-120"/>
               </a:rPr>
               <a:t>0:20 → 0:55</a:t>
             </a:r>
-            <a:endParaRPr lang="en-US" sz="900" dirty="0"/>
+            <a:endParaRPr lang="en-US" sz="1200" dirty="0"/>
           </a:p>
         </p:txBody>
       </p:sp>
@@ -3979,7 +3979,7 @@
         </p:nvSpPr>
         <p:spPr>
           <a:xfrm>
-            <a:off x="996696" y="402336"/>
+            <a:off x="996696" y="365760"/>
             <a:ext cx="7315200" cy="310896"/>
           </a:xfrm>
           <a:prstGeom prst="rect">
@@ -3996,13 +3996,13 @@
               <a:buNone/>
             </a:pPr>
             <a:r>
-              <a:rPr lang="en-US" sz="1000" b="1" spc="200" kern="0" dirty="0">
+              <a:rPr lang="en-US" sz="1400" b="1" spc="200" kern="0" dirty="0">
                 <a:solidFill>
                   <a:srgbClr val="9C5446"/>
                 </a:solidFill>
-                <a:latin typeface="游明朝" pitchFamily="34" charset="0"/>
-                <a:ea typeface="游明朝" pitchFamily="34" charset="-122"/>
-                <a:cs typeface="游明朝" pitchFamily="34" charset="-120"/>
+                <a:latin typeface="メイリオ" pitchFamily="34" charset="0"/>
+                <a:ea typeface="メイリオ" pitchFamily="34" charset="-122"/>
+                <a:cs typeface="メイリオ" pitchFamily="34" charset="-120"/>
               </a:rPr>
               <a:t>02   </a:t>
             </a:r>
@@ -4010,17 +4010,17 @@
               <a:buNone/>
             </a:pPr>
             <a:r>
-              <a:rPr lang="en-US" sz="1000" spc="300" kern="0" dirty="0">
+              <a:rPr lang="en-US" sz="1400" spc="300" kern="0" dirty="0">
                 <a:solidFill>
                   <a:srgbClr val="8B8175"/>
                 </a:solidFill>
-                <a:latin typeface="游ゴシック" pitchFamily="34" charset="0"/>
-                <a:ea typeface="游ゴシック" pitchFamily="34" charset="-122"/>
-                <a:cs typeface="游ゴシック" pitchFamily="34" charset="-120"/>
+                <a:latin typeface="メイリオ" pitchFamily="34" charset="0"/>
+                <a:ea typeface="メイリオ" pitchFamily="34" charset="-122"/>
+                <a:cs typeface="メイリオ" pitchFamily="34" charset="-120"/>
               </a:rPr>
               <a:t>PROFILE</a:t>
             </a:r>
-            <a:endParaRPr lang="en-US" sz="1000" dirty="0"/>
+            <a:endParaRPr lang="en-US" sz="1400" dirty="0"/>
           </a:p>
         </p:txBody>
       </p:sp>
@@ -4032,7 +4032,7 @@
         </p:nvSpPr>
         <p:spPr>
           <a:xfrm>
-            <a:off x="685800" y="841248"/>
+            <a:off x="685800" y="777240"/>
             <a:ext cx="10820095" cy="777240"/>
           </a:xfrm>
           <a:prstGeom prst="rect">
@@ -4053,9 +4053,9 @@
                 <a:solidFill>
                   <a:srgbClr val="2B2620"/>
                 </a:solidFill>
-                <a:latin typeface="游明朝" pitchFamily="34" charset="0"/>
-                <a:ea typeface="游明朝" pitchFamily="34" charset="-122"/>
-                <a:cs typeface="游明朝" pitchFamily="34" charset="-120"/>
+                <a:latin typeface="メイリオ" pitchFamily="34" charset="0"/>
+                <a:ea typeface="メイリオ" pitchFamily="34" charset="-122"/>
+                <a:cs typeface="メイリオ" pitchFamily="34" charset="-120"/>
               </a:rPr>
               <a:t>臨床・育成・研究の3本を、11年まわしてきました</a:t>
             </a:r>
@@ -4071,12 +4071,12 @@
         </p:nvSpPr>
         <p:spPr>
           <a:xfrm>
-            <a:off x="685800" y="1737360"/>
-            <a:ext cx="3456432" cy="2286000"/>
+            <a:off x="685800" y="1691640"/>
+            <a:ext cx="3456432" cy="2560320"/>
           </a:xfrm>
           <a:prstGeom prst="roundRect">
             <a:avLst>
-              <a:gd name="adj" fmla="val 2000"/>
+              <a:gd name="adj" fmla="val 1786"/>
             </a:avLst>
           </a:prstGeom>
           <a:solidFill>
@@ -4098,34 +4098,34 @@
         </p:nvSpPr>
         <p:spPr>
           <a:xfrm>
-            <a:off x="941832" y="1938528"/>
-            <a:ext cx="2944368" cy="237744"/>
-          </a:xfrm>
-          <a:prstGeom prst="rect">
-            <a:avLst/>
-          </a:prstGeom>
-          <a:noFill/>
-          <a:ln/>
-        </p:spPr>
-        <p:txBody>
-          <a:bodyPr wrap="square" lIns="0" tIns="0" rIns="0" bIns="0" rtlCol="0" anchor="ctr"/>
-          <a:lstStyle/>
-          <a:p>
-            <a:pPr indent="0" marL="0">
-              <a:buNone/>
-            </a:pPr>
-            <a:r>
-              <a:rPr lang="en-US" sz="900" b="1" spc="200" kern="0" dirty="0">
+            <a:off x="941832" y="1856232"/>
+            <a:ext cx="2944368" cy="274320"/>
+          </a:xfrm>
+          <a:prstGeom prst="rect">
+            <a:avLst/>
+          </a:prstGeom>
+          <a:noFill/>
+          <a:ln/>
+        </p:spPr>
+        <p:txBody>
+          <a:bodyPr wrap="square" lIns="0" tIns="0" rIns="0" bIns="0" rtlCol="0" anchor="ctr"/>
+          <a:lstStyle/>
+          <a:p>
+            <a:pPr indent="0" marL="0">
+              <a:buNone/>
+            </a:pPr>
+            <a:r>
+              <a:rPr lang="en-US" sz="1400" b="1" spc="100" kern="0" dirty="0">
                 <a:solidFill>
                   <a:srgbClr val="9C5446"/>
                 </a:solidFill>
-                <a:latin typeface="游ゴシック" pitchFamily="34" charset="0"/>
-                <a:ea typeface="游ゴシック" pitchFamily="34" charset="-122"/>
-                <a:cs typeface="游ゴシック" pitchFamily="34" charset="-120"/>
+                <a:latin typeface="メイリオ" pitchFamily="34" charset="0"/>
+                <a:ea typeface="メイリオ" pitchFamily="34" charset="-122"/>
+                <a:cs typeface="メイリオ" pitchFamily="34" charset="-120"/>
               </a:rPr>
               <a:t>臨床</a:t>
             </a:r>
-            <a:endParaRPr lang="en-US" sz="900" dirty="0"/>
+            <a:endParaRPr lang="en-US" sz="1400" dirty="0"/>
           </a:p>
         </p:txBody>
       </p:sp>
@@ -4137,7 +4137,7 @@
         </p:nvSpPr>
         <p:spPr>
           <a:xfrm>
-            <a:off x="941832" y="2212848"/>
+            <a:off x="941832" y="2185416"/>
             <a:ext cx="2944368" cy="457200"/>
           </a:xfrm>
           <a:prstGeom prst="rect">
@@ -4157,17 +4157,17 @@
               <a:buNone/>
             </a:pPr>
             <a:r>
-              <a:rPr lang="en-US" sz="1500" b="1" dirty="0">
+              <a:rPr lang="en-US" sz="1700" b="1" dirty="0">
                 <a:solidFill>
                   <a:srgbClr val="2B2620"/>
                 </a:solidFill>
-                <a:latin typeface="游明朝" pitchFamily="34" charset="0"/>
-                <a:ea typeface="游明朝" pitchFamily="34" charset="-122"/>
-                <a:cs typeface="游明朝" pitchFamily="34" charset="-120"/>
+                <a:latin typeface="メイリオ" pitchFamily="34" charset="0"/>
+                <a:ea typeface="メイリオ" pitchFamily="34" charset="-122"/>
+                <a:cs typeface="メイリオ" pitchFamily="34" charset="-120"/>
               </a:rPr>
               <a:t>はりきゅう処ここちめいど</a:t>
             </a:r>
-            <a:endParaRPr lang="en-US" sz="1500" dirty="0"/>
+            <a:endParaRPr lang="en-US" sz="1700" dirty="0"/>
           </a:p>
         </p:txBody>
       </p:sp>
@@ -4179,8 +4179,8 @@
         </p:nvSpPr>
         <p:spPr>
           <a:xfrm>
-            <a:off x="941832" y="2724912"/>
-            <a:ext cx="2944368" cy="1097280"/>
+            <a:off x="941832" y="2697480"/>
+            <a:ext cx="2944368" cy="1353312"/>
           </a:xfrm>
           <a:prstGeom prst="rect">
             <a:avLst/>
@@ -4199,17 +4199,17 @@
               <a:buNone/>
             </a:pPr>
             <a:r>
-              <a:rPr lang="en-US" sz="1050" dirty="0">
+              <a:rPr lang="en-US" sz="1400" dirty="0">
                 <a:solidFill>
                   <a:srgbClr val="5A5249"/>
                 </a:solidFill>
-                <a:latin typeface="游ゴシック" pitchFamily="34" charset="0"/>
-                <a:ea typeface="游ゴシック" pitchFamily="34" charset="-122"/>
-                <a:cs typeface="游ゴシック" pitchFamily="34" charset="-120"/>
-              </a:rPr>
-              <a:t>三重県四日市市。2015年開院、夜22時まで。心の不調を主訴とする患者を中心に診ています。2026年9月に町田院を開院予定。</a:t>
-            </a:r>
-            <a:endParaRPr lang="en-US" sz="1050" dirty="0"/>
+                <a:latin typeface="メイリオ" pitchFamily="34" charset="0"/>
+                <a:ea typeface="メイリオ" pitchFamily="34" charset="-122"/>
+                <a:cs typeface="メイリオ" pitchFamily="34" charset="-120"/>
+              </a:rPr>
+              <a:t>三重県四日市市。2015年開院、夜22時まで。心の不調を主訴とする方が中心です。2026年9月に町田院を開院予定。</a:t>
+            </a:r>
+            <a:endParaRPr lang="en-US" sz="1400" dirty="0"/>
           </a:p>
         </p:txBody>
       </p:sp>
@@ -4221,12 +4221,12 @@
         </p:nvSpPr>
         <p:spPr>
           <a:xfrm>
-            <a:off x="4370832" y="1737360"/>
-            <a:ext cx="3456432" cy="2286000"/>
+            <a:off x="4370832" y="1691640"/>
+            <a:ext cx="3456432" cy="2560320"/>
           </a:xfrm>
           <a:prstGeom prst="roundRect">
             <a:avLst>
-              <a:gd name="adj" fmla="val 2000"/>
+              <a:gd name="adj" fmla="val 1786"/>
             </a:avLst>
           </a:prstGeom>
           <a:solidFill>
@@ -4248,34 +4248,34 @@
         </p:nvSpPr>
         <p:spPr>
           <a:xfrm>
-            <a:off x="4626864" y="1938528"/>
-            <a:ext cx="2944368" cy="237744"/>
-          </a:xfrm>
-          <a:prstGeom prst="rect">
-            <a:avLst/>
-          </a:prstGeom>
-          <a:noFill/>
-          <a:ln/>
-        </p:spPr>
-        <p:txBody>
-          <a:bodyPr wrap="square" lIns="0" tIns="0" rIns="0" bIns="0" rtlCol="0" anchor="ctr"/>
-          <a:lstStyle/>
-          <a:p>
-            <a:pPr indent="0" marL="0">
-              <a:buNone/>
-            </a:pPr>
-            <a:r>
-              <a:rPr lang="en-US" sz="900" b="1" spc="200" kern="0" dirty="0">
+            <a:off x="4626864" y="1856232"/>
+            <a:ext cx="2944368" cy="274320"/>
+          </a:xfrm>
+          <a:prstGeom prst="rect">
+            <a:avLst/>
+          </a:prstGeom>
+          <a:noFill/>
+          <a:ln/>
+        </p:spPr>
+        <p:txBody>
+          <a:bodyPr wrap="square" lIns="0" tIns="0" rIns="0" bIns="0" rtlCol="0" anchor="ctr"/>
+          <a:lstStyle/>
+          <a:p>
+            <a:pPr indent="0" marL="0">
+              <a:buNone/>
+            </a:pPr>
+            <a:r>
+              <a:rPr lang="en-US" sz="1400" b="1" spc="100" kern="0" dirty="0">
                 <a:solidFill>
                   <a:srgbClr val="9C5446"/>
                 </a:solidFill>
-                <a:latin typeface="游ゴシック" pitchFamily="34" charset="0"/>
-                <a:ea typeface="游ゴシック" pitchFamily="34" charset="-122"/>
-                <a:cs typeface="游ゴシック" pitchFamily="34" charset="-120"/>
+                <a:latin typeface="メイリオ" pitchFamily="34" charset="0"/>
+                <a:ea typeface="メイリオ" pitchFamily="34" charset="-122"/>
+                <a:cs typeface="メイリオ" pitchFamily="34" charset="-120"/>
               </a:rPr>
               <a:t>育成・コミュニティ</a:t>
             </a:r>
-            <a:endParaRPr lang="en-US" sz="900" dirty="0"/>
+            <a:endParaRPr lang="en-US" sz="1400" dirty="0"/>
           </a:p>
         </p:txBody>
       </p:sp>
@@ -4287,7 +4287,7 @@
         </p:nvSpPr>
         <p:spPr>
           <a:xfrm>
-            <a:off x="4626864" y="2212848"/>
+            <a:off x="4626864" y="2185416"/>
             <a:ext cx="2944368" cy="457200"/>
           </a:xfrm>
           <a:prstGeom prst="rect">
@@ -4307,17 +4307,17 @@
               <a:buNone/>
             </a:pPr>
             <a:r>
-              <a:rPr lang="en-US" sz="1500" b="1" dirty="0">
+              <a:rPr lang="en-US" sz="1700" b="1" dirty="0">
                 <a:solidFill>
                   <a:srgbClr val="2B2620"/>
                 </a:solidFill>
-                <a:latin typeface="游明朝" pitchFamily="34" charset="0"/>
-                <a:ea typeface="游明朝" pitchFamily="34" charset="-122"/>
-                <a:cs typeface="游明朝" pitchFamily="34" charset="-120"/>
+                <a:latin typeface="メイリオ" pitchFamily="34" charset="0"/>
+                <a:ea typeface="メイリオ" pitchFamily="34" charset="-122"/>
+                <a:cs typeface="メイリオ" pitchFamily="34" charset="-120"/>
               </a:rPr>
               <a:t>ここちめいど／ここちはり</a:t>
             </a:r>
-            <a:endParaRPr lang="en-US" sz="1500" dirty="0"/>
+            <a:endParaRPr lang="en-US" sz="1700" dirty="0"/>
           </a:p>
         </p:txBody>
       </p:sp>
@@ -4329,8 +4329,8 @@
         </p:nvSpPr>
         <p:spPr>
           <a:xfrm>
-            <a:off x="4626864" y="2724912"/>
-            <a:ext cx="2944368" cy="1097280"/>
+            <a:off x="4626864" y="2697480"/>
+            <a:ext cx="2944368" cy="1353312"/>
           </a:xfrm>
           <a:prstGeom prst="rect">
             <a:avLst/>
@@ -4349,17 +4349,17 @@
               <a:buNone/>
             </a:pPr>
             <a:r>
-              <a:rPr lang="en-US" sz="1050" dirty="0">
+              <a:rPr lang="en-US" sz="1400" dirty="0">
                 <a:solidFill>
                   <a:srgbClr val="5A5249"/>
                 </a:solidFill>
-                <a:latin typeface="游ゴシック" pitchFamily="34" charset="0"/>
-                <a:ea typeface="游ゴシック" pitchFamily="34" charset="-122"/>
-                <a:cs typeface="游ゴシック" pitchFamily="34" charset="-120"/>
-              </a:rPr>
-              <a:t>傾聴を学ぶ鍼灸師のオンラインサロンを2020年から主宰。2025年からは施術者育成事業を開始し、感情・心・身体・技術の4軸で指導。</a:t>
-            </a:r>
-            <a:endParaRPr lang="en-US" sz="1050" dirty="0"/>
+                <a:latin typeface="メイリオ" pitchFamily="34" charset="0"/>
+                <a:ea typeface="メイリオ" pitchFamily="34" charset="-122"/>
+                <a:cs typeface="メイリオ" pitchFamily="34" charset="-120"/>
+              </a:rPr>
+              <a:t>傾聴を学ぶ鍼灸師のオンラインサロンを2020年から主宰。2025年からは施術者の育成事業も開始しました。</a:t>
+            </a:r>
+            <a:endParaRPr lang="en-US" sz="1400" dirty="0"/>
           </a:p>
         </p:txBody>
       </p:sp>
@@ -4371,12 +4371,12 @@
         </p:nvSpPr>
         <p:spPr>
           <a:xfrm>
-            <a:off x="8055864" y="1737360"/>
-            <a:ext cx="3456432" cy="2286000"/>
+            <a:off x="8055864" y="1691640"/>
+            <a:ext cx="3456432" cy="2560320"/>
           </a:xfrm>
           <a:prstGeom prst="roundRect">
             <a:avLst>
-              <a:gd name="adj" fmla="val 2000"/>
+              <a:gd name="adj" fmla="val 1786"/>
             </a:avLst>
           </a:prstGeom>
           <a:solidFill>
@@ -4398,34 +4398,34 @@
         </p:nvSpPr>
         <p:spPr>
           <a:xfrm>
-            <a:off x="8311896" y="1938528"/>
-            <a:ext cx="2944368" cy="237744"/>
-          </a:xfrm>
-          <a:prstGeom prst="rect">
-            <a:avLst/>
-          </a:prstGeom>
-          <a:noFill/>
-          <a:ln/>
-        </p:spPr>
-        <p:txBody>
-          <a:bodyPr wrap="square" lIns="0" tIns="0" rIns="0" bIns="0" rtlCol="0" anchor="ctr"/>
-          <a:lstStyle/>
-          <a:p>
-            <a:pPr indent="0" marL="0">
-              <a:buNone/>
-            </a:pPr>
-            <a:r>
-              <a:rPr lang="en-US" sz="900" b="1" spc="200" kern="0" dirty="0">
+            <a:off x="8311896" y="1856232"/>
+            <a:ext cx="2944368" cy="274320"/>
+          </a:xfrm>
+          <a:prstGeom prst="rect">
+            <a:avLst/>
+          </a:prstGeom>
+          <a:noFill/>
+          <a:ln/>
+        </p:spPr>
+        <p:txBody>
+          <a:bodyPr wrap="square" lIns="0" tIns="0" rIns="0" bIns="0" rtlCol="0" anchor="ctr"/>
+          <a:lstStyle/>
+          <a:p>
+            <a:pPr indent="0" marL="0">
+              <a:buNone/>
+            </a:pPr>
+            <a:r>
+              <a:rPr lang="en-US" sz="1400" b="1" spc="100" kern="0" dirty="0">
                 <a:solidFill>
                   <a:srgbClr val="9C5446"/>
                 </a:solidFill>
-                <a:latin typeface="游ゴシック" pitchFamily="34" charset="0"/>
-                <a:ea typeface="游ゴシック" pitchFamily="34" charset="-122"/>
-                <a:cs typeface="游ゴシック" pitchFamily="34" charset="-120"/>
+                <a:latin typeface="メイリオ" pitchFamily="34" charset="0"/>
+                <a:ea typeface="メイリオ" pitchFamily="34" charset="-122"/>
+                <a:cs typeface="メイリオ" pitchFamily="34" charset="-120"/>
               </a:rPr>
               <a:t>研究</a:t>
             </a:r>
-            <a:endParaRPr lang="en-US" sz="900" dirty="0"/>
+            <a:endParaRPr lang="en-US" sz="1400" dirty="0"/>
           </a:p>
         </p:txBody>
       </p:sp>
@@ -4437,7 +4437,7 @@
         </p:nvSpPr>
         <p:spPr>
           <a:xfrm>
-            <a:off x="8311896" y="2212848"/>
+            <a:off x="8311896" y="2185416"/>
             <a:ext cx="2944368" cy="457200"/>
           </a:xfrm>
           <a:prstGeom prst="rect">
@@ -4457,17 +4457,17 @@
               <a:buNone/>
             </a:pPr>
             <a:r>
-              <a:rPr lang="en-US" sz="1500" b="1" dirty="0">
+              <a:rPr lang="en-US" sz="1700" b="1" dirty="0">
                 <a:solidFill>
                   <a:srgbClr val="2B2620"/>
                 </a:solidFill>
-                <a:latin typeface="游明朝" pitchFamily="34" charset="0"/>
-                <a:ea typeface="游明朝" pitchFamily="34" charset="-122"/>
-                <a:cs typeface="游明朝" pitchFamily="34" charset="-120"/>
+                <a:latin typeface="メイリオ" pitchFamily="34" charset="0"/>
+                <a:ea typeface="メイリオ" pitchFamily="34" charset="-122"/>
+                <a:cs typeface="メイリオ" pitchFamily="34" charset="-120"/>
               </a:rPr>
               <a:t>学会発表・産学連携</a:t>
             </a:r>
-            <a:endParaRPr lang="en-US" sz="1500" dirty="0"/>
+            <a:endParaRPr lang="en-US" sz="1700" dirty="0"/>
           </a:p>
         </p:txBody>
       </p:sp>
@@ -4479,8 +4479,8 @@
         </p:nvSpPr>
         <p:spPr>
           <a:xfrm>
-            <a:off x="8311896" y="2724912"/>
-            <a:ext cx="2944368" cy="1097280"/>
+            <a:off x="8311896" y="2697480"/>
+            <a:ext cx="2944368" cy="1353312"/>
           </a:xfrm>
           <a:prstGeom prst="rect">
             <a:avLst/>
@@ -4499,17 +4499,17 @@
               <a:buNone/>
             </a:pPr>
             <a:r>
-              <a:rPr lang="en-US" sz="1050" dirty="0">
+              <a:rPr lang="en-US" sz="1400" dirty="0">
                 <a:solidFill>
                   <a:srgbClr val="5A5249"/>
                 </a:solidFill>
-                <a:latin typeface="游ゴシック" pitchFamily="34" charset="0"/>
-                <a:ea typeface="游ゴシック" pitchFamily="34" charset="-122"/>
-                <a:cs typeface="游ゴシック" pitchFamily="34" charset="-120"/>
-              </a:rPr>
-              <a:t>全日本鍼灸学会・日本うつ病学会で継続的に発表し、日本精神神経学会にも登壇。理化学研究所・東京有明医療大学・玉川大学・ケアクルとの共同研究に参画。</a:t>
-            </a:r>
-            <a:endParaRPr lang="en-US" sz="1050" dirty="0"/>
+                <a:latin typeface="メイリオ" pitchFamily="34" charset="0"/>
+                <a:ea typeface="メイリオ" pitchFamily="34" charset="-122"/>
+                <a:cs typeface="メイリオ" pitchFamily="34" charset="-120"/>
+              </a:rPr>
+              <a:t>全日本鍼灸学会・日本うつ病学会で発表し、日本精神神経学会にも登壇。理化学研究所や大学との共同研究に参画。</a:t>
+            </a:r>
+            <a:endParaRPr lang="en-US" sz="1400" dirty="0"/>
           </a:p>
         </p:txBody>
       </p:sp>
@@ -4521,7 +4521,7 @@
         </p:nvSpPr>
         <p:spPr>
           <a:xfrm>
-            <a:off x="685800" y="4434840"/>
+            <a:off x="685800" y="4526280"/>
             <a:ext cx="10820095" cy="7315"/>
           </a:xfrm>
           <a:prstGeom prst="rect">
@@ -4541,7 +4541,7 @@
         </p:nvSpPr>
         <p:spPr>
           <a:xfrm>
-            <a:off x="685800" y="4617720"/>
+            <a:off x="685800" y="4681728"/>
             <a:ext cx="2522144" cy="548640"/>
           </a:xfrm>
           <a:prstGeom prst="rect">
@@ -4562,9 +4562,9 @@
                 <a:solidFill>
                   <a:srgbClr val="2B2620"/>
                 </a:solidFill>
-                <a:latin typeface="游明朝" pitchFamily="34" charset="0"/>
-                <a:ea typeface="游明朝" pitchFamily="34" charset="-122"/>
-                <a:cs typeface="游明朝" pitchFamily="34" charset="-120"/>
+                <a:latin typeface="メイリオ" pitchFamily="34" charset="0"/>
+                <a:ea typeface="メイリオ" pitchFamily="34" charset="-122"/>
+                <a:cs typeface="メイリオ" pitchFamily="34" charset="-120"/>
               </a:rPr>
               <a:t>11年目</a:t>
             </a:r>
@@ -4580,34 +4580,34 @@
         </p:nvSpPr>
         <p:spPr>
           <a:xfrm>
-            <a:off x="685800" y="5193792"/>
-            <a:ext cx="2522144" cy="274320"/>
-          </a:xfrm>
-          <a:prstGeom prst="rect">
-            <a:avLst/>
-          </a:prstGeom>
-          <a:noFill/>
-          <a:ln/>
-        </p:spPr>
-        <p:txBody>
-          <a:bodyPr wrap="square" lIns="0" tIns="0" rIns="0" bIns="0" rtlCol="0" anchor="ctr"/>
-          <a:lstStyle/>
-          <a:p>
-            <a:pPr indent="0" marL="0">
-              <a:buNone/>
-            </a:pPr>
-            <a:r>
-              <a:rPr lang="en-US" sz="950" spc="100" kern="0" dirty="0">
+            <a:off x="685800" y="5266944"/>
+            <a:ext cx="2522144" cy="310896"/>
+          </a:xfrm>
+          <a:prstGeom prst="rect">
+            <a:avLst/>
+          </a:prstGeom>
+          <a:noFill/>
+          <a:ln/>
+        </p:spPr>
+        <p:txBody>
+          <a:bodyPr wrap="square" lIns="0" tIns="0" rIns="0" bIns="0" rtlCol="0" anchor="ctr"/>
+          <a:lstStyle/>
+          <a:p>
+            <a:pPr indent="0" marL="0">
+              <a:buNone/>
+            </a:pPr>
+            <a:r>
+              <a:rPr lang="en-US" sz="1400" spc="100" kern="0" dirty="0">
                 <a:solidFill>
                   <a:srgbClr val="8B8175"/>
                 </a:solidFill>
-                <a:latin typeface="游ゴシック" pitchFamily="34" charset="0"/>
-                <a:ea typeface="游ゴシック" pitchFamily="34" charset="-122"/>
-                <a:cs typeface="游ゴシック" pitchFamily="34" charset="-120"/>
+                <a:latin typeface="メイリオ" pitchFamily="34" charset="0"/>
+                <a:ea typeface="メイリオ" pitchFamily="34" charset="-122"/>
+                <a:cs typeface="メイリオ" pitchFamily="34" charset="-120"/>
               </a:rPr>
               <a:t>鍼灸院 開業</a:t>
             </a:r>
-            <a:endParaRPr lang="en-US" sz="950" dirty="0"/>
+            <a:endParaRPr lang="en-US" sz="1400" dirty="0"/>
           </a:p>
         </p:txBody>
       </p:sp>
@@ -4619,7 +4619,7 @@
         </p:nvSpPr>
         <p:spPr>
           <a:xfrm>
-            <a:off x="3390824" y="4617720"/>
+            <a:off x="3390824" y="4681728"/>
             <a:ext cx="2522144" cy="548640"/>
           </a:xfrm>
           <a:prstGeom prst="rect">
@@ -4640,9 +4640,9 @@
                 <a:solidFill>
                   <a:srgbClr val="2B2620"/>
                 </a:solidFill>
-                <a:latin typeface="游明朝" pitchFamily="34" charset="0"/>
-                <a:ea typeface="游明朝" pitchFamily="34" charset="-122"/>
-                <a:cs typeface="游明朝" pitchFamily="34" charset="-120"/>
+                <a:latin typeface="メイリオ" pitchFamily="34" charset="0"/>
+                <a:ea typeface="メイリオ" pitchFamily="34" charset="-122"/>
+                <a:cs typeface="メイリオ" pitchFamily="34" charset="-120"/>
               </a:rPr>
               <a:t>20,000人+</a:t>
             </a:r>
@@ -4658,34 +4658,34 @@
         </p:nvSpPr>
         <p:spPr>
           <a:xfrm>
-            <a:off x="3390824" y="5193792"/>
-            <a:ext cx="2522144" cy="274320"/>
-          </a:xfrm>
-          <a:prstGeom prst="rect">
-            <a:avLst/>
-          </a:prstGeom>
-          <a:noFill/>
-          <a:ln/>
-        </p:spPr>
-        <p:txBody>
-          <a:bodyPr wrap="square" lIns="0" tIns="0" rIns="0" bIns="0" rtlCol="0" anchor="ctr"/>
-          <a:lstStyle/>
-          <a:p>
-            <a:pPr indent="0" marL="0">
-              <a:buNone/>
-            </a:pPr>
-            <a:r>
-              <a:rPr lang="en-US" sz="950" spc="100" kern="0" dirty="0">
+            <a:off x="3390824" y="5266944"/>
+            <a:ext cx="2522144" cy="310896"/>
+          </a:xfrm>
+          <a:prstGeom prst="rect">
+            <a:avLst/>
+          </a:prstGeom>
+          <a:noFill/>
+          <a:ln/>
+        </p:spPr>
+        <p:txBody>
+          <a:bodyPr wrap="square" lIns="0" tIns="0" rIns="0" bIns="0" rtlCol="0" anchor="ctr"/>
+          <a:lstStyle/>
+          <a:p>
+            <a:pPr indent="0" marL="0">
+              <a:buNone/>
+            </a:pPr>
+            <a:r>
+              <a:rPr lang="en-US" sz="1400" spc="100" kern="0" dirty="0">
                 <a:solidFill>
                   <a:srgbClr val="8B8175"/>
                 </a:solidFill>
-                <a:latin typeface="游ゴシック" pitchFamily="34" charset="0"/>
-                <a:ea typeface="游ゴシック" pitchFamily="34" charset="-122"/>
-                <a:cs typeface="游ゴシック" pitchFamily="34" charset="-120"/>
+                <a:latin typeface="メイリオ" pitchFamily="34" charset="0"/>
+                <a:ea typeface="メイリオ" pitchFamily="34" charset="-122"/>
+                <a:cs typeface="メイリオ" pitchFamily="34" charset="-120"/>
               </a:rPr>
               <a:t>のべ臨床患者数</a:t>
             </a:r>
-            <a:endParaRPr lang="en-US" sz="950" dirty="0"/>
+            <a:endParaRPr lang="en-US" sz="1400" dirty="0"/>
           </a:p>
         </p:txBody>
       </p:sp>
@@ -4697,7 +4697,7 @@
         </p:nvSpPr>
         <p:spPr>
           <a:xfrm>
-            <a:off x="6095848" y="4617720"/>
+            <a:off x="6095848" y="4681728"/>
             <a:ext cx="2522144" cy="548640"/>
           </a:xfrm>
           <a:prstGeom prst="rect">
@@ -4718,9 +4718,9 @@
                 <a:solidFill>
                   <a:srgbClr val="2B2620"/>
                 </a:solidFill>
-                <a:latin typeface="游明朝" pitchFamily="34" charset="0"/>
-                <a:ea typeface="游明朝" pitchFamily="34" charset="-122"/>
-                <a:cs typeface="游明朝" pitchFamily="34" charset="-120"/>
+                <a:latin typeface="メイリオ" pitchFamily="34" charset="0"/>
+                <a:ea typeface="メイリオ" pitchFamily="34" charset="-122"/>
+                <a:cs typeface="メイリオ" pitchFamily="34" charset="-120"/>
               </a:rPr>
               <a:t>3学会</a:t>
             </a:r>
@@ -4736,34 +4736,34 @@
         </p:nvSpPr>
         <p:spPr>
           <a:xfrm>
-            <a:off x="6095848" y="5193792"/>
-            <a:ext cx="2522144" cy="274320"/>
-          </a:xfrm>
-          <a:prstGeom prst="rect">
-            <a:avLst/>
-          </a:prstGeom>
-          <a:noFill/>
-          <a:ln/>
-        </p:spPr>
-        <p:txBody>
-          <a:bodyPr wrap="square" lIns="0" tIns="0" rIns="0" bIns="0" rtlCol="0" anchor="ctr"/>
-          <a:lstStyle/>
-          <a:p>
-            <a:pPr indent="0" marL="0">
-              <a:buNone/>
-            </a:pPr>
-            <a:r>
-              <a:rPr lang="en-US" sz="950" spc="100" kern="0" dirty="0">
+            <a:off x="6095848" y="5266944"/>
+            <a:ext cx="2522144" cy="310896"/>
+          </a:xfrm>
+          <a:prstGeom prst="rect">
+            <a:avLst/>
+          </a:prstGeom>
+          <a:noFill/>
+          <a:ln/>
+        </p:spPr>
+        <p:txBody>
+          <a:bodyPr wrap="square" lIns="0" tIns="0" rIns="0" bIns="0" rtlCol="0" anchor="ctr"/>
+          <a:lstStyle/>
+          <a:p>
+            <a:pPr indent="0" marL="0">
+              <a:buNone/>
+            </a:pPr>
+            <a:r>
+              <a:rPr lang="en-US" sz="1400" spc="100" kern="0" dirty="0">
                 <a:solidFill>
                   <a:srgbClr val="8B8175"/>
                 </a:solidFill>
-                <a:latin typeface="游ゴシック" pitchFamily="34" charset="0"/>
-                <a:ea typeface="游ゴシック" pitchFamily="34" charset="-122"/>
-                <a:cs typeface="游ゴシック" pitchFamily="34" charset="-120"/>
+                <a:latin typeface="メイリオ" pitchFamily="34" charset="0"/>
+                <a:ea typeface="メイリオ" pitchFamily="34" charset="-122"/>
+                <a:cs typeface="メイリオ" pitchFamily="34" charset="-120"/>
               </a:rPr>
               <a:t>発表・登壇</a:t>
             </a:r>
-            <a:endParaRPr lang="en-US" sz="950" dirty="0"/>
+            <a:endParaRPr lang="en-US" sz="1400" dirty="0"/>
           </a:p>
         </p:txBody>
       </p:sp>
@@ -4775,7 +4775,7 @@
         </p:nvSpPr>
         <p:spPr>
           <a:xfrm>
-            <a:off x="8800871" y="4617720"/>
+            <a:off x="8800871" y="4681728"/>
             <a:ext cx="2522144" cy="548640"/>
           </a:xfrm>
           <a:prstGeom prst="rect">
@@ -4796,9 +4796,9 @@
                 <a:solidFill>
                   <a:srgbClr val="2B2620"/>
                 </a:solidFill>
-                <a:latin typeface="游明朝" pitchFamily="34" charset="0"/>
-                <a:ea typeface="游明朝" pitchFamily="34" charset="-122"/>
-                <a:cs typeface="游明朝" pitchFamily="34" charset="-120"/>
+                <a:latin typeface="メイリオ" pitchFamily="34" charset="0"/>
+                <a:ea typeface="メイリオ" pitchFamily="34" charset="-122"/>
+                <a:cs typeface="メイリオ" pitchFamily="34" charset="-120"/>
               </a:rPr>
               <a:t>修士</a:t>
             </a:r>
@@ -4814,34 +4814,34 @@
         </p:nvSpPr>
         <p:spPr>
           <a:xfrm>
-            <a:off x="8800871" y="5193792"/>
-            <a:ext cx="2522144" cy="274320"/>
-          </a:xfrm>
-          <a:prstGeom prst="rect">
-            <a:avLst/>
-          </a:prstGeom>
-          <a:noFill/>
-          <a:ln/>
-        </p:spPr>
-        <p:txBody>
-          <a:bodyPr wrap="square" lIns="0" tIns="0" rIns="0" bIns="0" rtlCol="0" anchor="ctr"/>
-          <a:lstStyle/>
-          <a:p>
-            <a:pPr indent="0" marL="0">
-              <a:buNone/>
-            </a:pPr>
-            <a:r>
-              <a:rPr lang="en-US" sz="950" spc="100" kern="0" dirty="0">
+            <a:off x="8800871" y="5266944"/>
+            <a:ext cx="2522144" cy="310896"/>
+          </a:xfrm>
+          <a:prstGeom prst="rect">
+            <a:avLst/>
+          </a:prstGeom>
+          <a:noFill/>
+          <a:ln/>
+        </p:spPr>
+        <p:txBody>
+          <a:bodyPr wrap="square" lIns="0" tIns="0" rIns="0" bIns="0" rtlCol="0" anchor="ctr"/>
+          <a:lstStyle/>
+          <a:p>
+            <a:pPr indent="0" marL="0">
+              <a:buNone/>
+            </a:pPr>
+            <a:r>
+              <a:rPr lang="en-US" sz="1400" spc="100" kern="0" dirty="0">
                 <a:solidFill>
                   <a:srgbClr val="8B8175"/>
                 </a:solidFill>
-                <a:latin typeface="游ゴシック" pitchFamily="34" charset="0"/>
-                <a:ea typeface="游ゴシック" pitchFamily="34" charset="-122"/>
-                <a:cs typeface="游ゴシック" pitchFamily="34" charset="-120"/>
+                <a:latin typeface="メイリオ" pitchFamily="34" charset="0"/>
+                <a:ea typeface="メイリオ" pitchFamily="34" charset="-122"/>
+                <a:cs typeface="メイリオ" pitchFamily="34" charset="-120"/>
               </a:rPr>
               <a:t>武蔵野大学大学院 人間学</a:t>
             </a:r>
-            <a:endParaRPr lang="en-US" sz="950" dirty="0"/>
+            <a:endParaRPr lang="en-US" sz="1400" dirty="0"/>
           </a:p>
         </p:txBody>
       </p:sp>
@@ -4870,17 +4870,17 @@
               <a:buNone/>
             </a:pPr>
             <a:r>
-              <a:rPr lang="en-US" sz="900" spc="100" kern="0" dirty="0">
+              <a:rPr lang="en-US" sz="1200" spc="100" kern="0" dirty="0">
                 <a:solidFill>
                   <a:srgbClr val="8B8175"/>
                 </a:solidFill>
-                <a:latin typeface="游ゴシック" pitchFamily="34" charset="0"/>
-                <a:ea typeface="游ゴシック" pitchFamily="34" charset="-122"/>
-                <a:cs typeface="游ゴシック" pitchFamily="34" charset="-120"/>
+                <a:latin typeface="メイリオ" pitchFamily="34" charset="0"/>
+                <a:ea typeface="メイリオ" pitchFamily="34" charset="-122"/>
+                <a:cs typeface="メイリオ" pitchFamily="34" charset="-120"/>
               </a:rPr>
               <a:t>米倉まな｜アポプラスステーション様 ご提案</a:t>
             </a:r>
-            <a:endParaRPr lang="en-US" sz="900" dirty="0"/>
+            <a:endParaRPr lang="en-US" sz="1200" dirty="0"/>
           </a:p>
         </p:txBody>
       </p:sp>
@@ -4909,17 +4909,17 @@
               <a:buNone/>
             </a:pPr>
             <a:r>
-              <a:rPr lang="en-US" sz="900" dirty="0">
+              <a:rPr lang="en-US" sz="1200" dirty="0">
                 <a:solidFill>
                   <a:srgbClr val="8B8175"/>
                 </a:solidFill>
-                <a:latin typeface="游ゴシック" pitchFamily="34" charset="0"/>
-                <a:ea typeface="游ゴシック" pitchFamily="34" charset="-122"/>
-                <a:cs typeface="游ゴシック" pitchFamily="34" charset="-120"/>
+                <a:latin typeface="メイリオ" pitchFamily="34" charset="0"/>
+                <a:ea typeface="メイリオ" pitchFamily="34" charset="-122"/>
+                <a:cs typeface="メイリオ" pitchFamily="34" charset="-120"/>
               </a:rPr>
               <a:t>0:55 → 1:30</a:t>
             </a:r>
-            <a:endParaRPr lang="en-US" sz="900" dirty="0"/>
+            <a:endParaRPr lang="en-US" sz="1200" dirty="0"/>
           </a:p>
         </p:txBody>
       </p:sp>
@@ -4983,7 +4983,7 @@
         </p:nvSpPr>
         <p:spPr>
           <a:xfrm>
-            <a:off x="996696" y="402336"/>
+            <a:off x="996696" y="365760"/>
             <a:ext cx="7315200" cy="310896"/>
           </a:xfrm>
           <a:prstGeom prst="rect">
@@ -5000,13 +5000,13 @@
               <a:buNone/>
             </a:pPr>
             <a:r>
-              <a:rPr lang="en-US" sz="1000" b="1" spc="200" kern="0" dirty="0">
+              <a:rPr lang="en-US" sz="1400" b="1" spc="200" kern="0" dirty="0">
                 <a:solidFill>
                   <a:srgbClr val="C97B68"/>
                 </a:solidFill>
-                <a:latin typeface="游明朝" pitchFamily="34" charset="0"/>
-                <a:ea typeface="游明朝" pitchFamily="34" charset="-122"/>
-                <a:cs typeface="游明朝" pitchFamily="34" charset="-120"/>
+                <a:latin typeface="メイリオ" pitchFamily="34" charset="0"/>
+                <a:ea typeface="メイリオ" pitchFamily="34" charset="-122"/>
+                <a:cs typeface="メイリオ" pitchFamily="34" charset="-120"/>
               </a:rPr>
               <a:t>03   </a:t>
             </a:r>
@@ -5014,17 +5014,17 @@
               <a:buNone/>
             </a:pPr>
             <a:r>
-              <a:rPr lang="en-US" sz="1000" spc="300" kern="0" dirty="0">
+              <a:rPr lang="en-US" sz="1400" spc="300" kern="0" dirty="0">
                 <a:solidFill>
                   <a:srgbClr val="BDB2A2"/>
                 </a:solidFill>
-                <a:latin typeface="游ゴシック" pitchFamily="34" charset="0"/>
-                <a:ea typeface="游ゴシック" pitchFamily="34" charset="-122"/>
-                <a:cs typeface="游ゴシック" pitchFamily="34" charset="-120"/>
+                <a:latin typeface="メイリオ" pitchFamily="34" charset="0"/>
+                <a:ea typeface="メイリオ" pitchFamily="34" charset="-122"/>
+                <a:cs typeface="メイリオ" pitchFamily="34" charset="-120"/>
               </a:rPr>
               <a:t>ISSUE</a:t>
             </a:r>
-            <a:endParaRPr lang="en-US" sz="1000" dirty="0"/>
+            <a:endParaRPr lang="en-US" sz="1400" dirty="0"/>
           </a:p>
         </p:txBody>
       </p:sp>
@@ -5036,7 +5036,7 @@
         </p:nvSpPr>
         <p:spPr>
           <a:xfrm>
-            <a:off x="685800" y="841248"/>
+            <a:off x="685800" y="777240"/>
             <a:ext cx="10820095" cy="777240"/>
           </a:xfrm>
           <a:prstGeom prst="rect">
@@ -5057,9 +5057,9 @@
                 <a:solidFill>
                   <a:srgbClr val="F3ECE0"/>
                 </a:solidFill>
-                <a:latin typeface="游明朝" pitchFamily="34" charset="0"/>
-                <a:ea typeface="游明朝" pitchFamily="34" charset="-122"/>
-                <a:cs typeface="游明朝" pitchFamily="34" charset="-120"/>
+                <a:latin typeface="メイリオ" pitchFamily="34" charset="0"/>
+                <a:ea typeface="メイリオ" pitchFamily="34" charset="-122"/>
+                <a:cs typeface="メイリオ" pitchFamily="34" charset="-120"/>
               </a:rPr>
               <a:t>これは私の実感であり、社会の数字でもあります</a:t>
             </a:r>
@@ -5092,17 +5092,17 @@
               <a:buNone/>
             </a:pPr>
             <a:r>
-              <a:rPr lang="en-US" sz="950" b="1" spc="300" kern="0" dirty="0">
+              <a:rPr lang="en-US" sz="1400" b="1" spc="200" kern="0" dirty="0">
                 <a:solidFill>
                   <a:srgbClr val="C97B68"/>
                 </a:solidFill>
-                <a:latin typeface="游ゴシック" pitchFamily="34" charset="0"/>
-                <a:ea typeface="游ゴシック" pitchFamily="34" charset="-122"/>
-                <a:cs typeface="游ゴシック" pitchFamily="34" charset="-120"/>
+                <a:latin typeface="メイリオ" pitchFamily="34" charset="0"/>
+                <a:ea typeface="メイリオ" pitchFamily="34" charset="-122"/>
+                <a:cs typeface="メイリオ" pitchFamily="34" charset="-120"/>
               </a:rPr>
               <a:t>社会で起きていること</a:t>
             </a:r>
-            <a:endParaRPr lang="en-US" sz="950" dirty="0"/>
+            <a:endParaRPr lang="en-US" sz="1400" dirty="0"/>
           </a:p>
         </p:txBody>
       </p:sp>
@@ -5131,17 +5131,17 @@
               <a:buNone/>
             </a:pPr>
             <a:r>
-              <a:rPr lang="en-US" sz="950" b="1" spc="300" kern="0" dirty="0">
+              <a:rPr lang="en-US" sz="1400" b="1" spc="200" kern="0" dirty="0">
                 <a:solidFill>
                   <a:srgbClr val="93AC93"/>
                 </a:solidFill>
-                <a:latin typeface="游ゴシック" pitchFamily="34" charset="0"/>
-                <a:ea typeface="游ゴシック" pitchFamily="34" charset="-122"/>
-                <a:cs typeface="游ゴシック" pitchFamily="34" charset="-120"/>
+                <a:latin typeface="メイリオ" pitchFamily="34" charset="0"/>
+                <a:ea typeface="メイリオ" pitchFamily="34" charset="-122"/>
+                <a:cs typeface="メイリオ" pitchFamily="34" charset="-120"/>
               </a:rPr>
               <a:t>私が現場で見ていること</a:t>
             </a:r>
-            <a:endParaRPr lang="en-US" sz="950" dirty="0"/>
+            <a:endParaRPr lang="en-US" sz="1400" dirty="0"/>
           </a:p>
         </p:txBody>
       </p:sp>
@@ -5213,13 +5213,13 @@
               <a:buNone/>
             </a:pPr>
             <a:r>
-              <a:rPr lang="en-US" sz="1500" b="1" dirty="0">
+              <a:rPr lang="en-US" sz="1700" b="1" dirty="0">
                 <a:solidFill>
                   <a:srgbClr val="C97B68"/>
                 </a:solidFill>
-                <a:latin typeface="游明朝" pitchFamily="34" charset="0"/>
-                <a:ea typeface="游明朝" pitchFamily="34" charset="-122"/>
-                <a:cs typeface="游明朝" pitchFamily="34" charset="-120"/>
+                <a:latin typeface="メイリオ" pitchFamily="34" charset="0"/>
+                <a:ea typeface="メイリオ" pitchFamily="34" charset="-122"/>
+                <a:cs typeface="メイリオ" pitchFamily="34" charset="-120"/>
               </a:rPr>
               <a:t>約600万人　</a:t>
             </a:r>
@@ -5230,17 +5230,17 @@
               <a:buNone/>
             </a:pPr>
             <a:r>
-              <a:rPr lang="en-US" sz="1050" dirty="0">
+              <a:rPr lang="en-US" sz="1400" dirty="0">
                 <a:solidFill>
                   <a:srgbClr val="F3ECE0"/>
                 </a:solidFill>
-                <a:latin typeface="游ゴシック" pitchFamily="34" charset="0"/>
-                <a:ea typeface="游ゴシック" pitchFamily="34" charset="-122"/>
-                <a:cs typeface="游ゴシック" pitchFamily="34" charset="-120"/>
-              </a:rPr>
-              <a:t>精神疾患を持つ患者数。国は2024年、厚生労働白書で初めて「こころの健康」をテーマに据えました。</a:t>
-            </a:r>
-            <a:endParaRPr lang="en-US" sz="1050" dirty="0"/>
+                <a:latin typeface="メイリオ" pitchFamily="34" charset="0"/>
+                <a:ea typeface="メイリオ" pitchFamily="34" charset="-122"/>
+                <a:cs typeface="メイリオ" pitchFamily="34" charset="-120"/>
+              </a:rPr>
+              <a:t>精神疾患を持つ患者数。国は2024年、厚生労働白書で初めて「こころの健康」をテーマにしました。</a:t>
+            </a:r>
+            <a:endParaRPr lang="en-US" sz="1400" dirty="0"/>
           </a:p>
         </p:txBody>
       </p:sp>
@@ -5272,17 +5272,17 @@
               <a:buNone/>
             </a:pPr>
             <a:r>
-              <a:rPr lang="en-US" sz="1050" dirty="0">
+              <a:rPr lang="en-US" sz="1400" dirty="0">
                 <a:solidFill>
                   <a:srgbClr val="BDB2A2"/>
                 </a:solidFill>
-                <a:latin typeface="游ゴシック" pitchFamily="34" charset="0"/>
-                <a:ea typeface="游ゴシック" pitchFamily="34" charset="-122"/>
-                <a:cs typeface="游ゴシック" pitchFamily="34" charset="-120"/>
-              </a:rPr>
-              <a:t>のべ20,000人を診てきて、心の不調を主訴に来られる方が明らかに増えました。</a:t>
-            </a:r>
-            <a:endParaRPr lang="en-US" sz="1050" dirty="0"/>
+                <a:latin typeface="メイリオ" pitchFamily="34" charset="0"/>
+                <a:ea typeface="メイリオ" pitchFamily="34" charset="-122"/>
+                <a:cs typeface="メイリオ" pitchFamily="34" charset="-120"/>
+              </a:rPr>
+              <a:t>のべ20,000人を診てきて、心の不調の方が明らかに増えました。</a:t>
+            </a:r>
+            <a:endParaRPr lang="en-US" sz="1400" dirty="0"/>
           </a:p>
         </p:txBody>
       </p:sp>
@@ -5354,13 +5354,13 @@
               <a:buNone/>
             </a:pPr>
             <a:r>
-              <a:rPr lang="en-US" sz="1500" b="1" dirty="0">
+              <a:rPr lang="en-US" sz="1700" b="1" dirty="0">
                 <a:solidFill>
                   <a:srgbClr val="C97B68"/>
                 </a:solidFill>
-                <a:latin typeface="游明朝" pitchFamily="34" charset="0"/>
-                <a:ea typeface="游明朝" pitchFamily="34" charset="-122"/>
-                <a:cs typeface="游明朝" pitchFamily="34" charset="-120"/>
+                <a:latin typeface="メイリオ" pitchFamily="34" charset="0"/>
+                <a:ea typeface="メイリオ" pitchFamily="34" charset="-122"/>
+                <a:cs typeface="メイリオ" pitchFamily="34" charset="-120"/>
               </a:rPr>
               <a:t>2028年4月　</a:t>
             </a:r>
@@ -5371,17 +5371,17 @@
               <a:buNone/>
             </a:pPr>
             <a:r>
-              <a:rPr lang="en-US" sz="1050" dirty="0">
+              <a:rPr lang="en-US" sz="1400" dirty="0">
                 <a:solidFill>
                   <a:srgbClr val="F3ECE0"/>
                 </a:solidFill>
-                <a:latin typeface="游ゴシック" pitchFamily="34" charset="0"/>
-                <a:ea typeface="游ゴシック" pitchFamily="34" charset="-122"/>
-                <a:cs typeface="游ゴシック" pitchFamily="34" charset="-120"/>
+                <a:latin typeface="メイリオ" pitchFamily="34" charset="0"/>
+                <a:ea typeface="メイリオ" pitchFamily="34" charset="-122"/>
+                <a:cs typeface="メイリオ" pitchFamily="34" charset="-120"/>
               </a:rPr>
               <a:t>50人未満の事業場にもストレスチェックが義務化。現在の実施率は6割弱です。</a:t>
             </a:r>
-            <a:endParaRPr lang="en-US" sz="1050" dirty="0"/>
+            <a:endParaRPr lang="en-US" sz="1400" dirty="0"/>
           </a:p>
         </p:txBody>
       </p:sp>
@@ -5413,17 +5413,17 @@
               <a:buNone/>
             </a:pPr>
             <a:r>
-              <a:rPr lang="en-US" sz="1050" dirty="0">
+              <a:rPr lang="en-US" sz="1400" dirty="0">
                 <a:solidFill>
                   <a:srgbClr val="BDB2A2"/>
                 </a:solidFill>
-                <a:latin typeface="游ゴシック" pitchFamily="34" charset="0"/>
-                <a:ea typeface="游ゴシック" pitchFamily="34" charset="-122"/>
-                <a:cs typeface="游ゴシック" pitchFamily="34" charset="-120"/>
-              </a:rPr>
-              <a:t>気づいても、次に行く場所がない。精神科は予約が埋まり、新規の受付を止める医療機関が出ています。</a:t>
-            </a:r>
-            <a:endParaRPr lang="en-US" sz="1050" dirty="0"/>
+                <a:latin typeface="メイリオ" pitchFamily="34" charset="0"/>
+                <a:ea typeface="メイリオ" pitchFamily="34" charset="-122"/>
+                <a:cs typeface="メイリオ" pitchFamily="34" charset="-120"/>
+              </a:rPr>
+              <a:t>気づいても、次に行く場所がない。精神科は予約が埋まり、新規を止める医療機関も出ています。</a:t>
+            </a:r>
+            <a:endParaRPr lang="en-US" sz="1400" dirty="0"/>
           </a:p>
         </p:txBody>
       </p:sp>
@@ -5495,13 +5495,13 @@
               <a:buNone/>
             </a:pPr>
             <a:r>
-              <a:rPr lang="en-US" sz="1500" b="1" dirty="0">
+              <a:rPr lang="en-US" sz="1700" b="1" dirty="0">
                 <a:solidFill>
                   <a:srgbClr val="C97B68"/>
                 </a:solidFill>
-                <a:latin typeface="游明朝" pitchFamily="34" charset="0"/>
-                <a:ea typeface="游明朝" pitchFamily="34" charset="-122"/>
-                <a:cs typeface="游明朝" pitchFamily="34" charset="-120"/>
+                <a:latin typeface="メイリオ" pitchFamily="34" charset="0"/>
+                <a:ea typeface="メイリオ" pitchFamily="34" charset="-122"/>
+                <a:cs typeface="メイリオ" pitchFamily="34" charset="-120"/>
               </a:rPr>
               <a:t>年7.6兆円　</a:t>
             </a:r>
@@ -5512,17 +5512,17 @@
               <a:buNone/>
             </a:pPr>
             <a:r>
-              <a:rPr lang="en-US" sz="1050" dirty="0">
+              <a:rPr lang="en-US" sz="1400" dirty="0">
                 <a:solidFill>
                   <a:srgbClr val="F3ECE0"/>
                 </a:solidFill>
-                <a:latin typeface="游ゴシック" pitchFamily="34" charset="0"/>
-                <a:ea typeface="游ゴシック" pitchFamily="34" charset="-122"/>
-                <a:cs typeface="游ゴシック" pitchFamily="34" charset="-120"/>
-              </a:rPr>
-              <a:t>メンタル不調による経済損失。うち7.3兆円は「出勤しているのに力が出ない」分です。</a:t>
-            </a:r>
-            <a:endParaRPr lang="en-US" sz="1050" dirty="0"/>
+                <a:latin typeface="メイリオ" pitchFamily="34" charset="0"/>
+                <a:ea typeface="メイリオ" pitchFamily="34" charset="-122"/>
+                <a:cs typeface="メイリオ" pitchFamily="34" charset="-120"/>
+              </a:rPr>
+              <a:t>メンタル不調による経済損失。うち7.3兆円は「出勤しているのに力が出ない」分。</a:t>
+            </a:r>
+            <a:endParaRPr lang="en-US" sz="1400" dirty="0"/>
           </a:p>
         </p:txBody>
       </p:sp>
@@ -5554,17 +5554,17 @@
               <a:buNone/>
             </a:pPr>
             <a:r>
-              <a:rPr lang="en-US" sz="1050" dirty="0">
+              <a:rPr lang="en-US" sz="1400" dirty="0">
                 <a:solidFill>
                   <a:srgbClr val="BDB2A2"/>
                 </a:solidFill>
-                <a:latin typeface="游ゴシック" pitchFamily="34" charset="0"/>
-                <a:ea typeface="游ゴシック" pitchFamily="34" charset="-122"/>
-                <a:cs typeface="游ゴシック" pitchFamily="34" charset="-120"/>
-              </a:rPr>
-              <a:t>休職や通院の手前で止まっている方が、いちばん多い。この層は、いま誰の担当でもありません。</a:t>
-            </a:r>
-            <a:endParaRPr lang="en-US" sz="1050" dirty="0"/>
+                <a:latin typeface="メイリオ" pitchFamily="34" charset="0"/>
+                <a:ea typeface="メイリオ" pitchFamily="34" charset="-122"/>
+                <a:cs typeface="メイリオ" pitchFamily="34" charset="-120"/>
+              </a:rPr>
+              <a:t>休職や通院の手前で止まる方が、いちばん多い。この層は誰の担当でもありません。</a:t>
+            </a:r>
+            <a:endParaRPr lang="en-US" sz="1400" dirty="0"/>
           </a:p>
         </p:txBody>
       </p:sp>
@@ -5593,17 +5593,17 @@
               <a:buNone/>
             </a:pPr>
             <a:r>
-              <a:rPr lang="en-US" sz="2300" b="1" dirty="0">
+              <a:rPr lang="en-US" sz="2400" b="1" dirty="0">
                 <a:solidFill>
                   <a:srgbClr val="C97B68"/>
                 </a:solidFill>
-                <a:latin typeface="游明朝" pitchFamily="34" charset="0"/>
-                <a:ea typeface="游明朝" pitchFamily="34" charset="-122"/>
-                <a:cs typeface="游明朝" pitchFamily="34" charset="-120"/>
+                <a:latin typeface="メイリオ" pitchFamily="34" charset="0"/>
+                <a:ea typeface="メイリオ" pitchFamily="34" charset="-122"/>
+                <a:cs typeface="メイリオ" pitchFamily="34" charset="-120"/>
               </a:rPr>
               <a:t>だから、未病の段階で止めておきたい。</a:t>
             </a:r>
-            <a:endParaRPr lang="en-US" sz="2300" dirty="0"/>
+            <a:endParaRPr lang="en-US" sz="2400" dirty="0"/>
           </a:p>
         </p:txBody>
       </p:sp>
@@ -5615,8 +5615,8 @@
         </p:nvSpPr>
         <p:spPr>
           <a:xfrm>
-            <a:off x="685800" y="5897880"/>
-            <a:ext cx="10820095" cy="329184"/>
+            <a:off x="685800" y="5852160"/>
+            <a:ext cx="10820095" cy="457200"/>
           </a:xfrm>
           <a:prstGeom prst="rect">
             <a:avLst/>
@@ -5630,22 +5630,22 @@
           <a:p>
             <a:pPr indent="0" marL="0">
               <a:lnSpc>
-                <a:spcPts val="1100"/>
+                <a:spcPts val="1500"/>
               </a:lnSpc>
               <a:buNone/>
             </a:pPr>
             <a:r>
-              <a:rPr lang="en-US" sz="750" dirty="0">
+              <a:rPr lang="en-US" sz="1100" dirty="0">
                 <a:solidFill>
                   <a:srgbClr val="BDB2A2"/>
                 </a:solidFill>
-                <a:latin typeface="游ゴシック" pitchFamily="34" charset="0"/>
-                <a:ea typeface="游ゴシック" pitchFamily="34" charset="-122"/>
-                <a:cs typeface="游ゴシック" pitchFamily="34" charset="-120"/>
-              </a:rPr>
-              <a:t>出典：厚生労働省 患者調査／令和6年版 厚生労働白書／改正労働安全衛生法（2025年5月公布・2028年4月施行）／メンタルヘルス不調による経済損失の試算（労働者27,507人調査）</a:t>
-            </a:r>
-            <a:endParaRPr lang="en-US" sz="750" dirty="0"/>
+                <a:latin typeface="メイリオ" pitchFamily="34" charset="0"/>
+                <a:ea typeface="メイリオ" pitchFamily="34" charset="-122"/>
+                <a:cs typeface="メイリオ" pitchFamily="34" charset="-120"/>
+              </a:rPr>
+              <a:t>出典：厚生労働省 患者調査／令和6年版 厚生労働白書／改正労働安全衛生法（2025年5月公布・2028年4月施行）／メンタルヘルス不調による経済損失の試算</a:t>
+            </a:r>
+            <a:endParaRPr lang="en-US" sz="1100" dirty="0"/>
           </a:p>
         </p:txBody>
       </p:sp>
@@ -5674,17 +5674,17 @@
               <a:buNone/>
             </a:pPr>
             <a:r>
-              <a:rPr lang="en-US" sz="900" spc="100" kern="0" dirty="0">
+              <a:rPr lang="en-US" sz="1200" spc="100" kern="0" dirty="0">
                 <a:solidFill>
                   <a:srgbClr val="BDB2A2"/>
                 </a:solidFill>
-                <a:latin typeface="游ゴシック" pitchFamily="34" charset="0"/>
-                <a:ea typeface="游ゴシック" pitchFamily="34" charset="-122"/>
-                <a:cs typeface="游ゴシック" pitchFamily="34" charset="-120"/>
+                <a:latin typeface="メイリオ" pitchFamily="34" charset="0"/>
+                <a:ea typeface="メイリオ" pitchFamily="34" charset="-122"/>
+                <a:cs typeface="メイリオ" pitchFamily="34" charset="-120"/>
               </a:rPr>
               <a:t>米倉まな｜アポプラスステーション様 ご提案</a:t>
             </a:r>
-            <a:endParaRPr lang="en-US" sz="900" dirty="0"/>
+            <a:endParaRPr lang="en-US" sz="1200" dirty="0"/>
           </a:p>
         </p:txBody>
       </p:sp>
@@ -5713,17 +5713,17 @@
               <a:buNone/>
             </a:pPr>
             <a:r>
-              <a:rPr lang="en-US" sz="900" dirty="0">
+              <a:rPr lang="en-US" sz="1200" dirty="0">
                 <a:solidFill>
                   <a:srgbClr val="BDB2A2"/>
                 </a:solidFill>
-                <a:latin typeface="游ゴシック" pitchFamily="34" charset="0"/>
-                <a:ea typeface="游ゴシック" pitchFamily="34" charset="-122"/>
-                <a:cs typeface="游ゴシック" pitchFamily="34" charset="-120"/>
+                <a:latin typeface="メイリオ" pitchFamily="34" charset="0"/>
+                <a:ea typeface="メイリオ" pitchFamily="34" charset="-122"/>
+                <a:cs typeface="メイリオ" pitchFamily="34" charset="-120"/>
               </a:rPr>
               <a:t>1:30 → 2:20</a:t>
             </a:r>
-            <a:endParaRPr lang="en-US" sz="900" dirty="0"/>
+            <a:endParaRPr lang="en-US" sz="1200" dirty="0"/>
           </a:p>
         </p:txBody>
       </p:sp>
@@ -5787,7 +5787,7 @@
         </p:nvSpPr>
         <p:spPr>
           <a:xfrm>
-            <a:off x="996696" y="402336"/>
+            <a:off x="996696" y="365760"/>
             <a:ext cx="7315200" cy="310896"/>
           </a:xfrm>
           <a:prstGeom prst="rect">
@@ -5804,13 +5804,13 @@
               <a:buNone/>
             </a:pPr>
             <a:r>
-              <a:rPr lang="en-US" sz="1000" b="1" spc="200" kern="0" dirty="0">
+              <a:rPr lang="en-US" sz="1400" b="1" spc="200" kern="0" dirty="0">
                 <a:solidFill>
                   <a:srgbClr val="9C5446"/>
                 </a:solidFill>
-                <a:latin typeface="游明朝" pitchFamily="34" charset="0"/>
-                <a:ea typeface="游明朝" pitchFamily="34" charset="-122"/>
-                <a:cs typeface="游明朝" pitchFamily="34" charset="-120"/>
+                <a:latin typeface="メイリオ" pitchFamily="34" charset="0"/>
+                <a:ea typeface="メイリオ" pitchFamily="34" charset="-122"/>
+                <a:cs typeface="メイリオ" pitchFamily="34" charset="-120"/>
               </a:rPr>
               <a:t>04   </a:t>
             </a:r>
@@ -5818,17 +5818,17 @@
               <a:buNone/>
             </a:pPr>
             <a:r>
-              <a:rPr lang="en-US" sz="1000" spc="300" kern="0" dirty="0">
+              <a:rPr lang="en-US" sz="1400" spc="300" kern="0" dirty="0">
                 <a:solidFill>
                   <a:srgbClr val="8B8175"/>
                 </a:solidFill>
-                <a:latin typeface="游ゴシック" pitchFamily="34" charset="0"/>
-                <a:ea typeface="游ゴシック" pitchFamily="34" charset="-122"/>
-                <a:cs typeface="游ゴシック" pitchFamily="34" charset="-120"/>
+                <a:latin typeface="メイリオ" pitchFamily="34" charset="0"/>
+                <a:ea typeface="メイリオ" pitchFamily="34" charset="-122"/>
+                <a:cs typeface="メイリオ" pitchFamily="34" charset="-120"/>
               </a:rPr>
               <a:t>CASE</a:t>
             </a:r>
-            <a:endParaRPr lang="en-US" sz="1000" dirty="0"/>
+            <a:endParaRPr lang="en-US" sz="1400" dirty="0"/>
           </a:p>
         </p:txBody>
       </p:sp>
@@ -5840,7 +5840,7 @@
         </p:nvSpPr>
         <p:spPr>
           <a:xfrm>
-            <a:off x="685800" y="841248"/>
+            <a:off x="685800" y="777240"/>
             <a:ext cx="10820095" cy="777240"/>
           </a:xfrm>
           <a:prstGeom prst="rect">
@@ -5861,9 +5861,9 @@
                 <a:solidFill>
                   <a:srgbClr val="2B2620"/>
                 </a:solidFill>
-                <a:latin typeface="游明朝" pitchFamily="34" charset="0"/>
-                <a:ea typeface="游明朝" pitchFamily="34" charset="-122"/>
-                <a:cs typeface="游明朝" pitchFamily="34" charset="-120"/>
+                <a:latin typeface="メイリオ" pitchFamily="34" charset="0"/>
+                <a:ea typeface="メイリオ" pitchFamily="34" charset="-122"/>
+                <a:cs typeface="メイリオ" pitchFamily="34" charset="-120"/>
               </a:rPr>
               <a:t>「企業 × 鍼灸」は、すでに成立しています</a:t>
             </a:r>
@@ -5894,42 +5894,42 @@
           <a:p>
             <a:pPr marL="342900" indent="-342900">
               <a:lnSpc>
-                <a:spcPts val="1900"/>
+                <a:spcPts val="2400"/>
               </a:lnSpc>
               <a:buSzPct val="100000"/>
               <a:buChar char="•"/>
             </a:pPr>
             <a:r>
-              <a:rPr lang="en-US" sz="1050" dirty="0">
+              <a:rPr lang="en-US" sz="1400" dirty="0">
                 <a:solidFill>
                   <a:srgbClr val="5A5249"/>
                 </a:solidFill>
-                <a:latin typeface="游ゴシック" pitchFamily="34" charset="0"/>
-                <a:ea typeface="游ゴシック" pitchFamily="34" charset="-122"/>
-                <a:cs typeface="游ゴシック" pitchFamily="34" charset="-120"/>
+                <a:latin typeface="メイリオ" pitchFamily="34" charset="0"/>
+                <a:ea typeface="メイリオ" pitchFamily="34" charset="-122"/>
+                <a:cs typeface="メイリオ" pitchFamily="34" charset="-120"/>
               </a:rPr>
               <a:t>睡眠製品のブレインスリープ社は、</a:t>
             </a:r>
             <a:pPr indent="0" marL="0">
               <a:lnSpc>
-                <a:spcPts val="1900"/>
+                <a:spcPts val="2400"/>
               </a:lnSpc>
               <a:buNone/>
             </a:pPr>
             <a:r>
-              <a:rPr lang="en-US" sz="1050" b="1" dirty="0">
+              <a:rPr lang="en-US" sz="1400" b="1" dirty="0">
                 <a:solidFill>
                   <a:srgbClr val="2B2620"/>
                 </a:solidFill>
-                <a:latin typeface="游ゴシック" pitchFamily="34" charset="0"/>
-                <a:ea typeface="游ゴシック" pitchFamily="34" charset="-122"/>
-                <a:cs typeface="游ゴシック" pitchFamily="34" charset="-120"/>
+                <a:latin typeface="メイリオ" pitchFamily="34" charset="0"/>
+                <a:ea typeface="メイリオ" pitchFamily="34" charset="-122"/>
+                <a:cs typeface="メイリオ" pitchFamily="34" charset="-120"/>
               </a:rPr>
               <a:t>睡眠専門の鍼灸マッサージ「コンディショニングスタジオ」</a:t>
             </a:r>
             <a:pPr indent="0" marL="0">
               <a:lnSpc>
-                <a:spcPts val="1900"/>
+                <a:spcPts val="2400"/>
               </a:lnSpc>
               <a:spcAft>
                 <a:spcPts val="1000"/>
@@ -5937,91 +5937,91 @@
               <a:buNone/>
             </a:pPr>
             <a:r>
-              <a:rPr lang="en-US" sz="1050" dirty="0">
+              <a:rPr lang="en-US" sz="1400" dirty="0">
                 <a:solidFill>
                   <a:srgbClr val="5A5249"/>
                 </a:solidFill>
-                <a:latin typeface="游ゴシック" pitchFamily="34" charset="0"/>
-                <a:ea typeface="游ゴシック" pitchFamily="34" charset="-122"/>
-                <a:cs typeface="游ゴシック" pitchFamily="34" charset="-120"/>
+                <a:latin typeface="メイリオ" pitchFamily="34" charset="0"/>
+                <a:ea typeface="メイリオ" pitchFamily="34" charset="-122"/>
+                <a:cs typeface="メイリオ" pitchFamily="34" charset="-120"/>
               </a:rPr>
               <a:t>を自社ブランドで運営。枕の売り場ではなく、独立した鍼灸院です。</a:t>
             </a:r>
-            <a:endParaRPr lang="en-US" sz="1050" dirty="0"/>
+            <a:endParaRPr lang="en-US" sz="1400" dirty="0"/>
           </a:p>
           <a:p>
             <a:pPr marL="342900" indent="-342900">
               <a:lnSpc>
-                <a:spcPts val="1900"/>
+                <a:spcPts val="2400"/>
               </a:lnSpc>
               <a:buSzPct val="100000"/>
               <a:buChar char="•"/>
             </a:pPr>
             <a:r>
-              <a:rPr lang="en-US" sz="1050" dirty="0">
+              <a:rPr lang="en-US" sz="1400" dirty="0">
                 <a:solidFill>
                   <a:srgbClr val="5A5249"/>
                 </a:solidFill>
-                <a:latin typeface="游ゴシック" pitchFamily="34" charset="0"/>
-                <a:ea typeface="游ゴシック" pitchFamily="34" charset="-122"/>
-                <a:cs typeface="游ゴシック" pitchFamily="34" charset="-120"/>
+                <a:latin typeface="メイリオ" pitchFamily="34" charset="0"/>
+                <a:ea typeface="メイリオ" pitchFamily="34" charset="-122"/>
+                <a:cs typeface="メイリオ" pitchFamily="34" charset="-120"/>
               </a:rPr>
               <a:t>二子玉川・南青山・</a:t>
             </a:r>
             <a:pPr indent="0" marL="0">
               <a:lnSpc>
-                <a:spcPts val="1900"/>
+                <a:spcPts val="2400"/>
               </a:lnSpc>
               <a:buNone/>
             </a:pPr>
             <a:r>
-              <a:rPr lang="en-US" sz="1050" b="1" dirty="0">
+              <a:rPr lang="en-US" sz="1400" b="1" dirty="0">
                 <a:solidFill>
                   <a:srgbClr val="2B2620"/>
                 </a:solidFill>
-                <a:latin typeface="游ゴシック" pitchFamily="34" charset="0"/>
-                <a:ea typeface="游ゴシック" pitchFamily="34" charset="-122"/>
-                <a:cs typeface="游ゴシック" pitchFamily="34" charset="-120"/>
+                <a:latin typeface="メイリオ" pitchFamily="34" charset="0"/>
+                <a:ea typeface="メイリオ" pitchFamily="34" charset="-122"/>
+                <a:cs typeface="メイリオ" pitchFamily="34" charset="-120"/>
               </a:rPr>
               <a:t>有楽町マルイ</a:t>
             </a:r>
             <a:pPr indent="0" marL="0">
               <a:lnSpc>
-                <a:spcPts val="1900"/>
+                <a:spcPts val="2400"/>
               </a:lnSpc>
               <a:buNone/>
             </a:pPr>
             <a:r>
-              <a:rPr lang="en-US" sz="1050" dirty="0">
+              <a:rPr lang="en-US" sz="1400" dirty="0">
                 <a:solidFill>
                   <a:srgbClr val="5A5249"/>
                 </a:solidFill>
-                <a:latin typeface="游ゴシック" pitchFamily="34" charset="0"/>
-                <a:ea typeface="游ゴシック" pitchFamily="34" charset="-122"/>
-                <a:cs typeface="游ゴシック" pitchFamily="34" charset="-120"/>
+                <a:latin typeface="メイリオ" pitchFamily="34" charset="0"/>
+                <a:ea typeface="メイリオ" pitchFamily="34" charset="-122"/>
+                <a:cs typeface="メイリオ" pitchFamily="34" charset="-120"/>
               </a:rPr>
               <a:t>・東京ミッドタウン八重洲の</a:t>
             </a:r>
             <a:pPr indent="0" marL="0">
               <a:lnSpc>
-                <a:spcPts val="1900"/>
+                <a:spcPts val="2400"/>
               </a:lnSpc>
               <a:buNone/>
             </a:pPr>
             <a:r>
-              <a:rPr lang="en-US" sz="1050" b="1" dirty="0">
+              <a:rPr lang="en-US" sz="1400" b="1" dirty="0">
                 <a:solidFill>
                   <a:srgbClr val="2B2620"/>
                 </a:solidFill>
-                <a:latin typeface="游ゴシック" pitchFamily="34" charset="0"/>
-                <a:ea typeface="游ゴシック" pitchFamily="34" charset="-122"/>
-                <a:cs typeface="游ゴシック" pitchFamily="34" charset="-120"/>
+                <a:latin typeface="メイリオ" pitchFamily="34" charset="0"/>
+                <a:ea typeface="メイリオ" pitchFamily="34" charset="-122"/>
+                <a:cs typeface="メイリオ" pitchFamily="34" charset="-120"/>
               </a:rPr>
               <a:t>4店舗</a:t>
             </a:r>
             <a:pPr indent="0" marL="0">
               <a:lnSpc>
-                <a:spcPts val="1900"/>
+                <a:spcPts val="2400"/>
               </a:lnSpc>
               <a:spcAft>
                 <a:spcPts val="1000"/>
@@ -6029,125 +6029,125 @@
               <a:buNone/>
             </a:pPr>
             <a:r>
-              <a:rPr lang="en-US" sz="1050" dirty="0">
+              <a:rPr lang="en-US" sz="1400" dirty="0">
                 <a:solidFill>
                   <a:srgbClr val="5A5249"/>
                 </a:solidFill>
-                <a:latin typeface="游ゴシック" pitchFamily="34" charset="0"/>
-                <a:ea typeface="游ゴシック" pitchFamily="34" charset="-122"/>
-                <a:cs typeface="游ゴシック" pitchFamily="34" charset="-120"/>
-              </a:rPr>
-              <a:t>。商業施設側である丸井グループも、自らプレスリリースを出しています。</a:t>
-            </a:r>
-            <a:endParaRPr lang="en-US" sz="1050" dirty="0"/>
+                <a:latin typeface="メイリオ" pitchFamily="34" charset="0"/>
+                <a:ea typeface="メイリオ" pitchFamily="34" charset="-122"/>
+                <a:cs typeface="メイリオ" pitchFamily="34" charset="-120"/>
+              </a:rPr>
+              <a:t>。商業施設側の丸井グループも、自らプレスリリースを出しています。</a:t>
+            </a:r>
+            <a:endParaRPr lang="en-US" sz="1400" dirty="0"/>
           </a:p>
           <a:p>
             <a:pPr marL="342900" indent="-342900">
               <a:lnSpc>
-                <a:spcPts val="1900"/>
+                <a:spcPts val="2400"/>
               </a:lnSpc>
               <a:buSzPct val="100000"/>
               <a:buChar char="•"/>
             </a:pPr>
             <a:r>
-              <a:rPr lang="en-US" sz="1050" dirty="0">
+              <a:rPr lang="en-US" sz="1400" dirty="0">
                 <a:solidFill>
                   <a:srgbClr val="5A5249"/>
                 </a:solidFill>
-                <a:latin typeface="游ゴシック" pitchFamily="34" charset="0"/>
-                <a:ea typeface="游ゴシック" pitchFamily="34" charset="-122"/>
-                <a:cs typeface="游ゴシック" pitchFamily="34" charset="-120"/>
+                <a:latin typeface="メイリオ" pitchFamily="34" charset="0"/>
+                <a:ea typeface="メイリオ" pitchFamily="34" charset="-122"/>
+                <a:cs typeface="メイリオ" pitchFamily="34" charset="-120"/>
               </a:rPr>
               <a:t>オープン以来</a:t>
             </a:r>
             <a:pPr indent="0" marL="0">
               <a:lnSpc>
-                <a:spcPts val="1900"/>
+                <a:spcPts val="2400"/>
               </a:lnSpc>
               <a:buNone/>
             </a:pPr>
             <a:r>
-              <a:rPr lang="en-US" sz="1050" b="1" dirty="0">
+              <a:rPr lang="en-US" sz="1400" b="1" dirty="0">
                 <a:solidFill>
                   <a:srgbClr val="2B2620"/>
                 </a:solidFill>
-                <a:latin typeface="游ゴシック" pitchFamily="34" charset="0"/>
-                <a:ea typeface="游ゴシック" pitchFamily="34" charset="-122"/>
-                <a:cs typeface="游ゴシック" pitchFamily="34" charset="-120"/>
+                <a:latin typeface="メイリオ" pitchFamily="34" charset="0"/>
+                <a:ea typeface="メイリオ" pitchFamily="34" charset="-122"/>
+                <a:cs typeface="メイリオ" pitchFamily="34" charset="-120"/>
               </a:rPr>
               <a:t>累計1万人以上</a:t>
             </a:r>
             <a:pPr indent="0" marL="0">
               <a:lnSpc>
-                <a:spcPts val="1900"/>
+                <a:spcPts val="2400"/>
               </a:lnSpc>
               <a:buNone/>
             </a:pPr>
             <a:r>
-              <a:rPr lang="en-US" sz="1050" dirty="0">
+              <a:rPr lang="en-US" sz="1400" dirty="0">
                 <a:solidFill>
                   <a:srgbClr val="5A5249"/>
                 </a:solidFill>
-                <a:latin typeface="游ゴシック" pitchFamily="34" charset="0"/>
-                <a:ea typeface="游ゴシック" pitchFamily="34" charset="-122"/>
-                <a:cs typeface="游ゴシック" pitchFamily="34" charset="-120"/>
+                <a:latin typeface="メイリオ" pitchFamily="34" charset="0"/>
+                <a:ea typeface="メイリオ" pitchFamily="34" charset="-122"/>
+                <a:cs typeface="メイリオ" pitchFamily="34" charset="-120"/>
               </a:rPr>
               <a:t>が利用。自社研究では、1度の施術で眠りの深さが</a:t>
             </a:r>
             <a:pPr indent="0" marL="0">
               <a:lnSpc>
-                <a:spcPts val="1900"/>
+                <a:spcPts val="2400"/>
               </a:lnSpc>
               <a:buNone/>
             </a:pPr>
             <a:r>
-              <a:rPr lang="en-US" sz="1050" b="1" dirty="0">
+              <a:rPr lang="en-US" sz="1400" b="1" dirty="0">
                 <a:solidFill>
                   <a:srgbClr val="2B2620"/>
                 </a:solidFill>
-                <a:latin typeface="游ゴシック" pitchFamily="34" charset="0"/>
-                <a:ea typeface="游ゴシック" pitchFamily="34" charset="-122"/>
-                <a:cs typeface="游ゴシック" pitchFamily="34" charset="-120"/>
+                <a:latin typeface="メイリオ" pitchFamily="34" charset="0"/>
+                <a:ea typeface="メイリオ" pitchFamily="34" charset="-122"/>
+                <a:cs typeface="メイリオ" pitchFamily="34" charset="-120"/>
               </a:rPr>
               <a:t>35%</a:t>
             </a:r>
             <a:pPr indent="0" marL="0">
               <a:lnSpc>
-                <a:spcPts val="1900"/>
+                <a:spcPts val="2400"/>
               </a:lnSpc>
               <a:buNone/>
             </a:pPr>
             <a:r>
-              <a:rPr lang="en-US" sz="1050" dirty="0">
+              <a:rPr lang="en-US" sz="1400" dirty="0">
                 <a:solidFill>
                   <a:srgbClr val="5A5249"/>
                 </a:solidFill>
-                <a:latin typeface="游ゴシック" pitchFamily="34" charset="0"/>
-                <a:ea typeface="游ゴシック" pitchFamily="34" charset="-122"/>
-                <a:cs typeface="游ゴシック" pitchFamily="34" charset="-120"/>
+                <a:latin typeface="メイリオ" pitchFamily="34" charset="0"/>
+                <a:ea typeface="メイリオ" pitchFamily="34" charset="-122"/>
+                <a:cs typeface="メイリオ" pitchFamily="34" charset="-120"/>
               </a:rPr>
               <a:t>、疲労回復度が</a:t>
             </a:r>
             <a:pPr indent="0" marL="0">
               <a:lnSpc>
-                <a:spcPts val="1900"/>
+                <a:spcPts val="2400"/>
               </a:lnSpc>
               <a:buNone/>
             </a:pPr>
             <a:r>
-              <a:rPr lang="en-US" sz="1050" b="1" dirty="0">
+              <a:rPr lang="en-US" sz="1400" b="1" dirty="0">
                 <a:solidFill>
                   <a:srgbClr val="2B2620"/>
                 </a:solidFill>
-                <a:latin typeface="游ゴシック" pitchFamily="34" charset="0"/>
-                <a:ea typeface="游ゴシック" pitchFamily="34" charset="-122"/>
-                <a:cs typeface="游ゴシック" pitchFamily="34" charset="-120"/>
+                <a:latin typeface="メイリオ" pitchFamily="34" charset="0"/>
+                <a:ea typeface="メイリオ" pitchFamily="34" charset="-122"/>
+                <a:cs typeface="メイリオ" pitchFamily="34" charset="-120"/>
               </a:rPr>
               <a:t>59%</a:t>
             </a:r>
             <a:pPr indent="0" marL="0">
               <a:lnSpc>
-                <a:spcPts val="1900"/>
+                <a:spcPts val="2400"/>
               </a:lnSpc>
               <a:spcAft>
                 <a:spcPts val="1000"/>
@@ -6155,57 +6155,57 @@
               <a:buNone/>
             </a:pPr>
             <a:r>
-              <a:rPr lang="en-US" sz="1050" dirty="0">
+              <a:rPr lang="en-US" sz="1400" dirty="0">
                 <a:solidFill>
                   <a:srgbClr val="5A5249"/>
                 </a:solidFill>
-                <a:latin typeface="游ゴシック" pitchFamily="34" charset="0"/>
-                <a:ea typeface="游ゴシック" pitchFamily="34" charset="-122"/>
-                <a:cs typeface="游ゴシック" pitchFamily="34" charset="-120"/>
+                <a:latin typeface="メイリオ" pitchFamily="34" charset="0"/>
+                <a:ea typeface="メイリオ" pitchFamily="34" charset="-122"/>
+                <a:cs typeface="メイリオ" pitchFamily="34" charset="-120"/>
               </a:rPr>
               <a:t>向上したと公表。</a:t>
             </a:r>
-            <a:endParaRPr lang="en-US" sz="1050" dirty="0"/>
+            <a:endParaRPr lang="en-US" sz="1400" dirty="0"/>
           </a:p>
           <a:p>
             <a:pPr marL="342900" indent="-342900">
               <a:lnSpc>
-                <a:spcPts val="1900"/>
+                <a:spcPts val="2400"/>
               </a:lnSpc>
               <a:buSzPct val="100000"/>
               <a:buChar char="•"/>
             </a:pPr>
             <a:r>
-              <a:rPr lang="en-US" sz="1050" dirty="0">
+              <a:rPr lang="en-US" sz="1400" dirty="0">
                 <a:solidFill>
                   <a:srgbClr val="5A5249"/>
                 </a:solidFill>
-                <a:latin typeface="游ゴシック" pitchFamily="34" charset="0"/>
-                <a:ea typeface="游ゴシック" pitchFamily="34" charset="-122"/>
-                <a:cs typeface="游ゴシック" pitchFamily="34" charset="-120"/>
-              </a:rPr>
-              <a:t>スタッフは全員が国家資格保有者で、自社資格「スリーププランナー」を取得。</a:t>
+                <a:latin typeface="メイリオ" pitchFamily="34" charset="0"/>
+                <a:ea typeface="メイリオ" pitchFamily="34" charset="-122"/>
+                <a:cs typeface="メイリオ" pitchFamily="34" charset="-120"/>
+              </a:rPr>
+              <a:t>スタッフは全員が国家資格保有者。自社資格「スリーププランナー」も取得。</a:t>
             </a:r>
             <a:pPr indent="0" marL="0">
               <a:lnSpc>
-                <a:spcPts val="1900"/>
+                <a:spcPts val="2400"/>
               </a:lnSpc>
               <a:buNone/>
             </a:pPr>
             <a:r>
-              <a:rPr lang="en-US" sz="1050" b="1" dirty="0">
+              <a:rPr lang="en-US" sz="1400" b="1" dirty="0">
                 <a:solidFill>
                   <a:srgbClr val="2B2620"/>
                 </a:solidFill>
-                <a:latin typeface="游ゴシック" pitchFamily="34" charset="0"/>
-                <a:ea typeface="游ゴシック" pitchFamily="34" charset="-122"/>
-                <a:cs typeface="游ゴシック" pitchFamily="34" charset="-120"/>
+                <a:latin typeface="メイリオ" pitchFamily="34" charset="0"/>
+                <a:ea typeface="メイリオ" pitchFamily="34" charset="-122"/>
+                <a:cs typeface="メイリオ" pitchFamily="34" charset="-120"/>
               </a:rPr>
               <a:t>定額プラン</a:t>
             </a:r>
             <a:pPr indent="0" marL="0">
               <a:lnSpc>
-                <a:spcPts val="1900"/>
+                <a:spcPts val="2400"/>
               </a:lnSpc>
               <a:spcAft>
                 <a:spcPts val="1000"/>
@@ -6213,17 +6213,17 @@
               <a:buNone/>
             </a:pPr>
             <a:r>
-              <a:rPr lang="en-US" sz="1050" dirty="0">
+              <a:rPr lang="en-US" sz="1400" dirty="0">
                 <a:solidFill>
                   <a:srgbClr val="5A5249"/>
                 </a:solidFill>
-                <a:latin typeface="游ゴシック" pitchFamily="34" charset="0"/>
-                <a:ea typeface="游ゴシック" pitchFamily="34" charset="-122"/>
-                <a:cs typeface="游ゴシック" pitchFamily="34" charset="-120"/>
+                <a:latin typeface="メイリオ" pitchFamily="34" charset="0"/>
+                <a:ea typeface="メイリオ" pitchFamily="34" charset="-122"/>
+                <a:cs typeface="メイリオ" pitchFamily="34" charset="-120"/>
               </a:rPr>
               <a:t>で、継続して通う前提が設計されています。</a:t>
             </a:r>
-            <a:endParaRPr lang="en-US" sz="1050" dirty="0"/>
+            <a:endParaRPr lang="en-US" sz="1400" dirty="0"/>
           </a:p>
         </p:txBody>
       </p:sp>
@@ -6279,17 +6279,17 @@
               <a:buNone/>
             </a:pPr>
             <a:r>
-              <a:rPr lang="en-US" sz="900" b="1" spc="200" kern="0" dirty="0">
+              <a:rPr lang="en-US" sz="1200" b="1" spc="100" kern="0" dirty="0">
                 <a:solidFill>
                   <a:srgbClr val="5E7060"/>
                 </a:solidFill>
-                <a:latin typeface="游ゴシック" pitchFamily="34" charset="0"/>
-                <a:ea typeface="游ゴシック" pitchFamily="34" charset="-122"/>
-                <a:cs typeface="游ゴシック" pitchFamily="34" charset="-120"/>
+                <a:latin typeface="メイリオ" pitchFamily="34" charset="0"/>
+                <a:ea typeface="メイリオ" pitchFamily="34" charset="-122"/>
+                <a:cs typeface="メイリオ" pitchFamily="34" charset="-120"/>
               </a:rPr>
               <a:t>ここから私が受け取ったこと</a:t>
             </a:r>
-            <a:endParaRPr lang="en-US" sz="900" dirty="0"/>
+            <a:endParaRPr lang="en-US" sz="1200" dirty="0"/>
           </a:p>
         </p:txBody>
       </p:sp>
@@ -6321,17 +6321,17 @@
               <a:buNone/>
             </a:pPr>
             <a:r>
-              <a:rPr lang="en-US" sz="1100" dirty="0">
+              <a:rPr lang="en-US" sz="1400" dirty="0">
                 <a:solidFill>
                   <a:srgbClr val="5A5249"/>
                 </a:solidFill>
-                <a:latin typeface="游ゴシック" pitchFamily="34" charset="0"/>
-                <a:ea typeface="游ゴシック" pitchFamily="34" charset="-122"/>
-                <a:cs typeface="游ゴシック" pitchFamily="34" charset="-120"/>
+                <a:latin typeface="メイリオ" pitchFamily="34" charset="0"/>
+                <a:ea typeface="メイリオ" pitchFamily="34" charset="-122"/>
+                <a:cs typeface="メイリオ" pitchFamily="34" charset="-120"/>
               </a:rPr>
               <a:t>製品を売って終わりにせず、施術という接点で人と関わり続ける。効果を数字で示し、資格者を自社で育て、定額で通ってもらう。このあとお話しする私の事業も、同じ構造です。</a:t>
             </a:r>
-            <a:endParaRPr lang="en-US" sz="1100" dirty="0"/>
+            <a:endParaRPr lang="en-US" sz="1400" dirty="0"/>
           </a:p>
           <a:p>
             <a:pPr indent="0" marL="0">
@@ -6340,7 +6340,7 @@
               </a:lnSpc>
               <a:buNone/>
             </a:pPr>
-            <a:endParaRPr lang="en-US" sz="1100" dirty="0"/>
+            <a:endParaRPr lang="en-US" sz="1400" dirty="0"/>
           </a:p>
           <a:p>
             <a:pPr indent="0" marL="0">
@@ -6350,17 +6350,17 @@
               <a:buNone/>
             </a:pPr>
             <a:r>
-              <a:rPr lang="en-US" sz="1100" dirty="0">
+              <a:rPr lang="en-US" sz="1400" dirty="0">
                 <a:solidFill>
                   <a:srgbClr val="5A5249"/>
                 </a:solidFill>
-                <a:latin typeface="游ゴシック" pitchFamily="34" charset="0"/>
-                <a:ea typeface="游ゴシック" pitchFamily="34" charset="-122"/>
-                <a:cs typeface="游ゴシック" pitchFamily="34" charset="-120"/>
+                <a:latin typeface="メイリオ" pitchFamily="34" charset="0"/>
+                <a:ea typeface="メイリオ" pitchFamily="34" charset="-122"/>
+                <a:cs typeface="メイリオ" pitchFamily="34" charset="-120"/>
               </a:rPr>
               <a:t>違いは入口です。</a:t>
             </a:r>
-            <a:endParaRPr lang="en-US" sz="1100" dirty="0"/>
+            <a:endParaRPr lang="en-US" sz="1400" dirty="0"/>
           </a:p>
           <a:p>
             <a:pPr indent="0" marL="0">
@@ -6370,59 +6370,59 @@
               <a:buNone/>
             </a:pPr>
             <a:r>
-              <a:rPr lang="en-US" sz="1100" b="1" dirty="0">
+              <a:rPr lang="en-US" sz="1400" b="1" dirty="0">
                 <a:solidFill>
                   <a:srgbClr val="2B2620"/>
                 </a:solidFill>
-                <a:latin typeface="游ゴシック" pitchFamily="34" charset="0"/>
-                <a:ea typeface="游ゴシック" pitchFamily="34" charset="-122"/>
-                <a:cs typeface="游ゴシック" pitchFamily="34" charset="-120"/>
+                <a:latin typeface="メイリオ" pitchFamily="34" charset="0"/>
+                <a:ea typeface="メイリオ" pitchFamily="34" charset="-122"/>
+                <a:cs typeface="メイリオ" pitchFamily="34" charset="-120"/>
               </a:rPr>
               <a:t>あの会社は「睡眠」から入った。私は「こころ」から入ります。</a:t>
             </a:r>
+            <a:endParaRPr lang="en-US" sz="1400" dirty="0"/>
+          </a:p>
+        </p:txBody>
+      </p:sp>
+      <p:sp>
+        <p:nvSpPr>
+          <p:cNvPr id="9" name="Text 7"/>
+          <p:cNvSpPr txBox="1"/>
+          <p:nvPr/>
+        </p:nvSpPr>
+        <p:spPr>
+          <a:xfrm>
+            <a:off x="685800" y="5852160"/>
+            <a:ext cx="10820095" cy="457200"/>
+          </a:xfrm>
+          <a:prstGeom prst="rect">
+            <a:avLst/>
+          </a:prstGeom>
+          <a:noFill/>
+          <a:ln/>
+        </p:spPr>
+        <p:txBody>
+          <a:bodyPr wrap="square" lIns="0" tIns="0" rIns="0" bIns="0" rtlCol="0" anchor="t"/>
+          <a:lstStyle/>
+          <a:p>
+            <a:pPr indent="0" marL="0">
+              <a:lnSpc>
+                <a:spcPts val="1500"/>
+              </a:lnSpc>
+              <a:buNone/>
+            </a:pPr>
+            <a:r>
+              <a:rPr lang="en-US" sz="1100" dirty="0">
+                <a:solidFill>
+                  <a:srgbClr val="8B8175"/>
+                </a:solidFill>
+                <a:latin typeface="メイリオ" pitchFamily="34" charset="0"/>
+                <a:ea typeface="メイリオ" pitchFamily="34" charset="-122"/>
+                <a:cs typeface="メイリオ" pitchFamily="34" charset="-120"/>
+              </a:rPr>
+              <a:t>出典：株式会社丸井グループ プレスリリース（2024.11.15）／株式会社ブレインスリープ プレスリリース／ブレインスリープ コンディショニングスタジオ 公式サイト</a:t>
+            </a:r>
             <a:endParaRPr lang="en-US" sz="1100" dirty="0"/>
-          </a:p>
-        </p:txBody>
-      </p:sp>
-      <p:sp>
-        <p:nvSpPr>
-          <p:cNvPr id="9" name="Text 7"/>
-          <p:cNvSpPr txBox="1"/>
-          <p:nvPr/>
-        </p:nvSpPr>
-        <p:spPr>
-          <a:xfrm>
-            <a:off x="685800" y="5852160"/>
-            <a:ext cx="10820095" cy="329184"/>
-          </a:xfrm>
-          <a:prstGeom prst="rect">
-            <a:avLst/>
-          </a:prstGeom>
-          <a:noFill/>
-          <a:ln/>
-        </p:spPr>
-        <p:txBody>
-          <a:bodyPr wrap="square" lIns="0" tIns="0" rIns="0" bIns="0" rtlCol="0" anchor="t"/>
-          <a:lstStyle/>
-          <a:p>
-            <a:pPr indent="0" marL="0">
-              <a:lnSpc>
-                <a:spcPts val="1100"/>
-              </a:lnSpc>
-              <a:buNone/>
-            </a:pPr>
-            <a:r>
-              <a:rPr lang="en-US" sz="750" dirty="0">
-                <a:solidFill>
-                  <a:srgbClr val="8B8175"/>
-                </a:solidFill>
-                <a:latin typeface="游ゴシック" pitchFamily="34" charset="0"/>
-                <a:ea typeface="游ゴシック" pitchFamily="34" charset="-122"/>
-                <a:cs typeface="游ゴシック" pitchFamily="34" charset="-120"/>
-              </a:rPr>
-              <a:t>出典：株式会社丸井グループ プレスリリース（2024.11.15）／株式会社ブレインスリープ プレスリリース／ブレインスリープ コンディショニングスタジオ 公式サイト</a:t>
-            </a:r>
-            <a:endParaRPr lang="en-US" sz="750" dirty="0"/>
           </a:p>
         </p:txBody>
       </p:sp>
@@ -6451,17 +6451,17 @@
               <a:buNone/>
             </a:pPr>
             <a:r>
-              <a:rPr lang="en-US" sz="900" spc="100" kern="0" dirty="0">
+              <a:rPr lang="en-US" sz="1200" spc="100" kern="0" dirty="0">
                 <a:solidFill>
                   <a:srgbClr val="8B8175"/>
                 </a:solidFill>
-                <a:latin typeface="游ゴシック" pitchFamily="34" charset="0"/>
-                <a:ea typeface="游ゴシック" pitchFamily="34" charset="-122"/>
-                <a:cs typeface="游ゴシック" pitchFamily="34" charset="-120"/>
+                <a:latin typeface="メイリオ" pitchFamily="34" charset="0"/>
+                <a:ea typeface="メイリオ" pitchFamily="34" charset="-122"/>
+                <a:cs typeface="メイリオ" pitchFamily="34" charset="-120"/>
               </a:rPr>
               <a:t>米倉まな｜アポプラスステーション様 ご提案</a:t>
             </a:r>
-            <a:endParaRPr lang="en-US" sz="900" dirty="0"/>
+            <a:endParaRPr lang="en-US" sz="1200" dirty="0"/>
           </a:p>
         </p:txBody>
       </p:sp>
@@ -6490,17 +6490,17 @@
               <a:buNone/>
             </a:pPr>
             <a:r>
-              <a:rPr lang="en-US" sz="900" dirty="0">
+              <a:rPr lang="en-US" sz="1200" dirty="0">
                 <a:solidFill>
                   <a:srgbClr val="8B8175"/>
                 </a:solidFill>
-                <a:latin typeface="游ゴシック" pitchFamily="34" charset="0"/>
-                <a:ea typeface="游ゴシック" pitchFamily="34" charset="-122"/>
-                <a:cs typeface="游ゴシック" pitchFamily="34" charset="-120"/>
+                <a:latin typeface="メイリオ" pitchFamily="34" charset="0"/>
+                <a:ea typeface="メイリオ" pitchFamily="34" charset="-122"/>
+                <a:cs typeface="メイリオ" pitchFamily="34" charset="-120"/>
               </a:rPr>
               <a:t>2:20 → 2:55</a:t>
             </a:r>
-            <a:endParaRPr lang="en-US" sz="900" dirty="0"/>
+            <a:endParaRPr lang="en-US" sz="1200" dirty="0"/>
           </a:p>
         </p:txBody>
       </p:sp>
@@ -6564,7 +6564,7 @@
         </p:nvSpPr>
         <p:spPr>
           <a:xfrm>
-            <a:off x="996696" y="402336"/>
+            <a:off x="996696" y="365760"/>
             <a:ext cx="7315200" cy="310896"/>
           </a:xfrm>
           <a:prstGeom prst="rect">
@@ -6581,13 +6581,13 @@
               <a:buNone/>
             </a:pPr>
             <a:r>
-              <a:rPr lang="en-US" sz="1000" b="1" spc="200" kern="0" dirty="0">
+              <a:rPr lang="en-US" sz="1400" b="1" spc="200" kern="0" dirty="0">
                 <a:solidFill>
                   <a:srgbClr val="9C5446"/>
                 </a:solidFill>
-                <a:latin typeface="游明朝" pitchFamily="34" charset="0"/>
-                <a:ea typeface="游明朝" pitchFamily="34" charset="-122"/>
-                <a:cs typeface="游明朝" pitchFamily="34" charset="-120"/>
+                <a:latin typeface="メイリオ" pitchFamily="34" charset="0"/>
+                <a:ea typeface="メイリオ" pitchFamily="34" charset="-122"/>
+                <a:cs typeface="メイリオ" pitchFamily="34" charset="-120"/>
               </a:rPr>
               <a:t>05   </a:t>
             </a:r>
@@ -6595,17 +6595,17 @@
               <a:buNone/>
             </a:pPr>
             <a:r>
-              <a:rPr lang="en-US" sz="1000" spc="300" kern="0" dirty="0">
+              <a:rPr lang="en-US" sz="1400" spc="300" kern="0" dirty="0">
                 <a:solidFill>
                   <a:srgbClr val="8B8175"/>
                 </a:solidFill>
-                <a:latin typeface="游ゴシック" pitchFamily="34" charset="0"/>
-                <a:ea typeface="游ゴシック" pitchFamily="34" charset="-122"/>
-                <a:cs typeface="游ゴシック" pitchFamily="34" charset="-120"/>
+                <a:latin typeface="メイリオ" pitchFamily="34" charset="0"/>
+                <a:ea typeface="メイリオ" pitchFamily="34" charset="-122"/>
+                <a:cs typeface="メイリオ" pitchFamily="34" charset="-120"/>
               </a:rPr>
               <a:t>ACTION</a:t>
             </a:r>
-            <a:endParaRPr lang="en-US" sz="1000" dirty="0"/>
+            <a:endParaRPr lang="en-US" sz="1400" dirty="0"/>
           </a:p>
         </p:txBody>
       </p:sp>
@@ -6617,7 +6617,7 @@
         </p:nvSpPr>
         <p:spPr>
           <a:xfrm>
-            <a:off x="685800" y="841248"/>
+            <a:off x="685800" y="777240"/>
             <a:ext cx="10820095" cy="777240"/>
           </a:xfrm>
           <a:prstGeom prst="rect">
@@ -6638,9 +6638,9 @@
                 <a:solidFill>
                   <a:srgbClr val="2B2620"/>
                 </a:solidFill>
-                <a:latin typeface="游明朝" pitchFamily="34" charset="0"/>
-                <a:ea typeface="游明朝" pitchFamily="34" charset="-122"/>
-                <a:cs typeface="游明朝" pitchFamily="34" charset="-120"/>
+                <a:latin typeface="メイリオ" pitchFamily="34" charset="0"/>
+                <a:ea typeface="メイリオ" pitchFamily="34" charset="-122"/>
+                <a:cs typeface="メイリオ" pitchFamily="34" charset="-120"/>
               </a:rPr>
               <a:t>新規事業「ねここち」を立ち上げます</a:t>
             </a:r>
@@ -6671,25 +6671,25 @@
           <a:p>
             <a:pPr marL="342900" indent="-342900">
               <a:lnSpc>
-                <a:spcPts val="1900"/>
+                <a:spcPts val="2400"/>
               </a:lnSpc>
               <a:buSzPct val="100000"/>
               <a:buChar char="•"/>
             </a:pPr>
             <a:r>
-              <a:rPr lang="en-US" sz="1100" b="1" dirty="0">
+              <a:rPr lang="en-US" sz="1400" b="1" dirty="0">
                 <a:solidFill>
                   <a:srgbClr val="2B2620"/>
                 </a:solidFill>
-                <a:latin typeface="游ゴシック" pitchFamily="34" charset="0"/>
-                <a:ea typeface="游ゴシック" pitchFamily="34" charset="-122"/>
-                <a:cs typeface="游ゴシック" pitchFamily="34" charset="-120"/>
+                <a:latin typeface="メイリオ" pitchFamily="34" charset="0"/>
+                <a:ea typeface="メイリオ" pitchFamily="34" charset="-122"/>
+                <a:cs typeface="メイリオ" pitchFamily="34" charset="-120"/>
               </a:rPr>
               <a:t>ねここち</a:t>
             </a:r>
             <a:pPr indent="0" marL="0">
               <a:lnSpc>
-                <a:spcPts val="1900"/>
+                <a:spcPts val="2400"/>
               </a:lnSpc>
               <a:spcAft>
                 <a:spcPts val="1000"/>
@@ -6697,57 +6697,57 @@
               <a:buNone/>
             </a:pPr>
             <a:r>
-              <a:rPr lang="en-US" sz="1100" dirty="0">
+              <a:rPr lang="en-US" sz="1400" dirty="0">
                 <a:solidFill>
                   <a:srgbClr val="5A5249"/>
                 </a:solidFill>
-                <a:latin typeface="游ゴシック" pitchFamily="34" charset="0"/>
-                <a:ea typeface="游ゴシック" pitchFamily="34" charset="-122"/>
-                <a:cs typeface="游ゴシック" pitchFamily="34" charset="-120"/>
-              </a:rPr>
-              <a:t>／頭オフ事業。考えごとで止まらない頭を、強制的にオフにする時間を売ります。いま立ち上げを準備しています。</a:t>
-            </a:r>
-            <a:endParaRPr lang="en-US" sz="1100" dirty="0"/>
+                <a:latin typeface="メイリオ" pitchFamily="34" charset="0"/>
+                <a:ea typeface="メイリオ" pitchFamily="34" charset="-122"/>
+                <a:cs typeface="メイリオ" pitchFamily="34" charset="-120"/>
+              </a:rPr>
+              <a:t>／頭オフ事業。考えごとで止まらない頭を、強制的にオフにする時間を売ります。いま準備中です。</a:t>
+            </a:r>
+            <a:endParaRPr lang="en-US" sz="1400" dirty="0"/>
           </a:p>
           <a:p>
             <a:pPr marL="342900" indent="-342900">
               <a:lnSpc>
-                <a:spcPts val="1900"/>
+                <a:spcPts val="2400"/>
               </a:lnSpc>
               <a:buSzPct val="100000"/>
               <a:buChar char="•"/>
             </a:pPr>
             <a:r>
-              <a:rPr lang="en-US" sz="1100" dirty="0">
+              <a:rPr lang="en-US" sz="1400" dirty="0">
                 <a:solidFill>
                   <a:srgbClr val="5A5249"/>
                 </a:solidFill>
-                <a:latin typeface="游ゴシック" pitchFamily="34" charset="0"/>
-                <a:ea typeface="游ゴシック" pitchFamily="34" charset="-122"/>
-                <a:cs typeface="游ゴシック" pitchFamily="34" charset="-120"/>
+                <a:latin typeface="メイリオ" pitchFamily="34" charset="0"/>
+                <a:ea typeface="メイリオ" pitchFamily="34" charset="-122"/>
+                <a:cs typeface="メイリオ" pitchFamily="34" charset="-120"/>
               </a:rPr>
               <a:t>扱うのは睡眠そのものではなく、</a:t>
             </a:r>
             <a:pPr indent="0" marL="0">
               <a:lnSpc>
-                <a:spcPts val="1900"/>
+                <a:spcPts val="2400"/>
               </a:lnSpc>
               <a:buNone/>
             </a:pPr>
             <a:r>
-              <a:rPr lang="en-US" sz="1100" b="1" dirty="0">
+              <a:rPr lang="en-US" sz="1400" b="1" dirty="0">
                 <a:solidFill>
                   <a:srgbClr val="2B2620"/>
                 </a:solidFill>
-                <a:latin typeface="游ゴシック" pitchFamily="34" charset="0"/>
-                <a:ea typeface="游ゴシック" pitchFamily="34" charset="-122"/>
-                <a:cs typeface="游ゴシック" pitchFamily="34" charset="-120"/>
+                <a:latin typeface="メイリオ" pitchFamily="34" charset="0"/>
+                <a:ea typeface="メイリオ" pitchFamily="34" charset="-122"/>
+                <a:cs typeface="メイリオ" pitchFamily="34" charset="-120"/>
               </a:rPr>
               <a:t>思考が止まらない状態</a:t>
             </a:r>
             <a:pPr indent="0" marL="0">
               <a:lnSpc>
-                <a:spcPts val="1900"/>
+                <a:spcPts val="2400"/>
               </a:lnSpc>
               <a:spcAft>
                 <a:spcPts val="1000"/>
@@ -6755,57 +6755,57 @@
               <a:buNone/>
             </a:pPr>
             <a:r>
-              <a:rPr lang="en-US" sz="1100" dirty="0">
+              <a:rPr lang="en-US" sz="1400" dirty="0">
                 <a:solidFill>
                   <a:srgbClr val="5A5249"/>
                 </a:solidFill>
-                <a:latin typeface="游ゴシック" pitchFamily="34" charset="0"/>
-                <a:ea typeface="游ゴシック" pitchFamily="34" charset="-122"/>
-                <a:cs typeface="游ゴシック" pitchFamily="34" charset="-120"/>
-              </a:rPr>
-              <a:t>です。眠れないの手前にある、頭が休まらない時間に手を入れます。</a:t>
-            </a:r>
-            <a:endParaRPr lang="en-US" sz="1100" dirty="0"/>
+                <a:latin typeface="メイリオ" pitchFamily="34" charset="0"/>
+                <a:ea typeface="メイリオ" pitchFamily="34" charset="-122"/>
+                <a:cs typeface="メイリオ" pitchFamily="34" charset="-120"/>
+              </a:rPr>
+              <a:t>です。眠れないの手前にある、頭が休まらない時間を扱います。</a:t>
+            </a:r>
+            <a:endParaRPr lang="en-US" sz="1400" dirty="0"/>
           </a:p>
           <a:p>
             <a:pPr marL="342900" indent="-342900">
               <a:lnSpc>
-                <a:spcPts val="1900"/>
+                <a:spcPts val="2400"/>
               </a:lnSpc>
               <a:buSzPct val="100000"/>
               <a:buChar char="•"/>
             </a:pPr>
             <a:r>
-              <a:rPr lang="en-US" sz="1100" dirty="0">
+              <a:rPr lang="en-US" sz="1400" dirty="0">
                 <a:solidFill>
                   <a:srgbClr val="5A5249"/>
                 </a:solidFill>
-                <a:latin typeface="游ゴシック" pitchFamily="34" charset="0"/>
-                <a:ea typeface="游ゴシック" pitchFamily="34" charset="-122"/>
-                <a:cs typeface="游ゴシック" pitchFamily="34" charset="-120"/>
+                <a:latin typeface="メイリオ" pitchFamily="34" charset="0"/>
+                <a:ea typeface="メイリオ" pitchFamily="34" charset="-122"/>
+                <a:cs typeface="メイリオ" pitchFamily="34" charset="-120"/>
               </a:rPr>
               <a:t>施術は</a:t>
             </a:r>
             <a:pPr indent="0" marL="0">
               <a:lnSpc>
-                <a:spcPts val="1900"/>
+                <a:spcPts val="2400"/>
               </a:lnSpc>
               <a:buNone/>
             </a:pPr>
             <a:r>
-              <a:rPr lang="en-US" sz="1100" b="1" dirty="0">
+              <a:rPr lang="en-US" sz="1400" b="1" dirty="0">
                 <a:solidFill>
                   <a:srgbClr val="2B2620"/>
                 </a:solidFill>
-                <a:latin typeface="游ゴシック" pitchFamily="34" charset="0"/>
-                <a:ea typeface="游ゴシック" pitchFamily="34" charset="-122"/>
-                <a:cs typeface="游ゴシック" pitchFamily="34" charset="-120"/>
+                <a:latin typeface="メイリオ" pitchFamily="34" charset="0"/>
+                <a:ea typeface="メイリオ" pitchFamily="34" charset="-122"/>
+                <a:cs typeface="メイリオ" pitchFamily="34" charset="-120"/>
               </a:rPr>
               <a:t>鍼灸師の国家資格を持つ人</a:t>
             </a:r>
             <a:pPr indent="0" marL="0">
               <a:lnSpc>
-                <a:spcPts val="1900"/>
+                <a:spcPts val="2400"/>
               </a:lnSpc>
               <a:spcAft>
                 <a:spcPts val="1000"/>
@@ -6813,57 +6813,57 @@
               <a:buNone/>
             </a:pPr>
             <a:r>
-              <a:rPr lang="en-US" sz="1100" dirty="0">
+              <a:rPr lang="en-US" sz="1400" dirty="0">
                 <a:solidFill>
                   <a:srgbClr val="5A5249"/>
                 </a:solidFill>
-                <a:latin typeface="游ゴシック" pitchFamily="34" charset="0"/>
-                <a:ea typeface="游ゴシック" pitchFamily="34" charset="-122"/>
-                <a:cs typeface="游ゴシック" pitchFamily="34" charset="-120"/>
-              </a:rPr>
-              <a:t>が行います。医療の知識を持つ人が、治療の手前にいる層に関わる形です。</a:t>
-            </a:r>
-            <a:endParaRPr lang="en-US" sz="1100" dirty="0"/>
+                <a:latin typeface="メイリオ" pitchFamily="34" charset="0"/>
+                <a:ea typeface="メイリオ" pitchFamily="34" charset="-122"/>
+                <a:cs typeface="メイリオ" pitchFamily="34" charset="-120"/>
+              </a:rPr>
+              <a:t>が行います。医療の知識を持つ人が、治療の手前の層に関わる形です。</a:t>
+            </a:r>
+            <a:endParaRPr lang="en-US" sz="1400" dirty="0"/>
           </a:p>
           <a:p>
             <a:pPr marL="342900" indent="-342900">
               <a:lnSpc>
-                <a:spcPts val="1900"/>
+                <a:spcPts val="2400"/>
               </a:lnSpc>
               <a:buSzPct val="100000"/>
               <a:buChar char="•"/>
             </a:pPr>
             <a:r>
-              <a:rPr lang="en-US" sz="1100" dirty="0">
+              <a:rPr lang="en-US" sz="1400" dirty="0">
                 <a:solidFill>
                   <a:srgbClr val="5A5249"/>
                 </a:solidFill>
-                <a:latin typeface="游ゴシック" pitchFamily="34" charset="0"/>
-                <a:ea typeface="游ゴシック" pitchFamily="34" charset="-122"/>
-                <a:cs typeface="游ゴシック" pitchFamily="34" charset="-120"/>
+                <a:latin typeface="メイリオ" pitchFamily="34" charset="0"/>
+                <a:ea typeface="メイリオ" pitchFamily="34" charset="-122"/>
+                <a:cs typeface="メイリオ" pitchFamily="34" charset="-120"/>
               </a:rPr>
               <a:t>「治療」と身構えずに入れる入口をつくり、</a:t>
             </a:r>
             <a:pPr indent="0" marL="0">
               <a:lnSpc>
-                <a:spcPts val="1900"/>
+                <a:spcPts val="2400"/>
               </a:lnSpc>
               <a:buNone/>
             </a:pPr>
             <a:r>
-              <a:rPr lang="en-US" sz="1100" b="1" dirty="0">
+              <a:rPr lang="en-US" sz="1400" b="1" dirty="0">
                 <a:solidFill>
                   <a:srgbClr val="2B2620"/>
                 </a:solidFill>
-                <a:latin typeface="游ゴシック" pitchFamily="34" charset="0"/>
-                <a:ea typeface="游ゴシック" pitchFamily="34" charset="-122"/>
-                <a:cs typeface="游ゴシック" pitchFamily="34" charset="-120"/>
+                <a:latin typeface="メイリオ" pitchFamily="34" charset="0"/>
+                <a:ea typeface="メイリオ" pitchFamily="34" charset="-122"/>
+                <a:cs typeface="メイリオ" pitchFamily="34" charset="-120"/>
               </a:rPr>
               <a:t>必要な人だけを鍼灸や医療につなぐ</a:t>
             </a:r>
             <a:pPr indent="0" marL="0">
               <a:lnSpc>
-                <a:spcPts val="1900"/>
+                <a:spcPts val="2400"/>
               </a:lnSpc>
               <a:spcAft>
                 <a:spcPts val="1000"/>
@@ -6871,17 +6871,17 @@
               <a:buNone/>
             </a:pPr>
             <a:r>
-              <a:rPr lang="en-US" sz="1100" dirty="0">
+              <a:rPr lang="en-US" sz="1400" dirty="0">
                 <a:solidFill>
                   <a:srgbClr val="5A5249"/>
                 </a:solidFill>
-                <a:latin typeface="游ゴシック" pitchFamily="34" charset="0"/>
-                <a:ea typeface="游ゴシック" pitchFamily="34" charset="-122"/>
-                <a:cs typeface="游ゴシック" pitchFamily="34" charset="-120"/>
-              </a:rPr>
-              <a:t>。未病の層に、継続的に関わり続けるための事業です。</a:t>
-            </a:r>
-            <a:endParaRPr lang="en-US" sz="1100" dirty="0"/>
+                <a:latin typeface="メイリオ" pitchFamily="34" charset="0"/>
+                <a:ea typeface="メイリオ" pitchFamily="34" charset="-122"/>
+                <a:cs typeface="メイリオ" pitchFamily="34" charset="-120"/>
+              </a:rPr>
+              <a:t>。未病の層に継続的に関わるための事業です。</a:t>
+            </a:r>
+            <a:endParaRPr lang="en-US" sz="1400" dirty="0"/>
           </a:p>
         </p:txBody>
       </p:sp>
@@ -6937,17 +6937,17 @@
               <a:buNone/>
             </a:pPr>
             <a:r>
-              <a:rPr lang="en-US" sz="950" b="1" spc="300" kern="0" dirty="0">
+              <a:rPr lang="en-US" sz="1400" b="1" spc="300" kern="0" dirty="0">
                 <a:solidFill>
                   <a:srgbClr val="9C5446"/>
                 </a:solidFill>
-                <a:latin typeface="游ゴシック" pitchFamily="34" charset="0"/>
-                <a:ea typeface="游ゴシック" pitchFamily="34" charset="-122"/>
-                <a:cs typeface="游ゴシック" pitchFamily="34" charset="-120"/>
+                <a:latin typeface="メイリオ" pitchFamily="34" charset="0"/>
+                <a:ea typeface="メイリオ" pitchFamily="34" charset="-122"/>
+                <a:cs typeface="メイリオ" pitchFamily="34" charset="-120"/>
               </a:rPr>
               <a:t>1店舗あたり</a:t>
             </a:r>
-            <a:endParaRPr lang="en-US" sz="950" dirty="0"/>
+            <a:endParaRPr lang="en-US" sz="1400" dirty="0"/>
           </a:p>
         </p:txBody>
       </p:sp>
@@ -6976,13 +6976,13 @@
               <a:buNone/>
             </a:pPr>
             <a:r>
-              <a:rPr lang="en-US" sz="3400" b="1" dirty="0">
+              <a:rPr lang="en-US" sz="3200" b="1" dirty="0">
                 <a:solidFill>
                   <a:srgbClr val="2B2620"/>
                 </a:solidFill>
-                <a:latin typeface="游明朝" pitchFamily="34" charset="0"/>
-                <a:ea typeface="游明朝" pitchFamily="34" charset="-122"/>
-                <a:cs typeface="游明朝" pitchFamily="34" charset="-120"/>
+                <a:latin typeface="メイリオ" pitchFamily="34" charset="0"/>
+                <a:ea typeface="メイリオ" pitchFamily="34" charset="-122"/>
+                <a:cs typeface="メイリオ" pitchFamily="34" charset="-120"/>
               </a:rPr>
               <a:t>月次利益 30</a:t>
             </a:r>
@@ -6990,17 +6990,17 @@
               <a:buNone/>
             </a:pPr>
             <a:r>
-              <a:rPr lang="en-US" sz="1700" b="1" dirty="0">
+              <a:rPr lang="en-US" sz="1800" b="1" dirty="0">
                 <a:solidFill>
                   <a:srgbClr val="2B2620"/>
                 </a:solidFill>
-                <a:latin typeface="游明朝" pitchFamily="34" charset="0"/>
-                <a:ea typeface="游明朝" pitchFamily="34" charset="-122"/>
-                <a:cs typeface="游明朝" pitchFamily="34" charset="-120"/>
+                <a:latin typeface="メイリオ" pitchFamily="34" charset="0"/>
+                <a:ea typeface="メイリオ" pitchFamily="34" charset="-122"/>
+                <a:cs typeface="メイリオ" pitchFamily="34" charset="-120"/>
               </a:rPr>
               <a:t>万円</a:t>
             </a:r>
-            <a:endParaRPr lang="en-US" sz="3400" dirty="0"/>
+            <a:endParaRPr lang="en-US" sz="3200" dirty="0"/>
           </a:p>
         </p:txBody>
       </p:sp>
@@ -7032,17 +7032,17 @@
               <a:buNone/>
             </a:pPr>
             <a:r>
-              <a:rPr lang="en-US" sz="950" dirty="0">
+              <a:rPr lang="en-US" sz="1400" dirty="0">
                 <a:solidFill>
                   <a:srgbClr val="5A5249"/>
                 </a:solidFill>
-                <a:latin typeface="游ゴシック" pitchFamily="34" charset="0"/>
-                <a:ea typeface="游ゴシック" pitchFamily="34" charset="-122"/>
-                <a:cs typeface="游ゴシック" pitchFamily="34" charset="-120"/>
-              </a:rPr>
-              <a:t>想定値。多店舗展開を前提に設計しています。</a:t>
-            </a:r>
-            <a:endParaRPr lang="en-US" sz="950" dirty="0"/>
+                <a:latin typeface="メイリオ" pitchFamily="34" charset="0"/>
+                <a:ea typeface="メイリオ" pitchFamily="34" charset="-122"/>
+                <a:cs typeface="メイリオ" pitchFamily="34" charset="-120"/>
+              </a:rPr>
+              <a:t>想定値。多店舗展開を前提に設計。</a:t>
+            </a:r>
+            <a:endParaRPr lang="en-US" sz="1400" dirty="0"/>
           </a:p>
         </p:txBody>
       </p:sp>
@@ -7071,17 +7071,17 @@
               <a:buNone/>
             </a:pPr>
             <a:r>
-              <a:rPr lang="en-US" sz="900" spc="100" kern="0" dirty="0">
+              <a:rPr lang="en-US" sz="1200" spc="100" kern="0" dirty="0">
                 <a:solidFill>
                   <a:srgbClr val="8B8175"/>
                 </a:solidFill>
-                <a:latin typeface="游ゴシック" pitchFamily="34" charset="0"/>
-                <a:ea typeface="游ゴシック" pitchFamily="34" charset="-122"/>
-                <a:cs typeface="游ゴシック" pitchFamily="34" charset="-120"/>
+                <a:latin typeface="メイリオ" pitchFamily="34" charset="0"/>
+                <a:ea typeface="メイリオ" pitchFamily="34" charset="-122"/>
+                <a:cs typeface="メイリオ" pitchFamily="34" charset="-120"/>
               </a:rPr>
               <a:t>米倉まな｜アポプラスステーション様 ご提案</a:t>
             </a:r>
-            <a:endParaRPr lang="en-US" sz="900" dirty="0"/>
+            <a:endParaRPr lang="en-US" sz="1200" dirty="0"/>
           </a:p>
         </p:txBody>
       </p:sp>
@@ -7110,17 +7110,17 @@
               <a:buNone/>
             </a:pPr>
             <a:r>
-              <a:rPr lang="en-US" sz="900" dirty="0">
+              <a:rPr lang="en-US" sz="1200" dirty="0">
                 <a:solidFill>
                   <a:srgbClr val="8B8175"/>
                 </a:solidFill>
-                <a:latin typeface="游ゴシック" pitchFamily="34" charset="0"/>
-                <a:ea typeface="游ゴシック" pitchFamily="34" charset="-122"/>
-                <a:cs typeface="游ゴシック" pitchFamily="34" charset="-120"/>
+                <a:latin typeface="メイリオ" pitchFamily="34" charset="0"/>
+                <a:ea typeface="メイリオ" pitchFamily="34" charset="-122"/>
+                <a:cs typeface="メイリオ" pitchFamily="34" charset="-120"/>
               </a:rPr>
               <a:t>2:55 → 3:30</a:t>
             </a:r>
-            <a:endParaRPr lang="en-US" sz="900" dirty="0"/>
+            <a:endParaRPr lang="en-US" sz="1200" dirty="0"/>
           </a:p>
         </p:txBody>
       </p:sp>
@@ -7184,7 +7184,7 @@
         </p:nvSpPr>
         <p:spPr>
           <a:xfrm>
-            <a:off x="996696" y="402336"/>
+            <a:off x="996696" y="365760"/>
             <a:ext cx="7315200" cy="310896"/>
           </a:xfrm>
           <a:prstGeom prst="rect">
@@ -7201,13 +7201,13 @@
               <a:buNone/>
             </a:pPr>
             <a:r>
-              <a:rPr lang="en-US" sz="1000" b="1" spc="200" kern="0" dirty="0">
+              <a:rPr lang="en-US" sz="1400" b="1" spc="200" kern="0" dirty="0">
                 <a:solidFill>
                   <a:srgbClr val="9C5446"/>
                 </a:solidFill>
-                <a:latin typeface="游明朝" pitchFamily="34" charset="0"/>
-                <a:ea typeface="游明朝" pitchFamily="34" charset="-122"/>
-                <a:cs typeface="游明朝" pitchFamily="34" charset="-120"/>
+                <a:latin typeface="メイリオ" pitchFamily="34" charset="0"/>
+                <a:ea typeface="メイリオ" pitchFamily="34" charset="-122"/>
+                <a:cs typeface="メイリオ" pitchFamily="34" charset="-120"/>
               </a:rPr>
               <a:t>06   </a:t>
             </a:r>
@@ -7215,17 +7215,17 @@
               <a:buNone/>
             </a:pPr>
             <a:r>
-              <a:rPr lang="en-US" sz="1000" spc="300" kern="0" dirty="0">
+              <a:rPr lang="en-US" sz="1400" spc="300" kern="0" dirty="0">
                 <a:solidFill>
                   <a:srgbClr val="8B8175"/>
                 </a:solidFill>
-                <a:latin typeface="游ゴシック" pitchFamily="34" charset="0"/>
-                <a:ea typeface="游ゴシック" pitchFamily="34" charset="-122"/>
-                <a:cs typeface="游ゴシック" pitchFamily="34" charset="-120"/>
+                <a:latin typeface="メイリオ" pitchFamily="34" charset="0"/>
+                <a:ea typeface="メイリオ" pitchFamily="34" charset="-122"/>
+                <a:cs typeface="メイリオ" pitchFamily="34" charset="-120"/>
               </a:rPr>
               <a:t>STRENGTH</a:t>
             </a:r>
-            <a:endParaRPr lang="en-US" sz="1000" dirty="0"/>
+            <a:endParaRPr lang="en-US" sz="1400" dirty="0"/>
           </a:p>
         </p:txBody>
       </p:sp>
@@ -7237,7 +7237,7 @@
         </p:nvSpPr>
         <p:spPr>
           <a:xfrm>
-            <a:off x="685800" y="841248"/>
+            <a:off x="685800" y="777240"/>
             <a:ext cx="10820095" cy="777240"/>
           </a:xfrm>
           <a:prstGeom prst="rect">
@@ -7258,9 +7258,9 @@
                 <a:solidFill>
                   <a:srgbClr val="2B2620"/>
                 </a:solidFill>
-                <a:latin typeface="游明朝" pitchFamily="34" charset="0"/>
-                <a:ea typeface="游明朝" pitchFamily="34" charset="-122"/>
-                <a:cs typeface="游明朝" pitchFamily="34" charset="-120"/>
+                <a:latin typeface="メイリオ" pitchFamily="34" charset="0"/>
+                <a:ea typeface="メイリオ" pitchFamily="34" charset="-122"/>
+                <a:cs typeface="メイリオ" pitchFamily="34" charset="-120"/>
               </a:rPr>
               <a:t>企業の新規事業に、専門家として入ってきました</a:t>
             </a:r>
@@ -7276,12 +7276,12 @@
         </p:nvSpPr>
         <p:spPr>
           <a:xfrm>
-            <a:off x="685800" y="1737360"/>
-            <a:ext cx="3456432" cy="2423160"/>
+            <a:off x="685800" y="1691640"/>
+            <a:ext cx="3456432" cy="2651760"/>
           </a:xfrm>
           <a:prstGeom prst="roundRect">
             <a:avLst>
-              <a:gd name="adj" fmla="val 1887"/>
+              <a:gd name="adj" fmla="val 1724"/>
             </a:avLst>
           </a:prstGeom>
           <a:solidFill>
@@ -7303,34 +7303,34 @@
         </p:nvSpPr>
         <p:spPr>
           <a:xfrm>
-            <a:off x="941832" y="1938528"/>
-            <a:ext cx="2944368" cy="237744"/>
-          </a:xfrm>
-          <a:prstGeom prst="rect">
-            <a:avLst/>
-          </a:prstGeom>
-          <a:noFill/>
-          <a:ln/>
-        </p:spPr>
-        <p:txBody>
-          <a:bodyPr wrap="square" lIns="0" tIns="0" rIns="0" bIns="0" rtlCol="0" anchor="ctr"/>
-          <a:lstStyle/>
-          <a:p>
-            <a:pPr indent="0" marL="0">
-              <a:buNone/>
-            </a:pPr>
-            <a:r>
-              <a:rPr lang="en-US" sz="900" b="1" spc="200" kern="0" dirty="0">
+            <a:off x="941832" y="1856232"/>
+            <a:ext cx="2944368" cy="274320"/>
+          </a:xfrm>
+          <a:prstGeom prst="rect">
+            <a:avLst/>
+          </a:prstGeom>
+          <a:noFill/>
+          <a:ln/>
+        </p:spPr>
+        <p:txBody>
+          <a:bodyPr wrap="square" lIns="0" tIns="0" rIns="0" bIns="0" rtlCol="0" anchor="ctr"/>
+          <a:lstStyle/>
+          <a:p>
+            <a:pPr indent="0" marL="0">
+              <a:buNone/>
+            </a:pPr>
+            <a:r>
+              <a:rPr lang="en-US" sz="1400" b="1" spc="100" kern="0" dirty="0">
                 <a:solidFill>
                   <a:srgbClr val="9C5446"/>
                 </a:solidFill>
-                <a:latin typeface="游ゴシック" pitchFamily="34" charset="0"/>
-                <a:ea typeface="游ゴシック" pitchFamily="34" charset="-122"/>
-                <a:cs typeface="游ゴシック" pitchFamily="34" charset="-120"/>
+                <a:latin typeface="メイリオ" pitchFamily="34" charset="0"/>
+                <a:ea typeface="メイリオ" pitchFamily="34" charset="-122"/>
+                <a:cs typeface="メイリオ" pitchFamily="34" charset="-120"/>
               </a:rPr>
               <a:t>パパゲーノ</a:t>
             </a:r>
-            <a:endParaRPr lang="en-US" sz="900" dirty="0"/>
+            <a:endParaRPr lang="en-US" sz="1400" dirty="0"/>
           </a:p>
         </p:txBody>
       </p:sp>
@@ -7342,7 +7342,7 @@
         </p:nvSpPr>
         <p:spPr>
           <a:xfrm>
-            <a:off x="941832" y="2212848"/>
+            <a:off x="941832" y="2185416"/>
             <a:ext cx="2944368" cy="457200"/>
           </a:xfrm>
           <a:prstGeom prst="rect">
@@ -7362,17 +7362,17 @@
               <a:buNone/>
             </a:pPr>
             <a:r>
-              <a:rPr lang="en-US" sz="1500" b="1" dirty="0">
+              <a:rPr lang="en-US" sz="1700" b="1" dirty="0">
                 <a:solidFill>
                   <a:srgbClr val="2B2620"/>
                 </a:solidFill>
-                <a:latin typeface="游明朝" pitchFamily="34" charset="0"/>
-                <a:ea typeface="游明朝" pitchFamily="34" charset="-122"/>
-                <a:cs typeface="游明朝" pitchFamily="34" charset="-120"/>
+                <a:latin typeface="メイリオ" pitchFamily="34" charset="0"/>
+                <a:ea typeface="メイリオ" pitchFamily="34" charset="-122"/>
+                <a:cs typeface="メイリオ" pitchFamily="34" charset="-120"/>
               </a:rPr>
               <a:t>アンバサダー認定 第一号</a:t>
             </a:r>
-            <a:endParaRPr lang="en-US" sz="1500" dirty="0"/>
+            <a:endParaRPr lang="en-US" sz="1700" dirty="0"/>
           </a:p>
         </p:txBody>
       </p:sp>
@@ -7384,8 +7384,8 @@
         </p:nvSpPr>
         <p:spPr>
           <a:xfrm>
-            <a:off x="941832" y="2724912"/>
-            <a:ext cx="2944368" cy="1234440"/>
+            <a:off x="941832" y="2697480"/>
+            <a:ext cx="2944368" cy="1444752"/>
           </a:xfrm>
           <a:prstGeom prst="rect">
             <a:avLst/>
@@ -7404,17 +7404,17 @@
               <a:buNone/>
             </a:pPr>
             <a:r>
-              <a:rPr lang="en-US" sz="1050" dirty="0">
+              <a:rPr lang="en-US" sz="1400" dirty="0">
                 <a:solidFill>
                   <a:srgbClr val="5A5249"/>
                 </a:solidFill>
-                <a:latin typeface="游ゴシック" pitchFamily="34" charset="0"/>
-                <a:ea typeface="游ゴシック" pitchFamily="34" charset="-122"/>
-                <a:cs typeface="游ゴシック" pitchFamily="34" charset="-120"/>
-              </a:rPr>
-              <a:t>就労継続支援B型「パパゲーノ Work &amp; Recovery」への発注を通じ、精神障害のある方が担う事業に伴走。認定制度の第一号企業です。</a:t>
-            </a:r>
-            <a:endParaRPr lang="en-US" sz="1050" dirty="0"/>
+                <a:latin typeface="メイリオ" pitchFamily="34" charset="0"/>
+                <a:ea typeface="メイリオ" pitchFamily="34" charset="-122"/>
+                <a:cs typeface="メイリオ" pitchFamily="34" charset="-120"/>
+              </a:rPr>
+              <a:t>就労継続支援B型への発注を通じ、精神障害のある方が担う事業に伴走。認定制度の第一号企業です。</a:t>
+            </a:r>
+            <a:endParaRPr lang="en-US" sz="1400" dirty="0"/>
           </a:p>
         </p:txBody>
       </p:sp>
@@ -7426,12 +7426,12 @@
         </p:nvSpPr>
         <p:spPr>
           <a:xfrm>
-            <a:off x="4370832" y="1737360"/>
-            <a:ext cx="3456432" cy="2423160"/>
+            <a:off x="4370832" y="1691640"/>
+            <a:ext cx="3456432" cy="2651760"/>
           </a:xfrm>
           <a:prstGeom prst="roundRect">
             <a:avLst>
-              <a:gd name="adj" fmla="val 1887"/>
+              <a:gd name="adj" fmla="val 1724"/>
             </a:avLst>
           </a:prstGeom>
           <a:solidFill>
@@ -7453,34 +7453,34 @@
         </p:nvSpPr>
         <p:spPr>
           <a:xfrm>
-            <a:off x="4626864" y="1938528"/>
-            <a:ext cx="2944368" cy="237744"/>
-          </a:xfrm>
-          <a:prstGeom prst="rect">
-            <a:avLst/>
-          </a:prstGeom>
-          <a:noFill/>
-          <a:ln/>
-        </p:spPr>
-        <p:txBody>
-          <a:bodyPr wrap="square" lIns="0" tIns="0" rIns="0" bIns="0" rtlCol="0" anchor="ctr"/>
-          <a:lstStyle/>
-          <a:p>
-            <a:pPr indent="0" marL="0">
-              <a:buNone/>
-            </a:pPr>
-            <a:r>
-              <a:rPr lang="en-US" sz="900" b="1" spc="200" kern="0" dirty="0">
+            <a:off x="4626864" y="1856232"/>
+            <a:ext cx="2944368" cy="274320"/>
+          </a:xfrm>
+          <a:prstGeom prst="rect">
+            <a:avLst/>
+          </a:prstGeom>
+          <a:noFill/>
+          <a:ln/>
+        </p:spPr>
+        <p:txBody>
+          <a:bodyPr wrap="square" lIns="0" tIns="0" rIns="0" bIns="0" rtlCol="0" anchor="ctr"/>
+          <a:lstStyle/>
+          <a:p>
+            <a:pPr indent="0" marL="0">
+              <a:buNone/>
+            </a:pPr>
+            <a:r>
+              <a:rPr lang="en-US" sz="1400" b="1" spc="100" kern="0" dirty="0">
                 <a:solidFill>
                   <a:srgbClr val="9C5446"/>
                 </a:solidFill>
-                <a:latin typeface="游ゴシック" pitchFamily="34" charset="0"/>
-                <a:ea typeface="游ゴシック" pitchFamily="34" charset="-122"/>
-                <a:cs typeface="游ゴシック" pitchFamily="34" charset="-120"/>
+                <a:latin typeface="メイリオ" pitchFamily="34" charset="0"/>
+                <a:ea typeface="メイリオ" pitchFamily="34" charset="-122"/>
+                <a:cs typeface="メイリオ" pitchFamily="34" charset="-120"/>
               </a:rPr>
               <a:t>ファンコミュニケーションズ</a:t>
             </a:r>
-            <a:endParaRPr lang="en-US" sz="900" dirty="0"/>
+            <a:endParaRPr lang="en-US" sz="1400" dirty="0"/>
           </a:p>
         </p:txBody>
       </p:sp>
@@ -7492,7 +7492,7 @@
         </p:nvSpPr>
         <p:spPr>
           <a:xfrm>
-            <a:off x="4626864" y="2212848"/>
+            <a:off x="4626864" y="2185416"/>
             <a:ext cx="2944368" cy="457200"/>
           </a:xfrm>
           <a:prstGeom prst="rect">
@@ -7512,17 +7512,17 @@
               <a:buNone/>
             </a:pPr>
             <a:r>
-              <a:rPr lang="en-US" sz="1500" b="1" dirty="0">
+              <a:rPr lang="en-US" sz="1700" b="1" dirty="0">
                 <a:solidFill>
                   <a:srgbClr val="2B2620"/>
                 </a:solidFill>
-                <a:latin typeface="游明朝" pitchFamily="34" charset="0"/>
-                <a:ea typeface="游明朝" pitchFamily="34" charset="-122"/>
-                <a:cs typeface="游明朝" pitchFamily="34" charset="-120"/>
+                <a:latin typeface="メイリオ" pitchFamily="34" charset="0"/>
+                <a:ea typeface="メイリオ" pitchFamily="34" charset="-122"/>
+                <a:cs typeface="メイリオ" pitchFamily="34" charset="-120"/>
               </a:rPr>
               <a:t>ThirdTalk（サードトーク）</a:t>
             </a:r>
-            <a:endParaRPr lang="en-US" sz="1500" dirty="0"/>
+            <a:endParaRPr lang="en-US" sz="1700" dirty="0"/>
           </a:p>
         </p:txBody>
       </p:sp>
@@ -7534,8 +7534,8 @@
         </p:nvSpPr>
         <p:spPr>
           <a:xfrm>
-            <a:off x="4626864" y="2724912"/>
-            <a:ext cx="2944368" cy="1234440"/>
+            <a:off x="4626864" y="2697480"/>
+            <a:ext cx="2944368" cy="1444752"/>
           </a:xfrm>
           <a:prstGeom prst="rect">
             <a:avLst/>
@@ -7554,17 +7554,17 @@
               <a:buNone/>
             </a:pPr>
             <a:r>
-              <a:rPr lang="en-US" sz="1050" dirty="0">
+              <a:rPr lang="en-US" sz="1400" dirty="0">
                 <a:solidFill>
                   <a:srgbClr val="5A5249"/>
                 </a:solidFill>
-                <a:latin typeface="游ゴシック" pitchFamily="34" charset="0"/>
-                <a:ea typeface="游ゴシック" pitchFamily="34" charset="-122"/>
-                <a:cs typeface="游ゴシック" pitchFamily="34" charset="-120"/>
-              </a:rPr>
-              <a:t>「病院やカウンセリングに行く、その一歩手前」を想定したオンライン対話サービス。企画段階からご相談をいただき、立ち上げを見守ってきました。</a:t>
-            </a:r>
-            <a:endParaRPr lang="en-US" sz="1050" dirty="0"/>
+                <a:latin typeface="メイリオ" pitchFamily="34" charset="0"/>
+                <a:ea typeface="メイリオ" pitchFamily="34" charset="-122"/>
+                <a:cs typeface="メイリオ" pitchFamily="34" charset="-120"/>
+              </a:rPr>
+              <a:t>「病院やカウンセリングに行く、その一歩手前」を想定したオンライン対話サービス。企画段階からご相談をいただきました。</a:t>
+            </a:r>
+            <a:endParaRPr lang="en-US" sz="1400" dirty="0"/>
           </a:p>
         </p:txBody>
       </p:sp>
@@ -7576,12 +7576,12 @@
         </p:nvSpPr>
         <p:spPr>
           <a:xfrm>
-            <a:off x="8055864" y="1737360"/>
-            <a:ext cx="3456432" cy="2423160"/>
+            <a:off x="8055864" y="1691640"/>
+            <a:ext cx="3456432" cy="2651760"/>
           </a:xfrm>
           <a:prstGeom prst="roundRect">
             <a:avLst>
-              <a:gd name="adj" fmla="val 1887"/>
+              <a:gd name="adj" fmla="val 1724"/>
             </a:avLst>
           </a:prstGeom>
           <a:solidFill>
@@ -7603,34 +7603,34 @@
         </p:nvSpPr>
         <p:spPr>
           <a:xfrm>
-            <a:off x="8311896" y="1938528"/>
-            <a:ext cx="2944368" cy="237744"/>
-          </a:xfrm>
-          <a:prstGeom prst="rect">
-            <a:avLst/>
-          </a:prstGeom>
-          <a:noFill/>
-          <a:ln/>
-        </p:spPr>
-        <p:txBody>
-          <a:bodyPr wrap="square" lIns="0" tIns="0" rIns="0" bIns="0" rtlCol="0" anchor="ctr"/>
-          <a:lstStyle/>
-          <a:p>
-            <a:pPr indent="0" marL="0">
-              <a:buNone/>
-            </a:pPr>
-            <a:r>
-              <a:rPr lang="en-US" sz="900" b="1" spc="200" kern="0" dirty="0">
+            <a:off x="8311896" y="1856232"/>
+            <a:ext cx="2944368" cy="274320"/>
+          </a:xfrm>
+          <a:prstGeom prst="rect">
+            <a:avLst/>
+          </a:prstGeom>
+          <a:noFill/>
+          <a:ln/>
+        </p:spPr>
+        <p:txBody>
+          <a:bodyPr wrap="square" lIns="0" tIns="0" rIns="0" bIns="0" rtlCol="0" anchor="ctr"/>
+          <a:lstStyle/>
+          <a:p>
+            <a:pPr indent="0" marL="0">
+              <a:buNone/>
+            </a:pPr>
+            <a:r>
+              <a:rPr lang="en-US" sz="1400" b="1" spc="100" kern="0" dirty="0">
                 <a:solidFill>
                   <a:srgbClr val="9C5446"/>
                 </a:solidFill>
-                <a:latin typeface="游ゴシック" pitchFamily="34" charset="0"/>
-                <a:ea typeface="游ゴシック" pitchFamily="34" charset="-122"/>
-                <a:cs typeface="游ゴシック" pitchFamily="34" charset="-120"/>
+                <a:latin typeface="メイリオ" pitchFamily="34" charset="0"/>
+                <a:ea typeface="メイリオ" pitchFamily="34" charset="-122"/>
+                <a:cs typeface="メイリオ" pitchFamily="34" charset="-120"/>
               </a:rPr>
               <a:t>stand up</a:t>
             </a:r>
-            <a:endParaRPr lang="en-US" sz="900" dirty="0"/>
+            <a:endParaRPr lang="en-US" sz="1400" dirty="0"/>
           </a:p>
         </p:txBody>
       </p:sp>
@@ -7642,7 +7642,7 @@
         </p:nvSpPr>
         <p:spPr>
           <a:xfrm>
-            <a:off x="8311896" y="2212848"/>
+            <a:off x="8311896" y="2185416"/>
             <a:ext cx="2944368" cy="457200"/>
           </a:xfrm>
           <a:prstGeom prst="rect">
@@ -7662,17 +7662,17 @@
               <a:buNone/>
             </a:pPr>
             <a:r>
-              <a:rPr lang="en-US" sz="1500" b="1" dirty="0">
+              <a:rPr lang="en-US" sz="1700" b="1" dirty="0">
                 <a:solidFill>
                   <a:srgbClr val="2B2620"/>
                 </a:solidFill>
-                <a:latin typeface="游明朝" pitchFamily="34" charset="0"/>
-                <a:ea typeface="游明朝" pitchFamily="34" charset="-122"/>
-                <a:cs typeface="游明朝" pitchFamily="34" charset="-120"/>
+                <a:latin typeface="メイリオ" pitchFamily="34" charset="0"/>
+                <a:ea typeface="メイリオ" pitchFamily="34" charset="-122"/>
+                <a:cs typeface="メイリオ" pitchFamily="34" charset="-120"/>
               </a:rPr>
               <a:t>アミューズメント事業</a:t>
             </a:r>
-            <a:endParaRPr lang="en-US" sz="1500" dirty="0"/>
+            <a:endParaRPr lang="en-US" sz="1700" dirty="0"/>
           </a:p>
         </p:txBody>
       </p:sp>
@@ -7684,8 +7684,8 @@
         </p:nvSpPr>
         <p:spPr>
           <a:xfrm>
-            <a:off x="8311896" y="2724912"/>
-            <a:ext cx="2944368" cy="1234440"/>
+            <a:off x="8311896" y="2697480"/>
+            <a:ext cx="2944368" cy="1444752"/>
           </a:xfrm>
           <a:prstGeom prst="rect">
             <a:avLst/>
@@ -7704,17 +7704,17 @@
               <a:buNone/>
             </a:pPr>
             <a:r>
-              <a:rPr lang="en-US" sz="1050" dirty="0">
+              <a:rPr lang="en-US" sz="1400" dirty="0">
                 <a:solidFill>
                   <a:srgbClr val="5A5249"/>
                 </a:solidFill>
-                <a:latin typeface="游ゴシック" pitchFamily="34" charset="0"/>
-                <a:ea typeface="游ゴシック" pitchFamily="34" charset="-122"/>
-                <a:cs typeface="游ゴシック" pitchFamily="34" charset="-120"/>
-              </a:rPr>
-              <a:t>新規事業の立ち上げについてご相談をいただき、現在もお取引が続いています。医療以外の業種でも、人の状態を扱う事業の設計に入ってきました。</a:t>
-            </a:r>
-            <a:endParaRPr lang="en-US" sz="1050" dirty="0"/>
+                <a:latin typeface="メイリオ" pitchFamily="34" charset="0"/>
+                <a:ea typeface="メイリオ" pitchFamily="34" charset="-122"/>
+                <a:cs typeface="メイリオ" pitchFamily="34" charset="-120"/>
+              </a:rPr>
+              <a:t>新規事業の立ち上げについてご相談をいただき、現在もお取引が続いています。医療以外の業種にも入っています。</a:t>
+            </a:r>
+            <a:endParaRPr lang="en-US" sz="1400" dirty="0"/>
           </a:p>
         </p:txBody>
       </p:sp>
@@ -7726,12 +7726,12 @@
         </p:nvSpPr>
         <p:spPr>
           <a:xfrm>
-            <a:off x="685800" y="4370832"/>
-            <a:ext cx="10820095" cy="1371600"/>
+            <a:off x="685800" y="4526280"/>
+            <a:ext cx="10820095" cy="1143000"/>
           </a:xfrm>
           <a:prstGeom prst="roundRect">
             <a:avLst>
-              <a:gd name="adj" fmla="val 3333"/>
+              <a:gd name="adj" fmla="val 4000"/>
             </a:avLst>
           </a:prstGeom>
           <a:solidFill>
@@ -7753,7 +7753,7 @@
         </p:nvSpPr>
         <p:spPr>
           <a:xfrm>
-            <a:off x="960120" y="4572000"/>
+            <a:off x="960120" y="4727448"/>
             <a:ext cx="10271455" cy="237744"/>
           </a:xfrm>
           <a:prstGeom prst="rect">
@@ -7770,17 +7770,17 @@
               <a:buNone/>
             </a:pPr>
             <a:r>
-              <a:rPr lang="en-US" sz="900" b="1" spc="200" kern="0" dirty="0">
+              <a:rPr lang="en-US" sz="1200" b="1" spc="100" kern="0" dirty="0">
                 <a:solidFill>
                   <a:srgbClr val="5E7060"/>
                 </a:solidFill>
-                <a:latin typeface="游ゴシック" pitchFamily="34" charset="0"/>
-                <a:ea typeface="游ゴシック" pitchFamily="34" charset="-122"/>
-                <a:cs typeface="游ゴシック" pitchFamily="34" charset="-120"/>
+                <a:latin typeface="メイリオ" pitchFamily="34" charset="0"/>
+                <a:ea typeface="メイリオ" pitchFamily="34" charset="-122"/>
+                <a:cs typeface="メイリオ" pitchFamily="34" charset="-120"/>
               </a:rPr>
               <a:t>共通してやってきたこと</a:t>
             </a:r>
-            <a:endParaRPr lang="en-US" sz="900" dirty="0"/>
+            <a:endParaRPr lang="en-US" sz="1200" dirty="0"/>
           </a:p>
         </p:txBody>
       </p:sp>
@@ -7792,8 +7792,8 @@
         </p:nvSpPr>
         <p:spPr>
           <a:xfrm>
-            <a:off x="960120" y="4882896"/>
-            <a:ext cx="10271455" cy="640080"/>
+            <a:off x="960120" y="5038344"/>
+            <a:ext cx="10271455" cy="411480"/>
           </a:xfrm>
           <a:prstGeom prst="rect">
             <a:avLst/>
@@ -7812,15 +7812,15 @@
               <a:buNone/>
             </a:pPr>
             <a:r>
-              <a:rPr lang="en-US" sz="1100" dirty="0">
+              <a:rPr lang="en-US" sz="1400" dirty="0">
                 <a:solidFill>
                   <a:srgbClr val="5A5249"/>
                 </a:solidFill>
-                <a:latin typeface="游ゴシック" pitchFamily="34" charset="0"/>
-                <a:ea typeface="游ゴシック" pitchFamily="34" charset="-122"/>
-                <a:cs typeface="游ゴシック" pitchFamily="34" charset="-120"/>
-              </a:rPr>
-              <a:t>心の不調を抱えた人が、実際にどこで止まり、どこで動くのか。その一次情報を事業の言葉に翻訳するのが私の役割です。なかでもThirdTalkは、このあとお話しする</a:t>
+                <a:latin typeface="メイリオ" pitchFamily="34" charset="0"/>
+                <a:ea typeface="メイリオ" pitchFamily="34" charset="-122"/>
+                <a:cs typeface="メイリオ" pitchFamily="34" charset="-120"/>
+              </a:rPr>
+              <a:t>なかでもThirdTalkは、今日お話ししてきた</a:t>
             </a:r>
             <a:pPr indent="0" marL="0">
               <a:lnSpc>
@@ -7829,13 +7829,13 @@
               <a:buNone/>
             </a:pPr>
             <a:r>
-              <a:rPr lang="en-US" sz="1100" b="1" dirty="0">
+              <a:rPr lang="en-US" sz="1400" b="1" dirty="0">
                 <a:solidFill>
                   <a:srgbClr val="2B2620"/>
                 </a:solidFill>
-                <a:latin typeface="游ゴシック" pitchFamily="34" charset="0"/>
-                <a:ea typeface="游ゴシック" pitchFamily="34" charset="-122"/>
-                <a:cs typeface="游ゴシック" pitchFamily="34" charset="-120"/>
+                <a:latin typeface="メイリオ" pitchFamily="34" charset="0"/>
+                <a:ea typeface="メイリオ" pitchFamily="34" charset="-122"/>
+                <a:cs typeface="メイリオ" pitchFamily="34" charset="-120"/>
               </a:rPr>
               <a:t>「病院の一歩手前」という発想を、そのまま事業にしたもの</a:t>
             </a:r>
@@ -7846,59 +7846,59 @@
               <a:buNone/>
             </a:pPr>
             <a:r>
+              <a:rPr lang="en-US" sz="1400" dirty="0">
+                <a:solidFill>
+                  <a:srgbClr val="5A5249"/>
+                </a:solidFill>
+                <a:latin typeface="メイリオ" pitchFamily="34" charset="0"/>
+                <a:ea typeface="メイリオ" pitchFamily="34" charset="-122"/>
+                <a:cs typeface="メイリオ" pitchFamily="34" charset="-120"/>
+              </a:rPr>
+              <a:t>でした。</a:t>
+            </a:r>
+            <a:endParaRPr lang="en-US" sz="1400" dirty="0"/>
+          </a:p>
+        </p:txBody>
+      </p:sp>
+      <p:sp>
+        <p:nvSpPr>
+          <p:cNvPr id="20" name="Text 18"/>
+          <p:cNvSpPr txBox="1"/>
+          <p:nvPr/>
+        </p:nvSpPr>
+        <p:spPr>
+          <a:xfrm>
+            <a:off x="685800" y="5833872"/>
+            <a:ext cx="10820095" cy="457200"/>
+          </a:xfrm>
+          <a:prstGeom prst="rect">
+            <a:avLst/>
+          </a:prstGeom>
+          <a:noFill/>
+          <a:ln/>
+        </p:spPr>
+        <p:txBody>
+          <a:bodyPr wrap="square" lIns="0" tIns="0" rIns="0" bIns="0" rtlCol="0" anchor="t"/>
+          <a:lstStyle/>
+          <a:p>
+            <a:pPr indent="0" marL="0">
+              <a:lnSpc>
+                <a:spcPts val="1500"/>
+              </a:lnSpc>
+              <a:buNone/>
+            </a:pPr>
+            <a:r>
               <a:rPr lang="en-US" sz="1100" dirty="0">
                 <a:solidFill>
-                  <a:srgbClr val="5A5249"/>
-                </a:solidFill>
-                <a:latin typeface="游ゴシック" pitchFamily="34" charset="0"/>
-                <a:ea typeface="游ゴシック" pitchFamily="34" charset="-122"/>
-                <a:cs typeface="游ゴシック" pitchFamily="34" charset="-120"/>
-              </a:rPr>
-              <a:t>でした。</a:t>
+                  <a:srgbClr val="8B8175"/>
+                </a:solidFill>
+                <a:latin typeface="メイリオ" pitchFamily="34" charset="0"/>
+                <a:ea typeface="メイリオ" pitchFamily="34" charset="-122"/>
+                <a:cs typeface="メイリオ" pitchFamily="34" charset="-120"/>
+              </a:rPr>
+              <a:t>出典：株式会社ファンコミュニケーションズ ニュースリリース（2022.8.26）／株式会社パパゲーノ プレスリリース</a:t>
             </a:r>
             <a:endParaRPr lang="en-US" sz="1100" dirty="0"/>
-          </a:p>
-        </p:txBody>
-      </p:sp>
-      <p:sp>
-        <p:nvSpPr>
-          <p:cNvPr id="20" name="Text 18"/>
-          <p:cNvSpPr txBox="1"/>
-          <p:nvPr/>
-        </p:nvSpPr>
-        <p:spPr>
-          <a:xfrm>
-            <a:off x="685800" y="5870448"/>
-            <a:ext cx="10820095" cy="329184"/>
-          </a:xfrm>
-          <a:prstGeom prst="rect">
-            <a:avLst/>
-          </a:prstGeom>
-          <a:noFill/>
-          <a:ln/>
-        </p:spPr>
-        <p:txBody>
-          <a:bodyPr wrap="square" lIns="0" tIns="0" rIns="0" bIns="0" rtlCol="0" anchor="t"/>
-          <a:lstStyle/>
-          <a:p>
-            <a:pPr indent="0" marL="0">
-              <a:lnSpc>
-                <a:spcPts val="1100"/>
-              </a:lnSpc>
-              <a:buNone/>
-            </a:pPr>
-            <a:r>
-              <a:rPr lang="en-US" sz="750" dirty="0">
-                <a:solidFill>
-                  <a:srgbClr val="8B8175"/>
-                </a:solidFill>
-                <a:latin typeface="游ゴシック" pitchFamily="34" charset="0"/>
-                <a:ea typeface="游ゴシック" pitchFamily="34" charset="-122"/>
-                <a:cs typeface="游ゴシック" pitchFamily="34" charset="-120"/>
-              </a:rPr>
-              <a:t>出典：株式会社ファンコミュニケーションズ ニュースリリース（2022.8.26）／株式会社パパゲーノ プレスリリース</a:t>
-            </a:r>
-            <a:endParaRPr lang="en-US" sz="750" dirty="0"/>
           </a:p>
         </p:txBody>
       </p:sp>
@@ -7927,17 +7927,17 @@
               <a:buNone/>
             </a:pPr>
             <a:r>
-              <a:rPr lang="en-US" sz="900" spc="100" kern="0" dirty="0">
+              <a:rPr lang="en-US" sz="1200" spc="100" kern="0" dirty="0">
                 <a:solidFill>
                   <a:srgbClr val="8B8175"/>
                 </a:solidFill>
-                <a:latin typeface="游ゴシック" pitchFamily="34" charset="0"/>
-                <a:ea typeface="游ゴシック" pitchFamily="34" charset="-122"/>
-                <a:cs typeface="游ゴシック" pitchFamily="34" charset="-120"/>
+                <a:latin typeface="メイリオ" pitchFamily="34" charset="0"/>
+                <a:ea typeface="メイリオ" pitchFamily="34" charset="-122"/>
+                <a:cs typeface="メイリオ" pitchFamily="34" charset="-120"/>
               </a:rPr>
               <a:t>米倉まな｜アポプラスステーション様 ご提案</a:t>
             </a:r>
-            <a:endParaRPr lang="en-US" sz="900" dirty="0"/>
+            <a:endParaRPr lang="en-US" sz="1200" dirty="0"/>
           </a:p>
         </p:txBody>
       </p:sp>
@@ -7966,17 +7966,17 @@
               <a:buNone/>
             </a:pPr>
             <a:r>
-              <a:rPr lang="en-US" sz="900" dirty="0">
+              <a:rPr lang="en-US" sz="1200" dirty="0">
                 <a:solidFill>
                   <a:srgbClr val="8B8175"/>
                 </a:solidFill>
-                <a:latin typeface="游ゴシック" pitchFamily="34" charset="0"/>
-                <a:ea typeface="游ゴシック" pitchFamily="34" charset="-122"/>
-                <a:cs typeface="游ゴシック" pitchFamily="34" charset="-120"/>
+                <a:latin typeface="メイリオ" pitchFamily="34" charset="0"/>
+                <a:ea typeface="メイリオ" pitchFamily="34" charset="-122"/>
+                <a:cs typeface="メイリオ" pitchFamily="34" charset="-120"/>
               </a:rPr>
               <a:t>3:30 → 4:10</a:t>
             </a:r>
-            <a:endParaRPr lang="en-US" sz="900" dirty="0"/>
+            <a:endParaRPr lang="en-US" sz="1200" dirty="0"/>
           </a:p>
         </p:txBody>
       </p:sp>
@@ -8040,7 +8040,7 @@
         </p:nvSpPr>
         <p:spPr>
           <a:xfrm>
-            <a:off x="996696" y="402336"/>
+            <a:off x="996696" y="365760"/>
             <a:ext cx="7315200" cy="310896"/>
           </a:xfrm>
           <a:prstGeom prst="rect">
@@ -8057,13 +8057,13 @@
               <a:buNone/>
             </a:pPr>
             <a:r>
-              <a:rPr lang="en-US" sz="1000" b="1" spc="200" kern="0" dirty="0">
+              <a:rPr lang="en-US" sz="1400" b="1" spc="200" kern="0" dirty="0">
                 <a:solidFill>
                   <a:srgbClr val="C97B68"/>
                 </a:solidFill>
-                <a:latin typeface="游明朝" pitchFamily="34" charset="0"/>
-                <a:ea typeface="游明朝" pitchFamily="34" charset="-122"/>
-                <a:cs typeface="游明朝" pitchFamily="34" charset="-120"/>
+                <a:latin typeface="メイリオ" pitchFamily="34" charset="0"/>
+                <a:ea typeface="メイリオ" pitchFamily="34" charset="-122"/>
+                <a:cs typeface="メイリオ" pitchFamily="34" charset="-120"/>
               </a:rPr>
               <a:t>07   </a:t>
             </a:r>
@@ -8071,17 +8071,17 @@
               <a:buNone/>
             </a:pPr>
             <a:r>
-              <a:rPr lang="en-US" sz="1000" spc="300" kern="0" dirty="0">
+              <a:rPr lang="en-US" sz="1400" spc="300" kern="0" dirty="0">
                 <a:solidFill>
                   <a:srgbClr val="BDB2A2"/>
                 </a:solidFill>
-                <a:latin typeface="游ゴシック" pitchFamily="34" charset="0"/>
-                <a:ea typeface="游ゴシック" pitchFamily="34" charset="-122"/>
-                <a:cs typeface="游ゴシック" pitchFamily="34" charset="-120"/>
+                <a:latin typeface="メイリオ" pitchFamily="34" charset="0"/>
+                <a:ea typeface="メイリオ" pitchFamily="34" charset="-122"/>
+                <a:cs typeface="メイリオ" pitchFamily="34" charset="-120"/>
               </a:rPr>
               <a:t>MY LIMIT</a:t>
             </a:r>
-            <a:endParaRPr lang="en-US" sz="1000" dirty="0"/>
+            <a:endParaRPr lang="en-US" sz="1400" dirty="0"/>
           </a:p>
         </p:txBody>
       </p:sp>
@@ -8093,7 +8093,7 @@
         </p:nvSpPr>
         <p:spPr>
           <a:xfrm>
-            <a:off x="685800" y="841248"/>
+            <a:off x="685800" y="777240"/>
             <a:ext cx="10820095" cy="777240"/>
           </a:xfrm>
           <a:prstGeom prst="rect">
@@ -8114,9 +8114,9 @@
                 <a:solidFill>
                   <a:srgbClr val="F3ECE0"/>
                 </a:solidFill>
-                <a:latin typeface="游明朝" pitchFamily="34" charset="0"/>
-                <a:ea typeface="游明朝" pitchFamily="34" charset="-122"/>
-                <a:cs typeface="游明朝" pitchFamily="34" charset="-120"/>
+                <a:latin typeface="メイリオ" pitchFamily="34" charset="0"/>
+                <a:ea typeface="メイリオ" pitchFamily="34" charset="-122"/>
+                <a:cs typeface="メイリオ" pitchFamily="34" charset="-120"/>
               </a:rPr>
               <a:t>正直に言うと、私1人で抱えられる量に天井があります</a:t>
             </a:r>
@@ -8149,17 +8149,17 @@
               <a:buNone/>
             </a:pPr>
             <a:r>
-              <a:rPr lang="en-US" sz="1400" b="1" dirty="0">
+              <a:rPr lang="en-US" sz="1600" b="1" dirty="0">
                 <a:solidFill>
                   <a:srgbClr val="C97B68"/>
                 </a:solidFill>
-                <a:latin typeface="游明朝" pitchFamily="34" charset="0"/>
-                <a:ea typeface="游明朝" pitchFamily="34" charset="-122"/>
-                <a:cs typeface="游明朝" pitchFamily="34" charset="-120"/>
+                <a:latin typeface="メイリオ" pitchFamily="34" charset="0"/>
+                <a:ea typeface="メイリオ" pitchFamily="34" charset="-122"/>
+                <a:cs typeface="メイリオ" pitchFamily="34" charset="-120"/>
               </a:rPr>
               <a:t>01</a:t>
             </a:r>
-            <a:endParaRPr lang="en-US" sz="1400" dirty="0"/>
+            <a:endParaRPr lang="en-US" sz="1600" dirty="0"/>
           </a:p>
         </p:txBody>
       </p:sp>
@@ -8191,17 +8191,17 @@
               <a:buNone/>
             </a:pPr>
             <a:r>
-              <a:rPr lang="en-US" sz="1150" dirty="0">
+              <a:rPr lang="en-US" sz="1400" dirty="0">
                 <a:solidFill>
                   <a:srgbClr val="F3ECE0"/>
                 </a:solidFill>
-                <a:latin typeface="游ゴシック" pitchFamily="34" charset="0"/>
-                <a:ea typeface="游ゴシック" pitchFamily="34" charset="-122"/>
-                <a:cs typeface="游ゴシック" pitchFamily="34" charset="-120"/>
+                <a:latin typeface="メイリオ" pitchFamily="34" charset="0"/>
+                <a:ea typeface="メイリオ" pitchFamily="34" charset="-122"/>
+                <a:cs typeface="メイリオ" pitchFamily="34" charset="-120"/>
               </a:rPr>
               <a:t>臨床も、育成も、研究も、いまは私に紐づいている（属人）</a:t>
             </a:r>
-            <a:endParaRPr lang="en-US" sz="1150" dirty="0"/>
+            <a:endParaRPr lang="en-US" sz="1400" dirty="0"/>
           </a:p>
         </p:txBody>
       </p:sp>
@@ -8230,17 +8230,17 @@
               <a:buNone/>
             </a:pPr>
             <a:r>
-              <a:rPr lang="en-US" sz="1400" b="1" dirty="0">
+              <a:rPr lang="en-US" sz="1600" b="1" dirty="0">
                 <a:solidFill>
                   <a:srgbClr val="C97B68"/>
                 </a:solidFill>
-                <a:latin typeface="游明朝" pitchFamily="34" charset="0"/>
-                <a:ea typeface="游明朝" pitchFamily="34" charset="-122"/>
-                <a:cs typeface="游明朝" pitchFamily="34" charset="-120"/>
+                <a:latin typeface="メイリオ" pitchFamily="34" charset="0"/>
+                <a:ea typeface="メイリオ" pitchFamily="34" charset="-122"/>
+                <a:cs typeface="メイリオ" pitchFamily="34" charset="-120"/>
               </a:rPr>
               <a:t>02</a:t>
             </a:r>
-            <a:endParaRPr lang="en-US" sz="1400" dirty="0"/>
+            <a:endParaRPr lang="en-US" sz="1600" dirty="0"/>
           </a:p>
         </p:txBody>
       </p:sp>
@@ -8272,17 +8272,17 @@
               <a:buNone/>
             </a:pPr>
             <a:r>
-              <a:rPr lang="en-US" sz="1150" dirty="0">
+              <a:rPr lang="en-US" sz="1400" dirty="0">
                 <a:solidFill>
                   <a:srgbClr val="F3ECE0"/>
                 </a:solidFill>
-                <a:latin typeface="游ゴシック" pitchFamily="34" charset="0"/>
-                <a:ea typeface="游ゴシック" pitchFamily="34" charset="-122"/>
-                <a:cs typeface="游ゴシック" pitchFamily="34" charset="-120"/>
+                <a:latin typeface="メイリオ" pitchFamily="34" charset="0"/>
+                <a:ea typeface="メイリオ" pitchFamily="34" charset="-122"/>
+                <a:cs typeface="メイリオ" pitchFamily="34" charset="-120"/>
               </a:rPr>
               <a:t>店舗は増やせても、施術者と運営を担える人は増やせていない</a:t>
             </a:r>
-            <a:endParaRPr lang="en-US" sz="1150" dirty="0"/>
+            <a:endParaRPr lang="en-US" sz="1400" dirty="0"/>
           </a:p>
         </p:txBody>
       </p:sp>
@@ -8311,17 +8311,17 @@
               <a:buNone/>
             </a:pPr>
             <a:r>
-              <a:rPr lang="en-US" sz="1400" b="1" dirty="0">
+              <a:rPr lang="en-US" sz="1600" b="1" dirty="0">
                 <a:solidFill>
                   <a:srgbClr val="C97B68"/>
                 </a:solidFill>
-                <a:latin typeface="游明朝" pitchFamily="34" charset="0"/>
-                <a:ea typeface="游明朝" pitchFamily="34" charset="-122"/>
-                <a:cs typeface="游明朝" pitchFamily="34" charset="-120"/>
+                <a:latin typeface="メイリオ" pitchFamily="34" charset="0"/>
+                <a:ea typeface="メイリオ" pitchFamily="34" charset="-122"/>
+                <a:cs typeface="メイリオ" pitchFamily="34" charset="-120"/>
               </a:rPr>
               <a:t>03</a:t>
             </a:r>
-            <a:endParaRPr lang="en-US" sz="1400" dirty="0"/>
+            <a:endParaRPr lang="en-US" sz="1600" dirty="0"/>
           </a:p>
         </p:txBody>
       </p:sp>
@@ -8353,17 +8353,17 @@
               <a:buNone/>
             </a:pPr>
             <a:r>
-              <a:rPr lang="en-US" sz="1150" dirty="0">
+              <a:rPr lang="en-US" sz="1400" dirty="0">
                 <a:solidFill>
                   <a:srgbClr val="F3ECE0"/>
                 </a:solidFill>
-                <a:latin typeface="游ゴシック" pitchFamily="34" charset="0"/>
-                <a:ea typeface="游ゴシック" pitchFamily="34" charset="-122"/>
-                <a:cs typeface="游ゴシック" pitchFamily="34" charset="-120"/>
+                <a:latin typeface="メイリオ" pitchFamily="34" charset="0"/>
+                <a:ea typeface="メイリオ" pitchFamily="34" charset="-122"/>
+                <a:cs typeface="メイリオ" pitchFamily="34" charset="-120"/>
               </a:rPr>
               <a:t>課題の大きさに対して、届けられる人数が圧倒的に足りない</a:t>
             </a:r>
-            <a:endParaRPr lang="en-US" sz="1150" dirty="0"/>
+            <a:endParaRPr lang="en-US" sz="1400" dirty="0"/>
           </a:p>
         </p:txBody>
       </p:sp>
@@ -8399,9 +8399,9 @@
                 <a:solidFill>
                   <a:srgbClr val="F3ECE0"/>
                 </a:solidFill>
-                <a:latin typeface="游明朝" pitchFamily="34" charset="0"/>
-                <a:ea typeface="游明朝" pitchFamily="34" charset="-122"/>
-                <a:cs typeface="游明朝" pitchFamily="34" charset="-120"/>
+                <a:latin typeface="メイリオ" pitchFamily="34" charset="0"/>
+                <a:ea typeface="メイリオ" pitchFamily="34" charset="-122"/>
+                <a:cs typeface="メイリオ" pitchFamily="34" charset="-120"/>
               </a:rPr>
               <a:t>仕組みと、人と、</a:t>
             </a:r>
@@ -8419,9 +8419,9 @@
                 <a:solidFill>
                   <a:srgbClr val="F3ECE0"/>
                 </a:solidFill>
-                <a:latin typeface="游明朝" pitchFamily="34" charset="0"/>
-                <a:ea typeface="游明朝" pitchFamily="34" charset="-122"/>
-                <a:cs typeface="游明朝" pitchFamily="34" charset="-120"/>
+                <a:latin typeface="メイリオ" pitchFamily="34" charset="0"/>
+                <a:ea typeface="メイリオ" pitchFamily="34" charset="-122"/>
+                <a:cs typeface="メイリオ" pitchFamily="34" charset="-120"/>
               </a:rPr>
               <a:t>座組みが要る。</a:t>
             </a:r>
@@ -8457,17 +8457,17 @@
               <a:buNone/>
             </a:pPr>
             <a:r>
-              <a:rPr lang="en-US" sz="1100" dirty="0">
+              <a:rPr lang="en-US" sz="1400" dirty="0">
                 <a:solidFill>
                   <a:srgbClr val="BDB2A2"/>
                 </a:solidFill>
-                <a:latin typeface="游ゴシック" pitchFamily="34" charset="0"/>
-                <a:ea typeface="游ゴシック" pitchFamily="34" charset="-122"/>
-                <a:cs typeface="游ゴシック" pitchFamily="34" charset="-120"/>
-              </a:rPr>
-              <a:t>ここは私が最も苦手としてきた領域であり、御社が最も強い領域だと考えています。</a:t>
-            </a:r>
-            <a:endParaRPr lang="en-US" sz="1100" dirty="0"/>
+                <a:latin typeface="メイリオ" pitchFamily="34" charset="0"/>
+                <a:ea typeface="メイリオ" pitchFamily="34" charset="-122"/>
+                <a:cs typeface="メイリオ" pitchFamily="34" charset="-120"/>
+              </a:rPr>
+              <a:t>ここは私が最も苦手な領域であり、御社が最も強い領域だと考えています。</a:t>
+            </a:r>
+            <a:endParaRPr lang="en-US" sz="1400" dirty="0"/>
           </a:p>
         </p:txBody>
       </p:sp>
@@ -8496,17 +8496,17 @@
               <a:buNone/>
             </a:pPr>
             <a:r>
-              <a:rPr lang="en-US" sz="900" spc="100" kern="0" dirty="0">
+              <a:rPr lang="en-US" sz="1200" spc="100" kern="0" dirty="0">
                 <a:solidFill>
                   <a:srgbClr val="BDB2A2"/>
                 </a:solidFill>
-                <a:latin typeface="游ゴシック" pitchFamily="34" charset="0"/>
-                <a:ea typeface="游ゴシック" pitchFamily="34" charset="-122"/>
-                <a:cs typeface="游ゴシック" pitchFamily="34" charset="-120"/>
+                <a:latin typeface="メイリオ" pitchFamily="34" charset="0"/>
+                <a:ea typeface="メイリオ" pitchFamily="34" charset="-122"/>
+                <a:cs typeface="メイリオ" pitchFamily="34" charset="-120"/>
               </a:rPr>
               <a:t>米倉まな｜アポプラスステーション様 ご提案</a:t>
             </a:r>
-            <a:endParaRPr lang="en-US" sz="900" dirty="0"/>
+            <a:endParaRPr lang="en-US" sz="1200" dirty="0"/>
           </a:p>
         </p:txBody>
       </p:sp>
@@ -8535,17 +8535,17 @@
               <a:buNone/>
             </a:pPr>
             <a:r>
-              <a:rPr lang="en-US" sz="900" dirty="0">
+              <a:rPr lang="en-US" sz="1200" dirty="0">
                 <a:solidFill>
                   <a:srgbClr val="BDB2A2"/>
                 </a:solidFill>
-                <a:latin typeface="游ゴシック" pitchFamily="34" charset="0"/>
-                <a:ea typeface="游ゴシック" pitchFamily="34" charset="-122"/>
-                <a:cs typeface="游ゴシック" pitchFamily="34" charset="-120"/>
+                <a:latin typeface="メイリオ" pitchFamily="34" charset="0"/>
+                <a:ea typeface="メイリオ" pitchFamily="34" charset="-122"/>
+                <a:cs typeface="メイリオ" pitchFamily="34" charset="-120"/>
               </a:rPr>
               <a:t>4:10 → 4:30</a:t>
             </a:r>
-            <a:endParaRPr lang="en-US" sz="900" dirty="0"/>
+            <a:endParaRPr lang="en-US" sz="1200" dirty="0"/>
           </a:p>
         </p:txBody>
       </p:sp>
@@ -8609,7 +8609,7 @@
         </p:nvSpPr>
         <p:spPr>
           <a:xfrm>
-            <a:off x="996696" y="402336"/>
+            <a:off x="996696" y="365760"/>
             <a:ext cx="7315200" cy="310896"/>
           </a:xfrm>
           <a:prstGeom prst="rect">
@@ -8626,13 +8626,13 @@
               <a:buNone/>
             </a:pPr>
             <a:r>
-              <a:rPr lang="en-US" sz="1000" b="1" spc="200" kern="0" dirty="0">
+              <a:rPr lang="en-US" sz="1400" b="1" spc="200" kern="0" dirty="0">
                 <a:solidFill>
                   <a:srgbClr val="9C5446"/>
                 </a:solidFill>
-                <a:latin typeface="游明朝" pitchFamily="34" charset="0"/>
-                <a:ea typeface="游明朝" pitchFamily="34" charset="-122"/>
-                <a:cs typeface="游明朝" pitchFamily="34" charset="-120"/>
+                <a:latin typeface="メイリオ" pitchFamily="34" charset="0"/>
+                <a:ea typeface="メイリオ" pitchFamily="34" charset="-122"/>
+                <a:cs typeface="メイリオ" pitchFamily="34" charset="-120"/>
               </a:rPr>
               <a:t>08   </a:t>
             </a:r>
@@ -8640,17 +8640,17 @@
               <a:buNone/>
             </a:pPr>
             <a:r>
-              <a:rPr lang="en-US" sz="1000" spc="300" kern="0" dirty="0">
+              <a:rPr lang="en-US" sz="1400" spc="300" kern="0" dirty="0">
                 <a:solidFill>
                   <a:srgbClr val="8B8175"/>
                 </a:solidFill>
-                <a:latin typeface="游ゴシック" pitchFamily="34" charset="0"/>
-                <a:ea typeface="游ゴシック" pitchFamily="34" charset="-122"/>
-                <a:cs typeface="游ゴシック" pitchFamily="34" charset="-120"/>
+                <a:latin typeface="メイリオ" pitchFamily="34" charset="0"/>
+                <a:ea typeface="メイリオ" pitchFamily="34" charset="-122"/>
+                <a:cs typeface="メイリオ" pitchFamily="34" charset="-120"/>
               </a:rPr>
               <a:t>ASK</a:t>
             </a:r>
-            <a:endParaRPr lang="en-US" sz="1000" dirty="0"/>
+            <a:endParaRPr lang="en-US" sz="1400" dirty="0"/>
           </a:p>
         </p:txBody>
       </p:sp>
@@ -8662,7 +8662,7 @@
         </p:nvSpPr>
         <p:spPr>
           <a:xfrm>
-            <a:off x="685800" y="841248"/>
+            <a:off x="685800" y="777240"/>
             <a:ext cx="10820095" cy="777240"/>
           </a:xfrm>
           <a:prstGeom prst="rect">
@@ -8683,9 +8683,9 @@
                 <a:solidFill>
                   <a:srgbClr val="2B2620"/>
                 </a:solidFill>
-                <a:latin typeface="游明朝" pitchFamily="34" charset="0"/>
-                <a:ea typeface="游明朝" pitchFamily="34" charset="-122"/>
-                <a:cs typeface="游明朝" pitchFamily="34" charset="-120"/>
+                <a:latin typeface="メイリオ" pitchFamily="34" charset="0"/>
+                <a:ea typeface="メイリオ" pitchFamily="34" charset="-122"/>
+                <a:cs typeface="メイリオ" pitchFamily="34" charset="-120"/>
               </a:rPr>
               <a:t>だから、アポプラスステーション様と話したい</a:t>
             </a:r>
@@ -8718,17 +8718,17 @@
               <a:buNone/>
             </a:pPr>
             <a:r>
-              <a:rPr lang="en-US" sz="1600" b="1" dirty="0">
+              <a:rPr lang="en-US" sz="1800" b="1" dirty="0">
                 <a:solidFill>
                   <a:srgbClr val="9C5446"/>
                 </a:solidFill>
-                <a:latin typeface="游明朝" pitchFamily="34" charset="0"/>
-                <a:ea typeface="游明朝" pitchFamily="34" charset="-122"/>
-                <a:cs typeface="游明朝" pitchFamily="34" charset="-120"/>
+                <a:latin typeface="メイリオ" pitchFamily="34" charset="0"/>
+                <a:ea typeface="メイリオ" pitchFamily="34" charset="-122"/>
+                <a:cs typeface="メイリオ" pitchFamily="34" charset="-120"/>
               </a:rPr>
               <a:t>01</a:t>
             </a:r>
-            <a:endParaRPr lang="en-US" sz="1600" dirty="0"/>
+            <a:endParaRPr lang="en-US" sz="1800" dirty="0"/>
           </a:p>
         </p:txBody>
       </p:sp>
@@ -8757,17 +8757,17 @@
               <a:buNone/>
             </a:pPr>
             <a:r>
-              <a:rPr lang="en-US" sz="1400" b="1" dirty="0">
+              <a:rPr lang="en-US" sz="1600" b="1" dirty="0">
                 <a:solidFill>
                   <a:srgbClr val="2B2620"/>
                 </a:solidFill>
-                <a:latin typeface="游明朝" pitchFamily="34" charset="0"/>
-                <a:ea typeface="游明朝" pitchFamily="34" charset="-122"/>
-                <a:cs typeface="游明朝" pitchFamily="34" charset="-120"/>
+                <a:latin typeface="メイリオ" pitchFamily="34" charset="0"/>
+                <a:ea typeface="メイリオ" pitchFamily="34" charset="-122"/>
+                <a:cs typeface="メイリオ" pitchFamily="34" charset="-120"/>
               </a:rPr>
               <a:t>未病領域の新規事業を、共同で検討させてください</a:t>
             </a:r>
-            <a:endParaRPr lang="en-US" sz="1400" dirty="0"/>
+            <a:endParaRPr lang="en-US" sz="1600" dirty="0"/>
           </a:p>
         </p:txBody>
       </p:sp>
@@ -8796,17 +8796,17 @@
               <a:buNone/>
             </a:pPr>
             <a:r>
-              <a:rPr lang="en-US" sz="1050" dirty="0">
+              <a:rPr lang="en-US" sz="1400" dirty="0">
                 <a:solidFill>
                   <a:srgbClr val="5A5249"/>
                 </a:solidFill>
-                <a:latin typeface="游ゴシック" pitchFamily="34" charset="0"/>
-                <a:ea typeface="游ゴシック" pitchFamily="34" charset="-122"/>
-                <a:cs typeface="游ゴシック" pitchFamily="34" charset="-120"/>
-              </a:rPr>
-              <a:t>東洋医学 × 御社の事業アセット。入口となるサービス設計から、実証までを一緒に。</a:t>
-            </a:r>
-            <a:endParaRPr lang="en-US" sz="1050" dirty="0"/>
+                <a:latin typeface="メイリオ" pitchFamily="34" charset="0"/>
+                <a:ea typeface="メイリオ" pitchFamily="34" charset="-122"/>
+                <a:cs typeface="メイリオ" pitchFamily="34" charset="-120"/>
+              </a:rPr>
+              <a:t>東洋医学 × 御社の事業アセット。サービス設計から実証までを一緒に。</a:t>
+            </a:r>
+            <a:endParaRPr lang="en-US" sz="1400" dirty="0"/>
           </a:p>
         </p:txBody>
       </p:sp>
@@ -8855,17 +8855,17 @@
               <a:buNone/>
             </a:pPr>
             <a:r>
-              <a:rPr lang="en-US" sz="1600" b="1" dirty="0">
+              <a:rPr lang="en-US" sz="1800" b="1" dirty="0">
                 <a:solidFill>
                   <a:srgbClr val="9C5446"/>
                 </a:solidFill>
-                <a:latin typeface="游明朝" pitchFamily="34" charset="0"/>
-                <a:ea typeface="游明朝" pitchFamily="34" charset="-122"/>
-                <a:cs typeface="游明朝" pitchFamily="34" charset="-120"/>
+                <a:latin typeface="メイリオ" pitchFamily="34" charset="0"/>
+                <a:ea typeface="メイリオ" pitchFamily="34" charset="-122"/>
+                <a:cs typeface="メイリオ" pitchFamily="34" charset="-120"/>
               </a:rPr>
               <a:t>02</a:t>
             </a:r>
-            <a:endParaRPr lang="en-US" sz="1600" dirty="0"/>
+            <a:endParaRPr lang="en-US" sz="1800" dirty="0"/>
           </a:p>
         </p:txBody>
       </p:sp>
@@ -8894,17 +8894,17 @@
               <a:buNone/>
             </a:pPr>
             <a:r>
-              <a:rPr lang="en-US" sz="1400" b="1" dirty="0">
+              <a:rPr lang="en-US" sz="1600" b="1" dirty="0">
                 <a:solidFill>
                   <a:srgbClr val="2B2620"/>
                 </a:solidFill>
-                <a:latin typeface="游明朝" pitchFamily="34" charset="0"/>
-                <a:ea typeface="游明朝" pitchFamily="34" charset="-122"/>
-                <a:cs typeface="游明朝" pitchFamily="34" charset="-120"/>
+                <a:latin typeface="メイリオ" pitchFamily="34" charset="0"/>
+                <a:ea typeface="メイリオ" pitchFamily="34" charset="-122"/>
+                <a:cs typeface="メイリオ" pitchFamily="34" charset="-120"/>
               </a:rPr>
               <a:t>人と組織の知見をお借りしたい</a:t>
             </a:r>
-            <a:endParaRPr lang="en-US" sz="1400" dirty="0"/>
+            <a:endParaRPr lang="en-US" sz="1600" dirty="0"/>
           </a:p>
         </p:txBody>
       </p:sp>
@@ -8933,17 +8933,17 @@
               <a:buNone/>
             </a:pPr>
             <a:r>
-              <a:rPr lang="en-US" sz="1050" dirty="0">
+              <a:rPr lang="en-US" sz="1400" dirty="0">
                 <a:solidFill>
                   <a:srgbClr val="5A5249"/>
                 </a:solidFill>
-                <a:latin typeface="游ゴシック" pitchFamily="34" charset="0"/>
-                <a:ea typeface="游ゴシック" pitchFamily="34" charset="-122"/>
-                <a:cs typeface="游ゴシック" pitchFamily="34" charset="-120"/>
-              </a:rPr>
-              <a:t>施術者の採用・育成・配置。属人から仕組みへ移すために、御社の人材領域の知見が必要です。</a:t>
-            </a:r>
-            <a:endParaRPr lang="en-US" sz="1050" dirty="0"/>
+                <a:latin typeface="メイリオ" pitchFamily="34" charset="0"/>
+                <a:ea typeface="メイリオ" pitchFamily="34" charset="-122"/>
+                <a:cs typeface="メイリオ" pitchFamily="34" charset="-120"/>
+              </a:rPr>
+              <a:t>施術者の採用・育成・配置。属人から仕組みへ移すために必要です。</a:t>
+            </a:r>
+            <a:endParaRPr lang="en-US" sz="1400" dirty="0"/>
           </a:p>
         </p:txBody>
       </p:sp>
@@ -8992,17 +8992,17 @@
               <a:buNone/>
             </a:pPr>
             <a:r>
-              <a:rPr lang="en-US" sz="1600" b="1" dirty="0">
+              <a:rPr lang="en-US" sz="1800" b="1" dirty="0">
                 <a:solidFill>
                   <a:srgbClr val="9C5446"/>
                 </a:solidFill>
-                <a:latin typeface="游明朝" pitchFamily="34" charset="0"/>
-                <a:ea typeface="游明朝" pitchFamily="34" charset="-122"/>
-                <a:cs typeface="游明朝" pitchFamily="34" charset="-120"/>
+                <a:latin typeface="メイリオ" pitchFamily="34" charset="0"/>
+                <a:ea typeface="メイリオ" pitchFamily="34" charset="-122"/>
+                <a:cs typeface="メイリオ" pitchFamily="34" charset="-120"/>
               </a:rPr>
               <a:t>03</a:t>
             </a:r>
-            <a:endParaRPr lang="en-US" sz="1600" dirty="0"/>
+            <a:endParaRPr lang="en-US" sz="1800" dirty="0"/>
           </a:p>
         </p:txBody>
       </p:sp>
@@ -9031,17 +9031,17 @@
               <a:buNone/>
             </a:pPr>
             <a:r>
-              <a:rPr lang="en-US" sz="1400" b="1" dirty="0">
+              <a:rPr lang="en-US" sz="1600" b="1" dirty="0">
                 <a:solidFill>
                   <a:srgbClr val="2B2620"/>
                 </a:solidFill>
-                <a:latin typeface="游明朝" pitchFamily="34" charset="0"/>
-                <a:ea typeface="游明朝" pitchFamily="34" charset="-122"/>
-                <a:cs typeface="游明朝" pitchFamily="34" charset="-120"/>
+                <a:latin typeface="メイリオ" pitchFamily="34" charset="0"/>
+                <a:ea typeface="メイリオ" pitchFamily="34" charset="-122"/>
+                <a:cs typeface="メイリオ" pitchFamily="34" charset="-120"/>
               </a:rPr>
               <a:t>実証の場をご一緒したい</a:t>
             </a:r>
-            <a:endParaRPr lang="en-US" sz="1400" dirty="0"/>
+            <a:endParaRPr lang="en-US" sz="1600" dirty="0"/>
           </a:p>
         </p:txBody>
       </p:sp>
@@ -9070,17 +9070,17 @@
               <a:buNone/>
             </a:pPr>
             <a:r>
-              <a:rPr lang="en-US" sz="1050" dirty="0">
+              <a:rPr lang="en-US" sz="1400" dirty="0">
                 <a:solidFill>
                   <a:srgbClr val="5A5249"/>
                 </a:solidFill>
-                <a:latin typeface="游ゴシック" pitchFamily="34" charset="0"/>
-                <a:ea typeface="游ゴシック" pitchFamily="34" charset="-122"/>
-                <a:cs typeface="游ゴシック" pitchFamily="34" charset="-120"/>
-              </a:rPr>
-              <a:t>法人向けの健康支援など、未病層に届く場での実証。効果は学会発表の形で残し、根拠として積み上げます。</a:t>
-            </a:r>
-            <a:endParaRPr lang="en-US" sz="1050" dirty="0"/>
+                <a:latin typeface="メイリオ" pitchFamily="34" charset="0"/>
+                <a:ea typeface="メイリオ" pitchFamily="34" charset="-122"/>
+                <a:cs typeface="メイリオ" pitchFamily="34" charset="-120"/>
+              </a:rPr>
+              <a:t>法人向けの健康支援など、未病層に届く場で。効果は学会発表として残します。</a:t>
+            </a:r>
+            <a:endParaRPr lang="en-US" sz="1400" dirty="0"/>
           </a:p>
         </p:txBody>
       </p:sp>
@@ -9136,17 +9136,17 @@
               <a:buNone/>
             </a:pPr>
             <a:r>
-              <a:rPr lang="en-US" sz="900" b="1" spc="200" kern="0" dirty="0">
+              <a:rPr lang="en-US" sz="1200" b="1" spc="100" kern="0" dirty="0">
                 <a:solidFill>
                   <a:srgbClr val="9C5446"/>
                 </a:solidFill>
-                <a:latin typeface="游ゴシック" pitchFamily="34" charset="0"/>
-                <a:ea typeface="游ゴシック" pitchFamily="34" charset="-122"/>
-                <a:cs typeface="游ゴシック" pitchFamily="34" charset="-120"/>
+                <a:latin typeface="メイリオ" pitchFamily="34" charset="0"/>
+                <a:ea typeface="メイリオ" pitchFamily="34" charset="-122"/>
+                <a:cs typeface="メイリオ" pitchFamily="34" charset="-120"/>
               </a:rPr>
               <a:t>本日お願いしたいこと</a:t>
             </a:r>
-            <a:endParaRPr lang="en-US" sz="900" dirty="0"/>
+            <a:endParaRPr lang="en-US" sz="1200" dirty="0"/>
           </a:p>
         </p:txBody>
       </p:sp>
@@ -9178,15 +9178,15 @@
               <a:buNone/>
             </a:pPr>
             <a:r>
-              <a:rPr lang="en-US" sz="1100" dirty="0">
+              <a:rPr lang="en-US" sz="1400" dirty="0">
                 <a:solidFill>
                   <a:srgbClr val="5A5249"/>
                 </a:solidFill>
-                <a:latin typeface="游ゴシック" pitchFamily="34" charset="0"/>
-                <a:ea typeface="游ゴシック" pitchFamily="34" charset="-122"/>
-                <a:cs typeface="游ゴシック" pitchFamily="34" charset="-120"/>
-              </a:rPr>
-              <a:t>生きづらさを抱えた人を、治療が必要になる手前で減らしたい。そのために、鍼灸の外側にある方法も含めて手を尽くします。</a:t>
+                <a:latin typeface="メイリオ" pitchFamily="34" charset="0"/>
+                <a:ea typeface="メイリオ" pitchFamily="34" charset="-122"/>
+                <a:cs typeface="メイリオ" pitchFamily="34" charset="-120"/>
+              </a:rPr>
+              <a:t>生きづらさを抱えた人を、治療が必要になる手前で減らしたい。</a:t>
             </a:r>
             <a:pPr indent="0" marL="0">
               <a:lnSpc>
@@ -9195,17 +9195,17 @@
               <a:buNone/>
             </a:pPr>
             <a:r>
-              <a:rPr lang="en-US" sz="1100" b="1" dirty="0">
+              <a:rPr lang="en-US" sz="1400" b="1" dirty="0">
                 <a:solidFill>
                   <a:srgbClr val="2B2620"/>
                 </a:solidFill>
-                <a:latin typeface="游ゴシック" pitchFamily="34" charset="0"/>
-                <a:ea typeface="游ゴシック" pitchFamily="34" charset="-122"/>
-                <a:cs typeface="游ゴシック" pitchFamily="34" charset="-120"/>
+                <a:latin typeface="メイリオ" pitchFamily="34" charset="0"/>
+                <a:ea typeface="メイリオ" pitchFamily="34" charset="-122"/>
+                <a:cs typeface="メイリオ" pitchFamily="34" charset="-120"/>
               </a:rPr>
               <a:t>まずは本日、この3つのうちどこに可能性がありそうか、率直なご意見をいただけたら嬉しいです。</a:t>
             </a:r>
-            <a:endParaRPr lang="en-US" sz="1100" dirty="0"/>
+            <a:endParaRPr lang="en-US" sz="1400" dirty="0"/>
           </a:p>
         </p:txBody>
       </p:sp>
@@ -9234,17 +9234,17 @@
               <a:buNone/>
             </a:pPr>
             <a:r>
-              <a:rPr lang="en-US" sz="900" spc="100" kern="0" dirty="0">
+              <a:rPr lang="en-US" sz="1200" spc="100" kern="0" dirty="0">
                 <a:solidFill>
                   <a:srgbClr val="8B8175"/>
                 </a:solidFill>
-                <a:latin typeface="游ゴシック" pitchFamily="34" charset="0"/>
-                <a:ea typeface="游ゴシック" pitchFamily="34" charset="-122"/>
-                <a:cs typeface="游ゴシック" pitchFamily="34" charset="-120"/>
+                <a:latin typeface="メイリオ" pitchFamily="34" charset="0"/>
+                <a:ea typeface="メイリオ" pitchFamily="34" charset="-122"/>
+                <a:cs typeface="メイリオ" pitchFamily="34" charset="-120"/>
               </a:rPr>
               <a:t>米倉まな｜アポプラスステーション様 ご提案</a:t>
             </a:r>
-            <a:endParaRPr lang="en-US" sz="900" dirty="0"/>
+            <a:endParaRPr lang="en-US" sz="1200" dirty="0"/>
           </a:p>
         </p:txBody>
       </p:sp>
@@ -9273,17 +9273,17 @@
               <a:buNone/>
             </a:pPr>
             <a:r>
-              <a:rPr lang="en-US" sz="900" dirty="0">
+              <a:rPr lang="en-US" sz="1200" dirty="0">
                 <a:solidFill>
                   <a:srgbClr val="8B8175"/>
                 </a:solidFill>
-                <a:latin typeface="游ゴシック" pitchFamily="34" charset="0"/>
-                <a:ea typeface="游ゴシック" pitchFamily="34" charset="-122"/>
-                <a:cs typeface="游ゴシック" pitchFamily="34" charset="-120"/>
+                <a:latin typeface="メイリオ" pitchFamily="34" charset="0"/>
+                <a:ea typeface="メイリオ" pitchFamily="34" charset="-122"/>
+                <a:cs typeface="メイリオ" pitchFamily="34" charset="-120"/>
               </a:rPr>
               <a:t>4:35 → 5:00</a:t>
             </a:r>
-            <a:endParaRPr lang="en-US" sz="900" dirty="0"/>
+            <a:endParaRPr lang="en-US" sz="1200" dirty="0"/>
           </a:p>
         </p:txBody>
       </p:sp>

--- a/proposals/米倉まな_アポプラスステーション様ご提案_導入.pptx
+++ b/proposals/米倉まな_アポプラスステーション様ご提案_導入.pptx
@@ -15,9 +15,12 @@
     <p:sldId id="263" r:id="rId9"/>
     <p:sldId id="264" r:id="rId10"/>
     <p:sldId id="265" r:id="rId11"/>
+    <p:sldId id="266" r:id="rId12"/>
+    <p:sldId id="267" r:id="rId13"/>
+    <p:sldId id="268" r:id="rId14"/>
   </p:sldIdLst>
   <p:notesMasterIdLst>
-    <p:notesMasterId r:id="rId12"/>
+    <p:notesMasterId r:id="rId15"/>
   </p:notesMasterIdLst>
   <p:sldSz cx="12192000" cy="6858000"/>
   <p:notesSz cx="6858000" cy="12192000"/>
@@ -599,7 +602,7 @@
           <a:p>
             <a:r>
               <a:rPr lang="en-US" dirty="0"/>
-              <a:t>本編には含めません。実績の裏取りを求められたときに、共同研究や企業連携の公開情報としてお見せする用です。</a:t>
+              <a:t>この種の事業には3つの壁があります。利用者が集まらない、健康情報を扱う体制がない、買い手が見つからない。御社はこの3つが最初から解けています。従業員872名という初期母集団、プライバシーマーク認定、そしてCSO・CRO事業の製薬・食品のお客様。他社が3年かけて作る前提条件を、御社は初日から持っています。そしていちばん大きいのは、これを受託試験の記録基盤に転用できることだと考えています。</a:t>
             </a:r>
             <a:endParaRPr lang="en-US" dirty="0"/>
           </a:p>
@@ -623,6 +626,270 @@
             <a:fld id="{F7021451-1387-4CA6-816F-3879F97B5CBC}" type="slidenum">
               <a:rPr lang="en-US"/>
               <a:t>10</a:t>
+            </a:fld>
+            <a:endParaRPr lang="en-US"/>
+          </a:p>
+        </p:txBody>
+      </p:sp>
+    </p:spTree>
+    <p:extLst>
+      <p:ext uri="{BB962C8B-B14F-4D97-AF65-F5344CB8AC3E}">
+        <p14:creationId xmlns:p14="http://schemas.microsoft.com/office/powerpoint/2010/main" val="1024086991"/>
+      </p:ext>
+    </p:extLst>
+  </p:cSld>
+  <p:clrMapOvr>
+    <a:masterClrMapping/>
+  </p:clrMapOvr>
+</p:notes>
+</file>
+
+<file path=ppt/notesSlides/notesSlide11.xml><?xml version="1.0" encoding="utf-8"?>
+<p:notes xmlns:a="http://schemas.openxmlformats.org/drawingml/2006/main" xmlns:r="http://schemas.openxmlformats.org/officeDocument/2006/relationships" xmlns:p="http://schemas.openxmlformats.org/presentationml/2006/main">
+  <p:cSld>
+    <p:spTree>
+      <p:nvGrpSpPr>
+        <p:cNvPr id="1" name=""/>
+        <p:cNvGrpSpPr/>
+        <p:nvPr/>
+      </p:nvGrpSpPr>
+      <p:grpSpPr>
+        <a:xfrm>
+          <a:off x="0" y="0"/>
+          <a:ext cx="0" cy="0"/>
+          <a:chOff x="0" y="0"/>
+          <a:chExt cx="0" cy="0"/>
+        </a:xfrm>
+      </p:grpSpPr>
+      <p:sp>
+        <p:nvSpPr>
+          <p:cNvPr id="2" name="Slide Image Placeholder 1"/>
+          <p:cNvSpPr>
+            <a:spLocks noGrp="1" noRot="1" noChangeAspect="1"/>
+          </p:cNvSpPr>
+          <p:nvPr>
+            <p:ph type="sldImg"/>
+          </p:nvPr>
+        </p:nvSpPr>
+        <p:spPr/>
+      </p:sp>
+      <p:sp>
+        <p:nvSpPr>
+          <p:cNvPr id="3" name="Notes Placeholder 2"/>
+          <p:cNvSpPr>
+            <a:spLocks noGrp="1"/>
+          </p:cNvSpPr>
+          <p:nvPr>
+            <p:ph type="body" idx="1"/>
+          </p:nvPr>
+        </p:nvSpPr>
+        <p:spPr/>
+        <p:txBody>
+          <a:bodyPr/>
+          <a:lstStyle/>
+          <a:p>
+            <a:r>
+              <a:rPr lang="en-US" dirty="0"/>
+              <a:t>まずPhase 0、3か月です。ここでつくるのはコードではなく、社内実証の実施合意と、法務・倫理のラインの確定です。Phase 1は御社従業員300名での社内実証。テスト環境は無料枠で組むので、この段階のインフラ費はかかりません。3年目の売上イメージは約1.6億円、うち9,200万円は既存のお客様への追加提案だけで届く範囲の試算です。</a:t>
+            </a:r>
+            <a:endParaRPr lang="en-US" dirty="0"/>
+          </a:p>
+        </p:txBody>
+      </p:sp>
+      <p:sp>
+        <p:nvSpPr>
+          <p:cNvPr id="4" name="Slide Number Placeholder 3"/>
+          <p:cNvSpPr>
+            <a:spLocks noGrp="1"/>
+          </p:cNvSpPr>
+          <p:nvPr>
+            <p:ph type="sldNum" sz="quarter" idx="10"/>
+          </p:nvPr>
+        </p:nvSpPr>
+        <p:spPr/>
+        <p:txBody>
+          <a:bodyPr/>
+          <a:lstStyle/>
+          <a:p>
+            <a:fld id="{F7021451-1387-4CA6-816F-3879F97B5CBC}" type="slidenum">
+              <a:rPr lang="en-US"/>
+              <a:t>11</a:t>
+            </a:fld>
+            <a:endParaRPr lang="en-US"/>
+          </a:p>
+        </p:txBody>
+      </p:sp>
+    </p:spTree>
+    <p:extLst>
+      <p:ext uri="{BB962C8B-B14F-4D97-AF65-F5344CB8AC3E}">
+        <p14:creationId xmlns:p14="http://schemas.microsoft.com/office/powerpoint/2010/main" val="1024086991"/>
+      </p:ext>
+    </p:extLst>
+  </p:cSld>
+  <p:clrMapOvr>
+    <a:masterClrMapping/>
+  </p:clrMapOvr>
+</p:notes>
+</file>
+
+<file path=ppt/notesSlides/notesSlide12.xml><?xml version="1.0" encoding="utf-8"?>
+<p:notes xmlns:a="http://schemas.openxmlformats.org/drawingml/2006/main" xmlns:r="http://schemas.openxmlformats.org/officeDocument/2006/relationships" xmlns:p="http://schemas.openxmlformats.org/presentationml/2006/main">
+  <p:cSld>
+    <p:spTree>
+      <p:nvGrpSpPr>
+        <p:cNvPr id="1" name=""/>
+        <p:cNvGrpSpPr/>
+        <p:nvPr/>
+      </p:nvGrpSpPr>
+      <p:grpSpPr>
+        <a:xfrm>
+          <a:off x="0" y="0"/>
+          <a:ext cx="0" cy="0"/>
+          <a:chOff x="0" y="0"/>
+          <a:chExt cx="0" cy="0"/>
+        </a:xfrm>
+      </p:grpSpPr>
+      <p:sp>
+        <p:nvSpPr>
+          <p:cNvPr id="2" name="Slide Image Placeholder 1"/>
+          <p:cNvSpPr>
+            <a:spLocks noGrp="1" noRot="1" noChangeAspect="1"/>
+          </p:cNvSpPr>
+          <p:nvPr>
+            <p:ph type="sldImg"/>
+          </p:nvPr>
+        </p:nvSpPr>
+        <p:spPr/>
+      </p:sp>
+      <p:sp>
+        <p:nvSpPr>
+          <p:cNvPr id="3" name="Notes Placeholder 2"/>
+          <p:cNvSpPr>
+            <a:spLocks noGrp="1"/>
+          </p:cNvSpPr>
+          <p:nvPr>
+            <p:ph type="body" idx="1"/>
+          </p:nvPr>
+        </p:nvSpPr>
+        <p:spPr/>
+        <p:txBody>
+          <a:bodyPr/>
+          <a:lstStyle/>
+          <a:p>
+            <a:r>
+              <a:rPr lang="en-US" dirty="0"/>
+              <a:t>お願いしたいことは3つです。未病領域の新規事業の共同検討、人材・組織の知見、そして実証の場。治療が必要になる手前で、生きづらさを抱えた人を減らしたい。まずは本日、この3つのうちどこに可能性がありそうか、率直なご意見をいただけたら嬉しいです。</a:t>
+            </a:r>
+            <a:endParaRPr lang="en-US" dirty="0"/>
+          </a:p>
+        </p:txBody>
+      </p:sp>
+      <p:sp>
+        <p:nvSpPr>
+          <p:cNvPr id="4" name="Slide Number Placeholder 3"/>
+          <p:cNvSpPr>
+            <a:spLocks noGrp="1"/>
+          </p:cNvSpPr>
+          <p:nvPr>
+            <p:ph type="sldNum" sz="quarter" idx="10"/>
+          </p:nvPr>
+        </p:nvSpPr>
+        <p:spPr/>
+        <p:txBody>
+          <a:bodyPr/>
+          <a:lstStyle/>
+          <a:p>
+            <a:fld id="{F7021451-1387-4CA6-816F-3879F97B5CBC}" type="slidenum">
+              <a:rPr lang="en-US"/>
+              <a:t>12</a:t>
+            </a:fld>
+            <a:endParaRPr lang="en-US"/>
+          </a:p>
+        </p:txBody>
+      </p:sp>
+    </p:spTree>
+    <p:extLst>
+      <p:ext uri="{BB962C8B-B14F-4D97-AF65-F5344CB8AC3E}">
+        <p14:creationId xmlns:p14="http://schemas.microsoft.com/office/powerpoint/2010/main" val="1024086991"/>
+      </p:ext>
+    </p:extLst>
+  </p:cSld>
+  <p:clrMapOvr>
+    <a:masterClrMapping/>
+  </p:clrMapOvr>
+</p:notes>
+</file>
+
+<file path=ppt/notesSlides/notesSlide13.xml><?xml version="1.0" encoding="utf-8"?>
+<p:notes xmlns:a="http://schemas.openxmlformats.org/drawingml/2006/main" xmlns:r="http://schemas.openxmlformats.org/officeDocument/2006/relationships" xmlns:p="http://schemas.openxmlformats.org/presentationml/2006/main">
+  <p:cSld>
+    <p:spTree>
+      <p:nvGrpSpPr>
+        <p:cNvPr id="1" name=""/>
+        <p:cNvGrpSpPr/>
+        <p:nvPr/>
+      </p:nvGrpSpPr>
+      <p:grpSpPr>
+        <a:xfrm>
+          <a:off x="0" y="0"/>
+          <a:ext cx="0" cy="0"/>
+          <a:chOff x="0" y="0"/>
+          <a:chExt cx="0" cy="0"/>
+        </a:xfrm>
+      </p:grpSpPr>
+      <p:sp>
+        <p:nvSpPr>
+          <p:cNvPr id="2" name="Slide Image Placeholder 1"/>
+          <p:cNvSpPr>
+            <a:spLocks noGrp="1" noRot="1" noChangeAspect="1"/>
+          </p:cNvSpPr>
+          <p:nvPr>
+            <p:ph type="sldImg"/>
+          </p:nvPr>
+        </p:nvSpPr>
+        <p:spPr/>
+      </p:sp>
+      <p:sp>
+        <p:nvSpPr>
+          <p:cNvPr id="3" name="Notes Placeholder 2"/>
+          <p:cNvSpPr>
+            <a:spLocks noGrp="1"/>
+          </p:cNvSpPr>
+          <p:nvPr>
+            <p:ph type="body" idx="1"/>
+          </p:nvPr>
+        </p:nvSpPr>
+        <p:spPr/>
+        <p:txBody>
+          <a:bodyPr/>
+          <a:lstStyle/>
+          <a:p>
+            <a:r>
+              <a:rPr lang="en-US" dirty="0"/>
+              <a:t>本編には含めません。実績の裏取りを求められたときに、共同研究や企業連携の公開情報としてお見せする用です。</a:t>
+            </a:r>
+            <a:endParaRPr lang="en-US" dirty="0"/>
+          </a:p>
+        </p:txBody>
+      </p:sp>
+      <p:sp>
+        <p:nvSpPr>
+          <p:cNvPr id="4" name="Slide Number Placeholder 3"/>
+          <p:cNvSpPr>
+            <a:spLocks noGrp="1"/>
+          </p:cNvSpPr>
+          <p:nvPr>
+            <p:ph type="sldNum" sz="quarter" idx="10"/>
+          </p:nvPr>
+        </p:nvSpPr>
+        <p:spPr/>
+        <p:txBody>
+          <a:bodyPr/>
+          <a:lstStyle/>
+          <a:p>
+            <a:fld id="{F7021451-1387-4CA6-816F-3879F97B5CBC}" type="slidenum">
+              <a:rPr lang="en-US"/>
+              <a:t>13</a:t>
             </a:fld>
             <a:endParaRPr lang="en-US"/>
           </a:p>
@@ -1303,7 +1570,7 @@
           <a:p>
             <a:r>
               <a:rPr lang="en-US" dirty="0"/>
-              <a:t>お願いしたいことは3つです。未病領域の新規事業の共同検討、人材・組織の知見、そして実証の場。治療が必要になる手前で、生きづらさを抱えた人を減らしたい。まずは本日、この3つのうちどこに可能性がありそうか、率直なご意見をいただけたら嬉しいです。</a:t>
+              <a:t>そのうえで、いま具体的に提案したいのが「未病ノート」です。毎日30秒、12項目の体調記録をつけてもらいます。気・血・水・心を各3項目ずつ、4段階で。特徴は、記録して終わりにせず必ず返事が返ることです。ひとつめは共感。いま同じ節気、同じ年代、同じ地域で似た記録をしている人が何人いるかを返します。ふたつめは去年の今頃。比較の単位を年ではなく節気に置くので、3か月使えば6回分の比較点が貯まります。みっつめは崩れやすさの予測です。玉川大学の柴田研究室との共同提案で、私は臨床監修を担当します。</a:t>
             </a:r>
             <a:endParaRPr lang="en-US" dirty="0"/>
           </a:p>
@@ -2277,7 +2544,7 @@
                 <a:ea typeface="メイリオ" pitchFamily="34" charset="-122"/>
                 <a:cs typeface="メイリオ" pitchFamily="34" charset="-120"/>
               </a:rPr>
-              <a:t>所要 約5分</a:t>
+              <a:t>所要 約7分</a:t>
             </a:r>
             <a:endParaRPr lang="en-US" sz="1200" dirty="0"/>
           </a:p>
@@ -2294,6 +2561,858 @@
 <file path=ppt/slides/slide10.xml><?xml version="1.0" encoding="utf-8"?>
 <p:sld xmlns:a="http://schemas.openxmlformats.org/drawingml/2006/main" xmlns:r="http://schemas.openxmlformats.org/officeDocument/2006/relationships" xmlns:p="http://schemas.openxmlformats.org/presentationml/2006/main">
   <p:cSld name="Slide 10">
+    <p:bg>
+      <p:bgPr>
+        <a:solidFill>
+          <a:srgbClr val="2B2620"/>
+        </a:solidFill>
+      </p:bgPr>
+    </p:bg>
+    <p:spTree>
+      <p:nvGrpSpPr>
+        <p:cNvPr id="1" name=""/>
+        <p:cNvGrpSpPr/>
+        <p:nvPr/>
+      </p:nvGrpSpPr>
+      <p:grpSpPr>
+        <a:xfrm>
+          <a:off x="0" y="0"/>
+          <a:ext cx="0" cy="0"/>
+          <a:chOff x="0" y="0"/>
+          <a:chExt cx="0" cy="0"/>
+        </a:xfrm>
+      </p:grpSpPr>
+      <p:sp>
+        <p:nvSpPr>
+          <p:cNvPr id="2" name="Shape 0"/>
+          <p:cNvSpPr/>
+          <p:nvPr/>
+        </p:nvSpPr>
+        <p:spPr>
+          <a:xfrm>
+            <a:off x="685800" y="562356"/>
+            <a:ext cx="237744" cy="12802"/>
+          </a:xfrm>
+          <a:prstGeom prst="rect">
+            <a:avLst/>
+          </a:prstGeom>
+          <a:solidFill>
+            <a:srgbClr val="C97B68"/>
+          </a:solidFill>
+          <a:ln/>
+        </p:spPr>
+      </p:sp>
+      <p:sp>
+        <p:nvSpPr>
+          <p:cNvPr id="3" name="Text 1"/>
+          <p:cNvSpPr txBox="1"/>
+          <p:nvPr/>
+        </p:nvSpPr>
+        <p:spPr>
+          <a:xfrm>
+            <a:off x="996696" y="365760"/>
+            <a:ext cx="7315200" cy="310896"/>
+          </a:xfrm>
+          <a:prstGeom prst="rect">
+            <a:avLst/>
+          </a:prstGeom>
+          <a:noFill/>
+          <a:ln/>
+        </p:spPr>
+        <p:txBody>
+          <a:bodyPr wrap="square" lIns="0" tIns="0" rIns="0" bIns="0" rtlCol="0" anchor="ctr"/>
+          <a:lstStyle/>
+          <a:p>
+            <a:pPr indent="0" marL="0">
+              <a:buNone/>
+            </a:pPr>
+            <a:r>
+              <a:rPr lang="en-US" sz="1400" b="1" spc="200" kern="0" dirty="0">
+                <a:solidFill>
+                  <a:srgbClr val="C97B68"/>
+                </a:solidFill>
+                <a:latin typeface="メイリオ" pitchFamily="34" charset="0"/>
+                <a:ea typeface="メイリオ" pitchFamily="34" charset="-122"/>
+                <a:cs typeface="メイリオ" pitchFamily="34" charset="-120"/>
+              </a:rPr>
+              <a:t>09   </a:t>
+            </a:r>
+            <a:pPr indent="0" marL="0">
+              <a:buNone/>
+            </a:pPr>
+            <a:r>
+              <a:rPr lang="en-US" sz="1400" spc="300" kern="0" dirty="0">
+                <a:solidFill>
+                  <a:srgbClr val="BDB2A2"/>
+                </a:solidFill>
+                <a:latin typeface="メイリオ" pitchFamily="34" charset="0"/>
+                <a:ea typeface="メイリオ" pitchFamily="34" charset="-122"/>
+                <a:cs typeface="メイリオ" pitchFamily="34" charset="-120"/>
+              </a:rPr>
+              <a:t>STRATEGIC FIT</a:t>
+            </a:r>
+            <a:endParaRPr lang="en-US" sz="1400" dirty="0"/>
+          </a:p>
+        </p:txBody>
+      </p:sp>
+      <p:sp>
+        <p:nvSpPr>
+          <p:cNvPr id="4" name="Text 2"/>
+          <p:cNvSpPr txBox="1"/>
+          <p:nvPr/>
+        </p:nvSpPr>
+        <p:spPr>
+          <a:xfrm>
+            <a:off x="685800" y="777240"/>
+            <a:ext cx="10820095" cy="777240"/>
+          </a:xfrm>
+          <a:prstGeom prst="rect">
+            <a:avLst/>
+          </a:prstGeom>
+          <a:noFill/>
+          <a:ln/>
+        </p:spPr>
+        <p:txBody>
+          <a:bodyPr wrap="square" lIns="0" tIns="0" rIns="0" bIns="0" rtlCol="0" anchor="ctr"/>
+          <a:lstStyle/>
+          <a:p>
+            <a:pPr indent="0" marL="0">
+              <a:buNone/>
+            </a:pPr>
+            <a:r>
+              <a:rPr lang="en-US" sz="2800" b="1" spc="100" kern="0" dirty="0">
+                <a:solidFill>
+                  <a:srgbClr val="F3ECE0"/>
+                </a:solidFill>
+                <a:latin typeface="メイリオ" pitchFamily="34" charset="0"/>
+                <a:ea typeface="メイリオ" pitchFamily="34" charset="-122"/>
+                <a:cs typeface="メイリオ" pitchFamily="34" charset="-120"/>
+              </a:rPr>
+              <a:t>3つの壁が、御社では最初から解けています</a:t>
+            </a:r>
+            <a:endParaRPr lang="en-US" sz="2800" dirty="0"/>
+          </a:p>
+        </p:txBody>
+      </p:sp>
+      <p:sp>
+        <p:nvSpPr>
+          <p:cNvPr id="5" name="Text 3"/>
+          <p:cNvSpPr txBox="1"/>
+          <p:nvPr/>
+        </p:nvSpPr>
+        <p:spPr>
+          <a:xfrm>
+            <a:off x="685800" y="1627632"/>
+            <a:ext cx="5029200" cy="274320"/>
+          </a:xfrm>
+          <a:prstGeom prst="rect">
+            <a:avLst/>
+          </a:prstGeom>
+          <a:noFill/>
+          <a:ln/>
+        </p:spPr>
+        <p:txBody>
+          <a:bodyPr wrap="square" lIns="0" tIns="0" rIns="0" bIns="0" rtlCol="0" anchor="ctr"/>
+          <a:lstStyle/>
+          <a:p>
+            <a:pPr indent="0" marL="0">
+              <a:buNone/>
+            </a:pPr>
+            <a:r>
+              <a:rPr lang="en-US" sz="1400" b="1" spc="200" kern="0" dirty="0">
+                <a:solidFill>
+                  <a:srgbClr val="C97B68"/>
+                </a:solidFill>
+                <a:latin typeface="メイリオ" pitchFamily="34" charset="0"/>
+                <a:ea typeface="メイリオ" pitchFamily="34" charset="-122"/>
+                <a:cs typeface="メイリオ" pitchFamily="34" charset="-120"/>
+              </a:rPr>
+              <a:t>立ちはだかる壁</a:t>
+            </a:r>
+            <a:endParaRPr lang="en-US" sz="1400" dirty="0"/>
+          </a:p>
+        </p:txBody>
+      </p:sp>
+      <p:sp>
+        <p:nvSpPr>
+          <p:cNvPr id="6" name="Text 4"/>
+          <p:cNvSpPr txBox="1"/>
+          <p:nvPr/>
+        </p:nvSpPr>
+        <p:spPr>
+          <a:xfrm>
+            <a:off x="6309360" y="1627632"/>
+            <a:ext cx="5193792" cy="274320"/>
+          </a:xfrm>
+          <a:prstGeom prst="rect">
+            <a:avLst/>
+          </a:prstGeom>
+          <a:noFill/>
+          <a:ln/>
+        </p:spPr>
+        <p:txBody>
+          <a:bodyPr wrap="square" lIns="0" tIns="0" rIns="0" bIns="0" rtlCol="0" anchor="ctr"/>
+          <a:lstStyle/>
+          <a:p>
+            <a:pPr indent="0" marL="0">
+              <a:buNone/>
+            </a:pPr>
+            <a:r>
+              <a:rPr lang="en-US" sz="1400" b="1" spc="200" kern="0" dirty="0">
+                <a:solidFill>
+                  <a:srgbClr val="93AC93"/>
+                </a:solidFill>
+                <a:latin typeface="メイリオ" pitchFamily="34" charset="0"/>
+                <a:ea typeface="メイリオ" pitchFamily="34" charset="-122"/>
+                <a:cs typeface="メイリオ" pitchFamily="34" charset="-120"/>
+              </a:rPr>
+              <a:t>御社がすでに持っているもの</a:t>
+            </a:r>
+            <a:endParaRPr lang="en-US" sz="1400" dirty="0"/>
+          </a:p>
+        </p:txBody>
+      </p:sp>
+      <p:sp>
+        <p:nvSpPr>
+          <p:cNvPr id="7" name="Shape 5"/>
+          <p:cNvSpPr/>
+          <p:nvPr/>
+        </p:nvSpPr>
+        <p:spPr>
+          <a:xfrm>
+            <a:off x="685800" y="1883664"/>
+            <a:ext cx="5029200" cy="7315"/>
+          </a:xfrm>
+          <a:prstGeom prst="rect">
+            <a:avLst/>
+          </a:prstGeom>
+          <a:solidFill>
+            <a:srgbClr val="4A423A"/>
+          </a:solidFill>
+          <a:ln/>
+        </p:spPr>
+      </p:sp>
+      <p:sp>
+        <p:nvSpPr>
+          <p:cNvPr id="8" name="Shape 6"/>
+          <p:cNvSpPr/>
+          <p:nvPr/>
+        </p:nvSpPr>
+        <p:spPr>
+          <a:xfrm>
+            <a:off x="6309360" y="1883664"/>
+            <a:ext cx="5193792" cy="7315"/>
+          </a:xfrm>
+          <a:prstGeom prst="rect">
+            <a:avLst/>
+          </a:prstGeom>
+          <a:solidFill>
+            <a:srgbClr val="4A423A"/>
+          </a:solidFill>
+          <a:ln/>
+        </p:spPr>
+      </p:sp>
+      <p:sp>
+        <p:nvSpPr>
+          <p:cNvPr id="9" name="Text 7"/>
+          <p:cNvSpPr txBox="1"/>
+          <p:nvPr/>
+        </p:nvSpPr>
+        <p:spPr>
+          <a:xfrm>
+            <a:off x="685800" y="1993392"/>
+            <a:ext cx="5029200" cy="822960"/>
+          </a:xfrm>
+          <a:prstGeom prst="rect">
+            <a:avLst/>
+          </a:prstGeom>
+          <a:noFill/>
+          <a:ln/>
+        </p:spPr>
+        <p:txBody>
+          <a:bodyPr wrap="square" lIns="0" tIns="0" rIns="0" bIns="0" rtlCol="0" anchor="t"/>
+          <a:lstStyle/>
+          <a:p>
+            <a:pPr indent="0" marL="0">
+              <a:lnSpc>
+                <a:spcPts val="2400"/>
+              </a:lnSpc>
+              <a:buNone/>
+            </a:pPr>
+            <a:r>
+              <a:rPr lang="en-US" sz="1700" b="1" dirty="0">
+                <a:solidFill>
+                  <a:srgbClr val="C97B68"/>
+                </a:solidFill>
+                <a:latin typeface="メイリオ" pitchFamily="34" charset="0"/>
+                <a:ea typeface="メイリオ" pitchFamily="34" charset="-122"/>
+                <a:cs typeface="メイリオ" pitchFamily="34" charset="-120"/>
+              </a:rPr>
+              <a:t>01　</a:t>
+            </a:r>
+            <a:pPr indent="0" marL="0">
+              <a:lnSpc>
+                <a:spcPts val="2400"/>
+              </a:lnSpc>
+              <a:buNone/>
+            </a:pPr>
+            <a:r>
+              <a:rPr lang="en-US" sz="1400" dirty="0">
+                <a:solidFill>
+                  <a:srgbClr val="F3ECE0"/>
+                </a:solidFill>
+                <a:latin typeface="メイリオ" pitchFamily="34" charset="0"/>
+                <a:ea typeface="メイリオ" pitchFamily="34" charset="-122"/>
+                <a:cs typeface="メイリオ" pitchFamily="34" charset="-120"/>
+              </a:rPr>
+              <a:t>利用者が集まらない。母数がなければ「同じ人がいます」は成立しません。</a:t>
+            </a:r>
+            <a:endParaRPr lang="en-US" sz="1400" dirty="0"/>
+          </a:p>
+        </p:txBody>
+      </p:sp>
+      <p:sp>
+        <p:nvSpPr>
+          <p:cNvPr id="10" name="Text 8"/>
+          <p:cNvSpPr txBox="1"/>
+          <p:nvPr/>
+        </p:nvSpPr>
+        <p:spPr>
+          <a:xfrm>
+            <a:off x="6309360" y="1993392"/>
+            <a:ext cx="5193792" cy="822960"/>
+          </a:xfrm>
+          <a:prstGeom prst="rect">
+            <a:avLst/>
+          </a:prstGeom>
+          <a:noFill/>
+          <a:ln/>
+        </p:spPr>
+        <p:txBody>
+          <a:bodyPr wrap="square" lIns="0" tIns="0" rIns="0" bIns="0" rtlCol="0" anchor="t"/>
+          <a:lstStyle/>
+          <a:p>
+            <a:pPr indent="0" marL="0">
+              <a:lnSpc>
+                <a:spcPts val="2400"/>
+              </a:lnSpc>
+              <a:buNone/>
+            </a:pPr>
+            <a:r>
+              <a:rPr lang="en-US" sz="1400" b="1" dirty="0">
+                <a:solidFill>
+                  <a:srgbClr val="F3ECE0"/>
+                </a:solidFill>
+                <a:latin typeface="メイリオ" pitchFamily="34" charset="0"/>
+                <a:ea typeface="メイリオ" pitchFamily="34" charset="-122"/>
+                <a:cs typeface="メイリオ" pitchFamily="34" charset="-120"/>
+              </a:rPr>
+              <a:t>従業員872名</a:t>
+            </a:r>
+            <a:pPr indent="0" marL="0">
+              <a:lnSpc>
+                <a:spcPts val="2400"/>
+              </a:lnSpc>
+              <a:buNone/>
+            </a:pPr>
+            <a:r>
+              <a:rPr lang="en-US" sz="1400" dirty="0">
+                <a:solidFill>
+                  <a:srgbClr val="BDB2A2"/>
+                </a:solidFill>
+                <a:latin typeface="メイリオ" pitchFamily="34" charset="0"/>
+                <a:ea typeface="メイリオ" pitchFamily="34" charset="-122"/>
+                <a:cs typeface="メイリオ" pitchFamily="34" charset="-120"/>
+              </a:rPr>
+              <a:t>という初期母集団。初日から実測値で動きます。</a:t>
+            </a:r>
+            <a:endParaRPr lang="en-US" sz="1400" dirty="0"/>
+          </a:p>
+        </p:txBody>
+      </p:sp>
+      <p:sp>
+        <p:nvSpPr>
+          <p:cNvPr id="11" name="Shape 9"/>
+          <p:cNvSpPr/>
+          <p:nvPr/>
+        </p:nvSpPr>
+        <p:spPr>
+          <a:xfrm>
+            <a:off x="685800" y="2852928"/>
+            <a:ext cx="5029200" cy="7315"/>
+          </a:xfrm>
+          <a:prstGeom prst="rect">
+            <a:avLst/>
+          </a:prstGeom>
+          <a:solidFill>
+            <a:srgbClr val="4A423A"/>
+          </a:solidFill>
+          <a:ln/>
+        </p:spPr>
+      </p:sp>
+      <p:sp>
+        <p:nvSpPr>
+          <p:cNvPr id="12" name="Shape 10"/>
+          <p:cNvSpPr/>
+          <p:nvPr/>
+        </p:nvSpPr>
+        <p:spPr>
+          <a:xfrm>
+            <a:off x="6309360" y="2852928"/>
+            <a:ext cx="5193792" cy="7315"/>
+          </a:xfrm>
+          <a:prstGeom prst="rect">
+            <a:avLst/>
+          </a:prstGeom>
+          <a:solidFill>
+            <a:srgbClr val="4A423A"/>
+          </a:solidFill>
+          <a:ln/>
+        </p:spPr>
+      </p:sp>
+      <p:sp>
+        <p:nvSpPr>
+          <p:cNvPr id="13" name="Text 11"/>
+          <p:cNvSpPr txBox="1"/>
+          <p:nvPr/>
+        </p:nvSpPr>
+        <p:spPr>
+          <a:xfrm>
+            <a:off x="685800" y="2962656"/>
+            <a:ext cx="5029200" cy="822960"/>
+          </a:xfrm>
+          <a:prstGeom prst="rect">
+            <a:avLst/>
+          </a:prstGeom>
+          <a:noFill/>
+          <a:ln/>
+        </p:spPr>
+        <p:txBody>
+          <a:bodyPr wrap="square" lIns="0" tIns="0" rIns="0" bIns="0" rtlCol="0" anchor="t"/>
+          <a:lstStyle/>
+          <a:p>
+            <a:pPr indent="0" marL="0">
+              <a:lnSpc>
+                <a:spcPts val="2400"/>
+              </a:lnSpc>
+              <a:buNone/>
+            </a:pPr>
+            <a:r>
+              <a:rPr lang="en-US" sz="1700" b="1" dirty="0">
+                <a:solidFill>
+                  <a:srgbClr val="C97B68"/>
+                </a:solidFill>
+                <a:latin typeface="メイリオ" pitchFamily="34" charset="0"/>
+                <a:ea typeface="メイリオ" pitchFamily="34" charset="-122"/>
+                <a:cs typeface="メイリオ" pitchFamily="34" charset="-120"/>
+              </a:rPr>
+              <a:t>02　</a:t>
+            </a:r>
+            <a:pPr indent="0" marL="0">
+              <a:lnSpc>
+                <a:spcPts val="2400"/>
+              </a:lnSpc>
+              <a:buNone/>
+            </a:pPr>
+            <a:r>
+              <a:rPr lang="en-US" sz="1400" dirty="0">
+                <a:solidFill>
+                  <a:srgbClr val="F3ECE0"/>
+                </a:solidFill>
+                <a:latin typeface="メイリオ" pitchFamily="34" charset="0"/>
+                <a:ea typeface="メイリオ" pitchFamily="34" charset="-122"/>
+                <a:cs typeface="メイリオ" pitchFamily="34" charset="-120"/>
+              </a:rPr>
+              <a:t>健康情報を扱う体制がない。ここが新規参入の最大の障壁です。</a:t>
+            </a:r>
+            <a:endParaRPr lang="en-US" sz="1400" dirty="0"/>
+          </a:p>
+        </p:txBody>
+      </p:sp>
+      <p:sp>
+        <p:nvSpPr>
+          <p:cNvPr id="14" name="Text 12"/>
+          <p:cNvSpPr txBox="1"/>
+          <p:nvPr/>
+        </p:nvSpPr>
+        <p:spPr>
+          <a:xfrm>
+            <a:off x="6309360" y="2962656"/>
+            <a:ext cx="5193792" cy="822960"/>
+          </a:xfrm>
+          <a:prstGeom prst="rect">
+            <a:avLst/>
+          </a:prstGeom>
+          <a:noFill/>
+          <a:ln/>
+        </p:spPr>
+        <p:txBody>
+          <a:bodyPr wrap="square" lIns="0" tIns="0" rIns="0" bIns="0" rtlCol="0" anchor="t"/>
+          <a:lstStyle/>
+          <a:p>
+            <a:pPr indent="0" marL="0">
+              <a:lnSpc>
+                <a:spcPts val="2400"/>
+              </a:lnSpc>
+              <a:buNone/>
+            </a:pPr>
+            <a:r>
+              <a:rPr lang="en-US" sz="1400" b="1" dirty="0">
+                <a:solidFill>
+                  <a:srgbClr val="F3ECE0"/>
+                </a:solidFill>
+                <a:latin typeface="メイリオ" pitchFamily="34" charset="0"/>
+                <a:ea typeface="メイリオ" pitchFamily="34" charset="-122"/>
+                <a:cs typeface="メイリオ" pitchFamily="34" charset="-120"/>
+              </a:rPr>
+              <a:t>プライバシーマーク認定</a:t>
+            </a:r>
+            <a:pPr indent="0" marL="0">
+              <a:lnSpc>
+                <a:spcPts val="2400"/>
+              </a:lnSpc>
+              <a:buNone/>
+            </a:pPr>
+            <a:r>
+              <a:rPr lang="en-US" sz="1400" dirty="0">
+                <a:solidFill>
+                  <a:srgbClr val="BDB2A2"/>
+                </a:solidFill>
+                <a:latin typeface="メイリオ" pitchFamily="34" charset="0"/>
+                <a:ea typeface="メイリオ" pitchFamily="34" charset="-122"/>
+                <a:cs typeface="メイリオ" pitchFamily="34" charset="-120"/>
+              </a:rPr>
+              <a:t>済み。1年以上かかる体制構築を、もう越えています。</a:t>
+            </a:r>
+            <a:endParaRPr lang="en-US" sz="1400" dirty="0"/>
+          </a:p>
+        </p:txBody>
+      </p:sp>
+      <p:sp>
+        <p:nvSpPr>
+          <p:cNvPr id="15" name="Shape 13"/>
+          <p:cNvSpPr/>
+          <p:nvPr/>
+        </p:nvSpPr>
+        <p:spPr>
+          <a:xfrm>
+            <a:off x="685800" y="3822192"/>
+            <a:ext cx="5029200" cy="7315"/>
+          </a:xfrm>
+          <a:prstGeom prst="rect">
+            <a:avLst/>
+          </a:prstGeom>
+          <a:solidFill>
+            <a:srgbClr val="4A423A"/>
+          </a:solidFill>
+          <a:ln/>
+        </p:spPr>
+      </p:sp>
+      <p:sp>
+        <p:nvSpPr>
+          <p:cNvPr id="16" name="Shape 14"/>
+          <p:cNvSpPr/>
+          <p:nvPr/>
+        </p:nvSpPr>
+        <p:spPr>
+          <a:xfrm>
+            <a:off x="6309360" y="3822192"/>
+            <a:ext cx="5193792" cy="7315"/>
+          </a:xfrm>
+          <a:prstGeom prst="rect">
+            <a:avLst/>
+          </a:prstGeom>
+          <a:solidFill>
+            <a:srgbClr val="4A423A"/>
+          </a:solidFill>
+          <a:ln/>
+        </p:spPr>
+      </p:sp>
+      <p:sp>
+        <p:nvSpPr>
+          <p:cNvPr id="17" name="Text 15"/>
+          <p:cNvSpPr txBox="1"/>
+          <p:nvPr/>
+        </p:nvSpPr>
+        <p:spPr>
+          <a:xfrm>
+            <a:off x="685800" y="3931920"/>
+            <a:ext cx="5029200" cy="822960"/>
+          </a:xfrm>
+          <a:prstGeom prst="rect">
+            <a:avLst/>
+          </a:prstGeom>
+          <a:noFill/>
+          <a:ln/>
+        </p:spPr>
+        <p:txBody>
+          <a:bodyPr wrap="square" lIns="0" tIns="0" rIns="0" bIns="0" rtlCol="0" anchor="t"/>
+          <a:lstStyle/>
+          <a:p>
+            <a:pPr indent="0" marL="0">
+              <a:lnSpc>
+                <a:spcPts val="2400"/>
+              </a:lnSpc>
+              <a:buNone/>
+            </a:pPr>
+            <a:r>
+              <a:rPr lang="en-US" sz="1700" b="1" dirty="0">
+                <a:solidFill>
+                  <a:srgbClr val="C97B68"/>
+                </a:solidFill>
+                <a:latin typeface="メイリオ" pitchFamily="34" charset="0"/>
+                <a:ea typeface="メイリオ" pitchFamily="34" charset="-122"/>
+                <a:cs typeface="メイリオ" pitchFamily="34" charset="-120"/>
+              </a:rPr>
+              <a:t>03　</a:t>
+            </a:r>
+            <a:pPr indent="0" marL="0">
+              <a:lnSpc>
+                <a:spcPts val="2400"/>
+              </a:lnSpc>
+              <a:buNone/>
+            </a:pPr>
+            <a:r>
+              <a:rPr lang="en-US" sz="1400" dirty="0">
+                <a:solidFill>
+                  <a:srgbClr val="F3ECE0"/>
+                </a:solidFill>
+                <a:latin typeface="メイリオ" pitchFamily="34" charset="0"/>
+                <a:ea typeface="メイリオ" pitchFamily="34" charset="-122"/>
+                <a:cs typeface="メイリオ" pitchFamily="34" charset="-120"/>
+              </a:rPr>
+              <a:t>買い手が見つからない。新規開拓に数年かかります。</a:t>
+            </a:r>
+            <a:endParaRPr lang="en-US" sz="1400" dirty="0"/>
+          </a:p>
+        </p:txBody>
+      </p:sp>
+      <p:sp>
+        <p:nvSpPr>
+          <p:cNvPr id="18" name="Text 16"/>
+          <p:cNvSpPr txBox="1"/>
+          <p:nvPr/>
+        </p:nvSpPr>
+        <p:spPr>
+          <a:xfrm>
+            <a:off x="6309360" y="3931920"/>
+            <a:ext cx="5193792" cy="822960"/>
+          </a:xfrm>
+          <a:prstGeom prst="rect">
+            <a:avLst/>
+          </a:prstGeom>
+          <a:noFill/>
+          <a:ln/>
+        </p:spPr>
+        <p:txBody>
+          <a:bodyPr wrap="square" lIns="0" tIns="0" rIns="0" bIns="0" rtlCol="0" anchor="t"/>
+          <a:lstStyle/>
+          <a:p>
+            <a:pPr indent="0" marL="0">
+              <a:lnSpc>
+                <a:spcPts val="2400"/>
+              </a:lnSpc>
+              <a:buNone/>
+            </a:pPr>
+            <a:r>
+              <a:rPr lang="en-US" sz="1400" b="1" dirty="0">
+                <a:solidFill>
+                  <a:srgbClr val="F3ECE0"/>
+                </a:solidFill>
+                <a:latin typeface="メイリオ" pitchFamily="34" charset="0"/>
+                <a:ea typeface="メイリオ" pitchFamily="34" charset="-122"/>
+                <a:cs typeface="メイリオ" pitchFamily="34" charset="-120"/>
+              </a:rPr>
+              <a:t>CSO・CRO事業</a:t>
+            </a:r>
+            <a:pPr indent="0" marL="0">
+              <a:lnSpc>
+                <a:spcPts val="2400"/>
+              </a:lnSpc>
+              <a:buNone/>
+            </a:pPr>
+            <a:r>
+              <a:rPr lang="en-US" sz="1400" dirty="0">
+                <a:solidFill>
+                  <a:srgbClr val="BDB2A2"/>
+                </a:solidFill>
+                <a:latin typeface="メイリオ" pitchFamily="34" charset="0"/>
+                <a:ea typeface="メイリオ" pitchFamily="34" charset="-122"/>
+                <a:cs typeface="メイリオ" pitchFamily="34" charset="-120"/>
+              </a:rPr>
+              <a:t>で、製薬・食品メーカーとの取引があります。</a:t>
+            </a:r>
+            <a:endParaRPr lang="en-US" sz="1400" dirty="0"/>
+          </a:p>
+        </p:txBody>
+      </p:sp>
+      <p:sp>
+        <p:nvSpPr>
+          <p:cNvPr id="19" name="Text 17"/>
+          <p:cNvSpPr txBox="1"/>
+          <p:nvPr/>
+        </p:nvSpPr>
+        <p:spPr>
+          <a:xfrm>
+            <a:off x="685800" y="5120640"/>
+            <a:ext cx="10820095" cy="548640"/>
+          </a:xfrm>
+          <a:prstGeom prst="rect">
+            <a:avLst/>
+          </a:prstGeom>
+          <a:noFill/>
+          <a:ln/>
+        </p:spPr>
+        <p:txBody>
+          <a:bodyPr wrap="square" lIns="0" tIns="0" rIns="0" bIns="0" rtlCol="0" anchor="ctr"/>
+          <a:lstStyle/>
+          <a:p>
+            <a:pPr indent="0" marL="0">
+              <a:buNone/>
+            </a:pPr>
+            <a:r>
+              <a:rPr lang="en-US" sz="2400" b="1" dirty="0">
+                <a:solidFill>
+                  <a:srgbClr val="C97B68"/>
+                </a:solidFill>
+                <a:latin typeface="メイリオ" pitchFamily="34" charset="0"/>
+                <a:ea typeface="メイリオ" pitchFamily="34" charset="-122"/>
+                <a:cs typeface="メイリオ" pitchFamily="34" charset="-120"/>
+              </a:rPr>
+              <a:t>いちばん大きいのは、受託試験の記録基盤に転用できることです。</a:t>
+            </a:r>
+            <a:endParaRPr lang="en-US" sz="2400" dirty="0"/>
+          </a:p>
+        </p:txBody>
+      </p:sp>
+      <p:sp>
+        <p:nvSpPr>
+          <p:cNvPr id="20" name="Text 18"/>
+          <p:cNvSpPr txBox="1"/>
+          <p:nvPr/>
+        </p:nvSpPr>
+        <p:spPr>
+          <a:xfrm>
+            <a:off x="685800" y="5870448"/>
+            <a:ext cx="10820095" cy="274320"/>
+          </a:xfrm>
+          <a:prstGeom prst="rect">
+            <a:avLst/>
+          </a:prstGeom>
+          <a:noFill/>
+          <a:ln/>
+        </p:spPr>
+        <p:txBody>
+          <a:bodyPr wrap="square" lIns="0" tIns="0" rIns="0" bIns="0" rtlCol="0" anchor="t"/>
+          <a:lstStyle/>
+          <a:p>
+            <a:pPr indent="0" marL="0">
+              <a:buNone/>
+            </a:pPr>
+            <a:r>
+              <a:rPr lang="en-US" sz="1100" dirty="0">
+                <a:solidFill>
+                  <a:srgbClr val="BDB2A2"/>
+                </a:solidFill>
+                <a:latin typeface="メイリオ" pitchFamily="34" charset="0"/>
+                <a:ea typeface="メイリオ" pitchFamily="34" charset="-122"/>
+                <a:cs typeface="メイリオ" pitchFamily="34" charset="-120"/>
+              </a:rPr>
+              <a:t>※ 数字は公開情報をもとにした記載です。相違があればご指摘ください。</a:t>
+            </a:r>
+            <a:endParaRPr lang="en-US" sz="1100" dirty="0"/>
+          </a:p>
+        </p:txBody>
+      </p:sp>
+      <p:sp>
+        <p:nvSpPr>
+          <p:cNvPr id="21" name="Text 19"/>
+          <p:cNvSpPr txBox="1"/>
+          <p:nvPr/>
+        </p:nvSpPr>
+        <p:spPr>
+          <a:xfrm>
+            <a:off x="685800" y="6336792"/>
+            <a:ext cx="7315200" cy="274320"/>
+          </a:xfrm>
+          <a:prstGeom prst="rect">
+            <a:avLst/>
+          </a:prstGeom>
+          <a:noFill/>
+          <a:ln/>
+        </p:spPr>
+        <p:txBody>
+          <a:bodyPr wrap="square" lIns="0" tIns="0" rIns="0" bIns="0" rtlCol="0" anchor="ctr"/>
+          <a:lstStyle/>
+          <a:p>
+            <a:pPr indent="0" marL="0">
+              <a:buNone/>
+            </a:pPr>
+            <a:r>
+              <a:rPr lang="en-US" sz="1200" spc="100" kern="0" dirty="0">
+                <a:solidFill>
+                  <a:srgbClr val="BDB2A2"/>
+                </a:solidFill>
+                <a:latin typeface="メイリオ" pitchFamily="34" charset="0"/>
+                <a:ea typeface="メイリオ" pitchFamily="34" charset="-122"/>
+                <a:cs typeface="メイリオ" pitchFamily="34" charset="-120"/>
+              </a:rPr>
+              <a:t>米倉まな｜アポプラスステーション様 ご提案</a:t>
+            </a:r>
+            <a:endParaRPr lang="en-US" sz="1200" dirty="0"/>
+          </a:p>
+        </p:txBody>
+      </p:sp>
+      <p:sp>
+        <p:nvSpPr>
+          <p:cNvPr id="22" name="Text 20"/>
+          <p:cNvSpPr txBox="1"/>
+          <p:nvPr/>
+        </p:nvSpPr>
+        <p:spPr>
+          <a:xfrm>
+            <a:off x="8305495" y="6336792"/>
+            <a:ext cx="3200400" cy="274320"/>
+          </a:xfrm>
+          <a:prstGeom prst="rect">
+            <a:avLst/>
+          </a:prstGeom>
+          <a:noFill/>
+          <a:ln/>
+        </p:spPr>
+        <p:txBody>
+          <a:bodyPr wrap="square" lIns="0" tIns="0" rIns="0" bIns="0" rtlCol="0" anchor="ctr"/>
+          <a:lstStyle/>
+          <a:p>
+            <a:pPr algn="r" indent="0" marL="0">
+              <a:buNone/>
+            </a:pPr>
+            <a:r>
+              <a:rPr lang="en-US" sz="1200" dirty="0">
+                <a:solidFill>
+                  <a:srgbClr val="BDB2A2"/>
+                </a:solidFill>
+                <a:latin typeface="メイリオ" pitchFamily="34" charset="0"/>
+                <a:ea typeface="メイリオ" pitchFamily="34" charset="-122"/>
+                <a:cs typeface="メイリオ" pitchFamily="34" charset="-120"/>
+              </a:rPr>
+              <a:t>5:20 → 6:05</a:t>
+            </a:r>
+            <a:endParaRPr lang="en-US" sz="1200" dirty="0"/>
+          </a:p>
+        </p:txBody>
+      </p:sp>
+    </p:spTree>
+  </p:cSld>
+  <p:clrMapOvr>
+    <a:masterClrMapping/>
+  </p:clrMapOvr>
+</p:sld>
+</file>
+
+<file path=ppt/slides/slide11.xml><?xml version="1.0" encoding="utf-8"?>
+<p:sld xmlns:a="http://schemas.openxmlformats.org/drawingml/2006/main" xmlns:r="http://schemas.openxmlformats.org/officeDocument/2006/relationships" xmlns:p="http://schemas.openxmlformats.org/presentationml/2006/main">
+  <p:cSld name="Slide 11">
     <p:bg>
       <p:bgPr>
         <a:solidFill>
@@ -2360,6 +3479,20 @@
               <a:buNone/>
             </a:pPr>
             <a:r>
+              <a:rPr lang="en-US" sz="1400" b="1" spc="200" kern="0" dirty="0">
+                <a:solidFill>
+                  <a:srgbClr val="9C5446"/>
+                </a:solidFill>
+                <a:latin typeface="メイリオ" pitchFamily="34" charset="0"/>
+                <a:ea typeface="メイリオ" pitchFamily="34" charset="-122"/>
+                <a:cs typeface="メイリオ" pitchFamily="34" charset="-120"/>
+              </a:rPr>
+              <a:t>10   </a:t>
+            </a:r>
+            <a:pPr indent="0" marL="0">
+              <a:buNone/>
+            </a:pPr>
+            <a:r>
               <a:rPr lang="en-US" sz="1400" spc="300" kern="0" dirty="0">
                 <a:solidFill>
                   <a:srgbClr val="8B8175"/>
@@ -2368,7 +3501,7 @@
                 <a:ea typeface="メイリオ" pitchFamily="34" charset="-122"/>
                 <a:cs typeface="メイリオ" pitchFamily="34" charset="-120"/>
               </a:rPr>
-              <a:t>APPENDIX ／ 参考</a:t>
+              <a:t>PLAN</a:t>
             </a:r>
             <a:endParaRPr lang="en-US" sz="1400" dirty="0"/>
           </a:p>
@@ -2407,7 +3540,7 @@
                 <a:ea typeface="メイリオ" pitchFamily="34" charset="-122"/>
                 <a:cs typeface="メイリオ" pitchFamily="34" charset="-120"/>
               </a:rPr>
-              <a:t>公開されている実績・共同研究</a:t>
+              <a:t>まずPhase 0。つくる前の合意をつくります</a:t>
             </a:r>
             <a:endParaRPr lang="en-US" sz="2800" dirty="0"/>
           </a:p>
@@ -2415,13 +3548,726 @@
       </p:sp>
       <p:sp>
         <p:nvSpPr>
-          <p:cNvPr id="5" name="Shape 3"/>
+          <p:cNvPr id="5" name="Text 3"/>
+          <p:cNvSpPr txBox="1"/>
+          <p:nvPr/>
+        </p:nvSpPr>
+        <p:spPr>
+          <a:xfrm>
+            <a:off x="685800" y="1874520"/>
+            <a:ext cx="6675120" cy="3840480"/>
+          </a:xfrm>
+          <a:prstGeom prst="rect">
+            <a:avLst/>
+          </a:prstGeom>
+          <a:noFill/>
+          <a:ln/>
+        </p:spPr>
+        <p:txBody>
+          <a:bodyPr wrap="square" lIns="0" tIns="0" rIns="0" bIns="0" rtlCol="0" anchor="t"/>
+          <a:lstStyle/>
+          <a:p>
+            <a:pPr marL="342900" indent="-342900">
+              <a:lnSpc>
+                <a:spcPts val="2400"/>
+              </a:lnSpc>
+              <a:buSzPct val="100000"/>
+              <a:buChar char="•"/>
+            </a:pPr>
+            <a:r>
+              <a:rPr lang="en-US" sz="1400" b="1" dirty="0">
+                <a:solidFill>
+                  <a:srgbClr val="2B2620"/>
+                </a:solidFill>
+                <a:latin typeface="メイリオ" pitchFamily="34" charset="0"/>
+                <a:ea typeface="メイリオ" pitchFamily="34" charset="-122"/>
+                <a:cs typeface="メイリオ" pitchFamily="34" charset="-120"/>
+              </a:rPr>
+              <a:t>Phase 0（3か月）　</a:t>
+            </a:r>
+            <a:pPr indent="0" marL="0">
+              <a:lnSpc>
+                <a:spcPts val="2400"/>
+              </a:lnSpc>
+              <a:buNone/>
+            </a:pPr>
+            <a:r>
+              <a:rPr lang="en-US" sz="1400" dirty="0">
+                <a:solidFill>
+                  <a:srgbClr val="5A5249"/>
+                </a:solidFill>
+                <a:latin typeface="メイリオ" pitchFamily="34" charset="0"/>
+                <a:ea typeface="メイリオ" pitchFamily="34" charset="-122"/>
+                <a:cs typeface="メイリオ" pitchFamily="34" charset="-120"/>
+              </a:rPr>
+              <a:t>成果物はコードではなく、</a:t>
+            </a:r>
+            <a:pPr indent="0" marL="0">
+              <a:lnSpc>
+                <a:spcPts val="2400"/>
+              </a:lnSpc>
+              <a:buNone/>
+            </a:pPr>
+            <a:r>
+              <a:rPr lang="en-US" sz="1400" b="1" dirty="0">
+                <a:solidFill>
+                  <a:srgbClr val="2B2620"/>
+                </a:solidFill>
+                <a:latin typeface="メイリオ" pitchFamily="34" charset="0"/>
+                <a:ea typeface="メイリオ" pitchFamily="34" charset="-122"/>
+                <a:cs typeface="メイリオ" pitchFamily="34" charset="-120"/>
+              </a:rPr>
+              <a:t>社内実証の実施合意と、法務・倫理ラインの確定</a:t>
+            </a:r>
+            <a:pPr indent="0" marL="0">
+              <a:lnSpc>
+                <a:spcPts val="2400"/>
+              </a:lnSpc>
+              <a:spcAft>
+                <a:spcPts val="1000"/>
+              </a:spcAft>
+              <a:buNone/>
+            </a:pPr>
+            <a:r>
+              <a:rPr lang="en-US" sz="1400" dirty="0">
+                <a:solidFill>
+                  <a:srgbClr val="5A5249"/>
+                </a:solidFill>
+                <a:latin typeface="メイリオ" pitchFamily="34" charset="0"/>
+                <a:ea typeface="メイリオ" pitchFamily="34" charset="-122"/>
+                <a:cs typeface="メイリオ" pitchFamily="34" charset="-120"/>
+              </a:rPr>
+              <a:t>です。記録12項目と文言ガイドもここで固めます。</a:t>
+            </a:r>
+            <a:endParaRPr lang="en-US" sz="1400" dirty="0"/>
+          </a:p>
+          <a:p>
+            <a:pPr marL="342900" indent="-342900">
+              <a:lnSpc>
+                <a:spcPts val="2400"/>
+              </a:lnSpc>
+              <a:buSzPct val="100000"/>
+              <a:buChar char="•"/>
+            </a:pPr>
+            <a:r>
+              <a:rPr lang="en-US" sz="1400" b="1" dirty="0">
+                <a:solidFill>
+                  <a:srgbClr val="2B2620"/>
+                </a:solidFill>
+                <a:latin typeface="メイリオ" pitchFamily="34" charset="0"/>
+                <a:ea typeface="メイリオ" pitchFamily="34" charset="-122"/>
+                <a:cs typeface="メイリオ" pitchFamily="34" charset="-120"/>
+              </a:rPr>
+              <a:t>Phase 1（4〜6か月）　</a:t>
+            </a:r>
+            <a:pPr indent="0" marL="0">
+              <a:lnSpc>
+                <a:spcPts val="2400"/>
+              </a:lnSpc>
+              <a:buNone/>
+            </a:pPr>
+            <a:r>
+              <a:rPr lang="en-US" sz="1400" dirty="0">
+                <a:solidFill>
+                  <a:srgbClr val="5A5249"/>
+                </a:solidFill>
+                <a:latin typeface="メイリオ" pitchFamily="34" charset="0"/>
+                <a:ea typeface="メイリオ" pitchFamily="34" charset="-122"/>
+                <a:cs typeface="メイリオ" pitchFamily="34" charset="-120"/>
+              </a:rPr>
+              <a:t>御社従業員300名で社内実証。テスト環境は無料枠のみで組むため、</a:t>
+            </a:r>
+            <a:pPr indent="0" marL="0">
+              <a:lnSpc>
+                <a:spcPts val="2400"/>
+              </a:lnSpc>
+              <a:buNone/>
+            </a:pPr>
+            <a:r>
+              <a:rPr lang="en-US" sz="1400" b="1" dirty="0">
+                <a:solidFill>
+                  <a:srgbClr val="2B2620"/>
+                </a:solidFill>
+                <a:latin typeface="メイリオ" pitchFamily="34" charset="0"/>
+                <a:ea typeface="メイリオ" pitchFamily="34" charset="-122"/>
+                <a:cs typeface="メイリオ" pitchFamily="34" charset="-120"/>
+              </a:rPr>
+              <a:t>この段階のインフラ費は0円</a:t>
+            </a:r>
+            <a:pPr indent="0" marL="0">
+              <a:lnSpc>
+                <a:spcPts val="2400"/>
+              </a:lnSpc>
+              <a:spcAft>
+                <a:spcPts val="1000"/>
+              </a:spcAft>
+              <a:buNone/>
+            </a:pPr>
+            <a:r>
+              <a:rPr lang="en-US" sz="1400" dirty="0">
+                <a:solidFill>
+                  <a:srgbClr val="5A5249"/>
+                </a:solidFill>
+                <a:latin typeface="メイリオ" pitchFamily="34" charset="0"/>
+                <a:ea typeface="メイリオ" pitchFamily="34" charset="-122"/>
+                <a:cs typeface="メイリオ" pitchFamily="34" charset="-120"/>
+              </a:rPr>
+              <a:t>です。</a:t>
+            </a:r>
+            <a:endParaRPr lang="en-US" sz="1400" dirty="0"/>
+          </a:p>
+          <a:p>
+            <a:pPr marL="342900" indent="-342900">
+              <a:lnSpc>
+                <a:spcPts val="2400"/>
+              </a:lnSpc>
+              <a:buSzPct val="100000"/>
+              <a:buChar char="•"/>
+            </a:pPr>
+            <a:r>
+              <a:rPr lang="en-US" sz="1400" b="1" dirty="0">
+                <a:solidFill>
+                  <a:srgbClr val="2B2620"/>
+                </a:solidFill>
+                <a:latin typeface="メイリオ" pitchFamily="34" charset="0"/>
+                <a:ea typeface="メイリオ" pitchFamily="34" charset="-122"/>
+                <a:cs typeface="メイリオ" pitchFamily="34" charset="-120"/>
+              </a:rPr>
+              <a:t>Phase 2以降　</a:t>
+            </a:r>
+            <a:pPr indent="0" marL="0">
+              <a:lnSpc>
+                <a:spcPts val="2400"/>
+              </a:lnSpc>
+              <a:spcAft>
+                <a:spcPts val="1000"/>
+              </a:spcAft>
+              <a:buNone/>
+            </a:pPr>
+            <a:r>
+              <a:rPr lang="en-US" sz="1400" dirty="0">
+                <a:solidFill>
+                  <a:srgbClr val="5A5249"/>
+                </a:solidFill>
+                <a:latin typeface="メイリオ" pitchFamily="34" charset="0"/>
+                <a:ea typeface="メイリオ" pitchFamily="34" charset="-122"/>
+                <a:cs typeface="メイリオ" pitchFamily="34" charset="-120"/>
+              </a:rPr>
+              <a:t>受託試験1件で実運用し、従来手法と記録の脱落率を比較。そこから外販に進みます。</a:t>
+            </a:r>
+            <a:endParaRPr lang="en-US" sz="1400" dirty="0"/>
+          </a:p>
+        </p:txBody>
+      </p:sp>
+      <p:sp>
+        <p:nvSpPr>
+          <p:cNvPr id="6" name="Shape 4"/>
           <p:cNvSpPr/>
           <p:nvPr/>
         </p:nvSpPr>
         <p:spPr>
           <a:xfrm>
-            <a:off x="685800" y="1627632"/>
+            <a:off x="7726680" y="1874520"/>
+            <a:ext cx="3776472" cy="2286000"/>
+          </a:xfrm>
+          <a:prstGeom prst="roundRect">
+            <a:avLst>
+              <a:gd name="adj" fmla="val 2000"/>
+            </a:avLst>
+          </a:prstGeom>
+          <a:solidFill>
+            <a:srgbClr val="F3E3DE"/>
+          </a:solidFill>
+          <a:ln w="9525">
+            <a:solidFill>
+              <a:srgbClr val="9C5446"/>
+            </a:solidFill>
+            <a:prstDash val="solid"/>
+          </a:ln>
+        </p:spPr>
+      </p:sp>
+      <p:sp>
+        <p:nvSpPr>
+          <p:cNvPr id="7" name="Text 5"/>
+          <p:cNvSpPr txBox="1"/>
+          <p:nvPr/>
+        </p:nvSpPr>
+        <p:spPr>
+          <a:xfrm>
+            <a:off x="7726680" y="2103120"/>
+            <a:ext cx="3776472" cy="274320"/>
+          </a:xfrm>
+          <a:prstGeom prst="rect">
+            <a:avLst/>
+          </a:prstGeom>
+          <a:noFill/>
+          <a:ln/>
+        </p:spPr>
+        <p:txBody>
+          <a:bodyPr wrap="square" lIns="0" tIns="0" rIns="0" bIns="0" rtlCol="0" anchor="ctr"/>
+          <a:lstStyle/>
+          <a:p>
+            <a:pPr algn="ctr" indent="0" marL="0">
+              <a:buNone/>
+            </a:pPr>
+            <a:r>
+              <a:rPr lang="en-US" sz="1400" b="1" spc="200" kern="0" dirty="0">
+                <a:solidFill>
+                  <a:srgbClr val="9C5446"/>
+                </a:solidFill>
+                <a:latin typeface="メイリオ" pitchFamily="34" charset="0"/>
+                <a:ea typeface="メイリオ" pitchFamily="34" charset="-122"/>
+                <a:cs typeface="メイリオ" pitchFamily="34" charset="-120"/>
+              </a:rPr>
+              <a:t>3年目 売上イメージ</a:t>
+            </a:r>
+            <a:endParaRPr lang="en-US" sz="1400" dirty="0"/>
+          </a:p>
+        </p:txBody>
+      </p:sp>
+      <p:sp>
+        <p:nvSpPr>
+          <p:cNvPr id="8" name="Text 6"/>
+          <p:cNvSpPr txBox="1"/>
+          <p:nvPr/>
+        </p:nvSpPr>
+        <p:spPr>
+          <a:xfrm>
+            <a:off x="7726680" y="2423160"/>
+            <a:ext cx="3776472" cy="731520"/>
+          </a:xfrm>
+          <a:prstGeom prst="rect">
+            <a:avLst/>
+          </a:prstGeom>
+          <a:noFill/>
+          <a:ln/>
+        </p:spPr>
+        <p:txBody>
+          <a:bodyPr wrap="square" lIns="0" tIns="0" rIns="0" bIns="0" rtlCol="0" anchor="ctr"/>
+          <a:lstStyle/>
+          <a:p>
+            <a:pPr algn="ctr" indent="0" marL="0">
+              <a:buNone/>
+            </a:pPr>
+            <a:r>
+              <a:rPr lang="en-US" sz="3200" b="1" dirty="0">
+                <a:solidFill>
+                  <a:srgbClr val="2B2620"/>
+                </a:solidFill>
+                <a:latin typeface="メイリオ" pitchFamily="34" charset="0"/>
+                <a:ea typeface="メイリオ" pitchFamily="34" charset="-122"/>
+                <a:cs typeface="メイリオ" pitchFamily="34" charset="-120"/>
+              </a:rPr>
+              <a:t>約1.6</a:t>
+            </a:r>
+            <a:pPr algn="ctr" indent="0" marL="0">
+              <a:buNone/>
+            </a:pPr>
+            <a:r>
+              <a:rPr lang="en-US" sz="1800" b="1" dirty="0">
+                <a:solidFill>
+                  <a:srgbClr val="2B2620"/>
+                </a:solidFill>
+                <a:latin typeface="メイリオ" pitchFamily="34" charset="0"/>
+                <a:ea typeface="メイリオ" pitchFamily="34" charset="-122"/>
+                <a:cs typeface="メイリオ" pitchFamily="34" charset="-120"/>
+              </a:rPr>
+              <a:t>億円</a:t>
+            </a:r>
+            <a:endParaRPr lang="en-US" sz="3200" dirty="0"/>
+          </a:p>
+        </p:txBody>
+      </p:sp>
+      <p:sp>
+        <p:nvSpPr>
+          <p:cNvPr id="9" name="Text 7"/>
+          <p:cNvSpPr txBox="1"/>
+          <p:nvPr/>
+        </p:nvSpPr>
+        <p:spPr>
+          <a:xfrm>
+            <a:off x="8001000" y="3246120"/>
+            <a:ext cx="3227832" cy="777240"/>
+          </a:xfrm>
+          <a:prstGeom prst="rect">
+            <a:avLst/>
+          </a:prstGeom>
+          <a:noFill/>
+          <a:ln/>
+        </p:spPr>
+        <p:txBody>
+          <a:bodyPr wrap="square" lIns="0" tIns="0" rIns="0" bIns="0" rtlCol="0" anchor="t"/>
+          <a:lstStyle/>
+          <a:p>
+            <a:pPr algn="ctr" indent="0" marL="0">
+              <a:lnSpc>
+                <a:spcPts val="2000"/>
+              </a:lnSpc>
+              <a:buNone/>
+            </a:pPr>
+            <a:r>
+              <a:rPr lang="en-US" sz="1300" dirty="0">
+                <a:solidFill>
+                  <a:srgbClr val="5A5249"/>
+                </a:solidFill>
+                <a:latin typeface="メイリオ" pitchFamily="34" charset="0"/>
+                <a:ea typeface="メイリオ" pitchFamily="34" charset="-122"/>
+                <a:cs typeface="メイリオ" pitchFamily="34" charset="-120"/>
+              </a:rPr>
+              <a:t>うち約9,200万円は、既存のお客様への追加提案だけで届く範囲の試算です。</a:t>
+            </a:r>
+            <a:endParaRPr lang="en-US" sz="1300" dirty="0"/>
+          </a:p>
+        </p:txBody>
+      </p:sp>
+      <p:sp>
+        <p:nvSpPr>
+          <p:cNvPr id="10" name="Text 8"/>
+          <p:cNvSpPr txBox="1"/>
+          <p:nvPr/>
+        </p:nvSpPr>
+        <p:spPr>
+          <a:xfrm>
+            <a:off x="685800" y="6336792"/>
+            <a:ext cx="7315200" cy="274320"/>
+          </a:xfrm>
+          <a:prstGeom prst="rect">
+            <a:avLst/>
+          </a:prstGeom>
+          <a:noFill/>
+          <a:ln/>
+        </p:spPr>
+        <p:txBody>
+          <a:bodyPr wrap="square" lIns="0" tIns="0" rIns="0" bIns="0" rtlCol="0" anchor="ctr"/>
+          <a:lstStyle/>
+          <a:p>
+            <a:pPr indent="0" marL="0">
+              <a:buNone/>
+            </a:pPr>
+            <a:r>
+              <a:rPr lang="en-US" sz="1200" spc="100" kern="0" dirty="0">
+                <a:solidFill>
+                  <a:srgbClr val="8B8175"/>
+                </a:solidFill>
+                <a:latin typeface="メイリオ" pitchFamily="34" charset="0"/>
+                <a:ea typeface="メイリオ" pitchFamily="34" charset="-122"/>
+                <a:cs typeface="メイリオ" pitchFamily="34" charset="-120"/>
+              </a:rPr>
+              <a:t>米倉まな｜アポプラスステーション様 ご提案</a:t>
+            </a:r>
+            <a:endParaRPr lang="en-US" sz="1200" dirty="0"/>
+          </a:p>
+        </p:txBody>
+      </p:sp>
+      <p:sp>
+        <p:nvSpPr>
+          <p:cNvPr id="11" name="Text 9"/>
+          <p:cNvSpPr txBox="1"/>
+          <p:nvPr/>
+        </p:nvSpPr>
+        <p:spPr>
+          <a:xfrm>
+            <a:off x="8305495" y="6336792"/>
+            <a:ext cx="3200400" cy="274320"/>
+          </a:xfrm>
+          <a:prstGeom prst="rect">
+            <a:avLst/>
+          </a:prstGeom>
+          <a:noFill/>
+          <a:ln/>
+        </p:spPr>
+        <p:txBody>
+          <a:bodyPr wrap="square" lIns="0" tIns="0" rIns="0" bIns="0" rtlCol="0" anchor="ctr"/>
+          <a:lstStyle/>
+          <a:p>
+            <a:pPr algn="r" indent="0" marL="0">
+              <a:buNone/>
+            </a:pPr>
+            <a:r>
+              <a:rPr lang="en-US" sz="1200" dirty="0">
+                <a:solidFill>
+                  <a:srgbClr val="8B8175"/>
+                </a:solidFill>
+                <a:latin typeface="メイリオ" pitchFamily="34" charset="0"/>
+                <a:ea typeface="メイリオ" pitchFamily="34" charset="-122"/>
+                <a:cs typeface="メイリオ" pitchFamily="34" charset="-120"/>
+              </a:rPr>
+              <a:t>6:05 → 6:40</a:t>
+            </a:r>
+            <a:endParaRPr lang="en-US" sz="1200" dirty="0"/>
+          </a:p>
+        </p:txBody>
+      </p:sp>
+    </p:spTree>
+  </p:cSld>
+  <p:clrMapOvr>
+    <a:masterClrMapping/>
+  </p:clrMapOvr>
+</p:sld>
+</file>
+
+<file path=ppt/slides/slide12.xml><?xml version="1.0" encoding="utf-8"?>
+<p:sld xmlns:a="http://schemas.openxmlformats.org/drawingml/2006/main" xmlns:r="http://schemas.openxmlformats.org/officeDocument/2006/relationships" xmlns:p="http://schemas.openxmlformats.org/presentationml/2006/main">
+  <p:cSld name="Slide 12">
+    <p:bg>
+      <p:bgPr>
+        <a:solidFill>
+          <a:srgbClr val="F3EADB"/>
+        </a:solidFill>
+      </p:bgPr>
+    </p:bg>
+    <p:spTree>
+      <p:nvGrpSpPr>
+        <p:cNvPr id="1" name=""/>
+        <p:cNvGrpSpPr/>
+        <p:nvPr/>
+      </p:nvGrpSpPr>
+      <p:grpSpPr>
+        <a:xfrm>
+          <a:off x="0" y="0"/>
+          <a:ext cx="0" cy="0"/>
+          <a:chOff x="0" y="0"/>
+          <a:chExt cx="0" cy="0"/>
+        </a:xfrm>
+      </p:grpSpPr>
+      <p:sp>
+        <p:nvSpPr>
+          <p:cNvPr id="2" name="Shape 0"/>
+          <p:cNvSpPr/>
+          <p:nvPr/>
+        </p:nvSpPr>
+        <p:spPr>
+          <a:xfrm>
+            <a:off x="685800" y="562356"/>
+            <a:ext cx="237744" cy="12802"/>
+          </a:xfrm>
+          <a:prstGeom prst="rect">
+            <a:avLst/>
+          </a:prstGeom>
+          <a:solidFill>
+            <a:srgbClr val="9C5446"/>
+          </a:solidFill>
+          <a:ln/>
+        </p:spPr>
+      </p:sp>
+      <p:sp>
+        <p:nvSpPr>
+          <p:cNvPr id="3" name="Text 1"/>
+          <p:cNvSpPr txBox="1"/>
+          <p:nvPr/>
+        </p:nvSpPr>
+        <p:spPr>
+          <a:xfrm>
+            <a:off x="996696" y="365760"/>
+            <a:ext cx="7315200" cy="310896"/>
+          </a:xfrm>
+          <a:prstGeom prst="rect">
+            <a:avLst/>
+          </a:prstGeom>
+          <a:noFill/>
+          <a:ln/>
+        </p:spPr>
+        <p:txBody>
+          <a:bodyPr wrap="square" lIns="0" tIns="0" rIns="0" bIns="0" rtlCol="0" anchor="ctr"/>
+          <a:lstStyle/>
+          <a:p>
+            <a:pPr indent="0" marL="0">
+              <a:buNone/>
+            </a:pPr>
+            <a:r>
+              <a:rPr lang="en-US" sz="1400" b="1" spc="200" kern="0" dirty="0">
+                <a:solidFill>
+                  <a:srgbClr val="9C5446"/>
+                </a:solidFill>
+                <a:latin typeface="メイリオ" pitchFamily="34" charset="0"/>
+                <a:ea typeface="メイリオ" pitchFamily="34" charset="-122"/>
+                <a:cs typeface="メイリオ" pitchFamily="34" charset="-120"/>
+              </a:rPr>
+              <a:t>11   </a:t>
+            </a:r>
+            <a:pPr indent="0" marL="0">
+              <a:buNone/>
+            </a:pPr>
+            <a:r>
+              <a:rPr lang="en-US" sz="1400" spc="300" kern="0" dirty="0">
+                <a:solidFill>
+                  <a:srgbClr val="8B8175"/>
+                </a:solidFill>
+                <a:latin typeface="メイリオ" pitchFamily="34" charset="0"/>
+                <a:ea typeface="メイリオ" pitchFamily="34" charset="-122"/>
+                <a:cs typeface="メイリオ" pitchFamily="34" charset="-120"/>
+              </a:rPr>
+              <a:t>ASK</a:t>
+            </a:r>
+            <a:endParaRPr lang="en-US" sz="1400" dirty="0"/>
+          </a:p>
+        </p:txBody>
+      </p:sp>
+      <p:sp>
+        <p:nvSpPr>
+          <p:cNvPr id="4" name="Text 2"/>
+          <p:cNvSpPr txBox="1"/>
+          <p:nvPr/>
+        </p:nvSpPr>
+        <p:spPr>
+          <a:xfrm>
+            <a:off x="685800" y="777240"/>
+            <a:ext cx="10820095" cy="777240"/>
+          </a:xfrm>
+          <a:prstGeom prst="rect">
+            <a:avLst/>
+          </a:prstGeom>
+          <a:noFill/>
+          <a:ln/>
+        </p:spPr>
+        <p:txBody>
+          <a:bodyPr wrap="square" lIns="0" tIns="0" rIns="0" bIns="0" rtlCol="0" anchor="ctr"/>
+          <a:lstStyle/>
+          <a:p>
+            <a:pPr indent="0" marL="0">
+              <a:buNone/>
+            </a:pPr>
+            <a:r>
+              <a:rPr lang="en-US" sz="2800" b="1" spc="100" kern="0" dirty="0">
+                <a:solidFill>
+                  <a:srgbClr val="2B2620"/>
+                </a:solidFill>
+                <a:latin typeface="メイリオ" pitchFamily="34" charset="0"/>
+                <a:ea typeface="メイリオ" pitchFamily="34" charset="-122"/>
+                <a:cs typeface="メイリオ" pitchFamily="34" charset="-120"/>
+              </a:rPr>
+              <a:t>だから、アポプラスステーション様と話したい</a:t>
+            </a:r>
+            <a:endParaRPr lang="en-US" sz="2800" dirty="0"/>
+          </a:p>
+        </p:txBody>
+      </p:sp>
+      <p:sp>
+        <p:nvSpPr>
+          <p:cNvPr id="5" name="Text 3"/>
+          <p:cNvSpPr txBox="1"/>
+          <p:nvPr/>
+        </p:nvSpPr>
+        <p:spPr>
+          <a:xfrm>
+            <a:off x="685800" y="1783080"/>
+            <a:ext cx="548640" cy="365760"/>
+          </a:xfrm>
+          <a:prstGeom prst="rect">
+            <a:avLst/>
+          </a:prstGeom>
+          <a:noFill/>
+          <a:ln/>
+        </p:spPr>
+        <p:txBody>
+          <a:bodyPr wrap="square" lIns="0" tIns="0" rIns="0" bIns="0" rtlCol="0" anchor="ctr"/>
+          <a:lstStyle/>
+          <a:p>
+            <a:pPr indent="0" marL="0">
+              <a:buNone/>
+            </a:pPr>
+            <a:r>
+              <a:rPr lang="en-US" sz="1800" b="1" dirty="0">
+                <a:solidFill>
+                  <a:srgbClr val="9C5446"/>
+                </a:solidFill>
+                <a:latin typeface="メイリオ" pitchFamily="34" charset="0"/>
+                <a:ea typeface="メイリオ" pitchFamily="34" charset="-122"/>
+                <a:cs typeface="メイリオ" pitchFamily="34" charset="-120"/>
+              </a:rPr>
+              <a:t>01</a:t>
+            </a:r>
+            <a:endParaRPr lang="en-US" sz="1800" dirty="0"/>
+          </a:p>
+        </p:txBody>
+      </p:sp>
+      <p:sp>
+        <p:nvSpPr>
+          <p:cNvPr id="6" name="Text 4"/>
+          <p:cNvSpPr txBox="1"/>
+          <p:nvPr/>
+        </p:nvSpPr>
+        <p:spPr>
+          <a:xfrm>
+            <a:off x="1371600" y="1764792"/>
+            <a:ext cx="10058400" cy="329184"/>
+          </a:xfrm>
+          <a:prstGeom prst="rect">
+            <a:avLst/>
+          </a:prstGeom>
+          <a:noFill/>
+          <a:ln/>
+        </p:spPr>
+        <p:txBody>
+          <a:bodyPr wrap="square" lIns="0" tIns="0" rIns="0" bIns="0" rtlCol="0" anchor="ctr"/>
+          <a:lstStyle/>
+          <a:p>
+            <a:pPr indent="0" marL="0">
+              <a:buNone/>
+            </a:pPr>
+            <a:r>
+              <a:rPr lang="en-US" sz="1600" b="1" dirty="0">
+                <a:solidFill>
+                  <a:srgbClr val="2B2620"/>
+                </a:solidFill>
+                <a:latin typeface="メイリオ" pitchFamily="34" charset="0"/>
+                <a:ea typeface="メイリオ" pitchFamily="34" charset="-122"/>
+                <a:cs typeface="メイリオ" pitchFamily="34" charset="-120"/>
+              </a:rPr>
+              <a:t>未病領域の新規事業を、共同で検討させてください</a:t>
+            </a:r>
+            <a:endParaRPr lang="en-US" sz="1600" dirty="0"/>
+          </a:p>
+        </p:txBody>
+      </p:sp>
+      <p:sp>
+        <p:nvSpPr>
+          <p:cNvPr id="7" name="Text 5"/>
+          <p:cNvSpPr txBox="1"/>
+          <p:nvPr/>
+        </p:nvSpPr>
+        <p:spPr>
+          <a:xfrm>
+            <a:off x="1371600" y="2112264"/>
+            <a:ext cx="10058400" cy="329184"/>
+          </a:xfrm>
+          <a:prstGeom prst="rect">
+            <a:avLst/>
+          </a:prstGeom>
+          <a:noFill/>
+          <a:ln/>
+        </p:spPr>
+        <p:txBody>
+          <a:bodyPr wrap="square" lIns="0" tIns="0" rIns="0" bIns="0" rtlCol="0" anchor="ctr"/>
+          <a:lstStyle/>
+          <a:p>
+            <a:pPr indent="0" marL="0">
+              <a:buNone/>
+            </a:pPr>
+            <a:r>
+              <a:rPr lang="en-US" sz="1400" dirty="0">
+                <a:solidFill>
+                  <a:srgbClr val="5A5249"/>
+                </a:solidFill>
+                <a:latin typeface="メイリオ" pitchFamily="34" charset="0"/>
+                <a:ea typeface="メイリオ" pitchFamily="34" charset="-122"/>
+                <a:cs typeface="メイリオ" pitchFamily="34" charset="-120"/>
+              </a:rPr>
+              <a:t>未病ノートのPhase 0を含め、サービス設計から実証までをご一緒に。</a:t>
+            </a:r>
+            <a:endParaRPr lang="en-US" sz="1400" dirty="0"/>
+          </a:p>
+        </p:txBody>
+      </p:sp>
+      <p:sp>
+        <p:nvSpPr>
+          <p:cNvPr id="8" name="Shape 6"/>
+          <p:cNvSpPr/>
+          <p:nvPr/>
+        </p:nvSpPr>
+        <p:spPr>
+          <a:xfrm>
+            <a:off x="685800" y="2551176"/>
             <a:ext cx="10820095" cy="7315"/>
           </a:xfrm>
           <a:prstGeom prst="rect">
@@ -2435,30 +4281,30 @@
       </p:sp>
       <p:sp>
         <p:nvSpPr>
-          <p:cNvPr id="6" name="Text 4"/>
-          <p:cNvSpPr txBox="1"/>
-          <p:nvPr/>
-        </p:nvSpPr>
-        <p:spPr>
-          <a:xfrm>
-            <a:off x="685800" y="1755648"/>
-            <a:ext cx="1143000" cy="274320"/>
-          </a:xfrm>
-          <a:prstGeom prst="rect">
-            <a:avLst/>
-          </a:prstGeom>
-          <a:noFill/>
-          <a:ln/>
-        </p:spPr>
-        <p:txBody>
-          <a:bodyPr wrap="square" lIns="0" tIns="0" rIns="0" bIns="0" rtlCol="0" anchor="ctr"/>
-          <a:lstStyle/>
-          <a:p>
-            <a:pPr indent="0" marL="0">
-              <a:buNone/>
-            </a:pPr>
-            <a:r>
-              <a:rPr lang="en-US" sz="1400" b="1" spc="100" kern="0" dirty="0">
+          <p:cNvPr id="9" name="Text 7"/>
+          <p:cNvSpPr txBox="1"/>
+          <p:nvPr/>
+        </p:nvSpPr>
+        <p:spPr>
+          <a:xfrm>
+            <a:off x="685800" y="2697480"/>
+            <a:ext cx="548640" cy="365760"/>
+          </a:xfrm>
+          <a:prstGeom prst="rect">
+            <a:avLst/>
+          </a:prstGeom>
+          <a:noFill/>
+          <a:ln/>
+        </p:spPr>
+        <p:txBody>
+          <a:bodyPr wrap="square" lIns="0" tIns="0" rIns="0" bIns="0" rtlCol="0" anchor="ctr"/>
+          <a:lstStyle/>
+          <a:p>
+            <a:pPr indent="0" marL="0">
+              <a:buNone/>
+            </a:pPr>
+            <a:r>
+              <a:rPr lang="en-US" sz="1800" b="1" dirty="0">
                 <a:solidFill>
                   <a:srgbClr val="9C5446"/>
                 </a:solidFill>
@@ -2466,7 +4312,85 @@
                 <a:ea typeface="メイリオ" pitchFamily="34" charset="-122"/>
                 <a:cs typeface="メイリオ" pitchFamily="34" charset="-120"/>
               </a:rPr>
-              <a:t>共同研究</a:t>
+              <a:t>02</a:t>
+            </a:r>
+            <a:endParaRPr lang="en-US" sz="1800" dirty="0"/>
+          </a:p>
+        </p:txBody>
+      </p:sp>
+      <p:sp>
+        <p:nvSpPr>
+          <p:cNvPr id="10" name="Text 8"/>
+          <p:cNvSpPr txBox="1"/>
+          <p:nvPr/>
+        </p:nvSpPr>
+        <p:spPr>
+          <a:xfrm>
+            <a:off x="1371600" y="2679192"/>
+            <a:ext cx="10058400" cy="329184"/>
+          </a:xfrm>
+          <a:prstGeom prst="rect">
+            <a:avLst/>
+          </a:prstGeom>
+          <a:noFill/>
+          <a:ln/>
+        </p:spPr>
+        <p:txBody>
+          <a:bodyPr wrap="square" lIns="0" tIns="0" rIns="0" bIns="0" rtlCol="0" anchor="ctr"/>
+          <a:lstStyle/>
+          <a:p>
+            <a:pPr indent="0" marL="0">
+              <a:buNone/>
+            </a:pPr>
+            <a:r>
+              <a:rPr lang="en-US" sz="1600" b="1" dirty="0">
+                <a:solidFill>
+                  <a:srgbClr val="2B2620"/>
+                </a:solidFill>
+                <a:latin typeface="メイリオ" pitchFamily="34" charset="0"/>
+                <a:ea typeface="メイリオ" pitchFamily="34" charset="-122"/>
+                <a:cs typeface="メイリオ" pitchFamily="34" charset="-120"/>
+              </a:rPr>
+              <a:t>人と組織の知見をお借りしたい</a:t>
+            </a:r>
+            <a:endParaRPr lang="en-US" sz="1600" dirty="0"/>
+          </a:p>
+        </p:txBody>
+      </p:sp>
+      <p:sp>
+        <p:nvSpPr>
+          <p:cNvPr id="11" name="Text 9"/>
+          <p:cNvSpPr txBox="1"/>
+          <p:nvPr/>
+        </p:nvSpPr>
+        <p:spPr>
+          <a:xfrm>
+            <a:off x="1371600" y="3026664"/>
+            <a:ext cx="10058400" cy="329184"/>
+          </a:xfrm>
+          <a:prstGeom prst="rect">
+            <a:avLst/>
+          </a:prstGeom>
+          <a:noFill/>
+          <a:ln/>
+        </p:spPr>
+        <p:txBody>
+          <a:bodyPr wrap="square" lIns="0" tIns="0" rIns="0" bIns="0" rtlCol="0" anchor="ctr"/>
+          <a:lstStyle/>
+          <a:p>
+            <a:pPr indent="0" marL="0">
+              <a:buNone/>
+            </a:pPr>
+            <a:r>
+              <a:rPr lang="en-US" sz="1400" dirty="0">
+                <a:solidFill>
+                  <a:srgbClr val="5A5249"/>
+                </a:solidFill>
+                <a:latin typeface="メイリオ" pitchFamily="34" charset="0"/>
+                <a:ea typeface="メイリオ" pitchFamily="34" charset="-122"/>
+                <a:cs typeface="メイリオ" pitchFamily="34" charset="-120"/>
+              </a:rPr>
+              <a:t>施術者の採用・育成・配置。属人から仕組みへ移すために必要です。</a:t>
             </a:r>
             <a:endParaRPr lang="en-US" sz="1400" dirty="0"/>
           </a:p>
@@ -2474,91 +4398,13 @@
       </p:sp>
       <p:sp>
         <p:nvSpPr>
-          <p:cNvPr id="7" name="Text 5"/>
-          <p:cNvSpPr txBox="1"/>
-          <p:nvPr/>
-        </p:nvSpPr>
-        <p:spPr>
-          <a:xfrm>
-            <a:off x="1828800" y="1719072"/>
-            <a:ext cx="9674352" cy="329184"/>
-          </a:xfrm>
-          <a:prstGeom prst="rect">
-            <a:avLst/>
-          </a:prstGeom>
-          <a:noFill/>
-          <a:ln/>
-        </p:spPr>
-        <p:txBody>
-          <a:bodyPr wrap="square" lIns="0" tIns="0" rIns="0" bIns="0" rtlCol="0" anchor="ctr"/>
-          <a:lstStyle/>
-          <a:p>
-            <a:pPr indent="0" marL="0">
-              <a:buNone/>
-            </a:pPr>
-            <a:r>
-              <a:rPr lang="en-US" sz="1400" dirty="0">
-                <a:solidFill>
-                  <a:srgbClr val="2B2620"/>
-                </a:solidFill>
-                <a:latin typeface="メイリオ" pitchFamily="34" charset="0"/>
-                <a:ea typeface="メイリオ" pitchFamily="34" charset="-122"/>
-                <a:cs typeface="メイリオ" pitchFamily="34" charset="-120"/>
-              </a:rPr>
-              <a:t>開業鍼灸院でのメンタルヘルスの可能性を検証する共同研究</a:t>
-            </a:r>
-            <a:endParaRPr lang="en-US" sz="1400" dirty="0"/>
-          </a:p>
-        </p:txBody>
-      </p:sp>
-      <p:sp>
-        <p:nvSpPr>
-          <p:cNvPr id="8" name="Text 6"/>
-          <p:cNvSpPr txBox="1"/>
-          <p:nvPr/>
-        </p:nvSpPr>
-        <p:spPr>
-          <a:xfrm>
-            <a:off x="1828800" y="2048256"/>
-            <a:ext cx="9674352" cy="274320"/>
-          </a:xfrm>
-          <a:prstGeom prst="rect">
-            <a:avLst/>
-          </a:prstGeom>
-          <a:noFill/>
-          <a:ln/>
-        </p:spPr>
-        <p:txBody>
-          <a:bodyPr wrap="square" lIns="0" tIns="0" rIns="0" bIns="0" rtlCol="0" anchor="ctr"/>
-          <a:lstStyle/>
-          <a:p>
-            <a:pPr indent="0" marL="0">
-              <a:buNone/>
-            </a:pPr>
-            <a:r>
-              <a:rPr lang="en-US" sz="1200" dirty="0">
-                <a:solidFill>
-                  <a:srgbClr val="8B8175"/>
-                </a:solidFill>
-                <a:latin typeface="メイリオ" pitchFamily="34" charset="0"/>
-                <a:ea typeface="メイリオ" pitchFamily="34" charset="-122"/>
-                <a:cs typeface="メイリオ" pitchFamily="34" charset="-120"/>
-              </a:rPr>
-              <a:t>ここちめいど／東京有明医療大学／理化学研究所／ケアクル　― PR TIMES</a:t>
-            </a:r>
-            <a:endParaRPr lang="en-US" sz="1200" dirty="0"/>
-          </a:p>
-        </p:txBody>
-      </p:sp>
-      <p:sp>
-        <p:nvSpPr>
-          <p:cNvPr id="9" name="Shape 7"/>
+          <p:cNvPr id="12" name="Shape 10"/>
           <p:cNvSpPr/>
           <p:nvPr/>
         </p:nvSpPr>
         <p:spPr>
           <a:xfrm>
-            <a:off x="685800" y="2359152"/>
+            <a:off x="685800" y="3465576"/>
             <a:ext cx="10820095" cy="7315"/>
           </a:xfrm>
           <a:prstGeom prst="rect">
@@ -2572,30 +4418,30 @@
       </p:sp>
       <p:sp>
         <p:nvSpPr>
-          <p:cNvPr id="10" name="Text 8"/>
-          <p:cNvSpPr txBox="1"/>
-          <p:nvPr/>
-        </p:nvSpPr>
-        <p:spPr>
-          <a:xfrm>
-            <a:off x="685800" y="2487168"/>
-            <a:ext cx="1143000" cy="274320"/>
-          </a:xfrm>
-          <a:prstGeom prst="rect">
-            <a:avLst/>
-          </a:prstGeom>
-          <a:noFill/>
-          <a:ln/>
-        </p:spPr>
-        <p:txBody>
-          <a:bodyPr wrap="square" lIns="0" tIns="0" rIns="0" bIns="0" rtlCol="0" anchor="ctr"/>
-          <a:lstStyle/>
-          <a:p>
-            <a:pPr indent="0" marL="0">
-              <a:buNone/>
-            </a:pPr>
-            <a:r>
-              <a:rPr lang="en-US" sz="1400" b="1" spc="100" kern="0" dirty="0">
+          <p:cNvPr id="13" name="Text 11"/>
+          <p:cNvSpPr txBox="1"/>
+          <p:nvPr/>
+        </p:nvSpPr>
+        <p:spPr>
+          <a:xfrm>
+            <a:off x="685800" y="3611880"/>
+            <a:ext cx="548640" cy="365760"/>
+          </a:xfrm>
+          <a:prstGeom prst="rect">
+            <a:avLst/>
+          </a:prstGeom>
+          <a:noFill/>
+          <a:ln/>
+        </p:spPr>
+        <p:txBody>
+          <a:bodyPr wrap="square" lIns="0" tIns="0" rIns="0" bIns="0" rtlCol="0" anchor="ctr"/>
+          <a:lstStyle/>
+          <a:p>
+            <a:pPr indent="0" marL="0">
+              <a:buNone/>
+            </a:pPr>
+            <a:r>
+              <a:rPr lang="en-US" sz="1800" b="1" dirty="0">
                 <a:solidFill>
                   <a:srgbClr val="9C5446"/>
                 </a:solidFill>
@@ -2603,7 +4449,85 @@
                 <a:ea typeface="メイリオ" pitchFamily="34" charset="-122"/>
                 <a:cs typeface="メイリオ" pitchFamily="34" charset="-120"/>
               </a:rPr>
-              <a:t>共同研究</a:t>
+              <a:t>03</a:t>
+            </a:r>
+            <a:endParaRPr lang="en-US" sz="1800" dirty="0"/>
+          </a:p>
+        </p:txBody>
+      </p:sp>
+      <p:sp>
+        <p:nvSpPr>
+          <p:cNvPr id="14" name="Text 12"/>
+          <p:cNvSpPr txBox="1"/>
+          <p:nvPr/>
+        </p:nvSpPr>
+        <p:spPr>
+          <a:xfrm>
+            <a:off x="1371600" y="3593592"/>
+            <a:ext cx="10058400" cy="329184"/>
+          </a:xfrm>
+          <a:prstGeom prst="rect">
+            <a:avLst/>
+          </a:prstGeom>
+          <a:noFill/>
+          <a:ln/>
+        </p:spPr>
+        <p:txBody>
+          <a:bodyPr wrap="square" lIns="0" tIns="0" rIns="0" bIns="0" rtlCol="0" anchor="ctr"/>
+          <a:lstStyle/>
+          <a:p>
+            <a:pPr indent="0" marL="0">
+              <a:buNone/>
+            </a:pPr>
+            <a:r>
+              <a:rPr lang="en-US" sz="1600" b="1" dirty="0">
+                <a:solidFill>
+                  <a:srgbClr val="2B2620"/>
+                </a:solidFill>
+                <a:latin typeface="メイリオ" pitchFamily="34" charset="0"/>
+                <a:ea typeface="メイリオ" pitchFamily="34" charset="-122"/>
+                <a:cs typeface="メイリオ" pitchFamily="34" charset="-120"/>
+              </a:rPr>
+              <a:t>実証の場をご一緒したい</a:t>
+            </a:r>
+            <a:endParaRPr lang="en-US" sz="1600" dirty="0"/>
+          </a:p>
+        </p:txBody>
+      </p:sp>
+      <p:sp>
+        <p:nvSpPr>
+          <p:cNvPr id="15" name="Text 13"/>
+          <p:cNvSpPr txBox="1"/>
+          <p:nvPr/>
+        </p:nvSpPr>
+        <p:spPr>
+          <a:xfrm>
+            <a:off x="1371600" y="3941064"/>
+            <a:ext cx="10058400" cy="329184"/>
+          </a:xfrm>
+          <a:prstGeom prst="rect">
+            <a:avLst/>
+          </a:prstGeom>
+          <a:noFill/>
+          <a:ln/>
+        </p:spPr>
+        <p:txBody>
+          <a:bodyPr wrap="square" lIns="0" tIns="0" rIns="0" bIns="0" rtlCol="0" anchor="ctr"/>
+          <a:lstStyle/>
+          <a:p>
+            <a:pPr indent="0" marL="0">
+              <a:buNone/>
+            </a:pPr>
+            <a:r>
+              <a:rPr lang="en-US" sz="1400" dirty="0">
+                <a:solidFill>
+                  <a:srgbClr val="5A5249"/>
+                </a:solidFill>
+                <a:latin typeface="メイリオ" pitchFamily="34" charset="0"/>
+                <a:ea typeface="メイリオ" pitchFamily="34" charset="-122"/>
+                <a:cs typeface="メイリオ" pitchFamily="34" charset="-120"/>
+              </a:rPr>
+              <a:t>法人向けの健康支援など、未病層に届く場で。効果は学会発表として残します。</a:t>
             </a:r>
             <a:endParaRPr lang="en-US" sz="1400" dirty="0"/>
           </a:p>
@@ -2611,38 +4535,124 @@
       </p:sp>
       <p:sp>
         <p:nvSpPr>
-          <p:cNvPr id="11" name="Text 9"/>
-          <p:cNvSpPr txBox="1"/>
-          <p:nvPr/>
-        </p:nvSpPr>
-        <p:spPr>
-          <a:xfrm>
-            <a:off x="1828800" y="2450592"/>
-            <a:ext cx="9674352" cy="329184"/>
-          </a:xfrm>
-          <a:prstGeom prst="rect">
-            <a:avLst/>
-          </a:prstGeom>
-          <a:noFill/>
-          <a:ln/>
-        </p:spPr>
-        <p:txBody>
-          <a:bodyPr wrap="square" lIns="0" tIns="0" rIns="0" bIns="0" rtlCol="0" anchor="ctr"/>
-          <a:lstStyle/>
-          <a:p>
-            <a:pPr indent="0" marL="0">
+          <p:cNvPr id="16" name="Shape 14"/>
+          <p:cNvSpPr/>
+          <p:nvPr/>
+        </p:nvSpPr>
+        <p:spPr>
+          <a:xfrm>
+            <a:off x="685800" y="4572000"/>
+            <a:ext cx="10820095" cy="1325880"/>
+          </a:xfrm>
+          <a:prstGeom prst="roundRect">
+            <a:avLst>
+              <a:gd name="adj" fmla="val 3448"/>
+            </a:avLst>
+          </a:prstGeom>
+          <a:solidFill>
+            <a:srgbClr val="FBF6EC"/>
+          </a:solidFill>
+          <a:ln w="9525">
+            <a:solidFill>
+              <a:srgbClr val="9C5446"/>
+            </a:solidFill>
+            <a:prstDash val="solid"/>
+          </a:ln>
+        </p:spPr>
+      </p:sp>
+      <p:sp>
+        <p:nvSpPr>
+          <p:cNvPr id="17" name="Text 15"/>
+          <p:cNvSpPr txBox="1"/>
+          <p:nvPr/>
+        </p:nvSpPr>
+        <p:spPr>
+          <a:xfrm>
+            <a:off x="960120" y="4773168"/>
+            <a:ext cx="10271455" cy="237744"/>
+          </a:xfrm>
+          <a:prstGeom prst="rect">
+            <a:avLst/>
+          </a:prstGeom>
+          <a:noFill/>
+          <a:ln/>
+        </p:spPr>
+        <p:txBody>
+          <a:bodyPr wrap="square" lIns="0" tIns="0" rIns="0" bIns="0" rtlCol="0" anchor="ctr"/>
+          <a:lstStyle/>
+          <a:p>
+            <a:pPr indent="0" marL="0">
+              <a:buNone/>
+            </a:pPr>
+            <a:r>
+              <a:rPr lang="en-US" sz="1200" b="1" spc="100" kern="0" dirty="0">
+                <a:solidFill>
+                  <a:srgbClr val="9C5446"/>
+                </a:solidFill>
+                <a:latin typeface="メイリオ" pitchFamily="34" charset="0"/>
+                <a:ea typeface="メイリオ" pitchFamily="34" charset="-122"/>
+                <a:cs typeface="メイリオ" pitchFamily="34" charset="-120"/>
+              </a:rPr>
+              <a:t>本日お願いしたいこと</a:t>
+            </a:r>
+            <a:endParaRPr lang="en-US" sz="1200" dirty="0"/>
+          </a:p>
+        </p:txBody>
+      </p:sp>
+      <p:sp>
+        <p:nvSpPr>
+          <p:cNvPr id="18" name="Text 16"/>
+          <p:cNvSpPr txBox="1"/>
+          <p:nvPr/>
+        </p:nvSpPr>
+        <p:spPr>
+          <a:xfrm>
+            <a:off x="960120" y="5084064"/>
+            <a:ext cx="10271455" cy="594360"/>
+          </a:xfrm>
+          <a:prstGeom prst="rect">
+            <a:avLst/>
+          </a:prstGeom>
+          <a:noFill/>
+          <a:ln/>
+        </p:spPr>
+        <p:txBody>
+          <a:bodyPr wrap="square" lIns="0" tIns="0" rIns="0" bIns="0" rtlCol="0" anchor="t"/>
+          <a:lstStyle/>
+          <a:p>
+            <a:pPr indent="0" marL="0">
+              <a:lnSpc>
+                <a:spcPts val="1900"/>
+              </a:lnSpc>
               <a:buNone/>
             </a:pPr>
             <a:r>
               <a:rPr lang="en-US" sz="1400" dirty="0">
                 <a:solidFill>
+                  <a:srgbClr val="5A5249"/>
+                </a:solidFill>
+                <a:latin typeface="メイリオ" pitchFamily="34" charset="0"/>
+                <a:ea typeface="メイリオ" pitchFamily="34" charset="-122"/>
+                <a:cs typeface="メイリオ" pitchFamily="34" charset="-120"/>
+              </a:rPr>
+              <a:t>生きづらさを抱えた人を、治療が必要になる手前で減らしたい。</a:t>
+            </a:r>
+            <a:pPr indent="0" marL="0">
+              <a:lnSpc>
+                <a:spcPts val="1900"/>
+              </a:lnSpc>
+              <a:buNone/>
+            </a:pPr>
+            <a:r>
+              <a:rPr lang="en-US" sz="1400" b="1" dirty="0">
+                <a:solidFill>
                   <a:srgbClr val="2B2620"/>
                 </a:solidFill>
                 <a:latin typeface="メイリオ" pitchFamily="34" charset="0"/>
                 <a:ea typeface="メイリオ" pitchFamily="34" charset="-122"/>
                 <a:cs typeface="メイリオ" pitchFamily="34" charset="-120"/>
               </a:rPr>
-              <a:t>鍼灸症例データベース構築プロジェクト</a:t>
+              <a:t>まずは本日、この3つのうちどこに可能性がありそうか、率直なご意見をいただけたら嬉しいです。</a:t>
             </a:r>
             <a:endParaRPr lang="en-US" sz="1400" dirty="0"/>
           </a:p>
@@ -2650,26 +4660,65 @@
       </p:sp>
       <p:sp>
         <p:nvSpPr>
-          <p:cNvPr id="12" name="Text 10"/>
-          <p:cNvSpPr txBox="1"/>
-          <p:nvPr/>
-        </p:nvSpPr>
-        <p:spPr>
-          <a:xfrm>
-            <a:off x="1828800" y="2779776"/>
-            <a:ext cx="9674352" cy="274320"/>
-          </a:xfrm>
-          <a:prstGeom prst="rect">
-            <a:avLst/>
-          </a:prstGeom>
-          <a:noFill/>
-          <a:ln/>
-        </p:spPr>
-        <p:txBody>
-          <a:bodyPr wrap="square" lIns="0" tIns="0" rIns="0" bIns="0" rtlCol="0" anchor="ctr"/>
-          <a:lstStyle/>
-          <a:p>
-            <a:pPr indent="0" marL="0">
+          <p:cNvPr id="19" name="Text 17"/>
+          <p:cNvSpPr txBox="1"/>
+          <p:nvPr/>
+        </p:nvSpPr>
+        <p:spPr>
+          <a:xfrm>
+            <a:off x="685800" y="6336792"/>
+            <a:ext cx="7315200" cy="274320"/>
+          </a:xfrm>
+          <a:prstGeom prst="rect">
+            <a:avLst/>
+          </a:prstGeom>
+          <a:noFill/>
+          <a:ln/>
+        </p:spPr>
+        <p:txBody>
+          <a:bodyPr wrap="square" lIns="0" tIns="0" rIns="0" bIns="0" rtlCol="0" anchor="ctr"/>
+          <a:lstStyle/>
+          <a:p>
+            <a:pPr indent="0" marL="0">
+              <a:buNone/>
+            </a:pPr>
+            <a:r>
+              <a:rPr lang="en-US" sz="1200" spc="100" kern="0" dirty="0">
+                <a:solidFill>
+                  <a:srgbClr val="8B8175"/>
+                </a:solidFill>
+                <a:latin typeface="メイリオ" pitchFamily="34" charset="0"/>
+                <a:ea typeface="メイリオ" pitchFamily="34" charset="-122"/>
+                <a:cs typeface="メイリオ" pitchFamily="34" charset="-120"/>
+              </a:rPr>
+              <a:t>米倉まな｜アポプラスステーション様 ご提案</a:t>
+            </a:r>
+            <a:endParaRPr lang="en-US" sz="1200" dirty="0"/>
+          </a:p>
+        </p:txBody>
+      </p:sp>
+      <p:sp>
+        <p:nvSpPr>
+          <p:cNvPr id="20" name="Text 18"/>
+          <p:cNvSpPr txBox="1"/>
+          <p:nvPr/>
+        </p:nvSpPr>
+        <p:spPr>
+          <a:xfrm>
+            <a:off x="8305495" y="6336792"/>
+            <a:ext cx="3200400" cy="274320"/>
+          </a:xfrm>
+          <a:prstGeom prst="rect">
+            <a:avLst/>
+          </a:prstGeom>
+          <a:noFill/>
+          <a:ln/>
+        </p:spPr>
+        <p:txBody>
+          <a:bodyPr wrap="square" lIns="0" tIns="0" rIns="0" bIns="0" rtlCol="0" anchor="ctr"/>
+          <a:lstStyle/>
+          <a:p>
+            <a:pPr algn="r" indent="0" marL="0">
               <a:buNone/>
             </a:pPr>
             <a:r>
@@ -2681,21 +4730,151 @@
                 <a:ea typeface="メイリオ" pitchFamily="34" charset="-122"/>
                 <a:cs typeface="メイリオ" pitchFamily="34" charset="-120"/>
               </a:rPr>
-              <a:t>ケアクル／東京有明医療大学 松浦悠人／玉川大学 柴田健一／ここちめいど 米倉まな　― PR TIMES（2025.4）</a:t>
+              <a:t>6:40 → 7:00</a:t>
             </a:r>
             <a:endParaRPr lang="en-US" sz="1200" dirty="0"/>
           </a:p>
         </p:txBody>
       </p:sp>
-      <p:sp>
-        <p:nvSpPr>
-          <p:cNvPr id="13" name="Shape 11"/>
+    </p:spTree>
+  </p:cSld>
+  <p:clrMapOvr>
+    <a:masterClrMapping/>
+  </p:clrMapOvr>
+</p:sld>
+</file>
+
+<file path=ppt/slides/slide13.xml><?xml version="1.0" encoding="utf-8"?>
+<p:sld xmlns:a="http://schemas.openxmlformats.org/drawingml/2006/main" xmlns:r="http://schemas.openxmlformats.org/officeDocument/2006/relationships" xmlns:p="http://schemas.openxmlformats.org/presentationml/2006/main">
+  <p:cSld name="Slide 13">
+    <p:bg>
+      <p:bgPr>
+        <a:solidFill>
+          <a:srgbClr val="F3EADB"/>
+        </a:solidFill>
+      </p:bgPr>
+    </p:bg>
+    <p:spTree>
+      <p:nvGrpSpPr>
+        <p:cNvPr id="1" name=""/>
+        <p:cNvGrpSpPr/>
+        <p:nvPr/>
+      </p:nvGrpSpPr>
+      <p:grpSpPr>
+        <a:xfrm>
+          <a:off x="0" y="0"/>
+          <a:ext cx="0" cy="0"/>
+          <a:chOff x="0" y="0"/>
+          <a:chExt cx="0" cy="0"/>
+        </a:xfrm>
+      </p:grpSpPr>
+      <p:sp>
+        <p:nvSpPr>
+          <p:cNvPr id="2" name="Shape 0"/>
           <p:cNvSpPr/>
           <p:nvPr/>
         </p:nvSpPr>
         <p:spPr>
           <a:xfrm>
-            <a:off x="685800" y="3090672"/>
+            <a:off x="685800" y="562356"/>
+            <a:ext cx="237744" cy="12802"/>
+          </a:xfrm>
+          <a:prstGeom prst="rect">
+            <a:avLst/>
+          </a:prstGeom>
+          <a:solidFill>
+            <a:srgbClr val="9C5446"/>
+          </a:solidFill>
+          <a:ln/>
+        </p:spPr>
+      </p:sp>
+      <p:sp>
+        <p:nvSpPr>
+          <p:cNvPr id="3" name="Text 1"/>
+          <p:cNvSpPr txBox="1"/>
+          <p:nvPr/>
+        </p:nvSpPr>
+        <p:spPr>
+          <a:xfrm>
+            <a:off x="996696" y="365760"/>
+            <a:ext cx="7315200" cy="310896"/>
+          </a:xfrm>
+          <a:prstGeom prst="rect">
+            <a:avLst/>
+          </a:prstGeom>
+          <a:noFill/>
+          <a:ln/>
+        </p:spPr>
+        <p:txBody>
+          <a:bodyPr wrap="square" lIns="0" tIns="0" rIns="0" bIns="0" rtlCol="0" anchor="ctr"/>
+          <a:lstStyle/>
+          <a:p>
+            <a:pPr indent="0" marL="0">
+              <a:buNone/>
+            </a:pPr>
+            <a:r>
+              <a:rPr lang="en-US" sz="1400" spc="300" kern="0" dirty="0">
+                <a:solidFill>
+                  <a:srgbClr val="8B8175"/>
+                </a:solidFill>
+                <a:latin typeface="メイリオ" pitchFamily="34" charset="0"/>
+                <a:ea typeface="メイリオ" pitchFamily="34" charset="-122"/>
+                <a:cs typeface="メイリオ" pitchFamily="34" charset="-120"/>
+              </a:rPr>
+              <a:t>APPENDIX ／ 参考</a:t>
+            </a:r>
+            <a:endParaRPr lang="en-US" sz="1400" dirty="0"/>
+          </a:p>
+        </p:txBody>
+      </p:sp>
+      <p:sp>
+        <p:nvSpPr>
+          <p:cNvPr id="4" name="Text 2"/>
+          <p:cNvSpPr txBox="1"/>
+          <p:nvPr/>
+        </p:nvSpPr>
+        <p:spPr>
+          <a:xfrm>
+            <a:off x="685800" y="777240"/>
+            <a:ext cx="10820095" cy="777240"/>
+          </a:xfrm>
+          <a:prstGeom prst="rect">
+            <a:avLst/>
+          </a:prstGeom>
+          <a:noFill/>
+          <a:ln/>
+        </p:spPr>
+        <p:txBody>
+          <a:bodyPr wrap="square" lIns="0" tIns="0" rIns="0" bIns="0" rtlCol="0" anchor="ctr"/>
+          <a:lstStyle/>
+          <a:p>
+            <a:pPr indent="0" marL="0">
+              <a:buNone/>
+            </a:pPr>
+            <a:r>
+              <a:rPr lang="en-US" sz="2800" b="1" spc="100" kern="0" dirty="0">
+                <a:solidFill>
+                  <a:srgbClr val="2B2620"/>
+                </a:solidFill>
+                <a:latin typeface="メイリオ" pitchFamily="34" charset="0"/>
+                <a:ea typeface="メイリオ" pitchFamily="34" charset="-122"/>
+                <a:cs typeface="メイリオ" pitchFamily="34" charset="-120"/>
+              </a:rPr>
+              <a:t>公開されている実績・共同研究</a:t>
+            </a:r>
+            <a:endParaRPr lang="en-US" sz="2800" dirty="0"/>
+          </a:p>
+        </p:txBody>
+      </p:sp>
+      <p:sp>
+        <p:nvSpPr>
+          <p:cNvPr id="5" name="Shape 3"/>
+          <p:cNvSpPr/>
+          <p:nvPr/>
+        </p:nvSpPr>
+        <p:spPr>
+          <a:xfrm>
+            <a:off x="685800" y="1627632"/>
             <a:ext cx="10820095" cy="7315"/>
           </a:xfrm>
           <a:prstGeom prst="rect">
@@ -2709,13 +4888,13 @@
       </p:sp>
       <p:sp>
         <p:nvSpPr>
-          <p:cNvPr id="14" name="Text 12"/>
-          <p:cNvSpPr txBox="1"/>
-          <p:nvPr/>
-        </p:nvSpPr>
-        <p:spPr>
-          <a:xfrm>
-            <a:off x="685800" y="3218688"/>
+          <p:cNvPr id="6" name="Text 4"/>
+          <p:cNvSpPr txBox="1"/>
+          <p:nvPr/>
+        </p:nvSpPr>
+        <p:spPr>
+          <a:xfrm>
+            <a:off x="685800" y="1755648"/>
             <a:ext cx="1143000" cy="274320"/>
           </a:xfrm>
           <a:prstGeom prst="rect">
@@ -2740,7 +4919,7 @@
                 <a:ea typeface="メイリオ" pitchFamily="34" charset="-122"/>
                 <a:cs typeface="メイリオ" pitchFamily="34" charset="-120"/>
               </a:rPr>
-              <a:t>企業連携</a:t>
+              <a:t>共同研究</a:t>
             </a:r>
             <a:endParaRPr lang="en-US" sz="1400" dirty="0"/>
           </a:p>
@@ -2748,13 +4927,13 @@
       </p:sp>
       <p:sp>
         <p:nvSpPr>
-          <p:cNvPr id="15" name="Text 13"/>
-          <p:cNvSpPr txBox="1"/>
-          <p:nvPr/>
-        </p:nvSpPr>
-        <p:spPr>
-          <a:xfrm>
-            <a:off x="1828800" y="3182112"/>
+          <p:cNvPr id="7" name="Text 5"/>
+          <p:cNvSpPr txBox="1"/>
+          <p:nvPr/>
+        </p:nvSpPr>
+        <p:spPr>
+          <a:xfrm>
+            <a:off x="1828800" y="1719072"/>
             <a:ext cx="9674352" cy="329184"/>
           </a:xfrm>
           <a:prstGeom prst="rect">
@@ -2779,7 +4958,7 @@
                 <a:ea typeface="メイリオ" pitchFamily="34" charset="-122"/>
                 <a:cs typeface="メイリオ" pitchFamily="34" charset="-120"/>
               </a:rPr>
-              <a:t>オンライン対話サービス「ThirdTalk」特別対談番組に出演</a:t>
+              <a:t>開業鍼灸院でのメンタルヘルスの可能性を検証する共同研究</a:t>
             </a:r>
             <a:endParaRPr lang="en-US" sz="1400" dirty="0"/>
           </a:p>
@@ -2787,13 +4966,13 @@
       </p:sp>
       <p:sp>
         <p:nvSpPr>
-          <p:cNvPr id="16" name="Text 14"/>
-          <p:cNvSpPr txBox="1"/>
-          <p:nvPr/>
-        </p:nvSpPr>
-        <p:spPr>
-          <a:xfrm>
-            <a:off x="1828800" y="3511296"/>
+          <p:cNvPr id="8" name="Text 6"/>
+          <p:cNvSpPr txBox="1"/>
+          <p:nvPr/>
+        </p:nvSpPr>
+        <p:spPr>
+          <a:xfrm>
+            <a:off x="1828800" y="2048256"/>
             <a:ext cx="9674352" cy="274320"/>
           </a:xfrm>
           <a:prstGeom prst="rect">
@@ -2818,7 +4997,7 @@
                 <a:ea typeface="メイリオ" pitchFamily="34" charset="-122"/>
                 <a:cs typeface="メイリオ" pitchFamily="34" charset="-120"/>
               </a:rPr>
-              <a:t>株式会社ファンコミュニケーションズ ニュースリリース（2022.8.26）</a:t>
+              <a:t>ここちめいど／東京有明医療大学／理化学研究所／ケアクル　― PR TIMES</a:t>
             </a:r>
             <a:endParaRPr lang="en-US" sz="1200" dirty="0"/>
           </a:p>
@@ -2826,13 +5005,13 @@
       </p:sp>
       <p:sp>
         <p:nvSpPr>
-          <p:cNvPr id="17" name="Shape 15"/>
+          <p:cNvPr id="9" name="Shape 7"/>
           <p:cNvSpPr/>
           <p:nvPr/>
         </p:nvSpPr>
         <p:spPr>
           <a:xfrm>
-            <a:off x="685800" y="3822192"/>
+            <a:off x="685800" y="2359152"/>
             <a:ext cx="10820095" cy="7315"/>
           </a:xfrm>
           <a:prstGeom prst="rect">
@@ -2846,13 +5025,13 @@
       </p:sp>
       <p:sp>
         <p:nvSpPr>
-          <p:cNvPr id="18" name="Text 16"/>
-          <p:cNvSpPr txBox="1"/>
-          <p:nvPr/>
-        </p:nvSpPr>
-        <p:spPr>
-          <a:xfrm>
-            <a:off x="685800" y="3950208"/>
+          <p:cNvPr id="10" name="Text 8"/>
+          <p:cNvSpPr txBox="1"/>
+          <p:nvPr/>
+        </p:nvSpPr>
+        <p:spPr>
+          <a:xfrm>
+            <a:off x="685800" y="2487168"/>
             <a:ext cx="1143000" cy="274320"/>
           </a:xfrm>
           <a:prstGeom prst="rect">
@@ -2877,7 +5056,7 @@
                 <a:ea typeface="メイリオ" pitchFamily="34" charset="-122"/>
                 <a:cs typeface="メイリオ" pitchFamily="34" charset="-120"/>
               </a:rPr>
-              <a:t>社会貢献</a:t>
+              <a:t>共同研究</a:t>
             </a:r>
             <a:endParaRPr lang="en-US" sz="1400" dirty="0"/>
           </a:p>
@@ -2885,13 +5064,13 @@
       </p:sp>
       <p:sp>
         <p:nvSpPr>
-          <p:cNvPr id="19" name="Text 17"/>
-          <p:cNvSpPr txBox="1"/>
-          <p:nvPr/>
-        </p:nvSpPr>
-        <p:spPr>
-          <a:xfrm>
-            <a:off x="1828800" y="3913632"/>
+          <p:cNvPr id="11" name="Text 9"/>
+          <p:cNvSpPr txBox="1"/>
+          <p:nvPr/>
+        </p:nvSpPr>
+        <p:spPr>
+          <a:xfrm>
+            <a:off x="1828800" y="2450592"/>
             <a:ext cx="9674352" cy="329184"/>
           </a:xfrm>
           <a:prstGeom prst="rect">
@@ -2916,7 +5095,7 @@
                 <a:ea typeface="メイリオ" pitchFamily="34" charset="-122"/>
                 <a:cs typeface="メイリオ" pitchFamily="34" charset="-120"/>
               </a:rPr>
-              <a:t>パパゲーノ・アンバサダー認定 第一号（合同会社ここちめいど）</a:t>
+              <a:t>鍼灸症例データベース構築プロジェクト</a:t>
             </a:r>
             <a:endParaRPr lang="en-US" sz="1400" dirty="0"/>
           </a:p>
@@ -2924,13 +5103,13 @@
       </p:sp>
       <p:sp>
         <p:nvSpPr>
-          <p:cNvPr id="20" name="Text 18"/>
-          <p:cNvSpPr txBox="1"/>
-          <p:nvPr/>
-        </p:nvSpPr>
-        <p:spPr>
-          <a:xfrm>
-            <a:off x="1828800" y="4242816"/>
+          <p:cNvPr id="12" name="Text 10"/>
+          <p:cNvSpPr txBox="1"/>
+          <p:nvPr/>
+        </p:nvSpPr>
+        <p:spPr>
+          <a:xfrm>
+            <a:off x="1828800" y="2779776"/>
             <a:ext cx="9674352" cy="274320"/>
           </a:xfrm>
           <a:prstGeom prst="rect">
@@ -2955,7 +5134,7 @@
                 <a:ea typeface="メイリオ" pitchFamily="34" charset="-122"/>
                 <a:cs typeface="メイリオ" pitchFamily="34" charset="-120"/>
               </a:rPr>
-              <a:t>株式会社パパゲーノ プレスリリース</a:t>
+              <a:t>ケアクル／東京有明医療大学 松浦悠人／玉川大学 柴田健一／ここちめいど 米倉まな　― PR TIMES（2025.4）</a:t>
             </a:r>
             <a:endParaRPr lang="en-US" sz="1200" dirty="0"/>
           </a:p>
@@ -2963,13 +5142,13 @@
       </p:sp>
       <p:sp>
         <p:nvSpPr>
-          <p:cNvPr id="21" name="Shape 19"/>
+          <p:cNvPr id="13" name="Shape 11"/>
           <p:cNvSpPr/>
           <p:nvPr/>
         </p:nvSpPr>
         <p:spPr>
           <a:xfrm>
-            <a:off x="685800" y="4553712"/>
+            <a:off x="685800" y="3090672"/>
             <a:ext cx="10820095" cy="7315"/>
           </a:xfrm>
           <a:prstGeom prst="rect">
@@ -2983,13 +5162,13 @@
       </p:sp>
       <p:sp>
         <p:nvSpPr>
-          <p:cNvPr id="22" name="Text 20"/>
-          <p:cNvSpPr txBox="1"/>
-          <p:nvPr/>
-        </p:nvSpPr>
-        <p:spPr>
-          <a:xfrm>
-            <a:off x="685800" y="4681728"/>
+          <p:cNvPr id="14" name="Text 12"/>
+          <p:cNvSpPr txBox="1"/>
+          <p:nvPr/>
+        </p:nvSpPr>
+        <p:spPr>
+          <a:xfrm>
+            <a:off x="685800" y="3218688"/>
             <a:ext cx="1143000" cy="274320"/>
           </a:xfrm>
           <a:prstGeom prst="rect">
@@ -3014,7 +5193,7 @@
                 <a:ea typeface="メイリオ" pitchFamily="34" charset="-122"/>
                 <a:cs typeface="メイリオ" pitchFamily="34" charset="-120"/>
               </a:rPr>
-              <a:t>寄稿</a:t>
+              <a:t>企業連携</a:t>
             </a:r>
             <a:endParaRPr lang="en-US" sz="1400" dirty="0"/>
           </a:p>
@@ -3022,13 +5201,13 @@
       </p:sp>
       <p:sp>
         <p:nvSpPr>
-          <p:cNvPr id="23" name="Text 21"/>
-          <p:cNvSpPr txBox="1"/>
-          <p:nvPr/>
-        </p:nvSpPr>
-        <p:spPr>
-          <a:xfrm>
-            <a:off x="1828800" y="4645152"/>
+          <p:cNvPr id="15" name="Text 13"/>
+          <p:cNvSpPr txBox="1"/>
+          <p:nvPr/>
+        </p:nvSpPr>
+        <p:spPr>
+          <a:xfrm>
+            <a:off x="1828800" y="3182112"/>
             <a:ext cx="9674352" cy="329184"/>
           </a:xfrm>
           <a:prstGeom prst="rect">
@@ -3053,7 +5232,7 @@
                 <a:ea typeface="メイリオ" pitchFamily="34" charset="-122"/>
                 <a:cs typeface="メイリオ" pitchFamily="34" charset="-120"/>
               </a:rPr>
-              <a:t>『精神看護』特集「鍼灸は、なぜ「うつ」に効くのだろうか」</a:t>
+              <a:t>オンライン対話サービス「ThirdTalk」特別対談番組に出演</a:t>
             </a:r>
             <a:endParaRPr lang="en-US" sz="1400" dirty="0"/>
           </a:p>
@@ -3061,13 +5240,13 @@
       </p:sp>
       <p:sp>
         <p:nvSpPr>
-          <p:cNvPr id="24" name="Text 22"/>
-          <p:cNvSpPr txBox="1"/>
-          <p:nvPr/>
-        </p:nvSpPr>
-        <p:spPr>
-          <a:xfrm>
-            <a:off x="1828800" y="4974336"/>
+          <p:cNvPr id="16" name="Text 14"/>
+          <p:cNvSpPr txBox="1"/>
+          <p:nvPr/>
+        </p:nvSpPr>
+        <p:spPr>
+          <a:xfrm>
+            <a:off x="1828800" y="3511296"/>
             <a:ext cx="9674352" cy="274320"/>
           </a:xfrm>
           <a:prstGeom prst="rect">
@@ -3092,7 +5271,7 @@
                 <a:ea typeface="メイリオ" pitchFamily="34" charset="-122"/>
                 <a:cs typeface="メイリオ" pitchFamily="34" charset="-120"/>
               </a:rPr>
-              <a:t>医学書院　Vol.28 No.3（2025.5）／ レポート「障害と美の多様性」Vol.28 No.5（2025.9）</a:t>
+              <a:t>株式会社ファンコミュニケーションズ ニュースリリース（2022.8.26）</a:t>
             </a:r>
             <a:endParaRPr lang="en-US" sz="1200" dirty="0"/>
           </a:p>
@@ -3100,13 +5279,13 @@
       </p:sp>
       <p:sp>
         <p:nvSpPr>
-          <p:cNvPr id="25" name="Shape 23"/>
+          <p:cNvPr id="17" name="Shape 15"/>
           <p:cNvSpPr/>
           <p:nvPr/>
         </p:nvSpPr>
         <p:spPr>
           <a:xfrm>
-            <a:off x="685800" y="5285232"/>
+            <a:off x="685800" y="3822192"/>
             <a:ext cx="10820095" cy="7315"/>
           </a:xfrm>
           <a:prstGeom prst="rect">
@@ -3120,13 +5299,13 @@
       </p:sp>
       <p:sp>
         <p:nvSpPr>
-          <p:cNvPr id="26" name="Text 24"/>
-          <p:cNvSpPr txBox="1"/>
-          <p:nvPr/>
-        </p:nvSpPr>
-        <p:spPr>
-          <a:xfrm>
-            <a:off x="685800" y="5413248"/>
+          <p:cNvPr id="18" name="Text 16"/>
+          <p:cNvSpPr txBox="1"/>
+          <p:nvPr/>
+        </p:nvSpPr>
+        <p:spPr>
+          <a:xfrm>
+            <a:off x="685800" y="3950208"/>
             <a:ext cx="1143000" cy="274320"/>
           </a:xfrm>
           <a:prstGeom prst="rect">
@@ -3151,7 +5330,7 @@
                 <a:ea typeface="メイリオ" pitchFamily="34" charset="-122"/>
                 <a:cs typeface="メイリオ" pitchFamily="34" charset="-120"/>
               </a:rPr>
-              <a:t>学会</a:t>
+              <a:t>社会貢献</a:t>
             </a:r>
             <a:endParaRPr lang="en-US" sz="1400" dirty="0"/>
           </a:p>
@@ -3159,13 +5338,13 @@
       </p:sp>
       <p:sp>
         <p:nvSpPr>
-          <p:cNvPr id="27" name="Text 25"/>
-          <p:cNvSpPr txBox="1"/>
-          <p:nvPr/>
-        </p:nvSpPr>
-        <p:spPr>
-          <a:xfrm>
-            <a:off x="1828800" y="5376672"/>
+          <p:cNvPr id="19" name="Text 17"/>
+          <p:cNvSpPr txBox="1"/>
+          <p:nvPr/>
+        </p:nvSpPr>
+        <p:spPr>
+          <a:xfrm>
+            <a:off x="1828800" y="3913632"/>
             <a:ext cx="9674352" cy="329184"/>
           </a:xfrm>
           <a:prstGeom prst="rect">
@@ -3190,7 +5369,7 @@
                 <a:ea typeface="メイリオ" pitchFamily="34" charset="-122"/>
                 <a:cs typeface="メイリオ" pitchFamily="34" charset="-120"/>
               </a:rPr>
-              <a:t>全日本鍼灸学会／日本うつ病学会（ポスター発表）／日本精神神経学会 シンポジスト</a:t>
+              <a:t>パパゲーノ・アンバサダー認定 第一号（合同会社ここちめいど）</a:t>
             </a:r>
             <a:endParaRPr lang="en-US" sz="1400" dirty="0"/>
           </a:p>
@@ -3198,13 +5377,13 @@
       </p:sp>
       <p:sp>
         <p:nvSpPr>
-          <p:cNvPr id="28" name="Text 26"/>
-          <p:cNvSpPr txBox="1"/>
-          <p:nvPr/>
-        </p:nvSpPr>
-        <p:spPr>
-          <a:xfrm>
-            <a:off x="1828800" y="5705856"/>
+          <p:cNvPr id="20" name="Text 18"/>
+          <p:cNvSpPr txBox="1"/>
+          <p:nvPr/>
+        </p:nvSpPr>
+        <p:spPr>
+          <a:xfrm>
+            <a:off x="1828800" y="4242816"/>
             <a:ext cx="9674352" cy="274320"/>
           </a:xfrm>
           <a:prstGeom prst="rect">
@@ -3229,7 +5408,7 @@
                 <a:ea typeface="メイリオ" pitchFamily="34" charset="-122"/>
                 <a:cs typeface="メイリオ" pitchFamily="34" charset="-120"/>
               </a:rPr>
-              <a:t>うつと不安症状を有する患者の実態調査 第3報・第4報（2024・2025・2026）　― 日本精神神経学会は2026.6 登壇</a:t>
+              <a:t>株式会社パパゲーノ プレスリリース</a:t>
             </a:r>
             <a:endParaRPr lang="en-US" sz="1200" dirty="0"/>
           </a:p>
@@ -3237,13 +5416,13 @@
       </p:sp>
       <p:sp>
         <p:nvSpPr>
-          <p:cNvPr id="29" name="Shape 27"/>
+          <p:cNvPr id="21" name="Shape 19"/>
           <p:cNvSpPr/>
           <p:nvPr/>
         </p:nvSpPr>
         <p:spPr>
           <a:xfrm>
-            <a:off x="685800" y="6016752"/>
+            <a:off x="685800" y="4553712"/>
             <a:ext cx="10820095" cy="7315"/>
           </a:xfrm>
           <a:prstGeom prst="rect">
@@ -3257,6 +5436,280 @@
       </p:sp>
       <p:sp>
         <p:nvSpPr>
+          <p:cNvPr id="22" name="Text 20"/>
+          <p:cNvSpPr txBox="1"/>
+          <p:nvPr/>
+        </p:nvSpPr>
+        <p:spPr>
+          <a:xfrm>
+            <a:off x="685800" y="4681728"/>
+            <a:ext cx="1143000" cy="274320"/>
+          </a:xfrm>
+          <a:prstGeom prst="rect">
+            <a:avLst/>
+          </a:prstGeom>
+          <a:noFill/>
+          <a:ln/>
+        </p:spPr>
+        <p:txBody>
+          <a:bodyPr wrap="square" lIns="0" tIns="0" rIns="0" bIns="0" rtlCol="0" anchor="ctr"/>
+          <a:lstStyle/>
+          <a:p>
+            <a:pPr indent="0" marL="0">
+              <a:buNone/>
+            </a:pPr>
+            <a:r>
+              <a:rPr lang="en-US" sz="1400" b="1" spc="100" kern="0" dirty="0">
+                <a:solidFill>
+                  <a:srgbClr val="9C5446"/>
+                </a:solidFill>
+                <a:latin typeface="メイリオ" pitchFamily="34" charset="0"/>
+                <a:ea typeface="メイリオ" pitchFamily="34" charset="-122"/>
+                <a:cs typeface="メイリオ" pitchFamily="34" charset="-120"/>
+              </a:rPr>
+              <a:t>寄稿</a:t>
+            </a:r>
+            <a:endParaRPr lang="en-US" sz="1400" dirty="0"/>
+          </a:p>
+        </p:txBody>
+      </p:sp>
+      <p:sp>
+        <p:nvSpPr>
+          <p:cNvPr id="23" name="Text 21"/>
+          <p:cNvSpPr txBox="1"/>
+          <p:nvPr/>
+        </p:nvSpPr>
+        <p:spPr>
+          <a:xfrm>
+            <a:off x="1828800" y="4645152"/>
+            <a:ext cx="9674352" cy="329184"/>
+          </a:xfrm>
+          <a:prstGeom prst="rect">
+            <a:avLst/>
+          </a:prstGeom>
+          <a:noFill/>
+          <a:ln/>
+        </p:spPr>
+        <p:txBody>
+          <a:bodyPr wrap="square" lIns="0" tIns="0" rIns="0" bIns="0" rtlCol="0" anchor="ctr"/>
+          <a:lstStyle/>
+          <a:p>
+            <a:pPr indent="0" marL="0">
+              <a:buNone/>
+            </a:pPr>
+            <a:r>
+              <a:rPr lang="en-US" sz="1400" dirty="0">
+                <a:solidFill>
+                  <a:srgbClr val="2B2620"/>
+                </a:solidFill>
+                <a:latin typeface="メイリオ" pitchFamily="34" charset="0"/>
+                <a:ea typeface="メイリオ" pitchFamily="34" charset="-122"/>
+                <a:cs typeface="メイリオ" pitchFamily="34" charset="-120"/>
+              </a:rPr>
+              <a:t>『精神看護』特集「鍼灸は、なぜ「うつ」に効くのだろうか」</a:t>
+            </a:r>
+            <a:endParaRPr lang="en-US" sz="1400" dirty="0"/>
+          </a:p>
+        </p:txBody>
+      </p:sp>
+      <p:sp>
+        <p:nvSpPr>
+          <p:cNvPr id="24" name="Text 22"/>
+          <p:cNvSpPr txBox="1"/>
+          <p:nvPr/>
+        </p:nvSpPr>
+        <p:spPr>
+          <a:xfrm>
+            <a:off x="1828800" y="4974336"/>
+            <a:ext cx="9674352" cy="274320"/>
+          </a:xfrm>
+          <a:prstGeom prst="rect">
+            <a:avLst/>
+          </a:prstGeom>
+          <a:noFill/>
+          <a:ln/>
+        </p:spPr>
+        <p:txBody>
+          <a:bodyPr wrap="square" lIns="0" tIns="0" rIns="0" bIns="0" rtlCol="0" anchor="ctr"/>
+          <a:lstStyle/>
+          <a:p>
+            <a:pPr indent="0" marL="0">
+              <a:buNone/>
+            </a:pPr>
+            <a:r>
+              <a:rPr lang="en-US" sz="1200" dirty="0">
+                <a:solidFill>
+                  <a:srgbClr val="8B8175"/>
+                </a:solidFill>
+                <a:latin typeface="メイリオ" pitchFamily="34" charset="0"/>
+                <a:ea typeface="メイリオ" pitchFamily="34" charset="-122"/>
+                <a:cs typeface="メイリオ" pitchFamily="34" charset="-120"/>
+              </a:rPr>
+              <a:t>医学書院　Vol.28 No.3（2025.5）／ レポート「障害と美の多様性」Vol.28 No.5（2025.9）</a:t>
+            </a:r>
+            <a:endParaRPr lang="en-US" sz="1200" dirty="0"/>
+          </a:p>
+        </p:txBody>
+      </p:sp>
+      <p:sp>
+        <p:nvSpPr>
+          <p:cNvPr id="25" name="Shape 23"/>
+          <p:cNvSpPr/>
+          <p:nvPr/>
+        </p:nvSpPr>
+        <p:spPr>
+          <a:xfrm>
+            <a:off x="685800" y="5285232"/>
+            <a:ext cx="10820095" cy="7315"/>
+          </a:xfrm>
+          <a:prstGeom prst="rect">
+            <a:avLst/>
+          </a:prstGeom>
+          <a:solidFill>
+            <a:srgbClr val="D2C4AE"/>
+          </a:solidFill>
+          <a:ln/>
+        </p:spPr>
+      </p:sp>
+      <p:sp>
+        <p:nvSpPr>
+          <p:cNvPr id="26" name="Text 24"/>
+          <p:cNvSpPr txBox="1"/>
+          <p:nvPr/>
+        </p:nvSpPr>
+        <p:spPr>
+          <a:xfrm>
+            <a:off x="685800" y="5413248"/>
+            <a:ext cx="1143000" cy="274320"/>
+          </a:xfrm>
+          <a:prstGeom prst="rect">
+            <a:avLst/>
+          </a:prstGeom>
+          <a:noFill/>
+          <a:ln/>
+        </p:spPr>
+        <p:txBody>
+          <a:bodyPr wrap="square" lIns="0" tIns="0" rIns="0" bIns="0" rtlCol="0" anchor="ctr"/>
+          <a:lstStyle/>
+          <a:p>
+            <a:pPr indent="0" marL="0">
+              <a:buNone/>
+            </a:pPr>
+            <a:r>
+              <a:rPr lang="en-US" sz="1400" b="1" spc="100" kern="0" dirty="0">
+                <a:solidFill>
+                  <a:srgbClr val="9C5446"/>
+                </a:solidFill>
+                <a:latin typeface="メイリオ" pitchFamily="34" charset="0"/>
+                <a:ea typeface="メイリオ" pitchFamily="34" charset="-122"/>
+                <a:cs typeface="メイリオ" pitchFamily="34" charset="-120"/>
+              </a:rPr>
+              <a:t>学会</a:t>
+            </a:r>
+            <a:endParaRPr lang="en-US" sz="1400" dirty="0"/>
+          </a:p>
+        </p:txBody>
+      </p:sp>
+      <p:sp>
+        <p:nvSpPr>
+          <p:cNvPr id="27" name="Text 25"/>
+          <p:cNvSpPr txBox="1"/>
+          <p:nvPr/>
+        </p:nvSpPr>
+        <p:spPr>
+          <a:xfrm>
+            <a:off x="1828800" y="5376672"/>
+            <a:ext cx="9674352" cy="329184"/>
+          </a:xfrm>
+          <a:prstGeom prst="rect">
+            <a:avLst/>
+          </a:prstGeom>
+          <a:noFill/>
+          <a:ln/>
+        </p:spPr>
+        <p:txBody>
+          <a:bodyPr wrap="square" lIns="0" tIns="0" rIns="0" bIns="0" rtlCol="0" anchor="ctr"/>
+          <a:lstStyle/>
+          <a:p>
+            <a:pPr indent="0" marL="0">
+              <a:buNone/>
+            </a:pPr>
+            <a:r>
+              <a:rPr lang="en-US" sz="1400" dirty="0">
+                <a:solidFill>
+                  <a:srgbClr val="2B2620"/>
+                </a:solidFill>
+                <a:latin typeface="メイリオ" pitchFamily="34" charset="0"/>
+                <a:ea typeface="メイリオ" pitchFamily="34" charset="-122"/>
+                <a:cs typeface="メイリオ" pitchFamily="34" charset="-120"/>
+              </a:rPr>
+              <a:t>全日本鍼灸学会／日本うつ病学会（ポスター発表）／日本精神神経学会 シンポジスト</a:t>
+            </a:r>
+            <a:endParaRPr lang="en-US" sz="1400" dirty="0"/>
+          </a:p>
+        </p:txBody>
+      </p:sp>
+      <p:sp>
+        <p:nvSpPr>
+          <p:cNvPr id="28" name="Text 26"/>
+          <p:cNvSpPr txBox="1"/>
+          <p:nvPr/>
+        </p:nvSpPr>
+        <p:spPr>
+          <a:xfrm>
+            <a:off x="1828800" y="5705856"/>
+            <a:ext cx="9674352" cy="274320"/>
+          </a:xfrm>
+          <a:prstGeom prst="rect">
+            <a:avLst/>
+          </a:prstGeom>
+          <a:noFill/>
+          <a:ln/>
+        </p:spPr>
+        <p:txBody>
+          <a:bodyPr wrap="square" lIns="0" tIns="0" rIns="0" bIns="0" rtlCol="0" anchor="ctr"/>
+          <a:lstStyle/>
+          <a:p>
+            <a:pPr indent="0" marL="0">
+              <a:buNone/>
+            </a:pPr>
+            <a:r>
+              <a:rPr lang="en-US" sz="1200" dirty="0">
+                <a:solidFill>
+                  <a:srgbClr val="8B8175"/>
+                </a:solidFill>
+                <a:latin typeface="メイリオ" pitchFamily="34" charset="0"/>
+                <a:ea typeface="メイリオ" pitchFamily="34" charset="-122"/>
+                <a:cs typeface="メイリオ" pitchFamily="34" charset="-120"/>
+              </a:rPr>
+              <a:t>うつと不安症状を有する患者の実態調査 第3報・第4報（2024・2025・2026）　― 日本精神神経学会は2026.6 登壇</a:t>
+            </a:r>
+            <a:endParaRPr lang="en-US" sz="1200" dirty="0"/>
+          </a:p>
+        </p:txBody>
+      </p:sp>
+      <p:sp>
+        <p:nvSpPr>
+          <p:cNvPr id="29" name="Shape 27"/>
+          <p:cNvSpPr/>
+          <p:nvPr/>
+        </p:nvSpPr>
+        <p:spPr>
+          <a:xfrm>
+            <a:off x="685800" y="6016752"/>
+            <a:ext cx="10820095" cy="7315"/>
+          </a:xfrm>
+          <a:prstGeom prst="rect">
+            <a:avLst/>
+          </a:prstGeom>
+          <a:solidFill>
+            <a:srgbClr val="D2C4AE"/>
+          </a:solidFill>
+          <a:ln/>
+        </p:spPr>
+      </p:sp>
+      <p:sp>
+        <p:nvSpPr>
           <p:cNvPr id="30" name="Text 28"/>
           <p:cNvSpPr txBox="1"/>
           <p:nvPr/>
@@ -3288,7 +5741,7 @@
                 <a:ea typeface="メイリオ" pitchFamily="34" charset="-122"/>
                 <a:cs typeface="メイリオ" pitchFamily="34" charset="-120"/>
               </a:rPr>
-              <a:t>参考資料（本編5分には含みません）</a:t>
+              <a:t>参考資料（本編には含みません）</a:t>
             </a:r>
             <a:endParaRPr lang="en-US" sz="1200" dirty="0"/>
           </a:p>
@@ -8648,7 +11101,7 @@
                 <a:ea typeface="メイリオ" pitchFamily="34" charset="-122"/>
                 <a:cs typeface="メイリオ" pitchFamily="34" charset="-120"/>
               </a:rPr>
-              <a:t>ASK</a:t>
+              <a:t>PRODUCT</a:t>
             </a:r>
             <a:endParaRPr lang="en-US" sz="1400" dirty="0"/>
           </a:p>
@@ -8687,7 +11140,7 @@
                 <a:ea typeface="メイリオ" pitchFamily="34" charset="-122"/>
                 <a:cs typeface="メイリオ" pitchFamily="34" charset="-120"/>
               </a:rPr>
-              <a:t>だから、アポプラスステーション様と話したい</a:t>
+              <a:t>いま提案したいのは「未病ノート」です</a:t>
             </a:r>
             <a:endParaRPr lang="en-US" sz="2800" dirty="0"/>
           </a:p>
@@ -8695,409 +11148,18 @@
       </p:sp>
       <p:sp>
         <p:nvSpPr>
-          <p:cNvPr id="5" name="Text 3"/>
-          <p:cNvSpPr txBox="1"/>
-          <p:nvPr/>
-        </p:nvSpPr>
-        <p:spPr>
-          <a:xfrm>
-            <a:off x="685800" y="1783080"/>
-            <a:ext cx="548640" cy="365760"/>
-          </a:xfrm>
-          <a:prstGeom prst="rect">
-            <a:avLst/>
-          </a:prstGeom>
-          <a:noFill/>
-          <a:ln/>
-        </p:spPr>
-        <p:txBody>
-          <a:bodyPr wrap="square" lIns="0" tIns="0" rIns="0" bIns="0" rtlCol="0" anchor="ctr"/>
-          <a:lstStyle/>
-          <a:p>
-            <a:pPr indent="0" marL="0">
-              <a:buNone/>
-            </a:pPr>
-            <a:r>
-              <a:rPr lang="en-US" sz="1800" b="1" dirty="0">
-                <a:solidFill>
-                  <a:srgbClr val="9C5446"/>
-                </a:solidFill>
-                <a:latin typeface="メイリオ" pitchFamily="34" charset="0"/>
-                <a:ea typeface="メイリオ" pitchFamily="34" charset="-122"/>
-                <a:cs typeface="メイリオ" pitchFamily="34" charset="-120"/>
-              </a:rPr>
-              <a:t>01</a:t>
-            </a:r>
-            <a:endParaRPr lang="en-US" sz="1800" dirty="0"/>
-          </a:p>
-        </p:txBody>
-      </p:sp>
-      <p:sp>
-        <p:nvSpPr>
-          <p:cNvPr id="6" name="Text 4"/>
-          <p:cNvSpPr txBox="1"/>
-          <p:nvPr/>
-        </p:nvSpPr>
-        <p:spPr>
-          <a:xfrm>
-            <a:off x="1371600" y="1764792"/>
-            <a:ext cx="10058400" cy="329184"/>
-          </a:xfrm>
-          <a:prstGeom prst="rect">
-            <a:avLst/>
-          </a:prstGeom>
-          <a:noFill/>
-          <a:ln/>
-        </p:spPr>
-        <p:txBody>
-          <a:bodyPr wrap="square" lIns="0" tIns="0" rIns="0" bIns="0" rtlCol="0" anchor="ctr"/>
-          <a:lstStyle/>
-          <a:p>
-            <a:pPr indent="0" marL="0">
-              <a:buNone/>
-            </a:pPr>
-            <a:r>
-              <a:rPr lang="en-US" sz="1600" b="1" dirty="0">
-                <a:solidFill>
-                  <a:srgbClr val="2B2620"/>
-                </a:solidFill>
-                <a:latin typeface="メイリオ" pitchFamily="34" charset="0"/>
-                <a:ea typeface="メイリオ" pitchFamily="34" charset="-122"/>
-                <a:cs typeface="メイリオ" pitchFamily="34" charset="-120"/>
-              </a:rPr>
-              <a:t>未病領域の新規事業を、共同で検討させてください</a:t>
-            </a:r>
-            <a:endParaRPr lang="en-US" sz="1600" dirty="0"/>
-          </a:p>
-        </p:txBody>
-      </p:sp>
-      <p:sp>
-        <p:nvSpPr>
-          <p:cNvPr id="7" name="Text 5"/>
-          <p:cNvSpPr txBox="1"/>
-          <p:nvPr/>
-        </p:nvSpPr>
-        <p:spPr>
-          <a:xfrm>
-            <a:off x="1371600" y="2112264"/>
-            <a:ext cx="10058400" cy="329184"/>
-          </a:xfrm>
-          <a:prstGeom prst="rect">
-            <a:avLst/>
-          </a:prstGeom>
-          <a:noFill/>
-          <a:ln/>
-        </p:spPr>
-        <p:txBody>
-          <a:bodyPr wrap="square" lIns="0" tIns="0" rIns="0" bIns="0" rtlCol="0" anchor="ctr"/>
-          <a:lstStyle/>
-          <a:p>
-            <a:pPr indent="0" marL="0">
-              <a:buNone/>
-            </a:pPr>
-            <a:r>
-              <a:rPr lang="en-US" sz="1400" dirty="0">
-                <a:solidFill>
-                  <a:srgbClr val="5A5249"/>
-                </a:solidFill>
-                <a:latin typeface="メイリオ" pitchFamily="34" charset="0"/>
-                <a:ea typeface="メイリオ" pitchFamily="34" charset="-122"/>
-                <a:cs typeface="メイリオ" pitchFamily="34" charset="-120"/>
-              </a:rPr>
-              <a:t>東洋医学 × 御社の事業アセット。サービス設計から実証までを一緒に。</a:t>
-            </a:r>
-            <a:endParaRPr lang="en-US" sz="1400" dirty="0"/>
-          </a:p>
-        </p:txBody>
-      </p:sp>
-      <p:sp>
-        <p:nvSpPr>
-          <p:cNvPr id="8" name="Shape 6"/>
+          <p:cNvPr id="5" name="Shape 3"/>
           <p:cNvSpPr/>
           <p:nvPr/>
         </p:nvSpPr>
         <p:spPr>
           <a:xfrm>
-            <a:off x="685800" y="2551176"/>
-            <a:ext cx="10820095" cy="7315"/>
-          </a:xfrm>
-          <a:prstGeom prst="rect">
-            <a:avLst/>
-          </a:prstGeom>
-          <a:solidFill>
-            <a:srgbClr val="D2C4AE"/>
-          </a:solidFill>
-          <a:ln/>
-        </p:spPr>
-      </p:sp>
-      <p:sp>
-        <p:nvSpPr>
-          <p:cNvPr id="9" name="Text 7"/>
-          <p:cNvSpPr txBox="1"/>
-          <p:nvPr/>
-        </p:nvSpPr>
-        <p:spPr>
-          <a:xfrm>
-            <a:off x="685800" y="2697480"/>
-            <a:ext cx="548640" cy="365760"/>
-          </a:xfrm>
-          <a:prstGeom prst="rect">
-            <a:avLst/>
-          </a:prstGeom>
-          <a:noFill/>
-          <a:ln/>
-        </p:spPr>
-        <p:txBody>
-          <a:bodyPr wrap="square" lIns="0" tIns="0" rIns="0" bIns="0" rtlCol="0" anchor="ctr"/>
-          <a:lstStyle/>
-          <a:p>
-            <a:pPr indent="0" marL="0">
-              <a:buNone/>
-            </a:pPr>
-            <a:r>
-              <a:rPr lang="en-US" sz="1800" b="1" dirty="0">
-                <a:solidFill>
-                  <a:srgbClr val="9C5446"/>
-                </a:solidFill>
-                <a:latin typeface="メイリオ" pitchFamily="34" charset="0"/>
-                <a:ea typeface="メイリオ" pitchFamily="34" charset="-122"/>
-                <a:cs typeface="メイリオ" pitchFamily="34" charset="-120"/>
-              </a:rPr>
-              <a:t>02</a:t>
-            </a:r>
-            <a:endParaRPr lang="en-US" sz="1800" dirty="0"/>
-          </a:p>
-        </p:txBody>
-      </p:sp>
-      <p:sp>
-        <p:nvSpPr>
-          <p:cNvPr id="10" name="Text 8"/>
-          <p:cNvSpPr txBox="1"/>
-          <p:nvPr/>
-        </p:nvSpPr>
-        <p:spPr>
-          <a:xfrm>
-            <a:off x="1371600" y="2679192"/>
-            <a:ext cx="10058400" cy="329184"/>
-          </a:xfrm>
-          <a:prstGeom prst="rect">
-            <a:avLst/>
-          </a:prstGeom>
-          <a:noFill/>
-          <a:ln/>
-        </p:spPr>
-        <p:txBody>
-          <a:bodyPr wrap="square" lIns="0" tIns="0" rIns="0" bIns="0" rtlCol="0" anchor="ctr"/>
-          <a:lstStyle/>
-          <a:p>
-            <a:pPr indent="0" marL="0">
-              <a:buNone/>
-            </a:pPr>
-            <a:r>
-              <a:rPr lang="en-US" sz="1600" b="1" dirty="0">
-                <a:solidFill>
-                  <a:srgbClr val="2B2620"/>
-                </a:solidFill>
-                <a:latin typeface="メイリオ" pitchFamily="34" charset="0"/>
-                <a:ea typeface="メイリオ" pitchFamily="34" charset="-122"/>
-                <a:cs typeface="メイリオ" pitchFamily="34" charset="-120"/>
-              </a:rPr>
-              <a:t>人と組織の知見をお借りしたい</a:t>
-            </a:r>
-            <a:endParaRPr lang="en-US" sz="1600" dirty="0"/>
-          </a:p>
-        </p:txBody>
-      </p:sp>
-      <p:sp>
-        <p:nvSpPr>
-          <p:cNvPr id="11" name="Text 9"/>
-          <p:cNvSpPr txBox="1"/>
-          <p:nvPr/>
-        </p:nvSpPr>
-        <p:spPr>
-          <a:xfrm>
-            <a:off x="1371600" y="3026664"/>
-            <a:ext cx="10058400" cy="329184"/>
-          </a:xfrm>
-          <a:prstGeom prst="rect">
-            <a:avLst/>
-          </a:prstGeom>
-          <a:noFill/>
-          <a:ln/>
-        </p:spPr>
-        <p:txBody>
-          <a:bodyPr wrap="square" lIns="0" tIns="0" rIns="0" bIns="0" rtlCol="0" anchor="ctr"/>
-          <a:lstStyle/>
-          <a:p>
-            <a:pPr indent="0" marL="0">
-              <a:buNone/>
-            </a:pPr>
-            <a:r>
-              <a:rPr lang="en-US" sz="1400" dirty="0">
-                <a:solidFill>
-                  <a:srgbClr val="5A5249"/>
-                </a:solidFill>
-                <a:latin typeface="メイリオ" pitchFamily="34" charset="0"/>
-                <a:ea typeface="メイリオ" pitchFamily="34" charset="-122"/>
-                <a:cs typeface="メイリオ" pitchFamily="34" charset="-120"/>
-              </a:rPr>
-              <a:t>施術者の採用・育成・配置。属人から仕組みへ移すために必要です。</a:t>
-            </a:r>
-            <a:endParaRPr lang="en-US" sz="1400" dirty="0"/>
-          </a:p>
-        </p:txBody>
-      </p:sp>
-      <p:sp>
-        <p:nvSpPr>
-          <p:cNvPr id="12" name="Shape 10"/>
-          <p:cNvSpPr/>
-          <p:nvPr/>
-        </p:nvSpPr>
-        <p:spPr>
-          <a:xfrm>
-            <a:off x="685800" y="3465576"/>
-            <a:ext cx="10820095" cy="7315"/>
-          </a:xfrm>
-          <a:prstGeom prst="rect">
-            <a:avLst/>
-          </a:prstGeom>
-          <a:solidFill>
-            <a:srgbClr val="D2C4AE"/>
-          </a:solidFill>
-          <a:ln/>
-        </p:spPr>
-      </p:sp>
-      <p:sp>
-        <p:nvSpPr>
-          <p:cNvPr id="13" name="Text 11"/>
-          <p:cNvSpPr txBox="1"/>
-          <p:nvPr/>
-        </p:nvSpPr>
-        <p:spPr>
-          <a:xfrm>
-            <a:off x="685800" y="3611880"/>
-            <a:ext cx="548640" cy="365760"/>
-          </a:xfrm>
-          <a:prstGeom prst="rect">
-            <a:avLst/>
-          </a:prstGeom>
-          <a:noFill/>
-          <a:ln/>
-        </p:spPr>
-        <p:txBody>
-          <a:bodyPr wrap="square" lIns="0" tIns="0" rIns="0" bIns="0" rtlCol="0" anchor="ctr"/>
-          <a:lstStyle/>
-          <a:p>
-            <a:pPr indent="0" marL="0">
-              <a:buNone/>
-            </a:pPr>
-            <a:r>
-              <a:rPr lang="en-US" sz="1800" b="1" dirty="0">
-                <a:solidFill>
-                  <a:srgbClr val="9C5446"/>
-                </a:solidFill>
-                <a:latin typeface="メイリオ" pitchFamily="34" charset="0"/>
-                <a:ea typeface="メイリオ" pitchFamily="34" charset="-122"/>
-                <a:cs typeface="メイリオ" pitchFamily="34" charset="-120"/>
-              </a:rPr>
-              <a:t>03</a:t>
-            </a:r>
-            <a:endParaRPr lang="en-US" sz="1800" dirty="0"/>
-          </a:p>
-        </p:txBody>
-      </p:sp>
-      <p:sp>
-        <p:nvSpPr>
-          <p:cNvPr id="14" name="Text 12"/>
-          <p:cNvSpPr txBox="1"/>
-          <p:nvPr/>
-        </p:nvSpPr>
-        <p:spPr>
-          <a:xfrm>
-            <a:off x="1371600" y="3593592"/>
-            <a:ext cx="10058400" cy="329184"/>
-          </a:xfrm>
-          <a:prstGeom prst="rect">
-            <a:avLst/>
-          </a:prstGeom>
-          <a:noFill/>
-          <a:ln/>
-        </p:spPr>
-        <p:txBody>
-          <a:bodyPr wrap="square" lIns="0" tIns="0" rIns="0" bIns="0" rtlCol="0" anchor="ctr"/>
-          <a:lstStyle/>
-          <a:p>
-            <a:pPr indent="0" marL="0">
-              <a:buNone/>
-            </a:pPr>
-            <a:r>
-              <a:rPr lang="en-US" sz="1600" b="1" dirty="0">
-                <a:solidFill>
-                  <a:srgbClr val="2B2620"/>
-                </a:solidFill>
-                <a:latin typeface="メイリオ" pitchFamily="34" charset="0"/>
-                <a:ea typeface="メイリオ" pitchFamily="34" charset="-122"/>
-                <a:cs typeface="メイリオ" pitchFamily="34" charset="-120"/>
-              </a:rPr>
-              <a:t>実証の場をご一緒したい</a:t>
-            </a:r>
-            <a:endParaRPr lang="en-US" sz="1600" dirty="0"/>
-          </a:p>
-        </p:txBody>
-      </p:sp>
-      <p:sp>
-        <p:nvSpPr>
-          <p:cNvPr id="15" name="Text 13"/>
-          <p:cNvSpPr txBox="1"/>
-          <p:nvPr/>
-        </p:nvSpPr>
-        <p:spPr>
-          <a:xfrm>
-            <a:off x="1371600" y="3941064"/>
-            <a:ext cx="10058400" cy="329184"/>
-          </a:xfrm>
-          <a:prstGeom prst="rect">
-            <a:avLst/>
-          </a:prstGeom>
-          <a:noFill/>
-          <a:ln/>
-        </p:spPr>
-        <p:txBody>
-          <a:bodyPr wrap="square" lIns="0" tIns="0" rIns="0" bIns="0" rtlCol="0" anchor="ctr"/>
-          <a:lstStyle/>
-          <a:p>
-            <a:pPr indent="0" marL="0">
-              <a:buNone/>
-            </a:pPr>
-            <a:r>
-              <a:rPr lang="en-US" sz="1400" dirty="0">
-                <a:solidFill>
-                  <a:srgbClr val="5A5249"/>
-                </a:solidFill>
-                <a:latin typeface="メイリオ" pitchFamily="34" charset="0"/>
-                <a:ea typeface="メイリオ" pitchFamily="34" charset="-122"/>
-                <a:cs typeface="メイリオ" pitchFamily="34" charset="-120"/>
-              </a:rPr>
-              <a:t>法人向けの健康支援など、未病層に届く場で。効果は学会発表として残します。</a:t>
-            </a:r>
-            <a:endParaRPr lang="en-US" sz="1400" dirty="0"/>
-          </a:p>
-        </p:txBody>
-      </p:sp>
-      <p:sp>
-        <p:nvSpPr>
-          <p:cNvPr id="16" name="Shape 14"/>
-          <p:cNvSpPr/>
-          <p:nvPr/>
-        </p:nvSpPr>
-        <p:spPr>
-          <a:xfrm>
-            <a:off x="685800" y="4572000"/>
-            <a:ext cx="10820095" cy="1325880"/>
+            <a:off x="685800" y="1691640"/>
+            <a:ext cx="3456432" cy="2651760"/>
           </a:xfrm>
           <a:prstGeom prst="roundRect">
             <a:avLst>
-              <a:gd name="adj" fmla="val 3448"/>
+              <a:gd name="adj" fmla="val 1724"/>
             </a:avLst>
           </a:prstGeom>
           <a:solidFill>
@@ -9105,7 +11167,7 @@
           </a:solidFill>
           <a:ln w="9525">
             <a:solidFill>
-              <a:srgbClr val="9C5446"/>
+              <a:srgbClr val="D2C4AE"/>
             </a:solidFill>
             <a:prstDash val="solid"/>
           </a:ln>
@@ -9113,13 +11175,463 @@
       </p:sp>
       <p:sp>
         <p:nvSpPr>
-          <p:cNvPr id="17" name="Text 15"/>
-          <p:cNvSpPr txBox="1"/>
-          <p:nvPr/>
-        </p:nvSpPr>
-        <p:spPr>
-          <a:xfrm>
-            <a:off x="960120" y="4773168"/>
+          <p:cNvPr id="6" name="Text 4"/>
+          <p:cNvSpPr txBox="1"/>
+          <p:nvPr/>
+        </p:nvSpPr>
+        <p:spPr>
+          <a:xfrm>
+            <a:off x="941832" y="1856232"/>
+            <a:ext cx="2944368" cy="274320"/>
+          </a:xfrm>
+          <a:prstGeom prst="rect">
+            <a:avLst/>
+          </a:prstGeom>
+          <a:noFill/>
+          <a:ln/>
+        </p:spPr>
+        <p:txBody>
+          <a:bodyPr wrap="square" lIns="0" tIns="0" rIns="0" bIns="0" rtlCol="0" anchor="ctr"/>
+          <a:lstStyle/>
+          <a:p>
+            <a:pPr indent="0" marL="0">
+              <a:buNone/>
+            </a:pPr>
+            <a:r>
+              <a:rPr lang="en-US" sz="1400" b="1" spc="100" kern="0" dirty="0">
+                <a:solidFill>
+                  <a:srgbClr val="9C5446"/>
+                </a:solidFill>
+                <a:latin typeface="メイリオ" pitchFamily="34" charset="0"/>
+                <a:ea typeface="メイリオ" pitchFamily="34" charset="-122"/>
+                <a:cs typeface="メイリオ" pitchFamily="34" charset="-120"/>
+              </a:rPr>
+              <a:t>返事 1</a:t>
+            </a:r>
+            <a:endParaRPr lang="en-US" sz="1400" dirty="0"/>
+          </a:p>
+        </p:txBody>
+      </p:sp>
+      <p:sp>
+        <p:nvSpPr>
+          <p:cNvPr id="7" name="Text 5"/>
+          <p:cNvSpPr txBox="1"/>
+          <p:nvPr/>
+        </p:nvSpPr>
+        <p:spPr>
+          <a:xfrm>
+            <a:off x="941832" y="2185416"/>
+            <a:ext cx="2944368" cy="457200"/>
+          </a:xfrm>
+          <a:prstGeom prst="rect">
+            <a:avLst/>
+          </a:prstGeom>
+          <a:noFill/>
+          <a:ln/>
+        </p:spPr>
+        <p:txBody>
+          <a:bodyPr wrap="square" lIns="0" tIns="0" rIns="0" bIns="0" rtlCol="0" anchor="t"/>
+          <a:lstStyle/>
+          <a:p>
+            <a:pPr indent="0" marL="0">
+              <a:lnSpc>
+                <a:spcPts val="2100"/>
+              </a:lnSpc>
+              <a:buNone/>
+            </a:pPr>
+            <a:r>
+              <a:rPr lang="en-US" sz="1700" b="1" dirty="0">
+                <a:solidFill>
+                  <a:srgbClr val="2B2620"/>
+                </a:solidFill>
+                <a:latin typeface="メイリオ" pitchFamily="34" charset="0"/>
+                <a:ea typeface="メイリオ" pitchFamily="34" charset="-122"/>
+                <a:cs typeface="メイリオ" pitchFamily="34" charset="-120"/>
+              </a:rPr>
+              <a:t>いま、同じ人がいます</a:t>
+            </a:r>
+            <a:endParaRPr lang="en-US" sz="1700" dirty="0"/>
+          </a:p>
+        </p:txBody>
+      </p:sp>
+      <p:sp>
+        <p:nvSpPr>
+          <p:cNvPr id="8" name="Text 6"/>
+          <p:cNvSpPr txBox="1"/>
+          <p:nvPr/>
+        </p:nvSpPr>
+        <p:spPr>
+          <a:xfrm>
+            <a:off x="941832" y="2697480"/>
+            <a:ext cx="2944368" cy="1444752"/>
+          </a:xfrm>
+          <a:prstGeom prst="rect">
+            <a:avLst/>
+          </a:prstGeom>
+          <a:noFill/>
+          <a:ln/>
+        </p:spPr>
+        <p:txBody>
+          <a:bodyPr wrap="square" lIns="0" tIns="0" rIns="0" bIns="0" rtlCol="0" anchor="t"/>
+          <a:lstStyle/>
+          <a:p>
+            <a:pPr indent="0" marL="0">
+              <a:lnSpc>
+                <a:spcPts val="1700"/>
+              </a:lnSpc>
+              <a:buNone/>
+            </a:pPr>
+            <a:r>
+              <a:rPr lang="en-US" sz="1400" dirty="0">
+                <a:solidFill>
+                  <a:srgbClr val="5A5249"/>
+                </a:solidFill>
+                <a:latin typeface="メイリオ" pitchFamily="34" charset="0"/>
+                <a:ea typeface="メイリオ" pitchFamily="34" charset="-122"/>
+                <a:cs typeface="メイリオ" pitchFamily="34" charset="-120"/>
+              </a:rPr>
+              <a:t>「白露のいま、同じ〈だるさ＋冷え〉を記録している人が、関東の40代に128人います」。同じ節気・年代・地域の人数を返します。</a:t>
+            </a:r>
+            <a:endParaRPr lang="en-US" sz="1400" dirty="0"/>
+          </a:p>
+        </p:txBody>
+      </p:sp>
+      <p:sp>
+        <p:nvSpPr>
+          <p:cNvPr id="9" name="Shape 7"/>
+          <p:cNvSpPr/>
+          <p:nvPr/>
+        </p:nvSpPr>
+        <p:spPr>
+          <a:xfrm>
+            <a:off x="4370832" y="1691640"/>
+            <a:ext cx="3456432" cy="2651760"/>
+          </a:xfrm>
+          <a:prstGeom prst="roundRect">
+            <a:avLst>
+              <a:gd name="adj" fmla="val 1724"/>
+            </a:avLst>
+          </a:prstGeom>
+          <a:solidFill>
+            <a:srgbClr val="FBF6EC"/>
+          </a:solidFill>
+          <a:ln w="9525">
+            <a:solidFill>
+              <a:srgbClr val="D2C4AE"/>
+            </a:solidFill>
+            <a:prstDash val="solid"/>
+          </a:ln>
+        </p:spPr>
+      </p:sp>
+      <p:sp>
+        <p:nvSpPr>
+          <p:cNvPr id="10" name="Text 8"/>
+          <p:cNvSpPr txBox="1"/>
+          <p:nvPr/>
+        </p:nvSpPr>
+        <p:spPr>
+          <a:xfrm>
+            <a:off x="4626864" y="1856232"/>
+            <a:ext cx="2944368" cy="274320"/>
+          </a:xfrm>
+          <a:prstGeom prst="rect">
+            <a:avLst/>
+          </a:prstGeom>
+          <a:noFill/>
+          <a:ln/>
+        </p:spPr>
+        <p:txBody>
+          <a:bodyPr wrap="square" lIns="0" tIns="0" rIns="0" bIns="0" rtlCol="0" anchor="ctr"/>
+          <a:lstStyle/>
+          <a:p>
+            <a:pPr indent="0" marL="0">
+              <a:buNone/>
+            </a:pPr>
+            <a:r>
+              <a:rPr lang="en-US" sz="1400" b="1" spc="100" kern="0" dirty="0">
+                <a:solidFill>
+                  <a:srgbClr val="9C5446"/>
+                </a:solidFill>
+                <a:latin typeface="メイリオ" pitchFamily="34" charset="0"/>
+                <a:ea typeface="メイリオ" pitchFamily="34" charset="-122"/>
+                <a:cs typeface="メイリオ" pitchFamily="34" charset="-120"/>
+              </a:rPr>
+              <a:t>返事 2</a:t>
+            </a:r>
+            <a:endParaRPr lang="en-US" sz="1400" dirty="0"/>
+          </a:p>
+        </p:txBody>
+      </p:sp>
+      <p:sp>
+        <p:nvSpPr>
+          <p:cNvPr id="11" name="Text 9"/>
+          <p:cNvSpPr txBox="1"/>
+          <p:nvPr/>
+        </p:nvSpPr>
+        <p:spPr>
+          <a:xfrm>
+            <a:off x="4626864" y="2185416"/>
+            <a:ext cx="2944368" cy="457200"/>
+          </a:xfrm>
+          <a:prstGeom prst="rect">
+            <a:avLst/>
+          </a:prstGeom>
+          <a:noFill/>
+          <a:ln/>
+        </p:spPr>
+        <p:txBody>
+          <a:bodyPr wrap="square" lIns="0" tIns="0" rIns="0" bIns="0" rtlCol="0" anchor="t"/>
+          <a:lstStyle/>
+          <a:p>
+            <a:pPr indent="0" marL="0">
+              <a:lnSpc>
+                <a:spcPts val="2100"/>
+              </a:lnSpc>
+              <a:buNone/>
+            </a:pPr>
+            <a:r>
+              <a:rPr lang="en-US" sz="1700" b="1" dirty="0">
+                <a:solidFill>
+                  <a:srgbClr val="2B2620"/>
+                </a:solidFill>
+                <a:latin typeface="メイリオ" pitchFamily="34" charset="0"/>
+                <a:ea typeface="メイリオ" pitchFamily="34" charset="-122"/>
+                <a:cs typeface="メイリオ" pitchFamily="34" charset="-120"/>
+              </a:rPr>
+              <a:t>去年の今頃</a:t>
+            </a:r>
+            <a:endParaRPr lang="en-US" sz="1700" dirty="0"/>
+          </a:p>
+        </p:txBody>
+      </p:sp>
+      <p:sp>
+        <p:nvSpPr>
+          <p:cNvPr id="12" name="Text 10"/>
+          <p:cNvSpPr txBox="1"/>
+          <p:nvPr/>
+        </p:nvSpPr>
+        <p:spPr>
+          <a:xfrm>
+            <a:off x="4626864" y="2697480"/>
+            <a:ext cx="2944368" cy="1444752"/>
+          </a:xfrm>
+          <a:prstGeom prst="rect">
+            <a:avLst/>
+          </a:prstGeom>
+          <a:noFill/>
+          <a:ln/>
+        </p:spPr>
+        <p:txBody>
+          <a:bodyPr wrap="square" lIns="0" tIns="0" rIns="0" bIns="0" rtlCol="0" anchor="t"/>
+          <a:lstStyle/>
+          <a:p>
+            <a:pPr indent="0" marL="0">
+              <a:lnSpc>
+                <a:spcPts val="1700"/>
+              </a:lnSpc>
+              <a:buNone/>
+            </a:pPr>
+            <a:r>
+              <a:rPr lang="en-US" sz="1400" dirty="0">
+                <a:solidFill>
+                  <a:srgbClr val="5A5249"/>
+                </a:solidFill>
+                <a:latin typeface="メイリオ" pitchFamily="34" charset="0"/>
+                <a:ea typeface="メイリオ" pitchFamily="34" charset="-122"/>
+                <a:cs typeface="メイリオ" pitchFamily="34" charset="-120"/>
+              </a:rPr>
+              <a:t>「去年の白露も、3日続けてだるさを記録していました」。比較の単位を年ではなく節気に置くので、3か月で6回分貯まります。</a:t>
+            </a:r>
+            <a:endParaRPr lang="en-US" sz="1400" dirty="0"/>
+          </a:p>
+        </p:txBody>
+      </p:sp>
+      <p:sp>
+        <p:nvSpPr>
+          <p:cNvPr id="13" name="Shape 11"/>
+          <p:cNvSpPr/>
+          <p:nvPr/>
+        </p:nvSpPr>
+        <p:spPr>
+          <a:xfrm>
+            <a:off x="8055864" y="1691640"/>
+            <a:ext cx="3456432" cy="2651760"/>
+          </a:xfrm>
+          <a:prstGeom prst="roundRect">
+            <a:avLst>
+              <a:gd name="adj" fmla="val 1724"/>
+            </a:avLst>
+          </a:prstGeom>
+          <a:solidFill>
+            <a:srgbClr val="FBF6EC"/>
+          </a:solidFill>
+          <a:ln w="9525">
+            <a:solidFill>
+              <a:srgbClr val="D2C4AE"/>
+            </a:solidFill>
+            <a:prstDash val="solid"/>
+          </a:ln>
+        </p:spPr>
+      </p:sp>
+      <p:sp>
+        <p:nvSpPr>
+          <p:cNvPr id="14" name="Text 12"/>
+          <p:cNvSpPr txBox="1"/>
+          <p:nvPr/>
+        </p:nvSpPr>
+        <p:spPr>
+          <a:xfrm>
+            <a:off x="8311896" y="1856232"/>
+            <a:ext cx="2944368" cy="274320"/>
+          </a:xfrm>
+          <a:prstGeom prst="rect">
+            <a:avLst/>
+          </a:prstGeom>
+          <a:noFill/>
+          <a:ln/>
+        </p:spPr>
+        <p:txBody>
+          <a:bodyPr wrap="square" lIns="0" tIns="0" rIns="0" bIns="0" rtlCol="0" anchor="ctr"/>
+          <a:lstStyle/>
+          <a:p>
+            <a:pPr indent="0" marL="0">
+              <a:buNone/>
+            </a:pPr>
+            <a:r>
+              <a:rPr lang="en-US" sz="1400" b="1" spc="100" kern="0" dirty="0">
+                <a:solidFill>
+                  <a:srgbClr val="9C5446"/>
+                </a:solidFill>
+                <a:latin typeface="メイリオ" pitchFamily="34" charset="0"/>
+                <a:ea typeface="メイリオ" pitchFamily="34" charset="-122"/>
+                <a:cs typeface="メイリオ" pitchFamily="34" charset="-120"/>
+              </a:rPr>
+              <a:t>返事 3</a:t>
+            </a:r>
+            <a:endParaRPr lang="en-US" sz="1400" dirty="0"/>
+          </a:p>
+        </p:txBody>
+      </p:sp>
+      <p:sp>
+        <p:nvSpPr>
+          <p:cNvPr id="15" name="Text 13"/>
+          <p:cNvSpPr txBox="1"/>
+          <p:nvPr/>
+        </p:nvSpPr>
+        <p:spPr>
+          <a:xfrm>
+            <a:off x="8311896" y="2185416"/>
+            <a:ext cx="2944368" cy="457200"/>
+          </a:xfrm>
+          <a:prstGeom prst="rect">
+            <a:avLst/>
+          </a:prstGeom>
+          <a:noFill/>
+          <a:ln/>
+        </p:spPr>
+        <p:txBody>
+          <a:bodyPr wrap="square" lIns="0" tIns="0" rIns="0" bIns="0" rtlCol="0" anchor="t"/>
+          <a:lstStyle/>
+          <a:p>
+            <a:pPr indent="0" marL="0">
+              <a:lnSpc>
+                <a:spcPts val="2100"/>
+              </a:lnSpc>
+              <a:buNone/>
+            </a:pPr>
+            <a:r>
+              <a:rPr lang="en-US" sz="1700" b="1" dirty="0">
+                <a:solidFill>
+                  <a:srgbClr val="2B2620"/>
+                </a:solidFill>
+                <a:latin typeface="メイリオ" pitchFamily="34" charset="0"/>
+                <a:ea typeface="メイリオ" pitchFamily="34" charset="-122"/>
+                <a:cs typeface="メイリオ" pitchFamily="34" charset="-120"/>
+              </a:rPr>
+              <a:t>崩れやすさ予測</a:t>
+            </a:r>
+            <a:endParaRPr lang="en-US" sz="1700" dirty="0"/>
+          </a:p>
+        </p:txBody>
+      </p:sp>
+      <p:sp>
+        <p:nvSpPr>
+          <p:cNvPr id="16" name="Text 14"/>
+          <p:cNvSpPr txBox="1"/>
+          <p:nvPr/>
+        </p:nvSpPr>
+        <p:spPr>
+          <a:xfrm>
+            <a:off x="8311896" y="2697480"/>
+            <a:ext cx="2944368" cy="1444752"/>
+          </a:xfrm>
+          <a:prstGeom prst="rect">
+            <a:avLst/>
+          </a:prstGeom>
+          <a:noFill/>
+          <a:ln/>
+        </p:spPr>
+        <p:txBody>
+          <a:bodyPr wrap="square" lIns="0" tIns="0" rIns="0" bIns="0" rtlCol="0" anchor="t"/>
+          <a:lstStyle/>
+          <a:p>
+            <a:pPr indent="0" marL="0">
+              <a:lnSpc>
+                <a:spcPts val="1700"/>
+              </a:lnSpc>
+              <a:buNone/>
+            </a:pPr>
+            <a:r>
+              <a:rPr lang="en-US" sz="1400" dirty="0">
+                <a:solidFill>
+                  <a:srgbClr val="5A5249"/>
+                </a:solidFill>
+                <a:latin typeface="メイリオ" pitchFamily="34" charset="0"/>
+                <a:ea typeface="メイリオ" pitchFamily="34" charset="-122"/>
+                <a:cs typeface="メイリオ" pitchFamily="34" charset="-120"/>
+              </a:rPr>
+              <a:t>気圧の低下と本人の過去パターンから「明後日は肩こりに注意」。毎日開く理由をつくります。</a:t>
+            </a:r>
+            <a:endParaRPr lang="en-US" sz="1400" dirty="0"/>
+          </a:p>
+        </p:txBody>
+      </p:sp>
+      <p:sp>
+        <p:nvSpPr>
+          <p:cNvPr id="17" name="Shape 15"/>
+          <p:cNvSpPr/>
+          <p:nvPr/>
+        </p:nvSpPr>
+        <p:spPr>
+          <a:xfrm>
+            <a:off x="685800" y="4526280"/>
+            <a:ext cx="10820095" cy="1325880"/>
+          </a:xfrm>
+          <a:prstGeom prst="roundRect">
+            <a:avLst>
+              <a:gd name="adj" fmla="val 3448"/>
+            </a:avLst>
+          </a:prstGeom>
+          <a:solidFill>
+            <a:srgbClr val="FBF6EC"/>
+          </a:solidFill>
+          <a:ln w="9525">
+            <a:solidFill>
+              <a:srgbClr val="5E7060"/>
+            </a:solidFill>
+            <a:prstDash val="solid"/>
+          </a:ln>
+        </p:spPr>
+      </p:sp>
+      <p:sp>
+        <p:nvSpPr>
+          <p:cNvPr id="18" name="Text 16"/>
+          <p:cNvSpPr txBox="1"/>
+          <p:nvPr/>
+        </p:nvSpPr>
+        <p:spPr>
+          <a:xfrm>
+            <a:off x="960120" y="4727448"/>
             <a:ext cx="10271455" cy="237744"/>
           </a:xfrm>
           <a:prstGeom prst="rect">
@@ -9138,13 +11650,13 @@
             <a:r>
               <a:rPr lang="en-US" sz="1200" b="1" spc="100" kern="0" dirty="0">
                 <a:solidFill>
-                  <a:srgbClr val="9C5446"/>
-                </a:solidFill>
-                <a:latin typeface="メイリオ" pitchFamily="34" charset="0"/>
-                <a:ea typeface="メイリオ" pitchFamily="34" charset="-122"/>
-                <a:cs typeface="メイリオ" pitchFamily="34" charset="-120"/>
-              </a:rPr>
-              <a:t>本日お願いしたいこと</a:t>
+                  <a:srgbClr val="5E7060"/>
+                </a:solidFill>
+                <a:latin typeface="メイリオ" pitchFamily="34" charset="0"/>
+                <a:ea typeface="メイリオ" pitchFamily="34" charset="-122"/>
+                <a:cs typeface="メイリオ" pitchFamily="34" charset="-120"/>
+              </a:rPr>
+              <a:t>設計</a:t>
             </a:r>
             <a:endParaRPr lang="en-US" sz="1200" dirty="0"/>
           </a:p>
@@ -9152,13 +11664,13 @@
       </p:sp>
       <p:sp>
         <p:nvSpPr>
-          <p:cNvPr id="18" name="Text 16"/>
-          <p:cNvSpPr txBox="1"/>
-          <p:nvPr/>
-        </p:nvSpPr>
-        <p:spPr>
-          <a:xfrm>
-            <a:off x="960120" y="5084064"/>
+          <p:cNvPr id="19" name="Text 17"/>
+          <p:cNvSpPr txBox="1"/>
+          <p:nvPr/>
+        </p:nvSpPr>
+        <p:spPr>
+          <a:xfrm>
+            <a:off x="960120" y="5038344"/>
             <a:ext cx="10271455" cy="594360"/>
           </a:xfrm>
           <a:prstGeom prst="rect">
@@ -9186,7 +11698,7 @@
                 <a:ea typeface="メイリオ" pitchFamily="34" charset="-122"/>
                 <a:cs typeface="メイリオ" pitchFamily="34" charset="-120"/>
               </a:rPr>
-              <a:t>生きづらさを抱えた人を、治療が必要になる手前で減らしたい。</a:t>
+              <a:t>毎日30秒、12項目の体調記録。気・血・水・心を各3項目ずつ。</a:t>
             </a:r>
             <a:pPr indent="0" marL="0">
               <a:lnSpc>
@@ -9203,7 +11715,24 @@
                 <a:ea typeface="メイリオ" pitchFamily="34" charset="-122"/>
                 <a:cs typeface="メイリオ" pitchFamily="34" charset="-120"/>
               </a:rPr>
-              <a:t>まずは本日、この3つのうちどこに可能性がありそうか、率直なご意見をいただけたら嬉しいです。</a:t>
+              <a:t>記録して終わりにせず、必ず「返事」が返る</a:t>
+            </a:r>
+            <a:pPr indent="0" marL="0">
+              <a:lnSpc>
+                <a:spcPts val="1900"/>
+              </a:lnSpc>
+              <a:buNone/>
+            </a:pPr>
+            <a:r>
+              <a:rPr lang="en-US" sz="1400" dirty="0">
+                <a:solidFill>
+                  <a:srgbClr val="5A5249"/>
+                </a:solidFill>
+                <a:latin typeface="メイリオ" pitchFamily="34" charset="0"/>
+                <a:ea typeface="メイリオ" pitchFamily="34" charset="-122"/>
+                <a:cs typeface="メイリオ" pitchFamily="34" charset="-120"/>
+              </a:rPr>
+              <a:t>のが、ほかの記録アプリとの違いです。玉川大学 柴田研究室との共同提案で、私は臨床監修を担当します。</a:t>
             </a:r>
             <a:endParaRPr lang="en-US" sz="1400" dirty="0"/>
           </a:p>
@@ -9211,7 +11740,7 @@
       </p:sp>
       <p:sp>
         <p:nvSpPr>
-          <p:cNvPr id="19" name="Text 17"/>
+          <p:cNvPr id="20" name="Text 18"/>
           <p:cNvSpPr txBox="1"/>
           <p:nvPr/>
         </p:nvSpPr>
@@ -9250,7 +11779,7 @@
       </p:sp>
       <p:sp>
         <p:nvSpPr>
-          <p:cNvPr id="20" name="Text 18"/>
+          <p:cNvPr id="21" name="Text 19"/>
           <p:cNvSpPr txBox="1"/>
           <p:nvPr/>
         </p:nvSpPr>
@@ -9281,7 +11810,7 @@
                 <a:ea typeface="メイリオ" pitchFamily="34" charset="-122"/>
                 <a:cs typeface="メイリオ" pitchFamily="34" charset="-120"/>
               </a:rPr>
-              <a:t>4:35 → 5:00</a:t>
+              <a:t>4:30 → 5:20</a:t>
             </a:r>
             <a:endParaRPr lang="en-US" sz="1200" dirty="0"/>
           </a:p>

--- a/proposals/米倉まな_アポプラスステーション様ご提案_導入.pptx
+++ b/proposals/米倉まな_アポプラスステーション様ご提案_導入.pptx
@@ -17,10 +17,9 @@
     <p:sldId id="265" r:id="rId11"/>
     <p:sldId id="266" r:id="rId12"/>
     <p:sldId id="267" r:id="rId13"/>
-    <p:sldId id="268" r:id="rId14"/>
   </p:sldIdLst>
   <p:notesMasterIdLst>
-    <p:notesMasterId r:id="rId15"/>
+    <p:notesMasterId r:id="rId14"/>
   </p:notesMasterIdLst>
   <p:sldSz cx="12192000" cy="6858000"/>
   <p:notesSz cx="6858000" cy="12192000"/>
@@ -690,7 +689,7 @@
           <a:p>
             <a:r>
               <a:rPr lang="en-US" dirty="0"/>
-              <a:t>まずPhase 0、3か月です。ここでつくるのはコードではなく、社内実証の実施合意と、法務・倫理のラインの確定です。Phase 1は御社従業員300名での社内実証。テスト環境は無料枠で組むので、この段階のインフラ費はかかりません。3年目の売上イメージは約1.6億円、うち9,200万円は既存のお客様への追加提案だけで届く範囲の試算です。</a:t>
+              <a:t>お願いしたいことは3つです。未病領域の新規事業の共同検討、人材・組織の知見、そして実証の場。治療が必要になる手前で、生きづらさを抱えた人を減らしたい。まずは本日、この3つのうちどこに可能性がありそうか、率直なご意見をいただけたら嬉しいです。</a:t>
             </a:r>
             <a:endParaRPr lang="en-US" dirty="0"/>
           </a:p>
@@ -778,7 +777,7 @@
           <a:p>
             <a:r>
               <a:rPr lang="en-US" dirty="0"/>
-              <a:t>お願いしたいことは3つです。未病領域の新規事業の共同検討、人材・組織の知見、そして実証の場。治療が必要になる手前で、生きづらさを抱えた人を減らしたい。まずは本日、この3つのうちどこに可能性がありそうか、率直なご意見をいただけたら嬉しいです。</a:t>
+              <a:t>本編には含めません。実績の裏取りを求められたときに、共同研究や企業連携の公開情報としてお見せする用です。</a:t>
             </a:r>
             <a:endParaRPr lang="en-US" dirty="0"/>
           </a:p>
@@ -802,94 +801,6 @@
             <a:fld id="{F7021451-1387-4CA6-816F-3879F97B5CBC}" type="slidenum">
               <a:rPr lang="en-US"/>
               <a:t>12</a:t>
-            </a:fld>
-            <a:endParaRPr lang="en-US"/>
-          </a:p>
-        </p:txBody>
-      </p:sp>
-    </p:spTree>
-    <p:extLst>
-      <p:ext uri="{BB962C8B-B14F-4D97-AF65-F5344CB8AC3E}">
-        <p14:creationId xmlns:p14="http://schemas.microsoft.com/office/powerpoint/2010/main" val="1024086991"/>
-      </p:ext>
-    </p:extLst>
-  </p:cSld>
-  <p:clrMapOvr>
-    <a:masterClrMapping/>
-  </p:clrMapOvr>
-</p:notes>
-</file>
-
-<file path=ppt/notesSlides/notesSlide13.xml><?xml version="1.0" encoding="utf-8"?>
-<p:notes xmlns:a="http://schemas.openxmlformats.org/drawingml/2006/main" xmlns:r="http://schemas.openxmlformats.org/officeDocument/2006/relationships" xmlns:p="http://schemas.openxmlformats.org/presentationml/2006/main">
-  <p:cSld>
-    <p:spTree>
-      <p:nvGrpSpPr>
-        <p:cNvPr id="1" name=""/>
-        <p:cNvGrpSpPr/>
-        <p:nvPr/>
-      </p:nvGrpSpPr>
-      <p:grpSpPr>
-        <a:xfrm>
-          <a:off x="0" y="0"/>
-          <a:ext cx="0" cy="0"/>
-          <a:chOff x="0" y="0"/>
-          <a:chExt cx="0" cy="0"/>
-        </a:xfrm>
-      </p:grpSpPr>
-      <p:sp>
-        <p:nvSpPr>
-          <p:cNvPr id="2" name="Slide Image Placeholder 1"/>
-          <p:cNvSpPr>
-            <a:spLocks noGrp="1" noRot="1" noChangeAspect="1"/>
-          </p:cNvSpPr>
-          <p:nvPr>
-            <p:ph type="sldImg"/>
-          </p:nvPr>
-        </p:nvSpPr>
-        <p:spPr/>
-      </p:sp>
-      <p:sp>
-        <p:nvSpPr>
-          <p:cNvPr id="3" name="Notes Placeholder 2"/>
-          <p:cNvSpPr>
-            <a:spLocks noGrp="1"/>
-          </p:cNvSpPr>
-          <p:nvPr>
-            <p:ph type="body" idx="1"/>
-          </p:nvPr>
-        </p:nvSpPr>
-        <p:spPr/>
-        <p:txBody>
-          <a:bodyPr/>
-          <a:lstStyle/>
-          <a:p>
-            <a:r>
-              <a:rPr lang="en-US" dirty="0"/>
-              <a:t>本編には含めません。実績の裏取りを求められたときに、共同研究や企業連携の公開情報としてお見せする用です。</a:t>
-            </a:r>
-            <a:endParaRPr lang="en-US" dirty="0"/>
-          </a:p>
-        </p:txBody>
-      </p:sp>
-      <p:sp>
-        <p:nvSpPr>
-          <p:cNvPr id="4" name="Slide Number Placeholder 3"/>
-          <p:cNvSpPr>
-            <a:spLocks noGrp="1"/>
-          </p:cNvSpPr>
-          <p:nvPr>
-            <p:ph type="sldNum" sz="quarter" idx="10"/>
-          </p:nvPr>
-        </p:nvSpPr>
-        <p:spPr/>
-        <p:txBody>
-          <a:bodyPr/>
-          <a:lstStyle/>
-          <a:p>
-            <a:fld id="{F7021451-1387-4CA6-816F-3879F97B5CBC}" type="slidenum">
-              <a:rPr lang="en-US"/>
-              <a:t>13</a:t>
             </a:fld>
             <a:endParaRPr lang="en-US"/>
           </a:p>
@@ -1042,7 +953,7 @@
           <a:p>
             <a:r>
               <a:rPr lang="en-US" dirty="0"/>
-              <a:t>三重で鍼灸院を11年。のべ2万人以上を診てきました。臨床だけでなく、鍼灸師の育成と、学会での研究発表も続けています。全日本鍼灸学会と日本うつ病学会で発表し、日本精神神経学会にも登壇しました。心の不調を扱う鍼灸師として、現場・人・データの3つを持っているのが私の立ち位置です。</a:t>
+              <a:t>三重で鍼灸院を12年。のべ2万人以上を診てきました。臨床だけでなく、鍼灸師の育成と、学会での研究発表も続けています。全日本鍼灸学会と日本うつ病学会で発表し、日本精神神経学会にも登壇しました。心の不調を扱う鍼灸師として、現場・人・データの3つを持っているのが私の立ち位置です。</a:t>
             </a:r>
             <a:endParaRPr lang="en-US" dirty="0"/>
           </a:p>
@@ -1130,7 +1041,7 @@
           <a:p>
             <a:r>
               <a:rPr lang="en-US" dirty="0"/>
-              <a:t>ここからは、私が現場で感じていることをお話しします。左が社会の数字、右が私が院で見ていることです。精神疾患の患者は約600万人、国も2024年に初めて白書のテーマにこころの健康を据えました。私の院でも、心の不調を主訴に来られる方が明らかに増えています。2028年からは50人未満の会社にもストレスチェックが義務化されます。ただ、検査で気づいても次に行く場所がない。病院はもう新規を受けきれていません。そして損失の7.6兆円のうち7.3兆円は、出勤しているのに力が出ない人の分です。この層が、いま誰の担当にもなっていない。だから私は、未病の段階で止めたいと考えています。</a:t>
+              <a:t>もうひとつの顔が、企業の新規事業への伴走です。パパゲーノでは認定第一号として、就労継続支援の事業に発注する側で関わりました。ファンコミュニケーションズさんのThirdTalkは、病院やカウンセリングに行く一歩手前の人のためのオンライン対話サービスで、企画段階からご相談をいただき、立ち上げを見守ってきました。stand upさんはアミューズメントの会社で、新規事業のご相談から、いまもお取引が続いています。</a:t>
             </a:r>
             <a:endParaRPr lang="en-US" dirty="0"/>
           </a:p>
@@ -1218,7 +1129,7 @@
           <a:p>
             <a:r>
               <a:rPr lang="en-US" dirty="0"/>
-              <a:t>企業と鍼灸の組み合わせは、もう絵空事ではありません。枕で知られるブレインスリープさんは、睡眠専門の鍼灸院を自社ブランドで4店舗運営しています。有楽町マルイのように商業施設の中にも入っていて、丸井グループ側もプレスリリースを出しています。累計1万人以上が利用し、施術の効果も数字で公表し、定額プランで通い続けてもらう設計です。製品を売って終わりにせず、施術で人と関わり続けている。私がやろうとしている構造とほぼ同じで、違いは入口だけです。あの会社は睡眠から入った。私はこころから入ります。</a:t>
+              <a:t>いま「ねここち」という、頭をオフにする事業の立ち上げを準備しています。頭が考えごとで止まらない人に、強制的にオフにする時間を売る事業です。施術は鍼灸師の国家資格を持つ人が行います。医療の知識を持つ人が、治療の手前の層に関わる形です。治療と身構えずに入れる入口をつくって、必要な人だけを鍼灸や医療につなぐ。1店舗あたり月次利益30万円を想定しています。</a:t>
             </a:r>
             <a:endParaRPr lang="en-US" dirty="0"/>
           </a:p>
@@ -1306,7 +1217,7 @@
           <a:p>
             <a:r>
               <a:rPr lang="en-US" dirty="0"/>
-              <a:t>いま「ねここち」という、頭をオフにする事業の立ち上げを準備しています。頭が考えごとで止まらない人に、強制的にオフにする時間を売る事業です。施術は鍼灸師の国家資格を持つ人が行います。医療の知識を持つ人が、治療の手前の層に関わる形です。治療と身構えずに入れる入口をつくって、必要な人だけを鍼灸や医療につなぐ。1店舗あたり月次利益30万円を想定しています。</a:t>
+              <a:t>企業と鍼灸の組み合わせは、もう絵空事ではありません。枕で知られるブレインスリープさんは、睡眠専門の鍼灸院を自社ブランドで4店舗運営しています。有楽町マルイのように商業施設の中にも入っていて、丸井グループ側もプレスリリースを出しています。累計1万人以上が利用し、施術の効果も数字で公表し、定額プランで通い続けてもらう設計です。製品を売って終わりにせず、施術で人と関わり続けている。私がやろうとしている構造とほぼ同じで、違いは入口だけです。あの会社は睡眠から入った。私はこころから入ります。</a:t>
             </a:r>
             <a:endParaRPr lang="en-US" dirty="0"/>
           </a:p>
@@ -1394,7 +1305,7 @@
           <a:p>
             <a:r>
               <a:rPr lang="en-US" dirty="0"/>
-              <a:t>もうひとつの顔が、企業の新規事業への伴走です。パパゲーノでは認定第一号として、就労継続支援の事業に発注する側で関わりました。ファンコミュニケーションズさんのThirdTalkは、病院やカウンセリングに行く一歩手前の人のためのオンライン対話サービスで、企画段階からご相談をいただき、立ち上げを見守ってきました。stand upさんはアミューズメントの会社で、新規事業のご相談から、いまもお取引が続いています。</a:t>
+              <a:t>ここからは、私が現場で感じていることをお話しします。左が社会の数字、右が私が院で見ていることです。精神疾患の患者は約600万人、国も2024年に初めて白書のテーマにこころの健康を据えました。私の院でも、心の不調を主訴に来られる方が明らかに増えています。2028年からは50人未満の会社にもストレスチェックが義務化されます。ただ、検査で気づいても次に行く場所がない。病院はもう新規を受けきれていません。そして損失の7.6兆円のうち7.3兆円は、出勤しているのに力が出ない人の分です。この層が、いま誰の担当にもなっていない。だから私は、未病の段階で止めたいと考えています。</a:t>
             </a:r>
             <a:endParaRPr lang="en-US" dirty="0"/>
           </a:p>
@@ -2202,7 +2113,7 @@
                 <a:ea typeface="メイリオ" pitchFamily="34" charset="-122"/>
                 <a:cs typeface="メイリオ" pitchFamily="34" charset="-120"/>
               </a:rPr>
-              <a:t>認定鍼灸師（開業11年目）</a:t>
+              <a:t>認定鍼灸師（開業12年目）</a:t>
             </a:r>
             <a:endParaRPr lang="en-US" sz="1400" dirty="0"/>
           </a:p>
@@ -2544,7 +2455,7 @@
                 <a:ea typeface="メイリオ" pitchFamily="34" charset="-122"/>
                 <a:cs typeface="メイリオ" pitchFamily="34" charset="-120"/>
               </a:rPr>
-              <a:t>所要 約7分</a:t>
+              <a:t>所要 約6分</a:t>
             </a:r>
             <a:endParaRPr lang="en-US" sz="1200" dirty="0"/>
           </a:p>
@@ -2564,7 +2475,7 @@
     <p:bg>
       <p:bgPr>
         <a:solidFill>
-          <a:srgbClr val="2B2620"/>
+          <a:srgbClr val="F3EADB"/>
         </a:solidFill>
       </p:bgPr>
     </p:bg>
@@ -2597,7 +2508,7 @@
             <a:avLst/>
           </a:prstGeom>
           <a:solidFill>
-            <a:srgbClr val="C97B68"/>
+            <a:srgbClr val="9C5446"/>
           </a:solidFill>
           <a:ln/>
         </p:spPr>
@@ -2629,7 +2540,7 @@
             <a:r>
               <a:rPr lang="en-US" sz="1400" b="1" spc="200" kern="0" dirty="0">
                 <a:solidFill>
-                  <a:srgbClr val="C97B68"/>
+                  <a:srgbClr val="9C5446"/>
                 </a:solidFill>
                 <a:latin typeface="メイリオ" pitchFamily="34" charset="0"/>
                 <a:ea typeface="メイリオ" pitchFamily="34" charset="-122"/>
@@ -2643,7 +2554,7 @@
             <a:r>
               <a:rPr lang="en-US" sz="1400" spc="300" kern="0" dirty="0">
                 <a:solidFill>
-                  <a:srgbClr val="BDB2A2"/>
+                  <a:srgbClr val="8B8175"/>
                 </a:solidFill>
                 <a:latin typeface="メイリオ" pitchFamily="34" charset="0"/>
                 <a:ea typeface="メイリオ" pitchFamily="34" charset="-122"/>
@@ -2682,7 +2593,7 @@
             <a:r>
               <a:rPr lang="en-US" sz="2800" b="1" spc="100" kern="0" dirty="0">
                 <a:solidFill>
-                  <a:srgbClr val="F3ECE0"/>
+                  <a:srgbClr val="2B2620"/>
                 </a:solidFill>
                 <a:latin typeface="メイリオ" pitchFamily="34" charset="0"/>
                 <a:ea typeface="メイリオ" pitchFamily="34" charset="-122"/>
@@ -2721,7 +2632,7 @@
             <a:r>
               <a:rPr lang="en-US" sz="1400" b="1" spc="200" kern="0" dirty="0">
                 <a:solidFill>
-                  <a:srgbClr val="C97B68"/>
+                  <a:srgbClr val="9C5446"/>
                 </a:solidFill>
                 <a:latin typeface="メイリオ" pitchFamily="34" charset="0"/>
                 <a:ea typeface="メイリオ" pitchFamily="34" charset="-122"/>
@@ -2760,7 +2671,7 @@
             <a:r>
               <a:rPr lang="en-US" sz="1400" b="1" spc="200" kern="0" dirty="0">
                 <a:solidFill>
-                  <a:srgbClr val="93AC93"/>
+                  <a:srgbClr val="5E7060"/>
                 </a:solidFill>
                 <a:latin typeface="メイリオ" pitchFamily="34" charset="0"/>
                 <a:ea typeface="メイリオ" pitchFamily="34" charset="-122"/>
@@ -2787,7 +2698,7 @@
             <a:avLst/>
           </a:prstGeom>
           <a:solidFill>
-            <a:srgbClr val="4A423A"/>
+            <a:srgbClr val="D2C4AE"/>
           </a:solidFill>
           <a:ln/>
         </p:spPr>
@@ -2807,7 +2718,7 @@
             <a:avLst/>
           </a:prstGeom>
           <a:solidFill>
-            <a:srgbClr val="4A423A"/>
+            <a:srgbClr val="D2C4AE"/>
           </a:solidFill>
           <a:ln/>
         </p:spPr>
@@ -2842,7 +2753,7 @@
             <a:r>
               <a:rPr lang="en-US" sz="1700" b="1" dirty="0">
                 <a:solidFill>
-                  <a:srgbClr val="C97B68"/>
+                  <a:srgbClr val="9C5446"/>
                 </a:solidFill>
                 <a:latin typeface="メイリオ" pitchFamily="34" charset="0"/>
                 <a:ea typeface="メイリオ" pitchFamily="34" charset="-122"/>
@@ -2859,7 +2770,7 @@
             <a:r>
               <a:rPr lang="en-US" sz="1400" dirty="0">
                 <a:solidFill>
-                  <a:srgbClr val="F3ECE0"/>
+                  <a:srgbClr val="2B2620"/>
                 </a:solidFill>
                 <a:latin typeface="メイリオ" pitchFamily="34" charset="0"/>
                 <a:ea typeface="メイリオ" pitchFamily="34" charset="-122"/>
@@ -2901,7 +2812,7 @@
             <a:r>
               <a:rPr lang="en-US" sz="1400" b="1" dirty="0">
                 <a:solidFill>
-                  <a:srgbClr val="F3ECE0"/>
+                  <a:srgbClr val="2B2620"/>
                 </a:solidFill>
                 <a:latin typeface="メイリオ" pitchFamily="34" charset="0"/>
                 <a:ea typeface="メイリオ" pitchFamily="34" charset="-122"/>
@@ -2918,7 +2829,7 @@
             <a:r>
               <a:rPr lang="en-US" sz="1400" dirty="0">
                 <a:solidFill>
-                  <a:srgbClr val="BDB2A2"/>
+                  <a:srgbClr val="5A5249"/>
                 </a:solidFill>
                 <a:latin typeface="メイリオ" pitchFamily="34" charset="0"/>
                 <a:ea typeface="メイリオ" pitchFamily="34" charset="-122"/>
@@ -2945,7 +2856,7 @@
             <a:avLst/>
           </a:prstGeom>
           <a:solidFill>
-            <a:srgbClr val="4A423A"/>
+            <a:srgbClr val="D2C4AE"/>
           </a:solidFill>
           <a:ln/>
         </p:spPr>
@@ -2965,7 +2876,7 @@
             <a:avLst/>
           </a:prstGeom>
           <a:solidFill>
-            <a:srgbClr val="4A423A"/>
+            <a:srgbClr val="D2C4AE"/>
           </a:solidFill>
           <a:ln/>
         </p:spPr>
@@ -3000,7 +2911,7 @@
             <a:r>
               <a:rPr lang="en-US" sz="1700" b="1" dirty="0">
                 <a:solidFill>
-                  <a:srgbClr val="C97B68"/>
+                  <a:srgbClr val="9C5446"/>
                 </a:solidFill>
                 <a:latin typeface="メイリオ" pitchFamily="34" charset="0"/>
                 <a:ea typeface="メイリオ" pitchFamily="34" charset="-122"/>
@@ -3017,7 +2928,7 @@
             <a:r>
               <a:rPr lang="en-US" sz="1400" dirty="0">
                 <a:solidFill>
-                  <a:srgbClr val="F3ECE0"/>
+                  <a:srgbClr val="2B2620"/>
                 </a:solidFill>
                 <a:latin typeface="メイリオ" pitchFamily="34" charset="0"/>
                 <a:ea typeface="メイリオ" pitchFamily="34" charset="-122"/>
@@ -3059,7 +2970,7 @@
             <a:r>
               <a:rPr lang="en-US" sz="1400" b="1" dirty="0">
                 <a:solidFill>
-                  <a:srgbClr val="F3ECE0"/>
+                  <a:srgbClr val="2B2620"/>
                 </a:solidFill>
                 <a:latin typeface="メイリオ" pitchFamily="34" charset="0"/>
                 <a:ea typeface="メイリオ" pitchFamily="34" charset="-122"/>
@@ -3076,7 +2987,7 @@
             <a:r>
               <a:rPr lang="en-US" sz="1400" dirty="0">
                 <a:solidFill>
-                  <a:srgbClr val="BDB2A2"/>
+                  <a:srgbClr val="5A5249"/>
                 </a:solidFill>
                 <a:latin typeface="メイリオ" pitchFamily="34" charset="0"/>
                 <a:ea typeface="メイリオ" pitchFamily="34" charset="-122"/>
@@ -3103,7 +3014,7 @@
             <a:avLst/>
           </a:prstGeom>
           <a:solidFill>
-            <a:srgbClr val="4A423A"/>
+            <a:srgbClr val="D2C4AE"/>
           </a:solidFill>
           <a:ln/>
         </p:spPr>
@@ -3123,7 +3034,7 @@
             <a:avLst/>
           </a:prstGeom>
           <a:solidFill>
-            <a:srgbClr val="4A423A"/>
+            <a:srgbClr val="D2C4AE"/>
           </a:solidFill>
           <a:ln/>
         </p:spPr>
@@ -3158,7 +3069,7 @@
             <a:r>
               <a:rPr lang="en-US" sz="1700" b="1" dirty="0">
                 <a:solidFill>
-                  <a:srgbClr val="C97B68"/>
+                  <a:srgbClr val="9C5446"/>
                 </a:solidFill>
                 <a:latin typeface="メイリオ" pitchFamily="34" charset="0"/>
                 <a:ea typeface="メイリオ" pitchFamily="34" charset="-122"/>
@@ -3175,7 +3086,7 @@
             <a:r>
               <a:rPr lang="en-US" sz="1400" dirty="0">
                 <a:solidFill>
-                  <a:srgbClr val="F3ECE0"/>
+                  <a:srgbClr val="2B2620"/>
                 </a:solidFill>
                 <a:latin typeface="メイリオ" pitchFamily="34" charset="0"/>
                 <a:ea typeface="メイリオ" pitchFamily="34" charset="-122"/>
@@ -3217,7 +3128,7 @@
             <a:r>
               <a:rPr lang="en-US" sz="1400" b="1" dirty="0">
                 <a:solidFill>
-                  <a:srgbClr val="F3ECE0"/>
+                  <a:srgbClr val="2B2620"/>
                 </a:solidFill>
                 <a:latin typeface="メイリオ" pitchFamily="34" charset="0"/>
                 <a:ea typeface="メイリオ" pitchFamily="34" charset="-122"/>
@@ -3234,7 +3145,7 @@
             <a:r>
               <a:rPr lang="en-US" sz="1400" dirty="0">
                 <a:solidFill>
-                  <a:srgbClr val="BDB2A2"/>
+                  <a:srgbClr val="5A5249"/>
                 </a:solidFill>
                 <a:latin typeface="メイリオ" pitchFamily="34" charset="0"/>
                 <a:ea typeface="メイリオ" pitchFamily="34" charset="-122"/>
@@ -3273,7 +3184,7 @@
             <a:r>
               <a:rPr lang="en-US" sz="2400" b="1" dirty="0">
                 <a:solidFill>
-                  <a:srgbClr val="C97B68"/>
+                  <a:srgbClr val="9C5446"/>
                 </a:solidFill>
                 <a:latin typeface="メイリオ" pitchFamily="34" charset="0"/>
                 <a:ea typeface="メイリオ" pitchFamily="34" charset="-122"/>
@@ -3312,7 +3223,7 @@
             <a:r>
               <a:rPr lang="en-US" sz="1100" dirty="0">
                 <a:solidFill>
-                  <a:srgbClr val="BDB2A2"/>
+                  <a:srgbClr val="5A5249"/>
                 </a:solidFill>
                 <a:latin typeface="メイリオ" pitchFamily="34" charset="0"/>
                 <a:ea typeface="メイリオ" pitchFamily="34" charset="-122"/>
@@ -3351,7 +3262,7 @@
             <a:r>
               <a:rPr lang="en-US" sz="1200" spc="100" kern="0" dirty="0">
                 <a:solidFill>
-                  <a:srgbClr val="BDB2A2"/>
+                  <a:srgbClr val="8B8175"/>
                 </a:solidFill>
                 <a:latin typeface="メイリオ" pitchFamily="34" charset="0"/>
                 <a:ea typeface="メイリオ" pitchFamily="34" charset="-122"/>
@@ -3390,13 +3301,13 @@
             <a:r>
               <a:rPr lang="en-US" sz="1200" dirty="0">
                 <a:solidFill>
-                  <a:srgbClr val="BDB2A2"/>
-                </a:solidFill>
-                <a:latin typeface="メイリオ" pitchFamily="34" charset="0"/>
-                <a:ea typeface="メイリオ" pitchFamily="34" charset="-122"/>
-                <a:cs typeface="メイリオ" pitchFamily="34" charset="-120"/>
-              </a:rPr>
-              <a:t>5:20 → 6:05</a:t>
+                  <a:srgbClr val="8B8175"/>
+                </a:solidFill>
+                <a:latin typeface="メイリオ" pitchFamily="34" charset="0"/>
+                <a:ea typeface="メイリオ" pitchFamily="34" charset="-122"/>
+                <a:cs typeface="メイリオ" pitchFamily="34" charset="-120"/>
+              </a:rPr>
+              <a:t>4:55 → 5:35</a:t>
             </a:r>
             <a:endParaRPr lang="en-US" sz="1200" dirty="0"/>
           </a:p>
@@ -3501,7 +3412,7 @@
                 <a:ea typeface="メイリオ" pitchFamily="34" charset="-122"/>
                 <a:cs typeface="メイリオ" pitchFamily="34" charset="-120"/>
               </a:rPr>
-              <a:t>PLAN</a:t>
+              <a:t>ASK</a:t>
             </a:r>
             <a:endParaRPr lang="en-US" sz="1400" dirty="0"/>
           </a:p>
@@ -3540,7 +3451,7 @@
                 <a:ea typeface="メイリオ" pitchFamily="34" charset="-122"/>
                 <a:cs typeface="メイリオ" pitchFamily="34" charset="-120"/>
               </a:rPr>
-              <a:t>まずPhase 0。つくる前の合意をつくります</a:t>
+              <a:t>だから、ディスカッションしたいと感じました</a:t>
             </a:r>
             <a:endParaRPr lang="en-US" sz="2800" dirty="0"/>
           </a:p>
@@ -3554,28 +3465,63 @@
         </p:nvSpPr>
         <p:spPr>
           <a:xfrm>
-            <a:off x="685800" y="1874520"/>
-            <a:ext cx="6675120" cy="3840480"/>
-          </a:xfrm>
-          <a:prstGeom prst="rect">
-            <a:avLst/>
-          </a:prstGeom>
-          <a:noFill/>
-          <a:ln/>
-        </p:spPr>
-        <p:txBody>
-          <a:bodyPr wrap="square" lIns="0" tIns="0" rIns="0" bIns="0" rtlCol="0" anchor="t"/>
-          <a:lstStyle/>
-          <a:p>
-            <a:pPr marL="342900" indent="-342900">
-              <a:lnSpc>
-                <a:spcPts val="2400"/>
-              </a:lnSpc>
-              <a:buSzPct val="100000"/>
-              <a:buChar char="•"/>
-            </a:pPr>
-            <a:r>
-              <a:rPr lang="en-US" sz="1400" b="1" dirty="0">
+            <a:off x="685800" y="1783080"/>
+            <a:ext cx="548640" cy="365760"/>
+          </a:xfrm>
+          <a:prstGeom prst="rect">
+            <a:avLst/>
+          </a:prstGeom>
+          <a:noFill/>
+          <a:ln/>
+        </p:spPr>
+        <p:txBody>
+          <a:bodyPr wrap="square" lIns="0" tIns="0" rIns="0" bIns="0" rtlCol="0" anchor="ctr"/>
+          <a:lstStyle/>
+          <a:p>
+            <a:pPr indent="0" marL="0">
+              <a:buNone/>
+            </a:pPr>
+            <a:r>
+              <a:rPr lang="en-US" sz="1800" b="1" dirty="0">
+                <a:solidFill>
+                  <a:srgbClr val="9C5446"/>
+                </a:solidFill>
+                <a:latin typeface="メイリオ" pitchFamily="34" charset="0"/>
+                <a:ea typeface="メイリオ" pitchFamily="34" charset="-122"/>
+                <a:cs typeface="メイリオ" pitchFamily="34" charset="-120"/>
+              </a:rPr>
+              <a:t>01</a:t>
+            </a:r>
+            <a:endParaRPr lang="en-US" sz="1800" dirty="0"/>
+          </a:p>
+        </p:txBody>
+      </p:sp>
+      <p:sp>
+        <p:nvSpPr>
+          <p:cNvPr id="6" name="Text 4"/>
+          <p:cNvSpPr txBox="1"/>
+          <p:nvPr/>
+        </p:nvSpPr>
+        <p:spPr>
+          <a:xfrm>
+            <a:off x="1371600" y="1764792"/>
+            <a:ext cx="10058400" cy="329184"/>
+          </a:xfrm>
+          <a:prstGeom prst="rect">
+            <a:avLst/>
+          </a:prstGeom>
+          <a:noFill/>
+          <a:ln/>
+        </p:spPr>
+        <p:txBody>
+          <a:bodyPr wrap="square" lIns="0" tIns="0" rIns="0" bIns="0" rtlCol="0" anchor="ctr"/>
+          <a:lstStyle/>
+          <a:p>
+            <a:pPr indent="0" marL="0">
+              <a:buNone/>
+            </a:pPr>
+            <a:r>
+              <a:rPr lang="en-US" sz="1600" b="1" dirty="0">
                 <a:solidFill>
                   <a:srgbClr val="2B2620"/>
                 </a:solidFill>
@@ -3583,12 +3529,34 @@
                 <a:ea typeface="メイリオ" pitchFamily="34" charset="-122"/>
                 <a:cs typeface="メイリオ" pitchFamily="34" charset="-120"/>
               </a:rPr>
-              <a:t>Phase 0（3か月）　</a:t>
-            </a:r>
-            <a:pPr indent="0" marL="0">
-              <a:lnSpc>
-                <a:spcPts val="2400"/>
-              </a:lnSpc>
+              <a:t>未病領域の新規事業を、共同でディスカッションさせてください</a:t>
+            </a:r>
+            <a:endParaRPr lang="en-US" sz="1600" dirty="0"/>
+          </a:p>
+        </p:txBody>
+      </p:sp>
+      <p:sp>
+        <p:nvSpPr>
+          <p:cNvPr id="7" name="Text 5"/>
+          <p:cNvSpPr txBox="1"/>
+          <p:nvPr/>
+        </p:nvSpPr>
+        <p:spPr>
+          <a:xfrm>
+            <a:off x="1371600" y="2112264"/>
+            <a:ext cx="10058400" cy="329184"/>
+          </a:xfrm>
+          <a:prstGeom prst="rect">
+            <a:avLst/>
+          </a:prstGeom>
+          <a:noFill/>
+          <a:ln/>
+        </p:spPr>
+        <p:txBody>
+          <a:bodyPr wrap="square" lIns="0" tIns="0" rIns="0" bIns="0" rtlCol="0" anchor="ctr"/>
+          <a:lstStyle/>
+          <a:p>
+            <a:pPr indent="0" marL="0">
               <a:buNone/>
             </a:pPr>
             <a:r>
@@ -3600,16 +3568,97 @@
                 <a:ea typeface="メイリオ" pitchFamily="34" charset="-122"/>
                 <a:cs typeface="メイリオ" pitchFamily="34" charset="-120"/>
               </a:rPr>
-              <a:t>成果物はコードではなく、</a:t>
-            </a:r>
-            <a:pPr indent="0" marL="0">
-              <a:lnSpc>
-                <a:spcPts val="2400"/>
-              </a:lnSpc>
-              <a:buNone/>
-            </a:pPr>
-            <a:r>
-              <a:rPr lang="en-US" sz="1400" b="1" dirty="0">
+              <a:t>未病領域に小さいながら関わるなかで、ターゲットと課題を実感し、データ化しています。</a:t>
+            </a:r>
+            <a:endParaRPr lang="en-US" sz="1400" dirty="0"/>
+          </a:p>
+        </p:txBody>
+      </p:sp>
+      <p:sp>
+        <p:nvSpPr>
+          <p:cNvPr id="8" name="Shape 6"/>
+          <p:cNvSpPr/>
+          <p:nvPr/>
+        </p:nvSpPr>
+        <p:spPr>
+          <a:xfrm>
+            <a:off x="685800" y="2551176"/>
+            <a:ext cx="10820095" cy="7315"/>
+          </a:xfrm>
+          <a:prstGeom prst="rect">
+            <a:avLst/>
+          </a:prstGeom>
+          <a:solidFill>
+            <a:srgbClr val="D2C4AE"/>
+          </a:solidFill>
+          <a:ln/>
+        </p:spPr>
+      </p:sp>
+      <p:sp>
+        <p:nvSpPr>
+          <p:cNvPr id="9" name="Text 7"/>
+          <p:cNvSpPr txBox="1"/>
+          <p:nvPr/>
+        </p:nvSpPr>
+        <p:spPr>
+          <a:xfrm>
+            <a:off x="685800" y="2697480"/>
+            <a:ext cx="548640" cy="365760"/>
+          </a:xfrm>
+          <a:prstGeom prst="rect">
+            <a:avLst/>
+          </a:prstGeom>
+          <a:noFill/>
+          <a:ln/>
+        </p:spPr>
+        <p:txBody>
+          <a:bodyPr wrap="square" lIns="0" tIns="0" rIns="0" bIns="0" rtlCol="0" anchor="ctr"/>
+          <a:lstStyle/>
+          <a:p>
+            <a:pPr indent="0" marL="0">
+              <a:buNone/>
+            </a:pPr>
+            <a:r>
+              <a:rPr lang="en-US" sz="1800" b="1" dirty="0">
+                <a:solidFill>
+                  <a:srgbClr val="9C5446"/>
+                </a:solidFill>
+                <a:latin typeface="メイリオ" pitchFamily="34" charset="0"/>
+                <a:ea typeface="メイリオ" pitchFamily="34" charset="-122"/>
+                <a:cs typeface="メイリオ" pitchFamily="34" charset="-120"/>
+              </a:rPr>
+              <a:t>02</a:t>
+            </a:r>
+            <a:endParaRPr lang="en-US" sz="1800" dirty="0"/>
+          </a:p>
+        </p:txBody>
+      </p:sp>
+      <p:sp>
+        <p:nvSpPr>
+          <p:cNvPr id="10" name="Text 8"/>
+          <p:cNvSpPr txBox="1"/>
+          <p:nvPr/>
+        </p:nvSpPr>
+        <p:spPr>
+          <a:xfrm>
+            <a:off x="1371600" y="2679192"/>
+            <a:ext cx="10058400" cy="329184"/>
+          </a:xfrm>
+          <a:prstGeom prst="rect">
+            <a:avLst/>
+          </a:prstGeom>
+          <a:noFill/>
+          <a:ln/>
+        </p:spPr>
+        <p:txBody>
+          <a:bodyPr wrap="square" lIns="0" tIns="0" rIns="0" bIns="0" rtlCol="0" anchor="ctr"/>
+          <a:lstStyle/>
+          <a:p>
+            <a:pPr indent="0" marL="0">
+              <a:buNone/>
+            </a:pPr>
+            <a:r>
+              <a:rPr lang="en-US" sz="1600" b="1" dirty="0">
                 <a:solidFill>
                   <a:srgbClr val="2B2620"/>
                 </a:solidFill>
@@ -3617,15 +3666,34 @@
                 <a:ea typeface="メイリオ" pitchFamily="34" charset="-122"/>
                 <a:cs typeface="メイリオ" pitchFamily="34" charset="-120"/>
               </a:rPr>
-              <a:t>社内実証の実施合意と、法務・倫理ラインの確定</a:t>
-            </a:r>
-            <a:pPr indent="0" marL="0">
-              <a:lnSpc>
-                <a:spcPts val="2400"/>
-              </a:lnSpc>
-              <a:spcAft>
-                <a:spcPts val="1000"/>
-              </a:spcAft>
+              <a:t>人と組織の知見をお借りしたい</a:t>
+            </a:r>
+            <a:endParaRPr lang="en-US" sz="1600" dirty="0"/>
+          </a:p>
+        </p:txBody>
+      </p:sp>
+      <p:sp>
+        <p:nvSpPr>
+          <p:cNvPr id="11" name="Text 9"/>
+          <p:cNvSpPr txBox="1"/>
+          <p:nvPr/>
+        </p:nvSpPr>
+        <p:spPr>
+          <a:xfrm>
+            <a:off x="1371600" y="3026664"/>
+            <a:ext cx="10058400" cy="329184"/>
+          </a:xfrm>
+          <a:prstGeom prst="rect">
+            <a:avLst/>
+          </a:prstGeom>
+          <a:noFill/>
+          <a:ln/>
+        </p:spPr>
+        <p:txBody>
+          <a:bodyPr wrap="square" lIns="0" tIns="0" rIns="0" bIns="0" rtlCol="0" anchor="ctr"/>
+          <a:lstStyle/>
+          <a:p>
+            <a:pPr indent="0" marL="0">
               <a:buNone/>
             </a:pPr>
             <a:r>
@@ -3637,20 +3705,97 @@
                 <a:ea typeface="メイリオ" pitchFamily="34" charset="-122"/>
                 <a:cs typeface="メイリオ" pitchFamily="34" charset="-120"/>
               </a:rPr>
-              <a:t>です。記録12項目と文言ガイドもここで固めます。</a:t>
+              <a:t>施術者の採用・育成・配置。属人から仕組みへ移すために必要です。</a:t>
             </a:r>
             <a:endParaRPr lang="en-US" sz="1400" dirty="0"/>
           </a:p>
-          <a:p>
-            <a:pPr marL="342900" indent="-342900">
-              <a:lnSpc>
-                <a:spcPts val="2400"/>
-              </a:lnSpc>
-              <a:buSzPct val="100000"/>
-              <a:buChar char="•"/>
-            </a:pPr>
-            <a:r>
-              <a:rPr lang="en-US" sz="1400" b="1" dirty="0">
+        </p:txBody>
+      </p:sp>
+      <p:sp>
+        <p:nvSpPr>
+          <p:cNvPr id="12" name="Shape 10"/>
+          <p:cNvSpPr/>
+          <p:nvPr/>
+        </p:nvSpPr>
+        <p:spPr>
+          <a:xfrm>
+            <a:off x="685800" y="3465576"/>
+            <a:ext cx="10820095" cy="7315"/>
+          </a:xfrm>
+          <a:prstGeom prst="rect">
+            <a:avLst/>
+          </a:prstGeom>
+          <a:solidFill>
+            <a:srgbClr val="D2C4AE"/>
+          </a:solidFill>
+          <a:ln/>
+        </p:spPr>
+      </p:sp>
+      <p:sp>
+        <p:nvSpPr>
+          <p:cNvPr id="13" name="Text 11"/>
+          <p:cNvSpPr txBox="1"/>
+          <p:nvPr/>
+        </p:nvSpPr>
+        <p:spPr>
+          <a:xfrm>
+            <a:off x="685800" y="3611880"/>
+            <a:ext cx="548640" cy="365760"/>
+          </a:xfrm>
+          <a:prstGeom prst="rect">
+            <a:avLst/>
+          </a:prstGeom>
+          <a:noFill/>
+          <a:ln/>
+        </p:spPr>
+        <p:txBody>
+          <a:bodyPr wrap="square" lIns="0" tIns="0" rIns="0" bIns="0" rtlCol="0" anchor="ctr"/>
+          <a:lstStyle/>
+          <a:p>
+            <a:pPr indent="0" marL="0">
+              <a:buNone/>
+            </a:pPr>
+            <a:r>
+              <a:rPr lang="en-US" sz="1800" b="1" dirty="0">
+                <a:solidFill>
+                  <a:srgbClr val="9C5446"/>
+                </a:solidFill>
+                <a:latin typeface="メイリオ" pitchFamily="34" charset="0"/>
+                <a:ea typeface="メイリオ" pitchFamily="34" charset="-122"/>
+                <a:cs typeface="メイリオ" pitchFamily="34" charset="-120"/>
+              </a:rPr>
+              <a:t>03</a:t>
+            </a:r>
+            <a:endParaRPr lang="en-US" sz="1800" dirty="0"/>
+          </a:p>
+        </p:txBody>
+      </p:sp>
+      <p:sp>
+        <p:nvSpPr>
+          <p:cNvPr id="14" name="Text 12"/>
+          <p:cNvSpPr txBox="1"/>
+          <p:nvPr/>
+        </p:nvSpPr>
+        <p:spPr>
+          <a:xfrm>
+            <a:off x="1371600" y="3593592"/>
+            <a:ext cx="10058400" cy="329184"/>
+          </a:xfrm>
+          <a:prstGeom prst="rect">
+            <a:avLst/>
+          </a:prstGeom>
+          <a:noFill/>
+          <a:ln/>
+        </p:spPr>
+        <p:txBody>
+          <a:bodyPr wrap="square" lIns="0" tIns="0" rIns="0" bIns="0" rtlCol="0" anchor="ctr"/>
+          <a:lstStyle/>
+          <a:p>
+            <a:pPr indent="0" marL="0">
+              <a:buNone/>
+            </a:pPr>
+            <a:r>
+              <a:rPr lang="en-US" sz="1600" b="1" dirty="0">
                 <a:solidFill>
                   <a:srgbClr val="2B2620"/>
                 </a:solidFill>
@@ -3658,12 +3803,34 @@
                 <a:ea typeface="メイリオ" pitchFamily="34" charset="-122"/>
                 <a:cs typeface="メイリオ" pitchFamily="34" charset="-120"/>
               </a:rPr>
-              <a:t>Phase 1（4〜6か月）　</a:t>
-            </a:r>
-            <a:pPr indent="0" marL="0">
-              <a:lnSpc>
-                <a:spcPts val="2400"/>
-              </a:lnSpc>
+              <a:t>実証の場をご一緒したい</a:t>
+            </a:r>
+            <a:endParaRPr lang="en-US" sz="1600" dirty="0"/>
+          </a:p>
+        </p:txBody>
+      </p:sp>
+      <p:sp>
+        <p:nvSpPr>
+          <p:cNvPr id="15" name="Text 13"/>
+          <p:cNvSpPr txBox="1"/>
+          <p:nvPr/>
+        </p:nvSpPr>
+        <p:spPr>
+          <a:xfrm>
+            <a:off x="1371600" y="3941064"/>
+            <a:ext cx="10058400" cy="329184"/>
+          </a:xfrm>
+          <a:prstGeom prst="rect">
+            <a:avLst/>
+          </a:prstGeom>
+          <a:noFill/>
+          <a:ln/>
+        </p:spPr>
+        <p:txBody>
+          <a:bodyPr wrap="square" lIns="0" tIns="0" rIns="0" bIns="0" rtlCol="0" anchor="ctr"/>
+          <a:lstStyle/>
+          <a:p>
+            <a:pPr indent="0" marL="0">
               <a:buNone/>
             </a:pPr>
             <a:r>
@@ -3675,108 +3842,30 @@
                 <a:ea typeface="メイリオ" pitchFamily="34" charset="-122"/>
                 <a:cs typeface="メイリオ" pitchFamily="34" charset="-120"/>
               </a:rPr>
-              <a:t>御社従業員300名で社内実証。テスト環境は無料枠のみで組むため、</a:t>
-            </a:r>
-            <a:pPr indent="0" marL="0">
-              <a:lnSpc>
-                <a:spcPts val="2400"/>
-              </a:lnSpc>
-              <a:buNone/>
-            </a:pPr>
-            <a:r>
-              <a:rPr lang="en-US" sz="1400" b="1" dirty="0">
-                <a:solidFill>
-                  <a:srgbClr val="2B2620"/>
-                </a:solidFill>
-                <a:latin typeface="メイリオ" pitchFamily="34" charset="0"/>
-                <a:ea typeface="メイリオ" pitchFamily="34" charset="-122"/>
-                <a:cs typeface="メイリオ" pitchFamily="34" charset="-120"/>
-              </a:rPr>
-              <a:t>この段階のインフラ費は0円</a:t>
-            </a:r>
-            <a:pPr indent="0" marL="0">
-              <a:lnSpc>
-                <a:spcPts val="2400"/>
-              </a:lnSpc>
-              <a:spcAft>
-                <a:spcPts val="1000"/>
-              </a:spcAft>
-              <a:buNone/>
-            </a:pPr>
-            <a:r>
-              <a:rPr lang="en-US" sz="1400" dirty="0">
-                <a:solidFill>
-                  <a:srgbClr val="5A5249"/>
-                </a:solidFill>
-                <a:latin typeface="メイリオ" pitchFamily="34" charset="0"/>
-                <a:ea typeface="メイリオ" pitchFamily="34" charset="-122"/>
-                <a:cs typeface="メイリオ" pitchFamily="34" charset="-120"/>
-              </a:rPr>
-              <a:t>です。</a:t>
+              <a:t>法人向けの健康支援など、未病層に届く場で。効果は学会発表として残します。</a:t>
             </a:r>
             <a:endParaRPr lang="en-US" sz="1400" dirty="0"/>
           </a:p>
-          <a:p>
-            <a:pPr marL="342900" indent="-342900">
-              <a:lnSpc>
-                <a:spcPts val="2400"/>
-              </a:lnSpc>
-              <a:buSzPct val="100000"/>
-              <a:buChar char="•"/>
-            </a:pPr>
-            <a:r>
-              <a:rPr lang="en-US" sz="1400" b="1" dirty="0">
-                <a:solidFill>
-                  <a:srgbClr val="2B2620"/>
-                </a:solidFill>
-                <a:latin typeface="メイリオ" pitchFamily="34" charset="0"/>
-                <a:ea typeface="メイリオ" pitchFamily="34" charset="-122"/>
-                <a:cs typeface="メイリオ" pitchFamily="34" charset="-120"/>
-              </a:rPr>
-              <a:t>Phase 2以降　</a:t>
-            </a:r>
-            <a:pPr indent="0" marL="0">
-              <a:lnSpc>
-                <a:spcPts val="2400"/>
-              </a:lnSpc>
-              <a:spcAft>
-                <a:spcPts val="1000"/>
-              </a:spcAft>
-              <a:buNone/>
-            </a:pPr>
-            <a:r>
-              <a:rPr lang="en-US" sz="1400" dirty="0">
-                <a:solidFill>
-                  <a:srgbClr val="5A5249"/>
-                </a:solidFill>
-                <a:latin typeface="メイリオ" pitchFamily="34" charset="0"/>
-                <a:ea typeface="メイリオ" pitchFamily="34" charset="-122"/>
-                <a:cs typeface="メイリオ" pitchFamily="34" charset="-120"/>
-              </a:rPr>
-              <a:t>受託試験1件で実運用し、従来手法と記録の脱落率を比較。そこから外販に進みます。</a:t>
-            </a:r>
-            <a:endParaRPr lang="en-US" sz="1400" dirty="0"/>
-          </a:p>
-        </p:txBody>
-      </p:sp>
-      <p:sp>
-        <p:nvSpPr>
-          <p:cNvPr id="6" name="Shape 4"/>
+        </p:txBody>
+      </p:sp>
+      <p:sp>
+        <p:nvSpPr>
+          <p:cNvPr id="16" name="Shape 14"/>
           <p:cNvSpPr/>
           <p:nvPr/>
         </p:nvSpPr>
         <p:spPr>
           <a:xfrm>
-            <a:off x="7726680" y="1874520"/>
-            <a:ext cx="3776472" cy="2286000"/>
+            <a:off x="685800" y="4572000"/>
+            <a:ext cx="10820095" cy="1325880"/>
           </a:xfrm>
           <a:prstGeom prst="roundRect">
             <a:avLst>
-              <a:gd name="adj" fmla="val 2000"/>
+              <a:gd name="adj" fmla="val 3448"/>
             </a:avLst>
           </a:prstGeom>
           <a:solidFill>
-            <a:srgbClr val="F3E3DE"/>
+            <a:srgbClr val="FBF6EC"/>
           </a:solidFill>
           <a:ln w="9525">
             <a:solidFill>
@@ -3788,30 +3877,30 @@
       </p:sp>
       <p:sp>
         <p:nvSpPr>
-          <p:cNvPr id="7" name="Text 5"/>
-          <p:cNvSpPr txBox="1"/>
-          <p:nvPr/>
-        </p:nvSpPr>
-        <p:spPr>
-          <a:xfrm>
-            <a:off x="7726680" y="2103120"/>
-            <a:ext cx="3776472" cy="274320"/>
-          </a:xfrm>
-          <a:prstGeom prst="rect">
-            <a:avLst/>
-          </a:prstGeom>
-          <a:noFill/>
-          <a:ln/>
-        </p:spPr>
-        <p:txBody>
-          <a:bodyPr wrap="square" lIns="0" tIns="0" rIns="0" bIns="0" rtlCol="0" anchor="ctr"/>
-          <a:lstStyle/>
-          <a:p>
-            <a:pPr algn="ctr" indent="0" marL="0">
-              <a:buNone/>
-            </a:pPr>
-            <a:r>
-              <a:rPr lang="en-US" sz="1400" b="1" spc="200" kern="0" dirty="0">
+          <p:cNvPr id="17" name="Text 15"/>
+          <p:cNvSpPr txBox="1"/>
+          <p:nvPr/>
+        </p:nvSpPr>
+        <p:spPr>
+          <a:xfrm>
+            <a:off x="960120" y="4773168"/>
+            <a:ext cx="10271455" cy="237744"/>
+          </a:xfrm>
+          <a:prstGeom prst="rect">
+            <a:avLst/>
+          </a:prstGeom>
+          <a:noFill/>
+          <a:ln/>
+        </p:spPr>
+        <p:txBody>
+          <a:bodyPr wrap="square" lIns="0" tIns="0" rIns="0" bIns="0" rtlCol="0" anchor="ctr"/>
+          <a:lstStyle/>
+          <a:p>
+            <a:pPr indent="0" marL="0">
+              <a:buNone/>
+            </a:pPr>
+            <a:r>
+              <a:rPr lang="en-US" sz="1200" b="1" spc="100" kern="0" dirty="0">
                 <a:solidFill>
                   <a:srgbClr val="9C5446"/>
                 </a:solidFill>
@@ -3819,7 +3908,66 @@
                 <a:ea typeface="メイリオ" pitchFamily="34" charset="-122"/>
                 <a:cs typeface="メイリオ" pitchFamily="34" charset="-120"/>
               </a:rPr>
-              <a:t>3年目 売上イメージ</a:t>
+              <a:t>本日お願いしたいこと</a:t>
+            </a:r>
+            <a:endParaRPr lang="en-US" sz="1200" dirty="0"/>
+          </a:p>
+        </p:txBody>
+      </p:sp>
+      <p:sp>
+        <p:nvSpPr>
+          <p:cNvPr id="18" name="Text 16"/>
+          <p:cNvSpPr txBox="1"/>
+          <p:nvPr/>
+        </p:nvSpPr>
+        <p:spPr>
+          <a:xfrm>
+            <a:off x="960120" y="5084064"/>
+            <a:ext cx="10271455" cy="594360"/>
+          </a:xfrm>
+          <a:prstGeom prst="rect">
+            <a:avLst/>
+          </a:prstGeom>
+          <a:noFill/>
+          <a:ln/>
+        </p:spPr>
+        <p:txBody>
+          <a:bodyPr wrap="square" lIns="0" tIns="0" rIns="0" bIns="0" rtlCol="0" anchor="t"/>
+          <a:lstStyle/>
+          <a:p>
+            <a:pPr indent="0" marL="0">
+              <a:lnSpc>
+                <a:spcPts val="1900"/>
+              </a:lnSpc>
+              <a:buNone/>
+            </a:pPr>
+            <a:r>
+              <a:rPr lang="en-US" sz="1400" dirty="0">
+                <a:solidFill>
+                  <a:srgbClr val="5A5249"/>
+                </a:solidFill>
+                <a:latin typeface="メイリオ" pitchFamily="34" charset="0"/>
+                <a:ea typeface="メイリオ" pitchFamily="34" charset="-122"/>
+                <a:cs typeface="メイリオ" pitchFamily="34" charset="-120"/>
+              </a:rPr>
+              <a:t>生きづらさを抱えた人を、治療が必要になる手前で減らしたい。</a:t>
+            </a:r>
+            <a:pPr indent="0" marL="0">
+              <a:lnSpc>
+                <a:spcPts val="1900"/>
+              </a:lnSpc>
+              <a:buNone/>
+            </a:pPr>
+            <a:r>
+              <a:rPr lang="en-US" sz="1400" b="1" dirty="0">
+                <a:solidFill>
+                  <a:srgbClr val="2B2620"/>
+                </a:solidFill>
+                <a:latin typeface="メイリオ" pitchFamily="34" charset="0"/>
+                <a:ea typeface="メイリオ" pitchFamily="34" charset="-122"/>
+                <a:cs typeface="メイリオ" pitchFamily="34" charset="-120"/>
+              </a:rPr>
+              <a:t>まずは本日、このうちどこに可能性がありそうか、率直なご意見をいただけたら嬉しいです。</a:t>
             </a:r>
             <a:endParaRPr lang="en-US" sz="1400" dirty="0"/>
           </a:p>
@@ -3827,102 +3975,7 @@
       </p:sp>
       <p:sp>
         <p:nvSpPr>
-          <p:cNvPr id="8" name="Text 6"/>
-          <p:cNvSpPr txBox="1"/>
-          <p:nvPr/>
-        </p:nvSpPr>
-        <p:spPr>
-          <a:xfrm>
-            <a:off x="7726680" y="2423160"/>
-            <a:ext cx="3776472" cy="731520"/>
-          </a:xfrm>
-          <a:prstGeom prst="rect">
-            <a:avLst/>
-          </a:prstGeom>
-          <a:noFill/>
-          <a:ln/>
-        </p:spPr>
-        <p:txBody>
-          <a:bodyPr wrap="square" lIns="0" tIns="0" rIns="0" bIns="0" rtlCol="0" anchor="ctr"/>
-          <a:lstStyle/>
-          <a:p>
-            <a:pPr algn="ctr" indent="0" marL="0">
-              <a:buNone/>
-            </a:pPr>
-            <a:r>
-              <a:rPr lang="en-US" sz="3200" b="1" dirty="0">
-                <a:solidFill>
-                  <a:srgbClr val="2B2620"/>
-                </a:solidFill>
-                <a:latin typeface="メイリオ" pitchFamily="34" charset="0"/>
-                <a:ea typeface="メイリオ" pitchFamily="34" charset="-122"/>
-                <a:cs typeface="メイリオ" pitchFamily="34" charset="-120"/>
-              </a:rPr>
-              <a:t>約1.6</a:t>
-            </a:r>
-            <a:pPr algn="ctr" indent="0" marL="0">
-              <a:buNone/>
-            </a:pPr>
-            <a:r>
-              <a:rPr lang="en-US" sz="1800" b="1" dirty="0">
-                <a:solidFill>
-                  <a:srgbClr val="2B2620"/>
-                </a:solidFill>
-                <a:latin typeface="メイリオ" pitchFamily="34" charset="0"/>
-                <a:ea typeface="メイリオ" pitchFamily="34" charset="-122"/>
-                <a:cs typeface="メイリオ" pitchFamily="34" charset="-120"/>
-              </a:rPr>
-              <a:t>億円</a:t>
-            </a:r>
-            <a:endParaRPr lang="en-US" sz="3200" dirty="0"/>
-          </a:p>
-        </p:txBody>
-      </p:sp>
-      <p:sp>
-        <p:nvSpPr>
-          <p:cNvPr id="9" name="Text 7"/>
-          <p:cNvSpPr txBox="1"/>
-          <p:nvPr/>
-        </p:nvSpPr>
-        <p:spPr>
-          <a:xfrm>
-            <a:off x="8001000" y="3246120"/>
-            <a:ext cx="3227832" cy="777240"/>
-          </a:xfrm>
-          <a:prstGeom prst="rect">
-            <a:avLst/>
-          </a:prstGeom>
-          <a:noFill/>
-          <a:ln/>
-        </p:spPr>
-        <p:txBody>
-          <a:bodyPr wrap="square" lIns="0" tIns="0" rIns="0" bIns="0" rtlCol="0" anchor="t"/>
-          <a:lstStyle/>
-          <a:p>
-            <a:pPr algn="ctr" indent="0" marL="0">
-              <a:lnSpc>
-                <a:spcPts val="2000"/>
-              </a:lnSpc>
-              <a:buNone/>
-            </a:pPr>
-            <a:r>
-              <a:rPr lang="en-US" sz="1300" dirty="0">
-                <a:solidFill>
-                  <a:srgbClr val="5A5249"/>
-                </a:solidFill>
-                <a:latin typeface="メイリオ" pitchFamily="34" charset="0"/>
-                <a:ea typeface="メイリオ" pitchFamily="34" charset="-122"/>
-                <a:cs typeface="メイリオ" pitchFamily="34" charset="-120"/>
-              </a:rPr>
-              <a:t>うち約9,200万円は、既存のお客様への追加提案だけで届く範囲の試算です。</a:t>
-            </a:r>
-            <a:endParaRPr lang="en-US" sz="1300" dirty="0"/>
-          </a:p>
-        </p:txBody>
-      </p:sp>
-      <p:sp>
-        <p:nvSpPr>
-          <p:cNvPr id="10" name="Text 8"/>
+          <p:cNvPr id="19" name="Text 17"/>
           <p:cNvSpPr txBox="1"/>
           <p:nvPr/>
         </p:nvSpPr>
@@ -3961,7 +4014,7 @@
       </p:sp>
       <p:sp>
         <p:nvSpPr>
-          <p:cNvPr id="11" name="Text 9"/>
+          <p:cNvPr id="20" name="Text 18"/>
           <p:cNvSpPr txBox="1"/>
           <p:nvPr/>
         </p:nvSpPr>
@@ -3992,7 +4045,7 @@
                 <a:ea typeface="メイリオ" pitchFamily="34" charset="-122"/>
                 <a:cs typeface="メイリオ" pitchFamily="34" charset="-120"/>
               </a:rPr>
-              <a:t>6:05 → 6:40</a:t>
+              <a:t>5:35 → 6:00</a:t>
             </a:r>
             <a:endParaRPr lang="en-US" sz="1200" dirty="0"/>
           </a:p>
@@ -4075,20 +4128,6 @@
               <a:buNone/>
             </a:pPr>
             <a:r>
-              <a:rPr lang="en-US" sz="1400" b="1" spc="200" kern="0" dirty="0">
-                <a:solidFill>
-                  <a:srgbClr val="9C5446"/>
-                </a:solidFill>
-                <a:latin typeface="メイリオ" pitchFamily="34" charset="0"/>
-                <a:ea typeface="メイリオ" pitchFamily="34" charset="-122"/>
-                <a:cs typeface="メイリオ" pitchFamily="34" charset="-120"/>
-              </a:rPr>
-              <a:t>11   </a:t>
-            </a:r>
-            <a:pPr indent="0" marL="0">
-              <a:buNone/>
-            </a:pPr>
-            <a:r>
               <a:rPr lang="en-US" sz="1400" spc="300" kern="0" dirty="0">
                 <a:solidFill>
                   <a:srgbClr val="8B8175"/>
@@ -4097,7 +4136,7 @@
                 <a:ea typeface="メイリオ" pitchFamily="34" charset="-122"/>
                 <a:cs typeface="メイリオ" pitchFamily="34" charset="-120"/>
               </a:rPr>
-              <a:t>ASK</a:t>
+              <a:t>APPENDIX ／ 参考</a:t>
             </a:r>
             <a:endParaRPr lang="en-US" sz="1400" dirty="0"/>
           </a:p>
@@ -4136,7 +4175,7 @@
                 <a:ea typeface="メイリオ" pitchFamily="34" charset="-122"/>
                 <a:cs typeface="メイリオ" pitchFamily="34" charset="-120"/>
               </a:rPr>
-              <a:t>だから、アポプラスステーション様と話したい</a:t>
+              <a:t>公開されている実績・共同研究</a:t>
             </a:r>
             <a:endParaRPr lang="en-US" sz="2800" dirty="0"/>
           </a:p>
@@ -4144,130 +4183,13 @@
       </p:sp>
       <p:sp>
         <p:nvSpPr>
-          <p:cNvPr id="5" name="Text 3"/>
-          <p:cNvSpPr txBox="1"/>
-          <p:nvPr/>
-        </p:nvSpPr>
-        <p:spPr>
-          <a:xfrm>
-            <a:off x="685800" y="1783080"/>
-            <a:ext cx="548640" cy="365760"/>
-          </a:xfrm>
-          <a:prstGeom prst="rect">
-            <a:avLst/>
-          </a:prstGeom>
-          <a:noFill/>
-          <a:ln/>
-        </p:spPr>
-        <p:txBody>
-          <a:bodyPr wrap="square" lIns="0" tIns="0" rIns="0" bIns="0" rtlCol="0" anchor="ctr"/>
-          <a:lstStyle/>
-          <a:p>
-            <a:pPr indent="0" marL="0">
-              <a:buNone/>
-            </a:pPr>
-            <a:r>
-              <a:rPr lang="en-US" sz="1800" b="1" dirty="0">
-                <a:solidFill>
-                  <a:srgbClr val="9C5446"/>
-                </a:solidFill>
-                <a:latin typeface="メイリオ" pitchFamily="34" charset="0"/>
-                <a:ea typeface="メイリオ" pitchFamily="34" charset="-122"/>
-                <a:cs typeface="メイリオ" pitchFamily="34" charset="-120"/>
-              </a:rPr>
-              <a:t>01</a:t>
-            </a:r>
-            <a:endParaRPr lang="en-US" sz="1800" dirty="0"/>
-          </a:p>
-        </p:txBody>
-      </p:sp>
-      <p:sp>
-        <p:nvSpPr>
-          <p:cNvPr id="6" name="Text 4"/>
-          <p:cNvSpPr txBox="1"/>
-          <p:nvPr/>
-        </p:nvSpPr>
-        <p:spPr>
-          <a:xfrm>
-            <a:off x="1371600" y="1764792"/>
-            <a:ext cx="10058400" cy="329184"/>
-          </a:xfrm>
-          <a:prstGeom prst="rect">
-            <a:avLst/>
-          </a:prstGeom>
-          <a:noFill/>
-          <a:ln/>
-        </p:spPr>
-        <p:txBody>
-          <a:bodyPr wrap="square" lIns="0" tIns="0" rIns="0" bIns="0" rtlCol="0" anchor="ctr"/>
-          <a:lstStyle/>
-          <a:p>
-            <a:pPr indent="0" marL="0">
-              <a:buNone/>
-            </a:pPr>
-            <a:r>
-              <a:rPr lang="en-US" sz="1600" b="1" dirty="0">
-                <a:solidFill>
-                  <a:srgbClr val="2B2620"/>
-                </a:solidFill>
-                <a:latin typeface="メイリオ" pitchFamily="34" charset="0"/>
-                <a:ea typeface="メイリオ" pitchFamily="34" charset="-122"/>
-                <a:cs typeface="メイリオ" pitchFamily="34" charset="-120"/>
-              </a:rPr>
-              <a:t>未病領域の新規事業を、共同で検討させてください</a:t>
-            </a:r>
-            <a:endParaRPr lang="en-US" sz="1600" dirty="0"/>
-          </a:p>
-        </p:txBody>
-      </p:sp>
-      <p:sp>
-        <p:nvSpPr>
-          <p:cNvPr id="7" name="Text 5"/>
-          <p:cNvSpPr txBox="1"/>
-          <p:nvPr/>
-        </p:nvSpPr>
-        <p:spPr>
-          <a:xfrm>
-            <a:off x="1371600" y="2112264"/>
-            <a:ext cx="10058400" cy="329184"/>
-          </a:xfrm>
-          <a:prstGeom prst="rect">
-            <a:avLst/>
-          </a:prstGeom>
-          <a:noFill/>
-          <a:ln/>
-        </p:spPr>
-        <p:txBody>
-          <a:bodyPr wrap="square" lIns="0" tIns="0" rIns="0" bIns="0" rtlCol="0" anchor="ctr"/>
-          <a:lstStyle/>
-          <a:p>
-            <a:pPr indent="0" marL="0">
-              <a:buNone/>
-            </a:pPr>
-            <a:r>
-              <a:rPr lang="en-US" sz="1400" dirty="0">
-                <a:solidFill>
-                  <a:srgbClr val="5A5249"/>
-                </a:solidFill>
-                <a:latin typeface="メイリオ" pitchFamily="34" charset="0"/>
-                <a:ea typeface="メイリオ" pitchFamily="34" charset="-122"/>
-                <a:cs typeface="メイリオ" pitchFamily="34" charset="-120"/>
-              </a:rPr>
-              <a:t>未病ノートのPhase 0を含め、サービス設計から実証までをご一緒に。</a:t>
-            </a:r>
-            <a:endParaRPr lang="en-US" sz="1400" dirty="0"/>
-          </a:p>
-        </p:txBody>
-      </p:sp>
-      <p:sp>
-        <p:nvSpPr>
-          <p:cNvPr id="8" name="Shape 6"/>
+          <p:cNvPr id="5" name="Shape 3"/>
           <p:cNvSpPr/>
           <p:nvPr/>
         </p:nvSpPr>
         <p:spPr>
           <a:xfrm>
-            <a:off x="685800" y="2551176"/>
+            <a:off x="685800" y="1627632"/>
             <a:ext cx="10820095" cy="7315"/>
           </a:xfrm>
           <a:prstGeom prst="rect">
@@ -4281,30 +4203,30 @@
       </p:sp>
       <p:sp>
         <p:nvSpPr>
-          <p:cNvPr id="9" name="Text 7"/>
-          <p:cNvSpPr txBox="1"/>
-          <p:nvPr/>
-        </p:nvSpPr>
-        <p:spPr>
-          <a:xfrm>
-            <a:off x="685800" y="2697480"/>
-            <a:ext cx="548640" cy="365760"/>
-          </a:xfrm>
-          <a:prstGeom prst="rect">
-            <a:avLst/>
-          </a:prstGeom>
-          <a:noFill/>
-          <a:ln/>
-        </p:spPr>
-        <p:txBody>
-          <a:bodyPr wrap="square" lIns="0" tIns="0" rIns="0" bIns="0" rtlCol="0" anchor="ctr"/>
-          <a:lstStyle/>
-          <a:p>
-            <a:pPr indent="0" marL="0">
-              <a:buNone/>
-            </a:pPr>
-            <a:r>
-              <a:rPr lang="en-US" sz="1800" b="1" dirty="0">
+          <p:cNvPr id="6" name="Text 4"/>
+          <p:cNvSpPr txBox="1"/>
+          <p:nvPr/>
+        </p:nvSpPr>
+        <p:spPr>
+          <a:xfrm>
+            <a:off x="685800" y="1755648"/>
+            <a:ext cx="1143000" cy="274320"/>
+          </a:xfrm>
+          <a:prstGeom prst="rect">
+            <a:avLst/>
+          </a:prstGeom>
+          <a:noFill/>
+          <a:ln/>
+        </p:spPr>
+        <p:txBody>
+          <a:bodyPr wrap="square" lIns="0" tIns="0" rIns="0" bIns="0" rtlCol="0" anchor="ctr"/>
+          <a:lstStyle/>
+          <a:p>
+            <a:pPr indent="0" marL="0">
+              <a:buNone/>
+            </a:pPr>
+            <a:r>
+              <a:rPr lang="en-US" sz="1400" b="1" spc="100" kern="0" dirty="0">
                 <a:solidFill>
                   <a:srgbClr val="9C5446"/>
                 </a:solidFill>
@@ -4312,38 +4234,38 @@
                 <a:ea typeface="メイリオ" pitchFamily="34" charset="-122"/>
                 <a:cs typeface="メイリオ" pitchFamily="34" charset="-120"/>
               </a:rPr>
-              <a:t>02</a:t>
-            </a:r>
-            <a:endParaRPr lang="en-US" sz="1800" dirty="0"/>
-          </a:p>
-        </p:txBody>
-      </p:sp>
-      <p:sp>
-        <p:nvSpPr>
-          <p:cNvPr id="10" name="Text 8"/>
-          <p:cNvSpPr txBox="1"/>
-          <p:nvPr/>
-        </p:nvSpPr>
-        <p:spPr>
-          <a:xfrm>
-            <a:off x="1371600" y="2679192"/>
-            <a:ext cx="10058400" cy="329184"/>
-          </a:xfrm>
-          <a:prstGeom prst="rect">
-            <a:avLst/>
-          </a:prstGeom>
-          <a:noFill/>
-          <a:ln/>
-        </p:spPr>
-        <p:txBody>
-          <a:bodyPr wrap="square" lIns="0" tIns="0" rIns="0" bIns="0" rtlCol="0" anchor="ctr"/>
-          <a:lstStyle/>
-          <a:p>
-            <a:pPr indent="0" marL="0">
-              <a:buNone/>
-            </a:pPr>
-            <a:r>
-              <a:rPr lang="en-US" sz="1600" b="1" dirty="0">
+              <a:t>共同研究</a:t>
+            </a:r>
+            <a:endParaRPr lang="en-US" sz="1400" dirty="0"/>
+          </a:p>
+        </p:txBody>
+      </p:sp>
+      <p:sp>
+        <p:nvSpPr>
+          <p:cNvPr id="7" name="Text 5"/>
+          <p:cNvSpPr txBox="1"/>
+          <p:nvPr/>
+        </p:nvSpPr>
+        <p:spPr>
+          <a:xfrm>
+            <a:off x="1828800" y="1719072"/>
+            <a:ext cx="9674352" cy="329184"/>
+          </a:xfrm>
+          <a:prstGeom prst="rect">
+            <a:avLst/>
+          </a:prstGeom>
+          <a:noFill/>
+          <a:ln/>
+        </p:spPr>
+        <p:txBody>
+          <a:bodyPr wrap="square" lIns="0" tIns="0" rIns="0" bIns="0" rtlCol="0" anchor="ctr"/>
+          <a:lstStyle/>
+          <a:p>
+            <a:pPr indent="0" marL="0">
+              <a:buNone/>
+            </a:pPr>
+            <a:r>
+              <a:rPr lang="en-US" sz="1400" dirty="0">
                 <a:solidFill>
                   <a:srgbClr val="2B2620"/>
                 </a:solidFill>
@@ -4351,46 +4273,7 @@
                 <a:ea typeface="メイリオ" pitchFamily="34" charset="-122"/>
                 <a:cs typeface="メイリオ" pitchFamily="34" charset="-120"/>
               </a:rPr>
-              <a:t>人と組織の知見をお借りしたい</a:t>
-            </a:r>
-            <a:endParaRPr lang="en-US" sz="1600" dirty="0"/>
-          </a:p>
-        </p:txBody>
-      </p:sp>
-      <p:sp>
-        <p:nvSpPr>
-          <p:cNvPr id="11" name="Text 9"/>
-          <p:cNvSpPr txBox="1"/>
-          <p:nvPr/>
-        </p:nvSpPr>
-        <p:spPr>
-          <a:xfrm>
-            <a:off x="1371600" y="3026664"/>
-            <a:ext cx="10058400" cy="329184"/>
-          </a:xfrm>
-          <a:prstGeom prst="rect">
-            <a:avLst/>
-          </a:prstGeom>
-          <a:noFill/>
-          <a:ln/>
-        </p:spPr>
-        <p:txBody>
-          <a:bodyPr wrap="square" lIns="0" tIns="0" rIns="0" bIns="0" rtlCol="0" anchor="ctr"/>
-          <a:lstStyle/>
-          <a:p>
-            <a:pPr indent="0" marL="0">
-              <a:buNone/>
-            </a:pPr>
-            <a:r>
-              <a:rPr lang="en-US" sz="1400" dirty="0">
-                <a:solidFill>
-                  <a:srgbClr val="5A5249"/>
-                </a:solidFill>
-                <a:latin typeface="メイリオ" pitchFamily="34" charset="0"/>
-                <a:ea typeface="メイリオ" pitchFamily="34" charset="-122"/>
-                <a:cs typeface="メイリオ" pitchFamily="34" charset="-120"/>
-              </a:rPr>
-              <a:t>施術者の採用・育成・配置。属人から仕組みへ移すために必要です。</a:t>
+              <a:t>開業鍼灸院でのメンタルヘルスの可能性を検証する共同研究</a:t>
             </a:r>
             <a:endParaRPr lang="en-US" sz="1400" dirty="0"/>
           </a:p>
@@ -4398,13 +4281,52 @@
       </p:sp>
       <p:sp>
         <p:nvSpPr>
-          <p:cNvPr id="12" name="Shape 10"/>
+          <p:cNvPr id="8" name="Text 6"/>
+          <p:cNvSpPr txBox="1"/>
+          <p:nvPr/>
+        </p:nvSpPr>
+        <p:spPr>
+          <a:xfrm>
+            <a:off x="1828800" y="2048256"/>
+            <a:ext cx="9674352" cy="274320"/>
+          </a:xfrm>
+          <a:prstGeom prst="rect">
+            <a:avLst/>
+          </a:prstGeom>
+          <a:noFill/>
+          <a:ln/>
+        </p:spPr>
+        <p:txBody>
+          <a:bodyPr wrap="square" lIns="0" tIns="0" rIns="0" bIns="0" rtlCol="0" anchor="ctr"/>
+          <a:lstStyle/>
+          <a:p>
+            <a:pPr indent="0" marL="0">
+              <a:buNone/>
+            </a:pPr>
+            <a:r>
+              <a:rPr lang="en-US" sz="1200" dirty="0">
+                <a:solidFill>
+                  <a:srgbClr val="8B8175"/>
+                </a:solidFill>
+                <a:latin typeface="メイリオ" pitchFamily="34" charset="0"/>
+                <a:ea typeface="メイリオ" pitchFamily="34" charset="-122"/>
+                <a:cs typeface="メイリオ" pitchFamily="34" charset="-120"/>
+              </a:rPr>
+              <a:t>ここちめいど／東京有明医療大学／理化学研究所／ケアクル　― PR TIMES</a:t>
+            </a:r>
+            <a:endParaRPr lang="en-US" sz="1200" dirty="0"/>
+          </a:p>
+        </p:txBody>
+      </p:sp>
+      <p:sp>
+        <p:nvSpPr>
+          <p:cNvPr id="9" name="Shape 7"/>
           <p:cNvSpPr/>
           <p:nvPr/>
         </p:nvSpPr>
         <p:spPr>
           <a:xfrm>
-            <a:off x="685800" y="3465576"/>
+            <a:off x="685800" y="2359152"/>
             <a:ext cx="10820095" cy="7315"/>
           </a:xfrm>
           <a:prstGeom prst="rect">
@@ -4418,30 +4340,30 @@
       </p:sp>
       <p:sp>
         <p:nvSpPr>
-          <p:cNvPr id="13" name="Text 11"/>
-          <p:cNvSpPr txBox="1"/>
-          <p:nvPr/>
-        </p:nvSpPr>
-        <p:spPr>
-          <a:xfrm>
-            <a:off x="685800" y="3611880"/>
-            <a:ext cx="548640" cy="365760"/>
-          </a:xfrm>
-          <a:prstGeom prst="rect">
-            <a:avLst/>
-          </a:prstGeom>
-          <a:noFill/>
-          <a:ln/>
-        </p:spPr>
-        <p:txBody>
-          <a:bodyPr wrap="square" lIns="0" tIns="0" rIns="0" bIns="0" rtlCol="0" anchor="ctr"/>
-          <a:lstStyle/>
-          <a:p>
-            <a:pPr indent="0" marL="0">
-              <a:buNone/>
-            </a:pPr>
-            <a:r>
-              <a:rPr lang="en-US" sz="1800" b="1" dirty="0">
+          <p:cNvPr id="10" name="Text 8"/>
+          <p:cNvSpPr txBox="1"/>
+          <p:nvPr/>
+        </p:nvSpPr>
+        <p:spPr>
+          <a:xfrm>
+            <a:off x="685800" y="2487168"/>
+            <a:ext cx="1143000" cy="274320"/>
+          </a:xfrm>
+          <a:prstGeom prst="rect">
+            <a:avLst/>
+          </a:prstGeom>
+          <a:noFill/>
+          <a:ln/>
+        </p:spPr>
+        <p:txBody>
+          <a:bodyPr wrap="square" lIns="0" tIns="0" rIns="0" bIns="0" rtlCol="0" anchor="ctr"/>
+          <a:lstStyle/>
+          <a:p>
+            <a:pPr indent="0" marL="0">
+              <a:buNone/>
+            </a:pPr>
+            <a:r>
+              <a:rPr lang="en-US" sz="1400" b="1" spc="100" kern="0" dirty="0">
                 <a:solidFill>
                   <a:srgbClr val="9C5446"/>
                 </a:solidFill>
@@ -4449,11 +4371,109 @@
                 <a:ea typeface="メイリオ" pitchFamily="34" charset="-122"/>
                 <a:cs typeface="メイリオ" pitchFamily="34" charset="-120"/>
               </a:rPr>
-              <a:t>03</a:t>
-            </a:r>
-            <a:endParaRPr lang="en-US" sz="1800" dirty="0"/>
-          </a:p>
-        </p:txBody>
+              <a:t>共同研究</a:t>
+            </a:r>
+            <a:endParaRPr lang="en-US" sz="1400" dirty="0"/>
+          </a:p>
+        </p:txBody>
+      </p:sp>
+      <p:sp>
+        <p:nvSpPr>
+          <p:cNvPr id="11" name="Text 9"/>
+          <p:cNvSpPr txBox="1"/>
+          <p:nvPr/>
+        </p:nvSpPr>
+        <p:spPr>
+          <a:xfrm>
+            <a:off x="1828800" y="2450592"/>
+            <a:ext cx="9674352" cy="329184"/>
+          </a:xfrm>
+          <a:prstGeom prst="rect">
+            <a:avLst/>
+          </a:prstGeom>
+          <a:noFill/>
+          <a:ln/>
+        </p:spPr>
+        <p:txBody>
+          <a:bodyPr wrap="square" lIns="0" tIns="0" rIns="0" bIns="0" rtlCol="0" anchor="ctr"/>
+          <a:lstStyle/>
+          <a:p>
+            <a:pPr indent="0" marL="0">
+              <a:buNone/>
+            </a:pPr>
+            <a:r>
+              <a:rPr lang="en-US" sz="1400" dirty="0">
+                <a:solidFill>
+                  <a:srgbClr val="2B2620"/>
+                </a:solidFill>
+                <a:latin typeface="メイリオ" pitchFamily="34" charset="0"/>
+                <a:ea typeface="メイリオ" pitchFamily="34" charset="-122"/>
+                <a:cs typeface="メイリオ" pitchFamily="34" charset="-120"/>
+              </a:rPr>
+              <a:t>鍼灸症例データベース構築プロジェクト</a:t>
+            </a:r>
+            <a:endParaRPr lang="en-US" sz="1400" dirty="0"/>
+          </a:p>
+        </p:txBody>
+      </p:sp>
+      <p:sp>
+        <p:nvSpPr>
+          <p:cNvPr id="12" name="Text 10"/>
+          <p:cNvSpPr txBox="1"/>
+          <p:nvPr/>
+        </p:nvSpPr>
+        <p:spPr>
+          <a:xfrm>
+            <a:off x="1828800" y="2779776"/>
+            <a:ext cx="9674352" cy="274320"/>
+          </a:xfrm>
+          <a:prstGeom prst="rect">
+            <a:avLst/>
+          </a:prstGeom>
+          <a:noFill/>
+          <a:ln/>
+        </p:spPr>
+        <p:txBody>
+          <a:bodyPr wrap="square" lIns="0" tIns="0" rIns="0" bIns="0" rtlCol="0" anchor="ctr"/>
+          <a:lstStyle/>
+          <a:p>
+            <a:pPr indent="0" marL="0">
+              <a:buNone/>
+            </a:pPr>
+            <a:r>
+              <a:rPr lang="en-US" sz="1200" dirty="0">
+                <a:solidFill>
+                  <a:srgbClr val="8B8175"/>
+                </a:solidFill>
+                <a:latin typeface="メイリオ" pitchFamily="34" charset="0"/>
+                <a:ea typeface="メイリオ" pitchFamily="34" charset="-122"/>
+                <a:cs typeface="メイリオ" pitchFamily="34" charset="-120"/>
+              </a:rPr>
+              <a:t>ケアクル／東京有明医療大学 松浦悠人／玉川大学 柴田健一／ここちめいど 米倉まな　― PR TIMES（2025.4）</a:t>
+            </a:r>
+            <a:endParaRPr lang="en-US" sz="1200" dirty="0"/>
+          </a:p>
+        </p:txBody>
+      </p:sp>
+      <p:sp>
+        <p:nvSpPr>
+          <p:cNvPr id="13" name="Shape 11"/>
+          <p:cNvSpPr/>
+          <p:nvPr/>
+        </p:nvSpPr>
+        <p:spPr>
+          <a:xfrm>
+            <a:off x="685800" y="3090672"/>
+            <a:ext cx="10820095" cy="7315"/>
+          </a:xfrm>
+          <a:prstGeom prst="rect">
+            <a:avLst/>
+          </a:prstGeom>
+          <a:solidFill>
+            <a:srgbClr val="D2C4AE"/>
+          </a:solidFill>
+          <a:ln/>
+        </p:spPr>
       </p:sp>
       <p:sp>
         <p:nvSpPr>
@@ -4463,24 +4483,63 @@
         </p:nvSpPr>
         <p:spPr>
           <a:xfrm>
-            <a:off x="1371600" y="3593592"/>
-            <a:ext cx="10058400" cy="329184"/>
-          </a:xfrm>
-          <a:prstGeom prst="rect">
-            <a:avLst/>
-          </a:prstGeom>
-          <a:noFill/>
-          <a:ln/>
-        </p:spPr>
-        <p:txBody>
-          <a:bodyPr wrap="square" lIns="0" tIns="0" rIns="0" bIns="0" rtlCol="0" anchor="ctr"/>
-          <a:lstStyle/>
-          <a:p>
-            <a:pPr indent="0" marL="0">
-              <a:buNone/>
-            </a:pPr>
-            <a:r>
-              <a:rPr lang="en-US" sz="1600" b="1" dirty="0">
+            <a:off x="685800" y="3218688"/>
+            <a:ext cx="1143000" cy="274320"/>
+          </a:xfrm>
+          <a:prstGeom prst="rect">
+            <a:avLst/>
+          </a:prstGeom>
+          <a:noFill/>
+          <a:ln/>
+        </p:spPr>
+        <p:txBody>
+          <a:bodyPr wrap="square" lIns="0" tIns="0" rIns="0" bIns="0" rtlCol="0" anchor="ctr"/>
+          <a:lstStyle/>
+          <a:p>
+            <a:pPr indent="0" marL="0">
+              <a:buNone/>
+            </a:pPr>
+            <a:r>
+              <a:rPr lang="en-US" sz="1400" b="1" spc="100" kern="0" dirty="0">
+                <a:solidFill>
+                  <a:srgbClr val="9C5446"/>
+                </a:solidFill>
+                <a:latin typeface="メイリオ" pitchFamily="34" charset="0"/>
+                <a:ea typeface="メイリオ" pitchFamily="34" charset="-122"/>
+                <a:cs typeface="メイリオ" pitchFamily="34" charset="-120"/>
+              </a:rPr>
+              <a:t>企業連携</a:t>
+            </a:r>
+            <a:endParaRPr lang="en-US" sz="1400" dirty="0"/>
+          </a:p>
+        </p:txBody>
+      </p:sp>
+      <p:sp>
+        <p:nvSpPr>
+          <p:cNvPr id="15" name="Text 13"/>
+          <p:cNvSpPr txBox="1"/>
+          <p:nvPr/>
+        </p:nvSpPr>
+        <p:spPr>
+          <a:xfrm>
+            <a:off x="1828800" y="3182112"/>
+            <a:ext cx="9674352" cy="329184"/>
+          </a:xfrm>
+          <a:prstGeom prst="rect">
+            <a:avLst/>
+          </a:prstGeom>
+          <a:noFill/>
+          <a:ln/>
+        </p:spPr>
+        <p:txBody>
+          <a:bodyPr wrap="square" lIns="0" tIns="0" rIns="0" bIns="0" rtlCol="0" anchor="ctr"/>
+          <a:lstStyle/>
+          <a:p>
+            <a:pPr indent="0" marL="0">
+              <a:buNone/>
+            </a:pPr>
+            <a:r>
+              <a:rPr lang="en-US" sz="1400" dirty="0">
                 <a:solidFill>
                   <a:srgbClr val="2B2620"/>
                 </a:solidFill>
@@ -4488,22 +4547,120 @@
                 <a:ea typeface="メイリオ" pitchFamily="34" charset="-122"/>
                 <a:cs typeface="メイリオ" pitchFamily="34" charset="-120"/>
               </a:rPr>
-              <a:t>実証の場をご一緒したい</a:t>
-            </a:r>
-            <a:endParaRPr lang="en-US" sz="1600" dirty="0"/>
-          </a:p>
-        </p:txBody>
-      </p:sp>
-      <p:sp>
-        <p:nvSpPr>
-          <p:cNvPr id="15" name="Text 13"/>
-          <p:cNvSpPr txBox="1"/>
-          <p:nvPr/>
-        </p:nvSpPr>
-        <p:spPr>
-          <a:xfrm>
-            <a:off x="1371600" y="3941064"/>
-            <a:ext cx="10058400" cy="329184"/>
+              <a:t>オンライン対話サービス「ThirdTalk」特別対談番組に出演</a:t>
+            </a:r>
+            <a:endParaRPr lang="en-US" sz="1400" dirty="0"/>
+          </a:p>
+        </p:txBody>
+      </p:sp>
+      <p:sp>
+        <p:nvSpPr>
+          <p:cNvPr id="16" name="Text 14"/>
+          <p:cNvSpPr txBox="1"/>
+          <p:nvPr/>
+        </p:nvSpPr>
+        <p:spPr>
+          <a:xfrm>
+            <a:off x="1828800" y="3511296"/>
+            <a:ext cx="9674352" cy="274320"/>
+          </a:xfrm>
+          <a:prstGeom prst="rect">
+            <a:avLst/>
+          </a:prstGeom>
+          <a:noFill/>
+          <a:ln/>
+        </p:spPr>
+        <p:txBody>
+          <a:bodyPr wrap="square" lIns="0" tIns="0" rIns="0" bIns="0" rtlCol="0" anchor="ctr"/>
+          <a:lstStyle/>
+          <a:p>
+            <a:pPr indent="0" marL="0">
+              <a:buNone/>
+            </a:pPr>
+            <a:r>
+              <a:rPr lang="en-US" sz="1200" dirty="0">
+                <a:solidFill>
+                  <a:srgbClr val="8B8175"/>
+                </a:solidFill>
+                <a:latin typeface="メイリオ" pitchFamily="34" charset="0"/>
+                <a:ea typeface="メイリオ" pitchFamily="34" charset="-122"/>
+                <a:cs typeface="メイリオ" pitchFamily="34" charset="-120"/>
+              </a:rPr>
+              <a:t>株式会社ファンコミュニケーションズ ニュースリリース（2022.8.26）</a:t>
+            </a:r>
+            <a:endParaRPr lang="en-US" sz="1200" dirty="0"/>
+          </a:p>
+        </p:txBody>
+      </p:sp>
+      <p:sp>
+        <p:nvSpPr>
+          <p:cNvPr id="17" name="Shape 15"/>
+          <p:cNvSpPr/>
+          <p:nvPr/>
+        </p:nvSpPr>
+        <p:spPr>
+          <a:xfrm>
+            <a:off x="685800" y="3822192"/>
+            <a:ext cx="10820095" cy="7315"/>
+          </a:xfrm>
+          <a:prstGeom prst="rect">
+            <a:avLst/>
+          </a:prstGeom>
+          <a:solidFill>
+            <a:srgbClr val="D2C4AE"/>
+          </a:solidFill>
+          <a:ln/>
+        </p:spPr>
+      </p:sp>
+      <p:sp>
+        <p:nvSpPr>
+          <p:cNvPr id="18" name="Text 16"/>
+          <p:cNvSpPr txBox="1"/>
+          <p:nvPr/>
+        </p:nvSpPr>
+        <p:spPr>
+          <a:xfrm>
+            <a:off x="685800" y="3950208"/>
+            <a:ext cx="1143000" cy="274320"/>
+          </a:xfrm>
+          <a:prstGeom prst="rect">
+            <a:avLst/>
+          </a:prstGeom>
+          <a:noFill/>
+          <a:ln/>
+        </p:spPr>
+        <p:txBody>
+          <a:bodyPr wrap="square" lIns="0" tIns="0" rIns="0" bIns="0" rtlCol="0" anchor="ctr"/>
+          <a:lstStyle/>
+          <a:p>
+            <a:pPr indent="0" marL="0">
+              <a:buNone/>
+            </a:pPr>
+            <a:r>
+              <a:rPr lang="en-US" sz="1400" b="1" spc="100" kern="0" dirty="0">
+                <a:solidFill>
+                  <a:srgbClr val="9C5446"/>
+                </a:solidFill>
+                <a:latin typeface="メイリオ" pitchFamily="34" charset="0"/>
+                <a:ea typeface="メイリオ" pitchFamily="34" charset="-122"/>
+                <a:cs typeface="メイリオ" pitchFamily="34" charset="-120"/>
+              </a:rPr>
+              <a:t>社会貢献</a:t>
+            </a:r>
+            <a:endParaRPr lang="en-US" sz="1400" dirty="0"/>
+          </a:p>
+        </p:txBody>
+      </p:sp>
+      <p:sp>
+        <p:nvSpPr>
+          <p:cNvPr id="19" name="Text 17"/>
+          <p:cNvSpPr txBox="1"/>
+          <p:nvPr/>
+        </p:nvSpPr>
+        <p:spPr>
+          <a:xfrm>
+            <a:off x="1828800" y="3913632"/>
+            <a:ext cx="9674352" cy="329184"/>
           </a:xfrm>
           <a:prstGeom prst="rect">
             <a:avLst/>
@@ -4521,13 +4678,13 @@
             <a:r>
               <a:rPr lang="en-US" sz="1400" dirty="0">
                 <a:solidFill>
-                  <a:srgbClr val="5A5249"/>
-                </a:solidFill>
-                <a:latin typeface="メイリオ" pitchFamily="34" charset="0"/>
-                <a:ea typeface="メイリオ" pitchFamily="34" charset="-122"/>
-                <a:cs typeface="メイリオ" pitchFamily="34" charset="-120"/>
-              </a:rPr>
-              <a:t>法人向けの健康支援など、未病層に届く場で。効果は学会発表として残します。</a:t>
+                  <a:srgbClr val="2B2620"/>
+                </a:solidFill>
+                <a:latin typeface="メイリオ" pitchFamily="34" charset="0"/>
+                <a:ea typeface="メイリオ" pitchFamily="34" charset="-122"/>
+                <a:cs typeface="メイリオ" pitchFamily="34" charset="-120"/>
+              </a:rPr>
+              <a:t>パパゲーノ・アンバサダー認定 第一号（合同会社ここちめいど）</a:t>
             </a:r>
             <a:endParaRPr lang="en-US" sz="1400" dirty="0"/>
           </a:p>
@@ -4535,57 +4692,89 @@
       </p:sp>
       <p:sp>
         <p:nvSpPr>
-          <p:cNvPr id="16" name="Shape 14"/>
+          <p:cNvPr id="20" name="Text 18"/>
+          <p:cNvSpPr txBox="1"/>
+          <p:nvPr/>
+        </p:nvSpPr>
+        <p:spPr>
+          <a:xfrm>
+            <a:off x="1828800" y="4242816"/>
+            <a:ext cx="9674352" cy="274320"/>
+          </a:xfrm>
+          <a:prstGeom prst="rect">
+            <a:avLst/>
+          </a:prstGeom>
+          <a:noFill/>
+          <a:ln/>
+        </p:spPr>
+        <p:txBody>
+          <a:bodyPr wrap="square" lIns="0" tIns="0" rIns="0" bIns="0" rtlCol="0" anchor="ctr"/>
+          <a:lstStyle/>
+          <a:p>
+            <a:pPr indent="0" marL="0">
+              <a:buNone/>
+            </a:pPr>
+            <a:r>
+              <a:rPr lang="en-US" sz="1200" dirty="0">
+                <a:solidFill>
+                  <a:srgbClr val="8B8175"/>
+                </a:solidFill>
+                <a:latin typeface="メイリオ" pitchFamily="34" charset="0"/>
+                <a:ea typeface="メイリオ" pitchFamily="34" charset="-122"/>
+                <a:cs typeface="メイリオ" pitchFamily="34" charset="-120"/>
+              </a:rPr>
+              <a:t>株式会社パパゲーノ プレスリリース</a:t>
+            </a:r>
+            <a:endParaRPr lang="en-US" sz="1200" dirty="0"/>
+          </a:p>
+        </p:txBody>
+      </p:sp>
+      <p:sp>
+        <p:nvSpPr>
+          <p:cNvPr id="21" name="Shape 19"/>
           <p:cNvSpPr/>
           <p:nvPr/>
         </p:nvSpPr>
         <p:spPr>
           <a:xfrm>
-            <a:off x="685800" y="4572000"/>
-            <a:ext cx="10820095" cy="1325880"/>
-          </a:xfrm>
-          <a:prstGeom prst="roundRect">
-            <a:avLst>
-              <a:gd name="adj" fmla="val 3448"/>
-            </a:avLst>
+            <a:off x="685800" y="4553712"/>
+            <a:ext cx="10820095" cy="7315"/>
+          </a:xfrm>
+          <a:prstGeom prst="rect">
+            <a:avLst/>
           </a:prstGeom>
           <a:solidFill>
-            <a:srgbClr val="FBF6EC"/>
+            <a:srgbClr val="D2C4AE"/>
           </a:solidFill>
-          <a:ln w="9525">
-            <a:solidFill>
-              <a:srgbClr val="9C5446"/>
-            </a:solidFill>
-            <a:prstDash val="solid"/>
-          </a:ln>
-        </p:spPr>
-      </p:sp>
-      <p:sp>
-        <p:nvSpPr>
-          <p:cNvPr id="17" name="Text 15"/>
-          <p:cNvSpPr txBox="1"/>
-          <p:nvPr/>
-        </p:nvSpPr>
-        <p:spPr>
-          <a:xfrm>
-            <a:off x="960120" y="4773168"/>
-            <a:ext cx="10271455" cy="237744"/>
-          </a:xfrm>
-          <a:prstGeom prst="rect">
-            <a:avLst/>
-          </a:prstGeom>
-          <a:noFill/>
-          <a:ln/>
-        </p:spPr>
-        <p:txBody>
-          <a:bodyPr wrap="square" lIns="0" tIns="0" rIns="0" bIns="0" rtlCol="0" anchor="ctr"/>
-          <a:lstStyle/>
-          <a:p>
-            <a:pPr indent="0" marL="0">
-              <a:buNone/>
-            </a:pPr>
-            <a:r>
-              <a:rPr lang="en-US" sz="1200" b="1" spc="100" kern="0" dirty="0">
+          <a:ln/>
+        </p:spPr>
+      </p:sp>
+      <p:sp>
+        <p:nvSpPr>
+          <p:cNvPr id="22" name="Text 20"/>
+          <p:cNvSpPr txBox="1"/>
+          <p:nvPr/>
+        </p:nvSpPr>
+        <p:spPr>
+          <a:xfrm>
+            <a:off x="685800" y="4681728"/>
+            <a:ext cx="1143000" cy="274320"/>
+          </a:xfrm>
+          <a:prstGeom prst="rect">
+            <a:avLst/>
+          </a:prstGeom>
+          <a:noFill/>
+          <a:ln/>
+        </p:spPr>
+        <p:txBody>
+          <a:bodyPr wrap="square" lIns="0" tIns="0" rIns="0" bIns="0" rtlCol="0" anchor="ctr"/>
+          <a:lstStyle/>
+          <a:p>
+            <a:pPr indent="0" marL="0">
+              <a:buNone/>
+            </a:pPr>
+            <a:r>
+              <a:rPr lang="en-US" sz="1400" b="1" spc="100" kern="0" dirty="0">
                 <a:solidFill>
                   <a:srgbClr val="9C5446"/>
                 </a:solidFill>
@@ -4593,7 +4782,85 @@
                 <a:ea typeface="メイリオ" pitchFamily="34" charset="-122"/>
                 <a:cs typeface="メイリオ" pitchFamily="34" charset="-120"/>
               </a:rPr>
-              <a:t>本日お願いしたいこと</a:t>
+              <a:t>寄稿</a:t>
+            </a:r>
+            <a:endParaRPr lang="en-US" sz="1400" dirty="0"/>
+          </a:p>
+        </p:txBody>
+      </p:sp>
+      <p:sp>
+        <p:nvSpPr>
+          <p:cNvPr id="23" name="Text 21"/>
+          <p:cNvSpPr txBox="1"/>
+          <p:nvPr/>
+        </p:nvSpPr>
+        <p:spPr>
+          <a:xfrm>
+            <a:off x="1828800" y="4645152"/>
+            <a:ext cx="9674352" cy="329184"/>
+          </a:xfrm>
+          <a:prstGeom prst="rect">
+            <a:avLst/>
+          </a:prstGeom>
+          <a:noFill/>
+          <a:ln/>
+        </p:spPr>
+        <p:txBody>
+          <a:bodyPr wrap="square" lIns="0" tIns="0" rIns="0" bIns="0" rtlCol="0" anchor="ctr"/>
+          <a:lstStyle/>
+          <a:p>
+            <a:pPr indent="0" marL="0">
+              <a:buNone/>
+            </a:pPr>
+            <a:r>
+              <a:rPr lang="en-US" sz="1400" dirty="0">
+                <a:solidFill>
+                  <a:srgbClr val="2B2620"/>
+                </a:solidFill>
+                <a:latin typeface="メイリオ" pitchFamily="34" charset="0"/>
+                <a:ea typeface="メイリオ" pitchFamily="34" charset="-122"/>
+                <a:cs typeface="メイリオ" pitchFamily="34" charset="-120"/>
+              </a:rPr>
+              <a:t>『精神看護』特集「鍼灸は、なぜ「うつ」に効くのだろうか」</a:t>
+            </a:r>
+            <a:endParaRPr lang="en-US" sz="1400" dirty="0"/>
+          </a:p>
+        </p:txBody>
+      </p:sp>
+      <p:sp>
+        <p:nvSpPr>
+          <p:cNvPr id="24" name="Text 22"/>
+          <p:cNvSpPr txBox="1"/>
+          <p:nvPr/>
+        </p:nvSpPr>
+        <p:spPr>
+          <a:xfrm>
+            <a:off x="1828800" y="4974336"/>
+            <a:ext cx="9674352" cy="274320"/>
+          </a:xfrm>
+          <a:prstGeom prst="rect">
+            <a:avLst/>
+          </a:prstGeom>
+          <a:noFill/>
+          <a:ln/>
+        </p:spPr>
+        <p:txBody>
+          <a:bodyPr wrap="square" lIns="0" tIns="0" rIns="0" bIns="0" rtlCol="0" anchor="ctr"/>
+          <a:lstStyle/>
+          <a:p>
+            <a:pPr indent="0" marL="0">
+              <a:buNone/>
+            </a:pPr>
+            <a:r>
+              <a:rPr lang="en-US" sz="1200" dirty="0">
+                <a:solidFill>
+                  <a:srgbClr val="8B8175"/>
+                </a:solidFill>
+                <a:latin typeface="メイリオ" pitchFamily="34" charset="0"/>
+                <a:ea typeface="メイリオ" pitchFamily="34" charset="-122"/>
+                <a:cs typeface="メイリオ" pitchFamily="34" charset="-120"/>
+              </a:rPr>
+              <a:t>医学書院　Vol.28 No.3（2025.5）／ レポート「障害と美の多様性」Vol.28 No.5（2025.9）</a:t>
             </a:r>
             <a:endParaRPr lang="en-US" sz="1200" dirty="0"/>
           </a:p>
@@ -4601,58 +4868,97 @@
       </p:sp>
       <p:sp>
         <p:nvSpPr>
-          <p:cNvPr id="18" name="Text 16"/>
-          <p:cNvSpPr txBox="1"/>
-          <p:nvPr/>
-        </p:nvSpPr>
-        <p:spPr>
-          <a:xfrm>
-            <a:off x="960120" y="5084064"/>
-            <a:ext cx="10271455" cy="594360"/>
-          </a:xfrm>
-          <a:prstGeom prst="rect">
-            <a:avLst/>
-          </a:prstGeom>
-          <a:noFill/>
-          <a:ln/>
-        </p:spPr>
-        <p:txBody>
-          <a:bodyPr wrap="square" lIns="0" tIns="0" rIns="0" bIns="0" rtlCol="0" anchor="t"/>
-          <a:lstStyle/>
-          <a:p>
-            <a:pPr indent="0" marL="0">
-              <a:lnSpc>
-                <a:spcPts val="1900"/>
-              </a:lnSpc>
+          <p:cNvPr id="25" name="Shape 23"/>
+          <p:cNvSpPr/>
+          <p:nvPr/>
+        </p:nvSpPr>
+        <p:spPr>
+          <a:xfrm>
+            <a:off x="685800" y="5285232"/>
+            <a:ext cx="10820095" cy="7315"/>
+          </a:xfrm>
+          <a:prstGeom prst="rect">
+            <a:avLst/>
+          </a:prstGeom>
+          <a:solidFill>
+            <a:srgbClr val="D2C4AE"/>
+          </a:solidFill>
+          <a:ln/>
+        </p:spPr>
+      </p:sp>
+      <p:sp>
+        <p:nvSpPr>
+          <p:cNvPr id="26" name="Text 24"/>
+          <p:cNvSpPr txBox="1"/>
+          <p:nvPr/>
+        </p:nvSpPr>
+        <p:spPr>
+          <a:xfrm>
+            <a:off x="685800" y="5413248"/>
+            <a:ext cx="1143000" cy="274320"/>
+          </a:xfrm>
+          <a:prstGeom prst="rect">
+            <a:avLst/>
+          </a:prstGeom>
+          <a:noFill/>
+          <a:ln/>
+        </p:spPr>
+        <p:txBody>
+          <a:bodyPr wrap="square" lIns="0" tIns="0" rIns="0" bIns="0" rtlCol="0" anchor="ctr"/>
+          <a:lstStyle/>
+          <a:p>
+            <a:pPr indent="0" marL="0">
+              <a:buNone/>
+            </a:pPr>
+            <a:r>
+              <a:rPr lang="en-US" sz="1400" b="1" spc="100" kern="0" dirty="0">
+                <a:solidFill>
+                  <a:srgbClr val="9C5446"/>
+                </a:solidFill>
+                <a:latin typeface="メイリオ" pitchFamily="34" charset="0"/>
+                <a:ea typeface="メイリオ" pitchFamily="34" charset="-122"/>
+                <a:cs typeface="メイリオ" pitchFamily="34" charset="-120"/>
+              </a:rPr>
+              <a:t>学会</a:t>
+            </a:r>
+            <a:endParaRPr lang="en-US" sz="1400" dirty="0"/>
+          </a:p>
+        </p:txBody>
+      </p:sp>
+      <p:sp>
+        <p:nvSpPr>
+          <p:cNvPr id="27" name="Text 25"/>
+          <p:cNvSpPr txBox="1"/>
+          <p:nvPr/>
+        </p:nvSpPr>
+        <p:spPr>
+          <a:xfrm>
+            <a:off x="1828800" y="5376672"/>
+            <a:ext cx="9674352" cy="329184"/>
+          </a:xfrm>
+          <a:prstGeom prst="rect">
+            <a:avLst/>
+          </a:prstGeom>
+          <a:noFill/>
+          <a:ln/>
+        </p:spPr>
+        <p:txBody>
+          <a:bodyPr wrap="square" lIns="0" tIns="0" rIns="0" bIns="0" rtlCol="0" anchor="ctr"/>
+          <a:lstStyle/>
+          <a:p>
+            <a:pPr indent="0" marL="0">
               <a:buNone/>
             </a:pPr>
             <a:r>
               <a:rPr lang="en-US" sz="1400" dirty="0">
                 <a:solidFill>
-                  <a:srgbClr val="5A5249"/>
-                </a:solidFill>
-                <a:latin typeface="メイリオ" pitchFamily="34" charset="0"/>
-                <a:ea typeface="メイリオ" pitchFamily="34" charset="-122"/>
-                <a:cs typeface="メイリオ" pitchFamily="34" charset="-120"/>
-              </a:rPr>
-              <a:t>生きづらさを抱えた人を、治療が必要になる手前で減らしたい。</a:t>
-            </a:r>
-            <a:pPr indent="0" marL="0">
-              <a:lnSpc>
-                <a:spcPts val="1900"/>
-              </a:lnSpc>
-              <a:buNone/>
-            </a:pPr>
-            <a:r>
-              <a:rPr lang="en-US" sz="1400" b="1" dirty="0">
-                <a:solidFill>
                   <a:srgbClr val="2B2620"/>
                 </a:solidFill>
                 <a:latin typeface="メイリオ" pitchFamily="34" charset="0"/>
                 <a:ea typeface="メイリオ" pitchFamily="34" charset="-122"/>
                 <a:cs typeface="メイリオ" pitchFamily="34" charset="-120"/>
               </a:rPr>
-              <a:t>まずは本日、この3つのうちどこに可能性がありそうか、率直なご意見をいただけたら嬉しいです。</a:t>
+              <a:t>全日本鍼灸学会／日本うつ病学会（ポスター発表）／日本精神神経学会 シンポジスト</a:t>
             </a:r>
             <a:endParaRPr lang="en-US" sz="1400" dirty="0"/>
           </a:p>
@@ -4660,7 +4966,105 @@
       </p:sp>
       <p:sp>
         <p:nvSpPr>
-          <p:cNvPr id="19" name="Text 17"/>
+          <p:cNvPr id="28" name="Text 26"/>
+          <p:cNvSpPr txBox="1"/>
+          <p:nvPr/>
+        </p:nvSpPr>
+        <p:spPr>
+          <a:xfrm>
+            <a:off x="1828800" y="5705856"/>
+            <a:ext cx="9674352" cy="274320"/>
+          </a:xfrm>
+          <a:prstGeom prst="rect">
+            <a:avLst/>
+          </a:prstGeom>
+          <a:noFill/>
+          <a:ln/>
+        </p:spPr>
+        <p:txBody>
+          <a:bodyPr wrap="square" lIns="0" tIns="0" rIns="0" bIns="0" rtlCol="0" anchor="ctr"/>
+          <a:lstStyle/>
+          <a:p>
+            <a:pPr indent="0" marL="0">
+              <a:buNone/>
+            </a:pPr>
+            <a:r>
+              <a:rPr lang="en-US" sz="1200" dirty="0">
+                <a:solidFill>
+                  <a:srgbClr val="8B8175"/>
+                </a:solidFill>
+                <a:latin typeface="メイリオ" pitchFamily="34" charset="0"/>
+                <a:ea typeface="メイリオ" pitchFamily="34" charset="-122"/>
+                <a:cs typeface="メイリオ" pitchFamily="34" charset="-120"/>
+              </a:rPr>
+              <a:t>うつと不安症状を有する患者の実態調査 第3報・第4報（2024・2025・2026）　― 日本精神神経学会は2026.6 登壇</a:t>
+            </a:r>
+            <a:endParaRPr lang="en-US" sz="1200" dirty="0"/>
+          </a:p>
+        </p:txBody>
+      </p:sp>
+      <p:sp>
+        <p:nvSpPr>
+          <p:cNvPr id="29" name="Shape 27"/>
+          <p:cNvSpPr/>
+          <p:nvPr/>
+        </p:nvSpPr>
+        <p:spPr>
+          <a:xfrm>
+            <a:off x="685800" y="6016752"/>
+            <a:ext cx="10820095" cy="7315"/>
+          </a:xfrm>
+          <a:prstGeom prst="rect">
+            <a:avLst/>
+          </a:prstGeom>
+          <a:solidFill>
+            <a:srgbClr val="D2C4AE"/>
+          </a:solidFill>
+          <a:ln/>
+        </p:spPr>
+      </p:sp>
+      <p:sp>
+        <p:nvSpPr>
+          <p:cNvPr id="30" name="Text 28"/>
+          <p:cNvSpPr txBox="1"/>
+          <p:nvPr/>
+        </p:nvSpPr>
+        <p:spPr>
+          <a:xfrm>
+            <a:off x="7848295" y="6336792"/>
+            <a:ext cx="3657600" cy="274320"/>
+          </a:xfrm>
+          <a:prstGeom prst="rect">
+            <a:avLst/>
+          </a:prstGeom>
+          <a:noFill/>
+          <a:ln/>
+        </p:spPr>
+        <p:txBody>
+          <a:bodyPr wrap="square" lIns="0" tIns="0" rIns="0" bIns="0" rtlCol="0" anchor="ctr"/>
+          <a:lstStyle/>
+          <a:p>
+            <a:pPr algn="r" indent="0" marL="0">
+              <a:buNone/>
+            </a:pPr>
+            <a:r>
+              <a:rPr lang="en-US" sz="1200" dirty="0">
+                <a:solidFill>
+                  <a:srgbClr val="8B8175"/>
+                </a:solidFill>
+                <a:latin typeface="メイリオ" pitchFamily="34" charset="0"/>
+                <a:ea typeface="メイリオ" pitchFamily="34" charset="-122"/>
+                <a:cs typeface="メイリオ" pitchFamily="34" charset="-120"/>
+              </a:rPr>
+              <a:t>参考資料（本編には含みません）</a:t>
+            </a:r>
+            <a:endParaRPr lang="en-US" sz="1200" dirty="0"/>
+          </a:p>
+        </p:txBody>
+      </p:sp>
+      <p:sp>
+        <p:nvSpPr>
+          <p:cNvPr id="31" name="Text 29"/>
           <p:cNvSpPr txBox="1"/>
           <p:nvPr/>
         </p:nvSpPr>
@@ -4692,45 +5096,6 @@
                 <a:cs typeface="メイリオ" pitchFamily="34" charset="-120"/>
               </a:rPr>
               <a:t>米倉まな｜アポプラスステーション様 ご提案</a:t>
-            </a:r>
-            <a:endParaRPr lang="en-US" sz="1200" dirty="0"/>
-          </a:p>
-        </p:txBody>
-      </p:sp>
-      <p:sp>
-        <p:nvSpPr>
-          <p:cNvPr id="20" name="Text 18"/>
-          <p:cNvSpPr txBox="1"/>
-          <p:nvPr/>
-        </p:nvSpPr>
-        <p:spPr>
-          <a:xfrm>
-            <a:off x="8305495" y="6336792"/>
-            <a:ext cx="3200400" cy="274320"/>
-          </a:xfrm>
-          <a:prstGeom prst="rect">
-            <a:avLst/>
-          </a:prstGeom>
-          <a:noFill/>
-          <a:ln/>
-        </p:spPr>
-        <p:txBody>
-          <a:bodyPr wrap="square" lIns="0" tIns="0" rIns="0" bIns="0" rtlCol="0" anchor="ctr"/>
-          <a:lstStyle/>
-          <a:p>
-            <a:pPr algn="r" indent="0" marL="0">
-              <a:buNone/>
-            </a:pPr>
-            <a:r>
-              <a:rPr lang="en-US" sz="1200" dirty="0">
-                <a:solidFill>
-                  <a:srgbClr val="8B8175"/>
-                </a:solidFill>
-                <a:latin typeface="メイリオ" pitchFamily="34" charset="0"/>
-                <a:ea typeface="メイリオ" pitchFamily="34" charset="-122"/>
-                <a:cs typeface="メイリオ" pitchFamily="34" charset="-120"/>
-              </a:rPr>
-              <a:t>6:40 → 7:00</a:t>
             </a:r>
             <a:endParaRPr lang="en-US" sz="1200" dirty="0"/>
           </a:p>
@@ -4744,9 +5109,9 @@
 </p:sld>
 </file>
 
-<file path=ppt/slides/slide13.xml><?xml version="1.0" encoding="utf-8"?>
+<file path=ppt/slides/slide2.xml><?xml version="1.0" encoding="utf-8"?>
 <p:sld xmlns:a="http://schemas.openxmlformats.org/drawingml/2006/main" xmlns:r="http://schemas.openxmlformats.org/officeDocument/2006/relationships" xmlns:p="http://schemas.openxmlformats.org/presentationml/2006/main">
-  <p:cSld name="Slide 13">
+  <p:cSld name="Slide 2">
     <p:bg>
       <p:bgPr>
         <a:solidFill>
@@ -4813,6 +5178,20 @@
               <a:buNone/>
             </a:pPr>
             <a:r>
+              <a:rPr lang="en-US" sz="1400" b="1" spc="200" kern="0" dirty="0">
+                <a:solidFill>
+                  <a:srgbClr val="9C5446"/>
+                </a:solidFill>
+                <a:latin typeface="メイリオ" pitchFamily="34" charset="0"/>
+                <a:ea typeface="メイリオ" pitchFamily="34" charset="-122"/>
+                <a:cs typeface="メイリオ" pitchFamily="34" charset="-120"/>
+              </a:rPr>
+              <a:t>01   </a:t>
+            </a:r>
+            <a:pPr indent="0" marL="0">
+              <a:buNone/>
+            </a:pPr>
+            <a:r>
               <a:rPr lang="en-US" sz="1400" spc="300" kern="0" dirty="0">
                 <a:solidFill>
                   <a:srgbClr val="8B8175"/>
@@ -4821,7 +5200,7 @@
                 <a:ea typeface="メイリオ" pitchFamily="34" charset="-122"/>
                 <a:cs typeface="メイリオ" pitchFamily="34" charset="-120"/>
               </a:rPr>
-              <a:t>APPENDIX ／ 参考</a:t>
+              <a:t>ORIGIN</a:t>
             </a:r>
             <a:endParaRPr lang="en-US" sz="1400" dirty="0"/>
           </a:p>
@@ -4860,1070 +5239,6 @@
                 <a:ea typeface="メイリオ" pitchFamily="34" charset="-122"/>
                 <a:cs typeface="メイリオ" pitchFamily="34" charset="-120"/>
               </a:rPr>
-              <a:t>公開されている実績・共同研究</a:t>
-            </a:r>
-            <a:endParaRPr lang="en-US" sz="2800" dirty="0"/>
-          </a:p>
-        </p:txBody>
-      </p:sp>
-      <p:sp>
-        <p:nvSpPr>
-          <p:cNvPr id="5" name="Shape 3"/>
-          <p:cNvSpPr/>
-          <p:nvPr/>
-        </p:nvSpPr>
-        <p:spPr>
-          <a:xfrm>
-            <a:off x="685800" y="1627632"/>
-            <a:ext cx="10820095" cy="7315"/>
-          </a:xfrm>
-          <a:prstGeom prst="rect">
-            <a:avLst/>
-          </a:prstGeom>
-          <a:solidFill>
-            <a:srgbClr val="D2C4AE"/>
-          </a:solidFill>
-          <a:ln/>
-        </p:spPr>
-      </p:sp>
-      <p:sp>
-        <p:nvSpPr>
-          <p:cNvPr id="6" name="Text 4"/>
-          <p:cNvSpPr txBox="1"/>
-          <p:nvPr/>
-        </p:nvSpPr>
-        <p:spPr>
-          <a:xfrm>
-            <a:off x="685800" y="1755648"/>
-            <a:ext cx="1143000" cy="274320"/>
-          </a:xfrm>
-          <a:prstGeom prst="rect">
-            <a:avLst/>
-          </a:prstGeom>
-          <a:noFill/>
-          <a:ln/>
-        </p:spPr>
-        <p:txBody>
-          <a:bodyPr wrap="square" lIns="0" tIns="0" rIns="0" bIns="0" rtlCol="0" anchor="ctr"/>
-          <a:lstStyle/>
-          <a:p>
-            <a:pPr indent="0" marL="0">
-              <a:buNone/>
-            </a:pPr>
-            <a:r>
-              <a:rPr lang="en-US" sz="1400" b="1" spc="100" kern="0" dirty="0">
-                <a:solidFill>
-                  <a:srgbClr val="9C5446"/>
-                </a:solidFill>
-                <a:latin typeface="メイリオ" pitchFamily="34" charset="0"/>
-                <a:ea typeface="メイリオ" pitchFamily="34" charset="-122"/>
-                <a:cs typeface="メイリオ" pitchFamily="34" charset="-120"/>
-              </a:rPr>
-              <a:t>共同研究</a:t>
-            </a:r>
-            <a:endParaRPr lang="en-US" sz="1400" dirty="0"/>
-          </a:p>
-        </p:txBody>
-      </p:sp>
-      <p:sp>
-        <p:nvSpPr>
-          <p:cNvPr id="7" name="Text 5"/>
-          <p:cNvSpPr txBox="1"/>
-          <p:nvPr/>
-        </p:nvSpPr>
-        <p:spPr>
-          <a:xfrm>
-            <a:off x="1828800" y="1719072"/>
-            <a:ext cx="9674352" cy="329184"/>
-          </a:xfrm>
-          <a:prstGeom prst="rect">
-            <a:avLst/>
-          </a:prstGeom>
-          <a:noFill/>
-          <a:ln/>
-        </p:spPr>
-        <p:txBody>
-          <a:bodyPr wrap="square" lIns="0" tIns="0" rIns="0" bIns="0" rtlCol="0" anchor="ctr"/>
-          <a:lstStyle/>
-          <a:p>
-            <a:pPr indent="0" marL="0">
-              <a:buNone/>
-            </a:pPr>
-            <a:r>
-              <a:rPr lang="en-US" sz="1400" dirty="0">
-                <a:solidFill>
-                  <a:srgbClr val="2B2620"/>
-                </a:solidFill>
-                <a:latin typeface="メイリオ" pitchFamily="34" charset="0"/>
-                <a:ea typeface="メイリオ" pitchFamily="34" charset="-122"/>
-                <a:cs typeface="メイリオ" pitchFamily="34" charset="-120"/>
-              </a:rPr>
-              <a:t>開業鍼灸院でのメンタルヘルスの可能性を検証する共同研究</a:t>
-            </a:r>
-            <a:endParaRPr lang="en-US" sz="1400" dirty="0"/>
-          </a:p>
-        </p:txBody>
-      </p:sp>
-      <p:sp>
-        <p:nvSpPr>
-          <p:cNvPr id="8" name="Text 6"/>
-          <p:cNvSpPr txBox="1"/>
-          <p:nvPr/>
-        </p:nvSpPr>
-        <p:spPr>
-          <a:xfrm>
-            <a:off x="1828800" y="2048256"/>
-            <a:ext cx="9674352" cy="274320"/>
-          </a:xfrm>
-          <a:prstGeom prst="rect">
-            <a:avLst/>
-          </a:prstGeom>
-          <a:noFill/>
-          <a:ln/>
-        </p:spPr>
-        <p:txBody>
-          <a:bodyPr wrap="square" lIns="0" tIns="0" rIns="0" bIns="0" rtlCol="0" anchor="ctr"/>
-          <a:lstStyle/>
-          <a:p>
-            <a:pPr indent="0" marL="0">
-              <a:buNone/>
-            </a:pPr>
-            <a:r>
-              <a:rPr lang="en-US" sz="1200" dirty="0">
-                <a:solidFill>
-                  <a:srgbClr val="8B8175"/>
-                </a:solidFill>
-                <a:latin typeface="メイリオ" pitchFamily="34" charset="0"/>
-                <a:ea typeface="メイリオ" pitchFamily="34" charset="-122"/>
-                <a:cs typeface="メイリオ" pitchFamily="34" charset="-120"/>
-              </a:rPr>
-              <a:t>ここちめいど／東京有明医療大学／理化学研究所／ケアクル　― PR TIMES</a:t>
-            </a:r>
-            <a:endParaRPr lang="en-US" sz="1200" dirty="0"/>
-          </a:p>
-        </p:txBody>
-      </p:sp>
-      <p:sp>
-        <p:nvSpPr>
-          <p:cNvPr id="9" name="Shape 7"/>
-          <p:cNvSpPr/>
-          <p:nvPr/>
-        </p:nvSpPr>
-        <p:spPr>
-          <a:xfrm>
-            <a:off x="685800" y="2359152"/>
-            <a:ext cx="10820095" cy="7315"/>
-          </a:xfrm>
-          <a:prstGeom prst="rect">
-            <a:avLst/>
-          </a:prstGeom>
-          <a:solidFill>
-            <a:srgbClr val="D2C4AE"/>
-          </a:solidFill>
-          <a:ln/>
-        </p:spPr>
-      </p:sp>
-      <p:sp>
-        <p:nvSpPr>
-          <p:cNvPr id="10" name="Text 8"/>
-          <p:cNvSpPr txBox="1"/>
-          <p:nvPr/>
-        </p:nvSpPr>
-        <p:spPr>
-          <a:xfrm>
-            <a:off x="685800" y="2487168"/>
-            <a:ext cx="1143000" cy="274320"/>
-          </a:xfrm>
-          <a:prstGeom prst="rect">
-            <a:avLst/>
-          </a:prstGeom>
-          <a:noFill/>
-          <a:ln/>
-        </p:spPr>
-        <p:txBody>
-          <a:bodyPr wrap="square" lIns="0" tIns="0" rIns="0" bIns="0" rtlCol="0" anchor="ctr"/>
-          <a:lstStyle/>
-          <a:p>
-            <a:pPr indent="0" marL="0">
-              <a:buNone/>
-            </a:pPr>
-            <a:r>
-              <a:rPr lang="en-US" sz="1400" b="1" spc="100" kern="0" dirty="0">
-                <a:solidFill>
-                  <a:srgbClr val="9C5446"/>
-                </a:solidFill>
-                <a:latin typeface="メイリオ" pitchFamily="34" charset="0"/>
-                <a:ea typeface="メイリオ" pitchFamily="34" charset="-122"/>
-                <a:cs typeface="メイリオ" pitchFamily="34" charset="-120"/>
-              </a:rPr>
-              <a:t>共同研究</a:t>
-            </a:r>
-            <a:endParaRPr lang="en-US" sz="1400" dirty="0"/>
-          </a:p>
-        </p:txBody>
-      </p:sp>
-      <p:sp>
-        <p:nvSpPr>
-          <p:cNvPr id="11" name="Text 9"/>
-          <p:cNvSpPr txBox="1"/>
-          <p:nvPr/>
-        </p:nvSpPr>
-        <p:spPr>
-          <a:xfrm>
-            <a:off x="1828800" y="2450592"/>
-            <a:ext cx="9674352" cy="329184"/>
-          </a:xfrm>
-          <a:prstGeom prst="rect">
-            <a:avLst/>
-          </a:prstGeom>
-          <a:noFill/>
-          <a:ln/>
-        </p:spPr>
-        <p:txBody>
-          <a:bodyPr wrap="square" lIns="0" tIns="0" rIns="0" bIns="0" rtlCol="0" anchor="ctr"/>
-          <a:lstStyle/>
-          <a:p>
-            <a:pPr indent="0" marL="0">
-              <a:buNone/>
-            </a:pPr>
-            <a:r>
-              <a:rPr lang="en-US" sz="1400" dirty="0">
-                <a:solidFill>
-                  <a:srgbClr val="2B2620"/>
-                </a:solidFill>
-                <a:latin typeface="メイリオ" pitchFamily="34" charset="0"/>
-                <a:ea typeface="メイリオ" pitchFamily="34" charset="-122"/>
-                <a:cs typeface="メイリオ" pitchFamily="34" charset="-120"/>
-              </a:rPr>
-              <a:t>鍼灸症例データベース構築プロジェクト</a:t>
-            </a:r>
-            <a:endParaRPr lang="en-US" sz="1400" dirty="0"/>
-          </a:p>
-        </p:txBody>
-      </p:sp>
-      <p:sp>
-        <p:nvSpPr>
-          <p:cNvPr id="12" name="Text 10"/>
-          <p:cNvSpPr txBox="1"/>
-          <p:nvPr/>
-        </p:nvSpPr>
-        <p:spPr>
-          <a:xfrm>
-            <a:off x="1828800" y="2779776"/>
-            <a:ext cx="9674352" cy="274320"/>
-          </a:xfrm>
-          <a:prstGeom prst="rect">
-            <a:avLst/>
-          </a:prstGeom>
-          <a:noFill/>
-          <a:ln/>
-        </p:spPr>
-        <p:txBody>
-          <a:bodyPr wrap="square" lIns="0" tIns="0" rIns="0" bIns="0" rtlCol="0" anchor="ctr"/>
-          <a:lstStyle/>
-          <a:p>
-            <a:pPr indent="0" marL="0">
-              <a:buNone/>
-            </a:pPr>
-            <a:r>
-              <a:rPr lang="en-US" sz="1200" dirty="0">
-                <a:solidFill>
-                  <a:srgbClr val="8B8175"/>
-                </a:solidFill>
-                <a:latin typeface="メイリオ" pitchFamily="34" charset="0"/>
-                <a:ea typeface="メイリオ" pitchFamily="34" charset="-122"/>
-                <a:cs typeface="メイリオ" pitchFamily="34" charset="-120"/>
-              </a:rPr>
-              <a:t>ケアクル／東京有明医療大学 松浦悠人／玉川大学 柴田健一／ここちめいど 米倉まな　― PR TIMES（2025.4）</a:t>
-            </a:r>
-            <a:endParaRPr lang="en-US" sz="1200" dirty="0"/>
-          </a:p>
-        </p:txBody>
-      </p:sp>
-      <p:sp>
-        <p:nvSpPr>
-          <p:cNvPr id="13" name="Shape 11"/>
-          <p:cNvSpPr/>
-          <p:nvPr/>
-        </p:nvSpPr>
-        <p:spPr>
-          <a:xfrm>
-            <a:off x="685800" y="3090672"/>
-            <a:ext cx="10820095" cy="7315"/>
-          </a:xfrm>
-          <a:prstGeom prst="rect">
-            <a:avLst/>
-          </a:prstGeom>
-          <a:solidFill>
-            <a:srgbClr val="D2C4AE"/>
-          </a:solidFill>
-          <a:ln/>
-        </p:spPr>
-      </p:sp>
-      <p:sp>
-        <p:nvSpPr>
-          <p:cNvPr id="14" name="Text 12"/>
-          <p:cNvSpPr txBox="1"/>
-          <p:nvPr/>
-        </p:nvSpPr>
-        <p:spPr>
-          <a:xfrm>
-            <a:off x="685800" y="3218688"/>
-            <a:ext cx="1143000" cy="274320"/>
-          </a:xfrm>
-          <a:prstGeom prst="rect">
-            <a:avLst/>
-          </a:prstGeom>
-          <a:noFill/>
-          <a:ln/>
-        </p:spPr>
-        <p:txBody>
-          <a:bodyPr wrap="square" lIns="0" tIns="0" rIns="0" bIns="0" rtlCol="0" anchor="ctr"/>
-          <a:lstStyle/>
-          <a:p>
-            <a:pPr indent="0" marL="0">
-              <a:buNone/>
-            </a:pPr>
-            <a:r>
-              <a:rPr lang="en-US" sz="1400" b="1" spc="100" kern="0" dirty="0">
-                <a:solidFill>
-                  <a:srgbClr val="9C5446"/>
-                </a:solidFill>
-                <a:latin typeface="メイリオ" pitchFamily="34" charset="0"/>
-                <a:ea typeface="メイリオ" pitchFamily="34" charset="-122"/>
-                <a:cs typeface="メイリオ" pitchFamily="34" charset="-120"/>
-              </a:rPr>
-              <a:t>企業連携</a:t>
-            </a:r>
-            <a:endParaRPr lang="en-US" sz="1400" dirty="0"/>
-          </a:p>
-        </p:txBody>
-      </p:sp>
-      <p:sp>
-        <p:nvSpPr>
-          <p:cNvPr id="15" name="Text 13"/>
-          <p:cNvSpPr txBox="1"/>
-          <p:nvPr/>
-        </p:nvSpPr>
-        <p:spPr>
-          <a:xfrm>
-            <a:off x="1828800" y="3182112"/>
-            <a:ext cx="9674352" cy="329184"/>
-          </a:xfrm>
-          <a:prstGeom prst="rect">
-            <a:avLst/>
-          </a:prstGeom>
-          <a:noFill/>
-          <a:ln/>
-        </p:spPr>
-        <p:txBody>
-          <a:bodyPr wrap="square" lIns="0" tIns="0" rIns="0" bIns="0" rtlCol="0" anchor="ctr"/>
-          <a:lstStyle/>
-          <a:p>
-            <a:pPr indent="0" marL="0">
-              <a:buNone/>
-            </a:pPr>
-            <a:r>
-              <a:rPr lang="en-US" sz="1400" dirty="0">
-                <a:solidFill>
-                  <a:srgbClr val="2B2620"/>
-                </a:solidFill>
-                <a:latin typeface="メイリオ" pitchFamily="34" charset="0"/>
-                <a:ea typeface="メイリオ" pitchFamily="34" charset="-122"/>
-                <a:cs typeface="メイリオ" pitchFamily="34" charset="-120"/>
-              </a:rPr>
-              <a:t>オンライン対話サービス「ThirdTalk」特別対談番組に出演</a:t>
-            </a:r>
-            <a:endParaRPr lang="en-US" sz="1400" dirty="0"/>
-          </a:p>
-        </p:txBody>
-      </p:sp>
-      <p:sp>
-        <p:nvSpPr>
-          <p:cNvPr id="16" name="Text 14"/>
-          <p:cNvSpPr txBox="1"/>
-          <p:nvPr/>
-        </p:nvSpPr>
-        <p:spPr>
-          <a:xfrm>
-            <a:off x="1828800" y="3511296"/>
-            <a:ext cx="9674352" cy="274320"/>
-          </a:xfrm>
-          <a:prstGeom prst="rect">
-            <a:avLst/>
-          </a:prstGeom>
-          <a:noFill/>
-          <a:ln/>
-        </p:spPr>
-        <p:txBody>
-          <a:bodyPr wrap="square" lIns="0" tIns="0" rIns="0" bIns="0" rtlCol="0" anchor="ctr"/>
-          <a:lstStyle/>
-          <a:p>
-            <a:pPr indent="0" marL="0">
-              <a:buNone/>
-            </a:pPr>
-            <a:r>
-              <a:rPr lang="en-US" sz="1200" dirty="0">
-                <a:solidFill>
-                  <a:srgbClr val="8B8175"/>
-                </a:solidFill>
-                <a:latin typeface="メイリオ" pitchFamily="34" charset="0"/>
-                <a:ea typeface="メイリオ" pitchFamily="34" charset="-122"/>
-                <a:cs typeface="メイリオ" pitchFamily="34" charset="-120"/>
-              </a:rPr>
-              <a:t>株式会社ファンコミュニケーションズ ニュースリリース（2022.8.26）</a:t>
-            </a:r>
-            <a:endParaRPr lang="en-US" sz="1200" dirty="0"/>
-          </a:p>
-        </p:txBody>
-      </p:sp>
-      <p:sp>
-        <p:nvSpPr>
-          <p:cNvPr id="17" name="Shape 15"/>
-          <p:cNvSpPr/>
-          <p:nvPr/>
-        </p:nvSpPr>
-        <p:spPr>
-          <a:xfrm>
-            <a:off x="685800" y="3822192"/>
-            <a:ext cx="10820095" cy="7315"/>
-          </a:xfrm>
-          <a:prstGeom prst="rect">
-            <a:avLst/>
-          </a:prstGeom>
-          <a:solidFill>
-            <a:srgbClr val="D2C4AE"/>
-          </a:solidFill>
-          <a:ln/>
-        </p:spPr>
-      </p:sp>
-      <p:sp>
-        <p:nvSpPr>
-          <p:cNvPr id="18" name="Text 16"/>
-          <p:cNvSpPr txBox="1"/>
-          <p:nvPr/>
-        </p:nvSpPr>
-        <p:spPr>
-          <a:xfrm>
-            <a:off x="685800" y="3950208"/>
-            <a:ext cx="1143000" cy="274320"/>
-          </a:xfrm>
-          <a:prstGeom prst="rect">
-            <a:avLst/>
-          </a:prstGeom>
-          <a:noFill/>
-          <a:ln/>
-        </p:spPr>
-        <p:txBody>
-          <a:bodyPr wrap="square" lIns="0" tIns="0" rIns="0" bIns="0" rtlCol="0" anchor="ctr"/>
-          <a:lstStyle/>
-          <a:p>
-            <a:pPr indent="0" marL="0">
-              <a:buNone/>
-            </a:pPr>
-            <a:r>
-              <a:rPr lang="en-US" sz="1400" b="1" spc="100" kern="0" dirty="0">
-                <a:solidFill>
-                  <a:srgbClr val="9C5446"/>
-                </a:solidFill>
-                <a:latin typeface="メイリオ" pitchFamily="34" charset="0"/>
-                <a:ea typeface="メイリオ" pitchFamily="34" charset="-122"/>
-                <a:cs typeface="メイリオ" pitchFamily="34" charset="-120"/>
-              </a:rPr>
-              <a:t>社会貢献</a:t>
-            </a:r>
-            <a:endParaRPr lang="en-US" sz="1400" dirty="0"/>
-          </a:p>
-        </p:txBody>
-      </p:sp>
-      <p:sp>
-        <p:nvSpPr>
-          <p:cNvPr id="19" name="Text 17"/>
-          <p:cNvSpPr txBox="1"/>
-          <p:nvPr/>
-        </p:nvSpPr>
-        <p:spPr>
-          <a:xfrm>
-            <a:off x="1828800" y="3913632"/>
-            <a:ext cx="9674352" cy="329184"/>
-          </a:xfrm>
-          <a:prstGeom prst="rect">
-            <a:avLst/>
-          </a:prstGeom>
-          <a:noFill/>
-          <a:ln/>
-        </p:spPr>
-        <p:txBody>
-          <a:bodyPr wrap="square" lIns="0" tIns="0" rIns="0" bIns="0" rtlCol="0" anchor="ctr"/>
-          <a:lstStyle/>
-          <a:p>
-            <a:pPr indent="0" marL="0">
-              <a:buNone/>
-            </a:pPr>
-            <a:r>
-              <a:rPr lang="en-US" sz="1400" dirty="0">
-                <a:solidFill>
-                  <a:srgbClr val="2B2620"/>
-                </a:solidFill>
-                <a:latin typeface="メイリオ" pitchFamily="34" charset="0"/>
-                <a:ea typeface="メイリオ" pitchFamily="34" charset="-122"/>
-                <a:cs typeface="メイリオ" pitchFamily="34" charset="-120"/>
-              </a:rPr>
-              <a:t>パパゲーノ・アンバサダー認定 第一号（合同会社ここちめいど）</a:t>
-            </a:r>
-            <a:endParaRPr lang="en-US" sz="1400" dirty="0"/>
-          </a:p>
-        </p:txBody>
-      </p:sp>
-      <p:sp>
-        <p:nvSpPr>
-          <p:cNvPr id="20" name="Text 18"/>
-          <p:cNvSpPr txBox="1"/>
-          <p:nvPr/>
-        </p:nvSpPr>
-        <p:spPr>
-          <a:xfrm>
-            <a:off x="1828800" y="4242816"/>
-            <a:ext cx="9674352" cy="274320"/>
-          </a:xfrm>
-          <a:prstGeom prst="rect">
-            <a:avLst/>
-          </a:prstGeom>
-          <a:noFill/>
-          <a:ln/>
-        </p:spPr>
-        <p:txBody>
-          <a:bodyPr wrap="square" lIns="0" tIns="0" rIns="0" bIns="0" rtlCol="0" anchor="ctr"/>
-          <a:lstStyle/>
-          <a:p>
-            <a:pPr indent="0" marL="0">
-              <a:buNone/>
-            </a:pPr>
-            <a:r>
-              <a:rPr lang="en-US" sz="1200" dirty="0">
-                <a:solidFill>
-                  <a:srgbClr val="8B8175"/>
-                </a:solidFill>
-                <a:latin typeface="メイリオ" pitchFamily="34" charset="0"/>
-                <a:ea typeface="メイリオ" pitchFamily="34" charset="-122"/>
-                <a:cs typeface="メイリオ" pitchFamily="34" charset="-120"/>
-              </a:rPr>
-              <a:t>株式会社パパゲーノ プレスリリース</a:t>
-            </a:r>
-            <a:endParaRPr lang="en-US" sz="1200" dirty="0"/>
-          </a:p>
-        </p:txBody>
-      </p:sp>
-      <p:sp>
-        <p:nvSpPr>
-          <p:cNvPr id="21" name="Shape 19"/>
-          <p:cNvSpPr/>
-          <p:nvPr/>
-        </p:nvSpPr>
-        <p:spPr>
-          <a:xfrm>
-            <a:off x="685800" y="4553712"/>
-            <a:ext cx="10820095" cy="7315"/>
-          </a:xfrm>
-          <a:prstGeom prst="rect">
-            <a:avLst/>
-          </a:prstGeom>
-          <a:solidFill>
-            <a:srgbClr val="D2C4AE"/>
-          </a:solidFill>
-          <a:ln/>
-        </p:spPr>
-      </p:sp>
-      <p:sp>
-        <p:nvSpPr>
-          <p:cNvPr id="22" name="Text 20"/>
-          <p:cNvSpPr txBox="1"/>
-          <p:nvPr/>
-        </p:nvSpPr>
-        <p:spPr>
-          <a:xfrm>
-            <a:off x="685800" y="4681728"/>
-            <a:ext cx="1143000" cy="274320"/>
-          </a:xfrm>
-          <a:prstGeom prst="rect">
-            <a:avLst/>
-          </a:prstGeom>
-          <a:noFill/>
-          <a:ln/>
-        </p:spPr>
-        <p:txBody>
-          <a:bodyPr wrap="square" lIns="0" tIns="0" rIns="0" bIns="0" rtlCol="0" anchor="ctr"/>
-          <a:lstStyle/>
-          <a:p>
-            <a:pPr indent="0" marL="0">
-              <a:buNone/>
-            </a:pPr>
-            <a:r>
-              <a:rPr lang="en-US" sz="1400" b="1" spc="100" kern="0" dirty="0">
-                <a:solidFill>
-                  <a:srgbClr val="9C5446"/>
-                </a:solidFill>
-                <a:latin typeface="メイリオ" pitchFamily="34" charset="0"/>
-                <a:ea typeface="メイリオ" pitchFamily="34" charset="-122"/>
-                <a:cs typeface="メイリオ" pitchFamily="34" charset="-120"/>
-              </a:rPr>
-              <a:t>寄稿</a:t>
-            </a:r>
-            <a:endParaRPr lang="en-US" sz="1400" dirty="0"/>
-          </a:p>
-        </p:txBody>
-      </p:sp>
-      <p:sp>
-        <p:nvSpPr>
-          <p:cNvPr id="23" name="Text 21"/>
-          <p:cNvSpPr txBox="1"/>
-          <p:nvPr/>
-        </p:nvSpPr>
-        <p:spPr>
-          <a:xfrm>
-            <a:off x="1828800" y="4645152"/>
-            <a:ext cx="9674352" cy="329184"/>
-          </a:xfrm>
-          <a:prstGeom prst="rect">
-            <a:avLst/>
-          </a:prstGeom>
-          <a:noFill/>
-          <a:ln/>
-        </p:spPr>
-        <p:txBody>
-          <a:bodyPr wrap="square" lIns="0" tIns="0" rIns="0" bIns="0" rtlCol="0" anchor="ctr"/>
-          <a:lstStyle/>
-          <a:p>
-            <a:pPr indent="0" marL="0">
-              <a:buNone/>
-            </a:pPr>
-            <a:r>
-              <a:rPr lang="en-US" sz="1400" dirty="0">
-                <a:solidFill>
-                  <a:srgbClr val="2B2620"/>
-                </a:solidFill>
-                <a:latin typeface="メイリオ" pitchFamily="34" charset="0"/>
-                <a:ea typeface="メイリオ" pitchFamily="34" charset="-122"/>
-                <a:cs typeface="メイリオ" pitchFamily="34" charset="-120"/>
-              </a:rPr>
-              <a:t>『精神看護』特集「鍼灸は、なぜ「うつ」に効くのだろうか」</a:t>
-            </a:r>
-            <a:endParaRPr lang="en-US" sz="1400" dirty="0"/>
-          </a:p>
-        </p:txBody>
-      </p:sp>
-      <p:sp>
-        <p:nvSpPr>
-          <p:cNvPr id="24" name="Text 22"/>
-          <p:cNvSpPr txBox="1"/>
-          <p:nvPr/>
-        </p:nvSpPr>
-        <p:spPr>
-          <a:xfrm>
-            <a:off x="1828800" y="4974336"/>
-            <a:ext cx="9674352" cy="274320"/>
-          </a:xfrm>
-          <a:prstGeom prst="rect">
-            <a:avLst/>
-          </a:prstGeom>
-          <a:noFill/>
-          <a:ln/>
-        </p:spPr>
-        <p:txBody>
-          <a:bodyPr wrap="square" lIns="0" tIns="0" rIns="0" bIns="0" rtlCol="0" anchor="ctr"/>
-          <a:lstStyle/>
-          <a:p>
-            <a:pPr indent="0" marL="0">
-              <a:buNone/>
-            </a:pPr>
-            <a:r>
-              <a:rPr lang="en-US" sz="1200" dirty="0">
-                <a:solidFill>
-                  <a:srgbClr val="8B8175"/>
-                </a:solidFill>
-                <a:latin typeface="メイリオ" pitchFamily="34" charset="0"/>
-                <a:ea typeface="メイリオ" pitchFamily="34" charset="-122"/>
-                <a:cs typeface="メイリオ" pitchFamily="34" charset="-120"/>
-              </a:rPr>
-              <a:t>医学書院　Vol.28 No.3（2025.5）／ レポート「障害と美の多様性」Vol.28 No.5（2025.9）</a:t>
-            </a:r>
-            <a:endParaRPr lang="en-US" sz="1200" dirty="0"/>
-          </a:p>
-        </p:txBody>
-      </p:sp>
-      <p:sp>
-        <p:nvSpPr>
-          <p:cNvPr id="25" name="Shape 23"/>
-          <p:cNvSpPr/>
-          <p:nvPr/>
-        </p:nvSpPr>
-        <p:spPr>
-          <a:xfrm>
-            <a:off x="685800" y="5285232"/>
-            <a:ext cx="10820095" cy="7315"/>
-          </a:xfrm>
-          <a:prstGeom prst="rect">
-            <a:avLst/>
-          </a:prstGeom>
-          <a:solidFill>
-            <a:srgbClr val="D2C4AE"/>
-          </a:solidFill>
-          <a:ln/>
-        </p:spPr>
-      </p:sp>
-      <p:sp>
-        <p:nvSpPr>
-          <p:cNvPr id="26" name="Text 24"/>
-          <p:cNvSpPr txBox="1"/>
-          <p:nvPr/>
-        </p:nvSpPr>
-        <p:spPr>
-          <a:xfrm>
-            <a:off x="685800" y="5413248"/>
-            <a:ext cx="1143000" cy="274320"/>
-          </a:xfrm>
-          <a:prstGeom prst="rect">
-            <a:avLst/>
-          </a:prstGeom>
-          <a:noFill/>
-          <a:ln/>
-        </p:spPr>
-        <p:txBody>
-          <a:bodyPr wrap="square" lIns="0" tIns="0" rIns="0" bIns="0" rtlCol="0" anchor="ctr"/>
-          <a:lstStyle/>
-          <a:p>
-            <a:pPr indent="0" marL="0">
-              <a:buNone/>
-            </a:pPr>
-            <a:r>
-              <a:rPr lang="en-US" sz="1400" b="1" spc="100" kern="0" dirty="0">
-                <a:solidFill>
-                  <a:srgbClr val="9C5446"/>
-                </a:solidFill>
-                <a:latin typeface="メイリオ" pitchFamily="34" charset="0"/>
-                <a:ea typeface="メイリオ" pitchFamily="34" charset="-122"/>
-                <a:cs typeface="メイリオ" pitchFamily="34" charset="-120"/>
-              </a:rPr>
-              <a:t>学会</a:t>
-            </a:r>
-            <a:endParaRPr lang="en-US" sz="1400" dirty="0"/>
-          </a:p>
-        </p:txBody>
-      </p:sp>
-      <p:sp>
-        <p:nvSpPr>
-          <p:cNvPr id="27" name="Text 25"/>
-          <p:cNvSpPr txBox="1"/>
-          <p:nvPr/>
-        </p:nvSpPr>
-        <p:spPr>
-          <a:xfrm>
-            <a:off x="1828800" y="5376672"/>
-            <a:ext cx="9674352" cy="329184"/>
-          </a:xfrm>
-          <a:prstGeom prst="rect">
-            <a:avLst/>
-          </a:prstGeom>
-          <a:noFill/>
-          <a:ln/>
-        </p:spPr>
-        <p:txBody>
-          <a:bodyPr wrap="square" lIns="0" tIns="0" rIns="0" bIns="0" rtlCol="0" anchor="ctr"/>
-          <a:lstStyle/>
-          <a:p>
-            <a:pPr indent="0" marL="0">
-              <a:buNone/>
-            </a:pPr>
-            <a:r>
-              <a:rPr lang="en-US" sz="1400" dirty="0">
-                <a:solidFill>
-                  <a:srgbClr val="2B2620"/>
-                </a:solidFill>
-                <a:latin typeface="メイリオ" pitchFamily="34" charset="0"/>
-                <a:ea typeface="メイリオ" pitchFamily="34" charset="-122"/>
-                <a:cs typeface="メイリオ" pitchFamily="34" charset="-120"/>
-              </a:rPr>
-              <a:t>全日本鍼灸学会／日本うつ病学会（ポスター発表）／日本精神神経学会 シンポジスト</a:t>
-            </a:r>
-            <a:endParaRPr lang="en-US" sz="1400" dirty="0"/>
-          </a:p>
-        </p:txBody>
-      </p:sp>
-      <p:sp>
-        <p:nvSpPr>
-          <p:cNvPr id="28" name="Text 26"/>
-          <p:cNvSpPr txBox="1"/>
-          <p:nvPr/>
-        </p:nvSpPr>
-        <p:spPr>
-          <a:xfrm>
-            <a:off x="1828800" y="5705856"/>
-            <a:ext cx="9674352" cy="274320"/>
-          </a:xfrm>
-          <a:prstGeom prst="rect">
-            <a:avLst/>
-          </a:prstGeom>
-          <a:noFill/>
-          <a:ln/>
-        </p:spPr>
-        <p:txBody>
-          <a:bodyPr wrap="square" lIns="0" tIns="0" rIns="0" bIns="0" rtlCol="0" anchor="ctr"/>
-          <a:lstStyle/>
-          <a:p>
-            <a:pPr indent="0" marL="0">
-              <a:buNone/>
-            </a:pPr>
-            <a:r>
-              <a:rPr lang="en-US" sz="1200" dirty="0">
-                <a:solidFill>
-                  <a:srgbClr val="8B8175"/>
-                </a:solidFill>
-                <a:latin typeface="メイリオ" pitchFamily="34" charset="0"/>
-                <a:ea typeface="メイリオ" pitchFamily="34" charset="-122"/>
-                <a:cs typeface="メイリオ" pitchFamily="34" charset="-120"/>
-              </a:rPr>
-              <a:t>うつと不安症状を有する患者の実態調査 第3報・第4報（2024・2025・2026）　― 日本精神神経学会は2026.6 登壇</a:t>
-            </a:r>
-            <a:endParaRPr lang="en-US" sz="1200" dirty="0"/>
-          </a:p>
-        </p:txBody>
-      </p:sp>
-      <p:sp>
-        <p:nvSpPr>
-          <p:cNvPr id="29" name="Shape 27"/>
-          <p:cNvSpPr/>
-          <p:nvPr/>
-        </p:nvSpPr>
-        <p:spPr>
-          <a:xfrm>
-            <a:off x="685800" y="6016752"/>
-            <a:ext cx="10820095" cy="7315"/>
-          </a:xfrm>
-          <a:prstGeom prst="rect">
-            <a:avLst/>
-          </a:prstGeom>
-          <a:solidFill>
-            <a:srgbClr val="D2C4AE"/>
-          </a:solidFill>
-          <a:ln/>
-        </p:spPr>
-      </p:sp>
-      <p:sp>
-        <p:nvSpPr>
-          <p:cNvPr id="30" name="Text 28"/>
-          <p:cNvSpPr txBox="1"/>
-          <p:nvPr/>
-        </p:nvSpPr>
-        <p:spPr>
-          <a:xfrm>
-            <a:off x="7848295" y="6336792"/>
-            <a:ext cx="3657600" cy="274320"/>
-          </a:xfrm>
-          <a:prstGeom prst="rect">
-            <a:avLst/>
-          </a:prstGeom>
-          <a:noFill/>
-          <a:ln/>
-        </p:spPr>
-        <p:txBody>
-          <a:bodyPr wrap="square" lIns="0" tIns="0" rIns="0" bIns="0" rtlCol="0" anchor="ctr"/>
-          <a:lstStyle/>
-          <a:p>
-            <a:pPr algn="r" indent="0" marL="0">
-              <a:buNone/>
-            </a:pPr>
-            <a:r>
-              <a:rPr lang="en-US" sz="1200" dirty="0">
-                <a:solidFill>
-                  <a:srgbClr val="8B8175"/>
-                </a:solidFill>
-                <a:latin typeface="メイリオ" pitchFamily="34" charset="0"/>
-                <a:ea typeface="メイリオ" pitchFamily="34" charset="-122"/>
-                <a:cs typeface="メイリオ" pitchFamily="34" charset="-120"/>
-              </a:rPr>
-              <a:t>参考資料（本編には含みません）</a:t>
-            </a:r>
-            <a:endParaRPr lang="en-US" sz="1200" dirty="0"/>
-          </a:p>
-        </p:txBody>
-      </p:sp>
-      <p:sp>
-        <p:nvSpPr>
-          <p:cNvPr id="31" name="Text 29"/>
-          <p:cNvSpPr txBox="1"/>
-          <p:nvPr/>
-        </p:nvSpPr>
-        <p:spPr>
-          <a:xfrm>
-            <a:off x="685800" y="6336792"/>
-            <a:ext cx="7315200" cy="274320"/>
-          </a:xfrm>
-          <a:prstGeom prst="rect">
-            <a:avLst/>
-          </a:prstGeom>
-          <a:noFill/>
-          <a:ln/>
-        </p:spPr>
-        <p:txBody>
-          <a:bodyPr wrap="square" lIns="0" tIns="0" rIns="0" bIns="0" rtlCol="0" anchor="ctr"/>
-          <a:lstStyle/>
-          <a:p>
-            <a:pPr indent="0" marL="0">
-              <a:buNone/>
-            </a:pPr>
-            <a:r>
-              <a:rPr lang="en-US" sz="1200" spc="100" kern="0" dirty="0">
-                <a:solidFill>
-                  <a:srgbClr val="8B8175"/>
-                </a:solidFill>
-                <a:latin typeface="メイリオ" pitchFamily="34" charset="0"/>
-                <a:ea typeface="メイリオ" pitchFamily="34" charset="-122"/>
-                <a:cs typeface="メイリオ" pitchFamily="34" charset="-120"/>
-              </a:rPr>
-              <a:t>米倉まな｜アポプラスステーション様 ご提案</a:t>
-            </a:r>
-            <a:endParaRPr lang="en-US" sz="1200" dirty="0"/>
-          </a:p>
-        </p:txBody>
-      </p:sp>
-    </p:spTree>
-  </p:cSld>
-  <p:clrMapOvr>
-    <a:masterClrMapping/>
-  </p:clrMapOvr>
-</p:sld>
-</file>
-
-<file path=ppt/slides/slide2.xml><?xml version="1.0" encoding="utf-8"?>
-<p:sld xmlns:a="http://schemas.openxmlformats.org/drawingml/2006/main" xmlns:r="http://schemas.openxmlformats.org/officeDocument/2006/relationships" xmlns:p="http://schemas.openxmlformats.org/presentationml/2006/main">
-  <p:cSld name="Slide 2">
-    <p:bg>
-      <p:bgPr>
-        <a:solidFill>
-          <a:srgbClr val="2B2620"/>
-        </a:solidFill>
-      </p:bgPr>
-    </p:bg>
-    <p:spTree>
-      <p:nvGrpSpPr>
-        <p:cNvPr id="1" name=""/>
-        <p:cNvGrpSpPr/>
-        <p:nvPr/>
-      </p:nvGrpSpPr>
-      <p:grpSpPr>
-        <a:xfrm>
-          <a:off x="0" y="0"/>
-          <a:ext cx="0" cy="0"/>
-          <a:chOff x="0" y="0"/>
-          <a:chExt cx="0" cy="0"/>
-        </a:xfrm>
-      </p:grpSpPr>
-      <p:sp>
-        <p:nvSpPr>
-          <p:cNvPr id="2" name="Shape 0"/>
-          <p:cNvSpPr/>
-          <p:nvPr/>
-        </p:nvSpPr>
-        <p:spPr>
-          <a:xfrm>
-            <a:off x="685800" y="562356"/>
-            <a:ext cx="237744" cy="12802"/>
-          </a:xfrm>
-          <a:prstGeom prst="rect">
-            <a:avLst/>
-          </a:prstGeom>
-          <a:solidFill>
-            <a:srgbClr val="C97B68"/>
-          </a:solidFill>
-          <a:ln/>
-        </p:spPr>
-      </p:sp>
-      <p:sp>
-        <p:nvSpPr>
-          <p:cNvPr id="3" name="Text 1"/>
-          <p:cNvSpPr txBox="1"/>
-          <p:nvPr/>
-        </p:nvSpPr>
-        <p:spPr>
-          <a:xfrm>
-            <a:off x="996696" y="365760"/>
-            <a:ext cx="7315200" cy="310896"/>
-          </a:xfrm>
-          <a:prstGeom prst="rect">
-            <a:avLst/>
-          </a:prstGeom>
-          <a:noFill/>
-          <a:ln/>
-        </p:spPr>
-        <p:txBody>
-          <a:bodyPr wrap="square" lIns="0" tIns="0" rIns="0" bIns="0" rtlCol="0" anchor="ctr"/>
-          <a:lstStyle/>
-          <a:p>
-            <a:pPr indent="0" marL="0">
-              <a:buNone/>
-            </a:pPr>
-            <a:r>
-              <a:rPr lang="en-US" sz="1400" b="1" spc="200" kern="0" dirty="0">
-                <a:solidFill>
-                  <a:srgbClr val="C97B68"/>
-                </a:solidFill>
-                <a:latin typeface="メイリオ" pitchFamily="34" charset="0"/>
-                <a:ea typeface="メイリオ" pitchFamily="34" charset="-122"/>
-                <a:cs typeface="メイリオ" pitchFamily="34" charset="-120"/>
-              </a:rPr>
-              <a:t>01   </a:t>
-            </a:r>
-            <a:pPr indent="0" marL="0">
-              <a:buNone/>
-            </a:pPr>
-            <a:r>
-              <a:rPr lang="en-US" sz="1400" spc="300" kern="0" dirty="0">
-                <a:solidFill>
-                  <a:srgbClr val="BDB2A2"/>
-                </a:solidFill>
-                <a:latin typeface="メイリオ" pitchFamily="34" charset="0"/>
-                <a:ea typeface="メイリオ" pitchFamily="34" charset="-122"/>
-                <a:cs typeface="メイリオ" pitchFamily="34" charset="-120"/>
-              </a:rPr>
-              <a:t>ORIGIN</a:t>
-            </a:r>
-            <a:endParaRPr lang="en-US" sz="1400" dirty="0"/>
-          </a:p>
-        </p:txBody>
-      </p:sp>
-      <p:sp>
-        <p:nvSpPr>
-          <p:cNvPr id="4" name="Text 2"/>
-          <p:cNvSpPr txBox="1"/>
-          <p:nvPr/>
-        </p:nvSpPr>
-        <p:spPr>
-          <a:xfrm>
-            <a:off x="685800" y="777240"/>
-            <a:ext cx="10820095" cy="777240"/>
-          </a:xfrm>
-          <a:prstGeom prst="rect">
-            <a:avLst/>
-          </a:prstGeom>
-          <a:noFill/>
-          <a:ln/>
-        </p:spPr>
-        <p:txBody>
-          <a:bodyPr wrap="square" lIns="0" tIns="0" rIns="0" bIns="0" rtlCol="0" anchor="ctr"/>
-          <a:lstStyle/>
-          <a:p>
-            <a:pPr indent="0" marL="0">
-              <a:buNone/>
-            </a:pPr>
-            <a:r>
-              <a:rPr lang="en-US" sz="2800" b="1" spc="100" kern="0" dirty="0">
-                <a:solidFill>
-                  <a:srgbClr val="F3ECE0"/>
-                </a:solidFill>
-                <a:latin typeface="メイリオ" pitchFamily="34" charset="0"/>
-                <a:ea typeface="メイリオ" pitchFamily="34" charset="-122"/>
-                <a:cs typeface="メイリオ" pitchFamily="34" charset="-120"/>
-              </a:rPr>
               <a:t>私は2013年ごろまで、患者の側にいました</a:t>
             </a:r>
             <a:endParaRPr lang="en-US" sz="2800" dirty="0"/>
@@ -5957,7 +5272,7 @@
             <a:r>
               <a:rPr lang="en-US" sz="1600" b="1" dirty="0">
                 <a:solidFill>
-                  <a:srgbClr val="C97B68"/>
+                  <a:srgbClr val="9C5446"/>
                 </a:solidFill>
                 <a:latin typeface="メイリオ" pitchFamily="34" charset="0"/>
                 <a:ea typeface="メイリオ" pitchFamily="34" charset="-122"/>
@@ -5999,7 +5314,7 @@
             <a:r>
               <a:rPr lang="en-US" sz="1400" dirty="0">
                 <a:solidFill>
-                  <a:srgbClr val="BDB2A2"/>
+                  <a:srgbClr val="5A5249"/>
                 </a:solidFill>
                 <a:latin typeface="メイリオ" pitchFamily="34" charset="0"/>
                 <a:ea typeface="メイリオ" pitchFamily="34" charset="-122"/>
@@ -6016,7 +5331,7 @@
             <a:r>
               <a:rPr lang="en-US" sz="1400" b="1" dirty="0">
                 <a:solidFill>
-                  <a:srgbClr val="F3ECE0"/>
+                  <a:srgbClr val="2B2620"/>
                 </a:solidFill>
                 <a:latin typeface="メイリオ" pitchFamily="34" charset="0"/>
                 <a:ea typeface="メイリオ" pitchFamily="34" charset="-122"/>
@@ -6055,7 +5370,7 @@
             <a:r>
               <a:rPr lang="en-US" sz="1600" b="1" dirty="0">
                 <a:solidFill>
-                  <a:srgbClr val="C97B68"/>
+                  <a:srgbClr val="9C5446"/>
                 </a:solidFill>
                 <a:latin typeface="メイリオ" pitchFamily="34" charset="0"/>
                 <a:ea typeface="メイリオ" pitchFamily="34" charset="-122"/>
@@ -6097,7 +5412,7 @@
             <a:r>
               <a:rPr lang="en-US" sz="1400" dirty="0">
                 <a:solidFill>
-                  <a:srgbClr val="BDB2A2"/>
+                  <a:srgbClr val="5A5249"/>
                 </a:solidFill>
                 <a:latin typeface="メイリオ" pitchFamily="34" charset="0"/>
                 <a:ea typeface="メイリオ" pitchFamily="34" charset="-122"/>
@@ -6136,7 +5451,7 @@
             <a:r>
               <a:rPr lang="en-US" sz="1600" b="1" dirty="0">
                 <a:solidFill>
-                  <a:srgbClr val="C97B68"/>
+                  <a:srgbClr val="9C5446"/>
                 </a:solidFill>
                 <a:latin typeface="メイリオ" pitchFamily="34" charset="0"/>
                 <a:ea typeface="メイリオ" pitchFamily="34" charset="-122"/>
@@ -6178,7 +5493,7 @@
             <a:r>
               <a:rPr lang="en-US" sz="1400" dirty="0">
                 <a:solidFill>
-                  <a:srgbClr val="BDB2A2"/>
+                  <a:srgbClr val="5A5249"/>
                 </a:solidFill>
                 <a:latin typeface="メイリオ" pitchFamily="34" charset="0"/>
                 <a:ea typeface="メイリオ" pitchFamily="34" charset="-122"/>
@@ -6220,7 +5535,7 @@
             <a:r>
               <a:rPr lang="en-US" sz="2400" b="1" dirty="0">
                 <a:solidFill>
-                  <a:srgbClr val="F3ECE0"/>
+                  <a:srgbClr val="2B2620"/>
                 </a:solidFill>
                 <a:latin typeface="メイリオ" pitchFamily="34" charset="0"/>
                 <a:ea typeface="メイリオ" pitchFamily="34" charset="-122"/>
@@ -6240,7 +5555,7 @@
             <a:r>
               <a:rPr lang="en-US" sz="2400" b="1" dirty="0">
                 <a:solidFill>
-                  <a:srgbClr val="F3ECE0"/>
+                  <a:srgbClr val="2B2620"/>
                 </a:solidFill>
                 <a:latin typeface="メイリオ" pitchFamily="34" charset="0"/>
                 <a:ea typeface="メイリオ" pitchFamily="34" charset="-122"/>
@@ -6282,7 +5597,7 @@
             <a:r>
               <a:rPr lang="en-US" sz="1400" dirty="0">
                 <a:solidFill>
-                  <a:srgbClr val="BDB2A2"/>
+                  <a:srgbClr val="5A5249"/>
                 </a:solidFill>
                 <a:latin typeface="メイリオ" pitchFamily="34" charset="0"/>
                 <a:ea typeface="メイリオ" pitchFamily="34" charset="-122"/>
@@ -6321,7 +5636,7 @@
             <a:r>
               <a:rPr lang="en-US" sz="1200" spc="100" kern="0" dirty="0">
                 <a:solidFill>
-                  <a:srgbClr val="BDB2A2"/>
+                  <a:srgbClr val="8B8175"/>
                 </a:solidFill>
                 <a:latin typeface="メイリオ" pitchFamily="34" charset="0"/>
                 <a:ea typeface="メイリオ" pitchFamily="34" charset="-122"/>
@@ -6360,13 +5675,13 @@
             <a:r>
               <a:rPr lang="en-US" sz="1200" dirty="0">
                 <a:solidFill>
-                  <a:srgbClr val="BDB2A2"/>
-                </a:solidFill>
-                <a:latin typeface="メイリオ" pitchFamily="34" charset="0"/>
-                <a:ea typeface="メイリオ" pitchFamily="34" charset="-122"/>
-                <a:cs typeface="メイリオ" pitchFamily="34" charset="-120"/>
-              </a:rPr>
-              <a:t>0:20 → 0:55</a:t>
+                  <a:srgbClr val="8B8175"/>
+                </a:solidFill>
+                <a:latin typeface="メイリオ" pitchFamily="34" charset="0"/>
+                <a:ea typeface="メイリオ" pitchFamily="34" charset="-122"/>
+                <a:cs typeface="メイリオ" pitchFamily="34" charset="-120"/>
+              </a:rPr>
+              <a:t>0:20 → 0:50</a:t>
             </a:r>
             <a:endParaRPr lang="en-US" sz="1200" dirty="0"/>
           </a:p>
@@ -6510,7 +5825,7 @@
                 <a:ea typeface="メイリオ" pitchFamily="34" charset="-122"/>
                 <a:cs typeface="メイリオ" pitchFamily="34" charset="-120"/>
               </a:rPr>
-              <a:t>臨床・育成・研究の3本を、11年まわしてきました</a:t>
+              <a:t>臨床・育成・研究の3本を、12年しています</a:t>
             </a:r>
             <a:endParaRPr lang="en-US" sz="2800" dirty="0"/>
           </a:p>
@@ -7019,7 +6334,7 @@
                 <a:ea typeface="メイリオ" pitchFamily="34" charset="-122"/>
                 <a:cs typeface="メイリオ" pitchFamily="34" charset="-120"/>
               </a:rPr>
-              <a:t>11年目</a:t>
+              <a:t>12年目</a:t>
             </a:r>
             <a:endParaRPr lang="en-US" sz="2600" dirty="0"/>
           </a:p>
@@ -7370,7 +6685,7 @@
                 <a:ea typeface="メイリオ" pitchFamily="34" charset="-122"/>
                 <a:cs typeface="メイリオ" pitchFamily="34" charset="-120"/>
               </a:rPr>
-              <a:t>0:55 → 1:30</a:t>
+              <a:t>0:50 → 1:20</a:t>
             </a:r>
             <a:endParaRPr lang="en-US" sz="1200" dirty="0"/>
           </a:p>
@@ -7390,7 +6705,7 @@
     <p:bg>
       <p:bgPr>
         <a:solidFill>
-          <a:srgbClr val="2B2620"/>
+          <a:srgbClr val="F3EADB"/>
         </a:solidFill>
       </p:bgPr>
     </p:bg>
@@ -7423,7 +6738,7 @@
             <a:avLst/>
           </a:prstGeom>
           <a:solidFill>
-            <a:srgbClr val="C97B68"/>
+            <a:srgbClr val="9C5446"/>
           </a:solidFill>
           <a:ln/>
         </p:spPr>
@@ -7455,7 +6770,7 @@
             <a:r>
               <a:rPr lang="en-US" sz="1400" b="1" spc="200" kern="0" dirty="0">
                 <a:solidFill>
-                  <a:srgbClr val="C97B68"/>
+                  <a:srgbClr val="9C5446"/>
                 </a:solidFill>
                 <a:latin typeface="メイリオ" pitchFamily="34" charset="0"/>
                 <a:ea typeface="メイリオ" pitchFamily="34" charset="-122"/>
@@ -7469,13 +6784,13 @@
             <a:r>
               <a:rPr lang="en-US" sz="1400" spc="300" kern="0" dirty="0">
                 <a:solidFill>
-                  <a:srgbClr val="BDB2A2"/>
-                </a:solidFill>
-                <a:latin typeface="メイリオ" pitchFamily="34" charset="0"/>
-                <a:ea typeface="メイリオ" pitchFamily="34" charset="-122"/>
-                <a:cs typeface="メイリオ" pitchFamily="34" charset="-120"/>
-              </a:rPr>
-              <a:t>ISSUE</a:t>
+                  <a:srgbClr val="8B8175"/>
+                </a:solidFill>
+                <a:latin typeface="メイリオ" pitchFamily="34" charset="0"/>
+                <a:ea typeface="メイリオ" pitchFamily="34" charset="-122"/>
+                <a:cs typeface="メイリオ" pitchFamily="34" charset="-120"/>
+              </a:rPr>
+              <a:t>STRENGTH</a:t>
             </a:r>
             <a:endParaRPr lang="en-US" sz="1400" dirty="0"/>
           </a:p>
@@ -7508,13 +6823,13 @@
             <a:r>
               <a:rPr lang="en-US" sz="2800" b="1" spc="100" kern="0" dirty="0">
                 <a:solidFill>
-                  <a:srgbClr val="F3ECE0"/>
-                </a:solidFill>
-                <a:latin typeface="メイリオ" pitchFamily="34" charset="0"/>
-                <a:ea typeface="メイリオ" pitchFamily="34" charset="-122"/>
-                <a:cs typeface="メイリオ" pitchFamily="34" charset="-120"/>
-              </a:rPr>
-              <a:t>これは私の実感であり、社会の数字でもあります</a:t>
+                  <a:srgbClr val="2B2620"/>
+                </a:solidFill>
+                <a:latin typeface="メイリオ" pitchFamily="34" charset="0"/>
+                <a:ea typeface="メイリオ" pitchFamily="34" charset="-122"/>
+                <a:cs typeface="メイリオ" pitchFamily="34" charset="-120"/>
+              </a:rPr>
+              <a:t>企業の新規事業に、専門家として入ってきました</a:t>
             </a:r>
             <a:endParaRPr lang="en-US" sz="2800" dirty="0"/>
           </a:p>
@@ -7522,38 +6837,65 @@
       </p:sp>
       <p:sp>
         <p:nvSpPr>
-          <p:cNvPr id="5" name="Text 3"/>
-          <p:cNvSpPr txBox="1"/>
-          <p:nvPr/>
-        </p:nvSpPr>
-        <p:spPr>
-          <a:xfrm>
-            <a:off x="685800" y="1627632"/>
-            <a:ext cx="5029200" cy="256032"/>
-          </a:xfrm>
-          <a:prstGeom prst="rect">
-            <a:avLst/>
-          </a:prstGeom>
-          <a:noFill/>
-          <a:ln/>
-        </p:spPr>
-        <p:txBody>
-          <a:bodyPr wrap="square" lIns="0" tIns="0" rIns="0" bIns="0" rtlCol="0" anchor="ctr"/>
-          <a:lstStyle/>
-          <a:p>
-            <a:pPr indent="0" marL="0">
-              <a:buNone/>
-            </a:pPr>
-            <a:r>
-              <a:rPr lang="en-US" sz="1400" b="1" spc="200" kern="0" dirty="0">
-                <a:solidFill>
-                  <a:srgbClr val="C97B68"/>
-                </a:solidFill>
-                <a:latin typeface="メイリオ" pitchFamily="34" charset="0"/>
-                <a:ea typeface="メイリオ" pitchFamily="34" charset="-122"/>
-                <a:cs typeface="メイリオ" pitchFamily="34" charset="-120"/>
-              </a:rPr>
-              <a:t>社会で起きていること</a:t>
+          <p:cNvPr id="5" name="Shape 3"/>
+          <p:cNvSpPr/>
+          <p:nvPr/>
+        </p:nvSpPr>
+        <p:spPr>
+          <a:xfrm>
+            <a:off x="685800" y="1691640"/>
+            <a:ext cx="3456432" cy="2651760"/>
+          </a:xfrm>
+          <a:prstGeom prst="roundRect">
+            <a:avLst>
+              <a:gd name="adj" fmla="val 1724"/>
+            </a:avLst>
+          </a:prstGeom>
+          <a:solidFill>
+            <a:srgbClr val="FBF6EC"/>
+          </a:solidFill>
+          <a:ln w="9525">
+            <a:solidFill>
+              <a:srgbClr val="D2C4AE"/>
+            </a:solidFill>
+            <a:prstDash val="solid"/>
+          </a:ln>
+        </p:spPr>
+      </p:sp>
+      <p:sp>
+        <p:nvSpPr>
+          <p:cNvPr id="6" name="Text 4"/>
+          <p:cNvSpPr txBox="1"/>
+          <p:nvPr/>
+        </p:nvSpPr>
+        <p:spPr>
+          <a:xfrm>
+            <a:off x="941832" y="1856232"/>
+            <a:ext cx="2944368" cy="274320"/>
+          </a:xfrm>
+          <a:prstGeom prst="rect">
+            <a:avLst/>
+          </a:prstGeom>
+          <a:noFill/>
+          <a:ln/>
+        </p:spPr>
+        <p:txBody>
+          <a:bodyPr wrap="square" lIns="0" tIns="0" rIns="0" bIns="0" rtlCol="0" anchor="ctr"/>
+          <a:lstStyle/>
+          <a:p>
+            <a:pPr indent="0" marL="0">
+              <a:buNone/>
+            </a:pPr>
+            <a:r>
+              <a:rPr lang="en-US" sz="1400" b="1" spc="100" kern="0" dirty="0">
+                <a:solidFill>
+                  <a:srgbClr val="9C5446"/>
+                </a:solidFill>
+                <a:latin typeface="メイリオ" pitchFamily="34" charset="0"/>
+                <a:ea typeface="メイリオ" pitchFamily="34" charset="-122"/>
+                <a:cs typeface="メイリオ" pitchFamily="34" charset="-120"/>
+              </a:rPr>
+              <a:t>パパゲーノ</a:t>
             </a:r>
             <a:endParaRPr lang="en-US" sz="1400" dirty="0"/>
           </a:p>
@@ -7561,38 +6903,83 @@
       </p:sp>
       <p:sp>
         <p:nvSpPr>
-          <p:cNvPr id="6" name="Text 4"/>
-          <p:cNvSpPr txBox="1"/>
-          <p:nvPr/>
-        </p:nvSpPr>
-        <p:spPr>
-          <a:xfrm>
-            <a:off x="6309360" y="1627632"/>
-            <a:ext cx="5193792" cy="256032"/>
-          </a:xfrm>
-          <a:prstGeom prst="rect">
-            <a:avLst/>
-          </a:prstGeom>
-          <a:noFill/>
-          <a:ln/>
-        </p:spPr>
-        <p:txBody>
-          <a:bodyPr wrap="square" lIns="0" tIns="0" rIns="0" bIns="0" rtlCol="0" anchor="ctr"/>
-          <a:lstStyle/>
-          <a:p>
-            <a:pPr indent="0" marL="0">
-              <a:buNone/>
-            </a:pPr>
-            <a:r>
-              <a:rPr lang="en-US" sz="1400" b="1" spc="200" kern="0" dirty="0">
-                <a:solidFill>
-                  <a:srgbClr val="93AC93"/>
-                </a:solidFill>
-                <a:latin typeface="メイリオ" pitchFamily="34" charset="0"/>
-                <a:ea typeface="メイリオ" pitchFamily="34" charset="-122"/>
-                <a:cs typeface="メイリオ" pitchFamily="34" charset="-120"/>
-              </a:rPr>
-              <a:t>私が現場で見ていること</a:t>
+          <p:cNvPr id="7" name="Text 5"/>
+          <p:cNvSpPr txBox="1"/>
+          <p:nvPr/>
+        </p:nvSpPr>
+        <p:spPr>
+          <a:xfrm>
+            <a:off x="941832" y="2185416"/>
+            <a:ext cx="2944368" cy="457200"/>
+          </a:xfrm>
+          <a:prstGeom prst="rect">
+            <a:avLst/>
+          </a:prstGeom>
+          <a:noFill/>
+          <a:ln/>
+        </p:spPr>
+        <p:txBody>
+          <a:bodyPr wrap="square" lIns="0" tIns="0" rIns="0" bIns="0" rtlCol="0" anchor="t"/>
+          <a:lstStyle/>
+          <a:p>
+            <a:pPr indent="0" marL="0">
+              <a:lnSpc>
+                <a:spcPts val="2100"/>
+              </a:lnSpc>
+              <a:buNone/>
+            </a:pPr>
+            <a:r>
+              <a:rPr lang="en-US" sz="1700" b="1" dirty="0">
+                <a:solidFill>
+                  <a:srgbClr val="2B2620"/>
+                </a:solidFill>
+                <a:latin typeface="メイリオ" pitchFamily="34" charset="0"/>
+                <a:ea typeface="メイリオ" pitchFamily="34" charset="-122"/>
+                <a:cs typeface="メイリオ" pitchFamily="34" charset="-120"/>
+              </a:rPr>
+              <a:t>アンバサダー認定 第一号</a:t>
+            </a:r>
+            <a:endParaRPr lang="en-US" sz="1700" dirty="0"/>
+          </a:p>
+        </p:txBody>
+      </p:sp>
+      <p:sp>
+        <p:nvSpPr>
+          <p:cNvPr id="8" name="Text 6"/>
+          <p:cNvSpPr txBox="1"/>
+          <p:nvPr/>
+        </p:nvSpPr>
+        <p:spPr>
+          <a:xfrm>
+            <a:off x="941832" y="2697480"/>
+            <a:ext cx="2944368" cy="1444752"/>
+          </a:xfrm>
+          <a:prstGeom prst="rect">
+            <a:avLst/>
+          </a:prstGeom>
+          <a:noFill/>
+          <a:ln/>
+        </p:spPr>
+        <p:txBody>
+          <a:bodyPr wrap="square" lIns="0" tIns="0" rIns="0" bIns="0" rtlCol="0" anchor="t"/>
+          <a:lstStyle/>
+          <a:p>
+            <a:pPr indent="0" marL="0">
+              <a:lnSpc>
+                <a:spcPts val="1700"/>
+              </a:lnSpc>
+              <a:buNone/>
+            </a:pPr>
+            <a:r>
+              <a:rPr lang="en-US" sz="1400" dirty="0">
+                <a:solidFill>
+                  <a:srgbClr val="5A5249"/>
+                </a:solidFill>
+                <a:latin typeface="メイリオ" pitchFamily="34" charset="0"/>
+                <a:ea typeface="メイリオ" pitchFamily="34" charset="-122"/>
+                <a:cs typeface="メイリオ" pitchFamily="34" charset="-120"/>
+              </a:rPr>
+              <a:t>就労継続支援B型への発注を通じ、精神障害のある方が担う事業に伴走。認定制度の第一号企業です。</a:t>
             </a:r>
             <a:endParaRPr lang="en-US" sz="1400" dirty="0"/>
           </a:p>
@@ -7600,54 +6987,230 @@
       </p:sp>
       <p:sp>
         <p:nvSpPr>
-          <p:cNvPr id="7" name="Shape 5"/>
+          <p:cNvPr id="9" name="Shape 7"/>
           <p:cNvSpPr/>
           <p:nvPr/>
         </p:nvSpPr>
         <p:spPr>
           <a:xfrm>
-            <a:off x="685800" y="1847088"/>
-            <a:ext cx="5029200" cy="7315"/>
-          </a:xfrm>
-          <a:prstGeom prst="rect">
-            <a:avLst/>
+            <a:off x="4370832" y="1691640"/>
+            <a:ext cx="3456432" cy="2651760"/>
+          </a:xfrm>
+          <a:prstGeom prst="roundRect">
+            <a:avLst>
+              <a:gd name="adj" fmla="val 1724"/>
+            </a:avLst>
           </a:prstGeom>
           <a:solidFill>
-            <a:srgbClr val="4A423A"/>
+            <a:srgbClr val="FBF6EC"/>
           </a:solidFill>
-          <a:ln/>
-        </p:spPr>
-      </p:sp>
-      <p:sp>
-        <p:nvSpPr>
-          <p:cNvPr id="8" name="Shape 6"/>
+          <a:ln w="9525">
+            <a:solidFill>
+              <a:srgbClr val="D2C4AE"/>
+            </a:solidFill>
+            <a:prstDash val="solid"/>
+          </a:ln>
+        </p:spPr>
+      </p:sp>
+      <p:sp>
+        <p:nvSpPr>
+          <p:cNvPr id="10" name="Text 8"/>
+          <p:cNvSpPr txBox="1"/>
+          <p:nvPr/>
+        </p:nvSpPr>
+        <p:spPr>
+          <a:xfrm>
+            <a:off x="4626864" y="1856232"/>
+            <a:ext cx="2944368" cy="274320"/>
+          </a:xfrm>
+          <a:prstGeom prst="rect">
+            <a:avLst/>
+          </a:prstGeom>
+          <a:noFill/>
+          <a:ln/>
+        </p:spPr>
+        <p:txBody>
+          <a:bodyPr wrap="square" lIns="0" tIns="0" rIns="0" bIns="0" rtlCol="0" anchor="ctr"/>
+          <a:lstStyle/>
+          <a:p>
+            <a:pPr indent="0" marL="0">
+              <a:buNone/>
+            </a:pPr>
+            <a:r>
+              <a:rPr lang="en-US" sz="1400" b="1" spc="100" kern="0" dirty="0">
+                <a:solidFill>
+                  <a:srgbClr val="9C5446"/>
+                </a:solidFill>
+                <a:latin typeface="メイリオ" pitchFamily="34" charset="0"/>
+                <a:ea typeface="メイリオ" pitchFamily="34" charset="-122"/>
+                <a:cs typeface="メイリオ" pitchFamily="34" charset="-120"/>
+              </a:rPr>
+              <a:t>ファンコミュニケーションズ</a:t>
+            </a:r>
+            <a:endParaRPr lang="en-US" sz="1400" dirty="0"/>
+          </a:p>
+        </p:txBody>
+      </p:sp>
+      <p:sp>
+        <p:nvSpPr>
+          <p:cNvPr id="11" name="Text 9"/>
+          <p:cNvSpPr txBox="1"/>
+          <p:nvPr/>
+        </p:nvSpPr>
+        <p:spPr>
+          <a:xfrm>
+            <a:off x="4626864" y="2185416"/>
+            <a:ext cx="2944368" cy="457200"/>
+          </a:xfrm>
+          <a:prstGeom prst="rect">
+            <a:avLst/>
+          </a:prstGeom>
+          <a:noFill/>
+          <a:ln/>
+        </p:spPr>
+        <p:txBody>
+          <a:bodyPr wrap="square" lIns="0" tIns="0" rIns="0" bIns="0" rtlCol="0" anchor="t"/>
+          <a:lstStyle/>
+          <a:p>
+            <a:pPr indent="0" marL="0">
+              <a:lnSpc>
+                <a:spcPts val="2100"/>
+              </a:lnSpc>
+              <a:buNone/>
+            </a:pPr>
+            <a:r>
+              <a:rPr lang="en-US" sz="1700" b="1" dirty="0">
+                <a:solidFill>
+                  <a:srgbClr val="2B2620"/>
+                </a:solidFill>
+                <a:latin typeface="メイリオ" pitchFamily="34" charset="0"/>
+                <a:ea typeface="メイリオ" pitchFamily="34" charset="-122"/>
+                <a:cs typeface="メイリオ" pitchFamily="34" charset="-120"/>
+              </a:rPr>
+              <a:t>ThirdTalk（サードトーク）</a:t>
+            </a:r>
+            <a:endParaRPr lang="en-US" sz="1700" dirty="0"/>
+          </a:p>
+        </p:txBody>
+      </p:sp>
+      <p:sp>
+        <p:nvSpPr>
+          <p:cNvPr id="12" name="Text 10"/>
+          <p:cNvSpPr txBox="1"/>
+          <p:nvPr/>
+        </p:nvSpPr>
+        <p:spPr>
+          <a:xfrm>
+            <a:off x="4626864" y="2697480"/>
+            <a:ext cx="2944368" cy="1444752"/>
+          </a:xfrm>
+          <a:prstGeom prst="rect">
+            <a:avLst/>
+          </a:prstGeom>
+          <a:noFill/>
+          <a:ln/>
+        </p:spPr>
+        <p:txBody>
+          <a:bodyPr wrap="square" lIns="0" tIns="0" rIns="0" bIns="0" rtlCol="0" anchor="t"/>
+          <a:lstStyle/>
+          <a:p>
+            <a:pPr indent="0" marL="0">
+              <a:lnSpc>
+                <a:spcPts val="1700"/>
+              </a:lnSpc>
+              <a:buNone/>
+            </a:pPr>
+            <a:r>
+              <a:rPr lang="en-US" sz="1400" dirty="0">
+                <a:solidFill>
+                  <a:srgbClr val="5A5249"/>
+                </a:solidFill>
+                <a:latin typeface="メイリオ" pitchFamily="34" charset="0"/>
+                <a:ea typeface="メイリオ" pitchFamily="34" charset="-122"/>
+                <a:cs typeface="メイリオ" pitchFamily="34" charset="-120"/>
+              </a:rPr>
+              <a:t>「病院やカウンセリングに行く、その一歩手前」を想定したオンライン対話サービス。企画段階からご相談をいただきました。</a:t>
+            </a:r>
+            <a:endParaRPr lang="en-US" sz="1400" dirty="0"/>
+          </a:p>
+        </p:txBody>
+      </p:sp>
+      <p:sp>
+        <p:nvSpPr>
+          <p:cNvPr id="13" name="Shape 11"/>
           <p:cNvSpPr/>
           <p:nvPr/>
         </p:nvSpPr>
         <p:spPr>
           <a:xfrm>
-            <a:off x="6309360" y="1847088"/>
-            <a:ext cx="5193792" cy="7315"/>
-          </a:xfrm>
-          <a:prstGeom prst="rect">
-            <a:avLst/>
+            <a:off x="8055864" y="1691640"/>
+            <a:ext cx="3456432" cy="2651760"/>
+          </a:xfrm>
+          <a:prstGeom prst="roundRect">
+            <a:avLst>
+              <a:gd name="adj" fmla="val 1724"/>
+            </a:avLst>
           </a:prstGeom>
           <a:solidFill>
-            <a:srgbClr val="4A423A"/>
+            <a:srgbClr val="FBF6EC"/>
           </a:solidFill>
-          <a:ln/>
-        </p:spPr>
-      </p:sp>
-      <p:sp>
-        <p:nvSpPr>
-          <p:cNvPr id="9" name="Text 7"/>
-          <p:cNvSpPr txBox="1"/>
-          <p:nvPr/>
-        </p:nvSpPr>
-        <p:spPr>
-          <a:xfrm>
-            <a:off x="685800" y="1956816"/>
-            <a:ext cx="5029200" cy="822960"/>
+          <a:ln w="9525">
+            <a:solidFill>
+              <a:srgbClr val="D2C4AE"/>
+            </a:solidFill>
+            <a:prstDash val="solid"/>
+          </a:ln>
+        </p:spPr>
+      </p:sp>
+      <p:sp>
+        <p:nvSpPr>
+          <p:cNvPr id="14" name="Text 12"/>
+          <p:cNvSpPr txBox="1"/>
+          <p:nvPr/>
+        </p:nvSpPr>
+        <p:spPr>
+          <a:xfrm>
+            <a:off x="8311896" y="1856232"/>
+            <a:ext cx="2944368" cy="274320"/>
+          </a:xfrm>
+          <a:prstGeom prst="rect">
+            <a:avLst/>
+          </a:prstGeom>
+          <a:noFill/>
+          <a:ln/>
+        </p:spPr>
+        <p:txBody>
+          <a:bodyPr wrap="square" lIns="0" tIns="0" rIns="0" bIns="0" rtlCol="0" anchor="ctr"/>
+          <a:lstStyle/>
+          <a:p>
+            <a:pPr indent="0" marL="0">
+              <a:buNone/>
+            </a:pPr>
+            <a:r>
+              <a:rPr lang="en-US" sz="1400" b="1" spc="100" kern="0" dirty="0">
+                <a:solidFill>
+                  <a:srgbClr val="9C5446"/>
+                </a:solidFill>
+                <a:latin typeface="メイリオ" pitchFamily="34" charset="0"/>
+                <a:ea typeface="メイリオ" pitchFamily="34" charset="-122"/>
+                <a:cs typeface="メイリオ" pitchFamily="34" charset="-120"/>
+              </a:rPr>
+              <a:t>stand up</a:t>
+            </a:r>
+            <a:endParaRPr lang="en-US" sz="1400" dirty="0"/>
+          </a:p>
+        </p:txBody>
+      </p:sp>
+      <p:sp>
+        <p:nvSpPr>
+          <p:cNvPr id="15" name="Text 13"/>
+          <p:cNvSpPr txBox="1"/>
+          <p:nvPr/>
+        </p:nvSpPr>
+        <p:spPr>
+          <a:xfrm>
+            <a:off x="8311896" y="2185416"/>
+            <a:ext cx="2944368" cy="457200"/>
           </a:xfrm>
           <a:prstGeom prst="rect">
             <a:avLst/>
@@ -7661,37 +7224,62 @@
           <a:p>
             <a:pPr indent="0" marL="0">
               <a:lnSpc>
-                <a:spcPts val="1800"/>
+                <a:spcPts val="2100"/>
               </a:lnSpc>
               <a:buNone/>
             </a:pPr>
             <a:r>
               <a:rPr lang="en-US" sz="1700" b="1" dirty="0">
                 <a:solidFill>
-                  <a:srgbClr val="C97B68"/>
-                </a:solidFill>
-                <a:latin typeface="メイリオ" pitchFamily="34" charset="0"/>
-                <a:ea typeface="メイリオ" pitchFamily="34" charset="-122"/>
-                <a:cs typeface="メイリオ" pitchFamily="34" charset="-120"/>
-              </a:rPr>
-              <a:t>約600万人　</a:t>
-            </a:r>
+                  <a:srgbClr val="2B2620"/>
+                </a:solidFill>
+                <a:latin typeface="メイリオ" pitchFamily="34" charset="0"/>
+                <a:ea typeface="メイリオ" pitchFamily="34" charset="-122"/>
+                <a:cs typeface="メイリオ" pitchFamily="34" charset="-120"/>
+              </a:rPr>
+              <a:t>アミューズメント事業</a:t>
+            </a:r>
+            <a:endParaRPr lang="en-US" sz="1700" dirty="0"/>
+          </a:p>
+        </p:txBody>
+      </p:sp>
+      <p:sp>
+        <p:nvSpPr>
+          <p:cNvPr id="16" name="Text 14"/>
+          <p:cNvSpPr txBox="1"/>
+          <p:nvPr/>
+        </p:nvSpPr>
+        <p:spPr>
+          <a:xfrm>
+            <a:off x="8311896" y="2697480"/>
+            <a:ext cx="2944368" cy="1444752"/>
+          </a:xfrm>
+          <a:prstGeom prst="rect">
+            <a:avLst/>
+          </a:prstGeom>
+          <a:noFill/>
+          <a:ln/>
+        </p:spPr>
+        <p:txBody>
+          <a:bodyPr wrap="square" lIns="0" tIns="0" rIns="0" bIns="0" rtlCol="0" anchor="t"/>
+          <a:lstStyle/>
+          <a:p>
             <a:pPr indent="0" marL="0">
               <a:lnSpc>
-                <a:spcPts val="1800"/>
+                <a:spcPts val="1700"/>
               </a:lnSpc>
               <a:buNone/>
             </a:pPr>
             <a:r>
               <a:rPr lang="en-US" sz="1400" dirty="0">
                 <a:solidFill>
-                  <a:srgbClr val="F3ECE0"/>
-                </a:solidFill>
-                <a:latin typeface="メイリオ" pitchFamily="34" charset="0"/>
-                <a:ea typeface="メイリオ" pitchFamily="34" charset="-122"/>
-                <a:cs typeface="メイリオ" pitchFamily="34" charset="-120"/>
-              </a:rPr>
-              <a:t>精神疾患を持つ患者数。国は2024年、厚生労働白書で初めて「こころの健康」をテーマにしました。</a:t>
+                  <a:srgbClr val="5A5249"/>
+                </a:solidFill>
+                <a:latin typeface="メイリオ" pitchFamily="34" charset="0"/>
+                <a:ea typeface="メイリオ" pitchFamily="34" charset="-122"/>
+                <a:cs typeface="メイリオ" pitchFamily="34" charset="-120"/>
+              </a:rPr>
+              <a:t>新規事業の立ち上げについてご相談をいただき、現在もお取引が続いています。医療以外の業種にも入っています。</a:t>
             </a:r>
             <a:endParaRPr lang="en-US" sz="1400" dirty="0"/>
           </a:p>
@@ -7699,14 +7287,80 @@
       </p:sp>
       <p:sp>
         <p:nvSpPr>
-          <p:cNvPr id="10" name="Text 8"/>
-          <p:cNvSpPr txBox="1"/>
-          <p:nvPr/>
-        </p:nvSpPr>
-        <p:spPr>
-          <a:xfrm>
-            <a:off x="6309360" y="1956816"/>
-            <a:ext cx="5193792" cy="822960"/>
+          <p:cNvPr id="17" name="Shape 15"/>
+          <p:cNvSpPr/>
+          <p:nvPr/>
+        </p:nvSpPr>
+        <p:spPr>
+          <a:xfrm>
+            <a:off x="685800" y="4526280"/>
+            <a:ext cx="10820095" cy="1143000"/>
+          </a:xfrm>
+          <a:prstGeom prst="roundRect">
+            <a:avLst>
+              <a:gd name="adj" fmla="val 4000"/>
+            </a:avLst>
+          </a:prstGeom>
+          <a:solidFill>
+            <a:srgbClr val="FBF6EC"/>
+          </a:solidFill>
+          <a:ln w="9525">
+            <a:solidFill>
+              <a:srgbClr val="5E7060"/>
+            </a:solidFill>
+            <a:prstDash val="solid"/>
+          </a:ln>
+        </p:spPr>
+      </p:sp>
+      <p:sp>
+        <p:nvSpPr>
+          <p:cNvPr id="18" name="Text 16"/>
+          <p:cNvSpPr txBox="1"/>
+          <p:nvPr/>
+        </p:nvSpPr>
+        <p:spPr>
+          <a:xfrm>
+            <a:off x="960120" y="4727448"/>
+            <a:ext cx="10271455" cy="237744"/>
+          </a:xfrm>
+          <a:prstGeom prst="rect">
+            <a:avLst/>
+          </a:prstGeom>
+          <a:noFill/>
+          <a:ln/>
+        </p:spPr>
+        <p:txBody>
+          <a:bodyPr wrap="square" lIns="0" tIns="0" rIns="0" bIns="0" rtlCol="0" anchor="ctr"/>
+          <a:lstStyle/>
+          <a:p>
+            <a:pPr indent="0" marL="0">
+              <a:buNone/>
+            </a:pPr>
+            <a:r>
+              <a:rPr lang="en-US" sz="1200" b="1" spc="100" kern="0" dirty="0">
+                <a:solidFill>
+                  <a:srgbClr val="5E7060"/>
+                </a:solidFill>
+                <a:latin typeface="メイリオ" pitchFamily="34" charset="0"/>
+                <a:ea typeface="メイリオ" pitchFamily="34" charset="-122"/>
+                <a:cs typeface="メイリオ" pitchFamily="34" charset="-120"/>
+              </a:rPr>
+              <a:t>共通してやってきたこと</a:t>
+            </a:r>
+            <a:endParaRPr lang="en-US" sz="1200" dirty="0"/>
+          </a:p>
+        </p:txBody>
+      </p:sp>
+      <p:sp>
+        <p:nvSpPr>
+          <p:cNvPr id="19" name="Text 17"/>
+          <p:cNvSpPr txBox="1"/>
+          <p:nvPr/>
+        </p:nvSpPr>
+        <p:spPr>
+          <a:xfrm>
+            <a:off x="960120" y="5038344"/>
+            <a:ext cx="10271455" cy="411480"/>
           </a:xfrm>
           <a:prstGeom prst="rect">
             <a:avLst/>
@@ -7720,20 +7374,54 @@
           <a:p>
             <a:pPr indent="0" marL="0">
               <a:lnSpc>
-                <a:spcPts val="1800"/>
+                <a:spcPts val="1900"/>
               </a:lnSpc>
               <a:buNone/>
             </a:pPr>
             <a:r>
               <a:rPr lang="en-US" sz="1400" dirty="0">
                 <a:solidFill>
-                  <a:srgbClr val="BDB2A2"/>
-                </a:solidFill>
-                <a:latin typeface="メイリオ" pitchFamily="34" charset="0"/>
-                <a:ea typeface="メイリオ" pitchFamily="34" charset="-122"/>
-                <a:cs typeface="メイリオ" pitchFamily="34" charset="-120"/>
-              </a:rPr>
-              <a:t>のべ20,000人を診てきて、心の不調の方が明らかに増えました。</a:t>
+                  <a:srgbClr val="5A5249"/>
+                </a:solidFill>
+                <a:latin typeface="メイリオ" pitchFamily="34" charset="0"/>
+                <a:ea typeface="メイリオ" pitchFamily="34" charset="-122"/>
+                <a:cs typeface="メイリオ" pitchFamily="34" charset="-120"/>
+              </a:rPr>
+              <a:t>なかでもThirdTalkは、今日お話ししてきた</a:t>
+            </a:r>
+            <a:pPr indent="0" marL="0">
+              <a:lnSpc>
+                <a:spcPts val="1900"/>
+              </a:lnSpc>
+              <a:buNone/>
+            </a:pPr>
+            <a:r>
+              <a:rPr lang="en-US" sz="1400" b="1" dirty="0">
+                <a:solidFill>
+                  <a:srgbClr val="2B2620"/>
+                </a:solidFill>
+                <a:latin typeface="メイリオ" pitchFamily="34" charset="0"/>
+                <a:ea typeface="メイリオ" pitchFamily="34" charset="-122"/>
+                <a:cs typeface="メイリオ" pitchFamily="34" charset="-120"/>
+              </a:rPr>
+              <a:t>「病院の一歩手前」という発想を、そのまま事業にしたもの</a:t>
+            </a:r>
+            <a:pPr indent="0" marL="0">
+              <a:lnSpc>
+                <a:spcPts val="1900"/>
+              </a:lnSpc>
+              <a:buNone/>
+            </a:pPr>
+            <a:r>
+              <a:rPr lang="en-US" sz="1400" dirty="0">
+                <a:solidFill>
+                  <a:srgbClr val="5A5249"/>
+                </a:solidFill>
+                <a:latin typeface="メイリオ" pitchFamily="34" charset="0"/>
+                <a:ea typeface="メイリオ" pitchFamily="34" charset="-122"/>
+                <a:cs typeface="メイリオ" pitchFamily="34" charset="-120"/>
+              </a:rPr>
+              <a:t>でした。</a:t>
             </a:r>
             <a:endParaRPr lang="en-US" sz="1400" dirty="0"/>
           </a:p>
@@ -7741,334 +7429,13 @@
       </p:sp>
       <p:sp>
         <p:nvSpPr>
-          <p:cNvPr id="11" name="Shape 9"/>
-          <p:cNvSpPr/>
-          <p:nvPr/>
-        </p:nvSpPr>
-        <p:spPr>
-          <a:xfrm>
-            <a:off x="685800" y="2816352"/>
-            <a:ext cx="5029200" cy="7315"/>
-          </a:xfrm>
-          <a:prstGeom prst="rect">
-            <a:avLst/>
-          </a:prstGeom>
-          <a:solidFill>
-            <a:srgbClr val="4A423A"/>
-          </a:solidFill>
-          <a:ln/>
-        </p:spPr>
-      </p:sp>
-      <p:sp>
-        <p:nvSpPr>
-          <p:cNvPr id="12" name="Shape 10"/>
-          <p:cNvSpPr/>
-          <p:nvPr/>
-        </p:nvSpPr>
-        <p:spPr>
-          <a:xfrm>
-            <a:off x="6309360" y="2816352"/>
-            <a:ext cx="5193792" cy="7315"/>
-          </a:xfrm>
-          <a:prstGeom prst="rect">
-            <a:avLst/>
-          </a:prstGeom>
-          <a:solidFill>
-            <a:srgbClr val="4A423A"/>
-          </a:solidFill>
-          <a:ln/>
-        </p:spPr>
-      </p:sp>
-      <p:sp>
-        <p:nvSpPr>
-          <p:cNvPr id="13" name="Text 11"/>
-          <p:cNvSpPr txBox="1"/>
-          <p:nvPr/>
-        </p:nvSpPr>
-        <p:spPr>
-          <a:xfrm>
-            <a:off x="685800" y="2926080"/>
-            <a:ext cx="5029200" cy="822960"/>
-          </a:xfrm>
-          <a:prstGeom prst="rect">
-            <a:avLst/>
-          </a:prstGeom>
-          <a:noFill/>
-          <a:ln/>
-        </p:spPr>
-        <p:txBody>
-          <a:bodyPr wrap="square" lIns="0" tIns="0" rIns="0" bIns="0" rtlCol="0" anchor="t"/>
-          <a:lstStyle/>
-          <a:p>
-            <a:pPr indent="0" marL="0">
-              <a:lnSpc>
-                <a:spcPts val="1800"/>
-              </a:lnSpc>
-              <a:buNone/>
-            </a:pPr>
-            <a:r>
-              <a:rPr lang="en-US" sz="1700" b="1" dirty="0">
-                <a:solidFill>
-                  <a:srgbClr val="C97B68"/>
-                </a:solidFill>
-                <a:latin typeface="メイリオ" pitchFamily="34" charset="0"/>
-                <a:ea typeface="メイリオ" pitchFamily="34" charset="-122"/>
-                <a:cs typeface="メイリオ" pitchFamily="34" charset="-120"/>
-              </a:rPr>
-              <a:t>2028年4月　</a:t>
-            </a:r>
-            <a:pPr indent="0" marL="0">
-              <a:lnSpc>
-                <a:spcPts val="1800"/>
-              </a:lnSpc>
-              <a:buNone/>
-            </a:pPr>
-            <a:r>
-              <a:rPr lang="en-US" sz="1400" dirty="0">
-                <a:solidFill>
-                  <a:srgbClr val="F3ECE0"/>
-                </a:solidFill>
-                <a:latin typeface="メイリオ" pitchFamily="34" charset="0"/>
-                <a:ea typeface="メイリオ" pitchFamily="34" charset="-122"/>
-                <a:cs typeface="メイリオ" pitchFamily="34" charset="-120"/>
-              </a:rPr>
-              <a:t>50人未満の事業場にもストレスチェックが義務化。現在の実施率は6割弱です。</a:t>
-            </a:r>
-            <a:endParaRPr lang="en-US" sz="1400" dirty="0"/>
-          </a:p>
-        </p:txBody>
-      </p:sp>
-      <p:sp>
-        <p:nvSpPr>
-          <p:cNvPr id="14" name="Text 12"/>
-          <p:cNvSpPr txBox="1"/>
-          <p:nvPr/>
-        </p:nvSpPr>
-        <p:spPr>
-          <a:xfrm>
-            <a:off x="6309360" y="2926080"/>
-            <a:ext cx="5193792" cy="822960"/>
-          </a:xfrm>
-          <a:prstGeom prst="rect">
-            <a:avLst/>
-          </a:prstGeom>
-          <a:noFill/>
-          <a:ln/>
-        </p:spPr>
-        <p:txBody>
-          <a:bodyPr wrap="square" lIns="0" tIns="0" rIns="0" bIns="0" rtlCol="0" anchor="t"/>
-          <a:lstStyle/>
-          <a:p>
-            <a:pPr indent="0" marL="0">
-              <a:lnSpc>
-                <a:spcPts val="1800"/>
-              </a:lnSpc>
-              <a:buNone/>
-            </a:pPr>
-            <a:r>
-              <a:rPr lang="en-US" sz="1400" dirty="0">
-                <a:solidFill>
-                  <a:srgbClr val="BDB2A2"/>
-                </a:solidFill>
-                <a:latin typeface="メイリオ" pitchFamily="34" charset="0"/>
-                <a:ea typeface="メイリオ" pitchFamily="34" charset="-122"/>
-                <a:cs typeface="メイリオ" pitchFamily="34" charset="-120"/>
-              </a:rPr>
-              <a:t>気づいても、次に行く場所がない。精神科は予約が埋まり、新規を止める医療機関も出ています。</a:t>
-            </a:r>
-            <a:endParaRPr lang="en-US" sz="1400" dirty="0"/>
-          </a:p>
-        </p:txBody>
-      </p:sp>
-      <p:sp>
-        <p:nvSpPr>
-          <p:cNvPr id="15" name="Shape 13"/>
-          <p:cNvSpPr/>
-          <p:nvPr/>
-        </p:nvSpPr>
-        <p:spPr>
-          <a:xfrm>
-            <a:off x="685800" y="3785616"/>
-            <a:ext cx="5029200" cy="7315"/>
-          </a:xfrm>
-          <a:prstGeom prst="rect">
-            <a:avLst/>
-          </a:prstGeom>
-          <a:solidFill>
-            <a:srgbClr val="4A423A"/>
-          </a:solidFill>
-          <a:ln/>
-        </p:spPr>
-      </p:sp>
-      <p:sp>
-        <p:nvSpPr>
-          <p:cNvPr id="16" name="Shape 14"/>
-          <p:cNvSpPr/>
-          <p:nvPr/>
-        </p:nvSpPr>
-        <p:spPr>
-          <a:xfrm>
-            <a:off x="6309360" y="3785616"/>
-            <a:ext cx="5193792" cy="7315"/>
-          </a:xfrm>
-          <a:prstGeom prst="rect">
-            <a:avLst/>
-          </a:prstGeom>
-          <a:solidFill>
-            <a:srgbClr val="4A423A"/>
-          </a:solidFill>
-          <a:ln/>
-        </p:spPr>
-      </p:sp>
-      <p:sp>
-        <p:nvSpPr>
-          <p:cNvPr id="17" name="Text 15"/>
-          <p:cNvSpPr txBox="1"/>
-          <p:nvPr/>
-        </p:nvSpPr>
-        <p:spPr>
-          <a:xfrm>
-            <a:off x="685800" y="3895344"/>
-            <a:ext cx="5029200" cy="822960"/>
-          </a:xfrm>
-          <a:prstGeom prst="rect">
-            <a:avLst/>
-          </a:prstGeom>
-          <a:noFill/>
-          <a:ln/>
-        </p:spPr>
-        <p:txBody>
-          <a:bodyPr wrap="square" lIns="0" tIns="0" rIns="0" bIns="0" rtlCol="0" anchor="t"/>
-          <a:lstStyle/>
-          <a:p>
-            <a:pPr indent="0" marL="0">
-              <a:lnSpc>
-                <a:spcPts val="1800"/>
-              </a:lnSpc>
-              <a:buNone/>
-            </a:pPr>
-            <a:r>
-              <a:rPr lang="en-US" sz="1700" b="1" dirty="0">
-                <a:solidFill>
-                  <a:srgbClr val="C97B68"/>
-                </a:solidFill>
-                <a:latin typeface="メイリオ" pitchFamily="34" charset="0"/>
-                <a:ea typeface="メイリオ" pitchFamily="34" charset="-122"/>
-                <a:cs typeface="メイリオ" pitchFamily="34" charset="-120"/>
-              </a:rPr>
-              <a:t>年7.6兆円　</a:t>
-            </a:r>
-            <a:pPr indent="0" marL="0">
-              <a:lnSpc>
-                <a:spcPts val="1800"/>
-              </a:lnSpc>
-              <a:buNone/>
-            </a:pPr>
-            <a:r>
-              <a:rPr lang="en-US" sz="1400" dirty="0">
-                <a:solidFill>
-                  <a:srgbClr val="F3ECE0"/>
-                </a:solidFill>
-                <a:latin typeface="メイリオ" pitchFamily="34" charset="0"/>
-                <a:ea typeface="メイリオ" pitchFamily="34" charset="-122"/>
-                <a:cs typeface="メイリオ" pitchFamily="34" charset="-120"/>
-              </a:rPr>
-              <a:t>メンタル不調による経済損失。うち7.3兆円は「出勤しているのに力が出ない」分。</a:t>
-            </a:r>
-            <a:endParaRPr lang="en-US" sz="1400" dirty="0"/>
-          </a:p>
-        </p:txBody>
-      </p:sp>
-      <p:sp>
-        <p:nvSpPr>
-          <p:cNvPr id="18" name="Text 16"/>
-          <p:cNvSpPr txBox="1"/>
-          <p:nvPr/>
-        </p:nvSpPr>
-        <p:spPr>
-          <a:xfrm>
-            <a:off x="6309360" y="3895344"/>
-            <a:ext cx="5193792" cy="822960"/>
-          </a:xfrm>
-          <a:prstGeom prst="rect">
-            <a:avLst/>
-          </a:prstGeom>
-          <a:noFill/>
-          <a:ln/>
-        </p:spPr>
-        <p:txBody>
-          <a:bodyPr wrap="square" lIns="0" tIns="0" rIns="0" bIns="0" rtlCol="0" anchor="t"/>
-          <a:lstStyle/>
-          <a:p>
-            <a:pPr indent="0" marL="0">
-              <a:lnSpc>
-                <a:spcPts val="1800"/>
-              </a:lnSpc>
-              <a:buNone/>
-            </a:pPr>
-            <a:r>
-              <a:rPr lang="en-US" sz="1400" dirty="0">
-                <a:solidFill>
-                  <a:srgbClr val="BDB2A2"/>
-                </a:solidFill>
-                <a:latin typeface="メイリオ" pitchFamily="34" charset="0"/>
-                <a:ea typeface="メイリオ" pitchFamily="34" charset="-122"/>
-                <a:cs typeface="メイリオ" pitchFamily="34" charset="-120"/>
-              </a:rPr>
-              <a:t>休職や通院の手前で止まる方が、いちばん多い。この層は誰の担当でもありません。</a:t>
-            </a:r>
-            <a:endParaRPr lang="en-US" sz="1400" dirty="0"/>
-          </a:p>
-        </p:txBody>
-      </p:sp>
-      <p:sp>
-        <p:nvSpPr>
-          <p:cNvPr id="19" name="Text 17"/>
-          <p:cNvSpPr txBox="1"/>
-          <p:nvPr/>
-        </p:nvSpPr>
-        <p:spPr>
-          <a:xfrm>
-            <a:off x="685800" y="5120640"/>
-            <a:ext cx="10820095" cy="548640"/>
-          </a:xfrm>
-          <a:prstGeom prst="rect">
-            <a:avLst/>
-          </a:prstGeom>
-          <a:noFill/>
-          <a:ln/>
-        </p:spPr>
-        <p:txBody>
-          <a:bodyPr wrap="square" lIns="0" tIns="0" rIns="0" bIns="0" rtlCol="0" anchor="ctr"/>
-          <a:lstStyle/>
-          <a:p>
-            <a:pPr indent="0" marL="0">
-              <a:buNone/>
-            </a:pPr>
-            <a:r>
-              <a:rPr lang="en-US" sz="2400" b="1" dirty="0">
-                <a:solidFill>
-                  <a:srgbClr val="C97B68"/>
-                </a:solidFill>
-                <a:latin typeface="メイリオ" pitchFamily="34" charset="0"/>
-                <a:ea typeface="メイリオ" pitchFamily="34" charset="-122"/>
-                <a:cs typeface="メイリオ" pitchFamily="34" charset="-120"/>
-              </a:rPr>
-              <a:t>だから、未病の段階で止めておきたい。</a:t>
-            </a:r>
-            <a:endParaRPr lang="en-US" sz="2400" dirty="0"/>
-          </a:p>
-        </p:txBody>
-      </p:sp>
-      <p:sp>
-        <p:nvSpPr>
           <p:cNvPr id="20" name="Text 18"/>
           <p:cNvSpPr txBox="1"/>
           <p:nvPr/>
         </p:nvSpPr>
         <p:spPr>
           <a:xfrm>
-            <a:off x="685800" y="5852160"/>
+            <a:off x="685800" y="5833872"/>
             <a:ext cx="10820095" cy="457200"/>
           </a:xfrm>
           <a:prstGeom prst="rect">
@@ -8090,13 +7457,13 @@
             <a:r>
               <a:rPr lang="en-US" sz="1100" dirty="0">
                 <a:solidFill>
-                  <a:srgbClr val="BDB2A2"/>
-                </a:solidFill>
-                <a:latin typeface="メイリオ" pitchFamily="34" charset="0"/>
-                <a:ea typeface="メイリオ" pitchFamily="34" charset="-122"/>
-                <a:cs typeface="メイリオ" pitchFamily="34" charset="-120"/>
-              </a:rPr>
-              <a:t>出典：厚生労働省 患者調査／令和6年版 厚生労働白書／改正労働安全衛生法（2025年5月公布・2028年4月施行）／メンタルヘルス不調による経済損失の試算</a:t>
+                  <a:srgbClr val="8B8175"/>
+                </a:solidFill>
+                <a:latin typeface="メイリオ" pitchFamily="34" charset="0"/>
+                <a:ea typeface="メイリオ" pitchFamily="34" charset="-122"/>
+                <a:cs typeface="メイリオ" pitchFamily="34" charset="-120"/>
+              </a:rPr>
+              <a:t>出典：株式会社ファンコミュニケーションズ ニュースリリース（2022.8.26）／株式会社パパゲーノ プレスリリース</a:t>
             </a:r>
             <a:endParaRPr lang="en-US" sz="1100" dirty="0"/>
           </a:p>
@@ -8129,7 +7496,7 @@
             <a:r>
               <a:rPr lang="en-US" sz="1200" spc="100" kern="0" dirty="0">
                 <a:solidFill>
-                  <a:srgbClr val="BDB2A2"/>
+                  <a:srgbClr val="8B8175"/>
                 </a:solidFill>
                 <a:latin typeface="メイリオ" pitchFamily="34" charset="0"/>
                 <a:ea typeface="メイリオ" pitchFamily="34" charset="-122"/>
@@ -8168,13 +7535,13 @@
             <a:r>
               <a:rPr lang="en-US" sz="1200" dirty="0">
                 <a:solidFill>
-                  <a:srgbClr val="BDB2A2"/>
-                </a:solidFill>
-                <a:latin typeface="メイリオ" pitchFamily="34" charset="0"/>
-                <a:ea typeface="メイリオ" pitchFamily="34" charset="-122"/>
-                <a:cs typeface="メイリオ" pitchFamily="34" charset="-120"/>
-              </a:rPr>
-              <a:t>1:30 → 2:20</a:t>
+                  <a:srgbClr val="8B8175"/>
+                </a:solidFill>
+                <a:latin typeface="メイリオ" pitchFamily="34" charset="0"/>
+                <a:ea typeface="メイリオ" pitchFamily="34" charset="-122"/>
+                <a:cs typeface="メイリオ" pitchFamily="34" charset="-120"/>
+              </a:rPr>
+              <a:t>1:20 → 1:55</a:t>
             </a:r>
             <a:endParaRPr lang="en-US" sz="1200" dirty="0"/>
           </a:p>
@@ -8279,7 +7646,7 @@
                 <a:ea typeface="メイリオ" pitchFamily="34" charset="-122"/>
                 <a:cs typeface="メイリオ" pitchFamily="34" charset="-120"/>
               </a:rPr>
-              <a:t>CASE</a:t>
+              <a:t>ACTION</a:t>
             </a:r>
             <a:endParaRPr lang="en-US" sz="1400" dirty="0"/>
           </a:p>
@@ -8318,7 +7685,7 @@
                 <a:ea typeface="メイリオ" pitchFamily="34" charset="-122"/>
                 <a:cs typeface="メイリオ" pitchFamily="34" charset="-120"/>
               </a:rPr>
-              <a:t>「企業 × 鍼灸」は、すでに成立しています</a:t>
+              <a:t>新規事業「ねここち」を立ち上げます</a:t>
             </a:r>
             <a:endParaRPr lang="en-US" sz="2800" dirty="0"/>
           </a:p>
@@ -8332,8 +7699,8 @@
         </p:nvSpPr>
         <p:spPr>
           <a:xfrm>
-            <a:off x="685800" y="1783080"/>
-            <a:ext cx="6035040" cy="3840480"/>
+            <a:off x="685800" y="1874520"/>
+            <a:ext cx="6675120" cy="3840480"/>
           </a:xfrm>
           <a:prstGeom prst="rect">
             <a:avLst/>
@@ -8353,23 +7720,6 @@
               <a:buChar char="•"/>
             </a:pPr>
             <a:r>
-              <a:rPr lang="en-US" sz="1400" dirty="0">
-                <a:solidFill>
-                  <a:srgbClr val="5A5249"/>
-                </a:solidFill>
-                <a:latin typeface="メイリオ" pitchFamily="34" charset="0"/>
-                <a:ea typeface="メイリオ" pitchFamily="34" charset="-122"/>
-                <a:cs typeface="メイリオ" pitchFamily="34" charset="-120"/>
-              </a:rPr>
-              <a:t>睡眠製品のブレインスリープ社は、</a:t>
-            </a:r>
-            <a:pPr indent="0" marL="0">
-              <a:lnSpc>
-                <a:spcPts val="2400"/>
-              </a:lnSpc>
-              <a:buNone/>
-            </a:pPr>
-            <a:r>
               <a:rPr lang="en-US" sz="1400" b="1" dirty="0">
                 <a:solidFill>
                   <a:srgbClr val="2B2620"/>
@@ -8378,7 +7728,7 @@
                 <a:ea typeface="メイリオ" pitchFamily="34" charset="-122"/>
                 <a:cs typeface="メイリオ" pitchFamily="34" charset="-120"/>
               </a:rPr>
-              <a:t>睡眠専門の鍼灸マッサージ「コンディショニングスタジオ」</a:t>
+              <a:t>ねここち</a:t>
             </a:r>
             <a:pPr indent="0" marL="0">
               <a:lnSpc>
@@ -8398,7 +7748,7 @@
                 <a:ea typeface="メイリオ" pitchFamily="34" charset="-122"/>
                 <a:cs typeface="メイリオ" pitchFamily="34" charset="-120"/>
               </a:rPr>
-              <a:t>を自社ブランドで運営。枕の売り場ではなく、独立した鍼灸院です。</a:t>
+              <a:t>／頭オフ事業。考えごとで止まらない頭を、強制的にオフにする時間を売ります。いま準備中です。</a:t>
             </a:r>
             <a:endParaRPr lang="en-US" sz="1400" dirty="0"/>
           </a:p>
@@ -8419,7 +7769,7 @@
                 <a:ea typeface="メイリオ" pitchFamily="34" charset="-122"/>
                 <a:cs typeface="メイリオ" pitchFamily="34" charset="-120"/>
               </a:rPr>
-              <a:t>二子玉川・南青山・</a:t>
+              <a:t>扱うのは睡眠そのものではなく、</a:t>
             </a:r>
             <a:pPr indent="0" marL="0">
               <a:lnSpc>
@@ -8436,41 +7786,7 @@
                 <a:ea typeface="メイリオ" pitchFamily="34" charset="-122"/>
                 <a:cs typeface="メイリオ" pitchFamily="34" charset="-120"/>
               </a:rPr>
-              <a:t>有楽町マルイ</a:t>
-            </a:r>
-            <a:pPr indent="0" marL="0">
-              <a:lnSpc>
-                <a:spcPts val="2400"/>
-              </a:lnSpc>
-              <a:buNone/>
-            </a:pPr>
-            <a:r>
-              <a:rPr lang="en-US" sz="1400" dirty="0">
-                <a:solidFill>
-                  <a:srgbClr val="5A5249"/>
-                </a:solidFill>
-                <a:latin typeface="メイリオ" pitchFamily="34" charset="0"/>
-                <a:ea typeface="メイリオ" pitchFamily="34" charset="-122"/>
-                <a:cs typeface="メイリオ" pitchFamily="34" charset="-120"/>
-              </a:rPr>
-              <a:t>・東京ミッドタウン八重洲の</a:t>
-            </a:r>
-            <a:pPr indent="0" marL="0">
-              <a:lnSpc>
-                <a:spcPts val="2400"/>
-              </a:lnSpc>
-              <a:buNone/>
-            </a:pPr>
-            <a:r>
-              <a:rPr lang="en-US" sz="1400" b="1" dirty="0">
-                <a:solidFill>
-                  <a:srgbClr val="2B2620"/>
-                </a:solidFill>
-                <a:latin typeface="メイリオ" pitchFamily="34" charset="0"/>
-                <a:ea typeface="メイリオ" pitchFamily="34" charset="-122"/>
-                <a:cs typeface="メイリオ" pitchFamily="34" charset="-120"/>
-              </a:rPr>
-              <a:t>4店舗</a:t>
+              <a:t>思考が止まらない状態</a:t>
             </a:r>
             <a:pPr indent="0" marL="0">
               <a:lnSpc>
@@ -8490,7 +7806,7 @@
                 <a:ea typeface="メイリオ" pitchFamily="34" charset="-122"/>
                 <a:cs typeface="メイリオ" pitchFamily="34" charset="-120"/>
               </a:rPr>
-              <a:t>。商業施設側の丸井グループも、自らプレスリリースを出しています。</a:t>
+              <a:t>です。眠れないの手前にある、頭が休まらない時間を扱います。</a:t>
             </a:r>
             <a:endParaRPr lang="en-US" sz="1400" dirty="0"/>
           </a:p>
@@ -8511,7 +7827,7 @@
                 <a:ea typeface="メイリオ" pitchFamily="34" charset="-122"/>
                 <a:cs typeface="メイリオ" pitchFamily="34" charset="-120"/>
               </a:rPr>
-              <a:t>オープン以来</a:t>
+              <a:t>施術は</a:t>
             </a:r>
             <a:pPr indent="0" marL="0">
               <a:lnSpc>
@@ -8528,75 +7844,7 @@
                 <a:ea typeface="メイリオ" pitchFamily="34" charset="-122"/>
                 <a:cs typeface="メイリオ" pitchFamily="34" charset="-120"/>
               </a:rPr>
-              <a:t>累計1万人以上</a:t>
-            </a:r>
-            <a:pPr indent="0" marL="0">
-              <a:lnSpc>
-                <a:spcPts val="2400"/>
-              </a:lnSpc>
-              <a:buNone/>
-            </a:pPr>
-            <a:r>
-              <a:rPr lang="en-US" sz="1400" dirty="0">
-                <a:solidFill>
-                  <a:srgbClr val="5A5249"/>
-                </a:solidFill>
-                <a:latin typeface="メイリオ" pitchFamily="34" charset="0"/>
-                <a:ea typeface="メイリオ" pitchFamily="34" charset="-122"/>
-                <a:cs typeface="メイリオ" pitchFamily="34" charset="-120"/>
-              </a:rPr>
-              <a:t>が利用。自社研究では、1度の施術で眠りの深さが</a:t>
-            </a:r>
-            <a:pPr indent="0" marL="0">
-              <a:lnSpc>
-                <a:spcPts val="2400"/>
-              </a:lnSpc>
-              <a:buNone/>
-            </a:pPr>
-            <a:r>
-              <a:rPr lang="en-US" sz="1400" b="1" dirty="0">
-                <a:solidFill>
-                  <a:srgbClr val="2B2620"/>
-                </a:solidFill>
-                <a:latin typeface="メイリオ" pitchFamily="34" charset="0"/>
-                <a:ea typeface="メイリオ" pitchFamily="34" charset="-122"/>
-                <a:cs typeface="メイリオ" pitchFamily="34" charset="-120"/>
-              </a:rPr>
-              <a:t>35%</a:t>
-            </a:r>
-            <a:pPr indent="0" marL="0">
-              <a:lnSpc>
-                <a:spcPts val="2400"/>
-              </a:lnSpc>
-              <a:buNone/>
-            </a:pPr>
-            <a:r>
-              <a:rPr lang="en-US" sz="1400" dirty="0">
-                <a:solidFill>
-                  <a:srgbClr val="5A5249"/>
-                </a:solidFill>
-                <a:latin typeface="メイリオ" pitchFamily="34" charset="0"/>
-                <a:ea typeface="メイリオ" pitchFamily="34" charset="-122"/>
-                <a:cs typeface="メイリオ" pitchFamily="34" charset="-120"/>
-              </a:rPr>
-              <a:t>、疲労回復度が</a:t>
-            </a:r>
-            <a:pPr indent="0" marL="0">
-              <a:lnSpc>
-                <a:spcPts val="2400"/>
-              </a:lnSpc>
-              <a:buNone/>
-            </a:pPr>
-            <a:r>
-              <a:rPr lang="en-US" sz="1400" b="1" dirty="0">
-                <a:solidFill>
-                  <a:srgbClr val="2B2620"/>
-                </a:solidFill>
-                <a:latin typeface="メイリオ" pitchFamily="34" charset="0"/>
-                <a:ea typeface="メイリオ" pitchFamily="34" charset="-122"/>
-                <a:cs typeface="メイリオ" pitchFamily="34" charset="-120"/>
-              </a:rPr>
-              <a:t>59%</a:t>
+              <a:t>鍼灸師の国家資格を持つ人</a:t>
             </a:r>
             <a:pPr indent="0" marL="0">
               <a:lnSpc>
@@ -8616,7 +7864,7 @@
                 <a:ea typeface="メイリオ" pitchFamily="34" charset="-122"/>
                 <a:cs typeface="メイリオ" pitchFamily="34" charset="-120"/>
               </a:rPr>
-              <a:t>向上したと公表。</a:t>
+              <a:t>が行います。医療の知識を持つ人が、治療の手前の層に関わる形です。</a:t>
             </a:r>
             <a:endParaRPr lang="en-US" sz="1400" dirty="0"/>
           </a:p>
@@ -8637,7 +7885,7 @@
                 <a:ea typeface="メイリオ" pitchFamily="34" charset="-122"/>
                 <a:cs typeface="メイリオ" pitchFamily="34" charset="-120"/>
               </a:rPr>
-              <a:t>スタッフは全員が国家資格保有者。自社資格「スリーププランナー」も取得。</a:t>
+              <a:t>「治療」と身構えずに入れる入口をつくり、</a:t>
             </a:r>
             <a:pPr indent="0" marL="0">
               <a:lnSpc>
@@ -8654,7 +7902,7 @@
                 <a:ea typeface="メイリオ" pitchFamily="34" charset="-122"/>
                 <a:cs typeface="メイリオ" pitchFamily="34" charset="-120"/>
               </a:rPr>
-              <a:t>定額プラン</a:t>
+              <a:t>必要な人だけを鍼灸や医療につなぐ</a:t>
             </a:r>
             <a:pPr indent="0" marL="0">
               <a:lnSpc>
@@ -8674,7 +7922,7 @@
                 <a:ea typeface="メイリオ" pitchFamily="34" charset="-122"/>
                 <a:cs typeface="メイリオ" pitchFamily="34" charset="-120"/>
               </a:rPr>
-              <a:t>で、継続して通う前提が設計されています。</a:t>
+              <a:t>。未病の層に継続的に関わるための事業です。</a:t>
             </a:r>
             <a:endParaRPr lang="en-US" sz="1400" dirty="0"/>
           </a:p>
@@ -8688,20 +7936,20 @@
         </p:nvSpPr>
         <p:spPr>
           <a:xfrm>
-            <a:off x="7040880" y="1783080"/>
-            <a:ext cx="4462272" cy="3200400"/>
+            <a:off x="7726680" y="1783080"/>
+            <a:ext cx="3776472" cy="2286000"/>
           </a:xfrm>
           <a:prstGeom prst="roundRect">
             <a:avLst>
-              <a:gd name="adj" fmla="val 1429"/>
+              <a:gd name="adj" fmla="val 2000"/>
             </a:avLst>
           </a:prstGeom>
           <a:solidFill>
-            <a:srgbClr val="FBF6EC"/>
+            <a:srgbClr val="F3E3DE"/>
           </a:solidFill>
           <a:ln w="9525">
             <a:solidFill>
-              <a:srgbClr val="5E7060"/>
+              <a:srgbClr val="9C5446"/>
             </a:solidFill>
             <a:prstDash val="solid"/>
           </a:ln>
@@ -8715,34 +7963,34 @@
         </p:nvSpPr>
         <p:spPr>
           <a:xfrm>
-            <a:off x="7315200" y="1984248"/>
-            <a:ext cx="3913632" cy="237744"/>
-          </a:xfrm>
-          <a:prstGeom prst="rect">
-            <a:avLst/>
-          </a:prstGeom>
-          <a:noFill/>
-          <a:ln/>
-        </p:spPr>
-        <p:txBody>
-          <a:bodyPr wrap="square" lIns="0" tIns="0" rIns="0" bIns="0" rtlCol="0" anchor="ctr"/>
-          <a:lstStyle/>
-          <a:p>
-            <a:pPr indent="0" marL="0">
-              <a:buNone/>
-            </a:pPr>
-            <a:r>
-              <a:rPr lang="en-US" sz="1200" b="1" spc="100" kern="0" dirty="0">
-                <a:solidFill>
-                  <a:srgbClr val="5E7060"/>
-                </a:solidFill>
-                <a:latin typeface="メイリオ" pitchFamily="34" charset="0"/>
-                <a:ea typeface="メイリオ" pitchFamily="34" charset="-122"/>
-                <a:cs typeface="メイリオ" pitchFamily="34" charset="-120"/>
-              </a:rPr>
-              <a:t>ここから私が受け取ったこと</a:t>
-            </a:r>
-            <a:endParaRPr lang="en-US" sz="1200" dirty="0"/>
+            <a:off x="7726680" y="2011680"/>
+            <a:ext cx="3776472" cy="274320"/>
+          </a:xfrm>
+          <a:prstGeom prst="rect">
+            <a:avLst/>
+          </a:prstGeom>
+          <a:noFill/>
+          <a:ln/>
+        </p:spPr>
+        <p:txBody>
+          <a:bodyPr wrap="square" lIns="0" tIns="0" rIns="0" bIns="0" rtlCol="0" anchor="ctr"/>
+          <a:lstStyle/>
+          <a:p>
+            <a:pPr algn="ctr" indent="0" marL="0">
+              <a:buNone/>
+            </a:pPr>
+            <a:r>
+              <a:rPr lang="en-US" sz="1400" b="1" spc="300" kern="0" dirty="0">
+                <a:solidFill>
+                  <a:srgbClr val="9C5446"/>
+                </a:solidFill>
+                <a:latin typeface="メイリオ" pitchFamily="34" charset="0"/>
+                <a:ea typeface="メイリオ" pitchFamily="34" charset="-122"/>
+                <a:cs typeface="メイリオ" pitchFamily="34" charset="-120"/>
+              </a:rPr>
+              <a:t>1店舗あたり</a:t>
+            </a:r>
+            <a:endParaRPr lang="en-US" sz="1400" dirty="0"/>
           </a:p>
         </p:txBody>
       </p:sp>
@@ -8754,8 +8002,61 @@
         </p:nvSpPr>
         <p:spPr>
           <a:xfrm>
-            <a:off x="7315200" y="2295144"/>
-            <a:ext cx="3913632" cy="2468880"/>
+            <a:off x="7726680" y="2331720"/>
+            <a:ext cx="3776472" cy="731520"/>
+          </a:xfrm>
+          <a:prstGeom prst="rect">
+            <a:avLst/>
+          </a:prstGeom>
+          <a:noFill/>
+          <a:ln/>
+        </p:spPr>
+        <p:txBody>
+          <a:bodyPr wrap="square" lIns="0" tIns="0" rIns="0" bIns="0" rtlCol="0" anchor="ctr"/>
+          <a:lstStyle/>
+          <a:p>
+            <a:pPr algn="ctr" indent="0" marL="0">
+              <a:buNone/>
+            </a:pPr>
+            <a:r>
+              <a:rPr lang="en-US" sz="3200" b="1" dirty="0">
+                <a:solidFill>
+                  <a:srgbClr val="2B2620"/>
+                </a:solidFill>
+                <a:latin typeface="メイリオ" pitchFamily="34" charset="0"/>
+                <a:ea typeface="メイリオ" pitchFamily="34" charset="-122"/>
+                <a:cs typeface="メイリオ" pitchFamily="34" charset="-120"/>
+              </a:rPr>
+              <a:t>月次利益 30</a:t>
+            </a:r>
+            <a:pPr algn="ctr" indent="0" marL="0">
+              <a:buNone/>
+            </a:pPr>
+            <a:r>
+              <a:rPr lang="en-US" sz="1800" b="1" dirty="0">
+                <a:solidFill>
+                  <a:srgbClr val="2B2620"/>
+                </a:solidFill>
+                <a:latin typeface="メイリオ" pitchFamily="34" charset="0"/>
+                <a:ea typeface="メイリオ" pitchFamily="34" charset="-122"/>
+                <a:cs typeface="メイリオ" pitchFamily="34" charset="-120"/>
+              </a:rPr>
+              <a:t>万円</a:t>
+            </a:r>
+            <a:endParaRPr lang="en-US" sz="3200" dirty="0"/>
+          </a:p>
+        </p:txBody>
+      </p:sp>
+      <p:sp>
+        <p:nvSpPr>
+          <p:cNvPr id="9" name="Text 7"/>
+          <p:cNvSpPr txBox="1"/>
+          <p:nvPr/>
+        </p:nvSpPr>
+        <p:spPr>
+          <a:xfrm>
+            <a:off x="8001000" y="3154680"/>
+            <a:ext cx="3227832" cy="731520"/>
           </a:xfrm>
           <a:prstGeom prst="rect">
             <a:avLst/>
@@ -8767,9 +8068,9 @@
           <a:bodyPr wrap="square" lIns="0" tIns="0" rIns="0" bIns="0" rtlCol="0" anchor="t"/>
           <a:lstStyle/>
           <a:p>
-            <a:pPr indent="0" marL="0">
+            <a:pPr algn="ctr" indent="0" marL="0">
               <a:lnSpc>
-                <a:spcPts val="1900"/>
+                <a:spcPts val="1600"/>
               </a:lnSpc>
               <a:buNone/>
             </a:pPr>
@@ -8782,100 +8083,9 @@
                 <a:ea typeface="メイリオ" pitchFamily="34" charset="-122"/>
                 <a:cs typeface="メイリオ" pitchFamily="34" charset="-120"/>
               </a:rPr>
-              <a:t>製品を売って終わりにせず、施術という接点で人と関わり続ける。効果を数字で示し、資格者を自社で育て、定額で通ってもらう。このあとお話しする私の事業も、同じ構造です。</a:t>
+              <a:t>想定値。多店舗展開を前提に設計。</a:t>
             </a:r>
             <a:endParaRPr lang="en-US" sz="1400" dirty="0"/>
-          </a:p>
-          <a:p>
-            <a:pPr indent="0" marL="0">
-              <a:lnSpc>
-                <a:spcPts val="1900"/>
-              </a:lnSpc>
-              <a:buNone/>
-            </a:pPr>
-            <a:endParaRPr lang="en-US" sz="1400" dirty="0"/>
-          </a:p>
-          <a:p>
-            <a:pPr indent="0" marL="0">
-              <a:lnSpc>
-                <a:spcPts val="1900"/>
-              </a:lnSpc>
-              <a:buNone/>
-            </a:pPr>
-            <a:r>
-              <a:rPr lang="en-US" sz="1400" dirty="0">
-                <a:solidFill>
-                  <a:srgbClr val="5A5249"/>
-                </a:solidFill>
-                <a:latin typeface="メイリオ" pitchFamily="34" charset="0"/>
-                <a:ea typeface="メイリオ" pitchFamily="34" charset="-122"/>
-                <a:cs typeface="メイリオ" pitchFamily="34" charset="-120"/>
-              </a:rPr>
-              <a:t>違いは入口です。</a:t>
-            </a:r>
-            <a:endParaRPr lang="en-US" sz="1400" dirty="0"/>
-          </a:p>
-          <a:p>
-            <a:pPr indent="0" marL="0">
-              <a:lnSpc>
-                <a:spcPts val="1900"/>
-              </a:lnSpc>
-              <a:buNone/>
-            </a:pPr>
-            <a:r>
-              <a:rPr lang="en-US" sz="1400" b="1" dirty="0">
-                <a:solidFill>
-                  <a:srgbClr val="2B2620"/>
-                </a:solidFill>
-                <a:latin typeface="メイリオ" pitchFamily="34" charset="0"/>
-                <a:ea typeface="メイリオ" pitchFamily="34" charset="-122"/>
-                <a:cs typeface="メイリオ" pitchFamily="34" charset="-120"/>
-              </a:rPr>
-              <a:t>あの会社は「睡眠」から入った。私は「こころ」から入ります。</a:t>
-            </a:r>
-            <a:endParaRPr lang="en-US" sz="1400" dirty="0"/>
-          </a:p>
-        </p:txBody>
-      </p:sp>
-      <p:sp>
-        <p:nvSpPr>
-          <p:cNvPr id="9" name="Text 7"/>
-          <p:cNvSpPr txBox="1"/>
-          <p:nvPr/>
-        </p:nvSpPr>
-        <p:spPr>
-          <a:xfrm>
-            <a:off x="685800" y="5852160"/>
-            <a:ext cx="10820095" cy="457200"/>
-          </a:xfrm>
-          <a:prstGeom prst="rect">
-            <a:avLst/>
-          </a:prstGeom>
-          <a:noFill/>
-          <a:ln/>
-        </p:spPr>
-        <p:txBody>
-          <a:bodyPr wrap="square" lIns="0" tIns="0" rIns="0" bIns="0" rtlCol="0" anchor="t"/>
-          <a:lstStyle/>
-          <a:p>
-            <a:pPr indent="0" marL="0">
-              <a:lnSpc>
-                <a:spcPts val="1500"/>
-              </a:lnSpc>
-              <a:buNone/>
-            </a:pPr>
-            <a:r>
-              <a:rPr lang="en-US" sz="1100" dirty="0">
-                <a:solidFill>
-                  <a:srgbClr val="8B8175"/>
-                </a:solidFill>
-                <a:latin typeface="メイリオ" pitchFamily="34" charset="0"/>
-                <a:ea typeface="メイリオ" pitchFamily="34" charset="-122"/>
-                <a:cs typeface="メイリオ" pitchFamily="34" charset="-120"/>
-              </a:rPr>
-              <a:t>出典：株式会社丸井グループ プレスリリース（2024.11.15）／株式会社ブレインスリープ プレスリリース／ブレインスリープ コンディショニングスタジオ 公式サイト</a:t>
-            </a:r>
-            <a:endParaRPr lang="en-US" sz="1100" dirty="0"/>
           </a:p>
         </p:txBody>
       </p:sp>
@@ -8951,7 +8161,7 @@
                 <a:ea typeface="メイリオ" pitchFamily="34" charset="-122"/>
                 <a:cs typeface="メイリオ" pitchFamily="34" charset="-120"/>
               </a:rPr>
-              <a:t>2:20 → 2:55</a:t>
+              <a:t>1:55 → 2:30</a:t>
             </a:r>
             <a:endParaRPr lang="en-US" sz="1200" dirty="0"/>
           </a:p>
@@ -9056,7 +8266,7 @@
                 <a:ea typeface="メイリオ" pitchFamily="34" charset="-122"/>
                 <a:cs typeface="メイリオ" pitchFamily="34" charset="-120"/>
               </a:rPr>
-              <a:t>ACTION</a:t>
+              <a:t>CASE</a:t>
             </a:r>
             <a:endParaRPr lang="en-US" sz="1400" dirty="0"/>
           </a:p>
@@ -9095,7 +8305,7 @@
                 <a:ea typeface="メイリオ" pitchFamily="34" charset="-122"/>
                 <a:cs typeface="メイリオ" pitchFamily="34" charset="-120"/>
               </a:rPr>
-              <a:t>新規事業「ねここち」を立ち上げます</a:t>
+              <a:t>「企業 × 鍼灸」は、すでに成立しています</a:t>
             </a:r>
             <a:endParaRPr lang="en-US" sz="2800" dirty="0"/>
           </a:p>
@@ -9109,8 +8319,8 @@
         </p:nvSpPr>
         <p:spPr>
           <a:xfrm>
-            <a:off x="685800" y="1874520"/>
-            <a:ext cx="6675120" cy="3840480"/>
+            <a:off x="685800" y="1783080"/>
+            <a:ext cx="6035040" cy="3840480"/>
           </a:xfrm>
           <a:prstGeom prst="rect">
             <a:avLst/>
@@ -9130,6 +8340,23 @@
               <a:buChar char="•"/>
             </a:pPr>
             <a:r>
+              <a:rPr lang="en-US" sz="1400" dirty="0">
+                <a:solidFill>
+                  <a:srgbClr val="5A5249"/>
+                </a:solidFill>
+                <a:latin typeface="メイリオ" pitchFamily="34" charset="0"/>
+                <a:ea typeface="メイリオ" pitchFamily="34" charset="-122"/>
+                <a:cs typeface="メイリオ" pitchFamily="34" charset="-120"/>
+              </a:rPr>
+              <a:t>睡眠製品のブレインスリープ社は、</a:t>
+            </a:r>
+            <a:pPr indent="0" marL="0">
+              <a:lnSpc>
+                <a:spcPts val="2400"/>
+              </a:lnSpc>
+              <a:buNone/>
+            </a:pPr>
+            <a:r>
               <a:rPr lang="en-US" sz="1400" b="1" dirty="0">
                 <a:solidFill>
                   <a:srgbClr val="2B2620"/>
@@ -9138,7 +8365,7 @@
                 <a:ea typeface="メイリオ" pitchFamily="34" charset="-122"/>
                 <a:cs typeface="メイリオ" pitchFamily="34" charset="-120"/>
               </a:rPr>
-              <a:t>ねここち</a:t>
+              <a:t>睡眠専門の鍼灸マッサージ「コンディショニングスタジオ」</a:t>
             </a:r>
             <a:pPr indent="0" marL="0">
               <a:lnSpc>
@@ -9158,7 +8385,7 @@
                 <a:ea typeface="メイリオ" pitchFamily="34" charset="-122"/>
                 <a:cs typeface="メイリオ" pitchFamily="34" charset="-120"/>
               </a:rPr>
-              <a:t>／頭オフ事業。考えごとで止まらない頭を、強制的にオフにする時間を売ります。いま準備中です。</a:t>
+              <a:t>を自社ブランドで運営。枕の売り場ではなく、独立した鍼灸院です。</a:t>
             </a:r>
             <a:endParaRPr lang="en-US" sz="1400" dirty="0"/>
           </a:p>
@@ -9179,7 +8406,7 @@
                 <a:ea typeface="メイリオ" pitchFamily="34" charset="-122"/>
                 <a:cs typeface="メイリオ" pitchFamily="34" charset="-120"/>
               </a:rPr>
-              <a:t>扱うのは睡眠そのものではなく、</a:t>
+              <a:t>二子玉川・南青山・</a:t>
             </a:r>
             <a:pPr indent="0" marL="0">
               <a:lnSpc>
@@ -9196,7 +8423,41 @@
                 <a:ea typeface="メイリオ" pitchFamily="34" charset="-122"/>
                 <a:cs typeface="メイリオ" pitchFamily="34" charset="-120"/>
               </a:rPr>
-              <a:t>思考が止まらない状態</a:t>
+              <a:t>有楽町マルイ</a:t>
+            </a:r>
+            <a:pPr indent="0" marL="0">
+              <a:lnSpc>
+                <a:spcPts val="2400"/>
+              </a:lnSpc>
+              <a:buNone/>
+            </a:pPr>
+            <a:r>
+              <a:rPr lang="en-US" sz="1400" dirty="0">
+                <a:solidFill>
+                  <a:srgbClr val="5A5249"/>
+                </a:solidFill>
+                <a:latin typeface="メイリオ" pitchFamily="34" charset="0"/>
+                <a:ea typeface="メイリオ" pitchFamily="34" charset="-122"/>
+                <a:cs typeface="メイリオ" pitchFamily="34" charset="-120"/>
+              </a:rPr>
+              <a:t>・東京ミッドタウン八重洲の</a:t>
+            </a:r>
+            <a:pPr indent="0" marL="0">
+              <a:lnSpc>
+                <a:spcPts val="2400"/>
+              </a:lnSpc>
+              <a:buNone/>
+            </a:pPr>
+            <a:r>
+              <a:rPr lang="en-US" sz="1400" b="1" dirty="0">
+                <a:solidFill>
+                  <a:srgbClr val="2B2620"/>
+                </a:solidFill>
+                <a:latin typeface="メイリオ" pitchFamily="34" charset="0"/>
+                <a:ea typeface="メイリオ" pitchFamily="34" charset="-122"/>
+                <a:cs typeface="メイリオ" pitchFamily="34" charset="-120"/>
+              </a:rPr>
+              <a:t>4店舗</a:t>
             </a:r>
             <a:pPr indent="0" marL="0">
               <a:lnSpc>
@@ -9216,7 +8477,7 @@
                 <a:ea typeface="メイリオ" pitchFamily="34" charset="-122"/>
                 <a:cs typeface="メイリオ" pitchFamily="34" charset="-120"/>
               </a:rPr>
-              <a:t>です。眠れないの手前にある、頭が休まらない時間を扱います。</a:t>
+              <a:t>。商業施設側の丸井グループも、自らプレスリリースを出しています。</a:t>
             </a:r>
             <a:endParaRPr lang="en-US" sz="1400" dirty="0"/>
           </a:p>
@@ -9237,7 +8498,7 @@
                 <a:ea typeface="メイリオ" pitchFamily="34" charset="-122"/>
                 <a:cs typeface="メイリオ" pitchFamily="34" charset="-120"/>
               </a:rPr>
-              <a:t>施術は</a:t>
+              <a:t>オープン以来</a:t>
             </a:r>
             <a:pPr indent="0" marL="0">
               <a:lnSpc>
@@ -9254,7 +8515,75 @@
                 <a:ea typeface="メイリオ" pitchFamily="34" charset="-122"/>
                 <a:cs typeface="メイリオ" pitchFamily="34" charset="-120"/>
               </a:rPr>
-              <a:t>鍼灸師の国家資格を持つ人</a:t>
+              <a:t>累計1万人以上</a:t>
+            </a:r>
+            <a:pPr indent="0" marL="0">
+              <a:lnSpc>
+                <a:spcPts val="2400"/>
+              </a:lnSpc>
+              <a:buNone/>
+            </a:pPr>
+            <a:r>
+              <a:rPr lang="en-US" sz="1400" dirty="0">
+                <a:solidFill>
+                  <a:srgbClr val="5A5249"/>
+                </a:solidFill>
+                <a:latin typeface="メイリオ" pitchFamily="34" charset="0"/>
+                <a:ea typeface="メイリオ" pitchFamily="34" charset="-122"/>
+                <a:cs typeface="メイリオ" pitchFamily="34" charset="-120"/>
+              </a:rPr>
+              <a:t>が利用。自社研究では、1度の施術で眠りの深さが</a:t>
+            </a:r>
+            <a:pPr indent="0" marL="0">
+              <a:lnSpc>
+                <a:spcPts val="2400"/>
+              </a:lnSpc>
+              <a:buNone/>
+            </a:pPr>
+            <a:r>
+              <a:rPr lang="en-US" sz="1400" b="1" dirty="0">
+                <a:solidFill>
+                  <a:srgbClr val="2B2620"/>
+                </a:solidFill>
+                <a:latin typeface="メイリオ" pitchFamily="34" charset="0"/>
+                <a:ea typeface="メイリオ" pitchFamily="34" charset="-122"/>
+                <a:cs typeface="メイリオ" pitchFamily="34" charset="-120"/>
+              </a:rPr>
+              <a:t>35%</a:t>
+            </a:r>
+            <a:pPr indent="0" marL="0">
+              <a:lnSpc>
+                <a:spcPts val="2400"/>
+              </a:lnSpc>
+              <a:buNone/>
+            </a:pPr>
+            <a:r>
+              <a:rPr lang="en-US" sz="1400" dirty="0">
+                <a:solidFill>
+                  <a:srgbClr val="5A5249"/>
+                </a:solidFill>
+                <a:latin typeface="メイリオ" pitchFamily="34" charset="0"/>
+                <a:ea typeface="メイリオ" pitchFamily="34" charset="-122"/>
+                <a:cs typeface="メイリオ" pitchFamily="34" charset="-120"/>
+              </a:rPr>
+              <a:t>、疲労回復度が</a:t>
+            </a:r>
+            <a:pPr indent="0" marL="0">
+              <a:lnSpc>
+                <a:spcPts val="2400"/>
+              </a:lnSpc>
+              <a:buNone/>
+            </a:pPr>
+            <a:r>
+              <a:rPr lang="en-US" sz="1400" b="1" dirty="0">
+                <a:solidFill>
+                  <a:srgbClr val="2B2620"/>
+                </a:solidFill>
+                <a:latin typeface="メイリオ" pitchFamily="34" charset="0"/>
+                <a:ea typeface="メイリオ" pitchFamily="34" charset="-122"/>
+                <a:cs typeface="メイリオ" pitchFamily="34" charset="-120"/>
+              </a:rPr>
+              <a:t>59%</a:t>
             </a:r>
             <a:pPr indent="0" marL="0">
               <a:lnSpc>
@@ -9274,7 +8603,7 @@
                 <a:ea typeface="メイリオ" pitchFamily="34" charset="-122"/>
                 <a:cs typeface="メイリオ" pitchFamily="34" charset="-120"/>
               </a:rPr>
-              <a:t>が行います。医療の知識を持つ人が、治療の手前の層に関わる形です。</a:t>
+              <a:t>向上したと公表。</a:t>
             </a:r>
             <a:endParaRPr lang="en-US" sz="1400" dirty="0"/>
           </a:p>
@@ -9295,7 +8624,7 @@
                 <a:ea typeface="メイリオ" pitchFamily="34" charset="-122"/>
                 <a:cs typeface="メイリオ" pitchFamily="34" charset="-120"/>
               </a:rPr>
-              <a:t>「治療」と身構えずに入れる入口をつくり、</a:t>
+              <a:t>スタッフは全員が国家資格保有者。自社資格「スリーププランナー」も取得。</a:t>
             </a:r>
             <a:pPr indent="0" marL="0">
               <a:lnSpc>
@@ -9312,7 +8641,7 @@
                 <a:ea typeface="メイリオ" pitchFamily="34" charset="-122"/>
                 <a:cs typeface="メイリオ" pitchFamily="34" charset="-120"/>
               </a:rPr>
-              <a:t>必要な人だけを鍼灸や医療につなぐ</a:t>
+              <a:t>定額プラン</a:t>
             </a:r>
             <a:pPr indent="0" marL="0">
               <a:lnSpc>
@@ -9332,7 +8661,7 @@
                 <a:ea typeface="メイリオ" pitchFamily="34" charset="-122"/>
                 <a:cs typeface="メイリオ" pitchFamily="34" charset="-120"/>
               </a:rPr>
-              <a:t>。未病の層に継続的に関わるための事業です。</a:t>
+              <a:t>で、継続して通う前提が設計されています。</a:t>
             </a:r>
             <a:endParaRPr lang="en-US" sz="1400" dirty="0"/>
           </a:p>
@@ -9346,20 +8675,20 @@
         </p:nvSpPr>
         <p:spPr>
           <a:xfrm>
-            <a:off x="7726680" y="1783080"/>
-            <a:ext cx="3776472" cy="2286000"/>
+            <a:off x="7040880" y="1783080"/>
+            <a:ext cx="4462272" cy="3200400"/>
           </a:xfrm>
           <a:prstGeom prst="roundRect">
             <a:avLst>
-              <a:gd name="adj" fmla="val 2000"/>
+              <a:gd name="adj" fmla="val 1429"/>
             </a:avLst>
           </a:prstGeom>
           <a:solidFill>
-            <a:srgbClr val="F3E3DE"/>
+            <a:srgbClr val="FBF6EC"/>
           </a:solidFill>
           <a:ln w="9525">
             <a:solidFill>
-              <a:srgbClr val="9C5446"/>
+              <a:srgbClr val="5E7060"/>
             </a:solidFill>
             <a:prstDash val="solid"/>
           </a:ln>
@@ -9373,63 +8702,115 @@
         </p:nvSpPr>
         <p:spPr>
           <a:xfrm>
-            <a:off x="7726680" y="2011680"/>
-            <a:ext cx="3776472" cy="274320"/>
-          </a:xfrm>
-          <a:prstGeom prst="rect">
-            <a:avLst/>
-          </a:prstGeom>
-          <a:noFill/>
-          <a:ln/>
-        </p:spPr>
-        <p:txBody>
-          <a:bodyPr wrap="square" lIns="0" tIns="0" rIns="0" bIns="0" rtlCol="0" anchor="ctr"/>
-          <a:lstStyle/>
-          <a:p>
-            <a:pPr algn="ctr" indent="0" marL="0">
-              <a:buNone/>
-            </a:pPr>
-            <a:r>
-              <a:rPr lang="en-US" sz="1400" b="1" spc="300" kern="0" dirty="0">
-                <a:solidFill>
-                  <a:srgbClr val="9C5446"/>
-                </a:solidFill>
-                <a:latin typeface="メイリオ" pitchFamily="34" charset="0"/>
-                <a:ea typeface="メイリオ" pitchFamily="34" charset="-122"/>
-                <a:cs typeface="メイリオ" pitchFamily="34" charset="-120"/>
-              </a:rPr>
-              <a:t>1店舗あたり</a:t>
+            <a:off x="7315200" y="1984248"/>
+            <a:ext cx="3913632" cy="237744"/>
+          </a:xfrm>
+          <a:prstGeom prst="rect">
+            <a:avLst/>
+          </a:prstGeom>
+          <a:noFill/>
+          <a:ln/>
+        </p:spPr>
+        <p:txBody>
+          <a:bodyPr wrap="square" lIns="0" tIns="0" rIns="0" bIns="0" rtlCol="0" anchor="ctr"/>
+          <a:lstStyle/>
+          <a:p>
+            <a:pPr indent="0" marL="0">
+              <a:buNone/>
+            </a:pPr>
+            <a:r>
+              <a:rPr lang="en-US" sz="1200" b="1" spc="100" kern="0" dirty="0">
+                <a:solidFill>
+                  <a:srgbClr val="5E7060"/>
+                </a:solidFill>
+                <a:latin typeface="メイリオ" pitchFamily="34" charset="0"/>
+                <a:ea typeface="メイリオ" pitchFamily="34" charset="-122"/>
+                <a:cs typeface="メイリオ" pitchFamily="34" charset="-120"/>
+              </a:rPr>
+              <a:t>ここから私が受け取ったこと</a:t>
+            </a:r>
+            <a:endParaRPr lang="en-US" sz="1200" dirty="0"/>
+          </a:p>
+        </p:txBody>
+      </p:sp>
+      <p:sp>
+        <p:nvSpPr>
+          <p:cNvPr id="8" name="Text 6"/>
+          <p:cNvSpPr txBox="1"/>
+          <p:nvPr/>
+        </p:nvSpPr>
+        <p:spPr>
+          <a:xfrm>
+            <a:off x="7315200" y="2295144"/>
+            <a:ext cx="3913632" cy="2468880"/>
+          </a:xfrm>
+          <a:prstGeom prst="rect">
+            <a:avLst/>
+          </a:prstGeom>
+          <a:noFill/>
+          <a:ln/>
+        </p:spPr>
+        <p:txBody>
+          <a:bodyPr wrap="square" lIns="0" tIns="0" rIns="0" bIns="0" rtlCol="0" anchor="t"/>
+          <a:lstStyle/>
+          <a:p>
+            <a:pPr indent="0" marL="0">
+              <a:lnSpc>
+                <a:spcPts val="1900"/>
+              </a:lnSpc>
+              <a:buNone/>
+            </a:pPr>
+            <a:r>
+              <a:rPr lang="en-US" sz="1400" dirty="0">
+                <a:solidFill>
+                  <a:srgbClr val="5A5249"/>
+                </a:solidFill>
+                <a:latin typeface="メイリオ" pitchFamily="34" charset="0"/>
+                <a:ea typeface="メイリオ" pitchFamily="34" charset="-122"/>
+                <a:cs typeface="メイリオ" pitchFamily="34" charset="-120"/>
+              </a:rPr>
+              <a:t>製品を売って終わりにせず、施術という接点で人と関わり続ける。効果を数字で示し、資格者を自社で育て、定額で通ってもらう。このあとお話しする私の事業も、同じ構造です。</a:t>
             </a:r>
             <a:endParaRPr lang="en-US" sz="1400" dirty="0"/>
           </a:p>
-        </p:txBody>
-      </p:sp>
-      <p:sp>
-        <p:nvSpPr>
-          <p:cNvPr id="8" name="Text 6"/>
-          <p:cNvSpPr txBox="1"/>
-          <p:nvPr/>
-        </p:nvSpPr>
-        <p:spPr>
-          <a:xfrm>
-            <a:off x="7726680" y="2331720"/>
-            <a:ext cx="3776472" cy="731520"/>
-          </a:xfrm>
-          <a:prstGeom prst="rect">
-            <a:avLst/>
-          </a:prstGeom>
-          <a:noFill/>
-          <a:ln/>
-        </p:spPr>
-        <p:txBody>
-          <a:bodyPr wrap="square" lIns="0" tIns="0" rIns="0" bIns="0" rtlCol="0" anchor="ctr"/>
-          <a:lstStyle/>
-          <a:p>
-            <a:pPr algn="ctr" indent="0" marL="0">
-              <a:buNone/>
-            </a:pPr>
-            <a:r>
-              <a:rPr lang="en-US" sz="3200" b="1" dirty="0">
+          <a:p>
+            <a:pPr indent="0" marL="0">
+              <a:lnSpc>
+                <a:spcPts val="1900"/>
+              </a:lnSpc>
+              <a:buNone/>
+            </a:pPr>
+            <a:endParaRPr lang="en-US" sz="1400" dirty="0"/>
+          </a:p>
+          <a:p>
+            <a:pPr indent="0" marL="0">
+              <a:lnSpc>
+                <a:spcPts val="1900"/>
+              </a:lnSpc>
+              <a:buNone/>
+            </a:pPr>
+            <a:r>
+              <a:rPr lang="en-US" sz="1400" dirty="0">
+                <a:solidFill>
+                  <a:srgbClr val="5A5249"/>
+                </a:solidFill>
+                <a:latin typeface="メイリオ" pitchFamily="34" charset="0"/>
+                <a:ea typeface="メイリオ" pitchFamily="34" charset="-122"/>
+                <a:cs typeface="メイリオ" pitchFamily="34" charset="-120"/>
+              </a:rPr>
+              <a:t>違いは入口です。</a:t>
+            </a:r>
+            <a:endParaRPr lang="en-US" sz="1400" dirty="0"/>
+          </a:p>
+          <a:p>
+            <a:pPr indent="0" marL="0">
+              <a:lnSpc>
+                <a:spcPts val="1900"/>
+              </a:lnSpc>
+              <a:buNone/>
+            </a:pPr>
+            <a:r>
+              <a:rPr lang="en-US" sz="1400" b="1" dirty="0">
                 <a:solidFill>
                   <a:srgbClr val="2B2620"/>
                 </a:solidFill>
@@ -9437,23 +8818,9 @@
                 <a:ea typeface="メイリオ" pitchFamily="34" charset="-122"/>
                 <a:cs typeface="メイリオ" pitchFamily="34" charset="-120"/>
               </a:rPr>
-              <a:t>月次利益 30</a:t>
-            </a:r>
-            <a:pPr algn="ctr" indent="0" marL="0">
-              <a:buNone/>
-            </a:pPr>
-            <a:r>
-              <a:rPr lang="en-US" sz="1800" b="1" dirty="0">
-                <a:solidFill>
-                  <a:srgbClr val="2B2620"/>
-                </a:solidFill>
-                <a:latin typeface="メイリオ" pitchFamily="34" charset="0"/>
-                <a:ea typeface="メイリオ" pitchFamily="34" charset="-122"/>
-                <a:cs typeface="メイリオ" pitchFamily="34" charset="-120"/>
-              </a:rPr>
-              <a:t>万円</a:t>
-            </a:r>
-            <a:endParaRPr lang="en-US" sz="3200" dirty="0"/>
+              <a:t>あの会社は「睡眠」から入った。私は「こころ」から入ります。</a:t>
+            </a:r>
+            <a:endParaRPr lang="en-US" sz="1400" dirty="0"/>
           </a:p>
         </p:txBody>
       </p:sp>
@@ -9465,8 +8832,8 @@
         </p:nvSpPr>
         <p:spPr>
           <a:xfrm>
-            <a:off x="8001000" y="3154680"/>
-            <a:ext cx="3227832" cy="731520"/>
+            <a:off x="685800" y="5852160"/>
+            <a:ext cx="10820095" cy="457200"/>
           </a:xfrm>
           <a:prstGeom prst="rect">
             <a:avLst/>
@@ -9478,24 +8845,24 @@
           <a:bodyPr wrap="square" lIns="0" tIns="0" rIns="0" bIns="0" rtlCol="0" anchor="t"/>
           <a:lstStyle/>
           <a:p>
-            <a:pPr algn="ctr" indent="0" marL="0">
+            <a:pPr indent="0" marL="0">
               <a:lnSpc>
-                <a:spcPts val="1600"/>
+                <a:spcPts val="1500"/>
               </a:lnSpc>
               <a:buNone/>
             </a:pPr>
             <a:r>
-              <a:rPr lang="en-US" sz="1400" dirty="0">
-                <a:solidFill>
-                  <a:srgbClr val="5A5249"/>
-                </a:solidFill>
-                <a:latin typeface="メイリオ" pitchFamily="34" charset="0"/>
-                <a:ea typeface="メイリオ" pitchFamily="34" charset="-122"/>
-                <a:cs typeface="メイリオ" pitchFamily="34" charset="-120"/>
-              </a:rPr>
-              <a:t>想定値。多店舗展開を前提に設計。</a:t>
-            </a:r>
-            <a:endParaRPr lang="en-US" sz="1400" dirty="0"/>
+              <a:rPr lang="en-US" sz="1100" dirty="0">
+                <a:solidFill>
+                  <a:srgbClr val="8B8175"/>
+                </a:solidFill>
+                <a:latin typeface="メイリオ" pitchFamily="34" charset="0"/>
+                <a:ea typeface="メイリオ" pitchFamily="34" charset="-122"/>
+                <a:cs typeface="メイリオ" pitchFamily="34" charset="-120"/>
+              </a:rPr>
+              <a:t>出典：株式会社丸井グループ プレスリリース（2024.11.15）／株式会社ブレインスリープ プレスリリース／ブレインスリープ コンディショニングスタジオ 公式サイト</a:t>
+            </a:r>
+            <a:endParaRPr lang="en-US" sz="1100" dirty="0"/>
           </a:p>
         </p:txBody>
       </p:sp>
@@ -9571,7 +8938,7 @@
                 <a:ea typeface="メイリオ" pitchFamily="34" charset="-122"/>
                 <a:cs typeface="メイリオ" pitchFamily="34" charset="-120"/>
               </a:rPr>
-              <a:t>2:55 → 3:30</a:t>
+              <a:t>2:30 → 3:05</a:t>
             </a:r>
             <a:endParaRPr lang="en-US" sz="1200" dirty="0"/>
           </a:p>
@@ -9676,7 +9043,7 @@
                 <a:ea typeface="メイリオ" pitchFamily="34" charset="-122"/>
                 <a:cs typeface="メイリオ" pitchFamily="34" charset="-120"/>
               </a:rPr>
-              <a:t>STRENGTH</a:t>
+              <a:t>ISSUE</a:t>
             </a:r>
             <a:endParaRPr lang="en-US" sz="1400" dirty="0"/>
           </a:p>
@@ -9715,7 +9082,7 @@
                 <a:ea typeface="メイリオ" pitchFamily="34" charset="-122"/>
                 <a:cs typeface="メイリオ" pitchFamily="34" charset="-120"/>
               </a:rPr>
-              <a:t>企業の新規事業に、専門家として入ってきました</a:t>
+              <a:t>これは私の実感であり、社会の数字でもあります</a:t>
             </a:r>
             <a:endParaRPr lang="en-US" sz="2800" dirty="0"/>
           </a:p>
@@ -9723,57 +9090,151 @@
       </p:sp>
       <p:sp>
         <p:nvSpPr>
-          <p:cNvPr id="5" name="Shape 3"/>
+          <p:cNvPr id="5" name="Text 3"/>
+          <p:cNvSpPr txBox="1"/>
+          <p:nvPr/>
+        </p:nvSpPr>
+        <p:spPr>
+          <a:xfrm>
+            <a:off x="685800" y="1627632"/>
+            <a:ext cx="5029200" cy="256032"/>
+          </a:xfrm>
+          <a:prstGeom prst="rect">
+            <a:avLst/>
+          </a:prstGeom>
+          <a:noFill/>
+          <a:ln/>
+        </p:spPr>
+        <p:txBody>
+          <a:bodyPr wrap="square" lIns="0" tIns="0" rIns="0" bIns="0" rtlCol="0" anchor="ctr"/>
+          <a:lstStyle/>
+          <a:p>
+            <a:pPr indent="0" marL="0">
+              <a:buNone/>
+            </a:pPr>
+            <a:r>
+              <a:rPr lang="en-US" sz="1400" b="1" spc="200" kern="0" dirty="0">
+                <a:solidFill>
+                  <a:srgbClr val="9C5446"/>
+                </a:solidFill>
+                <a:latin typeface="メイリオ" pitchFamily="34" charset="0"/>
+                <a:ea typeface="メイリオ" pitchFamily="34" charset="-122"/>
+                <a:cs typeface="メイリオ" pitchFamily="34" charset="-120"/>
+              </a:rPr>
+              <a:t>社会で起きていること</a:t>
+            </a:r>
+            <a:endParaRPr lang="en-US" sz="1400" dirty="0"/>
+          </a:p>
+        </p:txBody>
+      </p:sp>
+      <p:sp>
+        <p:nvSpPr>
+          <p:cNvPr id="6" name="Text 4"/>
+          <p:cNvSpPr txBox="1"/>
+          <p:nvPr/>
+        </p:nvSpPr>
+        <p:spPr>
+          <a:xfrm>
+            <a:off x="6309360" y="1627632"/>
+            <a:ext cx="5193792" cy="256032"/>
+          </a:xfrm>
+          <a:prstGeom prst="rect">
+            <a:avLst/>
+          </a:prstGeom>
+          <a:noFill/>
+          <a:ln/>
+        </p:spPr>
+        <p:txBody>
+          <a:bodyPr wrap="square" lIns="0" tIns="0" rIns="0" bIns="0" rtlCol="0" anchor="ctr"/>
+          <a:lstStyle/>
+          <a:p>
+            <a:pPr indent="0" marL="0">
+              <a:buNone/>
+            </a:pPr>
+            <a:r>
+              <a:rPr lang="en-US" sz="1400" b="1" spc="200" kern="0" dirty="0">
+                <a:solidFill>
+                  <a:srgbClr val="5E7060"/>
+                </a:solidFill>
+                <a:latin typeface="メイリオ" pitchFamily="34" charset="0"/>
+                <a:ea typeface="メイリオ" pitchFamily="34" charset="-122"/>
+                <a:cs typeface="メイリオ" pitchFamily="34" charset="-120"/>
+              </a:rPr>
+              <a:t>私が現場で見ていること</a:t>
+            </a:r>
+            <a:endParaRPr lang="en-US" sz="1400" dirty="0"/>
+          </a:p>
+        </p:txBody>
+      </p:sp>
+      <p:sp>
+        <p:nvSpPr>
+          <p:cNvPr id="7" name="Shape 5"/>
           <p:cNvSpPr/>
           <p:nvPr/>
         </p:nvSpPr>
         <p:spPr>
           <a:xfrm>
-            <a:off x="685800" y="1691640"/>
-            <a:ext cx="3456432" cy="2651760"/>
-          </a:xfrm>
-          <a:prstGeom prst="roundRect">
-            <a:avLst>
-              <a:gd name="adj" fmla="val 1724"/>
-            </a:avLst>
+            <a:off x="685800" y="1847088"/>
+            <a:ext cx="5029200" cy="7315"/>
+          </a:xfrm>
+          <a:prstGeom prst="rect">
+            <a:avLst/>
           </a:prstGeom>
           <a:solidFill>
-            <a:srgbClr val="FBF6EC"/>
+            <a:srgbClr val="D2C4AE"/>
           </a:solidFill>
-          <a:ln w="9525">
-            <a:solidFill>
-              <a:srgbClr val="D2C4AE"/>
-            </a:solidFill>
-            <a:prstDash val="solid"/>
-          </a:ln>
-        </p:spPr>
-      </p:sp>
-      <p:sp>
-        <p:nvSpPr>
-          <p:cNvPr id="6" name="Text 4"/>
-          <p:cNvSpPr txBox="1"/>
-          <p:nvPr/>
-        </p:nvSpPr>
-        <p:spPr>
-          <a:xfrm>
-            <a:off x="941832" y="1856232"/>
-            <a:ext cx="2944368" cy="274320"/>
-          </a:xfrm>
-          <a:prstGeom prst="rect">
-            <a:avLst/>
-          </a:prstGeom>
-          <a:noFill/>
-          <a:ln/>
-        </p:spPr>
-        <p:txBody>
-          <a:bodyPr wrap="square" lIns="0" tIns="0" rIns="0" bIns="0" rtlCol="0" anchor="ctr"/>
-          <a:lstStyle/>
-          <a:p>
-            <a:pPr indent="0" marL="0">
-              <a:buNone/>
-            </a:pPr>
-            <a:r>
-              <a:rPr lang="en-US" sz="1400" b="1" spc="100" kern="0" dirty="0">
+          <a:ln/>
+        </p:spPr>
+      </p:sp>
+      <p:sp>
+        <p:nvSpPr>
+          <p:cNvPr id="8" name="Shape 6"/>
+          <p:cNvSpPr/>
+          <p:nvPr/>
+        </p:nvSpPr>
+        <p:spPr>
+          <a:xfrm>
+            <a:off x="6309360" y="1847088"/>
+            <a:ext cx="5193792" cy="7315"/>
+          </a:xfrm>
+          <a:prstGeom prst="rect">
+            <a:avLst/>
+          </a:prstGeom>
+          <a:solidFill>
+            <a:srgbClr val="D2C4AE"/>
+          </a:solidFill>
+          <a:ln/>
+        </p:spPr>
+      </p:sp>
+      <p:sp>
+        <p:nvSpPr>
+          <p:cNvPr id="9" name="Text 7"/>
+          <p:cNvSpPr txBox="1"/>
+          <p:nvPr/>
+        </p:nvSpPr>
+        <p:spPr>
+          <a:xfrm>
+            <a:off x="685800" y="1956816"/>
+            <a:ext cx="5029200" cy="822960"/>
+          </a:xfrm>
+          <a:prstGeom prst="rect">
+            <a:avLst/>
+          </a:prstGeom>
+          <a:noFill/>
+          <a:ln/>
+        </p:spPr>
+        <p:txBody>
+          <a:bodyPr wrap="square" lIns="0" tIns="0" rIns="0" bIns="0" rtlCol="0" anchor="t"/>
+          <a:lstStyle/>
+          <a:p>
+            <a:pPr indent="0" marL="0">
+              <a:lnSpc>
+                <a:spcPts val="1800"/>
+              </a:lnSpc>
+              <a:buNone/>
+            </a:pPr>
+            <a:r>
+              <a:rPr lang="en-US" sz="1700" b="1" dirty="0">
                 <a:solidFill>
                   <a:srgbClr val="9C5446"/>
                 </a:solidFill>
@@ -9781,7 +9242,24 @@
                 <a:ea typeface="メイリオ" pitchFamily="34" charset="-122"/>
                 <a:cs typeface="メイリオ" pitchFamily="34" charset="-120"/>
               </a:rPr>
-              <a:t>パパゲーノ</a:t>
+              <a:t>約600万人　</a:t>
+            </a:r>
+            <a:pPr indent="0" marL="0">
+              <a:lnSpc>
+                <a:spcPts val="1800"/>
+              </a:lnSpc>
+              <a:buNone/>
+            </a:pPr>
+            <a:r>
+              <a:rPr lang="en-US" sz="1400" dirty="0">
+                <a:solidFill>
+                  <a:srgbClr val="2B2620"/>
+                </a:solidFill>
+                <a:latin typeface="メイリオ" pitchFamily="34" charset="0"/>
+                <a:ea typeface="メイリオ" pitchFamily="34" charset="-122"/>
+                <a:cs typeface="メイリオ" pitchFamily="34" charset="-120"/>
+              </a:rPr>
+              <a:t>精神疾患を持つ患者数。国は2024年、厚生労働白書で初めて「こころの健康」をテーマにしました。</a:t>
             </a:r>
             <a:endParaRPr lang="en-US" sz="1400" dirty="0"/>
           </a:p>
@@ -9789,14 +9267,14 @@
       </p:sp>
       <p:sp>
         <p:nvSpPr>
-          <p:cNvPr id="7" name="Text 5"/>
-          <p:cNvSpPr txBox="1"/>
-          <p:nvPr/>
-        </p:nvSpPr>
-        <p:spPr>
-          <a:xfrm>
-            <a:off x="941832" y="2185416"/>
-            <a:ext cx="2944368" cy="457200"/>
+          <p:cNvPr id="10" name="Text 8"/>
+          <p:cNvSpPr txBox="1"/>
+          <p:nvPr/>
+        </p:nvSpPr>
+        <p:spPr>
+          <a:xfrm>
+            <a:off x="6309360" y="1956816"/>
+            <a:ext cx="5193792" cy="822960"/>
           </a:xfrm>
           <a:prstGeom prst="rect">
             <a:avLst/>
@@ -9810,35 +9288,134 @@
           <a:p>
             <a:pPr indent="0" marL="0">
               <a:lnSpc>
-                <a:spcPts val="2100"/>
+                <a:spcPts val="1800"/>
               </a:lnSpc>
               <a:buNone/>
             </a:pPr>
             <a:r>
+              <a:rPr lang="en-US" sz="1400" dirty="0">
+                <a:solidFill>
+                  <a:srgbClr val="5A5249"/>
+                </a:solidFill>
+                <a:latin typeface="メイリオ" pitchFamily="34" charset="0"/>
+                <a:ea typeface="メイリオ" pitchFamily="34" charset="-122"/>
+                <a:cs typeface="メイリオ" pitchFamily="34" charset="-120"/>
+              </a:rPr>
+              <a:t>のべ20,000人を診てきて、心の不調の方が明らかに増えました。</a:t>
+            </a:r>
+            <a:endParaRPr lang="en-US" sz="1400" dirty="0"/>
+          </a:p>
+        </p:txBody>
+      </p:sp>
+      <p:sp>
+        <p:nvSpPr>
+          <p:cNvPr id="11" name="Shape 9"/>
+          <p:cNvSpPr/>
+          <p:nvPr/>
+        </p:nvSpPr>
+        <p:spPr>
+          <a:xfrm>
+            <a:off x="685800" y="2816352"/>
+            <a:ext cx="5029200" cy="7315"/>
+          </a:xfrm>
+          <a:prstGeom prst="rect">
+            <a:avLst/>
+          </a:prstGeom>
+          <a:solidFill>
+            <a:srgbClr val="D2C4AE"/>
+          </a:solidFill>
+          <a:ln/>
+        </p:spPr>
+      </p:sp>
+      <p:sp>
+        <p:nvSpPr>
+          <p:cNvPr id="12" name="Shape 10"/>
+          <p:cNvSpPr/>
+          <p:nvPr/>
+        </p:nvSpPr>
+        <p:spPr>
+          <a:xfrm>
+            <a:off x="6309360" y="2816352"/>
+            <a:ext cx="5193792" cy="7315"/>
+          </a:xfrm>
+          <a:prstGeom prst="rect">
+            <a:avLst/>
+          </a:prstGeom>
+          <a:solidFill>
+            <a:srgbClr val="D2C4AE"/>
+          </a:solidFill>
+          <a:ln/>
+        </p:spPr>
+      </p:sp>
+      <p:sp>
+        <p:nvSpPr>
+          <p:cNvPr id="13" name="Text 11"/>
+          <p:cNvSpPr txBox="1"/>
+          <p:nvPr/>
+        </p:nvSpPr>
+        <p:spPr>
+          <a:xfrm>
+            <a:off x="685800" y="2926080"/>
+            <a:ext cx="5029200" cy="822960"/>
+          </a:xfrm>
+          <a:prstGeom prst="rect">
+            <a:avLst/>
+          </a:prstGeom>
+          <a:noFill/>
+          <a:ln/>
+        </p:spPr>
+        <p:txBody>
+          <a:bodyPr wrap="square" lIns="0" tIns="0" rIns="0" bIns="0" rtlCol="0" anchor="t"/>
+          <a:lstStyle/>
+          <a:p>
+            <a:pPr indent="0" marL="0">
+              <a:lnSpc>
+                <a:spcPts val="1800"/>
+              </a:lnSpc>
+              <a:buNone/>
+            </a:pPr>
+            <a:r>
               <a:rPr lang="en-US" sz="1700" b="1" dirty="0">
                 <a:solidFill>
+                  <a:srgbClr val="9C5446"/>
+                </a:solidFill>
+                <a:latin typeface="メイリオ" pitchFamily="34" charset="0"/>
+                <a:ea typeface="メイリオ" pitchFamily="34" charset="-122"/>
+                <a:cs typeface="メイリオ" pitchFamily="34" charset="-120"/>
+              </a:rPr>
+              <a:t>2028年4月　</a:t>
+            </a:r>
+            <a:pPr indent="0" marL="0">
+              <a:lnSpc>
+                <a:spcPts val="1800"/>
+              </a:lnSpc>
+              <a:buNone/>
+            </a:pPr>
+            <a:r>
+              <a:rPr lang="en-US" sz="1400" dirty="0">
+                <a:solidFill>
                   <a:srgbClr val="2B2620"/>
                 </a:solidFill>
                 <a:latin typeface="メイリオ" pitchFamily="34" charset="0"/>
                 <a:ea typeface="メイリオ" pitchFamily="34" charset="-122"/>
                 <a:cs typeface="メイリオ" pitchFamily="34" charset="-120"/>
               </a:rPr>
-              <a:t>アンバサダー認定 第一号</a:t>
-            </a:r>
-            <a:endParaRPr lang="en-US" sz="1700" dirty="0"/>
-          </a:p>
-        </p:txBody>
-      </p:sp>
-      <p:sp>
-        <p:nvSpPr>
-          <p:cNvPr id="8" name="Text 6"/>
-          <p:cNvSpPr txBox="1"/>
-          <p:nvPr/>
-        </p:nvSpPr>
-        <p:spPr>
-          <a:xfrm>
-            <a:off x="941832" y="2697480"/>
-            <a:ext cx="2944368" cy="1444752"/>
+              <a:t>50人未満の事業場にもストレスチェックが義務化。現在の実施率は6割弱です。</a:t>
+            </a:r>
+            <a:endParaRPr lang="en-US" sz="1400" dirty="0"/>
+          </a:p>
+        </p:txBody>
+      </p:sp>
+      <p:sp>
+        <p:nvSpPr>
+          <p:cNvPr id="14" name="Text 12"/>
+          <p:cNvSpPr txBox="1"/>
+          <p:nvPr/>
+        </p:nvSpPr>
+        <p:spPr>
+          <a:xfrm>
+            <a:off x="6309360" y="2926080"/>
+            <a:ext cx="5193792" cy="822960"/>
           </a:xfrm>
           <a:prstGeom prst="rect">
             <a:avLst/>
@@ -9852,7 +9429,7 @@
           <a:p>
             <a:pPr indent="0" marL="0">
               <a:lnSpc>
-                <a:spcPts val="1700"/>
+                <a:spcPts val="1800"/>
               </a:lnSpc>
               <a:buNone/>
             </a:pPr>
@@ -9865,7 +9442,7 @@
                 <a:ea typeface="メイリオ" pitchFamily="34" charset="-122"/>
                 <a:cs typeface="メイリオ" pitchFamily="34" charset="-120"/>
               </a:rPr>
-              <a:t>就労継続支援B型への発注を通じ、精神障害のある方が担う事業に伴走。認定制度の第一号企業です。</a:t>
+              <a:t>気づいても、次に行く場所がない。精神科は予約が埋まり、新規を止める医療機関も出ています。</a:t>
             </a:r>
             <a:endParaRPr lang="en-US" sz="1400" dirty="0"/>
           </a:p>
@@ -9873,57 +9450,73 @@
       </p:sp>
       <p:sp>
         <p:nvSpPr>
-          <p:cNvPr id="9" name="Shape 7"/>
+          <p:cNvPr id="15" name="Shape 13"/>
           <p:cNvSpPr/>
           <p:nvPr/>
         </p:nvSpPr>
         <p:spPr>
           <a:xfrm>
-            <a:off x="4370832" y="1691640"/>
-            <a:ext cx="3456432" cy="2651760"/>
-          </a:xfrm>
-          <a:prstGeom prst="roundRect">
-            <a:avLst>
-              <a:gd name="adj" fmla="val 1724"/>
-            </a:avLst>
+            <a:off x="685800" y="3785616"/>
+            <a:ext cx="5029200" cy="7315"/>
+          </a:xfrm>
+          <a:prstGeom prst="rect">
+            <a:avLst/>
           </a:prstGeom>
           <a:solidFill>
-            <a:srgbClr val="FBF6EC"/>
+            <a:srgbClr val="D2C4AE"/>
           </a:solidFill>
-          <a:ln w="9525">
-            <a:solidFill>
-              <a:srgbClr val="D2C4AE"/>
-            </a:solidFill>
-            <a:prstDash val="solid"/>
-          </a:ln>
-        </p:spPr>
-      </p:sp>
-      <p:sp>
-        <p:nvSpPr>
-          <p:cNvPr id="10" name="Text 8"/>
-          <p:cNvSpPr txBox="1"/>
-          <p:nvPr/>
-        </p:nvSpPr>
-        <p:spPr>
-          <a:xfrm>
-            <a:off x="4626864" y="1856232"/>
-            <a:ext cx="2944368" cy="274320"/>
-          </a:xfrm>
-          <a:prstGeom prst="rect">
-            <a:avLst/>
-          </a:prstGeom>
-          <a:noFill/>
-          <a:ln/>
-        </p:spPr>
-        <p:txBody>
-          <a:bodyPr wrap="square" lIns="0" tIns="0" rIns="0" bIns="0" rtlCol="0" anchor="ctr"/>
-          <a:lstStyle/>
-          <a:p>
-            <a:pPr indent="0" marL="0">
-              <a:buNone/>
-            </a:pPr>
-            <a:r>
-              <a:rPr lang="en-US" sz="1400" b="1" spc="100" kern="0" dirty="0">
+          <a:ln/>
+        </p:spPr>
+      </p:sp>
+      <p:sp>
+        <p:nvSpPr>
+          <p:cNvPr id="16" name="Shape 14"/>
+          <p:cNvSpPr/>
+          <p:nvPr/>
+        </p:nvSpPr>
+        <p:spPr>
+          <a:xfrm>
+            <a:off x="6309360" y="3785616"/>
+            <a:ext cx="5193792" cy="7315"/>
+          </a:xfrm>
+          <a:prstGeom prst="rect">
+            <a:avLst/>
+          </a:prstGeom>
+          <a:solidFill>
+            <a:srgbClr val="D2C4AE"/>
+          </a:solidFill>
+          <a:ln/>
+        </p:spPr>
+      </p:sp>
+      <p:sp>
+        <p:nvSpPr>
+          <p:cNvPr id="17" name="Text 15"/>
+          <p:cNvSpPr txBox="1"/>
+          <p:nvPr/>
+        </p:nvSpPr>
+        <p:spPr>
+          <a:xfrm>
+            <a:off x="685800" y="3895344"/>
+            <a:ext cx="5029200" cy="822960"/>
+          </a:xfrm>
+          <a:prstGeom prst="rect">
+            <a:avLst/>
+          </a:prstGeom>
+          <a:noFill/>
+          <a:ln/>
+        </p:spPr>
+        <p:txBody>
+          <a:bodyPr wrap="square" lIns="0" tIns="0" rIns="0" bIns="0" rtlCol="0" anchor="t"/>
+          <a:lstStyle/>
+          <a:p>
+            <a:pPr indent="0" marL="0">
+              <a:lnSpc>
+                <a:spcPts val="1800"/>
+              </a:lnSpc>
+              <a:buNone/>
+            </a:pPr>
+            <a:r>
+              <a:rPr lang="en-US" sz="1700" b="1" dirty="0">
                 <a:solidFill>
                   <a:srgbClr val="9C5446"/>
                 </a:solidFill>
@@ -9931,7 +9524,24 @@
                 <a:ea typeface="メイリオ" pitchFamily="34" charset="-122"/>
                 <a:cs typeface="メイリオ" pitchFamily="34" charset="-120"/>
               </a:rPr>
-              <a:t>ファンコミュニケーションズ</a:t>
+              <a:t>年7.6兆円　</a:t>
+            </a:r>
+            <a:pPr indent="0" marL="0">
+              <a:lnSpc>
+                <a:spcPts val="1800"/>
+              </a:lnSpc>
+              <a:buNone/>
+            </a:pPr>
+            <a:r>
+              <a:rPr lang="en-US" sz="1400" dirty="0">
+                <a:solidFill>
+                  <a:srgbClr val="2B2620"/>
+                </a:solidFill>
+                <a:latin typeface="メイリオ" pitchFamily="34" charset="0"/>
+                <a:ea typeface="メイリオ" pitchFamily="34" charset="-122"/>
+                <a:cs typeface="メイリオ" pitchFamily="34" charset="-120"/>
+              </a:rPr>
+              <a:t>メンタル不調による経済損失。うち7.3兆円は「出勤しているのに力が出ない」分。</a:t>
             </a:r>
             <a:endParaRPr lang="en-US" sz="1400" dirty="0"/>
           </a:p>
@@ -9939,14 +9549,14 @@
       </p:sp>
       <p:sp>
         <p:nvSpPr>
-          <p:cNvPr id="11" name="Text 9"/>
-          <p:cNvSpPr txBox="1"/>
-          <p:nvPr/>
-        </p:nvSpPr>
-        <p:spPr>
-          <a:xfrm>
-            <a:off x="4626864" y="2185416"/>
-            <a:ext cx="2944368" cy="457200"/>
+          <p:cNvPr id="18" name="Text 16"/>
+          <p:cNvSpPr txBox="1"/>
+          <p:nvPr/>
+        </p:nvSpPr>
+        <p:spPr>
+          <a:xfrm>
+            <a:off x="6309360" y="3895344"/>
+            <a:ext cx="5193792" cy="822960"/>
           </a:xfrm>
           <a:prstGeom prst="rect">
             <a:avLst/>
@@ -9960,53 +9570,11 @@
           <a:p>
             <a:pPr indent="0" marL="0">
               <a:lnSpc>
-                <a:spcPts val="2100"/>
+                <a:spcPts val="1800"/>
               </a:lnSpc>
               <a:buNone/>
             </a:pPr>
             <a:r>
-              <a:rPr lang="en-US" sz="1700" b="1" dirty="0">
-                <a:solidFill>
-                  <a:srgbClr val="2B2620"/>
-                </a:solidFill>
-                <a:latin typeface="メイリオ" pitchFamily="34" charset="0"/>
-                <a:ea typeface="メイリオ" pitchFamily="34" charset="-122"/>
-                <a:cs typeface="メイリオ" pitchFamily="34" charset="-120"/>
-              </a:rPr>
-              <a:t>ThirdTalk（サードトーク）</a:t>
-            </a:r>
-            <a:endParaRPr lang="en-US" sz="1700" dirty="0"/>
-          </a:p>
-        </p:txBody>
-      </p:sp>
-      <p:sp>
-        <p:nvSpPr>
-          <p:cNvPr id="12" name="Text 10"/>
-          <p:cNvSpPr txBox="1"/>
-          <p:nvPr/>
-        </p:nvSpPr>
-        <p:spPr>
-          <a:xfrm>
-            <a:off x="4626864" y="2697480"/>
-            <a:ext cx="2944368" cy="1444752"/>
-          </a:xfrm>
-          <a:prstGeom prst="rect">
-            <a:avLst/>
-          </a:prstGeom>
-          <a:noFill/>
-          <a:ln/>
-        </p:spPr>
-        <p:txBody>
-          <a:bodyPr wrap="square" lIns="0" tIns="0" rIns="0" bIns="0" rtlCol="0" anchor="t"/>
-          <a:lstStyle/>
-          <a:p>
-            <a:pPr indent="0" marL="0">
-              <a:lnSpc>
-                <a:spcPts val="1700"/>
-              </a:lnSpc>
-              <a:buNone/>
-            </a:pPr>
-            <a:r>
               <a:rPr lang="en-US" sz="1400" dirty="0">
                 <a:solidFill>
                   <a:srgbClr val="5A5249"/>
@@ -10015,7 +9583,7 @@
                 <a:ea typeface="メイリオ" pitchFamily="34" charset="-122"/>
                 <a:cs typeface="メイリオ" pitchFamily="34" charset="-120"/>
               </a:rPr>
-              <a:t>「病院やカウンセリングに行く、その一歩手前」を想定したオンライン対話サービス。企画段階からご相談をいただきました。</a:t>
+              <a:t>休職や通院の手前で止まる方が、いちばん多い。この層は誰の担当でもありません。</a:t>
             </a:r>
             <a:endParaRPr lang="en-US" sz="1400" dirty="0"/>
           </a:p>
@@ -10023,57 +9591,30 @@
       </p:sp>
       <p:sp>
         <p:nvSpPr>
-          <p:cNvPr id="13" name="Shape 11"/>
-          <p:cNvSpPr/>
-          <p:nvPr/>
-        </p:nvSpPr>
-        <p:spPr>
-          <a:xfrm>
-            <a:off x="8055864" y="1691640"/>
-            <a:ext cx="3456432" cy="2651760"/>
-          </a:xfrm>
-          <a:prstGeom prst="roundRect">
-            <a:avLst>
-              <a:gd name="adj" fmla="val 1724"/>
-            </a:avLst>
-          </a:prstGeom>
-          <a:solidFill>
-            <a:srgbClr val="FBF6EC"/>
-          </a:solidFill>
-          <a:ln w="9525">
-            <a:solidFill>
-              <a:srgbClr val="D2C4AE"/>
-            </a:solidFill>
-            <a:prstDash val="solid"/>
-          </a:ln>
-        </p:spPr>
-      </p:sp>
-      <p:sp>
-        <p:nvSpPr>
-          <p:cNvPr id="14" name="Text 12"/>
-          <p:cNvSpPr txBox="1"/>
-          <p:nvPr/>
-        </p:nvSpPr>
-        <p:spPr>
-          <a:xfrm>
-            <a:off x="8311896" y="1856232"/>
-            <a:ext cx="2944368" cy="274320"/>
-          </a:xfrm>
-          <a:prstGeom prst="rect">
-            <a:avLst/>
-          </a:prstGeom>
-          <a:noFill/>
-          <a:ln/>
-        </p:spPr>
-        <p:txBody>
-          <a:bodyPr wrap="square" lIns="0" tIns="0" rIns="0" bIns="0" rtlCol="0" anchor="ctr"/>
-          <a:lstStyle/>
-          <a:p>
-            <a:pPr indent="0" marL="0">
-              <a:buNone/>
-            </a:pPr>
-            <a:r>
-              <a:rPr lang="en-US" sz="1400" b="1" spc="100" kern="0" dirty="0">
+          <p:cNvPr id="19" name="Text 17"/>
+          <p:cNvSpPr txBox="1"/>
+          <p:nvPr/>
+        </p:nvSpPr>
+        <p:spPr>
+          <a:xfrm>
+            <a:off x="685800" y="5120640"/>
+            <a:ext cx="10820095" cy="548640"/>
+          </a:xfrm>
+          <a:prstGeom prst="rect">
+            <a:avLst/>
+          </a:prstGeom>
+          <a:noFill/>
+          <a:ln/>
+        </p:spPr>
+        <p:txBody>
+          <a:bodyPr wrap="square" lIns="0" tIns="0" rIns="0" bIns="0" rtlCol="0" anchor="ctr"/>
+          <a:lstStyle/>
+          <a:p>
+            <a:pPr indent="0" marL="0">
+              <a:buNone/>
+            </a:pPr>
+            <a:r>
+              <a:rPr lang="en-US" sz="2400" b="1" dirty="0">
                 <a:solidFill>
                   <a:srgbClr val="9C5446"/>
                 </a:solidFill>
@@ -10081,235 +9622,9 @@
                 <a:ea typeface="メイリオ" pitchFamily="34" charset="-122"/>
                 <a:cs typeface="メイリオ" pitchFamily="34" charset="-120"/>
               </a:rPr>
-              <a:t>stand up</a:t>
-            </a:r>
-            <a:endParaRPr lang="en-US" sz="1400" dirty="0"/>
-          </a:p>
-        </p:txBody>
-      </p:sp>
-      <p:sp>
-        <p:nvSpPr>
-          <p:cNvPr id="15" name="Text 13"/>
-          <p:cNvSpPr txBox="1"/>
-          <p:nvPr/>
-        </p:nvSpPr>
-        <p:spPr>
-          <a:xfrm>
-            <a:off x="8311896" y="2185416"/>
-            <a:ext cx="2944368" cy="457200"/>
-          </a:xfrm>
-          <a:prstGeom prst="rect">
-            <a:avLst/>
-          </a:prstGeom>
-          <a:noFill/>
-          <a:ln/>
-        </p:spPr>
-        <p:txBody>
-          <a:bodyPr wrap="square" lIns="0" tIns="0" rIns="0" bIns="0" rtlCol="0" anchor="t"/>
-          <a:lstStyle/>
-          <a:p>
-            <a:pPr indent="0" marL="0">
-              <a:lnSpc>
-                <a:spcPts val="2100"/>
-              </a:lnSpc>
-              <a:buNone/>
-            </a:pPr>
-            <a:r>
-              <a:rPr lang="en-US" sz="1700" b="1" dirty="0">
-                <a:solidFill>
-                  <a:srgbClr val="2B2620"/>
-                </a:solidFill>
-                <a:latin typeface="メイリオ" pitchFamily="34" charset="0"/>
-                <a:ea typeface="メイリオ" pitchFamily="34" charset="-122"/>
-                <a:cs typeface="メイリオ" pitchFamily="34" charset="-120"/>
-              </a:rPr>
-              <a:t>アミューズメント事業</a:t>
-            </a:r>
-            <a:endParaRPr lang="en-US" sz="1700" dirty="0"/>
-          </a:p>
-        </p:txBody>
-      </p:sp>
-      <p:sp>
-        <p:nvSpPr>
-          <p:cNvPr id="16" name="Text 14"/>
-          <p:cNvSpPr txBox="1"/>
-          <p:nvPr/>
-        </p:nvSpPr>
-        <p:spPr>
-          <a:xfrm>
-            <a:off x="8311896" y="2697480"/>
-            <a:ext cx="2944368" cy="1444752"/>
-          </a:xfrm>
-          <a:prstGeom prst="rect">
-            <a:avLst/>
-          </a:prstGeom>
-          <a:noFill/>
-          <a:ln/>
-        </p:spPr>
-        <p:txBody>
-          <a:bodyPr wrap="square" lIns="0" tIns="0" rIns="0" bIns="0" rtlCol="0" anchor="t"/>
-          <a:lstStyle/>
-          <a:p>
-            <a:pPr indent="0" marL="0">
-              <a:lnSpc>
-                <a:spcPts val="1700"/>
-              </a:lnSpc>
-              <a:buNone/>
-            </a:pPr>
-            <a:r>
-              <a:rPr lang="en-US" sz="1400" dirty="0">
-                <a:solidFill>
-                  <a:srgbClr val="5A5249"/>
-                </a:solidFill>
-                <a:latin typeface="メイリオ" pitchFamily="34" charset="0"/>
-                <a:ea typeface="メイリオ" pitchFamily="34" charset="-122"/>
-                <a:cs typeface="メイリオ" pitchFamily="34" charset="-120"/>
-              </a:rPr>
-              <a:t>新規事業の立ち上げについてご相談をいただき、現在もお取引が続いています。医療以外の業種にも入っています。</a:t>
-            </a:r>
-            <a:endParaRPr lang="en-US" sz="1400" dirty="0"/>
-          </a:p>
-        </p:txBody>
-      </p:sp>
-      <p:sp>
-        <p:nvSpPr>
-          <p:cNvPr id="17" name="Shape 15"/>
-          <p:cNvSpPr/>
-          <p:nvPr/>
-        </p:nvSpPr>
-        <p:spPr>
-          <a:xfrm>
-            <a:off x="685800" y="4526280"/>
-            <a:ext cx="10820095" cy="1143000"/>
-          </a:xfrm>
-          <a:prstGeom prst="roundRect">
-            <a:avLst>
-              <a:gd name="adj" fmla="val 4000"/>
-            </a:avLst>
-          </a:prstGeom>
-          <a:solidFill>
-            <a:srgbClr val="FBF6EC"/>
-          </a:solidFill>
-          <a:ln w="9525">
-            <a:solidFill>
-              <a:srgbClr val="5E7060"/>
-            </a:solidFill>
-            <a:prstDash val="solid"/>
-          </a:ln>
-        </p:spPr>
-      </p:sp>
-      <p:sp>
-        <p:nvSpPr>
-          <p:cNvPr id="18" name="Text 16"/>
-          <p:cNvSpPr txBox="1"/>
-          <p:nvPr/>
-        </p:nvSpPr>
-        <p:spPr>
-          <a:xfrm>
-            <a:off x="960120" y="4727448"/>
-            <a:ext cx="10271455" cy="237744"/>
-          </a:xfrm>
-          <a:prstGeom prst="rect">
-            <a:avLst/>
-          </a:prstGeom>
-          <a:noFill/>
-          <a:ln/>
-        </p:spPr>
-        <p:txBody>
-          <a:bodyPr wrap="square" lIns="0" tIns="0" rIns="0" bIns="0" rtlCol="0" anchor="ctr"/>
-          <a:lstStyle/>
-          <a:p>
-            <a:pPr indent="0" marL="0">
-              <a:buNone/>
-            </a:pPr>
-            <a:r>
-              <a:rPr lang="en-US" sz="1200" b="1" spc="100" kern="0" dirty="0">
-                <a:solidFill>
-                  <a:srgbClr val="5E7060"/>
-                </a:solidFill>
-                <a:latin typeface="メイリオ" pitchFamily="34" charset="0"/>
-                <a:ea typeface="メイリオ" pitchFamily="34" charset="-122"/>
-                <a:cs typeface="メイリオ" pitchFamily="34" charset="-120"/>
-              </a:rPr>
-              <a:t>共通してやってきたこと</a:t>
-            </a:r>
-            <a:endParaRPr lang="en-US" sz="1200" dirty="0"/>
-          </a:p>
-        </p:txBody>
-      </p:sp>
-      <p:sp>
-        <p:nvSpPr>
-          <p:cNvPr id="19" name="Text 17"/>
-          <p:cNvSpPr txBox="1"/>
-          <p:nvPr/>
-        </p:nvSpPr>
-        <p:spPr>
-          <a:xfrm>
-            <a:off x="960120" y="5038344"/>
-            <a:ext cx="10271455" cy="411480"/>
-          </a:xfrm>
-          <a:prstGeom prst="rect">
-            <a:avLst/>
-          </a:prstGeom>
-          <a:noFill/>
-          <a:ln/>
-        </p:spPr>
-        <p:txBody>
-          <a:bodyPr wrap="square" lIns="0" tIns="0" rIns="0" bIns="0" rtlCol="0" anchor="t"/>
-          <a:lstStyle/>
-          <a:p>
-            <a:pPr indent="0" marL="0">
-              <a:lnSpc>
-                <a:spcPts val="1900"/>
-              </a:lnSpc>
-              <a:buNone/>
-            </a:pPr>
-            <a:r>
-              <a:rPr lang="en-US" sz="1400" dirty="0">
-                <a:solidFill>
-                  <a:srgbClr val="5A5249"/>
-                </a:solidFill>
-                <a:latin typeface="メイリオ" pitchFamily="34" charset="0"/>
-                <a:ea typeface="メイリオ" pitchFamily="34" charset="-122"/>
-                <a:cs typeface="メイリオ" pitchFamily="34" charset="-120"/>
-              </a:rPr>
-              <a:t>なかでもThirdTalkは、今日お話ししてきた</a:t>
-            </a:r>
-            <a:pPr indent="0" marL="0">
-              <a:lnSpc>
-                <a:spcPts val="1900"/>
-              </a:lnSpc>
-              <a:buNone/>
-            </a:pPr>
-            <a:r>
-              <a:rPr lang="en-US" sz="1400" b="1" dirty="0">
-                <a:solidFill>
-                  <a:srgbClr val="2B2620"/>
-                </a:solidFill>
-                <a:latin typeface="メイリオ" pitchFamily="34" charset="0"/>
-                <a:ea typeface="メイリオ" pitchFamily="34" charset="-122"/>
-                <a:cs typeface="メイリオ" pitchFamily="34" charset="-120"/>
-              </a:rPr>
-              <a:t>「病院の一歩手前」という発想を、そのまま事業にしたもの</a:t>
-            </a:r>
-            <a:pPr indent="0" marL="0">
-              <a:lnSpc>
-                <a:spcPts val="1900"/>
-              </a:lnSpc>
-              <a:buNone/>
-            </a:pPr>
-            <a:r>
-              <a:rPr lang="en-US" sz="1400" dirty="0">
-                <a:solidFill>
-                  <a:srgbClr val="5A5249"/>
-                </a:solidFill>
-                <a:latin typeface="メイリオ" pitchFamily="34" charset="0"/>
-                <a:ea typeface="メイリオ" pitchFamily="34" charset="-122"/>
-                <a:cs typeface="メイリオ" pitchFamily="34" charset="-120"/>
-              </a:rPr>
-              <a:t>でした。</a:t>
-            </a:r>
-            <a:endParaRPr lang="en-US" sz="1400" dirty="0"/>
+              <a:t>だから、未病の段階で止めておきたい。</a:t>
+            </a:r>
+            <a:endParaRPr lang="en-US" sz="2400" dirty="0"/>
           </a:p>
         </p:txBody>
       </p:sp>
@@ -10321,7 +9636,7 @@
         </p:nvSpPr>
         <p:spPr>
           <a:xfrm>
-            <a:off x="685800" y="5833872"/>
+            <a:off x="685800" y="5852160"/>
             <a:ext cx="10820095" cy="457200"/>
           </a:xfrm>
           <a:prstGeom prst="rect">
@@ -10349,7 +9664,7 @@
                 <a:ea typeface="メイリオ" pitchFamily="34" charset="-122"/>
                 <a:cs typeface="メイリオ" pitchFamily="34" charset="-120"/>
               </a:rPr>
-              <a:t>出典：株式会社ファンコミュニケーションズ ニュースリリース（2022.8.26）／株式会社パパゲーノ プレスリリース</a:t>
+              <a:t>出典：厚生労働省 患者調査／令和6年版 厚生労働白書／改正労働安全衛生法（2025年5月公布・2028年4月施行）／メンタルヘルス不調による経済損失の試算</a:t>
             </a:r>
             <a:endParaRPr lang="en-US" sz="1100" dirty="0"/>
           </a:p>
@@ -10427,7 +9742,7 @@
                 <a:ea typeface="メイリオ" pitchFamily="34" charset="-122"/>
                 <a:cs typeface="メイリオ" pitchFamily="34" charset="-120"/>
               </a:rPr>
-              <a:t>3:30 → 4:10</a:t>
+              <a:t>3:05 → 3:50</a:t>
             </a:r>
             <a:endParaRPr lang="en-US" sz="1200" dirty="0"/>
           </a:p>
@@ -10447,7 +9762,7 @@
     <p:bg>
       <p:bgPr>
         <a:solidFill>
-          <a:srgbClr val="2B2620"/>
+          <a:srgbClr val="F3EADB"/>
         </a:solidFill>
       </p:bgPr>
     </p:bg>
@@ -10480,7 +9795,7 @@
             <a:avLst/>
           </a:prstGeom>
           <a:solidFill>
-            <a:srgbClr val="C97B68"/>
+            <a:srgbClr val="9C5446"/>
           </a:solidFill>
           <a:ln/>
         </p:spPr>
@@ -10512,7 +9827,7 @@
             <a:r>
               <a:rPr lang="en-US" sz="1400" b="1" spc="200" kern="0" dirty="0">
                 <a:solidFill>
-                  <a:srgbClr val="C97B68"/>
+                  <a:srgbClr val="9C5446"/>
                 </a:solidFill>
                 <a:latin typeface="メイリオ" pitchFamily="34" charset="0"/>
                 <a:ea typeface="メイリオ" pitchFamily="34" charset="-122"/>
@@ -10526,7 +9841,7 @@
             <a:r>
               <a:rPr lang="en-US" sz="1400" spc="300" kern="0" dirty="0">
                 <a:solidFill>
-                  <a:srgbClr val="BDB2A2"/>
+                  <a:srgbClr val="8B8175"/>
                 </a:solidFill>
                 <a:latin typeface="メイリオ" pitchFamily="34" charset="0"/>
                 <a:ea typeface="メイリオ" pitchFamily="34" charset="-122"/>
@@ -10565,7 +9880,7 @@
             <a:r>
               <a:rPr lang="en-US" sz="2800" b="1" spc="100" kern="0" dirty="0">
                 <a:solidFill>
-                  <a:srgbClr val="F3ECE0"/>
+                  <a:srgbClr val="2B2620"/>
                 </a:solidFill>
                 <a:latin typeface="メイリオ" pitchFamily="34" charset="0"/>
                 <a:ea typeface="メイリオ" pitchFamily="34" charset="-122"/>
@@ -10604,7 +9919,7 @@
             <a:r>
               <a:rPr lang="en-US" sz="1600" b="1" dirty="0">
                 <a:solidFill>
-                  <a:srgbClr val="C97B68"/>
+                  <a:srgbClr val="9C5446"/>
                 </a:solidFill>
                 <a:latin typeface="メイリオ" pitchFamily="34" charset="0"/>
                 <a:ea typeface="メイリオ" pitchFamily="34" charset="-122"/>
@@ -10646,7 +9961,7 @@
             <a:r>
               <a:rPr lang="en-US" sz="1400" dirty="0">
                 <a:solidFill>
-                  <a:srgbClr val="F3ECE0"/>
+                  <a:srgbClr val="2B2620"/>
                 </a:solidFill>
                 <a:latin typeface="メイリオ" pitchFamily="34" charset="0"/>
                 <a:ea typeface="メイリオ" pitchFamily="34" charset="-122"/>
@@ -10685,7 +10000,7 @@
             <a:r>
               <a:rPr lang="en-US" sz="1600" b="1" dirty="0">
                 <a:solidFill>
-                  <a:srgbClr val="C97B68"/>
+                  <a:srgbClr val="9C5446"/>
                 </a:solidFill>
                 <a:latin typeface="メイリオ" pitchFamily="34" charset="0"/>
                 <a:ea typeface="メイリオ" pitchFamily="34" charset="-122"/>
@@ -10727,7 +10042,7 @@
             <a:r>
               <a:rPr lang="en-US" sz="1400" dirty="0">
                 <a:solidFill>
-                  <a:srgbClr val="F3ECE0"/>
+                  <a:srgbClr val="2B2620"/>
                 </a:solidFill>
                 <a:latin typeface="メイリオ" pitchFamily="34" charset="0"/>
                 <a:ea typeface="メイリオ" pitchFamily="34" charset="-122"/>
@@ -10766,7 +10081,7 @@
             <a:r>
               <a:rPr lang="en-US" sz="1600" b="1" dirty="0">
                 <a:solidFill>
-                  <a:srgbClr val="C97B68"/>
+                  <a:srgbClr val="9C5446"/>
                 </a:solidFill>
                 <a:latin typeface="メイリオ" pitchFamily="34" charset="0"/>
                 <a:ea typeface="メイリオ" pitchFamily="34" charset="-122"/>
@@ -10808,7 +10123,7 @@
             <a:r>
               <a:rPr lang="en-US" sz="1400" dirty="0">
                 <a:solidFill>
-                  <a:srgbClr val="F3ECE0"/>
+                  <a:srgbClr val="2B2620"/>
                 </a:solidFill>
                 <a:latin typeface="メイリオ" pitchFamily="34" charset="0"/>
                 <a:ea typeface="メイリオ" pitchFamily="34" charset="-122"/>
@@ -10850,7 +10165,7 @@
             <a:r>
               <a:rPr lang="en-US" sz="2600" b="1" dirty="0">
                 <a:solidFill>
-                  <a:srgbClr val="F3ECE0"/>
+                  <a:srgbClr val="2B2620"/>
                 </a:solidFill>
                 <a:latin typeface="メイリオ" pitchFamily="34" charset="0"/>
                 <a:ea typeface="メイリオ" pitchFamily="34" charset="-122"/>
@@ -10870,7 +10185,7 @@
             <a:r>
               <a:rPr lang="en-US" sz="2600" b="1" dirty="0">
                 <a:solidFill>
-                  <a:srgbClr val="F3ECE0"/>
+                  <a:srgbClr val="2B2620"/>
                 </a:solidFill>
                 <a:latin typeface="メイリオ" pitchFamily="34" charset="0"/>
                 <a:ea typeface="メイリオ" pitchFamily="34" charset="-122"/>
@@ -10912,7 +10227,7 @@
             <a:r>
               <a:rPr lang="en-US" sz="1400" dirty="0">
                 <a:solidFill>
-                  <a:srgbClr val="BDB2A2"/>
+                  <a:srgbClr val="5A5249"/>
                 </a:solidFill>
                 <a:latin typeface="メイリオ" pitchFamily="34" charset="0"/>
                 <a:ea typeface="メイリオ" pitchFamily="34" charset="-122"/>
@@ -10951,7 +10266,7 @@
             <a:r>
               <a:rPr lang="en-US" sz="1200" spc="100" kern="0" dirty="0">
                 <a:solidFill>
-                  <a:srgbClr val="BDB2A2"/>
+                  <a:srgbClr val="8B8175"/>
                 </a:solidFill>
                 <a:latin typeface="メイリオ" pitchFamily="34" charset="0"/>
                 <a:ea typeface="メイリオ" pitchFamily="34" charset="-122"/>
@@ -10990,13 +10305,13 @@
             <a:r>
               <a:rPr lang="en-US" sz="1200" dirty="0">
                 <a:solidFill>
-                  <a:srgbClr val="BDB2A2"/>
-                </a:solidFill>
-                <a:latin typeface="メイリオ" pitchFamily="34" charset="0"/>
-                <a:ea typeface="メイリオ" pitchFamily="34" charset="-122"/>
-                <a:cs typeface="メイリオ" pitchFamily="34" charset="-120"/>
-              </a:rPr>
-              <a:t>4:10 → 4:30</a:t>
+                  <a:srgbClr val="8B8175"/>
+                </a:solidFill>
+                <a:latin typeface="メイリオ" pitchFamily="34" charset="0"/>
+                <a:ea typeface="メイリオ" pitchFamily="34" charset="-122"/>
+                <a:cs typeface="メイリオ" pitchFamily="34" charset="-120"/>
+              </a:rPr>
+              <a:t>3:50 → 4:10</a:t>
             </a:r>
             <a:endParaRPr lang="en-US" sz="1200" dirty="0"/>
           </a:p>
@@ -11810,7 +11125,7 @@
                 <a:ea typeface="メイリオ" pitchFamily="34" charset="-122"/>
                 <a:cs typeface="メイリオ" pitchFamily="34" charset="-120"/>
               </a:rPr>
-              <a:t>4:30 → 5:20</a:t>
+              <a:t>4:10 → 4:55</a:t>
             </a:r>
             <a:endParaRPr lang="en-US" sz="1200" dirty="0"/>
           </a:p>

--- a/proposals/米倉まな_アポプラスステーション様ご提案_導入.pptx
+++ b/proposals/米倉まな_アポプラスステーション様ご提案_導入.pptx
@@ -601,7 +601,7 @@
           <a:p>
             <a:r>
               <a:rPr lang="en-US" dirty="0"/>
-              <a:t>この種の事業には3つの壁があります。利用者が集まらない、健康情報を扱う体制がない、買い手が見つからない。御社はこの3つが最初から解けています。従業員872名という初期母集団、プライバシーマーク認定、そしてCSO・CRO事業の製薬・食品のお客様。他社が3年かけて作る前提条件を、御社は初日から持っています。そしていちばん大きいのは、これを受託試験の記録基盤に転用できることだと考えています。</a:t>
+              <a:t>この種の事業には3つの壁があります。利用者が集まらない、健康情報を扱う体制がない、買い手が見つからない。御社はこの3つが最初から解けています。従業員872名という初期母集団、プライバシーマーク認定、そしてCSO・CRO事業の製薬・食品のお客様。他社が3年かけて作る前提条件を、御社は初日から持っています。そしていちばん大きいのは、受託試験で参加者に毎日つけてもらう記録に、これがそのまま使えることです。</a:t>
             </a:r>
             <a:endParaRPr lang="en-US" dirty="0"/>
           </a:p>
@@ -2691,7 +2691,7 @@
         </p:nvSpPr>
         <p:spPr>
           <a:xfrm>
-            <a:off x="685800" y="1883664"/>
+            <a:off x="685800" y="1764792"/>
             <a:ext cx="5029200" cy="7315"/>
           </a:xfrm>
           <a:prstGeom prst="rect">
@@ -2711,7 +2711,7 @@
         </p:nvSpPr>
         <p:spPr>
           <a:xfrm>
-            <a:off x="6309360" y="1883664"/>
+            <a:off x="6309360" y="1764792"/>
             <a:ext cx="5193792" cy="7315"/>
           </a:xfrm>
           <a:prstGeom prst="rect">
@@ -2731,7 +2731,7 @@
         </p:nvSpPr>
         <p:spPr>
           <a:xfrm>
-            <a:off x="685800" y="1993392"/>
+            <a:off x="685800" y="1874520"/>
             <a:ext cx="5029200" cy="822960"/>
           </a:xfrm>
           <a:prstGeom prst="rect">
@@ -2790,7 +2790,7 @@
         </p:nvSpPr>
         <p:spPr>
           <a:xfrm>
-            <a:off x="6309360" y="1993392"/>
+            <a:off x="6309360" y="1874520"/>
             <a:ext cx="5193792" cy="822960"/>
           </a:xfrm>
           <a:prstGeom prst="rect">
@@ -2849,7 +2849,7 @@
         </p:nvSpPr>
         <p:spPr>
           <a:xfrm>
-            <a:off x="685800" y="2852928"/>
+            <a:off x="685800" y="2697480"/>
             <a:ext cx="5029200" cy="7315"/>
           </a:xfrm>
           <a:prstGeom prst="rect">
@@ -2869,7 +2869,7 @@
         </p:nvSpPr>
         <p:spPr>
           <a:xfrm>
-            <a:off x="6309360" y="2852928"/>
+            <a:off x="6309360" y="2697480"/>
             <a:ext cx="5193792" cy="7315"/>
           </a:xfrm>
           <a:prstGeom prst="rect">
@@ -2889,7 +2889,7 @@
         </p:nvSpPr>
         <p:spPr>
           <a:xfrm>
-            <a:off x="685800" y="2962656"/>
+            <a:off x="685800" y="2807208"/>
             <a:ext cx="5029200" cy="822960"/>
           </a:xfrm>
           <a:prstGeom prst="rect">
@@ -2948,7 +2948,7 @@
         </p:nvSpPr>
         <p:spPr>
           <a:xfrm>
-            <a:off x="6309360" y="2962656"/>
+            <a:off x="6309360" y="2807208"/>
             <a:ext cx="5193792" cy="822960"/>
           </a:xfrm>
           <a:prstGeom prst="rect">
@@ -3007,7 +3007,7 @@
         </p:nvSpPr>
         <p:spPr>
           <a:xfrm>
-            <a:off x="685800" y="3822192"/>
+            <a:off x="685800" y="3630168"/>
             <a:ext cx="5029200" cy="7315"/>
           </a:xfrm>
           <a:prstGeom prst="rect">
@@ -3027,7 +3027,7 @@
         </p:nvSpPr>
         <p:spPr>
           <a:xfrm>
-            <a:off x="6309360" y="3822192"/>
+            <a:off x="6309360" y="3630168"/>
             <a:ext cx="5193792" cy="7315"/>
           </a:xfrm>
           <a:prstGeom prst="rect">
@@ -3047,7 +3047,7 @@
         </p:nvSpPr>
         <p:spPr>
           <a:xfrm>
-            <a:off x="685800" y="3931920"/>
+            <a:off x="685800" y="3739896"/>
             <a:ext cx="5029200" cy="822960"/>
           </a:xfrm>
           <a:prstGeom prst="rect">
@@ -3106,7 +3106,7 @@
         </p:nvSpPr>
         <p:spPr>
           <a:xfrm>
-            <a:off x="6309360" y="3931920"/>
+            <a:off x="6309360" y="3739896"/>
             <a:ext cx="5193792" cy="822960"/>
           </a:xfrm>
           <a:prstGeom prst="rect">
@@ -3165,24 +3165,27 @@
         </p:nvSpPr>
         <p:spPr>
           <a:xfrm>
-            <a:off x="685800" y="5120640"/>
-            <a:ext cx="10820095" cy="548640"/>
-          </a:xfrm>
-          <a:prstGeom prst="rect">
-            <a:avLst/>
-          </a:prstGeom>
-          <a:noFill/>
-          <a:ln/>
-        </p:spPr>
-        <p:txBody>
-          <a:bodyPr wrap="square" lIns="0" tIns="0" rIns="0" bIns="0" rtlCol="0" anchor="ctr"/>
-          <a:lstStyle/>
-          <a:p>
-            <a:pPr indent="0" marL="0">
-              <a:buNone/>
-            </a:pPr>
-            <a:r>
-              <a:rPr lang="en-US" sz="2400" b="1" dirty="0">
+            <a:off x="685800" y="4846320"/>
+            <a:ext cx="10820095" cy="1005840"/>
+          </a:xfrm>
+          <a:prstGeom prst="rect">
+            <a:avLst/>
+          </a:prstGeom>
+          <a:noFill/>
+          <a:ln/>
+        </p:spPr>
+        <p:txBody>
+          <a:bodyPr wrap="square" lIns="0" tIns="0" rIns="0" bIns="0" rtlCol="0" anchor="t"/>
+          <a:lstStyle/>
+          <a:p>
+            <a:pPr indent="0" marL="0">
+              <a:lnSpc>
+                <a:spcPts val="3400"/>
+              </a:lnSpc>
+              <a:buNone/>
+            </a:pPr>
+            <a:r>
+              <a:rPr lang="en-US" sz="2200" b="1" dirty="0">
                 <a:solidFill>
                   <a:srgbClr val="9C5446"/>
                 </a:solidFill>
@@ -3190,9 +3193,9 @@
                 <a:ea typeface="メイリオ" pitchFamily="34" charset="-122"/>
                 <a:cs typeface="メイリオ" pitchFamily="34" charset="-120"/>
               </a:rPr>
-              <a:t>いちばん大きいのは、受託試験の記録基盤に転用できることです。</a:t>
-            </a:r>
-            <a:endParaRPr lang="en-US" sz="2400" dirty="0"/>
+              <a:t>いちばん大きいのは、受託試験で参加者に毎日つけてもらう記録に、そのまま使えることです。</a:t>
+            </a:r>
+            <a:endParaRPr lang="en-US" sz="2200" dirty="0"/>
           </a:p>
         </p:txBody>
       </p:sp>

--- a/proposals/米倉まな_アポプラスステーション様ご提案_導入.pptx
+++ b/proposals/米倉まな_アポプラスステーション様ご提案_導入.pptx
@@ -1305,7 +1305,7 @@
           <a:p>
             <a:r>
               <a:rPr lang="en-US" dirty="0"/>
-              <a:t>ここからは、私が現場で感じていることをお話しします。左が社会の数字、右が私が院で見ていることです。精神疾患の患者は約600万人、国も2024年に初めて白書のテーマにこころの健康を据えました。私の院でも、心の不調を主訴に来られる方が明らかに増えています。2028年からは50人未満の会社にもストレスチェックが義務化されます。ただ、検査で気づいても次に行く場所がない。病院はもう新規を受けきれていません。そして損失の7.6兆円のうち7.3兆円は、出勤しているのに力が出ない人の分です。この層が、いま誰の担当にもなっていない。だから私は、未病の段階で止めたいと考えています。</a:t>
+              <a:t>ここからは、私が現場で感じていることをお話しします。左が社会の数字、右が私が院で見ていることです。精神疾患の患者は約600万人、国も2024年に初めて白書のテーマにこころの健康を据えました。私の院でも、心の不調を主訴に来られる方が明らかに増えています。2028年からは50人未満の会社にもストレスチェックが義務化されます。ただ、検査で気づいても次に行く場所がない。病院はもう新規を受けきれていません。そして損失の7.6兆円のうち、休職や欠勤によるアブセンティーイズムはわずか0.3兆円です。残りの7.3兆円は、出社しているのに力が出ていないプレゼンティーイズムの分。つまり損失のほとんどは、休んでいない人が生んでいます。この層が、いま誰の担当にもなっていない。だから私は、未病の段階で止めたいと考えています。</a:t>
             </a:r>
             <a:endParaRPr lang="en-US" dirty="0"/>
           </a:p>
@@ -5606,7 +5606,7 @@
                 <a:ea typeface="メイリオ" pitchFamily="34" charset="-122"/>
                 <a:cs typeface="メイリオ" pitchFamily="34" charset="-120"/>
               </a:rPr>
-              <a:t>患者さんから、いちばん多く言われる言葉です。この「もっと早く」をなくすのが私の仕事です。</a:t>
+              <a:t>患者さんから、いちばん多く言われる言葉です。東洋医学や鍼灸という手段、未病という概念も、その一つです。この「もっと早く」をなくすのが私の仕事です。</a:t>
             </a:r>
             <a:endParaRPr lang="en-US" sz="1400" dirty="0"/>
           </a:p>
@@ -6128,7 +6128,7 @@
                 <a:ea typeface="メイリオ" pitchFamily="34" charset="-122"/>
                 <a:cs typeface="メイリオ" pitchFamily="34" charset="-120"/>
               </a:rPr>
-              <a:t>傾聴を学ぶ鍼灸師のオンラインサロンを2020年から主宰。2025年からは施術者の育成事業も開始しました。</a:t>
+              <a:t>傾聴を学ぶ鍼灸師のオンラインサロンを2020年から主宰。2025年からは施術者の育成事業も開始しました</a:t>
             </a:r>
             <a:endParaRPr lang="en-US" sz="1400" dirty="0"/>
           </a:p>
@@ -6278,7 +6278,7 @@
                 <a:ea typeface="メイリオ" pitchFamily="34" charset="-122"/>
                 <a:cs typeface="メイリオ" pitchFamily="34" charset="-120"/>
               </a:rPr>
-              <a:t>全日本鍼灸学会・日本うつ病学会で発表し、日本精神神経学会にも登壇。理化学研究所や大学との共同研究に参画。</a:t>
+              <a:t>全日本鍼灸学会・日本うつ病学会で発表し、日本東洋医学会、日本精神神経学会にも招待講演にて登壇。理化学研究所や大学との共同研究に参画。</a:t>
             </a:r>
             <a:endParaRPr lang="en-US" sz="1400" dirty="0"/>
           </a:p>
@@ -6493,7 +6493,7 @@
                 <a:ea typeface="メイリオ" pitchFamily="34" charset="-122"/>
                 <a:cs typeface="メイリオ" pitchFamily="34" charset="-120"/>
               </a:rPr>
-              <a:t>3学会</a:t>
+              <a:t>4学会</a:t>
             </a:r>
             <a:endParaRPr lang="en-US" sz="2600" dirty="0"/>
           </a:p>
@@ -8821,7 +8821,7 @@
                 <a:ea typeface="メイリオ" pitchFamily="34" charset="-122"/>
                 <a:cs typeface="メイリオ" pitchFamily="34" charset="-120"/>
               </a:rPr>
-              <a:t>あの会社は「睡眠」から入った。私は「こころ」から入ります。</a:t>
+              <a:t>ブレインスリープは「睡眠」から入った。私は「こころ」から入ります。</a:t>
             </a:r>
             <a:endParaRPr lang="en-US" sz="1400" dirty="0"/>
           </a:p>
@@ -9177,7 +9177,7 @@
         </p:nvSpPr>
         <p:spPr>
           <a:xfrm>
-            <a:off x="685800" y="1847088"/>
+            <a:off x="685800" y="1792224"/>
             <a:ext cx="5029200" cy="7315"/>
           </a:xfrm>
           <a:prstGeom prst="rect">
@@ -9197,7 +9197,7 @@
         </p:nvSpPr>
         <p:spPr>
           <a:xfrm>
-            <a:off x="6309360" y="1847088"/>
+            <a:off x="6309360" y="1792224"/>
             <a:ext cx="5193792" cy="7315"/>
           </a:xfrm>
           <a:prstGeom prst="rect">
@@ -9217,8 +9217,8 @@
         </p:nvSpPr>
         <p:spPr>
           <a:xfrm>
-            <a:off x="685800" y="1956816"/>
-            <a:ext cx="5029200" cy="822960"/>
+            <a:off x="685800" y="1920240"/>
+            <a:ext cx="5029200" cy="1005840"/>
           </a:xfrm>
           <a:prstGeom prst="rect">
             <a:avLst/>
@@ -9232,7 +9232,7 @@
           <a:p>
             <a:pPr indent="0" marL="0">
               <a:lnSpc>
-                <a:spcPts val="1800"/>
+                <a:spcPts val="2200"/>
               </a:lnSpc>
               <a:buNone/>
             </a:pPr>
@@ -9249,7 +9249,7 @@
             </a:r>
             <a:pPr indent="0" marL="0">
               <a:lnSpc>
-                <a:spcPts val="1800"/>
+                <a:spcPts val="2200"/>
               </a:lnSpc>
               <a:buNone/>
             </a:pPr>
@@ -9262,7 +9262,7 @@
                 <a:ea typeface="メイリオ" pitchFamily="34" charset="-122"/>
                 <a:cs typeface="メイリオ" pitchFamily="34" charset="-120"/>
               </a:rPr>
-              <a:t>精神疾患を持つ患者数。国は2024年、厚生労働白書で初めて「こころの健康」をテーマにしました。</a:t>
+              <a:t>精神疾患を持つ患者数。国は2024年、厚生労働白書で初めて「こころの健康」をテーマに。</a:t>
             </a:r>
             <a:endParaRPr lang="en-US" sz="1400" dirty="0"/>
           </a:p>
@@ -9276,8 +9276,8 @@
         </p:nvSpPr>
         <p:spPr>
           <a:xfrm>
-            <a:off x="6309360" y="1956816"/>
-            <a:ext cx="5193792" cy="822960"/>
+            <a:off x="6309360" y="1920240"/>
+            <a:ext cx="5193792" cy="960120"/>
           </a:xfrm>
           <a:prstGeom prst="rect">
             <a:avLst/>
@@ -9291,7 +9291,7 @@
           <a:p>
             <a:pPr indent="0" marL="0">
               <a:lnSpc>
-                <a:spcPts val="1800"/>
+                <a:spcPts val="2200"/>
               </a:lnSpc>
               <a:buNone/>
             </a:pPr>
@@ -9318,7 +9318,7 @@
         </p:nvSpPr>
         <p:spPr>
           <a:xfrm>
-            <a:off x="685800" y="2816352"/>
+            <a:off x="685800" y="2843784"/>
             <a:ext cx="5029200" cy="7315"/>
           </a:xfrm>
           <a:prstGeom prst="rect">
@@ -9338,7 +9338,7 @@
         </p:nvSpPr>
         <p:spPr>
           <a:xfrm>
-            <a:off x="6309360" y="2816352"/>
+            <a:off x="6309360" y="2843784"/>
             <a:ext cx="5193792" cy="7315"/>
           </a:xfrm>
           <a:prstGeom prst="rect">
@@ -9358,8 +9358,8 @@
         </p:nvSpPr>
         <p:spPr>
           <a:xfrm>
-            <a:off x="685800" y="2926080"/>
-            <a:ext cx="5029200" cy="822960"/>
+            <a:off x="685800" y="2971800"/>
+            <a:ext cx="5029200" cy="1005840"/>
           </a:xfrm>
           <a:prstGeom prst="rect">
             <a:avLst/>
@@ -9373,7 +9373,7 @@
           <a:p>
             <a:pPr indent="0" marL="0">
               <a:lnSpc>
-                <a:spcPts val="1800"/>
+                <a:spcPts val="2200"/>
               </a:lnSpc>
               <a:buNone/>
             </a:pPr>
@@ -9390,7 +9390,7 @@
             </a:r>
             <a:pPr indent="0" marL="0">
               <a:lnSpc>
-                <a:spcPts val="1800"/>
+                <a:spcPts val="2200"/>
               </a:lnSpc>
               <a:buNone/>
             </a:pPr>
@@ -9417,8 +9417,8 @@
         </p:nvSpPr>
         <p:spPr>
           <a:xfrm>
-            <a:off x="6309360" y="2926080"/>
-            <a:ext cx="5193792" cy="822960"/>
+            <a:off x="6309360" y="2971800"/>
+            <a:ext cx="5193792" cy="960120"/>
           </a:xfrm>
           <a:prstGeom prst="rect">
             <a:avLst/>
@@ -9432,7 +9432,7 @@
           <a:p>
             <a:pPr indent="0" marL="0">
               <a:lnSpc>
-                <a:spcPts val="1800"/>
+                <a:spcPts val="2200"/>
               </a:lnSpc>
               <a:buNone/>
             </a:pPr>
@@ -9459,7 +9459,7 @@
         </p:nvSpPr>
         <p:spPr>
           <a:xfrm>
-            <a:off x="685800" y="3785616"/>
+            <a:off x="685800" y="3895344"/>
             <a:ext cx="5029200" cy="7315"/>
           </a:xfrm>
           <a:prstGeom prst="rect">
@@ -9479,7 +9479,7 @@
         </p:nvSpPr>
         <p:spPr>
           <a:xfrm>
-            <a:off x="6309360" y="3785616"/>
+            <a:off x="6309360" y="3895344"/>
             <a:ext cx="5193792" cy="7315"/>
           </a:xfrm>
           <a:prstGeom prst="rect">
@@ -9499,8 +9499,8 @@
         </p:nvSpPr>
         <p:spPr>
           <a:xfrm>
-            <a:off x="685800" y="3895344"/>
-            <a:ext cx="5029200" cy="822960"/>
+            <a:off x="685800" y="4023360"/>
+            <a:ext cx="5029200" cy="1005840"/>
           </a:xfrm>
           <a:prstGeom prst="rect">
             <a:avLst/>
@@ -9514,7 +9514,7 @@
           <a:p>
             <a:pPr indent="0" marL="0">
               <a:lnSpc>
-                <a:spcPts val="1800"/>
+                <a:spcPts val="2200"/>
               </a:lnSpc>
               <a:buNone/>
             </a:pPr>
@@ -9531,7 +9531,7 @@
             </a:r>
             <a:pPr indent="0" marL="0">
               <a:lnSpc>
-                <a:spcPts val="1800"/>
+                <a:spcPts val="2200"/>
               </a:lnSpc>
               <a:buNone/>
             </a:pPr>
@@ -9544,7 +9544,7 @@
                 <a:ea typeface="メイリオ" pitchFamily="34" charset="-122"/>
                 <a:cs typeface="メイリオ" pitchFamily="34" charset="-120"/>
               </a:rPr>
-              <a:t>メンタル不調による経済損失。うち7.3兆円は「出勤しているのに力が出ない」分。</a:t>
+              <a:t>メンタル不調による経済損失。休職・欠勤（アブセンティーイズム）は0.3兆円。残り7.3兆円は出社している人（プレゼンティーイズム）です。</a:t>
             </a:r>
             <a:endParaRPr lang="en-US" sz="1400" dirty="0"/>
           </a:p>
@@ -9558,8 +9558,8 @@
         </p:nvSpPr>
         <p:spPr>
           <a:xfrm>
-            <a:off x="6309360" y="3895344"/>
-            <a:ext cx="5193792" cy="822960"/>
+            <a:off x="6309360" y="4023360"/>
+            <a:ext cx="5193792" cy="960120"/>
           </a:xfrm>
           <a:prstGeom prst="rect">
             <a:avLst/>
@@ -9573,7 +9573,7 @@
           <a:p>
             <a:pPr indent="0" marL="0">
               <a:lnSpc>
-                <a:spcPts val="1800"/>
+                <a:spcPts val="2200"/>
               </a:lnSpc>
               <a:buNone/>
             </a:pPr>
@@ -9889,7 +9889,7 @@
                 <a:ea typeface="メイリオ" pitchFamily="34" charset="-122"/>
                 <a:cs typeface="メイリオ" pitchFamily="34" charset="-120"/>
               </a:rPr>
-              <a:t>正直に言うと、私1人で抱えられる量に天井があります</a:t>
+              <a:t>私の課題：私1人で抱えられる量に天井があります</a:t>
             </a:r>
             <a:endParaRPr lang="en-US" sz="2800" dirty="0"/>
           </a:p>
@@ -10236,7 +10236,7 @@
                 <a:ea typeface="メイリオ" pitchFamily="34" charset="-122"/>
                 <a:cs typeface="メイリオ" pitchFamily="34" charset="-120"/>
               </a:rPr>
-              <a:t>ここは私が最も苦手な領域であり、御社が最も強い領域だと考えています。</a:t>
+              <a:t>ここは私が最も苦手な領域であり、御社が強い領域だと考えています。</a:t>
             </a:r>
             <a:endParaRPr lang="en-US" sz="1400" dirty="0"/>
           </a:p>
@@ -10464,465 +10464,39 @@
           </a:p>
         </p:txBody>
       </p:sp>
-      <p:sp>
-        <p:nvSpPr>
-          <p:cNvPr id="5" name="Shape 3"/>
+      <p:pic>
+        <p:nvPicPr>
+          <p:cNvPr id="5" name="Image 0" descr="/home/user/manayonekura/proposals/flow.png">    </p:cNvPr>
+          <p:cNvPicPr>
+            <a:picLocks noChangeAspect="1"/>
+          </p:cNvPicPr>
+          <p:nvPr/>
+        </p:nvPicPr>
+        <p:blipFill>
+          <a:blip r:embed="rId1"/>
+          <a:stretch>
+            <a:fillRect/>
+          </a:stretch>
+        </p:blipFill>
+        <p:spPr>
+          <a:xfrm>
+            <a:off x="685800" y="1645920"/>
+            <a:ext cx="10820095" cy="2511079"/>
+          </a:xfrm>
+          <a:prstGeom prst="rect">
+            <a:avLst/>
+          </a:prstGeom>
+        </p:spPr>
+      </p:pic>
+      <p:sp>
+        <p:nvSpPr>
+          <p:cNvPr id="6" name="Shape 3"/>
           <p:cNvSpPr/>
           <p:nvPr/>
         </p:nvSpPr>
         <p:spPr>
           <a:xfrm>
-            <a:off x="685800" y="1691640"/>
-            <a:ext cx="3456432" cy="2651760"/>
-          </a:xfrm>
-          <a:prstGeom prst="roundRect">
-            <a:avLst>
-              <a:gd name="adj" fmla="val 1724"/>
-            </a:avLst>
-          </a:prstGeom>
-          <a:solidFill>
-            <a:srgbClr val="FBF6EC"/>
-          </a:solidFill>
-          <a:ln w="9525">
-            <a:solidFill>
-              <a:srgbClr val="D2C4AE"/>
-            </a:solidFill>
-            <a:prstDash val="solid"/>
-          </a:ln>
-        </p:spPr>
-      </p:sp>
-      <p:sp>
-        <p:nvSpPr>
-          <p:cNvPr id="6" name="Text 4"/>
-          <p:cNvSpPr txBox="1"/>
-          <p:nvPr/>
-        </p:nvSpPr>
-        <p:spPr>
-          <a:xfrm>
-            <a:off x="941832" y="1856232"/>
-            <a:ext cx="2944368" cy="274320"/>
-          </a:xfrm>
-          <a:prstGeom prst="rect">
-            <a:avLst/>
-          </a:prstGeom>
-          <a:noFill/>
-          <a:ln/>
-        </p:spPr>
-        <p:txBody>
-          <a:bodyPr wrap="square" lIns="0" tIns="0" rIns="0" bIns="0" rtlCol="0" anchor="ctr"/>
-          <a:lstStyle/>
-          <a:p>
-            <a:pPr indent="0" marL="0">
-              <a:buNone/>
-            </a:pPr>
-            <a:r>
-              <a:rPr lang="en-US" sz="1400" b="1" spc="100" kern="0" dirty="0">
-                <a:solidFill>
-                  <a:srgbClr val="9C5446"/>
-                </a:solidFill>
-                <a:latin typeface="メイリオ" pitchFamily="34" charset="0"/>
-                <a:ea typeface="メイリオ" pitchFamily="34" charset="-122"/>
-                <a:cs typeface="メイリオ" pitchFamily="34" charset="-120"/>
-              </a:rPr>
-              <a:t>返事 1</a:t>
-            </a:r>
-            <a:endParaRPr lang="en-US" sz="1400" dirty="0"/>
-          </a:p>
-        </p:txBody>
-      </p:sp>
-      <p:sp>
-        <p:nvSpPr>
-          <p:cNvPr id="7" name="Text 5"/>
-          <p:cNvSpPr txBox="1"/>
-          <p:nvPr/>
-        </p:nvSpPr>
-        <p:spPr>
-          <a:xfrm>
-            <a:off x="941832" y="2185416"/>
-            <a:ext cx="2944368" cy="457200"/>
-          </a:xfrm>
-          <a:prstGeom prst="rect">
-            <a:avLst/>
-          </a:prstGeom>
-          <a:noFill/>
-          <a:ln/>
-        </p:spPr>
-        <p:txBody>
-          <a:bodyPr wrap="square" lIns="0" tIns="0" rIns="0" bIns="0" rtlCol="0" anchor="t"/>
-          <a:lstStyle/>
-          <a:p>
-            <a:pPr indent="0" marL="0">
-              <a:lnSpc>
-                <a:spcPts val="2100"/>
-              </a:lnSpc>
-              <a:buNone/>
-            </a:pPr>
-            <a:r>
-              <a:rPr lang="en-US" sz="1700" b="1" dirty="0">
-                <a:solidFill>
-                  <a:srgbClr val="2B2620"/>
-                </a:solidFill>
-                <a:latin typeface="メイリオ" pitchFamily="34" charset="0"/>
-                <a:ea typeface="メイリオ" pitchFamily="34" charset="-122"/>
-                <a:cs typeface="メイリオ" pitchFamily="34" charset="-120"/>
-              </a:rPr>
-              <a:t>いま、同じ人がいます</a:t>
-            </a:r>
-            <a:endParaRPr lang="en-US" sz="1700" dirty="0"/>
-          </a:p>
-        </p:txBody>
-      </p:sp>
-      <p:sp>
-        <p:nvSpPr>
-          <p:cNvPr id="8" name="Text 6"/>
-          <p:cNvSpPr txBox="1"/>
-          <p:nvPr/>
-        </p:nvSpPr>
-        <p:spPr>
-          <a:xfrm>
-            <a:off x="941832" y="2697480"/>
-            <a:ext cx="2944368" cy="1444752"/>
-          </a:xfrm>
-          <a:prstGeom prst="rect">
-            <a:avLst/>
-          </a:prstGeom>
-          <a:noFill/>
-          <a:ln/>
-        </p:spPr>
-        <p:txBody>
-          <a:bodyPr wrap="square" lIns="0" tIns="0" rIns="0" bIns="0" rtlCol="0" anchor="t"/>
-          <a:lstStyle/>
-          <a:p>
-            <a:pPr indent="0" marL="0">
-              <a:lnSpc>
-                <a:spcPts val="1700"/>
-              </a:lnSpc>
-              <a:buNone/>
-            </a:pPr>
-            <a:r>
-              <a:rPr lang="en-US" sz="1400" dirty="0">
-                <a:solidFill>
-                  <a:srgbClr val="5A5249"/>
-                </a:solidFill>
-                <a:latin typeface="メイリオ" pitchFamily="34" charset="0"/>
-                <a:ea typeface="メイリオ" pitchFamily="34" charset="-122"/>
-                <a:cs typeface="メイリオ" pitchFamily="34" charset="-120"/>
-              </a:rPr>
-              <a:t>「白露のいま、同じ〈だるさ＋冷え〉を記録している人が、関東の40代に128人います」。同じ節気・年代・地域の人数を返します。</a:t>
-            </a:r>
-            <a:endParaRPr lang="en-US" sz="1400" dirty="0"/>
-          </a:p>
-        </p:txBody>
-      </p:sp>
-      <p:sp>
-        <p:nvSpPr>
-          <p:cNvPr id="9" name="Shape 7"/>
-          <p:cNvSpPr/>
-          <p:nvPr/>
-        </p:nvSpPr>
-        <p:spPr>
-          <a:xfrm>
-            <a:off x="4370832" y="1691640"/>
-            <a:ext cx="3456432" cy="2651760"/>
-          </a:xfrm>
-          <a:prstGeom prst="roundRect">
-            <a:avLst>
-              <a:gd name="adj" fmla="val 1724"/>
-            </a:avLst>
-          </a:prstGeom>
-          <a:solidFill>
-            <a:srgbClr val="FBF6EC"/>
-          </a:solidFill>
-          <a:ln w="9525">
-            <a:solidFill>
-              <a:srgbClr val="D2C4AE"/>
-            </a:solidFill>
-            <a:prstDash val="solid"/>
-          </a:ln>
-        </p:spPr>
-      </p:sp>
-      <p:sp>
-        <p:nvSpPr>
-          <p:cNvPr id="10" name="Text 8"/>
-          <p:cNvSpPr txBox="1"/>
-          <p:nvPr/>
-        </p:nvSpPr>
-        <p:spPr>
-          <a:xfrm>
-            <a:off x="4626864" y="1856232"/>
-            <a:ext cx="2944368" cy="274320"/>
-          </a:xfrm>
-          <a:prstGeom prst="rect">
-            <a:avLst/>
-          </a:prstGeom>
-          <a:noFill/>
-          <a:ln/>
-        </p:spPr>
-        <p:txBody>
-          <a:bodyPr wrap="square" lIns="0" tIns="0" rIns="0" bIns="0" rtlCol="0" anchor="ctr"/>
-          <a:lstStyle/>
-          <a:p>
-            <a:pPr indent="0" marL="0">
-              <a:buNone/>
-            </a:pPr>
-            <a:r>
-              <a:rPr lang="en-US" sz="1400" b="1" spc="100" kern="0" dirty="0">
-                <a:solidFill>
-                  <a:srgbClr val="9C5446"/>
-                </a:solidFill>
-                <a:latin typeface="メイリオ" pitchFamily="34" charset="0"/>
-                <a:ea typeface="メイリオ" pitchFamily="34" charset="-122"/>
-                <a:cs typeface="メイリオ" pitchFamily="34" charset="-120"/>
-              </a:rPr>
-              <a:t>返事 2</a:t>
-            </a:r>
-            <a:endParaRPr lang="en-US" sz="1400" dirty="0"/>
-          </a:p>
-        </p:txBody>
-      </p:sp>
-      <p:sp>
-        <p:nvSpPr>
-          <p:cNvPr id="11" name="Text 9"/>
-          <p:cNvSpPr txBox="1"/>
-          <p:nvPr/>
-        </p:nvSpPr>
-        <p:spPr>
-          <a:xfrm>
-            <a:off x="4626864" y="2185416"/>
-            <a:ext cx="2944368" cy="457200"/>
-          </a:xfrm>
-          <a:prstGeom prst="rect">
-            <a:avLst/>
-          </a:prstGeom>
-          <a:noFill/>
-          <a:ln/>
-        </p:spPr>
-        <p:txBody>
-          <a:bodyPr wrap="square" lIns="0" tIns="0" rIns="0" bIns="0" rtlCol="0" anchor="t"/>
-          <a:lstStyle/>
-          <a:p>
-            <a:pPr indent="0" marL="0">
-              <a:lnSpc>
-                <a:spcPts val="2100"/>
-              </a:lnSpc>
-              <a:buNone/>
-            </a:pPr>
-            <a:r>
-              <a:rPr lang="en-US" sz="1700" b="1" dirty="0">
-                <a:solidFill>
-                  <a:srgbClr val="2B2620"/>
-                </a:solidFill>
-                <a:latin typeface="メイリオ" pitchFamily="34" charset="0"/>
-                <a:ea typeface="メイリオ" pitchFamily="34" charset="-122"/>
-                <a:cs typeface="メイリオ" pitchFamily="34" charset="-120"/>
-              </a:rPr>
-              <a:t>去年の今頃</a:t>
-            </a:r>
-            <a:endParaRPr lang="en-US" sz="1700" dirty="0"/>
-          </a:p>
-        </p:txBody>
-      </p:sp>
-      <p:sp>
-        <p:nvSpPr>
-          <p:cNvPr id="12" name="Text 10"/>
-          <p:cNvSpPr txBox="1"/>
-          <p:nvPr/>
-        </p:nvSpPr>
-        <p:spPr>
-          <a:xfrm>
-            <a:off x="4626864" y="2697480"/>
-            <a:ext cx="2944368" cy="1444752"/>
-          </a:xfrm>
-          <a:prstGeom prst="rect">
-            <a:avLst/>
-          </a:prstGeom>
-          <a:noFill/>
-          <a:ln/>
-        </p:spPr>
-        <p:txBody>
-          <a:bodyPr wrap="square" lIns="0" tIns="0" rIns="0" bIns="0" rtlCol="0" anchor="t"/>
-          <a:lstStyle/>
-          <a:p>
-            <a:pPr indent="0" marL="0">
-              <a:lnSpc>
-                <a:spcPts val="1700"/>
-              </a:lnSpc>
-              <a:buNone/>
-            </a:pPr>
-            <a:r>
-              <a:rPr lang="en-US" sz="1400" dirty="0">
-                <a:solidFill>
-                  <a:srgbClr val="5A5249"/>
-                </a:solidFill>
-                <a:latin typeface="メイリオ" pitchFamily="34" charset="0"/>
-                <a:ea typeface="メイリオ" pitchFamily="34" charset="-122"/>
-                <a:cs typeface="メイリオ" pitchFamily="34" charset="-120"/>
-              </a:rPr>
-              <a:t>「去年の白露も、3日続けてだるさを記録していました」。比較の単位を年ではなく節気に置くので、3か月で6回分貯まります。</a:t>
-            </a:r>
-            <a:endParaRPr lang="en-US" sz="1400" dirty="0"/>
-          </a:p>
-        </p:txBody>
-      </p:sp>
-      <p:sp>
-        <p:nvSpPr>
-          <p:cNvPr id="13" name="Shape 11"/>
-          <p:cNvSpPr/>
-          <p:nvPr/>
-        </p:nvSpPr>
-        <p:spPr>
-          <a:xfrm>
-            <a:off x="8055864" y="1691640"/>
-            <a:ext cx="3456432" cy="2651760"/>
-          </a:xfrm>
-          <a:prstGeom prst="roundRect">
-            <a:avLst>
-              <a:gd name="adj" fmla="val 1724"/>
-            </a:avLst>
-          </a:prstGeom>
-          <a:solidFill>
-            <a:srgbClr val="FBF6EC"/>
-          </a:solidFill>
-          <a:ln w="9525">
-            <a:solidFill>
-              <a:srgbClr val="D2C4AE"/>
-            </a:solidFill>
-            <a:prstDash val="solid"/>
-          </a:ln>
-        </p:spPr>
-      </p:sp>
-      <p:sp>
-        <p:nvSpPr>
-          <p:cNvPr id="14" name="Text 12"/>
-          <p:cNvSpPr txBox="1"/>
-          <p:nvPr/>
-        </p:nvSpPr>
-        <p:spPr>
-          <a:xfrm>
-            <a:off x="8311896" y="1856232"/>
-            <a:ext cx="2944368" cy="274320"/>
-          </a:xfrm>
-          <a:prstGeom prst="rect">
-            <a:avLst/>
-          </a:prstGeom>
-          <a:noFill/>
-          <a:ln/>
-        </p:spPr>
-        <p:txBody>
-          <a:bodyPr wrap="square" lIns="0" tIns="0" rIns="0" bIns="0" rtlCol="0" anchor="ctr"/>
-          <a:lstStyle/>
-          <a:p>
-            <a:pPr indent="0" marL="0">
-              <a:buNone/>
-            </a:pPr>
-            <a:r>
-              <a:rPr lang="en-US" sz="1400" b="1" spc="100" kern="0" dirty="0">
-                <a:solidFill>
-                  <a:srgbClr val="9C5446"/>
-                </a:solidFill>
-                <a:latin typeface="メイリオ" pitchFamily="34" charset="0"/>
-                <a:ea typeface="メイリオ" pitchFamily="34" charset="-122"/>
-                <a:cs typeface="メイリオ" pitchFamily="34" charset="-120"/>
-              </a:rPr>
-              <a:t>返事 3</a:t>
-            </a:r>
-            <a:endParaRPr lang="en-US" sz="1400" dirty="0"/>
-          </a:p>
-        </p:txBody>
-      </p:sp>
-      <p:sp>
-        <p:nvSpPr>
-          <p:cNvPr id="15" name="Text 13"/>
-          <p:cNvSpPr txBox="1"/>
-          <p:nvPr/>
-        </p:nvSpPr>
-        <p:spPr>
-          <a:xfrm>
-            <a:off x="8311896" y="2185416"/>
-            <a:ext cx="2944368" cy="457200"/>
-          </a:xfrm>
-          <a:prstGeom prst="rect">
-            <a:avLst/>
-          </a:prstGeom>
-          <a:noFill/>
-          <a:ln/>
-        </p:spPr>
-        <p:txBody>
-          <a:bodyPr wrap="square" lIns="0" tIns="0" rIns="0" bIns="0" rtlCol="0" anchor="t"/>
-          <a:lstStyle/>
-          <a:p>
-            <a:pPr indent="0" marL="0">
-              <a:lnSpc>
-                <a:spcPts val="2100"/>
-              </a:lnSpc>
-              <a:buNone/>
-            </a:pPr>
-            <a:r>
-              <a:rPr lang="en-US" sz="1700" b="1" dirty="0">
-                <a:solidFill>
-                  <a:srgbClr val="2B2620"/>
-                </a:solidFill>
-                <a:latin typeface="メイリオ" pitchFamily="34" charset="0"/>
-                <a:ea typeface="メイリオ" pitchFamily="34" charset="-122"/>
-                <a:cs typeface="メイリオ" pitchFamily="34" charset="-120"/>
-              </a:rPr>
-              <a:t>崩れやすさ予測</a:t>
-            </a:r>
-            <a:endParaRPr lang="en-US" sz="1700" dirty="0"/>
-          </a:p>
-        </p:txBody>
-      </p:sp>
-      <p:sp>
-        <p:nvSpPr>
-          <p:cNvPr id="16" name="Text 14"/>
-          <p:cNvSpPr txBox="1"/>
-          <p:nvPr/>
-        </p:nvSpPr>
-        <p:spPr>
-          <a:xfrm>
-            <a:off x="8311896" y="2697480"/>
-            <a:ext cx="2944368" cy="1444752"/>
-          </a:xfrm>
-          <a:prstGeom prst="rect">
-            <a:avLst/>
-          </a:prstGeom>
-          <a:noFill/>
-          <a:ln/>
-        </p:spPr>
-        <p:txBody>
-          <a:bodyPr wrap="square" lIns="0" tIns="0" rIns="0" bIns="0" rtlCol="0" anchor="t"/>
-          <a:lstStyle/>
-          <a:p>
-            <a:pPr indent="0" marL="0">
-              <a:lnSpc>
-                <a:spcPts val="1700"/>
-              </a:lnSpc>
-              <a:buNone/>
-            </a:pPr>
-            <a:r>
-              <a:rPr lang="en-US" sz="1400" dirty="0">
-                <a:solidFill>
-                  <a:srgbClr val="5A5249"/>
-                </a:solidFill>
-                <a:latin typeface="メイリオ" pitchFamily="34" charset="0"/>
-                <a:ea typeface="メイリオ" pitchFamily="34" charset="-122"/>
-                <a:cs typeface="メイリオ" pitchFamily="34" charset="-120"/>
-              </a:rPr>
-              <a:t>気圧の低下と本人の過去パターンから「明後日は肩こりに注意」。毎日開く理由をつくります。</a:t>
-            </a:r>
-            <a:endParaRPr lang="en-US" sz="1400" dirty="0"/>
-          </a:p>
-        </p:txBody>
-      </p:sp>
-      <p:sp>
-        <p:nvSpPr>
-          <p:cNvPr id="17" name="Shape 15"/>
-          <p:cNvSpPr/>
-          <p:nvPr/>
-        </p:nvSpPr>
-        <p:spPr>
-          <a:xfrm>
-            <a:off x="685800" y="4526280"/>
+            <a:off x="685800" y="4343400"/>
             <a:ext cx="10820095" cy="1325880"/>
           </a:xfrm>
           <a:prstGeom prst="roundRect">
@@ -10943,13 +10517,13 @@
       </p:sp>
       <p:sp>
         <p:nvSpPr>
-          <p:cNvPr id="18" name="Text 16"/>
-          <p:cNvSpPr txBox="1"/>
-          <p:nvPr/>
-        </p:nvSpPr>
-        <p:spPr>
-          <a:xfrm>
-            <a:off x="960120" y="4727448"/>
+          <p:cNvPr id="7" name="Text 4"/>
+          <p:cNvSpPr txBox="1"/>
+          <p:nvPr/>
+        </p:nvSpPr>
+        <p:spPr>
+          <a:xfrm>
+            <a:off x="960120" y="4544568"/>
             <a:ext cx="10271455" cy="237744"/>
           </a:xfrm>
           <a:prstGeom prst="rect">
@@ -10982,13 +10556,13 @@
       </p:sp>
       <p:sp>
         <p:nvSpPr>
-          <p:cNvPr id="19" name="Text 17"/>
-          <p:cNvSpPr txBox="1"/>
-          <p:nvPr/>
-        </p:nvSpPr>
-        <p:spPr>
-          <a:xfrm>
-            <a:off x="960120" y="5038344"/>
+          <p:cNvPr id="8" name="Text 5"/>
+          <p:cNvSpPr txBox="1"/>
+          <p:nvPr/>
+        </p:nvSpPr>
+        <p:spPr>
+          <a:xfrm>
+            <a:off x="960120" y="4855464"/>
             <a:ext cx="10271455" cy="594360"/>
           </a:xfrm>
           <a:prstGeom prst="rect">
@@ -11008,15 +10582,15 @@
               <a:buNone/>
             </a:pPr>
             <a:r>
-              <a:rPr lang="en-US" sz="1400" dirty="0">
-                <a:solidFill>
-                  <a:srgbClr val="5A5249"/>
-                </a:solidFill>
-                <a:latin typeface="メイリオ" pitchFamily="34" charset="0"/>
-                <a:ea typeface="メイリオ" pitchFamily="34" charset="-122"/>
-                <a:cs typeface="メイリオ" pitchFamily="34" charset="-120"/>
-              </a:rPr>
-              <a:t>毎日30秒、12項目の体調記録。気・血・水・心を各3項目ずつ。</a:t>
+              <a:rPr lang="en-US" sz="1400" b="1" dirty="0">
+                <a:solidFill>
+                  <a:srgbClr val="2B2620"/>
+                </a:solidFill>
+                <a:latin typeface="メイリオ" pitchFamily="34" charset="0"/>
+                <a:ea typeface="メイリオ" pitchFamily="34" charset="-122"/>
+                <a:cs typeface="メイリオ" pitchFamily="34" charset="-120"/>
+              </a:rPr>
+              <a:t>記録して終わりにしない。返事があるから続き、続くからデータになる。</a:t>
             </a:r>
             <a:pPr indent="0" marL="0">
               <a:lnSpc>
@@ -11025,23 +10599,6 @@
               <a:buNone/>
             </a:pPr>
             <a:r>
-              <a:rPr lang="en-US" sz="1400" b="1" dirty="0">
-                <a:solidFill>
-                  <a:srgbClr val="2B2620"/>
-                </a:solidFill>
-                <a:latin typeface="メイリオ" pitchFamily="34" charset="0"/>
-                <a:ea typeface="メイリオ" pitchFamily="34" charset="-122"/>
-                <a:cs typeface="メイリオ" pitchFamily="34" charset="-120"/>
-              </a:rPr>
-              <a:t>記録して終わりにせず、必ず「返事」が返る</a:t>
-            </a:r>
-            <a:pPr indent="0" marL="0">
-              <a:lnSpc>
-                <a:spcPts val="1900"/>
-              </a:lnSpc>
-              <a:buNone/>
-            </a:pPr>
-            <a:r>
               <a:rPr lang="en-US" sz="1400" dirty="0">
                 <a:solidFill>
                   <a:srgbClr val="5A5249"/>
@@ -11050,7 +10607,7 @@
                 <a:ea typeface="メイリオ" pitchFamily="34" charset="-122"/>
                 <a:cs typeface="メイリオ" pitchFamily="34" charset="-120"/>
               </a:rPr>
-              <a:t>のが、ほかの記録アプリとの違いです。玉川大学 柴田研究室との共同提案で、私は臨床監修を担当します。</a:t>
+              <a:t>これがほかの記録アプリとの違いです。玉川大学 柴田研究室との共同提案で、私は臨床監修を担当します。</a:t>
             </a:r>
             <a:endParaRPr lang="en-US" sz="1400" dirty="0"/>
           </a:p>
@@ -11058,7 +10615,7 @@
       </p:sp>
       <p:sp>
         <p:nvSpPr>
-          <p:cNvPr id="20" name="Text 18"/>
+          <p:cNvPr id="9" name="Text 6"/>
           <p:cNvSpPr txBox="1"/>
           <p:nvPr/>
         </p:nvSpPr>
@@ -11097,7 +10654,7 @@
       </p:sp>
       <p:sp>
         <p:nvSpPr>
-          <p:cNvPr id="21" name="Text 19"/>
+          <p:cNvPr id="10" name="Text 7"/>
           <p:cNvSpPr txBox="1"/>
           <p:nvPr/>
         </p:nvSpPr>
